--- a/slides/C24_Classificação.pptx
+++ b/slides/C24_Classificação.pptx
@@ -5,10 +5,10 @@
     <p:sldMasterId id="2147483648" r:id="rId1"/>
   </p:sldMasterIdLst>
   <p:notesMasterIdLst>
-    <p:notesMasterId r:id="rId17"/>
+    <p:notesMasterId r:id="rId25"/>
   </p:notesMasterIdLst>
   <p:handoutMasterIdLst>
-    <p:handoutMasterId r:id="rId18"/>
+    <p:handoutMasterId r:id="rId26"/>
   </p:handoutMasterIdLst>
   <p:sldIdLst>
     <p:sldId id="256" r:id="rId2"/>
@@ -20,12 +20,20 @@
     <p:sldId id="353" r:id="rId8"/>
     <p:sldId id="349" r:id="rId9"/>
     <p:sldId id="355" r:id="rId10"/>
-    <p:sldId id="354" r:id="rId11"/>
-    <p:sldId id="332" r:id="rId12"/>
-    <p:sldId id="356" r:id="rId13"/>
-    <p:sldId id="352" r:id="rId14"/>
-    <p:sldId id="293" r:id="rId15"/>
-    <p:sldId id="306" r:id="rId16"/>
+    <p:sldId id="332" r:id="rId11"/>
+    <p:sldId id="358" r:id="rId12"/>
+    <p:sldId id="359" r:id="rId13"/>
+    <p:sldId id="357" r:id="rId14"/>
+    <p:sldId id="344" r:id="rId15"/>
+    <p:sldId id="360" r:id="rId16"/>
+    <p:sldId id="345" r:id="rId17"/>
+    <p:sldId id="363" r:id="rId18"/>
+    <p:sldId id="361" r:id="rId19"/>
+    <p:sldId id="362" r:id="rId20"/>
+    <p:sldId id="356" r:id="rId21"/>
+    <p:sldId id="352" r:id="rId22"/>
+    <p:sldId id="293" r:id="rId23"/>
+    <p:sldId id="306" r:id="rId24"/>
   </p:sldIdLst>
   <p:sldSz cx="12192000" cy="6858000"/>
   <p:notesSz cx="7315200" cy="9601200"/>
@@ -289,7 +297,7 @@
           <a:p>
             <a:fld id="{144F1436-6906-4D93-B7A2-786C327BFA14}" type="datetimeFigureOut">
               <a:rPr lang="nl-BE" smtClean="0"/>
-              <a:t>18/02/2026</a:t>
+              <a:t>19/02/2026</a:t>
             </a:fld>
             <a:endParaRPr lang="nl-BE"/>
           </a:p>
@@ -454,7 +462,7 @@
           <a:p>
             <a:fld id="{AA8CD09E-2914-4F47-B6C1-51B2C31814C9}" type="datetimeFigureOut">
               <a:rPr lang="pt-BR" smtClean="0"/>
-              <a:t>18/02/2026</a:t>
+              <a:t>19/02/2026</a:t>
             </a:fld>
             <a:endParaRPr lang="pt-BR"/>
           </a:p>
@@ -1121,6 +1129,630 @@
 </p:notes>
 </file>
 
+<file path=ppt/notesSlides/notesSlide5.xml><?xml version="1.0" encoding="utf-8"?>
+<p:notes xmlns:a="http://schemas.openxmlformats.org/drawingml/2006/main" xmlns:r="http://schemas.openxmlformats.org/officeDocument/2006/relationships" xmlns:p="http://schemas.openxmlformats.org/presentationml/2006/main">
+  <p:cSld>
+    <p:spTree>
+      <p:nvGrpSpPr>
+        <p:cNvPr id="1" name=""/>
+        <p:cNvGrpSpPr/>
+        <p:nvPr/>
+      </p:nvGrpSpPr>
+      <p:grpSpPr>
+        <a:xfrm>
+          <a:off x="0" y="0"/>
+          <a:ext cx="0" cy="0"/>
+          <a:chOff x="0" y="0"/>
+          <a:chExt cx="0" cy="0"/>
+        </a:xfrm>
+      </p:grpSpPr>
+      <p:sp>
+        <p:nvSpPr>
+          <p:cNvPr id="2" name="Slide Image Placeholder 1"/>
+          <p:cNvSpPr>
+            <a:spLocks noGrp="1" noRot="1" noChangeAspect="1"/>
+          </p:cNvSpPr>
+          <p:nvPr>
+            <p:ph type="sldImg"/>
+          </p:nvPr>
+        </p:nvSpPr>
+        <p:spPr/>
+      </p:sp>
+      <p:sp>
+        <p:nvSpPr>
+          <p:cNvPr id="3" name="Notes Placeholder 2"/>
+          <p:cNvSpPr>
+            <a:spLocks noGrp="1"/>
+          </p:cNvSpPr>
+          <p:nvPr>
+            <p:ph type="body" idx="1"/>
+          </p:nvPr>
+        </p:nvSpPr>
+        <p:spPr/>
+        <p:txBody>
+          <a:bodyPr/>
+          <a:lstStyle/>
+          <a:p>
+            <a:pPr marL="0" marR="0" lvl="0" indent="0" algn="l" defTabSz="914400" rtl="0" eaLnBrk="1" fontAlgn="auto" latinLnBrk="0" hangingPunct="1">
+              <a:lnSpc>
+                <a:spcPct val="100000"/>
+              </a:lnSpc>
+              <a:spcBef>
+                <a:spcPts val="0"/>
+              </a:spcBef>
+              <a:spcAft>
+                <a:spcPts val="0"/>
+              </a:spcAft>
+              <a:buClrTx/>
+              <a:buSzTx/>
+              <a:buFontTx/>
+              <a:buNone/>
+              <a:tabLst/>
+              <a:defRPr/>
+            </a:pPr>
+            <a:r>
+              <a:rPr lang="pt-BR" dirty="0"/>
+              <a:t>As fronteiras de decisão são definidas por funções (lineares ou não) que separam</a:t>
+            </a:r>
+            <a:r>
+              <a:rPr lang="pt-BR" baseline="0" dirty="0"/>
+              <a:t> ou discriminam as classes. Essas funções são normalmente chamadas de funções discriminantes, pois vão discriminar (ou separar) as classes.</a:t>
+            </a:r>
+            <a:endParaRPr lang="pt-BR" dirty="0"/>
+          </a:p>
+          <a:p>
+            <a:endParaRPr lang="pt-BR" dirty="0"/>
+          </a:p>
+          <a:p>
+            <a:pPr marL="0" marR="0" lvl="0" indent="0" algn="l" defTabSz="914400" rtl="0" eaLnBrk="1" fontAlgn="auto" latinLnBrk="0" hangingPunct="1">
+              <a:lnSpc>
+                <a:spcPct val="100000"/>
+              </a:lnSpc>
+              <a:spcBef>
+                <a:spcPts val="0"/>
+              </a:spcBef>
+              <a:spcAft>
+                <a:spcPts val="0"/>
+              </a:spcAft>
+              <a:buClrTx/>
+              <a:buSzTx/>
+              <a:buFontTx/>
+              <a:buNone/>
+              <a:tabLst/>
+              <a:defRPr/>
+            </a:pPr>
+            <a:r>
+              <a:rPr lang="pt-BR" b="1" i="1" dirty="0"/>
+              <a:t>fronteira de decisão</a:t>
+            </a:r>
+            <a:r>
+              <a:rPr lang="pt-BR" b="0" i="0" dirty="0"/>
+              <a:t>  é onde </a:t>
+            </a:r>
+            <a:r>
+              <a:rPr lang="pt-BR" dirty="0"/>
+              <a:t>onde ocorre uma indeterminação, ou seja, um empate entre diferentes classes possíveis.</a:t>
+            </a:r>
+          </a:p>
+          <a:p>
+            <a:endParaRPr lang="pt-BR" dirty="0"/>
+          </a:p>
+        </p:txBody>
+      </p:sp>
+      <p:sp>
+        <p:nvSpPr>
+          <p:cNvPr id="4" name="Slide Number Placeholder 3"/>
+          <p:cNvSpPr>
+            <a:spLocks noGrp="1"/>
+          </p:cNvSpPr>
+          <p:nvPr>
+            <p:ph type="sldNum" sz="quarter" idx="10"/>
+          </p:nvPr>
+        </p:nvSpPr>
+        <p:spPr/>
+        <p:txBody>
+          <a:bodyPr/>
+          <a:lstStyle/>
+          <a:p>
+            <a:fld id="{6FC8D850-966F-45A6-8DE7-15B891E7D40D}" type="slidenum">
+              <a:rPr lang="pt-BR" smtClean="0"/>
+              <a:t>14</a:t>
+            </a:fld>
+            <a:endParaRPr lang="pt-BR"/>
+          </a:p>
+        </p:txBody>
+      </p:sp>
+    </p:spTree>
+    <p:extLst>
+      <p:ext uri="{BB962C8B-B14F-4D97-AF65-F5344CB8AC3E}">
+        <p14:creationId xmlns:p14="http://schemas.microsoft.com/office/powerpoint/2010/main" val="2490047734"/>
+      </p:ext>
+    </p:extLst>
+  </p:cSld>
+  <p:clrMapOvr>
+    <a:masterClrMapping/>
+  </p:clrMapOvr>
+</p:notes>
+</file>
+
+<file path=ppt/notesSlides/notesSlide6.xml><?xml version="1.0" encoding="utf-8"?>
+<p:notes xmlns:a="http://schemas.openxmlformats.org/drawingml/2006/main" xmlns:r="http://schemas.openxmlformats.org/officeDocument/2006/relationships" xmlns:p="http://schemas.openxmlformats.org/presentationml/2006/main">
+  <p:cSld>
+    <p:spTree>
+      <p:nvGrpSpPr>
+        <p:cNvPr id="1" name=""/>
+        <p:cNvGrpSpPr/>
+        <p:nvPr/>
+      </p:nvGrpSpPr>
+      <p:grpSpPr>
+        <a:xfrm>
+          <a:off x="0" y="0"/>
+          <a:ext cx="0" cy="0"/>
+          <a:chOff x="0" y="0"/>
+          <a:chExt cx="0" cy="0"/>
+        </a:xfrm>
+      </p:grpSpPr>
+      <p:sp>
+        <p:nvSpPr>
+          <p:cNvPr id="2" name="Slide Image Placeholder 1"/>
+          <p:cNvSpPr>
+            <a:spLocks noGrp="1" noRot="1" noChangeAspect="1"/>
+          </p:cNvSpPr>
+          <p:nvPr>
+            <p:ph type="sldImg"/>
+          </p:nvPr>
+        </p:nvSpPr>
+        <p:spPr/>
+      </p:sp>
+      <p:sp>
+        <p:nvSpPr>
+          <p:cNvPr id="3" name="Notes Placeholder 2"/>
+          <p:cNvSpPr>
+            <a:spLocks noGrp="1"/>
+          </p:cNvSpPr>
+          <p:nvPr>
+            <p:ph type="body" idx="1"/>
+          </p:nvPr>
+        </p:nvSpPr>
+        <p:spPr/>
+        <p:txBody>
+          <a:bodyPr/>
+          <a:lstStyle/>
+          <a:p>
+            <a:pPr marL="0" marR="0" lvl="0" indent="0" algn="l" defTabSz="914400" rtl="0" eaLnBrk="1" fontAlgn="auto" latinLnBrk="0" hangingPunct="1">
+              <a:lnSpc>
+                <a:spcPct val="100000"/>
+              </a:lnSpc>
+              <a:spcBef>
+                <a:spcPts val="0"/>
+              </a:spcBef>
+              <a:spcAft>
+                <a:spcPts val="0"/>
+              </a:spcAft>
+              <a:buClrTx/>
+              <a:buSzTx/>
+              <a:buFontTx/>
+              <a:buNone/>
+              <a:tabLst/>
+              <a:defRPr/>
+            </a:pPr>
+            <a:r>
+              <a:rPr lang="pt-BR" dirty="0"/>
+              <a:t>As fronteiras de decisão são definidas por funções (lineares ou não) que separam</a:t>
+            </a:r>
+            <a:r>
+              <a:rPr lang="pt-BR" baseline="0" dirty="0"/>
+              <a:t> ou discriminam as classes. Essas funções são normalmente chamadas de funções discriminantes, pois vão discriminar (ou separar) as classes.</a:t>
+            </a:r>
+            <a:endParaRPr lang="pt-BR" dirty="0"/>
+          </a:p>
+          <a:p>
+            <a:endParaRPr lang="pt-BR" dirty="0"/>
+          </a:p>
+          <a:p>
+            <a:pPr marL="0" marR="0" lvl="0" indent="0" algn="l" defTabSz="914400" rtl="0" eaLnBrk="1" fontAlgn="auto" latinLnBrk="0" hangingPunct="1">
+              <a:lnSpc>
+                <a:spcPct val="100000"/>
+              </a:lnSpc>
+              <a:spcBef>
+                <a:spcPts val="0"/>
+              </a:spcBef>
+              <a:spcAft>
+                <a:spcPts val="0"/>
+              </a:spcAft>
+              <a:buClrTx/>
+              <a:buSzTx/>
+              <a:buFontTx/>
+              <a:buNone/>
+              <a:tabLst/>
+              <a:defRPr/>
+            </a:pPr>
+            <a:r>
+              <a:rPr lang="pt-BR" b="1" i="1" dirty="0"/>
+              <a:t>fronteira de decisão</a:t>
+            </a:r>
+            <a:r>
+              <a:rPr lang="pt-BR" b="0" i="0" dirty="0"/>
+              <a:t>  é onde </a:t>
+            </a:r>
+            <a:r>
+              <a:rPr lang="pt-BR" dirty="0"/>
+              <a:t>onde ocorre uma indeterminação, ou seja, um empate entre diferentes classes possíveis.</a:t>
+            </a:r>
+          </a:p>
+          <a:p>
+            <a:endParaRPr lang="pt-BR" dirty="0"/>
+          </a:p>
+        </p:txBody>
+      </p:sp>
+      <p:sp>
+        <p:nvSpPr>
+          <p:cNvPr id="4" name="Slide Number Placeholder 3"/>
+          <p:cNvSpPr>
+            <a:spLocks noGrp="1"/>
+          </p:cNvSpPr>
+          <p:nvPr>
+            <p:ph type="sldNum" sz="quarter" idx="10"/>
+          </p:nvPr>
+        </p:nvSpPr>
+        <p:spPr/>
+        <p:txBody>
+          <a:bodyPr/>
+          <a:lstStyle/>
+          <a:p>
+            <a:fld id="{6FC8D850-966F-45A6-8DE7-15B891E7D40D}" type="slidenum">
+              <a:rPr lang="pt-BR" smtClean="0"/>
+              <a:t>15</a:t>
+            </a:fld>
+            <a:endParaRPr lang="pt-BR"/>
+          </a:p>
+        </p:txBody>
+      </p:sp>
+    </p:spTree>
+    <p:extLst>
+      <p:ext uri="{BB962C8B-B14F-4D97-AF65-F5344CB8AC3E}">
+        <p14:creationId xmlns:p14="http://schemas.microsoft.com/office/powerpoint/2010/main" val="3462824056"/>
+      </p:ext>
+    </p:extLst>
+  </p:cSld>
+  <p:clrMapOvr>
+    <a:masterClrMapping/>
+  </p:clrMapOvr>
+</p:notes>
+</file>
+
+<file path=ppt/notesSlides/notesSlide7.xml><?xml version="1.0" encoding="utf-8"?>
+<p:notes xmlns:a="http://schemas.openxmlformats.org/drawingml/2006/main" xmlns:r="http://schemas.openxmlformats.org/officeDocument/2006/relationships" xmlns:p="http://schemas.openxmlformats.org/presentationml/2006/main">
+  <p:cSld>
+    <p:spTree>
+      <p:nvGrpSpPr>
+        <p:cNvPr id="1" name=""/>
+        <p:cNvGrpSpPr/>
+        <p:nvPr/>
+      </p:nvGrpSpPr>
+      <p:grpSpPr>
+        <a:xfrm>
+          <a:off x="0" y="0"/>
+          <a:ext cx="0" cy="0"/>
+          <a:chOff x="0" y="0"/>
+          <a:chExt cx="0" cy="0"/>
+        </a:xfrm>
+      </p:grpSpPr>
+      <p:sp>
+        <p:nvSpPr>
+          <p:cNvPr id="2" name="Slide Image Placeholder 1"/>
+          <p:cNvSpPr>
+            <a:spLocks noGrp="1" noRot="1" noChangeAspect="1"/>
+          </p:cNvSpPr>
+          <p:nvPr>
+            <p:ph type="sldImg"/>
+          </p:nvPr>
+        </p:nvSpPr>
+        <p:spPr/>
+      </p:sp>
+      <p:sp>
+        <p:nvSpPr>
+          <p:cNvPr id="3" name="Notes Placeholder 2"/>
+          <p:cNvSpPr>
+            <a:spLocks noGrp="1"/>
+          </p:cNvSpPr>
+          <p:nvPr>
+            <p:ph type="body" idx="1"/>
+          </p:nvPr>
+        </p:nvSpPr>
+        <p:spPr/>
+        <p:txBody>
+          <a:bodyPr/>
+          <a:lstStyle/>
+          <a:p>
+            <a:pPr marL="0" marR="0" lvl="0" indent="0" algn="l" defTabSz="914400" rtl="0" eaLnBrk="1" fontAlgn="auto" latinLnBrk="0" hangingPunct="1">
+              <a:lnSpc>
+                <a:spcPct val="100000"/>
+              </a:lnSpc>
+              <a:spcBef>
+                <a:spcPts val="0"/>
+              </a:spcBef>
+              <a:spcAft>
+                <a:spcPts val="0"/>
+              </a:spcAft>
+              <a:buClrTx/>
+              <a:buSzTx/>
+              <a:buFontTx/>
+              <a:buNone/>
+              <a:tabLst/>
+              <a:defRPr/>
+            </a:pPr>
+            <a:r>
+              <a:rPr lang="pt-BR" dirty="0"/>
+              <a:t>As fronteiras de decisão são definidas por funções (lineares ou não) que separam</a:t>
+            </a:r>
+            <a:r>
+              <a:rPr lang="pt-BR" baseline="0" dirty="0"/>
+              <a:t> ou discriminam as classes. Essas funções são normalmente chamadas de funções discriminantes, pois vão discriminar (ou seja, separar) as classes.</a:t>
+            </a:r>
+            <a:endParaRPr lang="pt-BR" dirty="0"/>
+          </a:p>
+          <a:p>
+            <a:endParaRPr lang="pt-BR" dirty="0"/>
+          </a:p>
+        </p:txBody>
+      </p:sp>
+      <p:sp>
+        <p:nvSpPr>
+          <p:cNvPr id="4" name="Slide Number Placeholder 3"/>
+          <p:cNvSpPr>
+            <a:spLocks noGrp="1"/>
+          </p:cNvSpPr>
+          <p:nvPr>
+            <p:ph type="sldNum" sz="quarter" idx="10"/>
+          </p:nvPr>
+        </p:nvSpPr>
+        <p:spPr/>
+        <p:txBody>
+          <a:bodyPr/>
+          <a:lstStyle/>
+          <a:p>
+            <a:fld id="{6FC8D850-966F-45A6-8DE7-15B891E7D40D}" type="slidenum">
+              <a:rPr lang="pt-BR" smtClean="0"/>
+              <a:t>16</a:t>
+            </a:fld>
+            <a:endParaRPr lang="pt-BR"/>
+          </a:p>
+        </p:txBody>
+      </p:sp>
+    </p:spTree>
+    <p:extLst>
+      <p:ext uri="{BB962C8B-B14F-4D97-AF65-F5344CB8AC3E}">
+        <p14:creationId xmlns:p14="http://schemas.microsoft.com/office/powerpoint/2010/main" val="1537098451"/>
+      </p:ext>
+    </p:extLst>
+  </p:cSld>
+  <p:clrMapOvr>
+    <a:masterClrMapping/>
+  </p:clrMapOvr>
+</p:notes>
+</file>
+
+<file path=ppt/notesSlides/notesSlide8.xml><?xml version="1.0" encoding="utf-8"?>
+<p:notes xmlns:a="http://schemas.openxmlformats.org/drawingml/2006/main" xmlns:r="http://schemas.openxmlformats.org/officeDocument/2006/relationships" xmlns:p="http://schemas.openxmlformats.org/presentationml/2006/main">
+  <p:cSld>
+    <p:spTree>
+      <p:nvGrpSpPr>
+        <p:cNvPr id="1" name=""/>
+        <p:cNvGrpSpPr/>
+        <p:nvPr/>
+      </p:nvGrpSpPr>
+      <p:grpSpPr>
+        <a:xfrm>
+          <a:off x="0" y="0"/>
+          <a:ext cx="0" cy="0"/>
+          <a:chOff x="0" y="0"/>
+          <a:chExt cx="0" cy="0"/>
+        </a:xfrm>
+      </p:grpSpPr>
+      <p:sp>
+        <p:nvSpPr>
+          <p:cNvPr id="2" name="Espaço Reservado para Imagem de Slide 1"/>
+          <p:cNvSpPr>
+            <a:spLocks noGrp="1" noRot="1" noChangeAspect="1"/>
+          </p:cNvSpPr>
+          <p:nvPr>
+            <p:ph type="sldImg"/>
+          </p:nvPr>
+        </p:nvSpPr>
+        <p:spPr/>
+      </p:sp>
+      <p:sp>
+        <p:nvSpPr>
+          <p:cNvPr id="3" name="Espaço Reservado para Anotações 2"/>
+          <p:cNvSpPr>
+            <a:spLocks noGrp="1"/>
+          </p:cNvSpPr>
+          <p:nvPr>
+            <p:ph type="body" idx="1"/>
+          </p:nvPr>
+        </p:nvSpPr>
+        <p:spPr/>
+        <p:txBody>
+          <a:bodyPr/>
+          <a:lstStyle/>
+          <a:p>
+            <a:pPr marL="0" marR="0" lvl="0" indent="0" algn="l" defTabSz="914400" rtl="0" eaLnBrk="1" fontAlgn="auto" latinLnBrk="0" hangingPunct="1">
+              <a:lnSpc>
+                <a:spcPct val="100000"/>
+              </a:lnSpc>
+              <a:spcBef>
+                <a:spcPts val="0"/>
+              </a:spcBef>
+              <a:spcAft>
+                <a:spcPts val="0"/>
+              </a:spcAft>
+              <a:buClrTx/>
+              <a:buSzTx/>
+              <a:buFontTx/>
+              <a:buNone/>
+              <a:tabLst/>
+              <a:defRPr/>
+            </a:pPr>
+            <a:r>
+              <a:rPr lang="pt-BR" dirty="0"/>
+              <a:t>Para um problema de classificação de duas classes, pode-se visualizar a operação de um classificador linear como a divisão de um espaço de entrada de alta dimensão com um hiperplano: todos os pontos de um lado do hiperplano são classificados como "sim", enquanto os outros são classificados como "não".</a:t>
+            </a:r>
+          </a:p>
+          <a:p>
+            <a:endParaRPr lang="pt-BR" dirty="0"/>
+          </a:p>
+          <a:p>
+            <a:endParaRPr lang="pt-BR" dirty="0"/>
+          </a:p>
+        </p:txBody>
+      </p:sp>
+      <p:sp>
+        <p:nvSpPr>
+          <p:cNvPr id="4" name="Espaço Reservado para Número de Slide 3"/>
+          <p:cNvSpPr>
+            <a:spLocks noGrp="1"/>
+          </p:cNvSpPr>
+          <p:nvPr>
+            <p:ph type="sldNum" sz="quarter" idx="5"/>
+          </p:nvPr>
+        </p:nvSpPr>
+        <p:spPr/>
+        <p:txBody>
+          <a:bodyPr/>
+          <a:lstStyle/>
+          <a:p>
+            <a:fld id="{6FC8D850-966F-45A6-8DE7-15B891E7D40D}" type="slidenum">
+              <a:rPr lang="pt-BR" smtClean="0"/>
+              <a:t>18</a:t>
+            </a:fld>
+            <a:endParaRPr lang="pt-BR"/>
+          </a:p>
+        </p:txBody>
+      </p:sp>
+    </p:spTree>
+    <p:extLst>
+      <p:ext uri="{BB962C8B-B14F-4D97-AF65-F5344CB8AC3E}">
+        <p14:creationId xmlns:p14="http://schemas.microsoft.com/office/powerpoint/2010/main" val="63527196"/>
+      </p:ext>
+    </p:extLst>
+  </p:cSld>
+  <p:clrMapOvr>
+    <a:masterClrMapping/>
+  </p:clrMapOvr>
+</p:notes>
+</file>
+
+<file path=ppt/notesSlides/notesSlide9.xml><?xml version="1.0" encoding="utf-8"?>
+<p:notes xmlns:a="http://schemas.openxmlformats.org/drawingml/2006/main" xmlns:r="http://schemas.openxmlformats.org/officeDocument/2006/relationships" xmlns:p="http://schemas.openxmlformats.org/presentationml/2006/main">
+  <p:cSld>
+    <p:spTree>
+      <p:nvGrpSpPr>
+        <p:cNvPr id="1" name=""/>
+        <p:cNvGrpSpPr/>
+        <p:nvPr/>
+      </p:nvGrpSpPr>
+      <p:grpSpPr>
+        <a:xfrm>
+          <a:off x="0" y="0"/>
+          <a:ext cx="0" cy="0"/>
+          <a:chOff x="0" y="0"/>
+          <a:chExt cx="0" cy="0"/>
+        </a:xfrm>
+      </p:grpSpPr>
+      <p:sp>
+        <p:nvSpPr>
+          <p:cNvPr id="2" name="Espaço Reservado para Imagem de Slide 1"/>
+          <p:cNvSpPr>
+            <a:spLocks noGrp="1" noRot="1" noChangeAspect="1"/>
+          </p:cNvSpPr>
+          <p:nvPr>
+            <p:ph type="sldImg"/>
+          </p:nvPr>
+        </p:nvSpPr>
+        <p:spPr/>
+      </p:sp>
+      <p:sp>
+        <p:nvSpPr>
+          <p:cNvPr id="3" name="Espaço Reservado para Anotações 2"/>
+          <p:cNvSpPr>
+            <a:spLocks noGrp="1"/>
+          </p:cNvSpPr>
+          <p:nvPr>
+            <p:ph type="body" idx="1"/>
+          </p:nvPr>
+        </p:nvSpPr>
+        <p:spPr/>
+        <p:txBody>
+          <a:bodyPr/>
+          <a:lstStyle/>
+          <a:p>
+            <a:pPr marL="0" marR="0" lvl="0" indent="0" algn="l" defTabSz="914400" rtl="0" eaLnBrk="1" fontAlgn="auto" latinLnBrk="0" hangingPunct="1">
+              <a:lnSpc>
+                <a:spcPct val="100000"/>
+              </a:lnSpc>
+              <a:spcBef>
+                <a:spcPts val="0"/>
+              </a:spcBef>
+              <a:spcAft>
+                <a:spcPts val="0"/>
+              </a:spcAft>
+              <a:buClrTx/>
+              <a:buSzTx/>
+              <a:buFontTx/>
+              <a:buNone/>
+              <a:tabLst/>
+              <a:defRPr/>
+            </a:pPr>
+            <a:r>
+              <a:rPr lang="pt-BR" dirty="0"/>
+              <a:t>Para um problema de classificação de duas classes, pode-se visualizar a operação de um classificador linear como a divisão de um espaço de entrada de alta dimensão com um hiperplano: todos os pontos de um lado do hiperplano são classificados como "sim", enquanto os outros são classificados como "não".</a:t>
+            </a:r>
+          </a:p>
+          <a:p>
+            <a:endParaRPr lang="pt-BR" dirty="0"/>
+          </a:p>
+          <a:p>
+            <a:endParaRPr lang="pt-BR" dirty="0"/>
+          </a:p>
+        </p:txBody>
+      </p:sp>
+      <p:sp>
+        <p:nvSpPr>
+          <p:cNvPr id="4" name="Espaço Reservado para Número de Slide 3"/>
+          <p:cNvSpPr>
+            <a:spLocks noGrp="1"/>
+          </p:cNvSpPr>
+          <p:nvPr>
+            <p:ph type="sldNum" sz="quarter" idx="5"/>
+          </p:nvPr>
+        </p:nvSpPr>
+        <p:spPr/>
+        <p:txBody>
+          <a:bodyPr/>
+          <a:lstStyle/>
+          <a:p>
+            <a:fld id="{6FC8D850-966F-45A6-8DE7-15B891E7D40D}" type="slidenum">
+              <a:rPr lang="pt-BR" smtClean="0"/>
+              <a:t>19</a:t>
+            </a:fld>
+            <a:endParaRPr lang="pt-BR"/>
+          </a:p>
+        </p:txBody>
+      </p:sp>
+    </p:spTree>
+    <p:extLst>
+      <p:ext uri="{BB962C8B-B14F-4D97-AF65-F5344CB8AC3E}">
+        <p14:creationId xmlns:p14="http://schemas.microsoft.com/office/powerpoint/2010/main" val="2844401061"/>
+      </p:ext>
+    </p:extLst>
+  </p:cSld>
+  <p:clrMapOvr>
+    <a:masterClrMapping/>
+  </p:clrMapOvr>
+</p:notes>
+</file>
+
 <file path=ppt/slideLayouts/slideLayout1.xml><?xml version="1.0" encoding="utf-8"?>
 <p:sldLayout xmlns:a="http://schemas.openxmlformats.org/drawingml/2006/main" xmlns:r="http://schemas.openxmlformats.org/officeDocument/2006/relationships" xmlns:p="http://schemas.openxmlformats.org/presentationml/2006/main" type="title" preserve="1">
   <p:cSld name="Slide de Título">
@@ -1268,7 +1900,7 @@
           <a:p>
             <a:fld id="{63289F7E-B80B-496E-81B4-D396C37C9454}" type="datetimeFigureOut">
               <a:rPr lang="pt-BR" smtClean="0"/>
-              <a:t>18/02/2026</a:t>
+              <a:t>19/02/2026</a:t>
             </a:fld>
             <a:endParaRPr lang="pt-BR"/>
           </a:p>
@@ -1466,7 +2098,7 @@
           <a:p>
             <a:fld id="{63289F7E-B80B-496E-81B4-D396C37C9454}" type="datetimeFigureOut">
               <a:rPr lang="pt-BR" smtClean="0"/>
-              <a:t>18/02/2026</a:t>
+              <a:t>19/02/2026</a:t>
             </a:fld>
             <a:endParaRPr lang="pt-BR"/>
           </a:p>
@@ -1674,7 +2306,7 @@
           <a:p>
             <a:fld id="{63289F7E-B80B-496E-81B4-D396C37C9454}" type="datetimeFigureOut">
               <a:rPr lang="pt-BR" smtClean="0"/>
-              <a:t>18/02/2026</a:t>
+              <a:t>19/02/2026</a:t>
             </a:fld>
             <a:endParaRPr lang="pt-BR"/>
           </a:p>
@@ -1872,7 +2504,7 @@
           <a:p>
             <a:fld id="{63289F7E-B80B-496E-81B4-D396C37C9454}" type="datetimeFigureOut">
               <a:rPr lang="pt-BR" smtClean="0"/>
-              <a:t>18/02/2026</a:t>
+              <a:t>19/02/2026</a:t>
             </a:fld>
             <a:endParaRPr lang="pt-BR"/>
           </a:p>
@@ -2147,7 +2779,7 @@
           <a:p>
             <a:fld id="{63289F7E-B80B-496E-81B4-D396C37C9454}" type="datetimeFigureOut">
               <a:rPr lang="pt-BR" smtClean="0"/>
-              <a:t>18/02/2026</a:t>
+              <a:t>19/02/2026</a:t>
             </a:fld>
             <a:endParaRPr lang="pt-BR"/>
           </a:p>
@@ -2412,7 +3044,7 @@
           <a:p>
             <a:fld id="{63289F7E-B80B-496E-81B4-D396C37C9454}" type="datetimeFigureOut">
               <a:rPr lang="pt-BR" smtClean="0"/>
-              <a:t>18/02/2026</a:t>
+              <a:t>19/02/2026</a:t>
             </a:fld>
             <a:endParaRPr lang="pt-BR"/>
           </a:p>
@@ -2824,7 +3456,7 @@
           <a:p>
             <a:fld id="{63289F7E-B80B-496E-81B4-D396C37C9454}" type="datetimeFigureOut">
               <a:rPr lang="pt-BR" smtClean="0"/>
-              <a:t>18/02/2026</a:t>
+              <a:t>19/02/2026</a:t>
             </a:fld>
             <a:endParaRPr lang="pt-BR"/>
           </a:p>
@@ -2965,7 +3597,7 @@
           <a:p>
             <a:fld id="{63289F7E-B80B-496E-81B4-D396C37C9454}" type="datetimeFigureOut">
               <a:rPr lang="pt-BR" smtClean="0"/>
-              <a:t>18/02/2026</a:t>
+              <a:t>19/02/2026</a:t>
             </a:fld>
             <a:endParaRPr lang="pt-BR"/>
           </a:p>
@@ -3078,7 +3710,7 @@
           <a:p>
             <a:fld id="{63289F7E-B80B-496E-81B4-D396C37C9454}" type="datetimeFigureOut">
               <a:rPr lang="pt-BR" smtClean="0"/>
-              <a:t>18/02/2026</a:t>
+              <a:t>19/02/2026</a:t>
             </a:fld>
             <a:endParaRPr lang="pt-BR"/>
           </a:p>
@@ -3389,7 +4021,7 @@
           <a:p>
             <a:fld id="{63289F7E-B80B-496E-81B4-D396C37C9454}" type="datetimeFigureOut">
               <a:rPr lang="pt-BR" smtClean="0"/>
-              <a:t>18/02/2026</a:t>
+              <a:t>19/02/2026</a:t>
             </a:fld>
             <a:endParaRPr lang="pt-BR"/>
           </a:p>
@@ -3677,7 +4309,7 @@
           <a:p>
             <a:fld id="{63289F7E-B80B-496E-81B4-D396C37C9454}" type="datetimeFigureOut">
               <a:rPr lang="pt-BR" smtClean="0"/>
-              <a:t>18/02/2026</a:t>
+              <a:t>19/02/2026</a:t>
             </a:fld>
             <a:endParaRPr lang="pt-BR"/>
           </a:p>
@@ -3918,7 +4550,7 @@
           <a:p>
             <a:fld id="{63289F7E-B80B-496E-81B4-D396C37C9454}" type="datetimeFigureOut">
               <a:rPr lang="pt-BR" smtClean="0"/>
-              <a:t>18/02/2026</a:t>
+              <a:t>19/02/2026</a:t>
             </a:fld>
             <a:endParaRPr lang="pt-BR"/>
           </a:p>
@@ -4543,138 +5175,6 @@
       </p:grpSpPr>
       <p:sp>
         <p:nvSpPr>
-          <p:cNvPr id="2" name="Title 1">
-            <a:extLst>
-              <a:ext uri="{FF2B5EF4-FFF2-40B4-BE49-F238E27FC236}">
-                <a16:creationId xmlns:a16="http://schemas.microsoft.com/office/drawing/2014/main" id="{5800B6E8-C5D5-B13B-B9FA-30F92A8BE6C2}"/>
-              </a:ext>
-            </a:extLst>
-          </p:cNvPr>
-          <p:cNvSpPr>
-            <a:spLocks noGrp="1"/>
-          </p:cNvSpPr>
-          <p:nvPr>
-            <p:ph type="title"/>
-          </p:nvPr>
-        </p:nvSpPr>
-        <p:spPr/>
-        <p:txBody>
-          <a:bodyPr/>
-          <a:lstStyle/>
-          <a:p>
-            <a:r>
-              <a:rPr lang="en-US" dirty="0" err="1"/>
-              <a:t>Classificação</a:t>
-            </a:r>
-            <a:r>
-              <a:rPr lang="en-US" dirty="0"/>
-              <a:t> </a:t>
-            </a:r>
-            <a:r>
-              <a:rPr lang="en-US" dirty="0" err="1"/>
-              <a:t>binária</a:t>
-            </a:r>
-            <a:endParaRPr lang="en-US" dirty="0"/>
-          </a:p>
-        </p:txBody>
-      </p:sp>
-      <p:sp>
-        <p:nvSpPr>
-          <p:cNvPr id="3" name="Content Placeholder 2">
-            <a:extLst>
-              <a:ext uri="{FF2B5EF4-FFF2-40B4-BE49-F238E27FC236}">
-                <a16:creationId xmlns:a16="http://schemas.microsoft.com/office/drawing/2014/main" id="{C496319A-7329-EA87-2675-D63CB7368AAB}"/>
-              </a:ext>
-            </a:extLst>
-          </p:cNvPr>
-          <p:cNvSpPr>
-            <a:spLocks noGrp="1"/>
-          </p:cNvSpPr>
-          <p:nvPr>
-            <p:ph idx="1"/>
-          </p:nvPr>
-        </p:nvSpPr>
-        <p:spPr/>
-        <p:txBody>
-          <a:bodyPr/>
-          <a:lstStyle/>
-          <a:p>
-            <a:r>
-              <a:rPr lang="pt-BR" dirty="0"/>
-              <a:t>Representação do rótulo</a:t>
-            </a:r>
-          </a:p>
-          <a:p>
-            <a:pPr lvl="1"/>
-            <a:r>
-              <a:rPr lang="pt-BR" dirty="0"/>
-              <a:t>0 ou 1</a:t>
-            </a:r>
-          </a:p>
-          <a:p>
-            <a:pPr lvl="1"/>
-            <a:r>
-              <a:rPr lang="pt-BR" dirty="0"/>
-              <a:t>−1 ou +1 (em alguns poucos modelos)</a:t>
-            </a:r>
-          </a:p>
-          <a:p>
-            <a:r>
-              <a:rPr lang="pt-BR" dirty="0"/>
-              <a:t>Exemplo: detecção de spam</a:t>
-            </a:r>
-          </a:p>
-          <a:p>
-            <a:pPr lvl="1"/>
-            <a:r>
-              <a:rPr lang="pt-BR" dirty="0"/>
-              <a:t>spam = 1</a:t>
-            </a:r>
-          </a:p>
-          <a:p>
-            <a:pPr lvl="1"/>
-            <a:r>
-              <a:rPr lang="pt-BR" dirty="0"/>
-              <a:t>não spam = 0</a:t>
-            </a:r>
-          </a:p>
-          <a:p>
-            <a:endParaRPr lang="en-US" dirty="0"/>
-          </a:p>
-        </p:txBody>
-      </p:sp>
-    </p:spTree>
-    <p:extLst>
-      <p:ext uri="{BB962C8B-B14F-4D97-AF65-F5344CB8AC3E}">
-        <p14:creationId xmlns:p14="http://schemas.microsoft.com/office/powerpoint/2010/main" val="1369832334"/>
-      </p:ext>
-    </p:extLst>
-  </p:cSld>
-  <p:clrMapOvr>
-    <a:masterClrMapping/>
-  </p:clrMapOvr>
-</p:sld>
-</file>
-
-<file path=ppt/slides/slide11.xml><?xml version="1.0" encoding="utf-8"?>
-<p:sld xmlns:a="http://schemas.openxmlformats.org/drawingml/2006/main" xmlns:r="http://schemas.openxmlformats.org/officeDocument/2006/relationships" xmlns:p="http://schemas.openxmlformats.org/presentationml/2006/main">
-  <p:cSld>
-    <p:spTree>
-      <p:nvGrpSpPr>
-        <p:cNvPr id="1" name=""/>
-        <p:cNvGrpSpPr/>
-        <p:nvPr/>
-      </p:nvGrpSpPr>
-      <p:grpSpPr>
-        <a:xfrm>
-          <a:off x="0" y="0"/>
-          <a:ext cx="0" cy="0"/>
-          <a:chOff x="0" y="0"/>
-          <a:chExt cx="0" cy="0"/>
-        </a:xfrm>
-      </p:grpSpPr>
-      <p:sp>
-        <p:nvSpPr>
           <p:cNvPr id="2" name="Title 1"/>
           <p:cNvSpPr>
             <a:spLocks noGrp="1"/>
@@ -4733,12 +5233,16 @@
                   <a:t>O classificador tem </a:t>
                 </a:r>
                 <a:r>
+                  <a:rPr lang="pt-BR" b="1" dirty="0"/>
+                  <a:t>única saída escalar</a:t>
+                </a:r>
+                <a:r>
                   <a:rPr lang="pt-BR" b="1" dirty="0">
                     <a:solidFill>
                       <a:srgbClr val="00B050"/>
                     </a:solidFill>
                   </a:rPr>
-                  <a:t>única saída escalar </a:t>
+                  <a:t> </a:t>
                 </a:r>
                 <a:r>
                   <a:rPr lang="pt-BR" dirty="0"/>
@@ -4750,11 +5254,33 @@
                 </a:r>
                 <a:r>
                   <a:rPr lang="pt-BR" dirty="0"/>
-                  <a:t> correspondente ao </a:t>
+                  <a:t> a que pertence o </a:t>
+                </a:r>
+                <a14:m>
+                  <m:oMath xmlns:m="http://schemas.openxmlformats.org/officeDocument/2006/math">
+                    <m:r>
+                      <a:rPr lang="pt-BR" i="1">
+                        <a:latin typeface="Cambria Math" panose="02040503050406030204" pitchFamily="18" charset="0"/>
+                      </a:rPr>
+                      <m:t>𝑖</m:t>
+                    </m:r>
+                  </m:oMath>
+                </a14:m>
+                <a:r>
+                  <a:rPr lang="pt-BR" dirty="0"/>
+                  <a:t>-ésimo </a:t>
                 </a:r>
                 <a:r>
                   <a:rPr lang="pt-BR" b="1" dirty="0"/>
-                  <a:t>vetor de atributos, </a:t>
+                  <a:t>vetor de atributos</a:t>
+                </a:r>
+                <a:r>
+                  <a:rPr lang="pt-BR" dirty="0"/>
+                  <a:t>,</a:t>
+                </a:r>
+                <a:r>
+                  <a:rPr lang="pt-BR" b="1" dirty="0"/>
+                  <a:t> </a:t>
                 </a:r>
                 <a14:m>
                   <m:oMath xmlns:m="http://schemas.openxmlformats.org/officeDocument/2006/math">
@@ -4764,11 +5290,37 @@
                       </a:rPr>
                       <m:t>𝒙</m:t>
                     </m:r>
+                    <m:d>
+                      <m:dPr>
+                        <m:ctrlPr>
+                          <a:rPr lang="pt-BR" b="1" i="1">
+                            <a:latin typeface="Cambria Math" panose="02040503050406030204" pitchFamily="18" charset="0"/>
+                          </a:rPr>
+                        </m:ctrlPr>
+                      </m:dPr>
+                      <m:e>
+                        <m:r>
+                          <a:rPr lang="pt-BR" i="1">
+                            <a:latin typeface="Cambria Math" panose="02040503050406030204" pitchFamily="18" charset="0"/>
+                          </a:rPr>
+                          <m:t>𝑖</m:t>
+                        </m:r>
+                      </m:e>
+                    </m:d>
+                    <m:r>
+                      <a:rPr lang="pt-BR" b="0" i="0" smtClean="0">
+                        <a:latin typeface="Cambria Math" panose="02040503050406030204" pitchFamily="18" charset="0"/>
+                      </a:rPr>
+                      <m:t>.</m:t>
+                    </m:r>
                   </m:oMath>
                 </a14:m>
+                <a:endParaRPr lang="pt-BR" b="0" dirty="0"/>
+              </a:p>
+              <a:p>
                 <a:r>
                   <a:rPr lang="pt-BR" dirty="0"/>
-                  <a:t>:</a:t>
+                  <a:t>Os rótulos são representados como:</a:t>
                 </a:r>
               </a:p>
               <a:p>
@@ -5083,25 +5635,13 @@
                 </a14:m>
                 <a:r>
                   <a:rPr lang="pt-BR" dirty="0"/>
-                  <a:t> representam as classe negativa e positiva, </a:t>
-                </a:r>
-                <a:r>
-                  <a:rPr lang="pt-BR" dirty="0" err="1"/>
-                  <a:t>respecitvamebnte</a:t>
-                </a:r>
-                <a:r>
-                  <a:rPr lang="pt-BR" dirty="0"/>
-                  <a:t>.</a:t>
+                  <a:t> representam as classe negativa e a positiva, respectivamente.</a:t>
                 </a:r>
               </a:p>
               <a:p>
                 <a:r>
-                  <a:rPr lang="pt-BR"/>
-                  <a:t>Também </a:t>
-                </a:r>
-                <a:r>
                   <a:rPr lang="pt-BR" dirty="0"/>
-                  <a:t>é possível utilizar </a:t>
+                  <a:t>Também é possível utilizar </a:t>
                 </a:r>
                 <a14:m>
                   <m:oMath xmlns:m="http://schemas.openxmlformats.org/officeDocument/2006/math">
@@ -5375,6 +5915,12 @@
                                 <m:t>,  </m:t>
                               </m:r>
                               <m:r>
+                                <a:rPr lang="pt-BR" b="1" i="1" smtClean="0">
+                                  <a:latin typeface="Cambria Math" panose="02040503050406030204" pitchFamily="18" charset="0"/>
+                                </a:rPr>
+                                <m:t>    </m:t>
+                              </m:r>
+                              <m:r>
                                 <a:rPr lang="pt-BR" b="1" i="1">
                                   <a:latin typeface="Cambria Math" panose="02040503050406030204" pitchFamily="18" charset="0"/>
                                 </a:rPr>
@@ -5510,12 +6056,18 @@
 </p:sld>
 </file>
 
-<file path=ppt/slides/slide12.xml><?xml version="1.0" encoding="utf-8"?>
+<file path=ppt/slides/slide11.xml><?xml version="1.0" encoding="utf-8"?>
 <p:sld xmlns:a="http://schemas.openxmlformats.org/drawingml/2006/main" xmlns:r="http://schemas.openxmlformats.org/officeDocument/2006/relationships" xmlns:p="http://schemas.openxmlformats.org/presentationml/2006/main">
   <p:cSld>
     <p:spTree>
       <p:nvGrpSpPr>
-        <p:cNvPr id="1" name=""/>
+        <p:cNvPr id="1" name="">
+          <a:extLst>
+            <a:ext uri="{FF2B5EF4-FFF2-40B4-BE49-F238E27FC236}">
+              <a16:creationId xmlns:a16="http://schemas.microsoft.com/office/drawing/2014/main" id="{4AC37BFF-244C-0D73-96E1-47543A4C245F}"/>
+            </a:ext>
+          </a:extLst>
+        </p:cNvPr>
         <p:cNvGrpSpPr/>
         <p:nvPr/>
       </p:nvGrpSpPr>
@@ -5532,7 +6084,7 @@
           <p:cNvPr id="2" name="Title 1">
             <a:extLst>
               <a:ext uri="{FF2B5EF4-FFF2-40B4-BE49-F238E27FC236}">
-                <a16:creationId xmlns:a16="http://schemas.microsoft.com/office/drawing/2014/main" id="{DA7FDC7F-B899-B1A6-F69A-351822C6EFD7}"/>
+                <a16:creationId xmlns:a16="http://schemas.microsoft.com/office/drawing/2014/main" id="{CD893F73-D553-1C61-9D7D-AAB3F59096AD}"/>
               </a:ext>
             </a:extLst>
           </p:cNvPr>
@@ -5548,16 +6100,1275 @@
           <a:bodyPr/>
           <a:lstStyle/>
           <a:p>
-            <a:endParaRPr lang="en-US"/>
+            <a:r>
+              <a:rPr lang="en-US" dirty="0" err="1"/>
+              <a:t>Classificação</a:t>
+            </a:r>
+            <a:r>
+              <a:rPr lang="en-US" dirty="0"/>
+              <a:t> </a:t>
+            </a:r>
+            <a:r>
+              <a:rPr lang="en-US" dirty="0" err="1"/>
+              <a:t>multiclasse</a:t>
+            </a:r>
+            <a:endParaRPr lang="pt-BR" dirty="0"/>
           </a:p>
         </p:txBody>
       </p:sp>
+      <mc:AlternateContent xmlns:mc="http://schemas.openxmlformats.org/markup-compatibility/2006">
+        <mc:Choice xmlns:a14="http://schemas.microsoft.com/office/drawing/2010/main" Requires="a14">
+          <p:sp>
+            <p:nvSpPr>
+              <p:cNvPr id="3" name="Content Placeholder 2">
+                <a:extLst>
+                  <a:ext uri="{FF2B5EF4-FFF2-40B4-BE49-F238E27FC236}">
+                    <a16:creationId xmlns:a16="http://schemas.microsoft.com/office/drawing/2014/main" id="{5D34CF39-62BC-DA90-F244-DCDEF2E97DC7}"/>
+                  </a:ext>
+                </a:extLst>
+              </p:cNvPr>
+              <p:cNvSpPr>
+                <a:spLocks noGrp="1"/>
+              </p:cNvSpPr>
+              <p:nvPr>
+                <p:ph idx="1"/>
+              </p:nvPr>
+            </p:nvSpPr>
+            <p:spPr>
+              <a:xfrm>
+                <a:off x="838200" y="1825624"/>
+                <a:ext cx="11255830" cy="5032376"/>
+              </a:xfrm>
+            </p:spPr>
+            <p:txBody>
+              <a:bodyPr>
+                <a:normAutofit lnSpcReduction="10000"/>
+              </a:bodyPr>
+              <a:lstStyle/>
+              <a:p>
+                <a:r>
+                  <a:rPr lang="pt-BR" dirty="0"/>
+                  <a:t>O classificador </a:t>
+                </a:r>
+                <a:r>
+                  <a:rPr lang="pt-BR" dirty="0">
+                    <a:solidFill>
+                      <a:schemeClr val="tx1"/>
+                    </a:solidFill>
+                  </a:rPr>
+                  <a:t>tem </a:t>
+                </a:r>
+                <a14:m>
+                  <m:oMath xmlns:m="http://schemas.openxmlformats.org/officeDocument/2006/math">
+                    <m:r>
+                      <a:rPr lang="pt-BR" b="1" i="1" smtClean="0">
+                        <a:solidFill>
+                          <a:schemeClr val="tx1"/>
+                        </a:solidFill>
+                        <a:latin typeface="Cambria Math" panose="02040503050406030204" pitchFamily="18" charset="0"/>
+                      </a:rPr>
+                      <m:t>𝑸</m:t>
+                    </m:r>
+                  </m:oMath>
+                </a14:m>
+                <a:r>
+                  <a:rPr lang="pt-BR" b="1" dirty="0">
+                    <a:solidFill>
+                      <a:schemeClr val="tx1"/>
+                    </a:solidFill>
+                  </a:rPr>
+                  <a:t> saídas escalares</a:t>
+                </a:r>
+                <a:r>
+                  <a:rPr lang="pt-BR" dirty="0">
+                    <a:solidFill>
+                      <a:schemeClr val="tx1"/>
+                    </a:solidFill>
+                  </a:rPr>
+                  <a:t>, </a:t>
+                </a:r>
+                <a:r>
+                  <a:rPr lang="pt-BR" b="1" dirty="0">
+                    <a:solidFill>
+                      <a:schemeClr val="tx1"/>
+                    </a:solidFill>
+                  </a:rPr>
+                  <a:t>uma para cada classe</a:t>
+                </a:r>
+                <a:r>
+                  <a:rPr lang="pt-BR" dirty="0">
+                    <a:solidFill>
+                      <a:schemeClr val="tx1"/>
+                    </a:solidFill>
+                  </a:rPr>
+                  <a:t>, para indicar a classe a que pertence o </a:t>
+                </a:r>
+                <a14:m>
+                  <m:oMath xmlns:m="http://schemas.openxmlformats.org/officeDocument/2006/math">
+                    <m:r>
+                      <a:rPr lang="pt-BR" b="0" i="1">
+                        <a:solidFill>
+                          <a:schemeClr val="tx1"/>
+                        </a:solidFill>
+                        <a:latin typeface="Cambria Math" panose="02040503050406030204" pitchFamily="18" charset="0"/>
+                      </a:rPr>
+                      <m:t>𝑖</m:t>
+                    </m:r>
+                  </m:oMath>
+                </a14:m>
+                <a:r>
+                  <a:rPr lang="pt-BR" dirty="0">
+                    <a:solidFill>
+                      <a:schemeClr val="tx1"/>
+                    </a:solidFill>
+                  </a:rPr>
+                  <a:t>-ésimo vetor de atributos,</a:t>
+                </a:r>
+                <a:r>
+                  <a:rPr lang="pt-BR" b="1" dirty="0"/>
+                  <a:t> </a:t>
+                </a:r>
+                <a14:m>
+                  <m:oMath xmlns:m="http://schemas.openxmlformats.org/officeDocument/2006/math">
+                    <m:r>
+                      <a:rPr lang="pt-BR" b="1" i="1">
+                        <a:latin typeface="Cambria Math" panose="02040503050406030204" pitchFamily="18" charset="0"/>
+                      </a:rPr>
+                      <m:t>𝒙</m:t>
+                    </m:r>
+                    <m:d>
+                      <m:dPr>
+                        <m:ctrlPr>
+                          <a:rPr lang="pt-BR" b="1" i="1">
+                            <a:latin typeface="Cambria Math" panose="02040503050406030204" pitchFamily="18" charset="0"/>
+                          </a:rPr>
+                        </m:ctrlPr>
+                      </m:dPr>
+                      <m:e>
+                        <m:r>
+                          <a:rPr lang="pt-BR" i="1">
+                            <a:latin typeface="Cambria Math" panose="02040503050406030204" pitchFamily="18" charset="0"/>
+                          </a:rPr>
+                          <m:t>𝑖</m:t>
+                        </m:r>
+                      </m:e>
+                    </m:d>
+                    <m:r>
+                      <a:rPr lang="pt-BR" b="0" i="0" smtClean="0">
+                        <a:latin typeface="Cambria Math" panose="02040503050406030204" pitchFamily="18" charset="0"/>
+                      </a:rPr>
+                      <m:t>.</m:t>
+                    </m:r>
+                  </m:oMath>
+                </a14:m>
+                <a:endParaRPr lang="pt-BR" b="0" dirty="0"/>
+              </a:p>
+              <a:p>
+                <a:r>
+                  <a:rPr lang="pt-BR" dirty="0"/>
+                  <a:t>Os rótulos são representados como </a:t>
+                </a:r>
+                <a:r>
+                  <a:rPr lang="pt-BR" b="1" dirty="0"/>
+                  <a:t>vetores binários</a:t>
+                </a:r>
+                <a:r>
+                  <a:rPr lang="pt-BR" dirty="0"/>
+                  <a:t> </a:t>
+                </a:r>
+                <a14:m>
+                  <m:oMath xmlns:m="http://schemas.openxmlformats.org/officeDocument/2006/math">
+                    <m:r>
+                      <a:rPr lang="pt-BR" i="1" smtClean="0">
+                        <a:latin typeface="Cambria Math" panose="02040503050406030204" pitchFamily="18" charset="0"/>
+                        <a:ea typeface="Cambria Math" panose="02040503050406030204" pitchFamily="18" charset="0"/>
+                      </a:rPr>
+                      <m:t>∈</m:t>
+                    </m:r>
+                    <m:sSubSup>
+                      <m:sSubSupPr>
+                        <m:ctrlPr>
+                          <a:rPr lang="pt-BR" b="0" i="1" smtClean="0">
+                            <a:latin typeface="Cambria Math" panose="02040503050406030204" pitchFamily="18" charset="0"/>
+                            <a:ea typeface="Cambria Math" panose="02040503050406030204" pitchFamily="18" charset="0"/>
+                          </a:rPr>
+                        </m:ctrlPr>
+                      </m:sSubSupPr>
+                      <m:e>
+                        <m:r>
+                          <a:rPr lang="pt-BR" b="0" i="1" smtClean="0">
+                            <a:latin typeface="Cambria Math" panose="02040503050406030204" pitchFamily="18" charset="0"/>
+                            <a:ea typeface="Cambria Math" panose="02040503050406030204" pitchFamily="18" charset="0"/>
+                          </a:rPr>
+                          <m:t>ℤ</m:t>
+                        </m:r>
+                      </m:e>
+                      <m:sub>
+                        <m:r>
+                          <a:rPr lang="pt-BR" b="0" i="1" smtClean="0">
+                            <a:latin typeface="Cambria Math" panose="02040503050406030204" pitchFamily="18" charset="0"/>
+                            <a:ea typeface="Cambria Math" panose="02040503050406030204" pitchFamily="18" charset="0"/>
+                          </a:rPr>
+                          <m:t>+</m:t>
+                        </m:r>
+                      </m:sub>
+                      <m:sup>
+                        <m:r>
+                          <a:rPr lang="pt-BR" b="0" i="1" smtClean="0">
+                            <a:latin typeface="Cambria Math" panose="02040503050406030204" pitchFamily="18" charset="0"/>
+                            <a:ea typeface="Cambria Math" panose="02040503050406030204" pitchFamily="18" charset="0"/>
+                          </a:rPr>
+                          <m:t>𝑄</m:t>
+                        </m:r>
+                        <m:r>
+                          <a:rPr lang="pt-BR" b="0" i="1" smtClean="0">
+                            <a:latin typeface="Cambria Math" panose="02040503050406030204" pitchFamily="18" charset="0"/>
+                            <a:ea typeface="Cambria Math" panose="02040503050406030204" pitchFamily="18" charset="0"/>
+                          </a:rPr>
+                          <m:t>×1</m:t>
+                        </m:r>
+                      </m:sup>
+                    </m:sSubSup>
+                  </m:oMath>
+                </a14:m>
+                <a:r>
+                  <a:rPr lang="pt-BR" dirty="0"/>
+                  <a:t>.</a:t>
+                </a:r>
+              </a:p>
+              <a:p>
+                <a:r>
+                  <a:rPr lang="pt-BR" b="1" dirty="0"/>
+                  <a:t>Exemplo</a:t>
+                </a:r>
+                <a:r>
+                  <a:rPr lang="pt-BR" dirty="0"/>
+                  <a:t>: classificação de imagens em 4 </a:t>
+                </a:r>
+                <a:r>
+                  <a:rPr lang="pt-BR" b="1" dirty="0"/>
+                  <a:t>classes mutuamente excludentes</a:t>
+                </a:r>
+                <a:r>
+                  <a:rPr lang="pt-BR" dirty="0"/>
+                  <a:t>: gato, rato, cachorro e sapo:</a:t>
+                </a:r>
+                <a:endParaRPr lang="pt-BR" sz="100" dirty="0"/>
+              </a:p>
+              <a:p>
+                <a:pPr marL="0" indent="0">
+                  <a:buNone/>
+                </a:pPr>
+                <a14:m>
+                  <m:oMathPara xmlns:m="http://schemas.openxmlformats.org/officeDocument/2006/math">
+                    <m:oMathParaPr>
+                      <m:jc m:val="centerGroup"/>
+                    </m:oMathParaPr>
+                    <m:oMath xmlns:m="http://schemas.openxmlformats.org/officeDocument/2006/math">
+                      <m:r>
+                        <a:rPr lang="pt-BR" i="1">
+                          <a:latin typeface="Cambria Math" panose="02040503050406030204" pitchFamily="18" charset="0"/>
+                        </a:rPr>
+                        <m:t>𝑦</m:t>
+                      </m:r>
+                      <m:d>
+                        <m:dPr>
+                          <m:ctrlPr>
+                            <a:rPr lang="pt-BR" i="1">
+                              <a:latin typeface="Cambria Math" panose="02040503050406030204" pitchFamily="18" charset="0"/>
+                            </a:rPr>
+                          </m:ctrlPr>
+                        </m:dPr>
+                        <m:e>
+                          <m:r>
+                            <a:rPr lang="pt-BR" i="1">
+                              <a:latin typeface="Cambria Math" panose="02040503050406030204" pitchFamily="18" charset="0"/>
+                            </a:rPr>
+                            <m:t>𝑖</m:t>
+                          </m:r>
+                        </m:e>
+                      </m:d>
+                      <m:r>
+                        <a:rPr lang="pt-BR" b="1" i="1">
+                          <a:latin typeface="Cambria Math" panose="02040503050406030204" pitchFamily="18" charset="0"/>
+                        </a:rPr>
+                        <m:t>=</m:t>
+                      </m:r>
+                      <m:d>
+                        <m:dPr>
+                          <m:begChr m:val="{"/>
+                          <m:endChr m:val=""/>
+                          <m:ctrlPr>
+                            <a:rPr lang="pt-BR" b="1" i="1">
+                              <a:latin typeface="Cambria Math" panose="02040503050406030204" pitchFamily="18" charset="0"/>
+                            </a:rPr>
+                          </m:ctrlPr>
+                        </m:dPr>
+                        <m:e>
+                          <m:m>
+                            <m:mPr>
+                              <m:mcs>
+                                <m:mc>
+                                  <m:mcPr>
+                                    <m:count m:val="2"/>
+                                    <m:mcJc m:val="center"/>
+                                  </m:mcPr>
+                                </m:mc>
+                              </m:mcs>
+                              <m:ctrlPr>
+                                <a:rPr lang="pt-BR" b="1" i="1" smtClean="0">
+                                  <a:latin typeface="Cambria Math" panose="02040503050406030204" pitchFamily="18" charset="0"/>
+                                </a:rPr>
+                              </m:ctrlPr>
+                            </m:mPr>
+                            <m:mr>
+                              <m:e>
+                                <m:sSup>
+                                  <m:sSupPr>
+                                    <m:ctrlPr>
+                                      <a:rPr lang="pt-BR" i="1" dirty="0">
+                                        <a:latin typeface="Cambria Math" panose="02040503050406030204" pitchFamily="18" charset="0"/>
+                                      </a:rPr>
+                                    </m:ctrlPr>
+                                  </m:sSupPr>
+                                  <m:e>
+                                    <m:d>
+                                      <m:dPr>
+                                        <m:begChr m:val="["/>
+                                        <m:endChr m:val="]"/>
+                                        <m:ctrlPr>
+                                          <a:rPr lang="pt-BR" i="1" dirty="0">
+                                            <a:latin typeface="Cambria Math" panose="02040503050406030204" pitchFamily="18" charset="0"/>
+                                          </a:rPr>
+                                        </m:ctrlPr>
+                                      </m:dPr>
+                                      <m:e>
+                                        <m:m>
+                                          <m:mPr>
+                                            <m:mcs>
+                                              <m:mc>
+                                                <m:mcPr>
+                                                  <m:count m:val="3"/>
+                                                  <m:mcJc m:val="center"/>
+                                                </m:mcPr>
+                                              </m:mc>
+                                            </m:mcs>
+                                            <m:ctrlPr>
+                                              <a:rPr lang="pt-BR" i="1" dirty="0">
+                                                <a:latin typeface="Cambria Math" panose="02040503050406030204" pitchFamily="18" charset="0"/>
+                                              </a:rPr>
+                                            </m:ctrlPr>
+                                          </m:mPr>
+                                          <m:mr>
+                                            <m:e>
+                                              <m:r>
+                                                <m:rPr>
+                                                  <m:brk m:alnAt="7"/>
+                                                </m:rPr>
+                                                <a:rPr lang="pt-BR" i="1" dirty="0">
+                                                  <a:latin typeface="Cambria Math" panose="02040503050406030204" pitchFamily="18" charset="0"/>
+                                                </a:rPr>
+                                                <m:t>1</m:t>
+                                              </m:r>
+                                            </m:e>
+                                            <m:e>
+                                              <m:r>
+                                                <a:rPr lang="pt-BR" i="1" dirty="0">
+                                                  <a:latin typeface="Cambria Math" panose="02040503050406030204" pitchFamily="18" charset="0"/>
+                                                </a:rPr>
+                                                <m:t>0</m:t>
+                                              </m:r>
+                                            </m:e>
+                                            <m:e>
+                                              <m:m>
+                                                <m:mPr>
+                                                  <m:mcs>
+                                                    <m:mc>
+                                                      <m:mcPr>
+                                                        <m:count m:val="2"/>
+                                                        <m:mcJc m:val="center"/>
+                                                      </m:mcPr>
+                                                    </m:mc>
+                                                  </m:mcs>
+                                                  <m:ctrlPr>
+                                                    <a:rPr lang="pt-BR" i="1" dirty="0">
+                                                      <a:latin typeface="Cambria Math" panose="02040503050406030204" pitchFamily="18" charset="0"/>
+                                                    </a:rPr>
+                                                  </m:ctrlPr>
+                                                </m:mPr>
+                                                <m:mr>
+                                                  <m:e>
+                                                    <m:r>
+                                                      <m:rPr>
+                                                        <m:brk m:alnAt="7"/>
+                                                      </m:rPr>
+                                                      <a:rPr lang="pt-BR" i="1" dirty="0">
+                                                        <a:latin typeface="Cambria Math" panose="02040503050406030204" pitchFamily="18" charset="0"/>
+                                                      </a:rPr>
+                                                      <m:t>0</m:t>
+                                                    </m:r>
+                                                  </m:e>
+                                                  <m:e>
+                                                    <m:r>
+                                                      <a:rPr lang="pt-BR" i="1" dirty="0">
+                                                        <a:latin typeface="Cambria Math" panose="02040503050406030204" pitchFamily="18" charset="0"/>
+                                                      </a:rPr>
+                                                      <m:t>0</m:t>
+                                                    </m:r>
+                                                  </m:e>
+                                                </m:mr>
+                                              </m:m>
+                                            </m:e>
+                                          </m:mr>
+                                        </m:m>
+                                      </m:e>
+                                    </m:d>
+                                  </m:e>
+                                  <m:sup>
+                                    <m:r>
+                                      <a:rPr lang="pt-BR" i="1" dirty="0">
+                                        <a:latin typeface="Cambria Math" panose="02040503050406030204" pitchFamily="18" charset="0"/>
+                                      </a:rPr>
+                                      <m:t>𝑇</m:t>
+                                    </m:r>
+                                  </m:sup>
+                                </m:sSup>
+                                <m:r>
+                                  <a:rPr lang="pt-BR" b="1" i="1" dirty="0" smtClean="0">
+                                    <a:latin typeface="Cambria Math" panose="02040503050406030204" pitchFamily="18" charset="0"/>
+                                  </a:rPr>
+                                  <m:t>,</m:t>
+                                </m:r>
+                              </m:e>
+                              <m:e>
+                                <m:r>
+                                  <a:rPr lang="pt-BR" b="1" i="1">
+                                    <a:latin typeface="Cambria Math" panose="02040503050406030204" pitchFamily="18" charset="0"/>
+                                  </a:rPr>
+                                  <m:t>𝒙</m:t>
+                                </m:r>
+                                <m:d>
+                                  <m:dPr>
+                                    <m:ctrlPr>
+                                      <a:rPr lang="pt-BR" b="1" i="1">
+                                        <a:latin typeface="Cambria Math" panose="02040503050406030204" pitchFamily="18" charset="0"/>
+                                      </a:rPr>
+                                    </m:ctrlPr>
+                                  </m:dPr>
+                                  <m:e>
+                                    <m:r>
+                                      <a:rPr lang="pt-BR" i="1">
+                                        <a:latin typeface="Cambria Math" panose="02040503050406030204" pitchFamily="18" charset="0"/>
+                                      </a:rPr>
+                                      <m:t>𝑖</m:t>
+                                    </m:r>
+                                  </m:e>
+                                </m:d>
+                                <m:r>
+                                  <a:rPr lang="pt-BR" b="1" i="1">
+                                    <a:latin typeface="Cambria Math" panose="02040503050406030204" pitchFamily="18" charset="0"/>
+                                  </a:rPr>
+                                  <m:t> </m:t>
+                                </m:r>
+                                <m:r>
+                                  <a:rPr lang="pt-BR" i="1">
+                                    <a:latin typeface="Cambria Math" panose="02040503050406030204" pitchFamily="18" charset="0"/>
+                                    <a:ea typeface="Cambria Math" panose="02040503050406030204" pitchFamily="18" charset="0"/>
+                                  </a:rPr>
+                                  <m:t>𝜖</m:t>
+                                </m:r>
+                                <m:sSub>
+                                  <m:sSubPr>
+                                    <m:ctrlPr>
+                                      <a:rPr lang="pt-BR" i="1">
+                                        <a:latin typeface="Cambria Math" panose="02040503050406030204" pitchFamily="18" charset="0"/>
+                                      </a:rPr>
+                                    </m:ctrlPr>
+                                  </m:sSubPr>
+                                  <m:e>
+                                    <m:r>
+                                      <a:rPr lang="pt-BR" i="1">
+                                        <a:latin typeface="Cambria Math" panose="02040503050406030204" pitchFamily="18" charset="0"/>
+                                      </a:rPr>
+                                      <m:t> </m:t>
+                                    </m:r>
+                                    <m:r>
+                                      <a:rPr lang="pt-BR" i="1">
+                                        <a:latin typeface="Cambria Math" panose="02040503050406030204" pitchFamily="18" charset="0"/>
+                                      </a:rPr>
+                                      <m:t>𝐶</m:t>
+                                    </m:r>
+                                  </m:e>
+                                  <m:sub>
+                                    <m:r>
+                                      <m:rPr>
+                                        <m:nor/>
+                                      </m:rPr>
+                                      <a:rPr lang="pt-BR" dirty="0"/>
+                                      <m:t>gato</m:t>
+                                    </m:r>
+                                  </m:sub>
+                                </m:sSub>
+                              </m:e>
+                            </m:mr>
+                            <m:mr>
+                              <m:e>
+                                <m:sSup>
+                                  <m:sSupPr>
+                                    <m:ctrlPr>
+                                      <a:rPr lang="pt-BR" i="1" dirty="0">
+                                        <a:latin typeface="Cambria Math" panose="02040503050406030204" pitchFamily="18" charset="0"/>
+                                      </a:rPr>
+                                    </m:ctrlPr>
+                                  </m:sSupPr>
+                                  <m:e>
+                                    <m:d>
+                                      <m:dPr>
+                                        <m:begChr m:val="["/>
+                                        <m:endChr m:val="]"/>
+                                        <m:ctrlPr>
+                                          <a:rPr lang="pt-BR" i="1" dirty="0">
+                                            <a:latin typeface="Cambria Math" panose="02040503050406030204" pitchFamily="18" charset="0"/>
+                                          </a:rPr>
+                                        </m:ctrlPr>
+                                      </m:dPr>
+                                      <m:e>
+                                        <m:m>
+                                          <m:mPr>
+                                            <m:mcs>
+                                              <m:mc>
+                                                <m:mcPr>
+                                                  <m:count m:val="3"/>
+                                                  <m:mcJc m:val="center"/>
+                                                </m:mcPr>
+                                              </m:mc>
+                                            </m:mcs>
+                                            <m:ctrlPr>
+                                              <a:rPr lang="pt-BR" i="1" dirty="0">
+                                                <a:latin typeface="Cambria Math" panose="02040503050406030204" pitchFamily="18" charset="0"/>
+                                              </a:rPr>
+                                            </m:ctrlPr>
+                                          </m:mPr>
+                                          <m:mr>
+                                            <m:e>
+                                              <m:r>
+                                                <m:rPr>
+                                                  <m:brk m:alnAt="7"/>
+                                                </m:rPr>
+                                                <a:rPr lang="pt-BR" i="1" dirty="0">
+                                                  <a:latin typeface="Cambria Math" panose="02040503050406030204" pitchFamily="18" charset="0"/>
+                                                </a:rPr>
+                                                <m:t>0</m:t>
+                                              </m:r>
+                                            </m:e>
+                                            <m:e>
+                                              <m:r>
+                                                <a:rPr lang="pt-BR" i="1" dirty="0">
+                                                  <a:latin typeface="Cambria Math" panose="02040503050406030204" pitchFamily="18" charset="0"/>
+                                                </a:rPr>
+                                                <m:t>1</m:t>
+                                              </m:r>
+                                            </m:e>
+                                            <m:e>
+                                              <m:m>
+                                                <m:mPr>
+                                                  <m:mcs>
+                                                    <m:mc>
+                                                      <m:mcPr>
+                                                        <m:count m:val="2"/>
+                                                        <m:mcJc m:val="center"/>
+                                                      </m:mcPr>
+                                                    </m:mc>
+                                                  </m:mcs>
+                                                  <m:ctrlPr>
+                                                    <a:rPr lang="pt-BR" i="1" dirty="0">
+                                                      <a:latin typeface="Cambria Math" panose="02040503050406030204" pitchFamily="18" charset="0"/>
+                                                    </a:rPr>
+                                                  </m:ctrlPr>
+                                                </m:mPr>
+                                                <m:mr>
+                                                  <m:e>
+                                                    <m:r>
+                                                      <m:rPr>
+                                                        <m:brk m:alnAt="7"/>
+                                                      </m:rPr>
+                                                      <a:rPr lang="pt-BR" i="1" dirty="0">
+                                                        <a:latin typeface="Cambria Math" panose="02040503050406030204" pitchFamily="18" charset="0"/>
+                                                      </a:rPr>
+                                                      <m:t>0</m:t>
+                                                    </m:r>
+                                                  </m:e>
+                                                  <m:e>
+                                                    <m:r>
+                                                      <a:rPr lang="pt-BR" i="1" dirty="0">
+                                                        <a:latin typeface="Cambria Math" panose="02040503050406030204" pitchFamily="18" charset="0"/>
+                                                      </a:rPr>
+                                                      <m:t>0</m:t>
+                                                    </m:r>
+                                                  </m:e>
+                                                </m:mr>
+                                              </m:m>
+                                            </m:e>
+                                          </m:mr>
+                                        </m:m>
+                                      </m:e>
+                                    </m:d>
+                                  </m:e>
+                                  <m:sup>
+                                    <m:r>
+                                      <a:rPr lang="pt-BR" i="1" dirty="0">
+                                        <a:latin typeface="Cambria Math" panose="02040503050406030204" pitchFamily="18" charset="0"/>
+                                      </a:rPr>
+                                      <m:t>𝑇</m:t>
+                                    </m:r>
+                                  </m:sup>
+                                </m:sSup>
+                                <m:r>
+                                  <a:rPr lang="pt-BR" b="0" i="1" dirty="0" smtClean="0">
+                                    <a:latin typeface="Cambria Math" panose="02040503050406030204" pitchFamily="18" charset="0"/>
+                                  </a:rPr>
+                                  <m:t>,</m:t>
+                                </m:r>
+                              </m:e>
+                              <m:e>
+                                <m:r>
+                                  <a:rPr lang="pt-BR" b="1" i="1">
+                                    <a:latin typeface="Cambria Math" panose="02040503050406030204" pitchFamily="18" charset="0"/>
+                                  </a:rPr>
+                                  <m:t>𝒙</m:t>
+                                </m:r>
+                                <m:d>
+                                  <m:dPr>
+                                    <m:ctrlPr>
+                                      <a:rPr lang="pt-BR" b="1" i="1">
+                                        <a:latin typeface="Cambria Math" panose="02040503050406030204" pitchFamily="18" charset="0"/>
+                                      </a:rPr>
+                                    </m:ctrlPr>
+                                  </m:dPr>
+                                  <m:e>
+                                    <m:r>
+                                      <a:rPr lang="pt-BR" i="1">
+                                        <a:latin typeface="Cambria Math" panose="02040503050406030204" pitchFamily="18" charset="0"/>
+                                      </a:rPr>
+                                      <m:t>𝑖</m:t>
+                                    </m:r>
+                                  </m:e>
+                                </m:d>
+                                <m:r>
+                                  <a:rPr lang="pt-BR" b="1" i="1">
+                                    <a:latin typeface="Cambria Math" panose="02040503050406030204" pitchFamily="18" charset="0"/>
+                                  </a:rPr>
+                                  <m:t> </m:t>
+                                </m:r>
+                                <m:r>
+                                  <a:rPr lang="pt-BR" i="1">
+                                    <a:latin typeface="Cambria Math" panose="02040503050406030204" pitchFamily="18" charset="0"/>
+                                    <a:ea typeface="Cambria Math" panose="02040503050406030204" pitchFamily="18" charset="0"/>
+                                  </a:rPr>
+                                  <m:t>𝜖</m:t>
+                                </m:r>
+                                <m:sSub>
+                                  <m:sSubPr>
+                                    <m:ctrlPr>
+                                      <a:rPr lang="pt-BR" i="1">
+                                        <a:latin typeface="Cambria Math" panose="02040503050406030204" pitchFamily="18" charset="0"/>
+                                      </a:rPr>
+                                    </m:ctrlPr>
+                                  </m:sSubPr>
+                                  <m:e>
+                                    <m:r>
+                                      <a:rPr lang="pt-BR" i="1">
+                                        <a:latin typeface="Cambria Math" panose="02040503050406030204" pitchFamily="18" charset="0"/>
+                                      </a:rPr>
+                                      <m:t> </m:t>
+                                    </m:r>
+                                    <m:r>
+                                      <a:rPr lang="pt-BR" i="1">
+                                        <a:latin typeface="Cambria Math" panose="02040503050406030204" pitchFamily="18" charset="0"/>
+                                      </a:rPr>
+                                      <m:t>𝐶</m:t>
+                                    </m:r>
+                                  </m:e>
+                                  <m:sub>
+                                    <m:r>
+                                      <m:rPr>
+                                        <m:nor/>
+                                      </m:rPr>
+                                      <a:rPr lang="pt-BR" dirty="0"/>
+                                      <m:t>rato</m:t>
+                                    </m:r>
+                                  </m:sub>
+                                </m:sSub>
+                              </m:e>
+                            </m:mr>
+                            <m:mr>
+                              <m:e>
+                                <m:m>
+                                  <m:mPr>
+                                    <m:mcs>
+                                      <m:mc>
+                                        <m:mcPr>
+                                          <m:count m:val="1"/>
+                                          <m:mcJc m:val="center"/>
+                                        </m:mcPr>
+                                      </m:mc>
+                                    </m:mcs>
+                                    <m:ctrlPr>
+                                      <a:rPr lang="pt-BR" b="1" i="1" smtClean="0">
+                                        <a:latin typeface="Cambria Math" panose="02040503050406030204" pitchFamily="18" charset="0"/>
+                                      </a:rPr>
+                                    </m:ctrlPr>
+                                  </m:mPr>
+                                  <m:mr>
+                                    <m:e>
+                                      <m:sSup>
+                                        <m:sSupPr>
+                                          <m:ctrlPr>
+                                            <a:rPr lang="pt-BR" i="1" dirty="0">
+                                              <a:latin typeface="Cambria Math" panose="02040503050406030204" pitchFamily="18" charset="0"/>
+                                            </a:rPr>
+                                          </m:ctrlPr>
+                                        </m:sSupPr>
+                                        <m:e>
+                                          <m:d>
+                                            <m:dPr>
+                                              <m:begChr m:val="["/>
+                                              <m:endChr m:val="]"/>
+                                              <m:ctrlPr>
+                                                <a:rPr lang="pt-BR" i="1" dirty="0">
+                                                  <a:latin typeface="Cambria Math" panose="02040503050406030204" pitchFamily="18" charset="0"/>
+                                                </a:rPr>
+                                              </m:ctrlPr>
+                                            </m:dPr>
+                                            <m:e>
+                                              <m:m>
+                                                <m:mPr>
+                                                  <m:mcs>
+                                                    <m:mc>
+                                                      <m:mcPr>
+                                                        <m:count m:val="3"/>
+                                                        <m:mcJc m:val="center"/>
+                                                      </m:mcPr>
+                                                    </m:mc>
+                                                  </m:mcs>
+                                                  <m:ctrlPr>
+                                                    <a:rPr lang="pt-BR" i="1" dirty="0">
+                                                      <a:latin typeface="Cambria Math" panose="02040503050406030204" pitchFamily="18" charset="0"/>
+                                                    </a:rPr>
+                                                  </m:ctrlPr>
+                                                </m:mPr>
+                                                <m:mr>
+                                                  <m:e>
+                                                    <m:r>
+                                                      <m:rPr>
+                                                        <m:brk m:alnAt="7"/>
+                                                      </m:rPr>
+                                                      <a:rPr lang="pt-BR" i="1" dirty="0">
+                                                        <a:latin typeface="Cambria Math" panose="02040503050406030204" pitchFamily="18" charset="0"/>
+                                                      </a:rPr>
+                                                      <m:t>0</m:t>
+                                                    </m:r>
+                                                  </m:e>
+                                                  <m:e>
+                                                    <m:r>
+                                                      <a:rPr lang="pt-BR" i="1" dirty="0">
+                                                        <a:latin typeface="Cambria Math" panose="02040503050406030204" pitchFamily="18" charset="0"/>
+                                                      </a:rPr>
+                                                      <m:t>0</m:t>
+                                                    </m:r>
+                                                  </m:e>
+                                                  <m:e>
+                                                    <m:m>
+                                                      <m:mPr>
+                                                        <m:mcs>
+                                                          <m:mc>
+                                                            <m:mcPr>
+                                                              <m:count m:val="2"/>
+                                                              <m:mcJc m:val="center"/>
+                                                            </m:mcPr>
+                                                          </m:mc>
+                                                        </m:mcs>
+                                                        <m:ctrlPr>
+                                                          <a:rPr lang="pt-BR" i="1" dirty="0">
+                                                            <a:latin typeface="Cambria Math" panose="02040503050406030204" pitchFamily="18" charset="0"/>
+                                                          </a:rPr>
+                                                        </m:ctrlPr>
+                                                      </m:mPr>
+                                                      <m:mr>
+                                                        <m:e>
+                                                          <m:r>
+                                                            <m:rPr>
+                                                              <m:brk m:alnAt="7"/>
+                                                            </m:rPr>
+                                                            <a:rPr lang="pt-BR" i="1" dirty="0">
+                                                              <a:latin typeface="Cambria Math" panose="02040503050406030204" pitchFamily="18" charset="0"/>
+                                                            </a:rPr>
+                                                            <m:t>1</m:t>
+                                                          </m:r>
+                                                        </m:e>
+                                                        <m:e>
+                                                          <m:r>
+                                                            <a:rPr lang="pt-BR" i="1" dirty="0">
+                                                              <a:latin typeface="Cambria Math" panose="02040503050406030204" pitchFamily="18" charset="0"/>
+                                                            </a:rPr>
+                                                            <m:t>0</m:t>
+                                                          </m:r>
+                                                        </m:e>
+                                                      </m:mr>
+                                                    </m:m>
+                                                  </m:e>
+                                                </m:mr>
+                                              </m:m>
+                                            </m:e>
+                                          </m:d>
+                                        </m:e>
+                                        <m:sup>
+                                          <m:r>
+                                            <a:rPr lang="pt-BR" i="1" dirty="0">
+                                              <a:latin typeface="Cambria Math" panose="02040503050406030204" pitchFamily="18" charset="0"/>
+                                            </a:rPr>
+                                            <m:t>𝑇</m:t>
+                                          </m:r>
+                                        </m:sup>
+                                      </m:sSup>
+                                      <m:r>
+                                        <a:rPr lang="pt-BR" b="1" i="1" dirty="0" smtClean="0">
+                                          <a:latin typeface="Cambria Math" panose="02040503050406030204" pitchFamily="18" charset="0"/>
+                                        </a:rPr>
+                                        <m:t>,</m:t>
+                                      </m:r>
+                                    </m:e>
+                                  </m:mr>
+                                  <m:mr>
+                                    <m:e>
+                                      <m:sSup>
+                                        <m:sSupPr>
+                                          <m:ctrlPr>
+                                            <a:rPr lang="pt-BR" i="1" dirty="0">
+                                              <a:latin typeface="Cambria Math" panose="02040503050406030204" pitchFamily="18" charset="0"/>
+                                            </a:rPr>
+                                          </m:ctrlPr>
+                                        </m:sSupPr>
+                                        <m:e>
+                                          <m:d>
+                                            <m:dPr>
+                                              <m:begChr m:val="["/>
+                                              <m:endChr m:val="]"/>
+                                              <m:ctrlPr>
+                                                <a:rPr lang="pt-BR" i="1" dirty="0">
+                                                  <a:latin typeface="Cambria Math" panose="02040503050406030204" pitchFamily="18" charset="0"/>
+                                                </a:rPr>
+                                              </m:ctrlPr>
+                                            </m:dPr>
+                                            <m:e>
+                                              <m:m>
+                                                <m:mPr>
+                                                  <m:mcs>
+                                                    <m:mc>
+                                                      <m:mcPr>
+                                                        <m:count m:val="3"/>
+                                                        <m:mcJc m:val="center"/>
+                                                      </m:mcPr>
+                                                    </m:mc>
+                                                  </m:mcs>
+                                                  <m:ctrlPr>
+                                                    <a:rPr lang="pt-BR" i="1" dirty="0">
+                                                      <a:latin typeface="Cambria Math" panose="02040503050406030204" pitchFamily="18" charset="0"/>
+                                                    </a:rPr>
+                                                  </m:ctrlPr>
+                                                </m:mPr>
+                                                <m:mr>
+                                                  <m:e>
+                                                    <m:r>
+                                                      <m:rPr>
+                                                        <m:brk m:alnAt="7"/>
+                                                      </m:rPr>
+                                                      <a:rPr lang="pt-BR" i="1" dirty="0">
+                                                        <a:latin typeface="Cambria Math" panose="02040503050406030204" pitchFamily="18" charset="0"/>
+                                                      </a:rPr>
+                                                      <m:t>0</m:t>
+                                                    </m:r>
+                                                  </m:e>
+                                                  <m:e>
+                                                    <m:r>
+                                                      <a:rPr lang="pt-BR" i="1" dirty="0">
+                                                        <a:latin typeface="Cambria Math" panose="02040503050406030204" pitchFamily="18" charset="0"/>
+                                                      </a:rPr>
+                                                      <m:t>0</m:t>
+                                                    </m:r>
+                                                  </m:e>
+                                                  <m:e>
+                                                    <m:m>
+                                                      <m:mPr>
+                                                        <m:mcs>
+                                                          <m:mc>
+                                                            <m:mcPr>
+                                                              <m:count m:val="2"/>
+                                                              <m:mcJc m:val="center"/>
+                                                            </m:mcPr>
+                                                          </m:mc>
+                                                        </m:mcs>
+                                                        <m:ctrlPr>
+                                                          <a:rPr lang="pt-BR" i="1" dirty="0">
+                                                            <a:latin typeface="Cambria Math" panose="02040503050406030204" pitchFamily="18" charset="0"/>
+                                                          </a:rPr>
+                                                        </m:ctrlPr>
+                                                      </m:mPr>
+                                                      <m:mr>
+                                                        <m:e>
+                                                          <m:r>
+                                                            <m:rPr>
+                                                              <m:brk m:alnAt="7"/>
+                                                            </m:rPr>
+                                                            <a:rPr lang="pt-BR" i="1" dirty="0">
+                                                              <a:latin typeface="Cambria Math" panose="02040503050406030204" pitchFamily="18" charset="0"/>
+                                                            </a:rPr>
+                                                            <m:t>0</m:t>
+                                                          </m:r>
+                                                        </m:e>
+                                                        <m:e>
+                                                          <m:r>
+                                                            <a:rPr lang="pt-BR" i="1" dirty="0">
+                                                              <a:latin typeface="Cambria Math" panose="02040503050406030204" pitchFamily="18" charset="0"/>
+                                                            </a:rPr>
+                                                            <m:t>1</m:t>
+                                                          </m:r>
+                                                        </m:e>
+                                                      </m:mr>
+                                                    </m:m>
+                                                  </m:e>
+                                                </m:mr>
+                                              </m:m>
+                                            </m:e>
+                                          </m:d>
+                                        </m:e>
+                                        <m:sup>
+                                          <m:r>
+                                            <a:rPr lang="pt-BR" i="1" dirty="0">
+                                              <a:latin typeface="Cambria Math" panose="02040503050406030204" pitchFamily="18" charset="0"/>
+                                            </a:rPr>
+                                            <m:t>𝑇</m:t>
+                                          </m:r>
+                                        </m:sup>
+                                      </m:sSup>
+                                      <m:r>
+                                        <a:rPr lang="pt-BR" b="0" i="1" dirty="0" smtClean="0">
+                                          <a:latin typeface="Cambria Math" panose="02040503050406030204" pitchFamily="18" charset="0"/>
+                                        </a:rPr>
+                                        <m:t>,</m:t>
+                                      </m:r>
+                                    </m:e>
+                                  </m:mr>
+                                </m:m>
+                              </m:e>
+                              <m:e>
+                                <m:m>
+                                  <m:mPr>
+                                    <m:mcs>
+                                      <m:mc>
+                                        <m:mcPr>
+                                          <m:count m:val="1"/>
+                                          <m:mcJc m:val="center"/>
+                                        </m:mcPr>
+                                      </m:mc>
+                                    </m:mcs>
+                                    <m:ctrlPr>
+                                      <a:rPr lang="pt-BR" b="1" i="1" smtClean="0">
+                                        <a:latin typeface="Cambria Math" panose="02040503050406030204" pitchFamily="18" charset="0"/>
+                                      </a:rPr>
+                                    </m:ctrlPr>
+                                  </m:mPr>
+                                  <m:mr>
+                                    <m:e>
+                                      <m:r>
+                                        <m:rPr>
+                                          <m:brk m:alnAt="7"/>
+                                        </m:rPr>
+                                        <a:rPr lang="pt-BR" b="1" i="1" smtClean="0">
+                                          <a:latin typeface="Cambria Math" panose="02040503050406030204" pitchFamily="18" charset="0"/>
+                                        </a:rPr>
+                                        <m:t>        </m:t>
+                                      </m:r>
+                                      <m:r>
+                                        <a:rPr lang="pt-BR" b="1" i="1">
+                                          <a:latin typeface="Cambria Math" panose="02040503050406030204" pitchFamily="18" charset="0"/>
+                                        </a:rPr>
+                                        <m:t>𝒙</m:t>
+                                      </m:r>
+                                      <m:d>
+                                        <m:dPr>
+                                          <m:ctrlPr>
+                                            <a:rPr lang="pt-BR" b="1" i="1">
+                                              <a:latin typeface="Cambria Math" panose="02040503050406030204" pitchFamily="18" charset="0"/>
+                                            </a:rPr>
+                                          </m:ctrlPr>
+                                        </m:dPr>
+                                        <m:e>
+                                          <m:r>
+                                            <a:rPr lang="pt-BR" i="1">
+                                              <a:latin typeface="Cambria Math" panose="02040503050406030204" pitchFamily="18" charset="0"/>
+                                            </a:rPr>
+                                            <m:t>𝑖</m:t>
+                                          </m:r>
+                                        </m:e>
+                                      </m:d>
+                                      <m:r>
+                                        <a:rPr lang="pt-BR" b="1" i="1">
+                                          <a:latin typeface="Cambria Math" panose="02040503050406030204" pitchFamily="18" charset="0"/>
+                                        </a:rPr>
+                                        <m:t> </m:t>
+                                      </m:r>
+                                      <m:r>
+                                        <a:rPr lang="pt-BR" i="1">
+                                          <a:latin typeface="Cambria Math" panose="02040503050406030204" pitchFamily="18" charset="0"/>
+                                          <a:ea typeface="Cambria Math" panose="02040503050406030204" pitchFamily="18" charset="0"/>
+                                        </a:rPr>
+                                        <m:t>𝜖</m:t>
+                                      </m:r>
+                                      <m:sSub>
+                                        <m:sSubPr>
+                                          <m:ctrlPr>
+                                            <a:rPr lang="pt-BR" i="1">
+                                              <a:latin typeface="Cambria Math" panose="02040503050406030204" pitchFamily="18" charset="0"/>
+                                            </a:rPr>
+                                          </m:ctrlPr>
+                                        </m:sSubPr>
+                                        <m:e>
+                                          <m:r>
+                                            <a:rPr lang="pt-BR" i="1">
+                                              <a:latin typeface="Cambria Math" panose="02040503050406030204" pitchFamily="18" charset="0"/>
+                                            </a:rPr>
+                                            <m:t> </m:t>
+                                          </m:r>
+                                          <m:r>
+                                            <a:rPr lang="pt-BR" i="1">
+                                              <a:latin typeface="Cambria Math" panose="02040503050406030204" pitchFamily="18" charset="0"/>
+                                            </a:rPr>
+                                            <m:t>𝐶</m:t>
+                                          </m:r>
+                                        </m:e>
+                                        <m:sub>
+                                          <m:r>
+                                            <m:rPr>
+                                              <m:nor/>
+                                            </m:rPr>
+                                            <a:rPr lang="pt-BR" dirty="0"/>
+                                            <m:t>cachorro</m:t>
+                                          </m:r>
+                                        </m:sub>
+                                      </m:sSub>
+                                    </m:e>
+                                  </m:mr>
+                                  <m:mr>
+                                    <m:e>
+                                      <m:r>
+                                        <a:rPr lang="pt-BR" b="1" i="1">
+                                          <a:latin typeface="Cambria Math" panose="02040503050406030204" pitchFamily="18" charset="0"/>
+                                        </a:rPr>
+                                        <m:t>𝒙</m:t>
+                                      </m:r>
+                                      <m:d>
+                                        <m:dPr>
+                                          <m:ctrlPr>
+                                            <a:rPr lang="pt-BR" b="1" i="1">
+                                              <a:latin typeface="Cambria Math" panose="02040503050406030204" pitchFamily="18" charset="0"/>
+                                            </a:rPr>
+                                          </m:ctrlPr>
+                                        </m:dPr>
+                                        <m:e>
+                                          <m:r>
+                                            <a:rPr lang="pt-BR" i="1">
+                                              <a:latin typeface="Cambria Math" panose="02040503050406030204" pitchFamily="18" charset="0"/>
+                                            </a:rPr>
+                                            <m:t>𝑖</m:t>
+                                          </m:r>
+                                        </m:e>
+                                      </m:d>
+                                      <m:r>
+                                        <a:rPr lang="pt-BR" b="1" i="1">
+                                          <a:latin typeface="Cambria Math" panose="02040503050406030204" pitchFamily="18" charset="0"/>
+                                        </a:rPr>
+                                        <m:t> </m:t>
+                                      </m:r>
+                                      <m:r>
+                                        <a:rPr lang="pt-BR" i="1">
+                                          <a:latin typeface="Cambria Math" panose="02040503050406030204" pitchFamily="18" charset="0"/>
+                                          <a:ea typeface="Cambria Math" panose="02040503050406030204" pitchFamily="18" charset="0"/>
+                                        </a:rPr>
+                                        <m:t>𝜖</m:t>
+                                      </m:r>
+                                      <m:sSub>
+                                        <m:sSubPr>
+                                          <m:ctrlPr>
+                                            <a:rPr lang="pt-BR" i="1">
+                                              <a:latin typeface="Cambria Math" panose="02040503050406030204" pitchFamily="18" charset="0"/>
+                                            </a:rPr>
+                                          </m:ctrlPr>
+                                        </m:sSubPr>
+                                        <m:e>
+                                          <m:r>
+                                            <a:rPr lang="pt-BR" i="1">
+                                              <a:latin typeface="Cambria Math" panose="02040503050406030204" pitchFamily="18" charset="0"/>
+                                            </a:rPr>
+                                            <m:t> </m:t>
+                                          </m:r>
+                                          <m:r>
+                                            <a:rPr lang="pt-BR" i="1">
+                                              <a:latin typeface="Cambria Math" panose="02040503050406030204" pitchFamily="18" charset="0"/>
+                                            </a:rPr>
+                                            <m:t>𝐶</m:t>
+                                          </m:r>
+                                        </m:e>
+                                        <m:sub>
+                                          <m:r>
+                                            <m:rPr>
+                                              <m:nor/>
+                                            </m:rPr>
+                                            <a:rPr lang="pt-BR" dirty="0"/>
+                                            <m:t>sapo</m:t>
+                                          </m:r>
+                                        </m:sub>
+                                      </m:sSub>
+                                    </m:e>
+                                  </m:mr>
+                                </m:m>
+                              </m:e>
+                            </m:mr>
+                          </m:m>
+                        </m:e>
+                      </m:d>
+                      <m:r>
+                        <a:rPr lang="pt-BR" b="1" i="1" smtClean="0">
+                          <a:latin typeface="Cambria Math" panose="02040503050406030204" pitchFamily="18" charset="0"/>
+                        </a:rPr>
+                        <m:t>.</m:t>
+                      </m:r>
+                    </m:oMath>
+                  </m:oMathPara>
+                </a14:m>
+                <a:endParaRPr lang="pt-BR" dirty="0"/>
+              </a:p>
+              <a:p>
+                <a:r>
+                  <a:rPr lang="pt-BR" dirty="0"/>
+                  <a:t>Essa representação é conhecida como codificação </a:t>
+                </a:r>
+                <a:r>
+                  <a:rPr lang="pt-BR" b="1" i="1" dirty="0" err="1"/>
+                  <a:t>one</a:t>
+                </a:r>
+                <a:r>
+                  <a:rPr lang="pt-BR" b="1" i="1" dirty="0"/>
+                  <a:t>-hot</a:t>
+                </a:r>
+                <a:r>
+                  <a:rPr lang="pt-BR" dirty="0"/>
+                  <a:t>.</a:t>
+                </a:r>
+              </a:p>
+              <a:p>
+                <a:r>
+                  <a:rPr lang="pt-BR" dirty="0"/>
+                  <a:t>Muito usado em redes neurais e regressão </a:t>
+                </a:r>
+                <a:r>
+                  <a:rPr lang="pt-BR" i="1" dirty="0"/>
+                  <a:t>softmax</a:t>
+                </a:r>
+                <a:r>
+                  <a:rPr lang="pt-BR" dirty="0"/>
+                  <a:t>.</a:t>
+                </a:r>
+              </a:p>
+            </p:txBody>
+          </p:sp>
+        </mc:Choice>
+        <mc:Fallback>
+          <p:sp>
+            <p:nvSpPr>
+              <p:cNvPr id="3" name="Content Placeholder 2">
+                <a:extLst>
+                  <a:ext uri="{FF2B5EF4-FFF2-40B4-BE49-F238E27FC236}">
+                    <a16:creationId xmlns:a16="http://schemas.microsoft.com/office/drawing/2014/main" id="{5D34CF39-62BC-DA90-F244-DCDEF2E97DC7}"/>
+                  </a:ext>
+                </a:extLst>
+              </p:cNvPr>
+              <p:cNvSpPr>
+                <a:spLocks noGrp="1" noRot="1" noChangeAspect="1" noMove="1" noResize="1" noEditPoints="1" noAdjustHandles="1" noChangeArrowheads="1" noChangeShapeType="1" noTextEdit="1"/>
+              </p:cNvSpPr>
+              <p:nvPr>
+                <p:ph idx="1"/>
+              </p:nvPr>
+            </p:nvSpPr>
+            <p:spPr>
+              <a:xfrm>
+                <a:off x="838200" y="1825624"/>
+                <a:ext cx="11255830" cy="5032376"/>
+              </a:xfrm>
+              <a:blipFill>
+                <a:blip r:embed="rId2"/>
+                <a:stretch>
+                  <a:fillRect l="-975" t="-2663" r="-1246" b="-1453"/>
+                </a:stretch>
+              </a:blipFill>
+            </p:spPr>
+            <p:txBody>
+              <a:bodyPr/>
+              <a:lstStyle/>
+              <a:p>
+                <a:r>
+                  <a:rPr lang="en-US">
+                    <a:noFill/>
+                  </a:rPr>
+                  <a:t> </a:t>
+                </a:r>
+              </a:p>
+            </p:txBody>
+          </p:sp>
+        </mc:Fallback>
+      </mc:AlternateContent>
+    </p:spTree>
+    <p:extLst>
+      <p:ext uri="{BB962C8B-B14F-4D97-AF65-F5344CB8AC3E}">
+        <p14:creationId xmlns:p14="http://schemas.microsoft.com/office/powerpoint/2010/main" val="3550105276"/>
+      </p:ext>
+    </p:extLst>
+  </p:cSld>
+  <p:clrMapOvr>
+    <a:masterClrMapping/>
+  </p:clrMapOvr>
+</p:sld>
+</file>
+
+<file path=ppt/slides/slide12.xml><?xml version="1.0" encoding="utf-8"?>
+<p:sld xmlns:a="http://schemas.openxmlformats.org/drawingml/2006/main" xmlns:r="http://schemas.openxmlformats.org/officeDocument/2006/relationships" xmlns:p="http://schemas.openxmlformats.org/presentationml/2006/main">
+  <p:cSld>
+    <p:spTree>
+      <p:nvGrpSpPr>
+        <p:cNvPr id="1" name="">
+          <a:extLst>
+            <a:ext uri="{FF2B5EF4-FFF2-40B4-BE49-F238E27FC236}">
+              <a16:creationId xmlns:a16="http://schemas.microsoft.com/office/drawing/2014/main" id="{8FC9AE89-C8AC-DBE6-CA38-DEEF4996DFD9}"/>
+            </a:ext>
+          </a:extLst>
+        </p:cNvPr>
+        <p:cNvGrpSpPr/>
+        <p:nvPr/>
+      </p:nvGrpSpPr>
+      <p:grpSpPr>
+        <a:xfrm>
+          <a:off x="0" y="0"/>
+          <a:ext cx="0" cy="0"/>
+          <a:chOff x="0" y="0"/>
+          <a:chExt cx="0" cy="0"/>
+        </a:xfrm>
+      </p:grpSpPr>
       <p:sp>
         <p:nvSpPr>
-          <p:cNvPr id="3" name="Content Placeholder 2">
+          <p:cNvPr id="2" name="Title 1">
             <a:extLst>
               <a:ext uri="{FF2B5EF4-FFF2-40B4-BE49-F238E27FC236}">
-                <a16:creationId xmlns:a16="http://schemas.microsoft.com/office/drawing/2014/main" id="{E5A0C298-3D62-58C4-3B44-8F0C5C3E0A0C}"/>
+                <a16:creationId xmlns:a16="http://schemas.microsoft.com/office/drawing/2014/main" id="{2CE4CC5F-008A-ECCB-8340-EE6C2C24E916}"/>
               </a:ext>
             </a:extLst>
           </p:cNvPr>
@@ -5565,7 +7376,7 @@
             <a:spLocks noGrp="1"/>
           </p:cNvSpPr>
           <p:nvPr>
-            <p:ph idx="1"/>
+            <p:ph type="title"/>
           </p:nvPr>
         </p:nvSpPr>
         <p:spPr/>
@@ -5573,14 +7384,1430 @@
           <a:bodyPr/>
           <a:lstStyle/>
           <a:p>
-            <a:endParaRPr lang="en-US"/>
+            <a:r>
+              <a:rPr lang="en-US" dirty="0" err="1"/>
+              <a:t>Classificação</a:t>
+            </a:r>
+            <a:r>
+              <a:rPr lang="en-US" dirty="0"/>
+              <a:t> </a:t>
+            </a:r>
+            <a:r>
+              <a:rPr lang="en-US" i="1" dirty="0"/>
+              <a:t>multilabel</a:t>
+            </a:r>
+            <a:endParaRPr lang="pt-BR" i="1" dirty="0"/>
           </a:p>
         </p:txBody>
       </p:sp>
+      <mc:AlternateContent xmlns:mc="http://schemas.openxmlformats.org/markup-compatibility/2006">
+        <mc:Choice xmlns:a14="http://schemas.microsoft.com/office/drawing/2010/main" Requires="a14">
+          <p:sp>
+            <p:nvSpPr>
+              <p:cNvPr id="3" name="Content Placeholder 2">
+                <a:extLst>
+                  <a:ext uri="{FF2B5EF4-FFF2-40B4-BE49-F238E27FC236}">
+                    <a16:creationId xmlns:a16="http://schemas.microsoft.com/office/drawing/2014/main" id="{1237A257-D85C-E351-5085-80BCF81401BB}"/>
+                  </a:ext>
+                </a:extLst>
+              </p:cNvPr>
+              <p:cNvSpPr>
+                <a:spLocks noGrp="1"/>
+              </p:cNvSpPr>
+              <p:nvPr>
+                <p:ph idx="1"/>
+              </p:nvPr>
+            </p:nvSpPr>
+            <p:spPr>
+              <a:xfrm>
+                <a:off x="838200" y="1825624"/>
+                <a:ext cx="11255830" cy="5032376"/>
+              </a:xfrm>
+            </p:spPr>
+            <p:txBody>
+              <a:bodyPr>
+                <a:normAutofit/>
+              </a:bodyPr>
+              <a:lstStyle/>
+              <a:p>
+                <a:r>
+                  <a:rPr lang="pt-BR" dirty="0"/>
+                  <a:t>O classificador </a:t>
+                </a:r>
+                <a:r>
+                  <a:rPr lang="pt-BR" dirty="0">
+                    <a:solidFill>
+                      <a:schemeClr val="tx1"/>
+                    </a:solidFill>
+                  </a:rPr>
+                  <a:t>tem </a:t>
+                </a:r>
+                <a14:m>
+                  <m:oMath xmlns:m="http://schemas.openxmlformats.org/officeDocument/2006/math">
+                    <m:r>
+                      <a:rPr lang="pt-BR" b="1" i="1" smtClean="0">
+                        <a:solidFill>
+                          <a:schemeClr val="tx1"/>
+                        </a:solidFill>
+                        <a:latin typeface="Cambria Math" panose="02040503050406030204" pitchFamily="18" charset="0"/>
+                      </a:rPr>
+                      <m:t>𝑸</m:t>
+                    </m:r>
+                  </m:oMath>
+                </a14:m>
+                <a:r>
+                  <a:rPr lang="pt-BR" b="1" dirty="0">
+                    <a:solidFill>
+                      <a:schemeClr val="tx1"/>
+                    </a:solidFill>
+                  </a:rPr>
+                  <a:t> saídas escalares</a:t>
+                </a:r>
+                <a:r>
+                  <a:rPr lang="pt-BR" dirty="0">
+                    <a:solidFill>
+                      <a:schemeClr val="tx1"/>
+                    </a:solidFill>
+                  </a:rPr>
+                  <a:t>, </a:t>
+                </a:r>
+                <a:r>
+                  <a:rPr lang="pt-BR" b="1" dirty="0">
+                    <a:solidFill>
+                      <a:schemeClr val="tx1"/>
+                    </a:solidFill>
+                  </a:rPr>
+                  <a:t>uma para cada classe</a:t>
+                </a:r>
+                <a:r>
+                  <a:rPr lang="pt-BR" dirty="0">
+                    <a:solidFill>
+                      <a:schemeClr val="tx1"/>
+                    </a:solidFill>
+                  </a:rPr>
+                  <a:t>, porém, </a:t>
+                </a:r>
+                <a:r>
+                  <a:rPr lang="pt-BR" dirty="0"/>
+                  <a:t>cada </a:t>
+                </a:r>
+                <a14:m>
+                  <m:oMath xmlns:m="http://schemas.openxmlformats.org/officeDocument/2006/math">
+                    <m:r>
+                      <a:rPr lang="pt-BR" i="1">
+                        <a:latin typeface="Cambria Math" panose="02040503050406030204" pitchFamily="18" charset="0"/>
+                      </a:rPr>
+                      <m:t>𝑖</m:t>
+                    </m:r>
+                  </m:oMath>
+                </a14:m>
+                <a:r>
+                  <a:rPr lang="pt-BR" dirty="0"/>
+                  <a:t>-ésimo vetor de atributos,</a:t>
+                </a:r>
+                <a:r>
+                  <a:rPr lang="pt-BR" b="1" dirty="0"/>
+                  <a:t> </a:t>
+                </a:r>
+                <a14:m>
+                  <m:oMath xmlns:m="http://schemas.openxmlformats.org/officeDocument/2006/math">
+                    <m:r>
+                      <a:rPr lang="pt-BR" b="1" i="1">
+                        <a:latin typeface="Cambria Math" panose="02040503050406030204" pitchFamily="18" charset="0"/>
+                      </a:rPr>
+                      <m:t>𝒙</m:t>
+                    </m:r>
+                    <m:d>
+                      <m:dPr>
+                        <m:ctrlPr>
+                          <a:rPr lang="pt-BR" b="1" i="1">
+                            <a:latin typeface="Cambria Math" panose="02040503050406030204" pitchFamily="18" charset="0"/>
+                          </a:rPr>
+                        </m:ctrlPr>
+                      </m:dPr>
+                      <m:e>
+                        <m:r>
+                          <a:rPr lang="pt-BR" i="1">
+                            <a:latin typeface="Cambria Math" panose="02040503050406030204" pitchFamily="18" charset="0"/>
+                          </a:rPr>
+                          <m:t>𝑖</m:t>
+                        </m:r>
+                      </m:e>
+                    </m:d>
+                  </m:oMath>
+                </a14:m>
+                <a:r>
+                  <a:rPr lang="pt-BR" dirty="0"/>
+                  <a:t> pode pertencer a </a:t>
+                </a:r>
+                <a:r>
+                  <a:rPr lang="pt-BR" b="1" dirty="0"/>
+                  <a:t>várias classes simultaneamente</a:t>
+                </a:r>
+                <a:r>
+                  <a:rPr lang="pt-BR" dirty="0"/>
+                  <a:t>.</a:t>
+                </a:r>
+              </a:p>
+              <a:p>
+                <a:r>
+                  <a:rPr lang="pt-BR" dirty="0"/>
+                  <a:t>Rótulos também são representados como </a:t>
+                </a:r>
+                <a:r>
+                  <a:rPr lang="pt-BR" b="1" dirty="0"/>
+                  <a:t>vetores binários</a:t>
+                </a:r>
+                <a:r>
+                  <a:rPr lang="pt-BR" dirty="0"/>
+                  <a:t> </a:t>
+                </a:r>
+                <a14:m>
+                  <m:oMath xmlns:m="http://schemas.openxmlformats.org/officeDocument/2006/math">
+                    <m:r>
+                      <a:rPr lang="pt-BR" i="1" smtClean="0">
+                        <a:latin typeface="Cambria Math" panose="02040503050406030204" pitchFamily="18" charset="0"/>
+                        <a:ea typeface="Cambria Math" panose="02040503050406030204" pitchFamily="18" charset="0"/>
+                      </a:rPr>
+                      <m:t>∈</m:t>
+                    </m:r>
+                    <m:sSubSup>
+                      <m:sSubSupPr>
+                        <m:ctrlPr>
+                          <a:rPr lang="pt-BR" b="0" i="1" smtClean="0">
+                            <a:latin typeface="Cambria Math" panose="02040503050406030204" pitchFamily="18" charset="0"/>
+                            <a:ea typeface="Cambria Math" panose="02040503050406030204" pitchFamily="18" charset="0"/>
+                          </a:rPr>
+                        </m:ctrlPr>
+                      </m:sSubSupPr>
+                      <m:e>
+                        <m:r>
+                          <a:rPr lang="pt-BR" b="0" i="1" smtClean="0">
+                            <a:latin typeface="Cambria Math" panose="02040503050406030204" pitchFamily="18" charset="0"/>
+                            <a:ea typeface="Cambria Math" panose="02040503050406030204" pitchFamily="18" charset="0"/>
+                          </a:rPr>
+                          <m:t>ℤ</m:t>
+                        </m:r>
+                      </m:e>
+                      <m:sub>
+                        <m:r>
+                          <a:rPr lang="pt-BR" b="0" i="1" smtClean="0">
+                            <a:latin typeface="Cambria Math" panose="02040503050406030204" pitchFamily="18" charset="0"/>
+                            <a:ea typeface="Cambria Math" panose="02040503050406030204" pitchFamily="18" charset="0"/>
+                          </a:rPr>
+                          <m:t>+</m:t>
+                        </m:r>
+                      </m:sub>
+                      <m:sup>
+                        <m:r>
+                          <a:rPr lang="pt-BR" b="0" i="1" smtClean="0">
+                            <a:latin typeface="Cambria Math" panose="02040503050406030204" pitchFamily="18" charset="0"/>
+                            <a:ea typeface="Cambria Math" panose="02040503050406030204" pitchFamily="18" charset="0"/>
+                          </a:rPr>
+                          <m:t>𝑄</m:t>
+                        </m:r>
+                        <m:r>
+                          <a:rPr lang="pt-BR" b="0" i="1" smtClean="0">
+                            <a:latin typeface="Cambria Math" panose="02040503050406030204" pitchFamily="18" charset="0"/>
+                            <a:ea typeface="Cambria Math" panose="02040503050406030204" pitchFamily="18" charset="0"/>
+                          </a:rPr>
+                          <m:t>×1</m:t>
+                        </m:r>
+                      </m:sup>
+                    </m:sSubSup>
+                  </m:oMath>
+                </a14:m>
+                <a:r>
+                  <a:rPr lang="pt-BR" dirty="0"/>
+                  <a:t>.</a:t>
+                </a:r>
+              </a:p>
+              <a:p>
+                <a:r>
+                  <a:rPr lang="pt-BR" b="1" dirty="0"/>
+                  <a:t>Exemplo</a:t>
+                </a:r>
+                <a:r>
+                  <a:rPr lang="pt-BR" dirty="0"/>
+                  <a:t>: classificação de imagens em 4 classes </a:t>
+                </a:r>
+                <a:r>
+                  <a:rPr lang="pt-BR" b="1" dirty="0"/>
+                  <a:t>não excludentes</a:t>
+                </a:r>
+                <a:r>
+                  <a:rPr lang="pt-BR" dirty="0"/>
+                  <a:t>: gato, rato, cachorro e sapo:</a:t>
+                </a:r>
+              </a:p>
+              <a:p>
+                <a:pPr marL="0" indent="0">
+                  <a:buNone/>
+                </a:pPr>
+                <a14:m>
+                  <m:oMathPara xmlns:m="http://schemas.openxmlformats.org/officeDocument/2006/math">
+                    <m:oMathParaPr>
+                      <m:jc m:val="centerGroup"/>
+                    </m:oMathParaPr>
+                    <m:oMath xmlns:m="http://schemas.openxmlformats.org/officeDocument/2006/math">
+                      <m:r>
+                        <a:rPr lang="pt-BR" i="1">
+                          <a:latin typeface="Cambria Math" panose="02040503050406030204" pitchFamily="18" charset="0"/>
+                        </a:rPr>
+                        <m:t>𝑦</m:t>
+                      </m:r>
+                      <m:d>
+                        <m:dPr>
+                          <m:ctrlPr>
+                            <a:rPr lang="pt-BR" i="1">
+                              <a:latin typeface="Cambria Math" panose="02040503050406030204" pitchFamily="18" charset="0"/>
+                            </a:rPr>
+                          </m:ctrlPr>
+                        </m:dPr>
+                        <m:e>
+                          <m:r>
+                            <a:rPr lang="pt-BR" i="1">
+                              <a:latin typeface="Cambria Math" panose="02040503050406030204" pitchFamily="18" charset="0"/>
+                            </a:rPr>
+                            <m:t>𝑖</m:t>
+                          </m:r>
+                        </m:e>
+                      </m:d>
+                      <m:r>
+                        <a:rPr lang="pt-BR" b="1" i="1">
+                          <a:latin typeface="Cambria Math" panose="02040503050406030204" pitchFamily="18" charset="0"/>
+                        </a:rPr>
+                        <m:t>=</m:t>
+                      </m:r>
+                      <m:d>
+                        <m:dPr>
+                          <m:begChr m:val="{"/>
+                          <m:endChr m:val=""/>
+                          <m:ctrlPr>
+                            <a:rPr lang="pt-BR" b="1" i="1">
+                              <a:latin typeface="Cambria Math" panose="02040503050406030204" pitchFamily="18" charset="0"/>
+                            </a:rPr>
+                          </m:ctrlPr>
+                        </m:dPr>
+                        <m:e>
+                          <m:m>
+                            <m:mPr>
+                              <m:mcs>
+                                <m:mc>
+                                  <m:mcPr>
+                                    <m:count m:val="2"/>
+                                    <m:mcJc m:val="center"/>
+                                  </m:mcPr>
+                                </m:mc>
+                              </m:mcs>
+                              <m:ctrlPr>
+                                <a:rPr lang="pt-BR" b="1" i="1" smtClean="0">
+                                  <a:latin typeface="Cambria Math" panose="02040503050406030204" pitchFamily="18" charset="0"/>
+                                </a:rPr>
+                              </m:ctrlPr>
+                            </m:mPr>
+                            <m:mr>
+                              <m:e>
+                                <m:sSup>
+                                  <m:sSupPr>
+                                    <m:ctrlPr>
+                                      <a:rPr lang="pt-BR" i="1" dirty="0">
+                                        <a:latin typeface="Cambria Math" panose="02040503050406030204" pitchFamily="18" charset="0"/>
+                                      </a:rPr>
+                                    </m:ctrlPr>
+                                  </m:sSupPr>
+                                  <m:e>
+                                    <m:d>
+                                      <m:dPr>
+                                        <m:begChr m:val="["/>
+                                        <m:endChr m:val="]"/>
+                                        <m:ctrlPr>
+                                          <a:rPr lang="pt-BR" i="1" dirty="0">
+                                            <a:latin typeface="Cambria Math" panose="02040503050406030204" pitchFamily="18" charset="0"/>
+                                          </a:rPr>
+                                        </m:ctrlPr>
+                                      </m:dPr>
+                                      <m:e>
+                                        <m:m>
+                                          <m:mPr>
+                                            <m:mcs>
+                                              <m:mc>
+                                                <m:mcPr>
+                                                  <m:count m:val="3"/>
+                                                  <m:mcJc m:val="center"/>
+                                                </m:mcPr>
+                                              </m:mc>
+                                            </m:mcs>
+                                            <m:ctrlPr>
+                                              <a:rPr lang="pt-BR" i="1" dirty="0">
+                                                <a:latin typeface="Cambria Math" panose="02040503050406030204" pitchFamily="18" charset="0"/>
+                                              </a:rPr>
+                                            </m:ctrlPr>
+                                          </m:mPr>
+                                          <m:mr>
+                                            <m:e>
+                                              <m:r>
+                                                <m:rPr>
+                                                  <m:brk m:alnAt="7"/>
+                                                </m:rPr>
+                                                <a:rPr lang="pt-BR" i="1" dirty="0">
+                                                  <a:latin typeface="Cambria Math" panose="02040503050406030204" pitchFamily="18" charset="0"/>
+                                                </a:rPr>
+                                                <m:t>1</m:t>
+                                              </m:r>
+                                            </m:e>
+                                            <m:e>
+                                              <m:r>
+                                                <a:rPr lang="pt-BR" i="1" dirty="0">
+                                                  <a:latin typeface="Cambria Math" panose="02040503050406030204" pitchFamily="18" charset="0"/>
+                                                </a:rPr>
+                                                <m:t>0</m:t>
+                                              </m:r>
+                                            </m:e>
+                                            <m:e>
+                                              <m:m>
+                                                <m:mPr>
+                                                  <m:mcs>
+                                                    <m:mc>
+                                                      <m:mcPr>
+                                                        <m:count m:val="2"/>
+                                                        <m:mcJc m:val="center"/>
+                                                      </m:mcPr>
+                                                    </m:mc>
+                                                  </m:mcs>
+                                                  <m:ctrlPr>
+                                                    <a:rPr lang="pt-BR" i="1" dirty="0">
+                                                      <a:latin typeface="Cambria Math" panose="02040503050406030204" pitchFamily="18" charset="0"/>
+                                                    </a:rPr>
+                                                  </m:ctrlPr>
+                                                </m:mPr>
+                                                <m:mr>
+                                                  <m:e>
+                                                    <m:r>
+                                                      <m:rPr>
+                                                        <m:brk m:alnAt="7"/>
+                                                      </m:rPr>
+                                                      <a:rPr lang="pt-BR" i="1" dirty="0">
+                                                        <a:latin typeface="Cambria Math" panose="02040503050406030204" pitchFamily="18" charset="0"/>
+                                                      </a:rPr>
+                                                      <m:t>0</m:t>
+                                                    </m:r>
+                                                  </m:e>
+                                                  <m:e>
+                                                    <m:r>
+                                                      <a:rPr lang="pt-BR" i="1" dirty="0">
+                                                        <a:latin typeface="Cambria Math" panose="02040503050406030204" pitchFamily="18" charset="0"/>
+                                                      </a:rPr>
+                                                      <m:t>0</m:t>
+                                                    </m:r>
+                                                  </m:e>
+                                                </m:mr>
+                                              </m:m>
+                                            </m:e>
+                                          </m:mr>
+                                        </m:m>
+                                      </m:e>
+                                    </m:d>
+                                  </m:e>
+                                  <m:sup>
+                                    <m:r>
+                                      <a:rPr lang="pt-BR" i="1" dirty="0">
+                                        <a:latin typeface="Cambria Math" panose="02040503050406030204" pitchFamily="18" charset="0"/>
+                                      </a:rPr>
+                                      <m:t>𝑇</m:t>
+                                    </m:r>
+                                  </m:sup>
+                                </m:sSup>
+                                <m:r>
+                                  <a:rPr lang="pt-BR" b="1" i="1" dirty="0" smtClean="0">
+                                    <a:latin typeface="Cambria Math" panose="02040503050406030204" pitchFamily="18" charset="0"/>
+                                  </a:rPr>
+                                  <m:t>,</m:t>
+                                </m:r>
+                              </m:e>
+                              <m:e>
+                                <m:r>
+                                  <a:rPr lang="pt-BR" b="1" i="1">
+                                    <a:latin typeface="Cambria Math" panose="02040503050406030204" pitchFamily="18" charset="0"/>
+                                  </a:rPr>
+                                  <m:t>𝒙</m:t>
+                                </m:r>
+                                <m:d>
+                                  <m:dPr>
+                                    <m:ctrlPr>
+                                      <a:rPr lang="pt-BR" b="1" i="1">
+                                        <a:latin typeface="Cambria Math" panose="02040503050406030204" pitchFamily="18" charset="0"/>
+                                      </a:rPr>
+                                    </m:ctrlPr>
+                                  </m:dPr>
+                                  <m:e>
+                                    <m:r>
+                                      <a:rPr lang="pt-BR" i="1">
+                                        <a:latin typeface="Cambria Math" panose="02040503050406030204" pitchFamily="18" charset="0"/>
+                                      </a:rPr>
+                                      <m:t>𝑖</m:t>
+                                    </m:r>
+                                  </m:e>
+                                </m:d>
+                                <m:r>
+                                  <a:rPr lang="pt-BR" b="1" i="1">
+                                    <a:latin typeface="Cambria Math" panose="02040503050406030204" pitchFamily="18" charset="0"/>
+                                  </a:rPr>
+                                  <m:t> </m:t>
+                                </m:r>
+                                <m:r>
+                                  <a:rPr lang="pt-BR" i="1">
+                                    <a:latin typeface="Cambria Math" panose="02040503050406030204" pitchFamily="18" charset="0"/>
+                                    <a:ea typeface="Cambria Math" panose="02040503050406030204" pitchFamily="18" charset="0"/>
+                                  </a:rPr>
+                                  <m:t>𝜖</m:t>
+                                </m:r>
+                                <m:sSub>
+                                  <m:sSubPr>
+                                    <m:ctrlPr>
+                                      <a:rPr lang="pt-BR" i="1">
+                                        <a:latin typeface="Cambria Math" panose="02040503050406030204" pitchFamily="18" charset="0"/>
+                                      </a:rPr>
+                                    </m:ctrlPr>
+                                  </m:sSubPr>
+                                  <m:e>
+                                    <m:r>
+                                      <a:rPr lang="pt-BR" i="1">
+                                        <a:latin typeface="Cambria Math" panose="02040503050406030204" pitchFamily="18" charset="0"/>
+                                      </a:rPr>
+                                      <m:t> </m:t>
+                                    </m:r>
+                                    <m:r>
+                                      <a:rPr lang="pt-BR" i="1">
+                                        <a:latin typeface="Cambria Math" panose="02040503050406030204" pitchFamily="18" charset="0"/>
+                                      </a:rPr>
+                                      <m:t>𝐶</m:t>
+                                    </m:r>
+                                  </m:e>
+                                  <m:sub>
+                                    <m:r>
+                                      <m:rPr>
+                                        <m:nor/>
+                                      </m:rPr>
+                                      <a:rPr lang="pt-BR" dirty="0"/>
+                                      <m:t>gato</m:t>
+                                    </m:r>
+                                  </m:sub>
+                                </m:sSub>
+                              </m:e>
+                            </m:mr>
+                            <m:mr>
+                              <m:e>
+                                <m:sSup>
+                                  <m:sSupPr>
+                                    <m:ctrlPr>
+                                      <a:rPr lang="pt-BR" i="1" dirty="0">
+                                        <a:latin typeface="Cambria Math" panose="02040503050406030204" pitchFamily="18" charset="0"/>
+                                      </a:rPr>
+                                    </m:ctrlPr>
+                                  </m:sSupPr>
+                                  <m:e>
+                                    <m:d>
+                                      <m:dPr>
+                                        <m:begChr m:val="["/>
+                                        <m:endChr m:val="]"/>
+                                        <m:ctrlPr>
+                                          <a:rPr lang="pt-BR" i="1" dirty="0">
+                                            <a:latin typeface="Cambria Math" panose="02040503050406030204" pitchFamily="18" charset="0"/>
+                                          </a:rPr>
+                                        </m:ctrlPr>
+                                      </m:dPr>
+                                      <m:e>
+                                        <m:m>
+                                          <m:mPr>
+                                            <m:mcs>
+                                              <m:mc>
+                                                <m:mcPr>
+                                                  <m:count m:val="3"/>
+                                                  <m:mcJc m:val="center"/>
+                                                </m:mcPr>
+                                              </m:mc>
+                                            </m:mcs>
+                                            <m:ctrlPr>
+                                              <a:rPr lang="pt-BR" i="1" dirty="0">
+                                                <a:latin typeface="Cambria Math" panose="02040503050406030204" pitchFamily="18" charset="0"/>
+                                              </a:rPr>
+                                            </m:ctrlPr>
+                                          </m:mPr>
+                                          <m:mr>
+                                            <m:e>
+                                              <m:r>
+                                                <m:rPr>
+                                                  <m:brk m:alnAt="7"/>
+                                                </m:rPr>
+                                                <a:rPr lang="pt-BR" b="0" i="1" dirty="0" smtClean="0">
+                                                  <a:latin typeface="Cambria Math" panose="02040503050406030204" pitchFamily="18" charset="0"/>
+                                                </a:rPr>
+                                                <m:t>1</m:t>
+                                              </m:r>
+                                            </m:e>
+                                            <m:e>
+                                              <m:r>
+                                                <a:rPr lang="pt-BR" i="1" dirty="0">
+                                                  <a:latin typeface="Cambria Math" panose="02040503050406030204" pitchFamily="18" charset="0"/>
+                                                </a:rPr>
+                                                <m:t>1</m:t>
+                                              </m:r>
+                                            </m:e>
+                                            <m:e>
+                                              <m:m>
+                                                <m:mPr>
+                                                  <m:mcs>
+                                                    <m:mc>
+                                                      <m:mcPr>
+                                                        <m:count m:val="2"/>
+                                                        <m:mcJc m:val="center"/>
+                                                      </m:mcPr>
+                                                    </m:mc>
+                                                  </m:mcs>
+                                                  <m:ctrlPr>
+                                                    <a:rPr lang="pt-BR" i="1" dirty="0">
+                                                      <a:latin typeface="Cambria Math" panose="02040503050406030204" pitchFamily="18" charset="0"/>
+                                                    </a:rPr>
+                                                  </m:ctrlPr>
+                                                </m:mPr>
+                                                <m:mr>
+                                                  <m:e>
+                                                    <m:r>
+                                                      <m:rPr>
+                                                        <m:brk m:alnAt="7"/>
+                                                      </m:rPr>
+                                                      <a:rPr lang="pt-BR" i="1" dirty="0">
+                                                        <a:latin typeface="Cambria Math" panose="02040503050406030204" pitchFamily="18" charset="0"/>
+                                                      </a:rPr>
+                                                      <m:t>0</m:t>
+                                                    </m:r>
+                                                  </m:e>
+                                                  <m:e>
+                                                    <m:r>
+                                                      <a:rPr lang="pt-BR" i="1" dirty="0">
+                                                        <a:latin typeface="Cambria Math" panose="02040503050406030204" pitchFamily="18" charset="0"/>
+                                                      </a:rPr>
+                                                      <m:t>0</m:t>
+                                                    </m:r>
+                                                  </m:e>
+                                                </m:mr>
+                                              </m:m>
+                                            </m:e>
+                                          </m:mr>
+                                        </m:m>
+                                      </m:e>
+                                    </m:d>
+                                  </m:e>
+                                  <m:sup>
+                                    <m:r>
+                                      <a:rPr lang="pt-BR" i="1" dirty="0">
+                                        <a:latin typeface="Cambria Math" panose="02040503050406030204" pitchFamily="18" charset="0"/>
+                                      </a:rPr>
+                                      <m:t>𝑇</m:t>
+                                    </m:r>
+                                  </m:sup>
+                                </m:sSup>
+                                <m:r>
+                                  <a:rPr lang="pt-BR" b="0" i="1" dirty="0" smtClean="0">
+                                    <a:latin typeface="Cambria Math" panose="02040503050406030204" pitchFamily="18" charset="0"/>
+                                  </a:rPr>
+                                  <m:t>,</m:t>
+                                </m:r>
+                              </m:e>
+                              <m:e>
+                                <m:r>
+                                  <a:rPr lang="pt-BR" b="1" i="1">
+                                    <a:latin typeface="Cambria Math" panose="02040503050406030204" pitchFamily="18" charset="0"/>
+                                  </a:rPr>
+                                  <m:t>𝒙</m:t>
+                                </m:r>
+                                <m:d>
+                                  <m:dPr>
+                                    <m:ctrlPr>
+                                      <a:rPr lang="pt-BR" b="1" i="1">
+                                        <a:latin typeface="Cambria Math" panose="02040503050406030204" pitchFamily="18" charset="0"/>
+                                      </a:rPr>
+                                    </m:ctrlPr>
+                                  </m:dPr>
+                                  <m:e>
+                                    <m:r>
+                                      <a:rPr lang="pt-BR" i="1">
+                                        <a:latin typeface="Cambria Math" panose="02040503050406030204" pitchFamily="18" charset="0"/>
+                                      </a:rPr>
+                                      <m:t>𝑖</m:t>
+                                    </m:r>
+                                  </m:e>
+                                </m:d>
+                                <m:r>
+                                  <a:rPr lang="pt-BR" b="1" i="1">
+                                    <a:latin typeface="Cambria Math" panose="02040503050406030204" pitchFamily="18" charset="0"/>
+                                  </a:rPr>
+                                  <m:t> </m:t>
+                                </m:r>
+                                <m:r>
+                                  <a:rPr lang="pt-BR" i="1">
+                                    <a:latin typeface="Cambria Math" panose="02040503050406030204" pitchFamily="18" charset="0"/>
+                                    <a:ea typeface="Cambria Math" panose="02040503050406030204" pitchFamily="18" charset="0"/>
+                                  </a:rPr>
+                                  <m:t>𝜖</m:t>
+                                </m:r>
+                                <m:sSub>
+                                  <m:sSubPr>
+                                    <m:ctrlPr>
+                                      <a:rPr lang="pt-BR" i="1">
+                                        <a:latin typeface="Cambria Math" panose="02040503050406030204" pitchFamily="18" charset="0"/>
+                                      </a:rPr>
+                                    </m:ctrlPr>
+                                  </m:sSubPr>
+                                  <m:e>
+                                    <m:r>
+                                      <a:rPr lang="pt-BR" i="1">
+                                        <a:latin typeface="Cambria Math" panose="02040503050406030204" pitchFamily="18" charset="0"/>
+                                      </a:rPr>
+                                      <m:t> </m:t>
+                                    </m:r>
+                                    <m:r>
+                                      <a:rPr lang="pt-BR" i="1">
+                                        <a:latin typeface="Cambria Math" panose="02040503050406030204" pitchFamily="18" charset="0"/>
+                                      </a:rPr>
+                                      <m:t>𝐶</m:t>
+                                    </m:r>
+                                  </m:e>
+                                  <m:sub>
+                                    <m:r>
+                                      <m:rPr>
+                                        <m:nor/>
+                                      </m:rPr>
+                                      <a:rPr lang="pt-BR" dirty="0"/>
+                                      <m:t>rato</m:t>
+                                    </m:r>
+                                  </m:sub>
+                                </m:sSub>
+                                <m:sSub>
+                                  <m:sSubPr>
+                                    <m:ctrlPr>
+                                      <a:rPr lang="pt-BR" i="1">
+                                        <a:latin typeface="Cambria Math" panose="02040503050406030204" pitchFamily="18" charset="0"/>
+                                      </a:rPr>
+                                    </m:ctrlPr>
+                                  </m:sSubPr>
+                                  <m:e>
+                                    <m:r>
+                                      <a:rPr lang="pt-BR" i="1">
+                                        <a:latin typeface="Cambria Math" panose="02040503050406030204" pitchFamily="18" charset="0"/>
+                                        <a:ea typeface="Cambria Math" panose="02040503050406030204" pitchFamily="18" charset="0"/>
+                                      </a:rPr>
+                                      <m:t>∧</m:t>
+                                    </m:r>
+                                    <m:r>
+                                      <a:rPr lang="pt-BR" i="1">
+                                        <a:latin typeface="Cambria Math" panose="02040503050406030204" pitchFamily="18" charset="0"/>
+                                      </a:rPr>
+                                      <m:t>𝐶</m:t>
+                                    </m:r>
+                                  </m:e>
+                                  <m:sub>
+                                    <m:r>
+                                      <m:rPr>
+                                        <m:nor/>
+                                      </m:rPr>
+                                      <a:rPr lang="pt-BR" dirty="0"/>
+                                      <m:t>gato</m:t>
+                                    </m:r>
+                                  </m:sub>
+                                </m:sSub>
+                              </m:e>
+                            </m:mr>
+                            <m:mr>
+                              <m:e>
+                                <m:m>
+                                  <m:mPr>
+                                    <m:mcs>
+                                      <m:mc>
+                                        <m:mcPr>
+                                          <m:count m:val="1"/>
+                                          <m:mcJc m:val="center"/>
+                                        </m:mcPr>
+                                      </m:mc>
+                                    </m:mcs>
+                                    <m:ctrlPr>
+                                      <a:rPr lang="pt-BR" b="1" i="1" smtClean="0">
+                                        <a:latin typeface="Cambria Math" panose="02040503050406030204" pitchFamily="18" charset="0"/>
+                                      </a:rPr>
+                                    </m:ctrlPr>
+                                  </m:mPr>
+                                  <m:mr>
+                                    <m:e>
+                                      <m:sSup>
+                                        <m:sSupPr>
+                                          <m:ctrlPr>
+                                            <a:rPr lang="pt-BR" i="1" dirty="0">
+                                              <a:latin typeface="Cambria Math" panose="02040503050406030204" pitchFamily="18" charset="0"/>
+                                            </a:rPr>
+                                          </m:ctrlPr>
+                                        </m:sSupPr>
+                                        <m:e>
+                                          <m:d>
+                                            <m:dPr>
+                                              <m:begChr m:val="["/>
+                                              <m:endChr m:val="]"/>
+                                              <m:ctrlPr>
+                                                <a:rPr lang="pt-BR" i="1" dirty="0">
+                                                  <a:latin typeface="Cambria Math" panose="02040503050406030204" pitchFamily="18" charset="0"/>
+                                                </a:rPr>
+                                              </m:ctrlPr>
+                                            </m:dPr>
+                                            <m:e>
+                                              <m:m>
+                                                <m:mPr>
+                                                  <m:mcs>
+                                                    <m:mc>
+                                                      <m:mcPr>
+                                                        <m:count m:val="3"/>
+                                                        <m:mcJc m:val="center"/>
+                                                      </m:mcPr>
+                                                    </m:mc>
+                                                  </m:mcs>
+                                                  <m:ctrlPr>
+                                                    <a:rPr lang="pt-BR" i="1" dirty="0">
+                                                      <a:latin typeface="Cambria Math" panose="02040503050406030204" pitchFamily="18" charset="0"/>
+                                                    </a:rPr>
+                                                  </m:ctrlPr>
+                                                </m:mPr>
+                                                <m:mr>
+                                                  <m:e>
+                                                    <m:r>
+                                                      <m:rPr>
+                                                        <m:brk m:alnAt="7"/>
+                                                      </m:rPr>
+                                                      <a:rPr lang="pt-BR" b="0" i="1" dirty="0" smtClean="0">
+                                                        <a:latin typeface="Cambria Math" panose="02040503050406030204" pitchFamily="18" charset="0"/>
+                                                      </a:rPr>
+                                                      <m:t>1</m:t>
+                                                    </m:r>
+                                                  </m:e>
+                                                  <m:e>
+                                                    <m:r>
+                                                      <a:rPr lang="pt-BR" i="1" dirty="0">
+                                                        <a:latin typeface="Cambria Math" panose="02040503050406030204" pitchFamily="18" charset="0"/>
+                                                      </a:rPr>
+                                                      <m:t>0</m:t>
+                                                    </m:r>
+                                                  </m:e>
+                                                  <m:e>
+                                                    <m:m>
+                                                      <m:mPr>
+                                                        <m:mcs>
+                                                          <m:mc>
+                                                            <m:mcPr>
+                                                              <m:count m:val="2"/>
+                                                              <m:mcJc m:val="center"/>
+                                                            </m:mcPr>
+                                                          </m:mc>
+                                                        </m:mcs>
+                                                        <m:ctrlPr>
+                                                          <a:rPr lang="pt-BR" i="1" dirty="0">
+                                                            <a:latin typeface="Cambria Math" panose="02040503050406030204" pitchFamily="18" charset="0"/>
+                                                          </a:rPr>
+                                                        </m:ctrlPr>
+                                                      </m:mPr>
+                                                      <m:mr>
+                                                        <m:e>
+                                                          <m:r>
+                                                            <m:rPr>
+                                                              <m:brk m:alnAt="7"/>
+                                                            </m:rPr>
+                                                            <a:rPr lang="pt-BR" i="1" dirty="0">
+                                                              <a:latin typeface="Cambria Math" panose="02040503050406030204" pitchFamily="18" charset="0"/>
+                                                            </a:rPr>
+                                                            <m:t>1</m:t>
+                                                          </m:r>
+                                                        </m:e>
+                                                        <m:e>
+                                                          <m:r>
+                                                            <a:rPr lang="pt-BR" b="0" i="1" dirty="0" smtClean="0">
+                                                              <a:latin typeface="Cambria Math" panose="02040503050406030204" pitchFamily="18" charset="0"/>
+                                                            </a:rPr>
+                                                            <m:t>1</m:t>
+                                                          </m:r>
+                                                        </m:e>
+                                                      </m:mr>
+                                                    </m:m>
+                                                  </m:e>
+                                                </m:mr>
+                                              </m:m>
+                                            </m:e>
+                                          </m:d>
+                                        </m:e>
+                                        <m:sup>
+                                          <m:r>
+                                            <a:rPr lang="pt-BR" i="1" dirty="0">
+                                              <a:latin typeface="Cambria Math" panose="02040503050406030204" pitchFamily="18" charset="0"/>
+                                            </a:rPr>
+                                            <m:t>𝑇</m:t>
+                                          </m:r>
+                                        </m:sup>
+                                      </m:sSup>
+                                      <m:r>
+                                        <a:rPr lang="pt-BR" b="1" i="1" dirty="0" smtClean="0">
+                                          <a:latin typeface="Cambria Math" panose="02040503050406030204" pitchFamily="18" charset="0"/>
+                                        </a:rPr>
+                                        <m:t>,</m:t>
+                                      </m:r>
+                                    </m:e>
+                                  </m:mr>
+                                  <m:mr>
+                                    <m:e>
+                                      <m:sSup>
+                                        <m:sSupPr>
+                                          <m:ctrlPr>
+                                            <a:rPr lang="pt-BR" i="1" dirty="0">
+                                              <a:latin typeface="Cambria Math" panose="02040503050406030204" pitchFamily="18" charset="0"/>
+                                            </a:rPr>
+                                          </m:ctrlPr>
+                                        </m:sSupPr>
+                                        <m:e>
+                                          <m:d>
+                                            <m:dPr>
+                                              <m:begChr m:val="["/>
+                                              <m:endChr m:val="]"/>
+                                              <m:ctrlPr>
+                                                <a:rPr lang="pt-BR" i="1" dirty="0">
+                                                  <a:latin typeface="Cambria Math" panose="02040503050406030204" pitchFamily="18" charset="0"/>
+                                                </a:rPr>
+                                              </m:ctrlPr>
+                                            </m:dPr>
+                                            <m:e>
+                                              <m:m>
+                                                <m:mPr>
+                                                  <m:mcs>
+                                                    <m:mc>
+                                                      <m:mcPr>
+                                                        <m:count m:val="3"/>
+                                                        <m:mcJc m:val="center"/>
+                                                      </m:mcPr>
+                                                    </m:mc>
+                                                  </m:mcs>
+                                                  <m:ctrlPr>
+                                                    <a:rPr lang="pt-BR" i="1" dirty="0">
+                                                      <a:latin typeface="Cambria Math" panose="02040503050406030204" pitchFamily="18" charset="0"/>
+                                                    </a:rPr>
+                                                  </m:ctrlPr>
+                                                </m:mPr>
+                                                <m:mr>
+                                                  <m:e>
+                                                    <m:r>
+                                                      <m:rPr>
+                                                        <m:brk m:alnAt="7"/>
+                                                      </m:rPr>
+                                                      <a:rPr lang="pt-BR" b="0" i="1" dirty="0" smtClean="0">
+                                                        <a:latin typeface="Cambria Math" panose="02040503050406030204" pitchFamily="18" charset="0"/>
+                                                      </a:rPr>
+                                                      <m:t>1</m:t>
+                                                    </m:r>
+                                                  </m:e>
+                                                  <m:e>
+                                                    <m:r>
+                                                      <a:rPr lang="pt-BR" b="0" i="1" dirty="0" smtClean="0">
+                                                        <a:latin typeface="Cambria Math" panose="02040503050406030204" pitchFamily="18" charset="0"/>
+                                                      </a:rPr>
+                                                      <m:t>1</m:t>
+                                                    </m:r>
+                                                  </m:e>
+                                                  <m:e>
+                                                    <m:m>
+                                                      <m:mPr>
+                                                        <m:mcs>
+                                                          <m:mc>
+                                                            <m:mcPr>
+                                                              <m:count m:val="2"/>
+                                                              <m:mcJc m:val="center"/>
+                                                            </m:mcPr>
+                                                          </m:mc>
+                                                        </m:mcs>
+                                                        <m:ctrlPr>
+                                                          <a:rPr lang="pt-BR" i="1" dirty="0">
+                                                            <a:latin typeface="Cambria Math" panose="02040503050406030204" pitchFamily="18" charset="0"/>
+                                                          </a:rPr>
+                                                        </m:ctrlPr>
+                                                      </m:mPr>
+                                                      <m:mr>
+                                                        <m:e>
+                                                          <m:r>
+                                                            <m:rPr>
+                                                              <m:brk m:alnAt="7"/>
+                                                            </m:rPr>
+                                                            <a:rPr lang="pt-BR" b="0" i="1" dirty="0" smtClean="0">
+                                                              <a:latin typeface="Cambria Math" panose="02040503050406030204" pitchFamily="18" charset="0"/>
+                                                            </a:rPr>
+                                                            <m:t>1</m:t>
+                                                          </m:r>
+                                                        </m:e>
+                                                        <m:e>
+                                                          <m:r>
+                                                            <a:rPr lang="pt-BR" i="1" dirty="0">
+                                                              <a:latin typeface="Cambria Math" panose="02040503050406030204" pitchFamily="18" charset="0"/>
+                                                            </a:rPr>
+                                                            <m:t>1</m:t>
+                                                          </m:r>
+                                                        </m:e>
+                                                      </m:mr>
+                                                    </m:m>
+                                                  </m:e>
+                                                </m:mr>
+                                              </m:m>
+                                            </m:e>
+                                          </m:d>
+                                        </m:e>
+                                        <m:sup>
+                                          <m:r>
+                                            <a:rPr lang="pt-BR" i="1" dirty="0">
+                                              <a:latin typeface="Cambria Math" panose="02040503050406030204" pitchFamily="18" charset="0"/>
+                                            </a:rPr>
+                                            <m:t>𝑇</m:t>
+                                          </m:r>
+                                        </m:sup>
+                                      </m:sSup>
+                                      <m:r>
+                                        <a:rPr lang="pt-BR" b="0" i="1" dirty="0" smtClean="0">
+                                          <a:latin typeface="Cambria Math" panose="02040503050406030204" pitchFamily="18" charset="0"/>
+                                        </a:rPr>
+                                        <m:t>,</m:t>
+                                      </m:r>
+                                    </m:e>
+                                  </m:mr>
+                                </m:m>
+                              </m:e>
+                              <m:e>
+                                <m:m>
+                                  <m:mPr>
+                                    <m:mcs>
+                                      <m:mc>
+                                        <m:mcPr>
+                                          <m:count m:val="1"/>
+                                          <m:mcJc m:val="center"/>
+                                        </m:mcPr>
+                                      </m:mc>
+                                    </m:mcs>
+                                    <m:ctrlPr>
+                                      <a:rPr lang="pt-BR" b="1" i="1" smtClean="0">
+                                        <a:latin typeface="Cambria Math" panose="02040503050406030204" pitchFamily="18" charset="0"/>
+                                      </a:rPr>
+                                    </m:ctrlPr>
+                                  </m:mPr>
+                                  <m:mr>
+                                    <m:e>
+                                      <m:r>
+                                        <m:rPr>
+                                          <m:brk m:alnAt="7"/>
+                                        </m:rPr>
+                                        <a:rPr lang="pt-BR" b="1" i="1" smtClean="0">
+                                          <a:latin typeface="Cambria Math" panose="02040503050406030204" pitchFamily="18" charset="0"/>
+                                        </a:rPr>
+                                        <m:t>        </m:t>
+                                      </m:r>
+                                      <m:r>
+                                        <a:rPr lang="pt-BR" b="1" i="1">
+                                          <a:latin typeface="Cambria Math" panose="02040503050406030204" pitchFamily="18" charset="0"/>
+                                        </a:rPr>
+                                        <m:t>𝒙</m:t>
+                                      </m:r>
+                                      <m:d>
+                                        <m:dPr>
+                                          <m:ctrlPr>
+                                            <a:rPr lang="pt-BR" b="1" i="1">
+                                              <a:latin typeface="Cambria Math" panose="02040503050406030204" pitchFamily="18" charset="0"/>
+                                            </a:rPr>
+                                          </m:ctrlPr>
+                                        </m:dPr>
+                                        <m:e>
+                                          <m:r>
+                                            <a:rPr lang="pt-BR" i="1">
+                                              <a:latin typeface="Cambria Math" panose="02040503050406030204" pitchFamily="18" charset="0"/>
+                                            </a:rPr>
+                                            <m:t>𝑖</m:t>
+                                          </m:r>
+                                        </m:e>
+                                      </m:d>
+                                      <m:r>
+                                        <a:rPr lang="pt-BR" b="1" i="1">
+                                          <a:latin typeface="Cambria Math" panose="02040503050406030204" pitchFamily="18" charset="0"/>
+                                        </a:rPr>
+                                        <m:t> </m:t>
+                                      </m:r>
+                                      <m:r>
+                                        <a:rPr lang="pt-BR" i="1">
+                                          <a:latin typeface="Cambria Math" panose="02040503050406030204" pitchFamily="18" charset="0"/>
+                                          <a:ea typeface="Cambria Math" panose="02040503050406030204" pitchFamily="18" charset="0"/>
+                                        </a:rPr>
+                                        <m:t>𝜖</m:t>
+                                      </m:r>
+                                      <m:sSub>
+                                        <m:sSubPr>
+                                          <m:ctrlPr>
+                                            <a:rPr lang="pt-BR" i="1">
+                                              <a:latin typeface="Cambria Math" panose="02040503050406030204" pitchFamily="18" charset="0"/>
+                                            </a:rPr>
+                                          </m:ctrlPr>
+                                        </m:sSubPr>
+                                        <m:e>
+                                          <m:r>
+                                            <a:rPr lang="pt-BR" i="1">
+                                              <a:latin typeface="Cambria Math" panose="02040503050406030204" pitchFamily="18" charset="0"/>
+                                            </a:rPr>
+                                            <m:t> </m:t>
+                                          </m:r>
+                                          <m:r>
+                                            <a:rPr lang="pt-BR" i="1">
+                                              <a:latin typeface="Cambria Math" panose="02040503050406030204" pitchFamily="18" charset="0"/>
+                                            </a:rPr>
+                                            <m:t>𝐶</m:t>
+                                          </m:r>
+                                        </m:e>
+                                        <m:sub>
+                                          <m:r>
+                                            <m:rPr>
+                                              <m:nor/>
+                                            </m:rPr>
+                                            <a:rPr lang="pt-BR" b="0" i="0" dirty="0" smtClean="0"/>
+                                            <m:t>gato</m:t>
+                                          </m:r>
+                                        </m:sub>
+                                      </m:sSub>
+                                      <m:sSub>
+                                        <m:sSubPr>
+                                          <m:ctrlPr>
+                                            <a:rPr lang="pt-BR" i="1">
+                                              <a:latin typeface="Cambria Math" panose="02040503050406030204" pitchFamily="18" charset="0"/>
+                                            </a:rPr>
+                                          </m:ctrlPr>
+                                        </m:sSubPr>
+                                        <m:e>
+                                          <m:r>
+                                            <a:rPr lang="pt-BR" i="1">
+                                              <a:latin typeface="Cambria Math" panose="02040503050406030204" pitchFamily="18" charset="0"/>
+                                              <a:ea typeface="Cambria Math" panose="02040503050406030204" pitchFamily="18" charset="0"/>
+                                            </a:rPr>
+                                            <m:t>∧</m:t>
+                                          </m:r>
+                                          <m:r>
+                                            <a:rPr lang="pt-BR" i="1">
+                                              <a:latin typeface="Cambria Math" panose="02040503050406030204" pitchFamily="18" charset="0"/>
+                                            </a:rPr>
+                                            <m:t>𝐶</m:t>
+                                          </m:r>
+                                        </m:e>
+                                        <m:sub>
+                                          <m:r>
+                                            <m:rPr>
+                                              <m:nor/>
+                                            </m:rPr>
+                                            <a:rPr lang="pt-BR" b="0" i="0" smtClean="0">
+                                              <a:latin typeface="Cambria Math" panose="02040503050406030204" pitchFamily="18" charset="0"/>
+                                            </a:rPr>
+                                            <m:t>cachorro</m:t>
+                                          </m:r>
+                                        </m:sub>
+                                      </m:sSub>
+                                      <m:r>
+                                        <a:rPr lang="pt-BR" i="1">
+                                          <a:latin typeface="Cambria Math" panose="02040503050406030204" pitchFamily="18" charset="0"/>
+                                          <a:ea typeface="Cambria Math" panose="02040503050406030204" pitchFamily="18" charset="0"/>
+                                        </a:rPr>
+                                        <m:t>∧</m:t>
+                                      </m:r>
+                                      <m:sSub>
+                                        <m:sSubPr>
+                                          <m:ctrlPr>
+                                            <a:rPr lang="pt-BR" i="1">
+                                              <a:latin typeface="Cambria Math" panose="02040503050406030204" pitchFamily="18" charset="0"/>
+                                            </a:rPr>
+                                          </m:ctrlPr>
+                                        </m:sSubPr>
+                                        <m:e>
+                                          <m:r>
+                                            <a:rPr lang="pt-BR" i="1">
+                                              <a:latin typeface="Cambria Math" panose="02040503050406030204" pitchFamily="18" charset="0"/>
+                                            </a:rPr>
+                                            <m:t> </m:t>
+                                          </m:r>
+                                          <m:r>
+                                            <a:rPr lang="pt-BR" i="1">
+                                              <a:latin typeface="Cambria Math" panose="02040503050406030204" pitchFamily="18" charset="0"/>
+                                            </a:rPr>
+                                            <m:t>𝐶</m:t>
+                                          </m:r>
+                                        </m:e>
+                                        <m:sub>
+                                          <m:r>
+                                            <m:rPr>
+                                              <m:nor/>
+                                            </m:rPr>
+                                            <a:rPr lang="pt-BR" dirty="0"/>
+                                            <m:t>sapo</m:t>
+                                          </m:r>
+                                        </m:sub>
+                                      </m:sSub>
+                                    </m:e>
+                                  </m:mr>
+                                  <m:mr>
+                                    <m:e>
+                                      <m:r>
+                                        <a:rPr lang="pt-BR" b="1" i="1">
+                                          <a:latin typeface="Cambria Math" panose="02040503050406030204" pitchFamily="18" charset="0"/>
+                                        </a:rPr>
+                                        <m:t>𝒙</m:t>
+                                      </m:r>
+                                      <m:d>
+                                        <m:dPr>
+                                          <m:ctrlPr>
+                                            <a:rPr lang="pt-BR" b="1" i="1">
+                                              <a:latin typeface="Cambria Math" panose="02040503050406030204" pitchFamily="18" charset="0"/>
+                                            </a:rPr>
+                                          </m:ctrlPr>
+                                        </m:dPr>
+                                        <m:e>
+                                          <m:r>
+                                            <a:rPr lang="pt-BR" i="1">
+                                              <a:latin typeface="Cambria Math" panose="02040503050406030204" pitchFamily="18" charset="0"/>
+                                            </a:rPr>
+                                            <m:t>𝑖</m:t>
+                                          </m:r>
+                                        </m:e>
+                                      </m:d>
+                                      <m:r>
+                                        <a:rPr lang="pt-BR" b="1" i="1">
+                                          <a:latin typeface="Cambria Math" panose="02040503050406030204" pitchFamily="18" charset="0"/>
+                                        </a:rPr>
+                                        <m:t> </m:t>
+                                      </m:r>
+                                      <m:r>
+                                        <a:rPr lang="pt-BR" i="1">
+                                          <a:latin typeface="Cambria Math" panose="02040503050406030204" pitchFamily="18" charset="0"/>
+                                          <a:ea typeface="Cambria Math" panose="02040503050406030204" pitchFamily="18" charset="0"/>
+                                        </a:rPr>
+                                        <m:t>𝜖</m:t>
+                                      </m:r>
+                                      <m:sSub>
+                                        <m:sSubPr>
+                                          <m:ctrlPr>
+                                            <a:rPr lang="pt-BR" i="1">
+                                              <a:latin typeface="Cambria Math" panose="02040503050406030204" pitchFamily="18" charset="0"/>
+                                            </a:rPr>
+                                          </m:ctrlPr>
+                                        </m:sSubPr>
+                                        <m:e>
+                                          <m:sSub>
+                                            <m:sSubPr>
+                                              <m:ctrlPr>
+                                                <a:rPr lang="pt-BR" i="1">
+                                                  <a:latin typeface="Cambria Math" panose="02040503050406030204" pitchFamily="18" charset="0"/>
+                                                </a:rPr>
+                                              </m:ctrlPr>
+                                            </m:sSubPr>
+                                            <m:e>
+                                              <m:r>
+                                                <a:rPr lang="pt-BR" i="1">
+                                                  <a:latin typeface="Cambria Math" panose="02040503050406030204" pitchFamily="18" charset="0"/>
+                                                </a:rPr>
+                                                <m:t> </m:t>
+                                              </m:r>
+                                              <m:r>
+                                                <a:rPr lang="pt-BR" i="1">
+                                                  <a:latin typeface="Cambria Math" panose="02040503050406030204" pitchFamily="18" charset="0"/>
+                                                </a:rPr>
+                                                <m:t>𝐶</m:t>
+                                              </m:r>
+                                            </m:e>
+                                            <m:sub>
+                                              <m:r>
+                                                <m:rPr>
+                                                  <m:nor/>
+                                                </m:rPr>
+                                                <a:rPr lang="pt-BR" dirty="0"/>
+                                                <m:t>gato</m:t>
+                                              </m:r>
+                                            </m:sub>
+                                          </m:sSub>
+                                          <m:r>
+                                            <a:rPr lang="pt-BR" b="0" i="1" dirty="0" smtClean="0">
+                                              <a:latin typeface="Cambria Math" panose="02040503050406030204" pitchFamily="18" charset="0"/>
+                                            </a:rPr>
+                                            <m:t> </m:t>
+                                          </m:r>
+                                          <m:r>
+                                            <a:rPr lang="pt-BR" i="1">
+                                              <a:latin typeface="Cambria Math" panose="02040503050406030204" pitchFamily="18" charset="0"/>
+                                              <a:ea typeface="Cambria Math" panose="02040503050406030204" pitchFamily="18" charset="0"/>
+                                            </a:rPr>
+                                            <m:t>∧</m:t>
+                                          </m:r>
+                                          <m:r>
+                                            <a:rPr lang="pt-BR" i="1">
+                                              <a:latin typeface="Cambria Math" panose="02040503050406030204" pitchFamily="18" charset="0"/>
+                                            </a:rPr>
+                                            <m:t>𝐶</m:t>
+                                          </m:r>
+                                        </m:e>
+                                        <m:sub>
+                                          <m:r>
+                                            <m:rPr>
+                                              <m:nor/>
+                                            </m:rPr>
+                                            <a:rPr lang="pt-BR" dirty="0"/>
+                                            <m:t>rato</m:t>
+                                          </m:r>
+                                        </m:sub>
+                                      </m:sSub>
+                                      <m:r>
+                                        <a:rPr lang="pt-BR" i="1">
+                                          <a:latin typeface="Cambria Math" panose="02040503050406030204" pitchFamily="18" charset="0"/>
+                                          <a:ea typeface="Cambria Math" panose="02040503050406030204" pitchFamily="18" charset="0"/>
+                                        </a:rPr>
+                                        <m:t>∧</m:t>
+                                      </m:r>
+                                      <m:sSub>
+                                        <m:sSubPr>
+                                          <m:ctrlPr>
+                                            <a:rPr lang="pt-BR" i="1">
+                                              <a:latin typeface="Cambria Math" panose="02040503050406030204" pitchFamily="18" charset="0"/>
+                                            </a:rPr>
+                                          </m:ctrlPr>
+                                        </m:sSubPr>
+                                        <m:e>
+                                          <m:r>
+                                            <a:rPr lang="pt-BR" i="1">
+                                              <a:latin typeface="Cambria Math" panose="02040503050406030204" pitchFamily="18" charset="0"/>
+                                            </a:rPr>
+                                            <m:t> </m:t>
+                                          </m:r>
+                                          <m:r>
+                                            <a:rPr lang="pt-BR" i="1">
+                                              <a:latin typeface="Cambria Math" panose="02040503050406030204" pitchFamily="18" charset="0"/>
+                                            </a:rPr>
+                                            <m:t>𝐶</m:t>
+                                          </m:r>
+                                        </m:e>
+                                        <m:sub>
+                                          <m:r>
+                                            <m:rPr>
+                                              <m:nor/>
+                                            </m:rPr>
+                                            <a:rPr lang="pt-BR" dirty="0"/>
+                                            <m:t>cachorro</m:t>
+                                          </m:r>
+                                        </m:sub>
+                                      </m:sSub>
+                                      <m:r>
+                                        <a:rPr lang="pt-BR" i="1">
+                                          <a:latin typeface="Cambria Math" panose="02040503050406030204" pitchFamily="18" charset="0"/>
+                                          <a:ea typeface="Cambria Math" panose="02040503050406030204" pitchFamily="18" charset="0"/>
+                                        </a:rPr>
+                                        <m:t>∧</m:t>
+                                      </m:r>
+                                      <m:sSub>
+                                        <m:sSubPr>
+                                          <m:ctrlPr>
+                                            <a:rPr lang="pt-BR" i="1">
+                                              <a:latin typeface="Cambria Math" panose="02040503050406030204" pitchFamily="18" charset="0"/>
+                                            </a:rPr>
+                                          </m:ctrlPr>
+                                        </m:sSubPr>
+                                        <m:e>
+                                          <m:r>
+                                            <a:rPr lang="pt-BR" i="1">
+                                              <a:latin typeface="Cambria Math" panose="02040503050406030204" pitchFamily="18" charset="0"/>
+                                            </a:rPr>
+                                            <m:t> </m:t>
+                                          </m:r>
+                                          <m:r>
+                                            <a:rPr lang="pt-BR" i="1">
+                                              <a:latin typeface="Cambria Math" panose="02040503050406030204" pitchFamily="18" charset="0"/>
+                                            </a:rPr>
+                                            <m:t>𝐶</m:t>
+                                          </m:r>
+                                        </m:e>
+                                        <m:sub>
+                                          <m:r>
+                                            <m:rPr>
+                                              <m:nor/>
+                                            </m:rPr>
+                                            <a:rPr lang="pt-BR" dirty="0"/>
+                                            <m:t>sapo</m:t>
+                                          </m:r>
+                                        </m:sub>
+                                      </m:sSub>
+                                    </m:e>
+                                  </m:mr>
+                                </m:m>
+                              </m:e>
+                            </m:mr>
+                          </m:m>
+                        </m:e>
+                      </m:d>
+                      <m:r>
+                        <a:rPr lang="pt-BR" b="1" i="1" smtClean="0">
+                          <a:latin typeface="Cambria Math" panose="02040503050406030204" pitchFamily="18" charset="0"/>
+                        </a:rPr>
+                        <m:t>.</m:t>
+                      </m:r>
+                    </m:oMath>
+                  </m:oMathPara>
+                </a14:m>
+                <a:endParaRPr lang="pt-BR" dirty="0"/>
+              </a:p>
+            </p:txBody>
+          </p:sp>
+        </mc:Choice>
+        <mc:Fallback>
+          <p:sp>
+            <p:nvSpPr>
+              <p:cNvPr id="3" name="Content Placeholder 2">
+                <a:extLst>
+                  <a:ext uri="{FF2B5EF4-FFF2-40B4-BE49-F238E27FC236}">
+                    <a16:creationId xmlns:a16="http://schemas.microsoft.com/office/drawing/2014/main" id="{1237A257-D85C-E351-5085-80BCF81401BB}"/>
+                  </a:ext>
+                </a:extLst>
+              </p:cNvPr>
+              <p:cNvSpPr>
+                <a:spLocks noGrp="1" noRot="1" noChangeAspect="1" noMove="1" noResize="1" noEditPoints="1" noAdjustHandles="1" noChangeArrowheads="1" noChangeShapeType="1" noTextEdit="1"/>
+              </p:cNvSpPr>
+              <p:nvPr>
+                <p:ph idx="1"/>
+              </p:nvPr>
+            </p:nvSpPr>
+            <p:spPr>
+              <a:xfrm>
+                <a:off x="838200" y="1825624"/>
+                <a:ext cx="11255830" cy="5032376"/>
+              </a:xfrm>
+              <a:blipFill>
+                <a:blip r:embed="rId2"/>
+                <a:stretch>
+                  <a:fillRect l="-975" t="-1937" r="-1192"/>
+                </a:stretch>
+              </a:blipFill>
+            </p:spPr>
+            <p:txBody>
+              <a:bodyPr/>
+              <a:lstStyle/>
+              <a:p>
+                <a:r>
+                  <a:rPr lang="en-US">
+                    <a:noFill/>
+                  </a:rPr>
+                  <a:t> </a:t>
+                </a:r>
+              </a:p>
+            </p:txBody>
+          </p:sp>
+        </mc:Fallback>
+      </mc:AlternateContent>
     </p:spTree>
     <p:extLst>
       <p:ext uri="{BB962C8B-B14F-4D97-AF65-F5344CB8AC3E}">
-        <p14:creationId xmlns:p14="http://schemas.microsoft.com/office/powerpoint/2010/main" val="3414813146"/>
+        <p14:creationId xmlns:p14="http://schemas.microsoft.com/office/powerpoint/2010/main" val="931839271"/>
       </p:ext>
     </p:extLst>
   </p:cSld>
@@ -5612,7 +8839,7 @@
           <p:cNvPr id="2" name="Title 1">
             <a:extLst>
               <a:ext uri="{FF2B5EF4-FFF2-40B4-BE49-F238E27FC236}">
-                <a16:creationId xmlns:a16="http://schemas.microsoft.com/office/drawing/2014/main" id="{F1CB30D0-D052-EC03-3C25-35C106AA1077}"/>
+                <a16:creationId xmlns:a16="http://schemas.microsoft.com/office/drawing/2014/main" id="{5B5C9F62-7684-5A29-B15B-4CEB812641BF}"/>
               </a:ext>
             </a:extLst>
           </p:cNvPr>
@@ -5628,65 +8855,53 @@
           <a:bodyPr/>
           <a:lstStyle/>
           <a:p>
-            <a:r>
-              <a:rPr lang="pt-BR" dirty="0"/>
-              <a:t>Matriz de confusão</a:t>
-            </a:r>
-            <a:endParaRPr lang="en-US" dirty="0"/>
+            <a:endParaRPr lang="en-US"/>
           </a:p>
         </p:txBody>
       </p:sp>
-      <p:pic>
-        <p:nvPicPr>
-          <p:cNvPr id="2050" name="Picture 2" descr="Validate me Constructive criticism permitted – @gallusrostromegalus on  Tumblr">
+      <p:sp>
+        <p:nvSpPr>
+          <p:cNvPr id="3" name="Content Placeholder 2">
             <a:extLst>
               <a:ext uri="{FF2B5EF4-FFF2-40B4-BE49-F238E27FC236}">
-                <a16:creationId xmlns:a16="http://schemas.microsoft.com/office/drawing/2014/main" id="{A9C68C0F-3A42-8D60-0B8A-979695E4072E}"/>
+                <a16:creationId xmlns:a16="http://schemas.microsoft.com/office/drawing/2014/main" id="{B8C9293E-FE0D-E03B-8391-5AFFEBCBCCE2}"/>
               </a:ext>
             </a:extLst>
           </p:cNvPr>
-          <p:cNvPicPr>
-            <a:picLocks noChangeAspect="1" noChangeArrowheads="1"/>
-          </p:cNvPicPr>
-          <p:nvPr/>
-        </p:nvPicPr>
-        <p:blipFill>
-          <a:blip r:embed="rId2">
-            <a:extLst>
-              <a:ext uri="{28A0092B-C50C-407E-A947-70E740481C1C}">
-                <a14:useLocalDpi xmlns:a14="http://schemas.microsoft.com/office/drawing/2010/main" val="0"/>
-              </a:ext>
-            </a:extLst>
-          </a:blip>
-          <a:srcRect/>
-          <a:stretch>
-            <a:fillRect/>
-          </a:stretch>
-        </p:blipFill>
-        <p:spPr bwMode="auto">
-          <a:xfrm>
-            <a:off x="4199561" y="1690688"/>
-            <a:ext cx="5635002" cy="5167312"/>
-          </a:xfrm>
-          <a:prstGeom prst="rect">
-            <a:avLst/>
-          </a:prstGeom>
-          <a:noFill/>
-          <a:extLst>
-            <a:ext uri="{909E8E84-426E-40DD-AFC4-6F175D3DCCD1}">
-              <a14:hiddenFill xmlns:a14="http://schemas.microsoft.com/office/drawing/2010/main">
+          <p:cNvSpPr>
+            <a:spLocks noGrp="1"/>
+          </p:cNvSpPr>
+          <p:nvPr>
+            <p:ph idx="1"/>
+          </p:nvPr>
+        </p:nvSpPr>
+        <p:spPr/>
+        <p:txBody>
+          <a:bodyPr>
+            <a:normAutofit/>
+          </a:bodyPr>
+          <a:lstStyle/>
+          <a:p>
+            <a:r>
+              <a:rPr lang="pt-BR" sz="8000" b="1" dirty="0">
                 <a:solidFill>
-                  <a:srgbClr val="FFFFFF"/>
+                  <a:srgbClr val="FF0000"/>
                 </a:solidFill>
-              </a14:hiddenFill>
-            </a:ext>
-          </a:extLst>
-        </p:spPr>
-      </p:pic>
+              </a:rPr>
+              <a:t>PAREI AQUI!!!!!!</a:t>
+            </a:r>
+            <a:endParaRPr lang="en-US" sz="8000" b="1" dirty="0">
+              <a:solidFill>
+                <a:srgbClr val="FF0000"/>
+              </a:solidFill>
+            </a:endParaRPr>
+          </a:p>
+        </p:txBody>
+      </p:sp>
     </p:spTree>
     <p:extLst>
       <p:ext uri="{BB962C8B-B14F-4D97-AF65-F5344CB8AC3E}">
-        <p14:creationId xmlns:p14="http://schemas.microsoft.com/office/powerpoint/2010/main" val="2456464638"/>
+        <p14:creationId xmlns:p14="http://schemas.microsoft.com/office/powerpoint/2010/main" val="1385393323"/>
       </p:ext>
     </p:extLst>
   </p:cSld>
@@ -5715,64 +8930,618 @@
       </p:grpSpPr>
       <p:sp>
         <p:nvSpPr>
-          <p:cNvPr id="4" name="Título 1">
+          <p:cNvPr id="2" name="Title 1"/>
+          <p:cNvSpPr>
+            <a:spLocks noGrp="1"/>
+          </p:cNvSpPr>
+          <p:nvPr>
+            <p:ph type="title"/>
+          </p:nvPr>
+        </p:nvSpPr>
+        <p:spPr/>
+        <p:txBody>
+          <a:bodyPr/>
+          <a:lstStyle/>
+          <a:p>
+            <a:r>
+              <a:rPr lang="pt-BR" dirty="0"/>
+              <a:t>Fronteiras de decisão de um classificador</a:t>
+            </a:r>
+          </a:p>
+        </p:txBody>
+      </p:sp>
+      <mc:AlternateContent xmlns:mc="http://schemas.openxmlformats.org/markup-compatibility/2006">
+        <mc:Choice xmlns:a14="http://schemas.microsoft.com/office/drawing/2010/main" Requires="a14">
+          <p:sp>
+            <p:nvSpPr>
+              <p:cNvPr id="3" name="Content Placeholder 2"/>
+              <p:cNvSpPr>
+                <a:spLocks noGrp="1"/>
+              </p:cNvSpPr>
+              <p:nvPr>
+                <p:ph idx="1"/>
+              </p:nvPr>
+            </p:nvSpPr>
+            <p:spPr>
+              <a:xfrm>
+                <a:off x="5032784" y="1825624"/>
+                <a:ext cx="7054439" cy="5032375"/>
+              </a:xfrm>
+            </p:spPr>
+            <p:txBody>
+              <a:bodyPr>
+                <a:normAutofit/>
+              </a:bodyPr>
+              <a:lstStyle/>
+              <a:p>
+                <a:r>
+                  <a:rPr lang="pt-BR" dirty="0"/>
+                  <a:t>Na regressão, usamos </a:t>
+                </a:r>
+                <a:r>
+                  <a:rPr lang="pt-BR" b="1" dirty="0"/>
+                  <a:t>funções hipótese</a:t>
+                </a:r>
+                <a:r>
+                  <a:rPr lang="pt-BR" dirty="0"/>
+                  <a:t> para </a:t>
+                </a:r>
+                <a:r>
+                  <a:rPr lang="pt-BR" b="1" dirty="0"/>
+                  <a:t>aproximar o comportamento do conjunto de dados</a:t>
+                </a:r>
+                <a:r>
+                  <a:rPr lang="pt-BR" dirty="0"/>
+                  <a:t>, agora, as usaremos para </a:t>
+                </a:r>
+                <a:r>
+                  <a:rPr lang="pt-BR" b="1" dirty="0">
+                    <a:solidFill>
+                      <a:srgbClr val="00B050"/>
+                    </a:solidFill>
+                  </a:rPr>
+                  <a:t>separar (i.e., discriminar) grupos de dados em classes.</a:t>
+                </a:r>
+                <a:endParaRPr lang="pt-BR" dirty="0"/>
+              </a:p>
+              <a:p>
+                <a:r>
+                  <a:rPr lang="pt-BR" dirty="0"/>
+                  <a:t>Vejam o </a:t>
+                </a:r>
+                <a:r>
+                  <a:rPr lang="pt-BR" b="1" dirty="0"/>
+                  <a:t>espaço bi-dimensional</a:t>
+                </a:r>
+                <a:r>
+                  <a:rPr lang="pt-BR" dirty="0"/>
+                  <a:t>,</a:t>
+                </a:r>
+                <a14:m>
+                  <m:oMath xmlns:m="http://schemas.openxmlformats.org/officeDocument/2006/math">
+                    <m:r>
+                      <a:rPr lang="pt-BR" b="0" i="0" smtClean="0">
+                        <a:latin typeface="Cambria Math" panose="02040503050406030204" pitchFamily="18" charset="0"/>
+                        <a:ea typeface="Cambria Math" panose="02040503050406030204" pitchFamily="18" charset="0"/>
+                      </a:rPr>
+                      <m:t>   </m:t>
+                    </m:r>
+                    <m:sSup>
+                      <m:sSupPr>
+                        <m:ctrlPr>
+                          <a:rPr lang="pt-BR">
+                            <a:latin typeface="Cambria Math" panose="02040503050406030204" pitchFamily="18" charset="0"/>
+                            <a:ea typeface="Cambria Math" panose="02040503050406030204" pitchFamily="18" charset="0"/>
+                          </a:rPr>
+                        </m:ctrlPr>
+                      </m:sSupPr>
+                      <m:e>
+                        <m:r>
+                          <a:rPr lang="pt-BR" i="0">
+                            <a:latin typeface="Cambria Math" panose="02040503050406030204" pitchFamily="18" charset="0"/>
+                            <a:ea typeface="Cambria Math" panose="02040503050406030204" pitchFamily="18" charset="0"/>
+                          </a:rPr>
+                          <m:t>ℝ</m:t>
+                        </m:r>
+                      </m:e>
+                      <m:sup>
+                        <m:r>
+                          <a:rPr lang="pt-BR" i="0">
+                            <a:latin typeface="Cambria Math" panose="02040503050406030204" pitchFamily="18" charset="0"/>
+                            <a:ea typeface="Cambria Math" panose="02040503050406030204" pitchFamily="18" charset="0"/>
+                          </a:rPr>
+                          <m:t>2</m:t>
+                        </m:r>
+                      </m:sup>
+                    </m:sSup>
+                  </m:oMath>
+                </a14:m>
+                <a:r>
+                  <a:rPr lang="pt-BR" dirty="0"/>
+                  <a:t>, criado pelos </a:t>
+                </a:r>
+                <a:r>
+                  <a:rPr lang="pt-BR" b="1" dirty="0"/>
+                  <a:t>atributos </a:t>
+                </a:r>
+                <a14:m>
+                  <m:oMath xmlns:m="http://schemas.openxmlformats.org/officeDocument/2006/math">
+                    <m:sSub>
+                      <m:sSubPr>
+                        <m:ctrlPr>
+                          <a:rPr lang="pt-BR" i="1" smtClean="0">
+                            <a:latin typeface="Cambria Math" panose="02040503050406030204" pitchFamily="18" charset="0"/>
+                          </a:rPr>
+                        </m:ctrlPr>
+                      </m:sSubPr>
+                      <m:e>
+                        <m:r>
+                          <a:rPr lang="pt-BR" b="0" i="1" smtClean="0">
+                            <a:latin typeface="Cambria Math" panose="02040503050406030204" pitchFamily="18" charset="0"/>
+                          </a:rPr>
+                          <m:t>𝑥</m:t>
+                        </m:r>
+                      </m:e>
+                      <m:sub>
+                        <m:r>
+                          <a:rPr lang="pt-BR" b="0" i="1" smtClean="0">
+                            <a:latin typeface="Cambria Math" panose="02040503050406030204" pitchFamily="18" charset="0"/>
+                          </a:rPr>
+                          <m:t>1</m:t>
+                        </m:r>
+                      </m:sub>
+                    </m:sSub>
+                  </m:oMath>
+                </a14:m>
+                <a:r>
+                  <a:rPr lang="pt-BR" dirty="0"/>
+                  <a:t>e</a:t>
+                </a:r>
+                <a:r>
+                  <a:rPr lang="pt-BR" b="1" dirty="0"/>
+                  <a:t> </a:t>
+                </a:r>
+                <a14:m>
+                  <m:oMath xmlns:m="http://schemas.openxmlformats.org/officeDocument/2006/math">
+                    <m:sSub>
+                      <m:sSubPr>
+                        <m:ctrlPr>
+                          <a:rPr lang="pt-BR" i="1">
+                            <a:latin typeface="Cambria Math" panose="02040503050406030204" pitchFamily="18" charset="0"/>
+                          </a:rPr>
+                        </m:ctrlPr>
+                      </m:sSubPr>
+                      <m:e>
+                        <m:r>
+                          <a:rPr lang="pt-BR" i="1">
+                            <a:latin typeface="Cambria Math" panose="02040503050406030204" pitchFamily="18" charset="0"/>
+                          </a:rPr>
+                          <m:t>𝑥</m:t>
+                        </m:r>
+                      </m:e>
+                      <m:sub>
+                        <m:r>
+                          <a:rPr lang="pt-BR" b="0" i="1" smtClean="0">
+                            <a:latin typeface="Cambria Math" panose="02040503050406030204" pitchFamily="18" charset="0"/>
+                          </a:rPr>
+                          <m:t>2</m:t>
+                        </m:r>
+                      </m:sub>
+                    </m:sSub>
+                  </m:oMath>
+                </a14:m>
+                <a:r>
+                  <a:rPr lang="pt-BR" dirty="0"/>
+                  <a:t>, mostrado na figura ao lado.</a:t>
+                </a:r>
+              </a:p>
+              <a:p>
+                <a:r>
+                  <a:rPr lang="pt-BR" dirty="0"/>
+                  <a:t>Os </a:t>
+                </a:r>
+                <a:r>
+                  <a:rPr lang="pt-BR" b="1" dirty="0"/>
+                  <a:t>pares de atributos </a:t>
+                </a:r>
+                <a:r>
+                  <a:rPr lang="pt-BR" dirty="0"/>
+                  <a:t>pertencem a duas classes (</a:t>
+                </a:r>
+                <a14:m>
+                  <m:oMath xmlns:m="http://schemas.openxmlformats.org/officeDocument/2006/math">
+                    <m:r>
+                      <a:rPr lang="pt-BR" b="0" i="1" smtClean="0">
+                        <a:latin typeface="Cambria Math" panose="02040503050406030204" pitchFamily="18" charset="0"/>
+                      </a:rPr>
+                      <m:t>𝑄</m:t>
+                    </m:r>
+                    <m:r>
+                      <a:rPr lang="pt-BR" b="0" i="1" smtClean="0">
+                        <a:latin typeface="Cambria Math" panose="02040503050406030204" pitchFamily="18" charset="0"/>
+                      </a:rPr>
+                      <m:t>=2</m:t>
+                    </m:r>
+                  </m:oMath>
+                </a14:m>
+                <a:r>
+                  <a:rPr lang="pt-BR" dirty="0"/>
+                  <a:t>):</a:t>
+                </a:r>
+              </a:p>
+              <a:p>
+                <a:pPr lvl="1">
+                  <a:buFont typeface="Wingdings" panose="05000000000000000000" pitchFamily="2" charset="2"/>
+                  <a:buChar char="§"/>
+                </a:pPr>
+                <a:r>
+                  <a:rPr lang="pt-BR" dirty="0"/>
+                  <a:t>Círculos azuis pertencem à classe </a:t>
+                </a:r>
+                <a14:m>
+                  <m:oMath xmlns:m="http://schemas.openxmlformats.org/officeDocument/2006/math">
+                    <m:sSub>
+                      <m:sSubPr>
+                        <m:ctrlPr>
+                          <a:rPr lang="pt-BR" i="1" smtClean="0">
+                            <a:latin typeface="Cambria Math" panose="02040503050406030204" pitchFamily="18" charset="0"/>
+                          </a:rPr>
+                        </m:ctrlPr>
+                      </m:sSubPr>
+                      <m:e>
+                        <m:r>
+                          <a:rPr lang="pt-BR" i="1">
+                            <a:latin typeface="Cambria Math" panose="02040503050406030204" pitchFamily="18" charset="0"/>
+                          </a:rPr>
+                          <m:t>𝐶</m:t>
+                        </m:r>
+                      </m:e>
+                      <m:sub>
+                        <m:r>
+                          <a:rPr lang="pt-BR" i="1">
+                            <a:latin typeface="Cambria Math" panose="02040503050406030204" pitchFamily="18" charset="0"/>
+                          </a:rPr>
+                          <m:t>1</m:t>
+                        </m:r>
+                      </m:sub>
+                    </m:sSub>
+                  </m:oMath>
+                </a14:m>
+                <a:r>
+                  <a:rPr lang="pt-BR" dirty="0"/>
+                  <a:t>.</a:t>
+                </a:r>
+              </a:p>
+              <a:p>
+                <a:pPr lvl="1">
+                  <a:buFont typeface="Wingdings" panose="05000000000000000000" pitchFamily="2" charset="2"/>
+                  <a:buChar char="§"/>
+                </a:pPr>
+                <a:r>
+                  <a:rPr lang="pt-BR" dirty="0"/>
+                  <a:t>Triângulos vermelhos pertencem à classe </a:t>
+                </a:r>
+                <a14:m>
+                  <m:oMath xmlns:m="http://schemas.openxmlformats.org/officeDocument/2006/math">
+                    <m:sSub>
+                      <m:sSubPr>
+                        <m:ctrlPr>
+                          <a:rPr lang="pt-BR" i="1" smtClean="0">
+                            <a:latin typeface="Cambria Math" panose="02040503050406030204" pitchFamily="18" charset="0"/>
+                          </a:rPr>
+                        </m:ctrlPr>
+                      </m:sSubPr>
+                      <m:e>
+                        <m:r>
+                          <a:rPr lang="pt-BR" i="1">
+                            <a:latin typeface="Cambria Math" panose="02040503050406030204" pitchFamily="18" charset="0"/>
+                          </a:rPr>
+                          <m:t>𝐶</m:t>
+                        </m:r>
+                      </m:e>
+                      <m:sub>
+                        <m:r>
+                          <a:rPr lang="pt-BR" b="0" i="1" smtClean="0">
+                            <a:latin typeface="Cambria Math" panose="02040503050406030204" pitchFamily="18" charset="0"/>
+                          </a:rPr>
+                          <m:t>2</m:t>
+                        </m:r>
+                      </m:sub>
+                    </m:sSub>
+                  </m:oMath>
+                </a14:m>
+                <a:r>
+                  <a:rPr lang="pt-BR" dirty="0"/>
+                  <a:t>.</a:t>
+                </a:r>
+              </a:p>
+            </p:txBody>
+          </p:sp>
+        </mc:Choice>
+        <mc:Fallback>
+          <p:sp>
+            <p:nvSpPr>
+              <p:cNvPr id="3" name="Content Placeholder 2"/>
+              <p:cNvSpPr>
+                <a:spLocks noGrp="1" noRot="1" noChangeAspect="1" noMove="1" noResize="1" noEditPoints="1" noAdjustHandles="1" noChangeArrowheads="1" noChangeShapeType="1" noTextEdit="1"/>
+              </p:cNvSpPr>
+              <p:nvPr>
+                <p:ph idx="1"/>
+              </p:nvPr>
+            </p:nvSpPr>
+            <p:spPr>
+              <a:xfrm>
+                <a:off x="5032784" y="1825624"/>
+                <a:ext cx="7054439" cy="5032375"/>
+              </a:xfrm>
+              <a:blipFill>
+                <a:blip r:embed="rId3"/>
+                <a:stretch>
+                  <a:fillRect l="-1556" t="-1937" r="-1988"/>
+                </a:stretch>
+              </a:blipFill>
+            </p:spPr>
+            <p:txBody>
+              <a:bodyPr/>
+              <a:lstStyle/>
+              <a:p>
+                <a:r>
+                  <a:rPr lang="en-US">
+                    <a:noFill/>
+                  </a:rPr>
+                  <a:t> </a:t>
+                </a:r>
+              </a:p>
+            </p:txBody>
+          </p:sp>
+        </mc:Fallback>
+      </mc:AlternateContent>
+      <p:grpSp>
+        <p:nvGrpSpPr>
+          <p:cNvPr id="12" name="Agrupar 11">
             <a:extLst>
               <a:ext uri="{FF2B5EF4-FFF2-40B4-BE49-F238E27FC236}">
-                <a16:creationId xmlns:a16="http://schemas.microsoft.com/office/drawing/2014/main" id="{32666AC8-2E17-4DB4-B0F5-60C640CCFD2E}"/>
+                <a16:creationId xmlns:a16="http://schemas.microsoft.com/office/drawing/2014/main" id="{745C0A43-FD12-CEC1-71CC-612BDB16C776}"/>
               </a:ext>
             </a:extLst>
           </p:cNvPr>
-          <p:cNvSpPr txBox="1">
-            <a:spLocks/>
-          </p:cNvSpPr>
+          <p:cNvGrpSpPr/>
           <p:nvPr/>
-        </p:nvSpPr>
-        <p:spPr>
+        </p:nvGrpSpPr>
+        <p:grpSpPr>
           <a:xfrm>
-            <a:off x="1431533" y="2720526"/>
-            <a:ext cx="9144000" cy="1029541"/>
+            <a:off x="1135086" y="2427640"/>
+            <a:ext cx="3089466" cy="3257287"/>
+            <a:chOff x="9125712" y="2808640"/>
+            <a:chExt cx="3089466" cy="3257287"/>
           </a:xfrm>
-          <a:prstGeom prst="rect">
-            <a:avLst/>
-          </a:prstGeom>
-        </p:spPr>
-        <p:txBody>
-          <a:bodyPr vert="horz" lIns="91440" tIns="45720" rIns="91440" bIns="45720" rtlCol="0" anchor="ctr">
-            <a:normAutofit/>
-          </a:bodyPr>
-          <a:lstStyle>
-            <a:lvl1pPr algn="l" defTabSz="914400" rtl="0" eaLnBrk="1" latinLnBrk="0" hangingPunct="1">
-              <a:lnSpc>
-                <a:spcPct val="90000"/>
-              </a:lnSpc>
-              <a:spcBef>
-                <a:spcPct val="0"/>
-              </a:spcBef>
-              <a:buNone/>
-              <a:defRPr sz="4400" kern="1200">
-                <a:solidFill>
-                  <a:schemeClr val="tx1"/>
-                </a:solidFill>
-                <a:latin typeface="+mj-lt"/>
-                <a:ea typeface="+mj-ea"/>
-                <a:cs typeface="+mj-cs"/>
-              </a:defRPr>
-            </a:lvl1pPr>
-          </a:lstStyle>
-          <a:p>
-            <a:pPr algn="ctr"/>
-            <a:r>
-              <a:rPr lang="pt-BR" sz="6600" dirty="0"/>
-              <a:t>Perguntas?</a:t>
-            </a:r>
-            <a:endParaRPr lang="pt-BR" sz="6600" b="1" i="1" dirty="0"/>
-          </a:p>
-        </p:txBody>
-      </p:sp>
+        </p:grpSpPr>
+        <p:pic>
+          <p:nvPicPr>
+            <p:cNvPr id="13" name="Picture 3">
+              <a:extLst>
+                <a:ext uri="{FF2B5EF4-FFF2-40B4-BE49-F238E27FC236}">
+                  <a16:creationId xmlns:a16="http://schemas.microsoft.com/office/drawing/2014/main" id="{64DA2A01-47B5-2B94-DBFC-FB53B1B8205D}"/>
+                </a:ext>
+              </a:extLst>
+            </p:cNvPr>
+            <p:cNvPicPr>
+              <a:picLocks noChangeAspect="1"/>
+            </p:cNvPicPr>
+            <p:nvPr/>
+          </p:nvPicPr>
+          <p:blipFill rotWithShape="1">
+            <a:blip r:embed="rId4">
+              <a:extLst>
+                <a:ext uri="{28A0092B-C50C-407E-A947-70E740481C1C}">
+                  <a14:useLocalDpi xmlns:a14="http://schemas.microsoft.com/office/drawing/2010/main" val="0"/>
+                </a:ext>
+              </a:extLst>
+            </a:blip>
+            <a:srcRect l="6615" t="3775" r="7505" b="1098"/>
+            <a:stretch/>
+          </p:blipFill>
+          <p:spPr>
+            <a:xfrm>
+              <a:off x="9125712" y="2808640"/>
+              <a:ext cx="2960664" cy="2280684"/>
+            </a:xfrm>
+            <a:prstGeom prst="rect">
+              <a:avLst/>
+            </a:prstGeom>
+          </p:spPr>
+        </p:pic>
+        <p:sp>
+          <p:nvSpPr>
+            <p:cNvPr id="14" name="TextBox 6">
+              <a:extLst>
+                <a:ext uri="{FF2B5EF4-FFF2-40B4-BE49-F238E27FC236}">
+                  <a16:creationId xmlns:a16="http://schemas.microsoft.com/office/drawing/2014/main" id="{5ACECBBD-5168-48DA-64EF-8BDD58AE7E65}"/>
+                </a:ext>
+              </a:extLst>
+            </p:cNvPr>
+            <p:cNvSpPr txBox="1"/>
+            <p:nvPr/>
+          </p:nvSpPr>
+          <p:spPr>
+            <a:xfrm>
+              <a:off x="9909743" y="5327263"/>
+              <a:ext cx="1874067" cy="738664"/>
+            </a:xfrm>
+            <a:prstGeom prst="rect">
+              <a:avLst/>
+            </a:prstGeom>
+            <a:noFill/>
+          </p:spPr>
+          <p:txBody>
+            <a:bodyPr wrap="square" rtlCol="0">
+              <a:spAutoFit/>
+            </a:bodyPr>
+            <a:lstStyle/>
+            <a:p>
+              <a:pPr algn="ctr"/>
+              <a:r>
+                <a:rPr lang="pt-BR" sz="1400" b="1" dirty="0"/>
+                <a:t>Fronteira de decisão</a:t>
+              </a:r>
+              <a:r>
+                <a:rPr lang="pt-BR" sz="1400" dirty="0"/>
+                <a:t>: no caso deste exemplo, ela é uma reta.</a:t>
+              </a:r>
+            </a:p>
+          </p:txBody>
+        </p:sp>
+        <p:cxnSp>
+          <p:nvCxnSpPr>
+            <p:cNvPr id="15" name="Curved Connector 8">
+              <a:extLst>
+                <a:ext uri="{FF2B5EF4-FFF2-40B4-BE49-F238E27FC236}">
+                  <a16:creationId xmlns:a16="http://schemas.microsoft.com/office/drawing/2014/main" id="{7D2B1880-C7A7-A071-10B2-08F118026EDA}"/>
+                </a:ext>
+              </a:extLst>
+            </p:cNvPr>
+            <p:cNvCxnSpPr/>
+            <p:nvPr/>
+          </p:nvCxnSpPr>
+          <p:spPr>
+            <a:xfrm rot="5400000">
+              <a:off x="10830268" y="4695983"/>
+              <a:ext cx="657723" cy="624705"/>
+            </a:xfrm>
+            <a:prstGeom prst="curvedConnector3">
+              <a:avLst/>
+            </a:prstGeom>
+            <a:ln w="28575">
+              <a:tailEnd type="triangle"/>
+            </a:ln>
+          </p:spPr>
+          <p:style>
+            <a:lnRef idx="1">
+              <a:schemeClr val="accent1"/>
+            </a:lnRef>
+            <a:fillRef idx="0">
+              <a:schemeClr val="accent1"/>
+            </a:fillRef>
+            <a:effectRef idx="0">
+              <a:schemeClr val="accent1"/>
+            </a:effectRef>
+            <a:fontRef idx="minor">
+              <a:schemeClr val="tx1"/>
+            </a:fontRef>
+          </p:style>
+        </p:cxnSp>
+        <mc:AlternateContent xmlns:mc="http://schemas.openxmlformats.org/markup-compatibility/2006" xmlns:a14="http://schemas.microsoft.com/office/drawing/2010/main">
+          <mc:Choice Requires="a14">
+            <p:sp>
+              <p:nvSpPr>
+                <p:cNvPr id="16" name="Retângulo 15">
+                  <a:extLst>
+                    <a:ext uri="{FF2B5EF4-FFF2-40B4-BE49-F238E27FC236}">
+                      <a16:creationId xmlns:a16="http://schemas.microsoft.com/office/drawing/2014/main" id="{036F5727-D9EE-E211-8459-926C7C8C80B1}"/>
+                    </a:ext>
+                  </a:extLst>
+                </p:cNvPr>
+                <p:cNvSpPr/>
+                <p:nvPr/>
+              </p:nvSpPr>
+              <p:spPr>
+                <a:xfrm>
+                  <a:off x="11374884" y="3305149"/>
+                  <a:ext cx="840294" cy="369332"/>
+                </a:xfrm>
+                <a:prstGeom prst="rect">
+                  <a:avLst/>
+                </a:prstGeom>
+              </p:spPr>
+              <p:txBody>
+                <a:bodyPr wrap="none">
+                  <a:spAutoFit/>
+                </a:bodyPr>
+                <a:lstStyle/>
+                <a:p>
+                  <a:pPr/>
+                  <a14:m>
+                    <m:oMathPara xmlns:m="http://schemas.openxmlformats.org/officeDocument/2006/math">
+                      <m:oMathParaPr>
+                        <m:jc m:val="centerGroup"/>
+                      </m:oMathParaPr>
+                      <m:oMath xmlns:m="http://schemas.openxmlformats.org/officeDocument/2006/math">
+                        <m:r>
+                          <a:rPr lang="pt-BR" b="0" i="1">
+                            <a:latin typeface="Cambria Math" panose="02040503050406030204" pitchFamily="18" charset="0"/>
+                          </a:rPr>
+                          <m:t>𝑄</m:t>
+                        </m:r>
+                        <m:r>
+                          <a:rPr lang="pt-BR" b="0">
+                            <a:latin typeface="Cambria Math" panose="02040503050406030204" pitchFamily="18" charset="0"/>
+                          </a:rPr>
+                          <m:t>=</m:t>
+                        </m:r>
+                        <m:r>
+                          <a:rPr lang="pt-BR" b="0" i="1">
+                            <a:latin typeface="Cambria Math" panose="02040503050406030204" pitchFamily="18" charset="0"/>
+                          </a:rPr>
+                          <m:t>2</m:t>
+                        </m:r>
+                      </m:oMath>
+                    </m:oMathPara>
+                  </a14:m>
+                  <a:endParaRPr lang="pt-BR" dirty="0"/>
+                </a:p>
+              </p:txBody>
+            </p:sp>
+          </mc:Choice>
+          <mc:Fallback xmlns="">
+            <p:sp>
+              <p:nvSpPr>
+                <p:cNvPr id="16" name="Retângulo 15">
+                  <a:extLst>
+                    <a:ext uri="{FF2B5EF4-FFF2-40B4-BE49-F238E27FC236}">
+                      <a16:creationId xmlns:a16="http://schemas.microsoft.com/office/drawing/2014/main" id="{036F5727-D9EE-E211-8459-926C7C8C80B1}"/>
+                    </a:ext>
+                  </a:extLst>
+                </p:cNvPr>
+                <p:cNvSpPr>
+                  <a:spLocks noRot="1" noChangeAspect="1" noMove="1" noResize="1" noEditPoints="1" noAdjustHandles="1" noChangeArrowheads="1" noChangeShapeType="1" noTextEdit="1"/>
+                </p:cNvSpPr>
+                <p:nvPr/>
+              </p:nvSpPr>
+              <p:spPr>
+                <a:xfrm>
+                  <a:off x="11374884" y="3305149"/>
+                  <a:ext cx="840294" cy="369332"/>
+                </a:xfrm>
+                <a:prstGeom prst="rect">
+                  <a:avLst/>
+                </a:prstGeom>
+                <a:blipFill>
+                  <a:blip r:embed="rId5"/>
+                  <a:stretch>
+                    <a:fillRect b="-10000"/>
+                  </a:stretch>
+                </a:blipFill>
+              </p:spPr>
+              <p:txBody>
+                <a:bodyPr/>
+                <a:lstStyle/>
+                <a:p>
+                  <a:r>
+                    <a:rPr lang="pt-BR">
+                      <a:noFill/>
+                    </a:rPr>
+                    <a:t> </a:t>
+                  </a:r>
+                </a:p>
+              </p:txBody>
+            </p:sp>
+          </mc:Fallback>
+        </mc:AlternateContent>
+      </p:grpSp>
     </p:spTree>
     <p:extLst>
       <p:ext uri="{BB962C8B-B14F-4D97-AF65-F5344CB8AC3E}">
-        <p14:creationId xmlns:p14="http://schemas.microsoft.com/office/powerpoint/2010/main" val="3773005660"/>
+        <p14:creationId xmlns:p14="http://schemas.microsoft.com/office/powerpoint/2010/main" val="1422614699"/>
       </p:ext>
     </p:extLst>
   </p:cSld>
@@ -5801,64 +9570,2465 @@
       </p:grpSpPr>
       <p:sp>
         <p:nvSpPr>
-          <p:cNvPr id="4" name="Título 1">
+          <p:cNvPr id="2" name="Title 1"/>
+          <p:cNvSpPr>
+            <a:spLocks noGrp="1"/>
+          </p:cNvSpPr>
+          <p:nvPr>
+            <p:ph type="title"/>
+          </p:nvPr>
+        </p:nvSpPr>
+        <p:spPr/>
+        <p:txBody>
+          <a:bodyPr/>
+          <a:lstStyle/>
+          <a:p>
+            <a:r>
+              <a:rPr lang="pt-BR" dirty="0"/>
+              <a:t>Fronteiras de decisão de um classificador</a:t>
+            </a:r>
+          </a:p>
+        </p:txBody>
+      </p:sp>
+      <mc:AlternateContent xmlns:mc="http://schemas.openxmlformats.org/markup-compatibility/2006">
+        <mc:Choice xmlns:a14="http://schemas.microsoft.com/office/drawing/2010/main" Requires="a14">
+          <p:sp>
+            <p:nvSpPr>
+              <p:cNvPr id="3" name="Content Placeholder 2"/>
+              <p:cNvSpPr>
+                <a:spLocks noGrp="1"/>
+              </p:cNvSpPr>
+              <p:nvPr>
+                <p:ph idx="1"/>
+              </p:nvPr>
+            </p:nvSpPr>
+            <p:spPr>
+              <a:xfrm>
+                <a:off x="5344887" y="1825624"/>
+                <a:ext cx="6761388" cy="5032375"/>
+              </a:xfrm>
+            </p:spPr>
+            <p:txBody>
+              <a:bodyPr>
+                <a:normAutofit/>
+              </a:bodyPr>
+              <a:lstStyle/>
+              <a:p>
+                <a:r>
+                  <a:rPr lang="pt-BR" dirty="0"/>
+                  <a:t>O objetivo da classificação é encontrar uma função, chamada de </a:t>
+                </a:r>
+                <a:r>
+                  <a:rPr lang="pt-BR" b="1" dirty="0"/>
+                  <a:t>discriminante</a:t>
+                </a:r>
+                <a:r>
+                  <a:rPr lang="pt-BR" dirty="0"/>
+                  <a:t>, </a:t>
+                </a:r>
+                <a14:m>
+                  <m:oMath xmlns:m="http://schemas.openxmlformats.org/officeDocument/2006/math">
+                    <m:r>
+                      <a:rPr lang="pt-BR" i="1">
+                        <a:latin typeface="Cambria Math" panose="02040503050406030204" pitchFamily="18" charset="0"/>
+                      </a:rPr>
+                      <m:t>𝑔</m:t>
+                    </m:r>
+                    <m:d>
+                      <m:dPr>
+                        <m:ctrlPr>
+                          <a:rPr lang="pt-BR" i="1">
+                            <a:latin typeface="Cambria Math" panose="02040503050406030204" pitchFamily="18" charset="0"/>
+                          </a:rPr>
+                        </m:ctrlPr>
+                      </m:dPr>
+                      <m:e>
+                        <m:r>
+                          <a:rPr lang="pt-BR" b="1" i="1">
+                            <a:latin typeface="Cambria Math" panose="02040503050406030204" pitchFamily="18" charset="0"/>
+                          </a:rPr>
+                          <m:t>𝒙</m:t>
+                        </m:r>
+                      </m:e>
+                    </m:d>
+                  </m:oMath>
+                </a14:m>
+                <a:r>
+                  <a:rPr lang="pt-BR" dirty="0"/>
+                  <a:t> que separe as classes.</a:t>
+                </a:r>
+              </a:p>
+              <a:p>
+                <a:r>
+                  <a:rPr lang="pt-BR" dirty="0"/>
+                  <a:t>Chamamos de </a:t>
+                </a:r>
+                <a:r>
+                  <a:rPr lang="pt-BR" b="1" dirty="0"/>
+                  <a:t>fronteira de decisão </a:t>
+                </a:r>
+                <a:r>
+                  <a:rPr lang="pt-BR" dirty="0"/>
+                  <a:t>onde essa função corta o espaço de atributos. </a:t>
+                </a:r>
+              </a:p>
+              <a:p>
+                <a:r>
+                  <a:rPr lang="pt-BR" dirty="0"/>
+                  <a:t>No exemplo, a função discriminante </a:t>
+                </a:r>
+                <a:r>
+                  <a:rPr lang="pt-BR" b="1" dirty="0"/>
+                  <a:t>divide</a:t>
+                </a:r>
+                <a:r>
+                  <a:rPr lang="pt-BR" dirty="0"/>
+                  <a:t> o espaço em </a:t>
+                </a:r>
+                <a:r>
+                  <a:rPr lang="pt-BR" b="1" dirty="0"/>
+                  <a:t>duas regiões de decisão</a:t>
+                </a:r>
+                <a:r>
+                  <a:rPr lang="pt-BR" dirty="0"/>
+                  <a:t>, </a:t>
+                </a:r>
+                <a14:m>
+                  <m:oMath xmlns:m="http://schemas.openxmlformats.org/officeDocument/2006/math">
+                    <m:sSub>
+                      <m:sSubPr>
+                        <m:ctrlPr>
+                          <a:rPr lang="pt-BR" i="1">
+                            <a:latin typeface="Cambria Math" panose="02040503050406030204" pitchFamily="18" charset="0"/>
+                          </a:rPr>
+                        </m:ctrlPr>
+                      </m:sSubPr>
+                      <m:e>
+                        <m:r>
+                          <a:rPr lang="pt-BR" i="1">
+                            <a:latin typeface="Cambria Math" panose="02040503050406030204" pitchFamily="18" charset="0"/>
+                          </a:rPr>
+                          <m:t>𝑅</m:t>
+                        </m:r>
+                      </m:e>
+                      <m:sub>
+                        <m:r>
+                          <a:rPr lang="pt-BR" b="0" i="1" smtClean="0">
+                            <a:latin typeface="Cambria Math" panose="02040503050406030204" pitchFamily="18" charset="0"/>
+                          </a:rPr>
+                          <m:t>1</m:t>
+                        </m:r>
+                      </m:sub>
+                    </m:sSub>
+                  </m:oMath>
+                </a14:m>
+                <a:r>
+                  <a:rPr lang="pt-BR" dirty="0"/>
+                  <a:t> e </a:t>
+                </a:r>
+                <a14:m>
+                  <m:oMath xmlns:m="http://schemas.openxmlformats.org/officeDocument/2006/math">
+                    <m:sSub>
+                      <m:sSubPr>
+                        <m:ctrlPr>
+                          <a:rPr lang="pt-BR" i="1">
+                            <a:latin typeface="Cambria Math" panose="02040503050406030204" pitchFamily="18" charset="0"/>
+                          </a:rPr>
+                        </m:ctrlPr>
+                      </m:sSubPr>
+                      <m:e>
+                        <m:r>
+                          <a:rPr lang="pt-BR" i="1">
+                            <a:latin typeface="Cambria Math" panose="02040503050406030204" pitchFamily="18" charset="0"/>
+                          </a:rPr>
+                          <m:t>𝑅</m:t>
+                        </m:r>
+                      </m:e>
+                      <m:sub>
+                        <m:r>
+                          <a:rPr lang="pt-BR" b="0" i="1" smtClean="0">
+                            <a:latin typeface="Cambria Math" panose="02040503050406030204" pitchFamily="18" charset="0"/>
+                          </a:rPr>
+                          <m:t>2</m:t>
+                        </m:r>
+                      </m:sub>
+                    </m:sSub>
+                  </m:oMath>
+                </a14:m>
+                <a:r>
+                  <a:rPr lang="pt-BR" dirty="0"/>
+                  <a:t>, </a:t>
+                </a:r>
+                <a:r>
+                  <a:rPr lang="pt-BR" dirty="0">
+                    <a:solidFill>
+                      <a:schemeClr val="tx1"/>
+                    </a:solidFill>
+                  </a:rPr>
+                  <a:t>onde </a:t>
+                </a:r>
+                <a:r>
+                  <a:rPr lang="pt-BR" b="1" dirty="0">
+                    <a:solidFill>
+                      <a:schemeClr val="tx1"/>
+                    </a:solidFill>
+                  </a:rPr>
+                  <a:t>cada região corresponde a uma classe</a:t>
+                </a:r>
+                <a14:m>
+                  <m:oMath xmlns:m="http://schemas.openxmlformats.org/officeDocument/2006/math">
+                    <m:r>
+                      <a:rPr lang="pt-BR" b="0" i="0" smtClean="0">
+                        <a:solidFill>
+                          <a:schemeClr val="tx1"/>
+                        </a:solidFill>
+                        <a:latin typeface="Cambria Math" panose="02040503050406030204" pitchFamily="18" charset="0"/>
+                      </a:rPr>
+                      <m:t>.</m:t>
+                    </m:r>
+                  </m:oMath>
+                </a14:m>
+                <a:endParaRPr lang="pt-BR" dirty="0"/>
+              </a:p>
+              <a:p>
+                <a:r>
+                  <a:rPr lang="pt-BR" dirty="0"/>
+                  <a:t>No exemplo, como </a:t>
+                </a:r>
+                <a14:m>
+                  <m:oMath xmlns:m="http://schemas.openxmlformats.org/officeDocument/2006/math">
+                    <m:r>
+                      <a:rPr lang="pt-BR" i="1">
+                        <a:latin typeface="Cambria Math" panose="02040503050406030204" pitchFamily="18" charset="0"/>
+                      </a:rPr>
+                      <m:t>𝑄</m:t>
+                    </m:r>
+                    <m:r>
+                      <a:rPr lang="pt-BR" i="1">
+                        <a:latin typeface="Cambria Math" panose="02040503050406030204" pitchFamily="18" charset="0"/>
+                      </a:rPr>
+                      <m:t>=2</m:t>
+                    </m:r>
+                  </m:oMath>
+                </a14:m>
+                <a:r>
+                  <a:rPr lang="pt-BR" dirty="0"/>
+                  <a:t>, temos apenas uma fronteira de decisão.</a:t>
+                </a:r>
+              </a:p>
+            </p:txBody>
+          </p:sp>
+        </mc:Choice>
+        <mc:Fallback>
+          <p:sp>
+            <p:nvSpPr>
+              <p:cNvPr id="3" name="Content Placeholder 2"/>
+              <p:cNvSpPr>
+                <a:spLocks noGrp="1" noRot="1" noChangeAspect="1" noMove="1" noResize="1" noEditPoints="1" noAdjustHandles="1" noChangeArrowheads="1" noChangeShapeType="1" noTextEdit="1"/>
+              </p:cNvSpPr>
+              <p:nvPr>
+                <p:ph idx="1"/>
+              </p:nvPr>
+            </p:nvSpPr>
+            <p:spPr>
+              <a:xfrm>
+                <a:off x="5344887" y="1825624"/>
+                <a:ext cx="6761388" cy="5032375"/>
+              </a:xfrm>
+              <a:blipFill>
+                <a:blip r:embed="rId3"/>
+                <a:stretch>
+                  <a:fillRect l="-1623" t="-1937" r="-1713"/>
+                </a:stretch>
+              </a:blipFill>
+            </p:spPr>
+            <p:txBody>
+              <a:bodyPr/>
+              <a:lstStyle/>
+              <a:p>
+                <a:r>
+                  <a:rPr lang="en-US">
+                    <a:noFill/>
+                  </a:rPr>
+                  <a:t> </a:t>
+                </a:r>
+              </a:p>
+            </p:txBody>
+          </p:sp>
+        </mc:Fallback>
+      </mc:AlternateContent>
+      <p:grpSp>
+        <p:nvGrpSpPr>
+          <p:cNvPr id="14" name="Agrupar 13">
             <a:extLst>
               <a:ext uri="{FF2B5EF4-FFF2-40B4-BE49-F238E27FC236}">
-                <a16:creationId xmlns:a16="http://schemas.microsoft.com/office/drawing/2014/main" id="{32666AC8-2E17-4DB4-B0F5-60C640CCFD2E}"/>
+                <a16:creationId xmlns:a16="http://schemas.microsoft.com/office/drawing/2014/main" id="{D3D49D8E-0821-33E1-5823-3E158A4FB182}"/>
               </a:ext>
             </a:extLst>
           </p:cNvPr>
-          <p:cNvSpPr txBox="1">
-            <a:spLocks/>
+          <p:cNvGrpSpPr/>
+          <p:nvPr/>
+        </p:nvGrpSpPr>
+        <p:grpSpPr>
+          <a:xfrm>
+            <a:off x="1135086" y="2427640"/>
+            <a:ext cx="3089466" cy="3257287"/>
+            <a:chOff x="9125712" y="2808640"/>
+            <a:chExt cx="3089466" cy="3257287"/>
+          </a:xfrm>
+        </p:grpSpPr>
+        <p:pic>
+          <p:nvPicPr>
+            <p:cNvPr id="15" name="Picture 3">
+              <a:extLst>
+                <a:ext uri="{FF2B5EF4-FFF2-40B4-BE49-F238E27FC236}">
+                  <a16:creationId xmlns:a16="http://schemas.microsoft.com/office/drawing/2014/main" id="{BD3F5D0C-F310-ED7B-BBE9-A892027EAD08}"/>
+                </a:ext>
+              </a:extLst>
+            </p:cNvPr>
+            <p:cNvPicPr>
+              <a:picLocks noChangeAspect="1"/>
+            </p:cNvPicPr>
+            <p:nvPr/>
+          </p:nvPicPr>
+          <p:blipFill rotWithShape="1">
+            <a:blip r:embed="rId4">
+              <a:extLst>
+                <a:ext uri="{28A0092B-C50C-407E-A947-70E740481C1C}">
+                  <a14:useLocalDpi xmlns:a14="http://schemas.microsoft.com/office/drawing/2010/main" val="0"/>
+                </a:ext>
+              </a:extLst>
+            </a:blip>
+            <a:srcRect l="6615" t="3775" r="7505" b="1098"/>
+            <a:stretch/>
+          </p:blipFill>
+          <p:spPr>
+            <a:xfrm>
+              <a:off x="9125712" y="2808640"/>
+              <a:ext cx="2960664" cy="2280684"/>
+            </a:xfrm>
+            <a:prstGeom prst="rect">
+              <a:avLst/>
+            </a:prstGeom>
+          </p:spPr>
+        </p:pic>
+        <p:sp>
+          <p:nvSpPr>
+            <p:cNvPr id="16" name="TextBox 6">
+              <a:extLst>
+                <a:ext uri="{FF2B5EF4-FFF2-40B4-BE49-F238E27FC236}">
+                  <a16:creationId xmlns:a16="http://schemas.microsoft.com/office/drawing/2014/main" id="{D474B403-303E-639E-341F-AA50DF86D3BE}"/>
+                </a:ext>
+              </a:extLst>
+            </p:cNvPr>
+            <p:cNvSpPr txBox="1"/>
+            <p:nvPr/>
+          </p:nvSpPr>
+          <p:spPr>
+            <a:xfrm>
+              <a:off x="9909743" y="5327263"/>
+              <a:ext cx="1874067" cy="738664"/>
+            </a:xfrm>
+            <a:prstGeom prst="rect">
+              <a:avLst/>
+            </a:prstGeom>
+            <a:noFill/>
+          </p:spPr>
+          <p:txBody>
+            <a:bodyPr wrap="square" rtlCol="0">
+              <a:spAutoFit/>
+            </a:bodyPr>
+            <a:lstStyle/>
+            <a:p>
+              <a:pPr algn="ctr"/>
+              <a:r>
+                <a:rPr lang="pt-BR" sz="1400" b="1" dirty="0"/>
+                <a:t>Fronteira de decisão</a:t>
+              </a:r>
+              <a:r>
+                <a:rPr lang="pt-BR" sz="1400" dirty="0"/>
+                <a:t>: no caso deste exemplo, ela é uma reta.</a:t>
+              </a:r>
+            </a:p>
+          </p:txBody>
+        </p:sp>
+        <p:cxnSp>
+          <p:nvCxnSpPr>
+            <p:cNvPr id="17" name="Curved Connector 8">
+              <a:extLst>
+                <a:ext uri="{FF2B5EF4-FFF2-40B4-BE49-F238E27FC236}">
+                  <a16:creationId xmlns:a16="http://schemas.microsoft.com/office/drawing/2014/main" id="{B45603A2-AC84-D66F-F06E-0371CA5BE810}"/>
+                </a:ext>
+              </a:extLst>
+            </p:cNvPr>
+            <p:cNvCxnSpPr/>
+            <p:nvPr/>
+          </p:nvCxnSpPr>
+          <p:spPr>
+            <a:xfrm rot="5400000">
+              <a:off x="10830268" y="4695983"/>
+              <a:ext cx="657723" cy="624705"/>
+            </a:xfrm>
+            <a:prstGeom prst="curvedConnector3">
+              <a:avLst/>
+            </a:prstGeom>
+            <a:ln w="28575">
+              <a:tailEnd type="triangle"/>
+            </a:ln>
+          </p:spPr>
+          <p:style>
+            <a:lnRef idx="1">
+              <a:schemeClr val="accent1"/>
+            </a:lnRef>
+            <a:fillRef idx="0">
+              <a:schemeClr val="accent1"/>
+            </a:fillRef>
+            <a:effectRef idx="0">
+              <a:schemeClr val="accent1"/>
+            </a:effectRef>
+            <a:fontRef idx="minor">
+              <a:schemeClr val="tx1"/>
+            </a:fontRef>
+          </p:style>
+        </p:cxnSp>
+        <mc:AlternateContent xmlns:mc="http://schemas.openxmlformats.org/markup-compatibility/2006" xmlns:a14="http://schemas.microsoft.com/office/drawing/2010/main">
+          <mc:Choice Requires="a14">
+            <p:sp>
+              <p:nvSpPr>
+                <p:cNvPr id="18" name="Retângulo 17">
+                  <a:extLst>
+                    <a:ext uri="{FF2B5EF4-FFF2-40B4-BE49-F238E27FC236}">
+                      <a16:creationId xmlns:a16="http://schemas.microsoft.com/office/drawing/2014/main" id="{C5162CC1-DD2F-DFBD-35CF-B876410E54B6}"/>
+                    </a:ext>
+                  </a:extLst>
+                </p:cNvPr>
+                <p:cNvSpPr/>
+                <p:nvPr/>
+              </p:nvSpPr>
+              <p:spPr>
+                <a:xfrm>
+                  <a:off x="11374884" y="3305149"/>
+                  <a:ext cx="840294" cy="369332"/>
+                </a:xfrm>
+                <a:prstGeom prst="rect">
+                  <a:avLst/>
+                </a:prstGeom>
+              </p:spPr>
+              <p:txBody>
+                <a:bodyPr wrap="none">
+                  <a:spAutoFit/>
+                </a:bodyPr>
+                <a:lstStyle/>
+                <a:p>
+                  <a:pPr/>
+                  <a14:m>
+                    <m:oMathPara xmlns:m="http://schemas.openxmlformats.org/officeDocument/2006/math">
+                      <m:oMathParaPr>
+                        <m:jc m:val="centerGroup"/>
+                      </m:oMathParaPr>
+                      <m:oMath xmlns:m="http://schemas.openxmlformats.org/officeDocument/2006/math">
+                        <m:r>
+                          <a:rPr lang="pt-BR" b="0" i="1">
+                            <a:latin typeface="Cambria Math" panose="02040503050406030204" pitchFamily="18" charset="0"/>
+                          </a:rPr>
+                          <m:t>𝑄</m:t>
+                        </m:r>
+                        <m:r>
+                          <a:rPr lang="pt-BR" b="0">
+                            <a:latin typeface="Cambria Math" panose="02040503050406030204" pitchFamily="18" charset="0"/>
+                          </a:rPr>
+                          <m:t>=</m:t>
+                        </m:r>
+                        <m:r>
+                          <a:rPr lang="pt-BR" b="0" i="1">
+                            <a:latin typeface="Cambria Math" panose="02040503050406030204" pitchFamily="18" charset="0"/>
+                          </a:rPr>
+                          <m:t>2</m:t>
+                        </m:r>
+                      </m:oMath>
+                    </m:oMathPara>
+                  </a14:m>
+                  <a:endParaRPr lang="pt-BR" dirty="0"/>
+                </a:p>
+              </p:txBody>
+            </p:sp>
+          </mc:Choice>
+          <mc:Fallback xmlns="">
+            <p:sp>
+              <p:nvSpPr>
+                <p:cNvPr id="18" name="Retângulo 17">
+                  <a:extLst>
+                    <a:ext uri="{FF2B5EF4-FFF2-40B4-BE49-F238E27FC236}">
+                      <a16:creationId xmlns:a16="http://schemas.microsoft.com/office/drawing/2014/main" id="{C5162CC1-DD2F-DFBD-35CF-B876410E54B6}"/>
+                    </a:ext>
+                  </a:extLst>
+                </p:cNvPr>
+                <p:cNvSpPr>
+                  <a:spLocks noRot="1" noChangeAspect="1" noMove="1" noResize="1" noEditPoints="1" noAdjustHandles="1" noChangeArrowheads="1" noChangeShapeType="1" noTextEdit="1"/>
+                </p:cNvSpPr>
+                <p:nvPr/>
+              </p:nvSpPr>
+              <p:spPr>
+                <a:xfrm>
+                  <a:off x="11374884" y="3305149"/>
+                  <a:ext cx="840294" cy="369332"/>
+                </a:xfrm>
+                <a:prstGeom prst="rect">
+                  <a:avLst/>
+                </a:prstGeom>
+                <a:blipFill>
+                  <a:blip r:embed="rId5"/>
+                  <a:stretch>
+                    <a:fillRect b="-10000"/>
+                  </a:stretch>
+                </a:blipFill>
+              </p:spPr>
+              <p:txBody>
+                <a:bodyPr/>
+                <a:lstStyle/>
+                <a:p>
+                  <a:r>
+                    <a:rPr lang="pt-BR">
+                      <a:noFill/>
+                    </a:rPr>
+                    <a:t> </a:t>
+                  </a:r>
+                </a:p>
+              </p:txBody>
+            </p:sp>
+          </mc:Fallback>
+        </mc:AlternateContent>
+      </p:grpSp>
+    </p:spTree>
+    <p:extLst>
+      <p:ext uri="{BB962C8B-B14F-4D97-AF65-F5344CB8AC3E}">
+        <p14:creationId xmlns:p14="http://schemas.microsoft.com/office/powerpoint/2010/main" val="501774096"/>
+      </p:ext>
+    </p:extLst>
+  </p:cSld>
+  <p:clrMapOvr>
+    <a:masterClrMapping/>
+  </p:clrMapOvr>
+</p:sld>
+</file>
+
+<file path=ppt/slides/slide16.xml><?xml version="1.0" encoding="utf-8"?>
+<p:sld xmlns:a="http://schemas.openxmlformats.org/drawingml/2006/main" xmlns:r="http://schemas.openxmlformats.org/officeDocument/2006/relationships" xmlns:p="http://schemas.openxmlformats.org/presentationml/2006/main">
+  <p:cSld>
+    <p:spTree>
+      <p:nvGrpSpPr>
+        <p:cNvPr id="1" name=""/>
+        <p:cNvGrpSpPr/>
+        <p:nvPr/>
+      </p:nvGrpSpPr>
+      <p:grpSpPr>
+        <a:xfrm>
+          <a:off x="0" y="0"/>
+          <a:ext cx="0" cy="0"/>
+          <a:chOff x="0" y="0"/>
+          <a:chExt cx="0" cy="0"/>
+        </a:xfrm>
+      </p:grpSpPr>
+      <p:sp>
+        <p:nvSpPr>
+          <p:cNvPr id="2" name="Title 1"/>
+          <p:cNvSpPr>
+            <a:spLocks noGrp="1"/>
           </p:cNvSpPr>
+          <p:nvPr>
+            <p:ph type="title"/>
+          </p:nvPr>
+        </p:nvSpPr>
+        <p:spPr/>
+        <p:txBody>
+          <a:bodyPr/>
+          <a:lstStyle/>
+          <a:p>
+            <a:r>
+              <a:rPr lang="pt-BR" dirty="0"/>
+              <a:t>Fronteiras de decisão de um classificador</a:t>
+            </a:r>
+          </a:p>
+        </p:txBody>
+      </p:sp>
+      <p:sp>
+        <p:nvSpPr>
+          <p:cNvPr id="3" name="Content Placeholder 2"/>
+          <p:cNvSpPr>
+            <a:spLocks noGrp="1"/>
+          </p:cNvSpPr>
+          <p:nvPr>
+            <p:ph idx="1"/>
+          </p:nvPr>
+        </p:nvSpPr>
+        <p:spPr>
+          <a:xfrm>
+            <a:off x="838200" y="1825625"/>
+            <a:ext cx="11177588" cy="3045345"/>
+          </a:xfrm>
+        </p:spPr>
+        <p:txBody>
+          <a:bodyPr>
+            <a:normAutofit/>
+          </a:bodyPr>
+          <a:lstStyle/>
+          <a:p>
+            <a:r>
+              <a:rPr lang="pt-BR" dirty="0"/>
+              <a:t>As figuras abaixo mostram </a:t>
+            </a:r>
+            <a:r>
+              <a:rPr lang="pt-BR" b="1" dirty="0"/>
+              <a:t>funções discriminantes </a:t>
+            </a:r>
+            <a:r>
+              <a:rPr lang="pt-BR" dirty="0"/>
+              <a:t>em problemas de classificação </a:t>
+            </a:r>
+            <a:r>
+              <a:rPr lang="pt-BR" b="1" dirty="0"/>
+              <a:t>binária</a:t>
+            </a:r>
+            <a:r>
+              <a:rPr lang="pt-BR" dirty="0"/>
+              <a:t> e </a:t>
+            </a:r>
+            <a:r>
+              <a:rPr lang="pt-BR" b="1" dirty="0"/>
+              <a:t>multiclasses</a:t>
+            </a:r>
+            <a:r>
+              <a:rPr lang="pt-BR" dirty="0"/>
+              <a:t>.</a:t>
+            </a:r>
+          </a:p>
+          <a:p>
+            <a:r>
+              <a:rPr lang="pt-BR" dirty="0"/>
+              <a:t>As </a:t>
+            </a:r>
+            <a:r>
+              <a:rPr lang="pt-BR" b="1" dirty="0"/>
+              <a:t>funções discriminantes</a:t>
+            </a:r>
+            <a:r>
+              <a:rPr lang="pt-BR" dirty="0"/>
+              <a:t> podem ser </a:t>
+            </a:r>
+            <a:r>
+              <a:rPr lang="pt-BR" b="1" dirty="0">
+                <a:solidFill>
+                  <a:schemeClr val="accent2"/>
+                </a:solidFill>
+              </a:rPr>
+              <a:t>lineares</a:t>
+            </a:r>
+            <a:r>
+              <a:rPr lang="pt-BR" dirty="0"/>
+              <a:t> (e.g., retas e planos) ou </a:t>
+            </a:r>
+            <a:r>
+              <a:rPr lang="pt-BR" b="1" dirty="0">
+                <a:solidFill>
+                  <a:schemeClr val="accent2"/>
+                </a:solidFill>
+              </a:rPr>
+              <a:t>não-lineares</a:t>
+            </a:r>
+            <a:r>
+              <a:rPr lang="pt-BR" dirty="0"/>
+              <a:t> (e.g., círculos e elipses).</a:t>
+            </a:r>
+          </a:p>
+          <a:p>
+            <a:r>
+              <a:rPr lang="pt-BR" dirty="0"/>
+              <a:t>Em geral, usamos polinômios como </a:t>
+            </a:r>
+            <a:r>
+              <a:rPr lang="pt-BR" b="1" dirty="0"/>
+              <a:t>funções discriminantes.</a:t>
+            </a:r>
+            <a:endParaRPr lang="pt-BR" dirty="0"/>
+          </a:p>
+        </p:txBody>
+      </p:sp>
+      <p:pic>
+        <p:nvPicPr>
+          <p:cNvPr id="4" name="Picture 3"/>
+          <p:cNvPicPr>
+            <a:picLocks noChangeAspect="1"/>
+          </p:cNvPicPr>
+          <p:nvPr/>
+        </p:nvPicPr>
+        <p:blipFill rotWithShape="1">
+          <a:blip r:embed="rId3">
+            <a:extLst>
+              <a:ext uri="{28A0092B-C50C-407E-A947-70E740481C1C}">
+                <a14:useLocalDpi xmlns:a14="http://schemas.microsoft.com/office/drawing/2010/main" val="0"/>
+              </a:ext>
+            </a:extLst>
+          </a:blip>
+          <a:srcRect l="6615" t="3775" r="7505" b="1098"/>
+          <a:stretch/>
+        </p:blipFill>
+        <p:spPr>
+          <a:xfrm>
+            <a:off x="589866" y="4185993"/>
+            <a:ext cx="3448732" cy="2656657"/>
+          </a:xfrm>
+          <a:prstGeom prst="rect">
+            <a:avLst/>
+          </a:prstGeom>
+        </p:spPr>
+      </p:pic>
+      <p:pic>
+        <p:nvPicPr>
+          <p:cNvPr id="5" name="Picture 4"/>
+          <p:cNvPicPr>
+            <a:picLocks noChangeAspect="1"/>
+          </p:cNvPicPr>
+          <p:nvPr/>
+        </p:nvPicPr>
+        <p:blipFill rotWithShape="1">
+          <a:blip r:embed="rId4">
+            <a:extLst>
+              <a:ext uri="{28A0092B-C50C-407E-A947-70E740481C1C}">
+                <a14:useLocalDpi xmlns:a14="http://schemas.microsoft.com/office/drawing/2010/main" val="0"/>
+              </a:ext>
+            </a:extLst>
+          </a:blip>
+          <a:srcRect l="6486" t="3773" r="7252"/>
+          <a:stretch/>
+        </p:blipFill>
+        <p:spPr>
+          <a:xfrm>
+            <a:off x="8379980" y="4185993"/>
+            <a:ext cx="3417767" cy="2614205"/>
+          </a:xfrm>
+          <a:prstGeom prst="rect">
+            <a:avLst/>
+          </a:prstGeom>
+        </p:spPr>
+      </p:pic>
+      <p:pic>
+        <p:nvPicPr>
+          <p:cNvPr id="6" name="Picture 5"/>
+          <p:cNvPicPr>
+            <a:picLocks noChangeAspect="1"/>
+          </p:cNvPicPr>
+          <p:nvPr/>
+        </p:nvPicPr>
+        <p:blipFill rotWithShape="1">
+          <a:blip r:embed="rId5">
+            <a:extLst>
+              <a:ext uri="{28A0092B-C50C-407E-A947-70E740481C1C}">
+                <a14:useLocalDpi xmlns:a14="http://schemas.microsoft.com/office/drawing/2010/main" val="0"/>
+              </a:ext>
+            </a:extLst>
+          </a:blip>
+          <a:srcRect l="6657" t="3260" r="7500" b="1927"/>
+          <a:stretch/>
+        </p:blipFill>
+        <p:spPr>
+          <a:xfrm>
+            <a:off x="4505724" y="4185993"/>
+            <a:ext cx="3406342" cy="2632921"/>
+          </a:xfrm>
+          <a:prstGeom prst="rect">
+            <a:avLst/>
+          </a:prstGeom>
+        </p:spPr>
+      </p:pic>
+    </p:spTree>
+    <p:extLst>
+      <p:ext uri="{BB962C8B-B14F-4D97-AF65-F5344CB8AC3E}">
+        <p14:creationId xmlns:p14="http://schemas.microsoft.com/office/powerpoint/2010/main" val="4190331675"/>
+      </p:ext>
+    </p:extLst>
+  </p:cSld>
+  <p:clrMapOvr>
+    <a:masterClrMapping/>
+  </p:clrMapOvr>
+</p:sld>
+</file>
+
+<file path=ppt/slides/slide17.xml><?xml version="1.0" encoding="utf-8"?>
+<p:sld xmlns:a="http://schemas.openxmlformats.org/drawingml/2006/main" xmlns:r="http://schemas.openxmlformats.org/officeDocument/2006/relationships" xmlns:p="http://schemas.openxmlformats.org/presentationml/2006/main">
+  <p:cSld>
+    <p:spTree>
+      <p:nvGrpSpPr>
+        <p:cNvPr id="1" name=""/>
+        <p:cNvGrpSpPr/>
+        <p:nvPr/>
+      </p:nvGrpSpPr>
+      <p:grpSpPr>
+        <a:xfrm>
+          <a:off x="0" y="0"/>
+          <a:ext cx="0" cy="0"/>
+          <a:chOff x="0" y="0"/>
+          <a:chExt cx="0" cy="0"/>
+        </a:xfrm>
+      </p:grpSpPr>
+      <p:sp>
+        <p:nvSpPr>
+          <p:cNvPr id="2" name="Title 1">
+            <a:extLst>
+              <a:ext uri="{FF2B5EF4-FFF2-40B4-BE49-F238E27FC236}">
+                <a16:creationId xmlns:a16="http://schemas.microsoft.com/office/drawing/2014/main" id="{5DEB2A3D-8D63-9C8B-C3AB-947682DA6A8D}"/>
+              </a:ext>
+            </a:extLst>
+          </p:cNvPr>
+          <p:cNvSpPr>
+            <a:spLocks noGrp="1"/>
+          </p:cNvSpPr>
+          <p:nvPr>
+            <p:ph type="title"/>
+          </p:nvPr>
+        </p:nvSpPr>
+        <p:spPr/>
+        <p:txBody>
+          <a:bodyPr/>
+          <a:lstStyle/>
+          <a:p>
+            <a:endParaRPr lang="en-US"/>
+          </a:p>
+        </p:txBody>
+      </p:sp>
+      <p:sp>
+        <p:nvSpPr>
+          <p:cNvPr id="3" name="Content Placeholder 2">
+            <a:extLst>
+              <a:ext uri="{FF2B5EF4-FFF2-40B4-BE49-F238E27FC236}">
+                <a16:creationId xmlns:a16="http://schemas.microsoft.com/office/drawing/2014/main" id="{B849A053-A236-679C-83D9-DD618F87AA3E}"/>
+              </a:ext>
+            </a:extLst>
+          </p:cNvPr>
+          <p:cNvSpPr>
+            <a:spLocks noGrp="1"/>
+          </p:cNvSpPr>
+          <p:nvPr>
+            <p:ph idx="1"/>
+          </p:nvPr>
+        </p:nvSpPr>
+        <p:spPr/>
+        <p:txBody>
+          <a:bodyPr/>
+          <a:lstStyle/>
+          <a:p>
+            <a:endParaRPr lang="pt-BR" dirty="0"/>
+          </a:p>
+          <a:p>
+            <a:r>
+              <a:rPr lang="pt-BR" dirty="0"/>
+              <a:t>Uma </a:t>
+            </a:r>
+            <a:r>
+              <a:rPr lang="pt-BR" b="1" i="1" dirty="0"/>
+              <a:t>fronteira de decisão </a:t>
+            </a:r>
+            <a:r>
+              <a:rPr lang="pt-BR" dirty="0"/>
+              <a:t>corresponde a uma </a:t>
+            </a:r>
+            <a:r>
+              <a:rPr lang="pt-BR" b="1" i="1" dirty="0">
+                <a:solidFill>
+                  <a:srgbClr val="00B050"/>
+                </a:solidFill>
+              </a:rPr>
+              <a:t>superfície de separação</a:t>
+            </a:r>
+            <a:r>
+              <a:rPr lang="pt-BR" b="1" i="1" dirty="0"/>
+              <a:t> </a:t>
+            </a:r>
+            <a:r>
+              <a:rPr lang="pt-BR" dirty="0"/>
+              <a:t>(1D, 2D, 3D, etc.) no </a:t>
+            </a:r>
+            <a:r>
+              <a:rPr lang="pt-BR" b="1" i="1" dirty="0"/>
+              <a:t>espaço de atributos </a:t>
+            </a:r>
+            <a:r>
+              <a:rPr lang="pt-BR" dirty="0"/>
+              <a:t>que separa as classes.</a:t>
+            </a:r>
+          </a:p>
+          <a:p>
+            <a:endParaRPr lang="en-US" dirty="0"/>
+          </a:p>
+        </p:txBody>
+      </p:sp>
+    </p:spTree>
+    <p:extLst>
+      <p:ext uri="{BB962C8B-B14F-4D97-AF65-F5344CB8AC3E}">
+        <p14:creationId xmlns:p14="http://schemas.microsoft.com/office/powerpoint/2010/main" val="1890311029"/>
+      </p:ext>
+    </p:extLst>
+  </p:cSld>
+  <p:clrMapOvr>
+    <a:masterClrMapping/>
+  </p:clrMapOvr>
+</p:sld>
+</file>
+
+<file path=ppt/slides/slide18.xml><?xml version="1.0" encoding="utf-8"?>
+<p:sld xmlns:a="http://schemas.openxmlformats.org/drawingml/2006/main" xmlns:r="http://schemas.openxmlformats.org/officeDocument/2006/relationships" xmlns:p="http://schemas.openxmlformats.org/presentationml/2006/main">
+  <p:cSld>
+    <p:spTree>
+      <p:nvGrpSpPr>
+        <p:cNvPr id="1" name=""/>
+        <p:cNvGrpSpPr/>
+        <p:nvPr/>
+      </p:nvGrpSpPr>
+      <p:grpSpPr>
+        <a:xfrm>
+          <a:off x="0" y="0"/>
+          <a:ext cx="0" cy="0"/>
+          <a:chOff x="0" y="0"/>
+          <a:chExt cx="0" cy="0"/>
+        </a:xfrm>
+      </p:grpSpPr>
+      <p:sp>
+        <p:nvSpPr>
+          <p:cNvPr id="2" name="Título 1">
+            <a:extLst>
+              <a:ext uri="{FF2B5EF4-FFF2-40B4-BE49-F238E27FC236}">
+                <a16:creationId xmlns:a16="http://schemas.microsoft.com/office/drawing/2014/main" id="{0D0DF5BB-4965-42FA-1FE9-FA4F63D368AC}"/>
+              </a:ext>
+            </a:extLst>
+          </p:cNvPr>
+          <p:cNvSpPr>
+            <a:spLocks noGrp="1"/>
+          </p:cNvSpPr>
+          <p:nvPr>
+            <p:ph type="title"/>
+          </p:nvPr>
+        </p:nvSpPr>
+        <p:spPr/>
+        <p:txBody>
+          <a:bodyPr/>
+          <a:lstStyle/>
+          <a:p>
+            <a:r>
+              <a:rPr lang="pt-BR" dirty="0"/>
+              <a:t>Funções discriminantes</a:t>
+            </a:r>
+          </a:p>
+        </p:txBody>
+      </p:sp>
+      <mc:AlternateContent xmlns:mc="http://schemas.openxmlformats.org/markup-compatibility/2006" xmlns:a14="http://schemas.microsoft.com/office/drawing/2010/main">
+        <mc:Choice Requires="a14">
+          <p:sp>
+            <p:nvSpPr>
+              <p:cNvPr id="3" name="Espaço Reservado para Conteúdo 2">
+                <a:extLst>
+                  <a:ext uri="{FF2B5EF4-FFF2-40B4-BE49-F238E27FC236}">
+                    <a16:creationId xmlns:a16="http://schemas.microsoft.com/office/drawing/2014/main" id="{057DDB69-30DD-CFD2-808A-F52FDB98EF88}"/>
+                  </a:ext>
+                </a:extLst>
+              </p:cNvPr>
+              <p:cNvSpPr>
+                <a:spLocks noGrp="1"/>
+              </p:cNvSpPr>
+              <p:nvPr>
+                <p:ph idx="1"/>
+              </p:nvPr>
+            </p:nvSpPr>
+            <p:spPr>
+              <a:xfrm>
+                <a:off x="4876800" y="1825624"/>
+                <a:ext cx="7153275" cy="5032375"/>
+              </a:xfrm>
+            </p:spPr>
+            <p:txBody>
+              <a:bodyPr>
+                <a:normAutofit/>
+              </a:bodyPr>
+              <a:lstStyle/>
+              <a:p>
+                <a:r>
+                  <a:rPr lang="pt-BR" dirty="0"/>
+                  <a:t>Uma</a:t>
+                </a:r>
+                <a:r>
+                  <a:rPr lang="pt-BR" dirty="0">
+                    <a:solidFill>
+                      <a:srgbClr val="7030A0"/>
+                    </a:solidFill>
+                  </a:rPr>
+                  <a:t> </a:t>
+                </a:r>
+                <a:r>
+                  <a:rPr lang="pt-BR" b="1" i="1" dirty="0">
+                    <a:solidFill>
+                      <a:srgbClr val="7030A0"/>
+                    </a:solidFill>
+                  </a:rPr>
+                  <a:t>função discriminante</a:t>
+                </a:r>
+                <a:r>
+                  <a:rPr lang="pt-BR" b="1" i="1" dirty="0"/>
+                  <a:t> </a:t>
+                </a:r>
+                <a:r>
+                  <a:rPr lang="pt-BR" dirty="0"/>
+                  <a:t>com formato de </a:t>
+                </a:r>
+                <a:r>
+                  <a:rPr lang="pt-BR" b="1" i="1" dirty="0">
+                    <a:solidFill>
+                      <a:schemeClr val="accent2"/>
+                    </a:solidFill>
+                  </a:rPr>
+                  <a:t>hiperplano</a:t>
+                </a:r>
+                <a:r>
+                  <a:rPr lang="pt-BR" dirty="0"/>
+                  <a:t> é dada por</a:t>
+                </a:r>
+              </a:p>
+              <a:p>
+                <a:pPr marL="0" indent="0">
+                  <a:buNone/>
+                </a:pPr>
+                <a14:m>
+                  <m:oMathPara xmlns:m="http://schemas.openxmlformats.org/officeDocument/2006/math">
+                    <m:oMathParaPr>
+                      <m:jc m:val="centerGroup"/>
+                    </m:oMathParaPr>
+                    <m:oMath xmlns:m="http://schemas.openxmlformats.org/officeDocument/2006/math">
+                      <m:r>
+                        <a:rPr lang="pt-BR" b="0" i="1" smtClean="0">
+                          <a:latin typeface="Cambria Math" panose="02040503050406030204" pitchFamily="18" charset="0"/>
+                        </a:rPr>
+                        <m:t>𝑔</m:t>
+                      </m:r>
+                      <m:d>
+                        <m:dPr>
+                          <m:ctrlPr>
+                            <a:rPr lang="pt-BR" b="0" i="1" smtClean="0">
+                              <a:latin typeface="Cambria Math" panose="02040503050406030204" pitchFamily="18" charset="0"/>
+                            </a:rPr>
+                          </m:ctrlPr>
+                        </m:dPr>
+                        <m:e>
+                          <m:r>
+                            <a:rPr lang="pt-BR" b="1" i="1" smtClean="0">
+                              <a:latin typeface="Cambria Math" panose="02040503050406030204" pitchFamily="18" charset="0"/>
+                            </a:rPr>
+                            <m:t>𝒙</m:t>
+                          </m:r>
+                        </m:e>
+                      </m:d>
+                      <m:r>
+                        <a:rPr lang="pt-BR" b="0" i="1" smtClean="0">
+                          <a:latin typeface="Cambria Math" panose="02040503050406030204" pitchFamily="18" charset="0"/>
+                        </a:rPr>
+                        <m:t>=</m:t>
+                      </m:r>
+                      <m:sSub>
+                        <m:sSubPr>
+                          <m:ctrlPr>
+                            <a:rPr lang="pt-BR" b="0" i="1" smtClean="0">
+                              <a:latin typeface="Cambria Math" panose="02040503050406030204" pitchFamily="18" charset="0"/>
+                            </a:rPr>
+                          </m:ctrlPr>
+                        </m:sSubPr>
+                        <m:e>
+                          <m:r>
+                            <a:rPr lang="pt-BR" b="0" i="1" smtClean="0">
+                              <a:latin typeface="Cambria Math" panose="02040503050406030204" pitchFamily="18" charset="0"/>
+                            </a:rPr>
+                            <m:t>𝑎</m:t>
+                          </m:r>
+                        </m:e>
+                        <m:sub>
+                          <m:r>
+                            <a:rPr lang="pt-BR" b="0" i="1" smtClean="0">
+                              <a:latin typeface="Cambria Math" panose="02040503050406030204" pitchFamily="18" charset="0"/>
+                            </a:rPr>
+                            <m:t>0</m:t>
+                          </m:r>
+                        </m:sub>
+                      </m:sSub>
+                      <m:r>
+                        <a:rPr lang="pt-BR" b="0" i="1" smtClean="0">
+                          <a:latin typeface="Cambria Math" panose="02040503050406030204" pitchFamily="18" charset="0"/>
+                        </a:rPr>
+                        <m:t>+</m:t>
+                      </m:r>
+                      <m:sSub>
+                        <m:sSubPr>
+                          <m:ctrlPr>
+                            <a:rPr lang="pt-BR" i="1">
+                              <a:latin typeface="Cambria Math" panose="02040503050406030204" pitchFamily="18" charset="0"/>
+                            </a:rPr>
+                          </m:ctrlPr>
+                        </m:sSubPr>
+                        <m:e>
+                          <m:r>
+                            <a:rPr lang="pt-BR" i="1">
+                              <a:latin typeface="Cambria Math" panose="02040503050406030204" pitchFamily="18" charset="0"/>
+                            </a:rPr>
+                            <m:t>𝑎</m:t>
+                          </m:r>
+                        </m:e>
+                        <m:sub>
+                          <m:r>
+                            <a:rPr lang="pt-BR" b="0" i="1" smtClean="0">
+                              <a:latin typeface="Cambria Math" panose="02040503050406030204" pitchFamily="18" charset="0"/>
+                            </a:rPr>
+                            <m:t>1</m:t>
+                          </m:r>
+                        </m:sub>
+                      </m:sSub>
+                      <m:sSub>
+                        <m:sSubPr>
+                          <m:ctrlPr>
+                            <a:rPr lang="pt-BR" i="1" smtClean="0">
+                              <a:latin typeface="Cambria Math" panose="02040503050406030204" pitchFamily="18" charset="0"/>
+                            </a:rPr>
+                          </m:ctrlPr>
+                        </m:sSubPr>
+                        <m:e>
+                          <m:r>
+                            <a:rPr lang="pt-BR" b="0" i="1" smtClean="0">
+                              <a:latin typeface="Cambria Math" panose="02040503050406030204" pitchFamily="18" charset="0"/>
+                            </a:rPr>
+                            <m:t>𝑥</m:t>
+                          </m:r>
+                        </m:e>
+                        <m:sub>
+                          <m:r>
+                            <a:rPr lang="pt-BR" b="0" i="1" smtClean="0">
+                              <a:latin typeface="Cambria Math" panose="02040503050406030204" pitchFamily="18" charset="0"/>
+                            </a:rPr>
+                            <m:t>1</m:t>
+                          </m:r>
+                        </m:sub>
+                      </m:sSub>
+                      <m:r>
+                        <a:rPr lang="pt-BR" b="0" i="1" smtClean="0">
+                          <a:latin typeface="Cambria Math" panose="02040503050406030204" pitchFamily="18" charset="0"/>
+                        </a:rPr>
+                        <m:t>+</m:t>
+                      </m:r>
+                      <m:sSub>
+                        <m:sSubPr>
+                          <m:ctrlPr>
+                            <a:rPr lang="pt-BR" i="1">
+                              <a:latin typeface="Cambria Math" panose="02040503050406030204" pitchFamily="18" charset="0"/>
+                            </a:rPr>
+                          </m:ctrlPr>
+                        </m:sSubPr>
+                        <m:e>
+                          <m:r>
+                            <a:rPr lang="pt-BR" i="1">
+                              <a:latin typeface="Cambria Math" panose="02040503050406030204" pitchFamily="18" charset="0"/>
+                            </a:rPr>
+                            <m:t>𝑎</m:t>
+                          </m:r>
+                        </m:e>
+                        <m:sub>
+                          <m:r>
+                            <a:rPr lang="pt-BR" b="0" i="1" smtClean="0">
+                              <a:latin typeface="Cambria Math" panose="02040503050406030204" pitchFamily="18" charset="0"/>
+                            </a:rPr>
+                            <m:t>2</m:t>
+                          </m:r>
+                        </m:sub>
+                      </m:sSub>
+                      <m:sSub>
+                        <m:sSubPr>
+                          <m:ctrlPr>
+                            <a:rPr lang="pt-BR" i="1">
+                              <a:latin typeface="Cambria Math" panose="02040503050406030204" pitchFamily="18" charset="0"/>
+                            </a:rPr>
+                          </m:ctrlPr>
+                        </m:sSubPr>
+                        <m:e>
+                          <m:r>
+                            <a:rPr lang="pt-BR" i="1">
+                              <a:latin typeface="Cambria Math" panose="02040503050406030204" pitchFamily="18" charset="0"/>
+                            </a:rPr>
+                            <m:t>𝑥</m:t>
+                          </m:r>
+                        </m:e>
+                        <m:sub>
+                          <m:r>
+                            <a:rPr lang="pt-BR" b="0" i="1" smtClean="0">
+                              <a:latin typeface="Cambria Math" panose="02040503050406030204" pitchFamily="18" charset="0"/>
+                            </a:rPr>
+                            <m:t>2</m:t>
+                          </m:r>
+                        </m:sub>
+                      </m:sSub>
+                      <m:r>
+                        <a:rPr lang="pt-BR" b="0" i="1" smtClean="0">
+                          <a:latin typeface="Cambria Math" panose="02040503050406030204" pitchFamily="18" charset="0"/>
+                        </a:rPr>
+                        <m:t>+</m:t>
+                      </m:r>
+                      <m:r>
+                        <a:rPr lang="pt-BR" b="1" i="1">
+                          <a:latin typeface="Cambria Math" panose="02040503050406030204" pitchFamily="18" charset="0"/>
+                        </a:rPr>
+                        <m:t>…</m:t>
+                      </m:r>
+                      <m:r>
+                        <a:rPr lang="pt-BR" b="0" i="1" smtClean="0">
+                          <a:latin typeface="Cambria Math" panose="02040503050406030204" pitchFamily="18" charset="0"/>
+                        </a:rPr>
+                        <m:t>+</m:t>
+                      </m:r>
+                      <m:sSub>
+                        <m:sSubPr>
+                          <m:ctrlPr>
+                            <a:rPr lang="pt-BR" i="1">
+                              <a:latin typeface="Cambria Math" panose="02040503050406030204" pitchFamily="18" charset="0"/>
+                            </a:rPr>
+                          </m:ctrlPr>
+                        </m:sSubPr>
+                        <m:e>
+                          <m:r>
+                            <a:rPr lang="pt-BR" i="1">
+                              <a:latin typeface="Cambria Math" panose="02040503050406030204" pitchFamily="18" charset="0"/>
+                            </a:rPr>
+                            <m:t>𝑎</m:t>
+                          </m:r>
+                        </m:e>
+                        <m:sub>
+                          <m:r>
+                            <a:rPr lang="pt-BR" b="0" i="1" smtClean="0">
+                              <a:latin typeface="Cambria Math" panose="02040503050406030204" pitchFamily="18" charset="0"/>
+                            </a:rPr>
+                            <m:t>𝐾</m:t>
+                          </m:r>
+                        </m:sub>
+                      </m:sSub>
+                      <m:sSub>
+                        <m:sSubPr>
+                          <m:ctrlPr>
+                            <a:rPr lang="pt-BR" i="1">
+                              <a:latin typeface="Cambria Math" panose="02040503050406030204" pitchFamily="18" charset="0"/>
+                            </a:rPr>
+                          </m:ctrlPr>
+                        </m:sSubPr>
+                        <m:e>
+                          <m:r>
+                            <a:rPr lang="pt-BR" i="1">
+                              <a:latin typeface="Cambria Math" panose="02040503050406030204" pitchFamily="18" charset="0"/>
+                            </a:rPr>
+                            <m:t>𝑥</m:t>
+                          </m:r>
+                        </m:e>
+                        <m:sub>
+                          <m:r>
+                            <a:rPr lang="pt-BR" b="0" i="1" smtClean="0">
+                              <a:latin typeface="Cambria Math" panose="02040503050406030204" pitchFamily="18" charset="0"/>
+                            </a:rPr>
+                            <m:t>𝐾</m:t>
+                          </m:r>
+                        </m:sub>
+                      </m:sSub>
+                      <m:r>
+                        <a:rPr lang="pt-BR" b="0" i="1" smtClean="0">
+                          <a:latin typeface="Cambria Math" panose="02040503050406030204" pitchFamily="18" charset="0"/>
+                        </a:rPr>
+                        <m:t>=</m:t>
+                      </m:r>
+                      <m:sSup>
+                        <m:sSupPr>
+                          <m:ctrlPr>
+                            <a:rPr lang="pt-BR" i="1">
+                              <a:latin typeface="Cambria Math" panose="02040503050406030204" pitchFamily="18" charset="0"/>
+                            </a:rPr>
+                          </m:ctrlPr>
+                        </m:sSupPr>
+                        <m:e>
+                          <m:r>
+                            <a:rPr lang="pt-BR" b="1" i="1">
+                              <a:latin typeface="Cambria Math" panose="02040503050406030204" pitchFamily="18" charset="0"/>
+                            </a:rPr>
+                            <m:t>𝒂</m:t>
+                          </m:r>
+                        </m:e>
+                        <m:sup>
+                          <m:r>
+                            <a:rPr lang="pt-BR" i="1">
+                              <a:latin typeface="Cambria Math" panose="02040503050406030204" pitchFamily="18" charset="0"/>
+                            </a:rPr>
+                            <m:t>𝑇</m:t>
+                          </m:r>
+                        </m:sup>
+                      </m:sSup>
+                      <m:r>
+                        <a:rPr lang="pt-BR" b="1" i="1">
+                          <a:latin typeface="Cambria Math" panose="02040503050406030204" pitchFamily="18" charset="0"/>
+                        </a:rPr>
+                        <m:t>𝒙</m:t>
+                      </m:r>
+                      <m:r>
+                        <a:rPr lang="pt-BR" b="1" i="0" smtClean="0">
+                          <a:latin typeface="Cambria Math" panose="02040503050406030204" pitchFamily="18" charset="0"/>
+                        </a:rPr>
+                        <m:t>.</m:t>
+                      </m:r>
+                    </m:oMath>
+                  </m:oMathPara>
+                </a14:m>
+                <a:endParaRPr lang="pt-BR" dirty="0"/>
+              </a:p>
+              <a:p>
+                <a:r>
+                  <a:rPr lang="pt-BR" dirty="0"/>
+                  <a:t>Um </a:t>
+                </a:r>
+                <a:r>
+                  <a:rPr lang="pt-BR" b="1" i="1" dirty="0"/>
+                  <a:t>hiperplano</a:t>
+                </a:r>
+                <a:r>
+                  <a:rPr lang="pt-BR" dirty="0"/>
+                  <a:t> pode ser 1 ponto em 1D, uma reta em 2D, um plano em 3D, etc.</a:t>
+                </a:r>
+              </a:p>
+              <a:p>
+                <a:pPr lvl="1">
+                  <a:buFont typeface="Wingdings" panose="05000000000000000000" pitchFamily="2" charset="2"/>
+                  <a:buChar char="§"/>
+                </a:pPr>
+                <a:r>
+                  <a:rPr lang="pt-BR" dirty="0"/>
+                  <a:t>O coeficiente </a:t>
+                </a:r>
+                <a14:m>
+                  <m:oMath xmlns:m="http://schemas.openxmlformats.org/officeDocument/2006/math">
+                    <m:sSub>
+                      <m:sSubPr>
+                        <m:ctrlPr>
+                          <a:rPr lang="pt-BR" i="1">
+                            <a:latin typeface="Cambria Math" panose="02040503050406030204" pitchFamily="18" charset="0"/>
+                          </a:rPr>
+                        </m:ctrlPr>
+                      </m:sSubPr>
+                      <m:e>
+                        <m:r>
+                          <a:rPr lang="pt-BR" i="1">
+                            <a:latin typeface="Cambria Math" panose="02040503050406030204" pitchFamily="18" charset="0"/>
+                          </a:rPr>
+                          <m:t>𝑎</m:t>
+                        </m:r>
+                      </m:e>
+                      <m:sub>
+                        <m:r>
+                          <a:rPr lang="pt-BR" i="1">
+                            <a:latin typeface="Cambria Math" panose="02040503050406030204" pitchFamily="18" charset="0"/>
+                          </a:rPr>
+                          <m:t>0</m:t>
+                        </m:r>
+                      </m:sub>
+                    </m:sSub>
+                  </m:oMath>
+                </a14:m>
+                <a:r>
+                  <a:rPr lang="pt-BR" dirty="0"/>
+                  <a:t> (</a:t>
+                </a:r>
+                <a:r>
+                  <a:rPr lang="pt-BR" b="1" i="1" dirty="0"/>
+                  <a:t>bias</a:t>
+                </a:r>
+                <a:r>
+                  <a:rPr lang="pt-BR" dirty="0"/>
+                  <a:t>) dá o deslocamento com relação à origem.</a:t>
+                </a:r>
+              </a:p>
+              <a:p>
+                <a:pPr lvl="1">
+                  <a:buFont typeface="Wingdings" panose="05000000000000000000" pitchFamily="2" charset="2"/>
+                  <a:buChar char="§"/>
+                </a:pPr>
+                <a:r>
+                  <a:rPr lang="pt-BR" dirty="0"/>
+                  <a:t>O restante dos pesos determina a orientação do </a:t>
+                </a:r>
+                <a:r>
+                  <a:rPr lang="pt-BR" b="1" i="1" dirty="0"/>
+                  <a:t>hiperplano</a:t>
+                </a:r>
+                <a:r>
+                  <a:rPr lang="pt-BR" dirty="0"/>
+                  <a:t>.</a:t>
+                </a:r>
+              </a:p>
+              <a:p>
+                <a:r>
+                  <a:rPr lang="pt-BR" dirty="0"/>
+                  <a:t>Lembrem-se que </a:t>
+                </a:r>
+                <a:r>
+                  <a:rPr lang="pt-BR" b="1" i="1" dirty="0">
+                    <a:solidFill>
+                      <a:schemeClr val="accent2"/>
+                    </a:solidFill>
+                  </a:rPr>
+                  <a:t>hiperplanos</a:t>
+                </a:r>
+                <a:r>
+                  <a:rPr lang="pt-BR" dirty="0"/>
+                  <a:t> fazem </a:t>
+                </a:r>
+                <a:r>
+                  <a:rPr lang="pt-BR" b="1" i="1" dirty="0">
+                    <a:solidFill>
+                      <a:schemeClr val="accent5"/>
+                    </a:solidFill>
+                  </a:rPr>
+                  <a:t>mapeamentos lineares </a:t>
+                </a:r>
+                <a:r>
+                  <a:rPr lang="pt-BR" dirty="0"/>
+                  <a:t>dos atributos nas saídas.</a:t>
+                </a:r>
+              </a:p>
+            </p:txBody>
+          </p:sp>
+        </mc:Choice>
+        <mc:Fallback xmlns="">
+          <p:sp>
+            <p:nvSpPr>
+              <p:cNvPr id="3" name="Espaço Reservado para Conteúdo 2">
+                <a:extLst>
+                  <a:ext uri="{FF2B5EF4-FFF2-40B4-BE49-F238E27FC236}">
+                    <a16:creationId xmlns:a16="http://schemas.microsoft.com/office/drawing/2014/main" id="{057DDB69-30DD-CFD2-808A-F52FDB98EF88}"/>
+                  </a:ext>
+                </a:extLst>
+              </p:cNvPr>
+              <p:cNvSpPr>
+                <a:spLocks noGrp="1" noRot="1" noChangeAspect="1" noMove="1" noResize="1" noEditPoints="1" noAdjustHandles="1" noChangeArrowheads="1" noChangeShapeType="1" noTextEdit="1"/>
+              </p:cNvSpPr>
+              <p:nvPr>
+                <p:ph idx="1"/>
+              </p:nvPr>
+            </p:nvSpPr>
+            <p:spPr>
+              <a:xfrm>
+                <a:off x="4876800" y="1825624"/>
+                <a:ext cx="7153275" cy="5032375"/>
+              </a:xfrm>
+              <a:blipFill>
+                <a:blip r:embed="rId3"/>
+                <a:stretch>
+                  <a:fillRect l="-1535" t="-1937" r="-426"/>
+                </a:stretch>
+              </a:blipFill>
+            </p:spPr>
+            <p:txBody>
+              <a:bodyPr/>
+              <a:lstStyle/>
+              <a:p>
+                <a:r>
+                  <a:rPr lang="en-US">
+                    <a:noFill/>
+                  </a:rPr>
+                  <a:t> </a:t>
+                </a:r>
+              </a:p>
+            </p:txBody>
+          </p:sp>
+        </mc:Fallback>
+      </mc:AlternateContent>
+      <p:pic>
+        <p:nvPicPr>
+          <p:cNvPr id="4" name="Picture 3">
+            <a:extLst>
+              <a:ext uri="{FF2B5EF4-FFF2-40B4-BE49-F238E27FC236}">
+                <a16:creationId xmlns:a16="http://schemas.microsoft.com/office/drawing/2014/main" id="{DF06FD70-E89F-BC52-2900-5506EBD6CF3F}"/>
+              </a:ext>
+            </a:extLst>
+          </p:cNvPr>
+          <p:cNvPicPr>
+            <a:picLocks noChangeAspect="1"/>
+          </p:cNvPicPr>
+          <p:nvPr/>
+        </p:nvPicPr>
+        <p:blipFill rotWithShape="1">
+          <a:blip r:embed="rId4">
+            <a:extLst>
+              <a:ext uri="{28A0092B-C50C-407E-A947-70E740481C1C}">
+                <a14:useLocalDpi xmlns:a14="http://schemas.microsoft.com/office/drawing/2010/main" val="0"/>
+              </a:ext>
+            </a:extLst>
+          </a:blip>
+          <a:srcRect l="6368" t="2623" r="7430" b="1353"/>
+          <a:stretch/>
+        </p:blipFill>
+        <p:spPr>
+          <a:xfrm>
+            <a:off x="1139670" y="2602756"/>
+            <a:ext cx="2841780" cy="3263704"/>
+          </a:xfrm>
+          <a:prstGeom prst="rect">
+            <a:avLst/>
+          </a:prstGeom>
+        </p:spPr>
+      </p:pic>
+    </p:spTree>
+    <p:extLst>
+      <p:ext uri="{BB962C8B-B14F-4D97-AF65-F5344CB8AC3E}">
+        <p14:creationId xmlns:p14="http://schemas.microsoft.com/office/powerpoint/2010/main" val="1806652215"/>
+      </p:ext>
+    </p:extLst>
+  </p:cSld>
+  <p:clrMapOvr>
+    <a:masterClrMapping/>
+  </p:clrMapOvr>
+</p:sld>
+</file>
+
+<file path=ppt/slides/slide19.xml><?xml version="1.0" encoding="utf-8"?>
+<p:sld xmlns:a="http://schemas.openxmlformats.org/drawingml/2006/main" xmlns:r="http://schemas.openxmlformats.org/officeDocument/2006/relationships" xmlns:p="http://schemas.openxmlformats.org/presentationml/2006/main">
+  <p:cSld>
+    <p:spTree>
+      <p:nvGrpSpPr>
+        <p:cNvPr id="1" name=""/>
+        <p:cNvGrpSpPr/>
+        <p:nvPr/>
+      </p:nvGrpSpPr>
+      <p:grpSpPr>
+        <a:xfrm>
+          <a:off x="0" y="0"/>
+          <a:ext cx="0" cy="0"/>
+          <a:chOff x="0" y="0"/>
+          <a:chExt cx="0" cy="0"/>
+        </a:xfrm>
+      </p:grpSpPr>
+      <p:sp>
+        <p:nvSpPr>
+          <p:cNvPr id="2" name="Título 1">
+            <a:extLst>
+              <a:ext uri="{FF2B5EF4-FFF2-40B4-BE49-F238E27FC236}">
+                <a16:creationId xmlns:a16="http://schemas.microsoft.com/office/drawing/2014/main" id="{14850ACD-2DE0-7E6B-F65F-1A40170C1B2F}"/>
+              </a:ext>
+            </a:extLst>
+          </p:cNvPr>
+          <p:cNvSpPr>
+            <a:spLocks noGrp="1"/>
+          </p:cNvSpPr>
+          <p:nvPr>
+            <p:ph type="title"/>
+          </p:nvPr>
+        </p:nvSpPr>
+        <p:spPr/>
+        <p:txBody>
+          <a:bodyPr/>
+          <a:lstStyle/>
+          <a:p>
+            <a:r>
+              <a:rPr lang="pt-BR" dirty="0"/>
+              <a:t>Funções discriminantes</a:t>
+            </a:r>
+          </a:p>
+        </p:txBody>
+      </p:sp>
+      <mc:AlternateContent xmlns:mc="http://schemas.openxmlformats.org/markup-compatibility/2006" xmlns:a14="http://schemas.microsoft.com/office/drawing/2010/main">
+        <mc:Choice Requires="a14">
+          <p:sp>
+            <p:nvSpPr>
+              <p:cNvPr id="3" name="Espaço Reservado para Conteúdo 2">
+                <a:extLst>
+                  <a:ext uri="{FF2B5EF4-FFF2-40B4-BE49-F238E27FC236}">
+                    <a16:creationId xmlns:a16="http://schemas.microsoft.com/office/drawing/2014/main" id="{1C254C3E-10F9-2C66-DDBB-99D1164F61E7}"/>
+                  </a:ext>
+                </a:extLst>
+              </p:cNvPr>
+              <p:cNvSpPr>
+                <a:spLocks noGrp="1"/>
+              </p:cNvSpPr>
+              <p:nvPr>
+                <p:ph idx="1"/>
+              </p:nvPr>
+            </p:nvSpPr>
+            <p:spPr>
+              <a:xfrm>
+                <a:off x="4648201" y="1825624"/>
+                <a:ext cx="7448550" cy="5032375"/>
+              </a:xfrm>
+            </p:spPr>
+            <p:txBody>
+              <a:bodyPr>
+                <a:normAutofit/>
+              </a:bodyPr>
+              <a:lstStyle/>
+              <a:p>
+                <a:r>
+                  <a:rPr lang="pt-BR" dirty="0"/>
+                  <a:t>Nosso </a:t>
+                </a:r>
+                <a:r>
+                  <a:rPr lang="pt-BR" b="1" i="1" dirty="0">
+                    <a:solidFill>
+                      <a:schemeClr val="accent2"/>
+                    </a:solidFill>
+                  </a:rPr>
+                  <a:t>objetivo</a:t>
+                </a:r>
+                <a:r>
+                  <a:rPr lang="pt-BR" b="1" i="1" dirty="0">
+                    <a:solidFill>
+                      <a:srgbClr val="00B050"/>
+                    </a:solidFill>
+                  </a:rPr>
+                  <a:t> é </a:t>
+                </a:r>
+                <a:r>
+                  <a:rPr lang="pt-BR" b="1" i="1" dirty="0">
+                    <a:solidFill>
+                      <a:schemeClr val="accent2"/>
+                    </a:solidFill>
+                  </a:rPr>
+                  <a:t>encontrar os pesos </a:t>
+                </a:r>
+                <a:r>
+                  <a:rPr lang="pt-BR" b="1" i="1" dirty="0">
+                    <a:solidFill>
+                      <a:srgbClr val="00B050"/>
+                    </a:solidFill>
+                  </a:rPr>
+                  <a:t>da função discriminante </a:t>
+                </a:r>
+                <a:r>
+                  <a:rPr lang="pt-BR" dirty="0"/>
+                  <a:t>de tal forma que que a classe atribuída a um exemplo de entrada,</a:t>
+                </a:r>
+                <a:r>
+                  <a:rPr lang="pt-BR" b="1" dirty="0"/>
+                  <a:t> </a:t>
+                </a:r>
+                <a14:m>
+                  <m:oMath xmlns:m="http://schemas.openxmlformats.org/officeDocument/2006/math">
+                    <m:r>
+                      <a:rPr lang="pt-BR" b="1" i="1">
+                        <a:latin typeface="Cambria Math" panose="02040503050406030204" pitchFamily="18" charset="0"/>
+                      </a:rPr>
+                      <m:t>𝒙</m:t>
+                    </m:r>
+                  </m:oMath>
+                </a14:m>
+                <a:r>
+                  <a:rPr lang="pt-BR" dirty="0"/>
+                  <a:t>, seja:</a:t>
+                </a:r>
+              </a:p>
+              <a:p>
+                <a:pPr marL="0" indent="0">
+                  <a:buNone/>
+                </a:pPr>
+                <a14:m>
+                  <m:oMathPara xmlns:m="http://schemas.openxmlformats.org/officeDocument/2006/math">
+                    <m:oMathParaPr>
+                      <m:jc m:val="centerGroup"/>
+                    </m:oMathParaPr>
+                    <m:oMath xmlns:m="http://schemas.openxmlformats.org/officeDocument/2006/math">
+                      <m:sSub>
+                        <m:sSubPr>
+                          <m:ctrlPr>
+                            <a:rPr lang="pt-BR" sz="2400" i="1">
+                              <a:latin typeface="Cambria Math" panose="02040503050406030204" pitchFamily="18" charset="0"/>
+                            </a:rPr>
+                          </m:ctrlPr>
+                        </m:sSubPr>
+                        <m:e>
+                          <m:r>
+                            <a:rPr lang="pt-BR" sz="2400" i="1">
+                              <a:latin typeface="Cambria Math" panose="02040503050406030204" pitchFamily="18" charset="0"/>
+                            </a:rPr>
+                            <m:t>𝐶</m:t>
+                          </m:r>
+                        </m:e>
+                        <m:sub>
+                          <m:r>
+                            <a:rPr lang="pt-BR" sz="2400" b="0" i="1" smtClean="0">
+                              <a:latin typeface="Cambria Math" panose="02040503050406030204" pitchFamily="18" charset="0"/>
+                            </a:rPr>
+                            <m:t>𝑞</m:t>
+                          </m:r>
+                        </m:sub>
+                      </m:sSub>
+                      <m:r>
+                        <a:rPr lang="pt-BR" sz="2400" b="1" i="1">
+                          <a:latin typeface="Cambria Math" panose="02040503050406030204" pitchFamily="18" charset="0"/>
+                        </a:rPr>
+                        <m:t>=</m:t>
+                      </m:r>
+                      <m:d>
+                        <m:dPr>
+                          <m:begChr m:val="{"/>
+                          <m:endChr m:val=""/>
+                          <m:ctrlPr>
+                            <a:rPr lang="pt-BR" sz="2400" b="1" i="1">
+                              <a:latin typeface="Cambria Math" panose="02040503050406030204" pitchFamily="18" charset="0"/>
+                            </a:rPr>
+                          </m:ctrlPr>
+                        </m:dPr>
+                        <m:e>
+                          <m:eqArr>
+                            <m:eqArrPr>
+                              <m:ctrlPr>
+                                <a:rPr lang="pt-BR" sz="2400" i="1">
+                                  <a:latin typeface="Cambria Math" panose="02040503050406030204" pitchFamily="18" charset="0"/>
+                                </a:rPr>
+                              </m:ctrlPr>
+                            </m:eqArrPr>
+                            <m:e>
+                              <m:r>
+                                <a:rPr lang="pt-BR" sz="2400" b="0" i="1" smtClean="0">
+                                  <a:latin typeface="Cambria Math" panose="02040503050406030204" pitchFamily="18" charset="0"/>
+                                </a:rPr>
+                                <m:t>𝑞</m:t>
+                              </m:r>
+                              <m:r>
+                                <a:rPr lang="pt-BR" sz="2400" b="0" i="1" smtClean="0">
+                                  <a:latin typeface="Cambria Math" panose="02040503050406030204" pitchFamily="18" charset="0"/>
+                                </a:rPr>
+                                <m:t>=1,                    </m:t>
+                              </m:r>
+                              <m:r>
+                                <a:rPr lang="pt-BR" sz="2400" b="0" i="1">
+                                  <a:latin typeface="Cambria Math" panose="02040503050406030204" pitchFamily="18" charset="0"/>
+                                </a:rPr>
+                                <m:t>𝑔</m:t>
+                              </m:r>
+                              <m:d>
+                                <m:dPr>
+                                  <m:ctrlPr>
+                                    <a:rPr lang="pt-BR" sz="2400" i="1">
+                                      <a:latin typeface="Cambria Math" panose="02040503050406030204" pitchFamily="18" charset="0"/>
+                                    </a:rPr>
+                                  </m:ctrlPr>
+                                </m:dPr>
+                                <m:e>
+                                  <m:r>
+                                    <a:rPr lang="pt-BR" sz="2400" b="1" i="1">
+                                      <a:latin typeface="Cambria Math" panose="02040503050406030204" pitchFamily="18" charset="0"/>
+                                    </a:rPr>
+                                    <m:t>𝒙</m:t>
+                                  </m:r>
+                                </m:e>
+                              </m:d>
+                              <m:r>
+                                <a:rPr lang="pt-BR" sz="2400" b="0" i="1" smtClean="0">
+                                  <a:latin typeface="Cambria Math" panose="02040503050406030204" pitchFamily="18" charset="0"/>
+                                </a:rPr>
+                                <m:t>&lt;</m:t>
+                              </m:r>
+                              <m:r>
+                                <a:rPr lang="pt-BR" sz="2400" b="0" i="1">
+                                  <a:latin typeface="Cambria Math" panose="02040503050406030204" pitchFamily="18" charset="0"/>
+                                </a:rPr>
+                                <m:t>0</m:t>
+                              </m:r>
+                            </m:e>
+                            <m:e>
+                              <m:r>
+                                <a:rPr lang="pt-BR" sz="2400" b="0" i="1" smtClean="0">
+                                  <a:latin typeface="Cambria Math" panose="02040503050406030204" pitchFamily="18" charset="0"/>
+                                </a:rPr>
+                                <m:t>𝑞</m:t>
+                              </m:r>
+                              <m:r>
+                                <a:rPr lang="pt-BR" sz="2400" b="0" i="1" smtClean="0">
+                                  <a:latin typeface="Cambria Math" panose="02040503050406030204" pitchFamily="18" charset="0"/>
+                                </a:rPr>
+                                <m:t>=2,                     </m:t>
+                              </m:r>
+                              <m:r>
+                                <a:rPr lang="pt-BR" sz="2400" b="0" i="1" smtClean="0">
+                                  <a:latin typeface="Cambria Math" panose="02040503050406030204" pitchFamily="18" charset="0"/>
+                                </a:rPr>
+                                <m:t>𝑔</m:t>
+                              </m:r>
+                              <m:d>
+                                <m:dPr>
+                                  <m:ctrlPr>
+                                    <a:rPr lang="pt-BR" sz="2400" i="1">
+                                      <a:latin typeface="Cambria Math" panose="02040503050406030204" pitchFamily="18" charset="0"/>
+                                    </a:rPr>
+                                  </m:ctrlPr>
+                                </m:dPr>
+                                <m:e>
+                                  <m:r>
+                                    <a:rPr lang="pt-BR" sz="2400" b="1" i="1" smtClean="0">
+                                      <a:latin typeface="Cambria Math" panose="02040503050406030204" pitchFamily="18" charset="0"/>
+                                    </a:rPr>
+                                    <m:t>𝒙</m:t>
+                                  </m:r>
+                                </m:e>
+                              </m:d>
+                              <m:r>
+                                <a:rPr lang="pt-BR" sz="2400" b="0" i="1" smtClean="0">
+                                  <a:latin typeface="Cambria Math" panose="02040503050406030204" pitchFamily="18" charset="0"/>
+                                </a:rPr>
+                                <m:t>&gt;0</m:t>
+                              </m:r>
+                            </m:e>
+                            <m:e>
+                              <m:r>
+                                <m:rPr>
+                                  <m:nor/>
+                                </m:rPr>
+                                <a:rPr lang="pt-BR" sz="2400" b="0" i="0" smtClean="0">
+                                  <a:latin typeface="Cambria Math" panose="02040503050406030204" pitchFamily="18" charset="0"/>
+                                </a:rPr>
+                                <m:t>i</m:t>
+                              </m:r>
+                              <m:r>
+                                <m:rPr>
+                                  <m:nor/>
+                                </m:rPr>
+                                <a:rPr lang="pt-BR" sz="2400" dirty="0"/>
+                                <m:t>ndetermina</m:t>
+                              </m:r>
+                              <m:r>
+                                <m:rPr>
+                                  <m:nor/>
+                                </m:rPr>
+                                <a:rPr lang="pt-BR" sz="2400" dirty="0"/>
+                                <m:t>çã</m:t>
+                              </m:r>
+                              <m:r>
+                                <m:rPr>
+                                  <m:nor/>
+                                </m:rPr>
+                                <a:rPr lang="pt-BR" sz="2400" dirty="0"/>
+                                <m:t>o</m:t>
+                              </m:r>
+                              <m:r>
+                                <a:rPr lang="pt-BR" sz="2400" i="1">
+                                  <a:latin typeface="Cambria Math" panose="02040503050406030204" pitchFamily="18" charset="0"/>
+                                </a:rPr>
+                                <m:t>,</m:t>
+                              </m:r>
+                              <m:r>
+                                <a:rPr lang="pt-BR" sz="2400" b="0" i="1" smtClean="0">
+                                  <a:latin typeface="Cambria Math" panose="02040503050406030204" pitchFamily="18" charset="0"/>
+                                </a:rPr>
+                                <m:t>  </m:t>
+                              </m:r>
+                              <m:r>
+                                <a:rPr lang="pt-BR" sz="2400" i="1">
+                                  <a:latin typeface="Cambria Math" panose="02040503050406030204" pitchFamily="18" charset="0"/>
+                                </a:rPr>
+                                <m:t>𝑔</m:t>
+                              </m:r>
+                              <m:d>
+                                <m:dPr>
+                                  <m:ctrlPr>
+                                    <a:rPr lang="pt-BR" sz="2400" i="1">
+                                      <a:latin typeface="Cambria Math" panose="02040503050406030204" pitchFamily="18" charset="0"/>
+                                    </a:rPr>
+                                  </m:ctrlPr>
+                                </m:dPr>
+                                <m:e>
+                                  <m:r>
+                                    <a:rPr lang="pt-BR" sz="2400" b="1" i="1">
+                                      <a:latin typeface="Cambria Math" panose="02040503050406030204" pitchFamily="18" charset="0"/>
+                                    </a:rPr>
+                                    <m:t>𝒙</m:t>
+                                  </m:r>
+                                </m:e>
+                              </m:d>
+                              <m:r>
+                                <a:rPr lang="pt-BR" sz="2400" b="0" i="1" smtClean="0">
+                                  <a:latin typeface="Cambria Math" panose="02040503050406030204" pitchFamily="18" charset="0"/>
+                                </a:rPr>
+                                <m:t>=</m:t>
+                              </m:r>
+                              <m:r>
+                                <a:rPr lang="pt-BR" sz="2400" i="1">
+                                  <a:latin typeface="Cambria Math" panose="02040503050406030204" pitchFamily="18" charset="0"/>
+                                </a:rPr>
+                                <m:t>0</m:t>
+                              </m:r>
+                            </m:e>
+                          </m:eqArr>
+                        </m:e>
+                      </m:d>
+                    </m:oMath>
+                  </m:oMathPara>
+                </a14:m>
+                <a:endParaRPr lang="pt-BR" sz="2700" dirty="0"/>
+              </a:p>
+              <a:p>
+                <a:r>
+                  <a:rPr lang="pt-BR" dirty="0"/>
+                  <a:t>OBS.: Podemos usar também </a:t>
+                </a:r>
+                <a:r>
+                  <a:rPr lang="pt-BR" b="1" i="1" dirty="0"/>
+                  <a:t>funções discriminantes com </a:t>
+                </a:r>
+                <a:r>
+                  <a:rPr lang="pt-BR" b="1" i="1" dirty="0">
+                    <a:solidFill>
+                      <a:srgbClr val="7030A0"/>
+                    </a:solidFill>
+                  </a:rPr>
+                  <a:t>mapeamentos não-lineares.</a:t>
+                </a:r>
+                <a:endParaRPr lang="pt-BR" dirty="0">
+                  <a:solidFill>
+                    <a:srgbClr val="7030A0"/>
+                  </a:solidFill>
+                </a:endParaRPr>
+              </a:p>
+              <a:p>
+                <a:pPr lvl="1">
+                  <a:buFont typeface="Wingdings" panose="05000000000000000000" pitchFamily="2" charset="2"/>
+                  <a:buChar char="§"/>
+                </a:pPr>
+                <a:r>
+                  <a:rPr lang="pt-BR" dirty="0"/>
+                  <a:t>Exemplo: </a:t>
+                </a:r>
+                <a14:m>
+                  <m:oMath xmlns:m="http://schemas.openxmlformats.org/officeDocument/2006/math">
+                    <m:r>
+                      <a:rPr lang="pt-BR" i="1">
+                        <a:latin typeface="Cambria Math" panose="02040503050406030204" pitchFamily="18" charset="0"/>
+                      </a:rPr>
+                      <m:t>𝑔</m:t>
+                    </m:r>
+                    <m:d>
+                      <m:dPr>
+                        <m:ctrlPr>
+                          <a:rPr lang="pt-BR" i="1">
+                            <a:latin typeface="Cambria Math" panose="02040503050406030204" pitchFamily="18" charset="0"/>
+                          </a:rPr>
+                        </m:ctrlPr>
+                      </m:dPr>
+                      <m:e>
+                        <m:r>
+                          <a:rPr lang="pt-BR" b="1" i="1">
+                            <a:latin typeface="Cambria Math" panose="02040503050406030204" pitchFamily="18" charset="0"/>
+                          </a:rPr>
+                          <m:t>𝒙</m:t>
+                        </m:r>
+                      </m:e>
+                    </m:d>
+                    <m:r>
+                      <a:rPr lang="pt-BR" i="1">
+                        <a:latin typeface="Cambria Math" panose="02040503050406030204" pitchFamily="18" charset="0"/>
+                      </a:rPr>
+                      <m:t>=</m:t>
+                    </m:r>
+                    <m:sSub>
+                      <m:sSubPr>
+                        <m:ctrlPr>
+                          <a:rPr lang="pt-BR" i="1">
+                            <a:latin typeface="Cambria Math" panose="02040503050406030204" pitchFamily="18" charset="0"/>
+                          </a:rPr>
+                        </m:ctrlPr>
+                      </m:sSubPr>
+                      <m:e>
+                        <m:r>
+                          <a:rPr lang="pt-BR" i="1">
+                            <a:latin typeface="Cambria Math" panose="02040503050406030204" pitchFamily="18" charset="0"/>
+                          </a:rPr>
+                          <m:t>𝑎</m:t>
+                        </m:r>
+                      </m:e>
+                      <m:sub>
+                        <m:r>
+                          <a:rPr lang="pt-BR" i="1">
+                            <a:latin typeface="Cambria Math" panose="02040503050406030204" pitchFamily="18" charset="0"/>
+                          </a:rPr>
+                          <m:t>0</m:t>
+                        </m:r>
+                      </m:sub>
+                    </m:sSub>
+                    <m:r>
+                      <a:rPr lang="pt-BR" i="1">
+                        <a:latin typeface="Cambria Math" panose="02040503050406030204" pitchFamily="18" charset="0"/>
+                      </a:rPr>
+                      <m:t>+</m:t>
+                    </m:r>
+                    <m:sSubSup>
+                      <m:sSubSupPr>
+                        <m:ctrlPr>
+                          <a:rPr lang="pt-BR" i="1" smtClean="0">
+                            <a:latin typeface="Cambria Math" panose="02040503050406030204" pitchFamily="18" charset="0"/>
+                          </a:rPr>
+                        </m:ctrlPr>
+                      </m:sSubSupPr>
+                      <m:e>
+                        <m:r>
+                          <a:rPr lang="pt-BR" b="0" i="1" smtClean="0">
+                            <a:latin typeface="Cambria Math" panose="02040503050406030204" pitchFamily="18" charset="0"/>
+                          </a:rPr>
+                          <m:t>𝑥</m:t>
+                        </m:r>
+                      </m:e>
+                      <m:sub>
+                        <m:r>
+                          <a:rPr lang="pt-BR" b="0" i="1" smtClean="0">
+                            <a:latin typeface="Cambria Math" panose="02040503050406030204" pitchFamily="18" charset="0"/>
+                          </a:rPr>
+                          <m:t>1</m:t>
+                        </m:r>
+                      </m:sub>
+                      <m:sup>
+                        <m:r>
+                          <a:rPr lang="pt-BR" b="0" i="1" smtClean="0">
+                            <a:latin typeface="Cambria Math" panose="02040503050406030204" pitchFamily="18" charset="0"/>
+                          </a:rPr>
+                          <m:t>2</m:t>
+                        </m:r>
+                      </m:sup>
+                    </m:sSubSup>
+                    <m:r>
+                      <a:rPr lang="pt-BR" i="1">
+                        <a:latin typeface="Cambria Math" panose="02040503050406030204" pitchFamily="18" charset="0"/>
+                      </a:rPr>
+                      <m:t>+</m:t>
+                    </m:r>
+                    <m:sSubSup>
+                      <m:sSubSupPr>
+                        <m:ctrlPr>
+                          <a:rPr lang="pt-BR" i="1">
+                            <a:latin typeface="Cambria Math" panose="02040503050406030204" pitchFamily="18" charset="0"/>
+                          </a:rPr>
+                        </m:ctrlPr>
+                      </m:sSubSupPr>
+                      <m:e>
+                        <m:r>
+                          <a:rPr lang="pt-BR" i="1">
+                            <a:latin typeface="Cambria Math" panose="02040503050406030204" pitchFamily="18" charset="0"/>
+                          </a:rPr>
+                          <m:t>𝑥</m:t>
+                        </m:r>
+                      </m:e>
+                      <m:sub>
+                        <m:r>
+                          <a:rPr lang="pt-BR" b="0" i="1" smtClean="0">
+                            <a:latin typeface="Cambria Math" panose="02040503050406030204" pitchFamily="18" charset="0"/>
+                          </a:rPr>
+                          <m:t>2</m:t>
+                        </m:r>
+                      </m:sub>
+                      <m:sup>
+                        <m:r>
+                          <a:rPr lang="pt-BR" i="1">
+                            <a:latin typeface="Cambria Math" panose="02040503050406030204" pitchFamily="18" charset="0"/>
+                          </a:rPr>
+                          <m:t>2</m:t>
+                        </m:r>
+                      </m:sup>
+                    </m:sSubSup>
+                  </m:oMath>
+                </a14:m>
+                <a:r>
+                  <a:rPr lang="pt-BR" dirty="0"/>
+                  <a:t> (eq. de um círculo centrado na origem, onde </a:t>
+                </a:r>
+                <a14:m>
+                  <m:oMath xmlns:m="http://schemas.openxmlformats.org/officeDocument/2006/math">
+                    <m:sSub>
+                      <m:sSubPr>
+                        <m:ctrlPr>
+                          <a:rPr lang="pt-BR" i="1">
+                            <a:latin typeface="Cambria Math" panose="02040503050406030204" pitchFamily="18" charset="0"/>
+                          </a:rPr>
+                        </m:ctrlPr>
+                      </m:sSubPr>
+                      <m:e>
+                        <m:r>
+                          <a:rPr lang="pt-BR" i="1">
+                            <a:latin typeface="Cambria Math" panose="02040503050406030204" pitchFamily="18" charset="0"/>
+                          </a:rPr>
+                          <m:t>𝑎</m:t>
+                        </m:r>
+                      </m:e>
+                      <m:sub>
+                        <m:r>
+                          <a:rPr lang="pt-BR" i="1">
+                            <a:latin typeface="Cambria Math" panose="02040503050406030204" pitchFamily="18" charset="0"/>
+                          </a:rPr>
+                          <m:t>0</m:t>
+                        </m:r>
+                      </m:sub>
+                    </m:sSub>
+                    <m:r>
+                      <a:rPr lang="pt-BR" b="0" i="1" smtClean="0">
+                        <a:latin typeface="Cambria Math" panose="02040503050406030204" pitchFamily="18" charset="0"/>
+                      </a:rPr>
+                      <m:t>=−</m:t>
+                    </m:r>
+                    <m:sSup>
+                      <m:sSupPr>
+                        <m:ctrlPr>
+                          <a:rPr lang="pt-BR" b="0" i="1" smtClean="0">
+                            <a:latin typeface="Cambria Math" panose="02040503050406030204" pitchFamily="18" charset="0"/>
+                          </a:rPr>
+                        </m:ctrlPr>
+                      </m:sSupPr>
+                      <m:e>
+                        <m:r>
+                          <a:rPr lang="pt-BR" b="0" i="1" smtClean="0">
+                            <a:latin typeface="Cambria Math" panose="02040503050406030204" pitchFamily="18" charset="0"/>
+                          </a:rPr>
+                          <m:t>𝑟</m:t>
+                        </m:r>
+                      </m:e>
+                      <m:sup>
+                        <m:r>
+                          <a:rPr lang="pt-BR" b="0" i="1" smtClean="0">
+                            <a:latin typeface="Cambria Math" panose="02040503050406030204" pitchFamily="18" charset="0"/>
+                          </a:rPr>
+                          <m:t>2</m:t>
+                        </m:r>
+                      </m:sup>
+                    </m:sSup>
+                  </m:oMath>
+                </a14:m>
+                <a:r>
+                  <a:rPr lang="pt-BR" dirty="0"/>
+                  <a:t>).</a:t>
+                </a:r>
+              </a:p>
+            </p:txBody>
+          </p:sp>
+        </mc:Choice>
+        <mc:Fallback xmlns="">
+          <p:sp>
+            <p:nvSpPr>
+              <p:cNvPr id="3" name="Espaço Reservado para Conteúdo 2">
+                <a:extLst>
+                  <a:ext uri="{FF2B5EF4-FFF2-40B4-BE49-F238E27FC236}">
+                    <a16:creationId xmlns:a16="http://schemas.microsoft.com/office/drawing/2014/main" id="{1C254C3E-10F9-2C66-DDBB-99D1164F61E7}"/>
+                  </a:ext>
+                </a:extLst>
+              </p:cNvPr>
+              <p:cNvSpPr>
+                <a:spLocks noGrp="1" noRot="1" noChangeAspect="1" noMove="1" noResize="1" noEditPoints="1" noAdjustHandles="1" noChangeArrowheads="1" noChangeShapeType="1" noTextEdit="1"/>
+              </p:cNvSpPr>
+              <p:nvPr>
+                <p:ph idx="1"/>
+              </p:nvPr>
+            </p:nvSpPr>
+            <p:spPr>
+              <a:xfrm>
+                <a:off x="4648201" y="1825624"/>
+                <a:ext cx="7448550" cy="5032375"/>
+              </a:xfrm>
+              <a:blipFill>
+                <a:blip r:embed="rId3"/>
+                <a:stretch>
+                  <a:fillRect l="-1474" t="-1937"/>
+                </a:stretch>
+              </a:blipFill>
+            </p:spPr>
+            <p:txBody>
+              <a:bodyPr/>
+              <a:lstStyle/>
+              <a:p>
+                <a:r>
+                  <a:rPr lang="en-US">
+                    <a:noFill/>
+                  </a:rPr>
+                  <a:t> </a:t>
+                </a:r>
+              </a:p>
+            </p:txBody>
+          </p:sp>
+        </mc:Fallback>
+      </mc:AlternateContent>
+      <p:sp>
+        <p:nvSpPr>
+          <p:cNvPr id="5" name="Rectangle 4">
+            <a:extLst>
+              <a:ext uri="{FF2B5EF4-FFF2-40B4-BE49-F238E27FC236}">
+                <a16:creationId xmlns:a16="http://schemas.microsoft.com/office/drawing/2014/main" id="{645F5C35-CA80-831D-CD26-407BBC3BE21C}"/>
+              </a:ext>
+            </a:extLst>
+          </p:cNvPr>
+          <p:cNvSpPr/>
           <p:nvPr/>
         </p:nvSpPr>
         <p:spPr>
           <a:xfrm>
-            <a:off x="1431533" y="2720526"/>
-            <a:ext cx="9144000" cy="1029541"/>
+            <a:off x="10793207" y="3750882"/>
+            <a:ext cx="1219200" cy="769441"/>
           </a:xfrm>
           <a:prstGeom prst="rect">
             <a:avLst/>
           </a:prstGeom>
         </p:spPr>
         <p:txBody>
-          <a:bodyPr vert="horz" lIns="91440" tIns="45720" rIns="91440" bIns="45720" rtlCol="0" anchor="ctr">
-            <a:normAutofit/>
+          <a:bodyPr wrap="square">
+            <a:spAutoFit/>
           </a:bodyPr>
-          <a:lstStyle>
-            <a:lvl1pPr algn="l" defTabSz="914400" rtl="0" eaLnBrk="1" latinLnBrk="0" hangingPunct="1">
-              <a:lnSpc>
-                <a:spcPct val="90000"/>
-              </a:lnSpc>
-              <a:spcBef>
-                <a:spcPct val="0"/>
-              </a:spcBef>
-              <a:buNone/>
-              <a:defRPr sz="4400" kern="1200">
-                <a:solidFill>
-                  <a:schemeClr val="tx1"/>
-                </a:solidFill>
-                <a:latin typeface="+mj-lt"/>
-                <a:ea typeface="+mj-ea"/>
-                <a:cs typeface="+mj-cs"/>
-              </a:defRPr>
-            </a:lvl1pPr>
-          </a:lstStyle>
-          <a:p>
-            <a:pPr algn="ctr"/>
-            <a:r>
-              <a:rPr lang="pt-BR" sz="6600" dirty="0"/>
-              <a:t>Obrigado!</a:t>
-            </a:r>
-            <a:endParaRPr lang="pt-BR" sz="6600" b="1" i="1" dirty="0"/>
+          <a:lstStyle/>
+          <a:p>
+            <a:pPr lvl="0" algn="ctr">
+              <a:defRPr/>
+            </a:pPr>
+            <a:r>
+              <a:rPr lang="pt-BR" sz="1100" dirty="0"/>
+              <a:t>empate entre as classes, pois a amostra está sobre a função.</a:t>
+            </a:r>
           </a:p>
         </p:txBody>
       </p:sp>
+      <p:cxnSp>
+        <p:nvCxnSpPr>
+          <p:cNvPr id="6" name="Straight Arrow Connector 6">
+            <a:extLst>
+              <a:ext uri="{FF2B5EF4-FFF2-40B4-BE49-F238E27FC236}">
+                <a16:creationId xmlns:a16="http://schemas.microsoft.com/office/drawing/2014/main" id="{2EC6DCB0-48FC-CD2A-E18F-D7B490834350}"/>
+              </a:ext>
+            </a:extLst>
+          </p:cNvPr>
+          <p:cNvCxnSpPr>
+            <a:cxnSpLocks/>
+          </p:cNvCxnSpPr>
+          <p:nvPr/>
+        </p:nvCxnSpPr>
+        <p:spPr>
+          <a:xfrm flipH="1">
+            <a:off x="10747027" y="3902516"/>
+            <a:ext cx="177800" cy="104822"/>
+          </a:xfrm>
+          <a:prstGeom prst="straightConnector1">
+            <a:avLst/>
+          </a:prstGeom>
+          <a:ln>
+            <a:solidFill>
+              <a:srgbClr val="FF0000"/>
+            </a:solidFill>
+            <a:tailEnd type="triangle"/>
+          </a:ln>
+        </p:spPr>
+        <p:style>
+          <a:lnRef idx="1">
+            <a:schemeClr val="accent1"/>
+          </a:lnRef>
+          <a:fillRef idx="0">
+            <a:schemeClr val="accent1"/>
+          </a:fillRef>
+          <a:effectRef idx="0">
+            <a:schemeClr val="accent1"/>
+          </a:effectRef>
+          <a:fontRef idx="minor">
+            <a:schemeClr val="tx1"/>
+          </a:fontRef>
+        </p:style>
+      </p:cxnSp>
+      <p:pic>
+        <p:nvPicPr>
+          <p:cNvPr id="16" name="Picture 3">
+            <a:extLst>
+              <a:ext uri="{FF2B5EF4-FFF2-40B4-BE49-F238E27FC236}">
+                <a16:creationId xmlns:a16="http://schemas.microsoft.com/office/drawing/2014/main" id="{797B4B4A-0E8F-6A84-F64E-0B174596F8C7}"/>
+              </a:ext>
+            </a:extLst>
+          </p:cNvPr>
+          <p:cNvPicPr>
+            <a:picLocks noChangeAspect="1"/>
+          </p:cNvPicPr>
+          <p:nvPr/>
+        </p:nvPicPr>
+        <p:blipFill rotWithShape="1">
+          <a:blip r:embed="rId4">
+            <a:extLst>
+              <a:ext uri="{28A0092B-C50C-407E-A947-70E740481C1C}">
+                <a14:useLocalDpi xmlns:a14="http://schemas.microsoft.com/office/drawing/2010/main" val="0"/>
+              </a:ext>
+            </a:extLst>
+          </a:blip>
+          <a:srcRect l="6368" t="2623" r="7430" b="1353"/>
+          <a:stretch/>
+        </p:blipFill>
+        <p:spPr>
+          <a:xfrm>
+            <a:off x="1139670" y="2602756"/>
+            <a:ext cx="2841780" cy="3263704"/>
+          </a:xfrm>
+          <a:prstGeom prst="rect">
+            <a:avLst/>
+          </a:prstGeom>
+        </p:spPr>
+      </p:pic>
+      <p:sp>
+        <p:nvSpPr>
+          <p:cNvPr id="4" name="Rectangle 4">
+            <a:extLst>
+              <a:ext uri="{FF2B5EF4-FFF2-40B4-BE49-F238E27FC236}">
+                <a16:creationId xmlns:a16="http://schemas.microsoft.com/office/drawing/2014/main" id="{6CF5207C-210F-5440-56B3-8F1EAD36FFAF}"/>
+              </a:ext>
+            </a:extLst>
+          </p:cNvPr>
+          <p:cNvSpPr/>
+          <p:nvPr/>
+        </p:nvSpPr>
+        <p:spPr>
+          <a:xfrm>
+            <a:off x="10793207" y="2912025"/>
+            <a:ext cx="1219200" cy="261610"/>
+          </a:xfrm>
+          <a:prstGeom prst="rect">
+            <a:avLst/>
+          </a:prstGeom>
+        </p:spPr>
+        <p:txBody>
+          <a:bodyPr wrap="square">
+            <a:spAutoFit/>
+          </a:bodyPr>
+          <a:lstStyle/>
+          <a:p>
+            <a:pPr lvl="0" algn="ctr">
+              <a:defRPr/>
+            </a:pPr>
+            <a:r>
+              <a:rPr lang="pt-BR" sz="1100" dirty="0"/>
+              <a:t>Acima da função.</a:t>
+            </a:r>
+          </a:p>
+        </p:txBody>
+      </p:sp>
+      <p:cxnSp>
+        <p:nvCxnSpPr>
+          <p:cNvPr id="7" name="Straight Arrow Connector 6">
+            <a:extLst>
+              <a:ext uri="{FF2B5EF4-FFF2-40B4-BE49-F238E27FC236}">
+                <a16:creationId xmlns:a16="http://schemas.microsoft.com/office/drawing/2014/main" id="{F671CBD8-E5F7-29C9-3744-56F52318FE10}"/>
+              </a:ext>
+            </a:extLst>
+          </p:cNvPr>
+          <p:cNvCxnSpPr>
+            <a:cxnSpLocks/>
+          </p:cNvCxnSpPr>
+          <p:nvPr/>
+        </p:nvCxnSpPr>
+        <p:spPr>
+          <a:xfrm flipH="1">
+            <a:off x="10756264" y="3119682"/>
+            <a:ext cx="177800" cy="104822"/>
+          </a:xfrm>
+          <a:prstGeom prst="straightConnector1">
+            <a:avLst/>
+          </a:prstGeom>
+          <a:ln>
+            <a:solidFill>
+              <a:srgbClr val="FF0000"/>
+            </a:solidFill>
+            <a:tailEnd type="triangle"/>
+          </a:ln>
+        </p:spPr>
+        <p:style>
+          <a:lnRef idx="1">
+            <a:schemeClr val="accent1"/>
+          </a:lnRef>
+          <a:fillRef idx="0">
+            <a:schemeClr val="accent1"/>
+          </a:fillRef>
+          <a:effectRef idx="0">
+            <a:schemeClr val="accent1"/>
+          </a:effectRef>
+          <a:fontRef idx="minor">
+            <a:schemeClr val="tx1"/>
+          </a:fontRef>
+        </p:style>
+      </p:cxnSp>
+      <p:sp>
+        <p:nvSpPr>
+          <p:cNvPr id="8" name="Rectangle 4">
+            <a:extLst>
+              <a:ext uri="{FF2B5EF4-FFF2-40B4-BE49-F238E27FC236}">
+                <a16:creationId xmlns:a16="http://schemas.microsoft.com/office/drawing/2014/main" id="{B8052885-3BC2-70B9-B921-5DDB2DD151B4}"/>
+              </a:ext>
+            </a:extLst>
+          </p:cNvPr>
+          <p:cNvSpPr/>
+          <p:nvPr/>
+        </p:nvSpPr>
+        <p:spPr>
+          <a:xfrm>
+            <a:off x="10774735" y="3365237"/>
+            <a:ext cx="1219200" cy="261610"/>
+          </a:xfrm>
+          <a:prstGeom prst="rect">
+            <a:avLst/>
+          </a:prstGeom>
+        </p:spPr>
+        <p:txBody>
+          <a:bodyPr wrap="square">
+            <a:spAutoFit/>
+          </a:bodyPr>
+          <a:lstStyle/>
+          <a:p>
+            <a:pPr lvl="0" algn="ctr">
+              <a:defRPr/>
+            </a:pPr>
+            <a:r>
+              <a:rPr lang="pt-BR" sz="1100" dirty="0"/>
+              <a:t>Abaixo da função.</a:t>
+            </a:r>
+          </a:p>
+        </p:txBody>
+      </p:sp>
+      <p:cxnSp>
+        <p:nvCxnSpPr>
+          <p:cNvPr id="9" name="Straight Arrow Connector 6">
+            <a:extLst>
+              <a:ext uri="{FF2B5EF4-FFF2-40B4-BE49-F238E27FC236}">
+                <a16:creationId xmlns:a16="http://schemas.microsoft.com/office/drawing/2014/main" id="{D8DB8446-863A-7210-136E-FC97FB27A3F5}"/>
+              </a:ext>
+            </a:extLst>
+          </p:cNvPr>
+          <p:cNvCxnSpPr>
+            <a:cxnSpLocks/>
+          </p:cNvCxnSpPr>
+          <p:nvPr/>
+        </p:nvCxnSpPr>
+        <p:spPr>
+          <a:xfrm flipH="1">
+            <a:off x="10747027" y="3563510"/>
+            <a:ext cx="177800" cy="104822"/>
+          </a:xfrm>
+          <a:prstGeom prst="straightConnector1">
+            <a:avLst/>
+          </a:prstGeom>
+          <a:ln>
+            <a:solidFill>
+              <a:srgbClr val="FF0000"/>
+            </a:solidFill>
+            <a:tailEnd type="triangle"/>
+          </a:ln>
+        </p:spPr>
+        <p:style>
+          <a:lnRef idx="1">
+            <a:schemeClr val="accent1"/>
+          </a:lnRef>
+          <a:fillRef idx="0">
+            <a:schemeClr val="accent1"/>
+          </a:fillRef>
+          <a:effectRef idx="0">
+            <a:schemeClr val="accent1"/>
+          </a:effectRef>
+          <a:fontRef idx="minor">
+            <a:schemeClr val="tx1"/>
+          </a:fontRef>
+        </p:style>
+      </p:cxnSp>
     </p:spTree>
     <p:extLst>
       <p:ext uri="{BB962C8B-B14F-4D97-AF65-F5344CB8AC3E}">
-        <p14:creationId xmlns:p14="http://schemas.microsoft.com/office/powerpoint/2010/main" val="2655704619"/>
+        <p14:creationId xmlns:p14="http://schemas.microsoft.com/office/powerpoint/2010/main" val="1435435992"/>
       </p:ext>
     </p:extLst>
   </p:cSld>
@@ -6643,6 +12813,364 @@
     <p:extLst>
       <p:ext uri="{BB962C8B-B14F-4D97-AF65-F5344CB8AC3E}">
         <p14:creationId xmlns:p14="http://schemas.microsoft.com/office/powerpoint/2010/main" val="3270474910"/>
+      </p:ext>
+    </p:extLst>
+  </p:cSld>
+  <p:clrMapOvr>
+    <a:masterClrMapping/>
+  </p:clrMapOvr>
+</p:sld>
+</file>
+
+<file path=ppt/slides/slide20.xml><?xml version="1.0" encoding="utf-8"?>
+<p:sld xmlns:a="http://schemas.openxmlformats.org/drawingml/2006/main" xmlns:r="http://schemas.openxmlformats.org/officeDocument/2006/relationships" xmlns:p="http://schemas.openxmlformats.org/presentationml/2006/main">
+  <p:cSld>
+    <p:spTree>
+      <p:nvGrpSpPr>
+        <p:cNvPr id="1" name=""/>
+        <p:cNvGrpSpPr/>
+        <p:nvPr/>
+      </p:nvGrpSpPr>
+      <p:grpSpPr>
+        <a:xfrm>
+          <a:off x="0" y="0"/>
+          <a:ext cx="0" cy="0"/>
+          <a:chOff x="0" y="0"/>
+          <a:chExt cx="0" cy="0"/>
+        </a:xfrm>
+      </p:grpSpPr>
+      <p:sp>
+        <p:nvSpPr>
+          <p:cNvPr id="2" name="Title 1">
+            <a:extLst>
+              <a:ext uri="{FF2B5EF4-FFF2-40B4-BE49-F238E27FC236}">
+                <a16:creationId xmlns:a16="http://schemas.microsoft.com/office/drawing/2014/main" id="{DA7FDC7F-B899-B1A6-F69A-351822C6EFD7}"/>
+              </a:ext>
+            </a:extLst>
+          </p:cNvPr>
+          <p:cNvSpPr>
+            <a:spLocks noGrp="1"/>
+          </p:cNvSpPr>
+          <p:nvPr>
+            <p:ph type="title"/>
+          </p:nvPr>
+        </p:nvSpPr>
+        <p:spPr/>
+        <p:txBody>
+          <a:bodyPr/>
+          <a:lstStyle/>
+          <a:p>
+            <a:endParaRPr lang="en-US"/>
+          </a:p>
+        </p:txBody>
+      </p:sp>
+      <p:sp>
+        <p:nvSpPr>
+          <p:cNvPr id="3" name="Content Placeholder 2">
+            <a:extLst>
+              <a:ext uri="{FF2B5EF4-FFF2-40B4-BE49-F238E27FC236}">
+                <a16:creationId xmlns:a16="http://schemas.microsoft.com/office/drawing/2014/main" id="{E5A0C298-3D62-58C4-3B44-8F0C5C3E0A0C}"/>
+              </a:ext>
+            </a:extLst>
+          </p:cNvPr>
+          <p:cNvSpPr>
+            <a:spLocks noGrp="1"/>
+          </p:cNvSpPr>
+          <p:nvPr>
+            <p:ph idx="1"/>
+          </p:nvPr>
+        </p:nvSpPr>
+        <p:spPr/>
+        <p:txBody>
+          <a:bodyPr/>
+          <a:lstStyle/>
+          <a:p>
+            <a:endParaRPr lang="en-US"/>
+          </a:p>
+        </p:txBody>
+      </p:sp>
+    </p:spTree>
+    <p:extLst>
+      <p:ext uri="{BB962C8B-B14F-4D97-AF65-F5344CB8AC3E}">
+        <p14:creationId xmlns:p14="http://schemas.microsoft.com/office/powerpoint/2010/main" val="3414813146"/>
+      </p:ext>
+    </p:extLst>
+  </p:cSld>
+  <p:clrMapOvr>
+    <a:masterClrMapping/>
+  </p:clrMapOvr>
+</p:sld>
+</file>
+
+<file path=ppt/slides/slide21.xml><?xml version="1.0" encoding="utf-8"?>
+<p:sld xmlns:a="http://schemas.openxmlformats.org/drawingml/2006/main" xmlns:r="http://schemas.openxmlformats.org/officeDocument/2006/relationships" xmlns:p="http://schemas.openxmlformats.org/presentationml/2006/main">
+  <p:cSld>
+    <p:spTree>
+      <p:nvGrpSpPr>
+        <p:cNvPr id="1" name=""/>
+        <p:cNvGrpSpPr/>
+        <p:nvPr/>
+      </p:nvGrpSpPr>
+      <p:grpSpPr>
+        <a:xfrm>
+          <a:off x="0" y="0"/>
+          <a:ext cx="0" cy="0"/>
+          <a:chOff x="0" y="0"/>
+          <a:chExt cx="0" cy="0"/>
+        </a:xfrm>
+      </p:grpSpPr>
+      <p:sp>
+        <p:nvSpPr>
+          <p:cNvPr id="2" name="Title 1">
+            <a:extLst>
+              <a:ext uri="{FF2B5EF4-FFF2-40B4-BE49-F238E27FC236}">
+                <a16:creationId xmlns:a16="http://schemas.microsoft.com/office/drawing/2014/main" id="{F1CB30D0-D052-EC03-3C25-35C106AA1077}"/>
+              </a:ext>
+            </a:extLst>
+          </p:cNvPr>
+          <p:cNvSpPr>
+            <a:spLocks noGrp="1"/>
+          </p:cNvSpPr>
+          <p:nvPr>
+            <p:ph type="title"/>
+          </p:nvPr>
+        </p:nvSpPr>
+        <p:spPr/>
+        <p:txBody>
+          <a:bodyPr/>
+          <a:lstStyle/>
+          <a:p>
+            <a:r>
+              <a:rPr lang="pt-BR" dirty="0"/>
+              <a:t>Matriz de confusão</a:t>
+            </a:r>
+            <a:endParaRPr lang="en-US" dirty="0"/>
+          </a:p>
+        </p:txBody>
+      </p:sp>
+      <p:pic>
+        <p:nvPicPr>
+          <p:cNvPr id="2050" name="Picture 2" descr="Validate me Constructive criticism permitted – @gallusrostromegalus on  Tumblr">
+            <a:extLst>
+              <a:ext uri="{FF2B5EF4-FFF2-40B4-BE49-F238E27FC236}">
+                <a16:creationId xmlns:a16="http://schemas.microsoft.com/office/drawing/2014/main" id="{A9C68C0F-3A42-8D60-0B8A-979695E4072E}"/>
+              </a:ext>
+            </a:extLst>
+          </p:cNvPr>
+          <p:cNvPicPr>
+            <a:picLocks noChangeAspect="1" noChangeArrowheads="1"/>
+          </p:cNvPicPr>
+          <p:nvPr/>
+        </p:nvPicPr>
+        <p:blipFill>
+          <a:blip r:embed="rId2">
+            <a:extLst>
+              <a:ext uri="{28A0092B-C50C-407E-A947-70E740481C1C}">
+                <a14:useLocalDpi xmlns:a14="http://schemas.microsoft.com/office/drawing/2010/main" val="0"/>
+              </a:ext>
+            </a:extLst>
+          </a:blip>
+          <a:srcRect/>
+          <a:stretch>
+            <a:fillRect/>
+          </a:stretch>
+        </p:blipFill>
+        <p:spPr bwMode="auto">
+          <a:xfrm>
+            <a:off x="4199561" y="1690688"/>
+            <a:ext cx="5635002" cy="5167312"/>
+          </a:xfrm>
+          <a:prstGeom prst="rect">
+            <a:avLst/>
+          </a:prstGeom>
+          <a:noFill/>
+          <a:extLst>
+            <a:ext uri="{909E8E84-426E-40DD-AFC4-6F175D3DCCD1}">
+              <a14:hiddenFill xmlns:a14="http://schemas.microsoft.com/office/drawing/2010/main">
+                <a:solidFill>
+                  <a:srgbClr val="FFFFFF"/>
+                </a:solidFill>
+              </a14:hiddenFill>
+            </a:ext>
+          </a:extLst>
+        </p:spPr>
+      </p:pic>
+    </p:spTree>
+    <p:extLst>
+      <p:ext uri="{BB962C8B-B14F-4D97-AF65-F5344CB8AC3E}">
+        <p14:creationId xmlns:p14="http://schemas.microsoft.com/office/powerpoint/2010/main" val="2456464638"/>
+      </p:ext>
+    </p:extLst>
+  </p:cSld>
+  <p:clrMapOvr>
+    <a:masterClrMapping/>
+  </p:clrMapOvr>
+</p:sld>
+</file>
+
+<file path=ppt/slides/slide22.xml><?xml version="1.0" encoding="utf-8"?>
+<p:sld xmlns:a="http://schemas.openxmlformats.org/drawingml/2006/main" xmlns:r="http://schemas.openxmlformats.org/officeDocument/2006/relationships" xmlns:p="http://schemas.openxmlformats.org/presentationml/2006/main">
+  <p:cSld>
+    <p:spTree>
+      <p:nvGrpSpPr>
+        <p:cNvPr id="1" name=""/>
+        <p:cNvGrpSpPr/>
+        <p:nvPr/>
+      </p:nvGrpSpPr>
+      <p:grpSpPr>
+        <a:xfrm>
+          <a:off x="0" y="0"/>
+          <a:ext cx="0" cy="0"/>
+          <a:chOff x="0" y="0"/>
+          <a:chExt cx="0" cy="0"/>
+        </a:xfrm>
+      </p:grpSpPr>
+      <p:sp>
+        <p:nvSpPr>
+          <p:cNvPr id="4" name="Título 1">
+            <a:extLst>
+              <a:ext uri="{FF2B5EF4-FFF2-40B4-BE49-F238E27FC236}">
+                <a16:creationId xmlns:a16="http://schemas.microsoft.com/office/drawing/2014/main" id="{32666AC8-2E17-4DB4-B0F5-60C640CCFD2E}"/>
+              </a:ext>
+            </a:extLst>
+          </p:cNvPr>
+          <p:cNvSpPr txBox="1">
+            <a:spLocks/>
+          </p:cNvSpPr>
+          <p:nvPr/>
+        </p:nvSpPr>
+        <p:spPr>
+          <a:xfrm>
+            <a:off x="1431533" y="2720526"/>
+            <a:ext cx="9144000" cy="1029541"/>
+          </a:xfrm>
+          <a:prstGeom prst="rect">
+            <a:avLst/>
+          </a:prstGeom>
+        </p:spPr>
+        <p:txBody>
+          <a:bodyPr vert="horz" lIns="91440" tIns="45720" rIns="91440" bIns="45720" rtlCol="0" anchor="ctr">
+            <a:normAutofit/>
+          </a:bodyPr>
+          <a:lstStyle>
+            <a:lvl1pPr algn="l" defTabSz="914400" rtl="0" eaLnBrk="1" latinLnBrk="0" hangingPunct="1">
+              <a:lnSpc>
+                <a:spcPct val="90000"/>
+              </a:lnSpc>
+              <a:spcBef>
+                <a:spcPct val="0"/>
+              </a:spcBef>
+              <a:buNone/>
+              <a:defRPr sz="4400" kern="1200">
+                <a:solidFill>
+                  <a:schemeClr val="tx1"/>
+                </a:solidFill>
+                <a:latin typeface="+mj-lt"/>
+                <a:ea typeface="+mj-ea"/>
+                <a:cs typeface="+mj-cs"/>
+              </a:defRPr>
+            </a:lvl1pPr>
+          </a:lstStyle>
+          <a:p>
+            <a:pPr algn="ctr"/>
+            <a:r>
+              <a:rPr lang="pt-BR" sz="6600" dirty="0"/>
+              <a:t>Perguntas?</a:t>
+            </a:r>
+            <a:endParaRPr lang="pt-BR" sz="6600" b="1" i="1" dirty="0"/>
+          </a:p>
+        </p:txBody>
+      </p:sp>
+    </p:spTree>
+    <p:extLst>
+      <p:ext uri="{BB962C8B-B14F-4D97-AF65-F5344CB8AC3E}">
+        <p14:creationId xmlns:p14="http://schemas.microsoft.com/office/powerpoint/2010/main" val="3773005660"/>
+      </p:ext>
+    </p:extLst>
+  </p:cSld>
+  <p:clrMapOvr>
+    <a:masterClrMapping/>
+  </p:clrMapOvr>
+</p:sld>
+</file>
+
+<file path=ppt/slides/slide23.xml><?xml version="1.0" encoding="utf-8"?>
+<p:sld xmlns:a="http://schemas.openxmlformats.org/drawingml/2006/main" xmlns:r="http://schemas.openxmlformats.org/officeDocument/2006/relationships" xmlns:p="http://schemas.openxmlformats.org/presentationml/2006/main">
+  <p:cSld>
+    <p:spTree>
+      <p:nvGrpSpPr>
+        <p:cNvPr id="1" name=""/>
+        <p:cNvGrpSpPr/>
+        <p:nvPr/>
+      </p:nvGrpSpPr>
+      <p:grpSpPr>
+        <a:xfrm>
+          <a:off x="0" y="0"/>
+          <a:ext cx="0" cy="0"/>
+          <a:chOff x="0" y="0"/>
+          <a:chExt cx="0" cy="0"/>
+        </a:xfrm>
+      </p:grpSpPr>
+      <p:sp>
+        <p:nvSpPr>
+          <p:cNvPr id="4" name="Título 1">
+            <a:extLst>
+              <a:ext uri="{FF2B5EF4-FFF2-40B4-BE49-F238E27FC236}">
+                <a16:creationId xmlns:a16="http://schemas.microsoft.com/office/drawing/2014/main" id="{32666AC8-2E17-4DB4-B0F5-60C640CCFD2E}"/>
+              </a:ext>
+            </a:extLst>
+          </p:cNvPr>
+          <p:cNvSpPr txBox="1">
+            <a:spLocks/>
+          </p:cNvSpPr>
+          <p:nvPr/>
+        </p:nvSpPr>
+        <p:spPr>
+          <a:xfrm>
+            <a:off x="1431533" y="2720526"/>
+            <a:ext cx="9144000" cy="1029541"/>
+          </a:xfrm>
+          <a:prstGeom prst="rect">
+            <a:avLst/>
+          </a:prstGeom>
+        </p:spPr>
+        <p:txBody>
+          <a:bodyPr vert="horz" lIns="91440" tIns="45720" rIns="91440" bIns="45720" rtlCol="0" anchor="ctr">
+            <a:normAutofit/>
+          </a:bodyPr>
+          <a:lstStyle>
+            <a:lvl1pPr algn="l" defTabSz="914400" rtl="0" eaLnBrk="1" latinLnBrk="0" hangingPunct="1">
+              <a:lnSpc>
+                <a:spcPct val="90000"/>
+              </a:lnSpc>
+              <a:spcBef>
+                <a:spcPct val="0"/>
+              </a:spcBef>
+              <a:buNone/>
+              <a:defRPr sz="4400" kern="1200">
+                <a:solidFill>
+                  <a:schemeClr val="tx1"/>
+                </a:solidFill>
+                <a:latin typeface="+mj-lt"/>
+                <a:ea typeface="+mj-ea"/>
+                <a:cs typeface="+mj-cs"/>
+              </a:defRPr>
+            </a:lvl1pPr>
+          </a:lstStyle>
+          <a:p>
+            <a:pPr algn="ctr"/>
+            <a:r>
+              <a:rPr lang="pt-BR" sz="6600" dirty="0"/>
+              <a:t>Obrigado!</a:t>
+            </a:r>
+            <a:endParaRPr lang="pt-BR" sz="6600" b="1" i="1" dirty="0"/>
+          </a:p>
+        </p:txBody>
+      </p:sp>
+    </p:spTree>
+    <p:extLst>
+      <p:ext uri="{BB962C8B-B14F-4D97-AF65-F5344CB8AC3E}">
+        <p14:creationId xmlns:p14="http://schemas.microsoft.com/office/powerpoint/2010/main" val="2655704619"/>
       </p:ext>
     </p:extLst>
   </p:cSld>
@@ -7404,12 +13932,8 @@
                   <a:buChar char="§"/>
                 </a:pPr>
                 <a:r>
-                  <a:rPr lang="en-US" dirty="0" err="1"/>
-                  <a:t>Multiclasse</a:t>
-                </a:r>
-                <a:r>
                   <a:rPr lang="en-US" dirty="0"/>
-                  <a:t>, </a:t>
+                  <a:t>Multiclasses, </a:t>
                 </a:r>
                 <a:r>
                   <a:rPr lang="en-US" dirty="0" err="1"/>

--- a/slides/C24_Classificação.pptx
+++ b/slides/C24_Classificação.pptx
@@ -772,6 +772,832 @@
         <p:txBody>
           <a:bodyPr/>
           <a:lstStyle/>
+          <a:p>
+            <a:r>
+              <a:rPr lang="pt-BR" dirty="0"/>
+              <a:t>Em um </a:t>
+            </a:r>
+            <a:r>
+              <a:rPr lang="pt-BR" b="1" dirty="0"/>
+              <a:t>problema de classificação </a:t>
+            </a:r>
+            <a:r>
+              <a:rPr lang="pt-BR" b="1" dirty="0" err="1"/>
+              <a:t>multilabel</a:t>
+            </a:r>
+            <a:r>
+              <a:rPr lang="pt-BR" dirty="0"/>
+              <a:t>, a superfície de separação é bem diferente da que aparece em problemas binários ou multiclasses clássicos.</a:t>
+            </a:r>
+          </a:p>
+          <a:p>
+            <a:r>
+              <a:rPr lang="pt-BR" dirty="0"/>
+              <a:t>Vou explicar de forma conceitual e visual (como você explicaria em sala).</a:t>
+            </a:r>
+          </a:p>
+          <a:p>
+            <a:br>
+              <a:rPr lang="pt-BR" dirty="0"/>
+            </a:br>
+            <a:endParaRPr lang="pt-BR" dirty="0"/>
+          </a:p>
+          <a:p>
+            <a:r>
+              <a:rPr lang="pt-BR" b="1" dirty="0"/>
+              <a:t>1️⃣ Lembrete: o que muda no </a:t>
+            </a:r>
+            <a:r>
+              <a:rPr lang="pt-BR" b="1" dirty="0" err="1"/>
+              <a:t>multilabel</a:t>
+            </a:r>
+            <a:endParaRPr lang="pt-BR" b="1" dirty="0"/>
+          </a:p>
+          <a:p>
+            <a:r>
+              <a:rPr lang="pt-BR" dirty="0"/>
+              <a:t>No </a:t>
+            </a:r>
+            <a:r>
+              <a:rPr lang="pt-BR" dirty="0" err="1"/>
+              <a:t>multilabel</a:t>
+            </a:r>
+            <a:r>
+              <a:rPr lang="pt-BR" dirty="0"/>
+              <a:t>, cada amostra pode pertencer a </a:t>
+            </a:r>
+            <a:r>
+              <a:rPr lang="pt-BR" b="1" dirty="0"/>
+              <a:t>várias classes simultaneamente</a:t>
+            </a:r>
+            <a:r>
+              <a:rPr lang="pt-BR" dirty="0"/>
+              <a:t>.</a:t>
+            </a:r>
+            <a:br>
+              <a:rPr lang="pt-BR" dirty="0"/>
+            </a:br>
+            <a:r>
+              <a:rPr lang="pt-BR" dirty="0"/>
+              <a:t>Formalmente, o modelo retorna um </a:t>
+            </a:r>
+            <a:r>
+              <a:rPr lang="pt-BR" b="1" dirty="0"/>
+              <a:t>vetor binário de rótulos</a:t>
+            </a:r>
+            <a:r>
+              <a:rPr lang="pt-BR" dirty="0"/>
+              <a:t>:</a:t>
+            </a:r>
+          </a:p>
+          <a:p>
+            <a:r>
+              <a:rPr lang="pt-BR" dirty="0"/>
+              <a:t>[</a:t>
+            </a:r>
+            <a:br>
+              <a:rPr lang="pt-BR" dirty="0"/>
+            </a:br>
+            <a:r>
+              <a:rPr lang="pt-BR" dirty="0"/>
+              <a:t>y = (y_1, y_2, ..., </a:t>
+            </a:r>
+            <a:r>
+              <a:rPr lang="pt-BR" dirty="0" err="1"/>
+              <a:t>y_K</a:t>
+            </a:r>
+            <a:r>
+              <a:rPr lang="pt-BR" dirty="0"/>
+              <a:t>), \</a:t>
+            </a:r>
+            <a:r>
+              <a:rPr lang="pt-BR" dirty="0" err="1"/>
+              <a:t>quad</a:t>
+            </a:r>
+            <a:r>
+              <a:rPr lang="pt-BR" dirty="0"/>
+              <a:t> </a:t>
+            </a:r>
+            <a:r>
+              <a:rPr lang="pt-BR" dirty="0" err="1"/>
+              <a:t>y_k</a:t>
+            </a:r>
+            <a:r>
+              <a:rPr lang="pt-BR" dirty="0"/>
+              <a:t> \in {0,1}</a:t>
+            </a:r>
+            <a:br>
+              <a:rPr lang="pt-BR" dirty="0"/>
+            </a:br>
+            <a:r>
+              <a:rPr lang="pt-BR" dirty="0"/>
+              <a:t>]</a:t>
+            </a:r>
+          </a:p>
+          <a:p>
+            <a:r>
+              <a:rPr lang="pt-BR" dirty="0"/>
+              <a:t>ou seja, cada classe é decidida independentemente. (</a:t>
+            </a:r>
+            <a:r>
+              <a:rPr lang="pt-BR" dirty="0">
+                <a:hlinkClick r:id="rId3" tooltip="Multi-label classification"/>
+              </a:rPr>
+              <a:t>Wikipedia</a:t>
+            </a:r>
+            <a:r>
+              <a:rPr lang="pt-BR" dirty="0"/>
+              <a:t>)</a:t>
+            </a:r>
+          </a:p>
+          <a:p>
+            <a:br>
+              <a:rPr lang="pt-BR" dirty="0"/>
+            </a:br>
+            <a:endParaRPr lang="pt-BR" dirty="0"/>
+          </a:p>
+          <a:p>
+            <a:r>
+              <a:rPr lang="pt-BR" b="1" dirty="0"/>
+              <a:t>2️⃣ Como fica a superfície de separação</a:t>
+            </a:r>
+          </a:p>
+          <a:p>
+            <a:r>
+              <a:rPr lang="pt-BR" b="1" dirty="0"/>
+              <a:t>✔️ Não existe uma única superfície global</a:t>
+            </a:r>
+          </a:p>
+          <a:p>
+            <a:r>
+              <a:rPr lang="pt-BR" dirty="0"/>
+              <a:t>Diferente do </a:t>
+            </a:r>
+            <a:r>
+              <a:rPr lang="pt-BR" dirty="0" err="1"/>
+              <a:t>multiclass</a:t>
+            </a:r>
+            <a:r>
+              <a:rPr lang="pt-BR" dirty="0"/>
+              <a:t> (onde o espaço é dividido em regiões exclusivas), no </a:t>
+            </a:r>
+            <a:r>
+              <a:rPr lang="pt-BR" dirty="0" err="1"/>
+              <a:t>multilabel</a:t>
+            </a:r>
+            <a:r>
+              <a:rPr lang="pt-BR" dirty="0"/>
+              <a:t>:</a:t>
+            </a:r>
+          </a:p>
+          <a:p>
+            <a:r>
+              <a:rPr lang="pt-BR" dirty="0"/>
+              <a:t>👉 </a:t>
+            </a:r>
+            <a:r>
+              <a:rPr lang="pt-BR" b="1" dirty="0"/>
+              <a:t>cada classe tem sua própria superfície de decisão</a:t>
+            </a:r>
+            <a:endParaRPr lang="pt-BR" dirty="0"/>
+          </a:p>
+          <a:p>
+            <a:r>
+              <a:rPr lang="pt-BR" dirty="0"/>
+              <a:t>Ou seja, existem </a:t>
+            </a:r>
+            <a:r>
+              <a:rPr lang="pt-BR" b="1" dirty="0"/>
+              <a:t>K superfícies</a:t>
+            </a:r>
+            <a:r>
+              <a:rPr lang="pt-BR" dirty="0"/>
+              <a:t> independentes:</a:t>
+            </a:r>
+          </a:p>
+          <a:p>
+            <a:r>
+              <a:rPr lang="pt-BR" dirty="0"/>
+              <a:t>[</a:t>
+            </a:r>
+            <a:br>
+              <a:rPr lang="pt-BR" dirty="0"/>
+            </a:br>
+            <a:r>
+              <a:rPr lang="pt-BR" dirty="0"/>
+              <a:t>f_1(x)=0,\</a:t>
+            </a:r>
+            <a:r>
+              <a:rPr lang="pt-BR" dirty="0" err="1"/>
+              <a:t>quad</a:t>
+            </a:r>
+            <a:r>
+              <a:rPr lang="pt-BR" dirty="0"/>
+              <a:t> f_2(x)=0,\</a:t>
+            </a:r>
+            <a:r>
+              <a:rPr lang="pt-BR" dirty="0" err="1"/>
+              <a:t>quad</a:t>
+            </a:r>
+            <a:r>
+              <a:rPr lang="pt-BR" dirty="0"/>
+              <a:t> ...,\</a:t>
+            </a:r>
+            <a:r>
+              <a:rPr lang="pt-BR" dirty="0" err="1"/>
+              <a:t>quad</a:t>
+            </a:r>
+            <a:r>
+              <a:rPr lang="pt-BR" dirty="0"/>
+              <a:t> </a:t>
+            </a:r>
+            <a:r>
+              <a:rPr lang="pt-BR" dirty="0" err="1"/>
+              <a:t>f_K</a:t>
+            </a:r>
+            <a:r>
+              <a:rPr lang="pt-BR" dirty="0"/>
+              <a:t>(x)=0</a:t>
+            </a:r>
+            <a:br>
+              <a:rPr lang="pt-BR" dirty="0"/>
+            </a:br>
+            <a:r>
+              <a:rPr lang="pt-BR" dirty="0"/>
+              <a:t>]</a:t>
+            </a:r>
+          </a:p>
+          <a:p>
+            <a:r>
+              <a:rPr lang="pt-BR" dirty="0"/>
+              <a:t>Cada uma decide:</a:t>
+            </a:r>
+          </a:p>
+          <a:p>
+            <a:r>
+              <a:rPr lang="pt-BR" dirty="0"/>
+              <a:t>de um lado → classe presente</a:t>
+            </a:r>
+          </a:p>
+          <a:p>
+            <a:r>
+              <a:rPr lang="pt-BR" dirty="0"/>
+              <a:t>do outro → classe ausente</a:t>
+            </a:r>
+          </a:p>
+          <a:p>
+            <a:br>
+              <a:rPr lang="pt-BR" dirty="0"/>
+            </a:br>
+            <a:endParaRPr lang="pt-BR" dirty="0"/>
+          </a:p>
+          <a:p>
+            <a:r>
+              <a:rPr lang="pt-BR" b="1" dirty="0"/>
+              <a:t>✔️ Visualização em 2D (intuição)</a:t>
+            </a:r>
+          </a:p>
+          <a:p>
+            <a:r>
+              <a:rPr lang="pt-BR" dirty="0"/>
+              <a:t>Imagine um problema com 2 classes </a:t>
+            </a:r>
+            <a:r>
+              <a:rPr lang="pt-BR" dirty="0" err="1"/>
+              <a:t>multilabel</a:t>
+            </a:r>
+            <a:r>
+              <a:rPr lang="pt-BR" dirty="0"/>
+              <a:t>:</a:t>
+            </a:r>
+          </a:p>
+          <a:p>
+            <a:r>
+              <a:rPr lang="pt-BR" dirty="0"/>
+              <a:t>Classe A → hiperplano 1</a:t>
+            </a:r>
+          </a:p>
+          <a:p>
+            <a:r>
+              <a:rPr lang="pt-BR" dirty="0"/>
+              <a:t>Classe B → hiperplano 2</a:t>
+            </a:r>
+          </a:p>
+          <a:p>
+            <a:r>
+              <a:rPr lang="pt-BR" dirty="0"/>
+              <a:t>O espaço pode ficar assim:</a:t>
+            </a:r>
+          </a:p>
+          <a:p>
+            <a:r>
+              <a:rPr lang="pt-BR" dirty="0"/>
+              <a:t>Região do </a:t>
+            </a:r>
+            <a:r>
+              <a:rPr lang="pt-BR" dirty="0" err="1"/>
+              <a:t>espaçoRótulos</a:t>
+            </a:r>
+            <a:r>
+              <a:rPr lang="pt-BR" dirty="0"/>
+              <a:t> </a:t>
+            </a:r>
+            <a:r>
+              <a:rPr lang="pt-BR" dirty="0" err="1"/>
+              <a:t>atribuídosSó</a:t>
+            </a:r>
+            <a:r>
+              <a:rPr lang="pt-BR" dirty="0"/>
+              <a:t> A ativa(1,0)Só B ativa(0,1)Ambas ativas(1,1)Nenhuma ativa(0,0)</a:t>
+            </a:r>
+          </a:p>
+          <a:p>
+            <a:r>
+              <a:rPr lang="pt-BR" dirty="0"/>
+              <a:t>👉 Ou seja, as superfícies </a:t>
+            </a:r>
+            <a:r>
+              <a:rPr lang="pt-BR" b="1" dirty="0"/>
+              <a:t>não particionam o espaço</a:t>
+            </a:r>
+            <a:br>
+              <a:rPr lang="pt-BR" dirty="0"/>
+            </a:br>
+            <a:r>
+              <a:rPr lang="pt-BR" dirty="0"/>
+              <a:t>👉 Elas </a:t>
+            </a:r>
+            <a:r>
+              <a:rPr lang="pt-BR" b="1" dirty="0"/>
+              <a:t>se sobrepõem</a:t>
+            </a:r>
+            <a:endParaRPr lang="pt-BR" dirty="0"/>
+          </a:p>
+          <a:p>
+            <a:r>
+              <a:rPr lang="pt-BR" dirty="0"/>
+              <a:t>Isso é a principal diferença.</a:t>
+            </a:r>
+          </a:p>
+          <a:p>
+            <a:br>
+              <a:rPr lang="pt-BR" dirty="0"/>
+            </a:br>
+            <a:endParaRPr lang="pt-BR" dirty="0"/>
+          </a:p>
+          <a:p>
+            <a:r>
+              <a:rPr lang="pt-BR" b="1" dirty="0"/>
+              <a:t>3️⃣ Comparação com outros cenários</a:t>
+            </a:r>
+          </a:p>
+          <a:p>
+            <a:r>
+              <a:rPr lang="pt-BR" b="1" dirty="0"/>
+              <a:t>🔹 Binário</a:t>
+            </a:r>
+          </a:p>
+          <a:p>
+            <a:r>
+              <a:rPr lang="pt-BR" dirty="0"/>
+              <a:t>Uma única superfície separa duas regiões.</a:t>
+            </a:r>
+          </a:p>
+          <a:p>
+            <a:r>
+              <a:rPr lang="pt-BR" b="1" dirty="0"/>
+              <a:t>🔹 </a:t>
+            </a:r>
+            <a:r>
+              <a:rPr lang="pt-BR" b="1" dirty="0" err="1"/>
+              <a:t>Multiclass</a:t>
+            </a:r>
+            <a:endParaRPr lang="pt-BR" b="1" dirty="0"/>
+          </a:p>
+          <a:p>
+            <a:r>
+              <a:rPr lang="pt-BR" dirty="0"/>
+              <a:t>Várias superfícies dividem o espaço em </a:t>
+            </a:r>
+            <a:r>
+              <a:rPr lang="pt-BR" b="1" dirty="0"/>
+              <a:t>regiões exclusivas</a:t>
+            </a:r>
+            <a:r>
+              <a:rPr lang="pt-BR" dirty="0"/>
+              <a:t>. (</a:t>
+            </a:r>
+            <a:r>
+              <a:rPr lang="pt-BR" dirty="0">
+                <a:hlinkClick r:id="rId4" tooltip="04_Classification"/>
+              </a:rPr>
+              <a:t>i-systems.github.io</a:t>
+            </a:r>
+            <a:r>
+              <a:rPr lang="pt-BR" dirty="0"/>
+              <a:t>)</a:t>
+            </a:r>
+          </a:p>
+          <a:p>
+            <a:r>
+              <a:rPr lang="pt-BR" b="1" dirty="0"/>
+              <a:t>🔹 </a:t>
+            </a:r>
+            <a:r>
+              <a:rPr lang="pt-BR" b="1" dirty="0" err="1"/>
+              <a:t>Multilabel</a:t>
+            </a:r>
+            <a:endParaRPr lang="pt-BR" b="1" dirty="0"/>
+          </a:p>
+          <a:p>
+            <a:r>
+              <a:rPr lang="pt-BR" dirty="0"/>
+              <a:t>Várias superfícies independentes</a:t>
+            </a:r>
+            <a:br>
+              <a:rPr lang="pt-BR" dirty="0"/>
+            </a:br>
+            <a:r>
+              <a:rPr lang="pt-BR" dirty="0"/>
+              <a:t>→ regiões podem se </a:t>
+            </a:r>
+            <a:r>
+              <a:rPr lang="pt-BR" b="1" dirty="0"/>
+              <a:t>sobrepor</a:t>
+            </a:r>
+            <a:br>
+              <a:rPr lang="pt-BR" dirty="0"/>
+            </a:br>
+            <a:r>
+              <a:rPr lang="pt-BR" dirty="0"/>
+              <a:t>→ uma amostra pode cair em várias regiões simultaneamente</a:t>
+            </a:r>
+          </a:p>
+          <a:p>
+            <a:br>
+              <a:rPr lang="pt-BR" dirty="0"/>
+            </a:br>
+            <a:endParaRPr lang="pt-BR" dirty="0"/>
+          </a:p>
+          <a:p>
+            <a:r>
+              <a:rPr lang="pt-BR" b="1" dirty="0"/>
+              <a:t>4️⃣ Intuição geométrica forte (boa para aula)</a:t>
+            </a:r>
+          </a:p>
+          <a:p>
+            <a:r>
+              <a:rPr lang="pt-BR" dirty="0"/>
+              <a:t>Você pode dizer aos alunos:</a:t>
+            </a:r>
+          </a:p>
+          <a:p>
+            <a:r>
+              <a:rPr lang="pt-BR" dirty="0"/>
+              <a:t>👉 No </a:t>
+            </a:r>
+            <a:r>
+              <a:rPr lang="pt-BR" dirty="0" err="1"/>
+              <a:t>multiclass</a:t>
+            </a:r>
+            <a:r>
+              <a:rPr lang="pt-BR" dirty="0"/>
+              <a:t> o espaço é </a:t>
+            </a:r>
+            <a:r>
+              <a:rPr lang="pt-BR" i="1" dirty="0"/>
+              <a:t>particionado</a:t>
+            </a:r>
+            <a:br>
+              <a:rPr lang="pt-BR" dirty="0"/>
+            </a:br>
+            <a:r>
+              <a:rPr lang="pt-BR" dirty="0"/>
+              <a:t>👉 No </a:t>
+            </a:r>
+            <a:r>
+              <a:rPr lang="pt-BR" dirty="0" err="1"/>
+              <a:t>multilabel</a:t>
+            </a:r>
+            <a:r>
+              <a:rPr lang="pt-BR" dirty="0"/>
+              <a:t> o espaço é </a:t>
+            </a:r>
+            <a:r>
+              <a:rPr lang="pt-BR" i="1" dirty="0"/>
+              <a:t>coberto por máscaras</a:t>
+            </a:r>
+            <a:endParaRPr lang="pt-BR" dirty="0"/>
+          </a:p>
+          <a:p>
+            <a:r>
+              <a:rPr lang="pt-BR" dirty="0"/>
+              <a:t>Cada máscara representa uma classe.</a:t>
+            </a:r>
+          </a:p>
+          <a:p>
+            <a:r>
+              <a:rPr lang="pt-BR" dirty="0"/>
+              <a:t>O resultado final é a </a:t>
+            </a:r>
+            <a:r>
+              <a:rPr lang="pt-BR" b="1" dirty="0"/>
+              <a:t>interseção dessas máscaras</a:t>
+            </a:r>
+            <a:r>
+              <a:rPr lang="pt-BR" dirty="0"/>
+              <a:t>.</a:t>
+            </a:r>
+          </a:p>
+          <a:p>
+            <a:br>
+              <a:rPr lang="pt-BR" dirty="0"/>
+            </a:br>
+            <a:endParaRPr lang="pt-BR" dirty="0"/>
+          </a:p>
+          <a:p>
+            <a:r>
+              <a:rPr lang="pt-BR" b="1" dirty="0"/>
+              <a:t>5️⃣ Exemplo aplicado (didático)</a:t>
+            </a:r>
+          </a:p>
+          <a:p>
+            <a:r>
+              <a:rPr lang="pt-BR" dirty="0"/>
+              <a:t>Classificação de imagem médica:</a:t>
+            </a:r>
+          </a:p>
+          <a:p>
+            <a:r>
+              <a:rPr lang="pt-BR" dirty="0"/>
+              <a:t>Superfícies:</a:t>
+            </a:r>
+          </a:p>
+          <a:p>
+            <a:r>
+              <a:rPr lang="pt-BR" dirty="0"/>
+              <a:t>pneumonia</a:t>
+            </a:r>
+          </a:p>
+          <a:p>
+            <a:r>
+              <a:rPr lang="pt-BR" dirty="0"/>
+              <a:t>covid</a:t>
+            </a:r>
+          </a:p>
+          <a:p>
+            <a:r>
+              <a:rPr lang="pt-BR" dirty="0"/>
+              <a:t>tumor</a:t>
+            </a:r>
+          </a:p>
+          <a:p>
+            <a:r>
+              <a:rPr lang="pt-BR" dirty="0"/>
+              <a:t>Uma imagem pode estar:</a:t>
+            </a:r>
+          </a:p>
+          <a:p>
+            <a:r>
+              <a:rPr lang="pt-BR" dirty="0"/>
+              <a:t>em uma região só</a:t>
+            </a:r>
+          </a:p>
+          <a:p>
+            <a:r>
+              <a:rPr lang="pt-BR" dirty="0"/>
+              <a:t>na interseção de duas</a:t>
+            </a:r>
+          </a:p>
+          <a:p>
+            <a:r>
+              <a:rPr lang="pt-BR" dirty="0"/>
+              <a:t>ou até das três</a:t>
+            </a:r>
+          </a:p>
+          <a:p>
+            <a:r>
+              <a:rPr lang="pt-BR" dirty="0"/>
+              <a:t>Não há exclusividade.</a:t>
+            </a:r>
+          </a:p>
+          <a:p>
+            <a:br>
+              <a:rPr lang="pt-BR" dirty="0"/>
+            </a:br>
+            <a:endParaRPr lang="pt-BR" dirty="0"/>
+          </a:p>
+          <a:p>
+            <a:r>
+              <a:rPr lang="pt-BR" b="1" dirty="0"/>
+              <a:t>6️⃣ Forma matemática típica (logística </a:t>
+            </a:r>
+            <a:r>
+              <a:rPr lang="pt-BR" b="1" dirty="0" err="1"/>
+              <a:t>multilabel</a:t>
+            </a:r>
+            <a:r>
+              <a:rPr lang="pt-BR" b="1" dirty="0"/>
+              <a:t>)</a:t>
+            </a:r>
+          </a:p>
+          <a:p>
+            <a:r>
+              <a:rPr lang="pt-BR" dirty="0"/>
+              <a:t>Cada classe usa uma sigmoide independente:</a:t>
+            </a:r>
+          </a:p>
+          <a:p>
+            <a:r>
+              <a:rPr lang="pt-BR" dirty="0"/>
+              <a:t>[</a:t>
+            </a:r>
+            <a:br>
+              <a:rPr lang="pt-BR" dirty="0"/>
+            </a:br>
+            <a:r>
+              <a:rPr lang="pt-BR" dirty="0"/>
+              <a:t>P(</a:t>
+            </a:r>
+            <a:r>
+              <a:rPr lang="pt-BR" dirty="0" err="1"/>
+              <a:t>y_k</a:t>
+            </a:r>
+            <a:r>
+              <a:rPr lang="pt-BR" dirty="0"/>
+              <a:t>=1|x) = \sigma(</a:t>
+            </a:r>
+            <a:r>
+              <a:rPr lang="pt-BR" dirty="0" err="1"/>
+              <a:t>w_k^Tx</a:t>
+            </a:r>
+            <a:r>
+              <a:rPr lang="pt-BR" dirty="0"/>
+              <a:t>)</a:t>
+            </a:r>
+            <a:br>
+              <a:rPr lang="pt-BR" dirty="0"/>
+            </a:br>
+            <a:r>
+              <a:rPr lang="pt-BR" dirty="0"/>
+              <a:t>]</a:t>
+            </a:r>
+          </a:p>
+          <a:p>
+            <a:r>
+              <a:rPr lang="pt-BR" dirty="0"/>
+              <a:t>e a superfície de decisão é:</a:t>
+            </a:r>
+          </a:p>
+          <a:p>
+            <a:r>
+              <a:rPr lang="pt-BR" dirty="0"/>
+              <a:t>[</a:t>
+            </a:r>
+            <a:br>
+              <a:rPr lang="pt-BR" dirty="0"/>
+            </a:br>
+            <a:r>
+              <a:rPr lang="pt-BR" dirty="0" err="1"/>
+              <a:t>w_k^Tx</a:t>
+            </a:r>
+            <a:r>
+              <a:rPr lang="pt-BR" dirty="0"/>
+              <a:t> = 0</a:t>
+            </a:r>
+            <a:br>
+              <a:rPr lang="pt-BR" dirty="0"/>
+            </a:br>
+            <a:r>
+              <a:rPr lang="pt-BR" dirty="0"/>
+              <a:t>]</a:t>
+            </a:r>
+          </a:p>
+          <a:p>
+            <a:r>
+              <a:rPr lang="pt-BR" dirty="0"/>
+              <a:t>ou seja:</a:t>
+            </a:r>
+          </a:p>
+          <a:p>
+            <a:r>
+              <a:rPr lang="pt-BR" dirty="0"/>
+              <a:t>👉 </a:t>
+            </a:r>
+            <a:r>
+              <a:rPr lang="pt-BR" b="1" dirty="0"/>
+              <a:t>um hiperplano por classe</a:t>
+            </a:r>
+            <a:endParaRPr lang="pt-BR" dirty="0"/>
+          </a:p>
+          <a:p>
+            <a:br>
+              <a:rPr lang="pt-BR" dirty="0"/>
+            </a:br>
+            <a:endParaRPr lang="pt-BR" dirty="0"/>
+          </a:p>
+          <a:p>
+            <a:r>
+              <a:rPr lang="pt-BR" b="1" dirty="0"/>
+              <a:t>✔️ Resumo para aula</a:t>
+            </a:r>
+          </a:p>
+          <a:p>
+            <a:r>
+              <a:rPr lang="pt-BR" dirty="0"/>
+              <a:t>👉 </a:t>
+            </a:r>
+            <a:r>
+              <a:rPr lang="pt-BR" dirty="0" err="1"/>
+              <a:t>Multilabel</a:t>
+            </a:r>
+            <a:r>
+              <a:rPr lang="pt-BR" dirty="0"/>
+              <a:t> não tem uma superfície única</a:t>
+            </a:r>
+            <a:br>
+              <a:rPr lang="pt-BR" dirty="0"/>
+            </a:br>
+            <a:r>
+              <a:rPr lang="pt-BR" dirty="0"/>
+              <a:t>👉 Existem várias superfícies independentes</a:t>
+            </a:r>
+            <a:br>
+              <a:rPr lang="pt-BR" dirty="0"/>
+            </a:br>
+            <a:r>
+              <a:rPr lang="pt-BR" dirty="0"/>
+              <a:t>👉 O espaço não é dividido, mas sobreposto</a:t>
+            </a:r>
+            <a:br>
+              <a:rPr lang="pt-BR" dirty="0"/>
+            </a:br>
+            <a:r>
+              <a:rPr lang="pt-BR" dirty="0"/>
+              <a:t>👉 Regiões podem corresponder a múltiplas classes</a:t>
+            </a:r>
+          </a:p>
+          <a:p>
+            <a:br>
+              <a:rPr lang="pt-BR" dirty="0"/>
+            </a:br>
+            <a:endParaRPr lang="pt-BR" dirty="0"/>
+          </a:p>
+          <a:p>
+            <a:r>
+              <a:rPr lang="pt-BR" dirty="0"/>
+              <a:t>Se quiser, posso desenhar um </a:t>
+            </a:r>
+            <a:r>
+              <a:rPr lang="pt-BR" b="1" dirty="0"/>
+              <a:t>esquema visual didático (tipo quadro de aula)</a:t>
+            </a:r>
+            <a:r>
+              <a:rPr lang="pt-BR" dirty="0"/>
+              <a:t> mostrando:</a:t>
+            </a:r>
+          </a:p>
+          <a:p>
+            <a:r>
+              <a:rPr lang="pt-BR" dirty="0" err="1"/>
+              <a:t>multiclass</a:t>
+            </a:r>
+            <a:r>
+              <a:rPr lang="pt-BR" dirty="0"/>
+              <a:t> </a:t>
+            </a:r>
+            <a:r>
+              <a:rPr lang="pt-BR" dirty="0" err="1"/>
+              <a:t>vs</a:t>
+            </a:r>
+            <a:r>
+              <a:rPr lang="pt-BR" dirty="0"/>
+              <a:t> </a:t>
+            </a:r>
+            <a:r>
+              <a:rPr lang="pt-BR" dirty="0" err="1"/>
+              <a:t>multilabel</a:t>
+            </a:r>
+            <a:endParaRPr lang="pt-BR" dirty="0"/>
+          </a:p>
+          <a:p>
+            <a:r>
+              <a:rPr lang="pt-BR" dirty="0"/>
+              <a:t>fronteiras</a:t>
+            </a:r>
+          </a:p>
+          <a:p>
+            <a:r>
+              <a:rPr lang="pt-BR" dirty="0"/>
+              <a:t>regiões</a:t>
+            </a:r>
+          </a:p>
+          <a:p>
+            <a:r>
+              <a:rPr lang="pt-BR"/>
+              <a:t>Isso costuma ajudar muito os alunos a entenderem.</a:t>
+            </a:r>
+          </a:p>
           <a:p>
             <a:endParaRPr lang="pt-BR" baseline="0" dirty="0"/>
           </a:p>
@@ -5204,8 +6030,8 @@
           </a:p>
         </p:txBody>
       </p:sp>
-      <mc:AlternateContent xmlns:mc="http://schemas.openxmlformats.org/markup-compatibility/2006">
-        <mc:Choice xmlns:a14="http://schemas.microsoft.com/office/drawing/2010/main" Requires="a14">
+      <mc:AlternateContent xmlns:mc="http://schemas.openxmlformats.org/markup-compatibility/2006" xmlns:a14="http://schemas.microsoft.com/office/drawing/2010/main">
+        <mc:Choice Requires="a14">
           <p:sp>
             <p:nvSpPr>
               <p:cNvPr id="3" name="Content Placeholder 2"/>
@@ -6005,7 +6831,7 @@
             </p:txBody>
           </p:sp>
         </mc:Choice>
-        <mc:Fallback>
+        <mc:Fallback xmlns="">
           <p:sp>
             <p:nvSpPr>
               <p:cNvPr id="3" name="Content Placeholder 2"/>
@@ -6116,8 +6942,8 @@
           </a:p>
         </p:txBody>
       </p:sp>
-      <mc:AlternateContent xmlns:mc="http://schemas.openxmlformats.org/markup-compatibility/2006">
-        <mc:Choice xmlns:a14="http://schemas.microsoft.com/office/drawing/2010/main" Requires="a14">
+      <mc:AlternateContent xmlns:mc="http://schemas.openxmlformats.org/markup-compatibility/2006" xmlns:a14="http://schemas.microsoft.com/office/drawing/2010/main">
+        <mc:Choice Requires="a14">
           <p:sp>
             <p:nvSpPr>
               <p:cNvPr id="3" name="Content Placeholder 2">
@@ -7087,7 +7913,13 @@
                                         <a:rPr lang="pt-BR" b="1" i="1" smtClean="0">
                                           <a:latin typeface="Cambria Math" panose="02040503050406030204" pitchFamily="18" charset="0"/>
                                         </a:rPr>
-                                        <m:t>        </m:t>
+                                        <m:t> </m:t>
+                                      </m:r>
+                                      <m:r>
+                                        <a:rPr lang="pt-BR" b="1" i="1" smtClean="0">
+                                          <a:latin typeface="Cambria Math" panose="02040503050406030204" pitchFamily="18" charset="0"/>
+                                        </a:rPr>
+                                        <m:t>       </m:t>
                                       </m:r>
                                       <m:r>
                                         <a:rPr lang="pt-BR" b="1" i="1">
@@ -7283,7 +8115,7 @@
             </p:txBody>
           </p:sp>
         </mc:Choice>
-        <mc:Fallback>
+        <mc:Fallback xmlns="">
           <p:sp>
             <p:nvSpPr>
               <p:cNvPr id="3" name="Content Placeholder 2">
@@ -7400,8 +8232,8 @@
           </a:p>
         </p:txBody>
       </p:sp>
-      <mc:AlternateContent xmlns:mc="http://schemas.openxmlformats.org/markup-compatibility/2006">
-        <mc:Choice xmlns:a14="http://schemas.microsoft.com/office/drawing/2010/main" Requires="a14">
+      <mc:AlternateContent xmlns:mc="http://schemas.openxmlformats.org/markup-compatibility/2006" xmlns:a14="http://schemas.microsoft.com/office/drawing/2010/main">
+        <mc:Choice Requires="a14">
           <p:sp>
             <p:nvSpPr>
               <p:cNvPr id="3" name="Content Placeholder 2">
@@ -8405,7 +9237,13 @@
                                         <a:rPr lang="pt-BR" b="1" i="1" smtClean="0">
                                           <a:latin typeface="Cambria Math" panose="02040503050406030204" pitchFamily="18" charset="0"/>
                                         </a:rPr>
-                                        <m:t>        </m:t>
+                                        <m:t> </m:t>
+                                      </m:r>
+                                      <m:r>
+                                        <a:rPr lang="pt-BR" b="1" i="1" smtClean="0">
+                                          <a:latin typeface="Cambria Math" panose="02040503050406030204" pitchFamily="18" charset="0"/>
+                                        </a:rPr>
+                                        <m:t>       </m:t>
                                       </m:r>
                                       <m:r>
                                         <a:rPr lang="pt-BR" b="1" i="1">
@@ -8760,7 +9598,7 @@
             </p:txBody>
           </p:sp>
         </mc:Choice>
-        <mc:Fallback>
+        <mc:Fallback xmlns="">
           <p:sp>
             <p:nvSpPr>
               <p:cNvPr id="3" name="Content Placeholder 2">
@@ -8950,8 +9788,8 @@
           </a:p>
         </p:txBody>
       </p:sp>
-      <mc:AlternateContent xmlns:mc="http://schemas.openxmlformats.org/markup-compatibility/2006">
-        <mc:Choice xmlns:a14="http://schemas.microsoft.com/office/drawing/2010/main" Requires="a14">
+      <mc:AlternateContent xmlns:mc="http://schemas.openxmlformats.org/markup-compatibility/2006" xmlns:a14="http://schemas.microsoft.com/office/drawing/2010/main">
+        <mc:Choice Requires="a14">
           <p:sp>
             <p:nvSpPr>
               <p:cNvPr id="3" name="Content Placeholder 2"/>
@@ -9029,7 +9867,7 @@
                     <m:sSup>
                       <m:sSupPr>
                         <m:ctrlPr>
-                          <a:rPr lang="pt-BR">
+                          <a:rPr lang="pt-BR" i="1">
                             <a:latin typeface="Cambria Math" panose="02040503050406030204" pitchFamily="18" charset="0"/>
                             <a:ea typeface="Cambria Math" panose="02040503050406030204" pitchFamily="18" charset="0"/>
                           </a:rPr>
@@ -9258,7 +10096,7 @@
             </p:txBody>
           </p:sp>
         </mc:Choice>
-        <mc:Fallback>
+        <mc:Fallback xmlns="">
           <p:sp>
             <p:nvSpPr>
               <p:cNvPr id="3" name="Content Placeholder 2"/>
@@ -9590,8 +10428,8 @@
           </a:p>
         </p:txBody>
       </p:sp>
-      <mc:AlternateContent xmlns:mc="http://schemas.openxmlformats.org/markup-compatibility/2006">
-        <mc:Choice xmlns:a14="http://schemas.microsoft.com/office/drawing/2010/main" Requires="a14">
+      <mc:AlternateContent xmlns:mc="http://schemas.openxmlformats.org/markup-compatibility/2006" xmlns:a14="http://schemas.microsoft.com/office/drawing/2010/main">
+        <mc:Choice Requires="a14">
           <p:sp>
             <p:nvSpPr>
               <p:cNvPr id="3" name="Content Placeholder 2"/>
@@ -9819,7 +10657,7 @@
             </p:txBody>
           </p:sp>
         </mc:Choice>
-        <mc:Fallback>
+        <mc:Fallback xmlns="">
           <p:sp>
             <p:nvSpPr>
               <p:cNvPr id="3" name="Content Placeholder 2"/>
@@ -13794,8 +14632,8 @@
           </a:p>
         </p:txBody>
       </p:sp>
-      <mc:AlternateContent xmlns:mc="http://schemas.openxmlformats.org/markup-compatibility/2006">
-        <mc:Choice xmlns:a14="http://schemas.microsoft.com/office/drawing/2010/main" Requires="a14">
+      <mc:AlternateContent xmlns:mc="http://schemas.openxmlformats.org/markup-compatibility/2006" xmlns:a14="http://schemas.microsoft.com/office/drawing/2010/main">
+        <mc:Choice Requires="a14">
           <p:sp>
             <p:nvSpPr>
               <p:cNvPr id="3" name="Content Placeholder 2">
@@ -13990,7 +14828,7 @@
             </p:txBody>
           </p:sp>
         </mc:Choice>
-        <mc:Fallback>
+        <mc:Fallback xmlns="">
           <p:sp>
             <p:nvSpPr>
               <p:cNvPr id="3" name="Content Placeholder 2">

--- a/slides/C24_Classificação.pptx
+++ b/slides/C24_Classificação.pptx
@@ -27,9 +27,9 @@
     <p:sldId id="344" r:id="rId15"/>
     <p:sldId id="360" r:id="rId16"/>
     <p:sldId id="345" r:id="rId17"/>
-    <p:sldId id="363" r:id="rId18"/>
-    <p:sldId id="361" r:id="rId19"/>
-    <p:sldId id="362" r:id="rId20"/>
+    <p:sldId id="362" r:id="rId18"/>
+    <p:sldId id="363" r:id="rId19"/>
+    <p:sldId id="364" r:id="rId20"/>
     <p:sldId id="356" r:id="rId21"/>
     <p:sldId id="352" r:id="rId22"/>
     <p:sldId id="293" r:id="rId23"/>
@@ -2450,7 +2450,7 @@
           <a:p>
             <a:fld id="{6FC8D850-966F-45A6-8DE7-15B891E7D40D}" type="slidenum">
               <a:rPr lang="pt-BR" smtClean="0"/>
-              <a:t>18</a:t>
+              <a:t>17</a:t>
             </a:fld>
             <a:endParaRPr lang="pt-BR"/>
           </a:p>
@@ -2459,7 +2459,7 @@
     </p:spTree>
     <p:extLst>
       <p:ext uri="{BB962C8B-B14F-4D97-AF65-F5344CB8AC3E}">
-        <p14:creationId xmlns:p14="http://schemas.microsoft.com/office/powerpoint/2010/main" val="63527196"/>
+        <p14:creationId xmlns:p14="http://schemas.microsoft.com/office/powerpoint/2010/main" val="2844401061"/>
       </p:ext>
     </p:extLst>
   </p:cSld>
@@ -2474,7 +2474,13 @@
   <p:cSld>
     <p:spTree>
       <p:nvGrpSpPr>
-        <p:cNvPr id="1" name=""/>
+        <p:cNvPr id="1" name="">
+          <a:extLst>
+            <a:ext uri="{FF2B5EF4-FFF2-40B4-BE49-F238E27FC236}">
+              <a16:creationId xmlns:a16="http://schemas.microsoft.com/office/drawing/2014/main" id="{7A098F72-2922-82B3-5C99-E3BEF8098714}"/>
+            </a:ext>
+          </a:extLst>
+        </p:cNvPr>
         <p:cNvGrpSpPr/>
         <p:nvPr/>
       </p:nvGrpSpPr>
@@ -2488,7 +2494,13 @@
       </p:grpSpPr>
       <p:sp>
         <p:nvSpPr>
-          <p:cNvPr id="2" name="Espaço Reservado para Imagem de Slide 1"/>
+          <p:cNvPr id="2" name="Espaço Reservado para Imagem de Slide 1">
+            <a:extLst>
+              <a:ext uri="{FF2B5EF4-FFF2-40B4-BE49-F238E27FC236}">
+                <a16:creationId xmlns:a16="http://schemas.microsoft.com/office/drawing/2014/main" id="{B532C96A-22C4-D1DD-3FBA-62861D4BDF04}"/>
+              </a:ext>
+            </a:extLst>
+          </p:cNvPr>
           <p:cNvSpPr>
             <a:spLocks noGrp="1" noRot="1" noChangeAspect="1"/>
           </p:cNvSpPr>
@@ -2500,7 +2512,13 @@
       </p:sp>
       <p:sp>
         <p:nvSpPr>
-          <p:cNvPr id="3" name="Espaço Reservado para Anotações 2"/>
+          <p:cNvPr id="3" name="Espaço Reservado para Anotações 2">
+            <a:extLst>
+              <a:ext uri="{FF2B5EF4-FFF2-40B4-BE49-F238E27FC236}">
+                <a16:creationId xmlns:a16="http://schemas.microsoft.com/office/drawing/2014/main" id="{1B3956BA-58DA-02D3-A28D-2E027144F603}"/>
+              </a:ext>
+            </a:extLst>
+          </p:cNvPr>
           <p:cNvSpPr>
             <a:spLocks noGrp="1"/>
           </p:cNvSpPr>
@@ -2545,7 +2563,13 @@
       </p:sp>
       <p:sp>
         <p:nvSpPr>
-          <p:cNvPr id="4" name="Espaço Reservado para Número de Slide 3"/>
+          <p:cNvPr id="4" name="Espaço Reservado para Número de Slide 3">
+            <a:extLst>
+              <a:ext uri="{FF2B5EF4-FFF2-40B4-BE49-F238E27FC236}">
+                <a16:creationId xmlns:a16="http://schemas.microsoft.com/office/drawing/2014/main" id="{FBF6E418-7A70-5EBA-2166-ABCAA4B4C523}"/>
+              </a:ext>
+            </a:extLst>
+          </p:cNvPr>
           <p:cNvSpPr>
             <a:spLocks noGrp="1"/>
           </p:cNvSpPr>
@@ -2560,7 +2584,7 @@
           <a:p>
             <a:fld id="{6FC8D850-966F-45A6-8DE7-15B891E7D40D}" type="slidenum">
               <a:rPr lang="pt-BR" smtClean="0"/>
-              <a:t>19</a:t>
+              <a:t>18</a:t>
             </a:fld>
             <a:endParaRPr lang="pt-BR"/>
           </a:p>
@@ -2569,7 +2593,7 @@
     </p:spTree>
     <p:extLst>
       <p:ext uri="{BB962C8B-B14F-4D97-AF65-F5344CB8AC3E}">
-        <p14:creationId xmlns:p14="http://schemas.microsoft.com/office/powerpoint/2010/main" val="2844401061"/>
+        <p14:creationId xmlns:p14="http://schemas.microsoft.com/office/powerpoint/2010/main" val="3969020988"/>
       </p:ext>
     </p:extLst>
   </p:cSld>
@@ -10428,8 +10452,8 @@
           </a:p>
         </p:txBody>
       </p:sp>
-      <mc:AlternateContent xmlns:mc="http://schemas.openxmlformats.org/markup-compatibility/2006" xmlns:a14="http://schemas.microsoft.com/office/drawing/2010/main">
-        <mc:Choice Requires="a14">
+      <mc:AlternateContent xmlns:mc="http://schemas.openxmlformats.org/markup-compatibility/2006">
+        <mc:Choice xmlns:a14="http://schemas.microsoft.com/office/drawing/2010/main" Requires="a14">
           <p:sp>
             <p:nvSpPr>
               <p:cNvPr id="3" name="Content Placeholder 2"/>
@@ -10493,7 +10517,7 @@
                 </a14:m>
                 <a:r>
                   <a:rPr lang="pt-BR" dirty="0"/>
-                  <a:t> que separe as classes.</a:t>
+                  <a:t>, que separe as classes.</a:t>
                 </a:r>
               </a:p>
               <a:p>
@@ -10657,7 +10681,7 @@
             </p:txBody>
           </p:sp>
         </mc:Choice>
-        <mc:Fallback xmlns="">
+        <mc:Fallback>
           <p:sp>
             <p:nvSpPr>
               <p:cNvPr id="3" name="Content Placeholder 2"/>
@@ -11001,13 +11025,13 @@
         </p:nvSpPr>
         <p:spPr>
           <a:xfrm>
-            <a:off x="838200" y="1825625"/>
-            <a:ext cx="11177588" cy="3045345"/>
+            <a:off x="838199" y="1825625"/>
+            <a:ext cx="11223171" cy="3045345"/>
           </a:xfrm>
         </p:spPr>
         <p:txBody>
           <a:bodyPr>
-            <a:normAutofit/>
+            <a:normAutofit lnSpcReduction="10000"/>
           </a:bodyPr>
           <a:lstStyle/>
           <a:p>
@@ -11043,15 +11067,7 @@
           <a:p>
             <a:r>
               <a:rPr lang="pt-BR" dirty="0"/>
-              <a:t>As </a:t>
-            </a:r>
-            <a:r>
-              <a:rPr lang="pt-BR" b="1" dirty="0"/>
-              <a:t>funções discriminantes</a:t>
-            </a:r>
-            <a:r>
-              <a:rPr lang="pt-BR" dirty="0"/>
-              <a:t> podem ser </a:t>
+              <a:t>Elas podem ser </a:t>
             </a:r>
             <a:r>
               <a:rPr lang="pt-BR" b="1" dirty="0">
@@ -11076,6 +11092,20 @@
             <a:r>
               <a:rPr lang="pt-BR" dirty="0"/>
               <a:t> (e.g., círculos e elipses).</a:t>
+            </a:r>
+          </a:p>
+          <a:p>
+            <a:r>
+              <a:rPr lang="pt-BR" dirty="0"/>
+              <a:t>Elas formam </a:t>
+            </a:r>
+            <a:r>
+              <a:rPr lang="pt-BR" b="1" dirty="0"/>
+              <a:t>superfícies de separação </a:t>
+            </a:r>
+            <a:r>
+              <a:rPr lang="pt-BR" dirty="0"/>
+              <a:t>no espaço de atributos que podem ter várias dimensões (2D, 3D, etc.).</a:t>
             </a:r>
           </a:p>
           <a:p>
@@ -11112,8 +11142,8 @@
         </p:blipFill>
         <p:spPr>
           <a:xfrm>
-            <a:off x="589866" y="4185993"/>
-            <a:ext cx="3448732" cy="2656657"/>
+            <a:off x="1373584" y="4789714"/>
+            <a:ext cx="2665013" cy="2052936"/>
           </a:xfrm>
           <a:prstGeom prst="rect">
             <a:avLst/>
@@ -11141,8 +11171,8 @@
         </p:blipFill>
         <p:spPr>
           <a:xfrm>
-            <a:off x="8379980" y="4185993"/>
-            <a:ext cx="3417767" cy="2614205"/>
+            <a:off x="9156662" y="4780067"/>
+            <a:ext cx="2641085" cy="2020131"/>
           </a:xfrm>
           <a:prstGeom prst="rect">
             <a:avLst/>
@@ -11170,8 +11200,8 @@
         </p:blipFill>
         <p:spPr>
           <a:xfrm>
-            <a:off x="4505724" y="4185993"/>
-            <a:ext cx="3406342" cy="2632921"/>
+            <a:off x="5279810" y="4784320"/>
+            <a:ext cx="2632256" cy="2034594"/>
           </a:xfrm>
           <a:prstGeom prst="rect">
             <a:avLst/>
@@ -11210,743 +11240,6 @@
       </p:grpSpPr>
       <p:sp>
         <p:nvSpPr>
-          <p:cNvPr id="2" name="Title 1">
-            <a:extLst>
-              <a:ext uri="{FF2B5EF4-FFF2-40B4-BE49-F238E27FC236}">
-                <a16:creationId xmlns:a16="http://schemas.microsoft.com/office/drawing/2014/main" id="{5DEB2A3D-8D63-9C8B-C3AB-947682DA6A8D}"/>
-              </a:ext>
-            </a:extLst>
-          </p:cNvPr>
-          <p:cNvSpPr>
-            <a:spLocks noGrp="1"/>
-          </p:cNvSpPr>
-          <p:nvPr>
-            <p:ph type="title"/>
-          </p:nvPr>
-        </p:nvSpPr>
-        <p:spPr/>
-        <p:txBody>
-          <a:bodyPr/>
-          <a:lstStyle/>
-          <a:p>
-            <a:endParaRPr lang="en-US"/>
-          </a:p>
-        </p:txBody>
-      </p:sp>
-      <p:sp>
-        <p:nvSpPr>
-          <p:cNvPr id="3" name="Content Placeholder 2">
-            <a:extLst>
-              <a:ext uri="{FF2B5EF4-FFF2-40B4-BE49-F238E27FC236}">
-                <a16:creationId xmlns:a16="http://schemas.microsoft.com/office/drawing/2014/main" id="{B849A053-A236-679C-83D9-DD618F87AA3E}"/>
-              </a:ext>
-            </a:extLst>
-          </p:cNvPr>
-          <p:cNvSpPr>
-            <a:spLocks noGrp="1"/>
-          </p:cNvSpPr>
-          <p:nvPr>
-            <p:ph idx="1"/>
-          </p:nvPr>
-        </p:nvSpPr>
-        <p:spPr/>
-        <p:txBody>
-          <a:bodyPr/>
-          <a:lstStyle/>
-          <a:p>
-            <a:endParaRPr lang="pt-BR" dirty="0"/>
-          </a:p>
-          <a:p>
-            <a:r>
-              <a:rPr lang="pt-BR" dirty="0"/>
-              <a:t>Uma </a:t>
-            </a:r>
-            <a:r>
-              <a:rPr lang="pt-BR" b="1" i="1" dirty="0"/>
-              <a:t>fronteira de decisão </a:t>
-            </a:r>
-            <a:r>
-              <a:rPr lang="pt-BR" dirty="0"/>
-              <a:t>corresponde a uma </a:t>
-            </a:r>
-            <a:r>
-              <a:rPr lang="pt-BR" b="1" i="1" dirty="0">
-                <a:solidFill>
-                  <a:srgbClr val="00B050"/>
-                </a:solidFill>
-              </a:rPr>
-              <a:t>superfície de separação</a:t>
-            </a:r>
-            <a:r>
-              <a:rPr lang="pt-BR" b="1" i="1" dirty="0"/>
-              <a:t> </a:t>
-            </a:r>
-            <a:r>
-              <a:rPr lang="pt-BR" dirty="0"/>
-              <a:t>(1D, 2D, 3D, etc.) no </a:t>
-            </a:r>
-            <a:r>
-              <a:rPr lang="pt-BR" b="1" i="1" dirty="0"/>
-              <a:t>espaço de atributos </a:t>
-            </a:r>
-            <a:r>
-              <a:rPr lang="pt-BR" dirty="0"/>
-              <a:t>que separa as classes.</a:t>
-            </a:r>
-          </a:p>
-          <a:p>
-            <a:endParaRPr lang="en-US" dirty="0"/>
-          </a:p>
-        </p:txBody>
-      </p:sp>
-    </p:spTree>
-    <p:extLst>
-      <p:ext uri="{BB962C8B-B14F-4D97-AF65-F5344CB8AC3E}">
-        <p14:creationId xmlns:p14="http://schemas.microsoft.com/office/powerpoint/2010/main" val="1890311029"/>
-      </p:ext>
-    </p:extLst>
-  </p:cSld>
-  <p:clrMapOvr>
-    <a:masterClrMapping/>
-  </p:clrMapOvr>
-</p:sld>
-</file>
-
-<file path=ppt/slides/slide18.xml><?xml version="1.0" encoding="utf-8"?>
-<p:sld xmlns:a="http://schemas.openxmlformats.org/drawingml/2006/main" xmlns:r="http://schemas.openxmlformats.org/officeDocument/2006/relationships" xmlns:p="http://schemas.openxmlformats.org/presentationml/2006/main">
-  <p:cSld>
-    <p:spTree>
-      <p:nvGrpSpPr>
-        <p:cNvPr id="1" name=""/>
-        <p:cNvGrpSpPr/>
-        <p:nvPr/>
-      </p:nvGrpSpPr>
-      <p:grpSpPr>
-        <a:xfrm>
-          <a:off x="0" y="0"/>
-          <a:ext cx="0" cy="0"/>
-          <a:chOff x="0" y="0"/>
-          <a:chExt cx="0" cy="0"/>
-        </a:xfrm>
-      </p:grpSpPr>
-      <p:sp>
-        <p:nvSpPr>
-          <p:cNvPr id="2" name="Título 1">
-            <a:extLst>
-              <a:ext uri="{FF2B5EF4-FFF2-40B4-BE49-F238E27FC236}">
-                <a16:creationId xmlns:a16="http://schemas.microsoft.com/office/drawing/2014/main" id="{0D0DF5BB-4965-42FA-1FE9-FA4F63D368AC}"/>
-              </a:ext>
-            </a:extLst>
-          </p:cNvPr>
-          <p:cNvSpPr>
-            <a:spLocks noGrp="1"/>
-          </p:cNvSpPr>
-          <p:nvPr>
-            <p:ph type="title"/>
-          </p:nvPr>
-        </p:nvSpPr>
-        <p:spPr/>
-        <p:txBody>
-          <a:bodyPr/>
-          <a:lstStyle/>
-          <a:p>
-            <a:r>
-              <a:rPr lang="pt-BR" dirty="0"/>
-              <a:t>Funções discriminantes</a:t>
-            </a:r>
-          </a:p>
-        </p:txBody>
-      </p:sp>
-      <mc:AlternateContent xmlns:mc="http://schemas.openxmlformats.org/markup-compatibility/2006" xmlns:a14="http://schemas.microsoft.com/office/drawing/2010/main">
-        <mc:Choice Requires="a14">
-          <p:sp>
-            <p:nvSpPr>
-              <p:cNvPr id="3" name="Espaço Reservado para Conteúdo 2">
-                <a:extLst>
-                  <a:ext uri="{FF2B5EF4-FFF2-40B4-BE49-F238E27FC236}">
-                    <a16:creationId xmlns:a16="http://schemas.microsoft.com/office/drawing/2014/main" id="{057DDB69-30DD-CFD2-808A-F52FDB98EF88}"/>
-                  </a:ext>
-                </a:extLst>
-              </p:cNvPr>
-              <p:cNvSpPr>
-                <a:spLocks noGrp="1"/>
-              </p:cNvSpPr>
-              <p:nvPr>
-                <p:ph idx="1"/>
-              </p:nvPr>
-            </p:nvSpPr>
-            <p:spPr>
-              <a:xfrm>
-                <a:off x="4876800" y="1825624"/>
-                <a:ext cx="7153275" cy="5032375"/>
-              </a:xfrm>
-            </p:spPr>
-            <p:txBody>
-              <a:bodyPr>
-                <a:normAutofit/>
-              </a:bodyPr>
-              <a:lstStyle/>
-              <a:p>
-                <a:r>
-                  <a:rPr lang="pt-BR" dirty="0"/>
-                  <a:t>Uma</a:t>
-                </a:r>
-                <a:r>
-                  <a:rPr lang="pt-BR" dirty="0">
-                    <a:solidFill>
-                      <a:srgbClr val="7030A0"/>
-                    </a:solidFill>
-                  </a:rPr>
-                  <a:t> </a:t>
-                </a:r>
-                <a:r>
-                  <a:rPr lang="pt-BR" b="1" i="1" dirty="0">
-                    <a:solidFill>
-                      <a:srgbClr val="7030A0"/>
-                    </a:solidFill>
-                  </a:rPr>
-                  <a:t>função discriminante</a:t>
-                </a:r>
-                <a:r>
-                  <a:rPr lang="pt-BR" b="1" i="1" dirty="0"/>
-                  <a:t> </a:t>
-                </a:r>
-                <a:r>
-                  <a:rPr lang="pt-BR" dirty="0"/>
-                  <a:t>com formato de </a:t>
-                </a:r>
-                <a:r>
-                  <a:rPr lang="pt-BR" b="1" i="1" dirty="0">
-                    <a:solidFill>
-                      <a:schemeClr val="accent2"/>
-                    </a:solidFill>
-                  </a:rPr>
-                  <a:t>hiperplano</a:t>
-                </a:r>
-                <a:r>
-                  <a:rPr lang="pt-BR" dirty="0"/>
-                  <a:t> é dada por</a:t>
-                </a:r>
-              </a:p>
-              <a:p>
-                <a:pPr marL="0" indent="0">
-                  <a:buNone/>
-                </a:pPr>
-                <a14:m>
-                  <m:oMathPara xmlns:m="http://schemas.openxmlformats.org/officeDocument/2006/math">
-                    <m:oMathParaPr>
-                      <m:jc m:val="centerGroup"/>
-                    </m:oMathParaPr>
-                    <m:oMath xmlns:m="http://schemas.openxmlformats.org/officeDocument/2006/math">
-                      <m:r>
-                        <a:rPr lang="pt-BR" b="0" i="1" smtClean="0">
-                          <a:latin typeface="Cambria Math" panose="02040503050406030204" pitchFamily="18" charset="0"/>
-                        </a:rPr>
-                        <m:t>𝑔</m:t>
-                      </m:r>
-                      <m:d>
-                        <m:dPr>
-                          <m:ctrlPr>
-                            <a:rPr lang="pt-BR" b="0" i="1" smtClean="0">
-                              <a:latin typeface="Cambria Math" panose="02040503050406030204" pitchFamily="18" charset="0"/>
-                            </a:rPr>
-                          </m:ctrlPr>
-                        </m:dPr>
-                        <m:e>
-                          <m:r>
-                            <a:rPr lang="pt-BR" b="1" i="1" smtClean="0">
-                              <a:latin typeface="Cambria Math" panose="02040503050406030204" pitchFamily="18" charset="0"/>
-                            </a:rPr>
-                            <m:t>𝒙</m:t>
-                          </m:r>
-                        </m:e>
-                      </m:d>
-                      <m:r>
-                        <a:rPr lang="pt-BR" b="0" i="1" smtClean="0">
-                          <a:latin typeface="Cambria Math" panose="02040503050406030204" pitchFamily="18" charset="0"/>
-                        </a:rPr>
-                        <m:t>=</m:t>
-                      </m:r>
-                      <m:sSub>
-                        <m:sSubPr>
-                          <m:ctrlPr>
-                            <a:rPr lang="pt-BR" b="0" i="1" smtClean="0">
-                              <a:latin typeface="Cambria Math" panose="02040503050406030204" pitchFamily="18" charset="0"/>
-                            </a:rPr>
-                          </m:ctrlPr>
-                        </m:sSubPr>
-                        <m:e>
-                          <m:r>
-                            <a:rPr lang="pt-BR" b="0" i="1" smtClean="0">
-                              <a:latin typeface="Cambria Math" panose="02040503050406030204" pitchFamily="18" charset="0"/>
-                            </a:rPr>
-                            <m:t>𝑎</m:t>
-                          </m:r>
-                        </m:e>
-                        <m:sub>
-                          <m:r>
-                            <a:rPr lang="pt-BR" b="0" i="1" smtClean="0">
-                              <a:latin typeface="Cambria Math" panose="02040503050406030204" pitchFamily="18" charset="0"/>
-                            </a:rPr>
-                            <m:t>0</m:t>
-                          </m:r>
-                        </m:sub>
-                      </m:sSub>
-                      <m:r>
-                        <a:rPr lang="pt-BR" b="0" i="1" smtClean="0">
-                          <a:latin typeface="Cambria Math" panose="02040503050406030204" pitchFamily="18" charset="0"/>
-                        </a:rPr>
-                        <m:t>+</m:t>
-                      </m:r>
-                      <m:sSub>
-                        <m:sSubPr>
-                          <m:ctrlPr>
-                            <a:rPr lang="pt-BR" i="1">
-                              <a:latin typeface="Cambria Math" panose="02040503050406030204" pitchFamily="18" charset="0"/>
-                            </a:rPr>
-                          </m:ctrlPr>
-                        </m:sSubPr>
-                        <m:e>
-                          <m:r>
-                            <a:rPr lang="pt-BR" i="1">
-                              <a:latin typeface="Cambria Math" panose="02040503050406030204" pitchFamily="18" charset="0"/>
-                            </a:rPr>
-                            <m:t>𝑎</m:t>
-                          </m:r>
-                        </m:e>
-                        <m:sub>
-                          <m:r>
-                            <a:rPr lang="pt-BR" b="0" i="1" smtClean="0">
-                              <a:latin typeface="Cambria Math" panose="02040503050406030204" pitchFamily="18" charset="0"/>
-                            </a:rPr>
-                            <m:t>1</m:t>
-                          </m:r>
-                        </m:sub>
-                      </m:sSub>
-                      <m:sSub>
-                        <m:sSubPr>
-                          <m:ctrlPr>
-                            <a:rPr lang="pt-BR" i="1" smtClean="0">
-                              <a:latin typeface="Cambria Math" panose="02040503050406030204" pitchFamily="18" charset="0"/>
-                            </a:rPr>
-                          </m:ctrlPr>
-                        </m:sSubPr>
-                        <m:e>
-                          <m:r>
-                            <a:rPr lang="pt-BR" b="0" i="1" smtClean="0">
-                              <a:latin typeface="Cambria Math" panose="02040503050406030204" pitchFamily="18" charset="0"/>
-                            </a:rPr>
-                            <m:t>𝑥</m:t>
-                          </m:r>
-                        </m:e>
-                        <m:sub>
-                          <m:r>
-                            <a:rPr lang="pt-BR" b="0" i="1" smtClean="0">
-                              <a:latin typeface="Cambria Math" panose="02040503050406030204" pitchFamily="18" charset="0"/>
-                            </a:rPr>
-                            <m:t>1</m:t>
-                          </m:r>
-                        </m:sub>
-                      </m:sSub>
-                      <m:r>
-                        <a:rPr lang="pt-BR" b="0" i="1" smtClean="0">
-                          <a:latin typeface="Cambria Math" panose="02040503050406030204" pitchFamily="18" charset="0"/>
-                        </a:rPr>
-                        <m:t>+</m:t>
-                      </m:r>
-                      <m:sSub>
-                        <m:sSubPr>
-                          <m:ctrlPr>
-                            <a:rPr lang="pt-BR" i="1">
-                              <a:latin typeface="Cambria Math" panose="02040503050406030204" pitchFamily="18" charset="0"/>
-                            </a:rPr>
-                          </m:ctrlPr>
-                        </m:sSubPr>
-                        <m:e>
-                          <m:r>
-                            <a:rPr lang="pt-BR" i="1">
-                              <a:latin typeface="Cambria Math" panose="02040503050406030204" pitchFamily="18" charset="0"/>
-                            </a:rPr>
-                            <m:t>𝑎</m:t>
-                          </m:r>
-                        </m:e>
-                        <m:sub>
-                          <m:r>
-                            <a:rPr lang="pt-BR" b="0" i="1" smtClean="0">
-                              <a:latin typeface="Cambria Math" panose="02040503050406030204" pitchFamily="18" charset="0"/>
-                            </a:rPr>
-                            <m:t>2</m:t>
-                          </m:r>
-                        </m:sub>
-                      </m:sSub>
-                      <m:sSub>
-                        <m:sSubPr>
-                          <m:ctrlPr>
-                            <a:rPr lang="pt-BR" i="1">
-                              <a:latin typeface="Cambria Math" panose="02040503050406030204" pitchFamily="18" charset="0"/>
-                            </a:rPr>
-                          </m:ctrlPr>
-                        </m:sSubPr>
-                        <m:e>
-                          <m:r>
-                            <a:rPr lang="pt-BR" i="1">
-                              <a:latin typeface="Cambria Math" panose="02040503050406030204" pitchFamily="18" charset="0"/>
-                            </a:rPr>
-                            <m:t>𝑥</m:t>
-                          </m:r>
-                        </m:e>
-                        <m:sub>
-                          <m:r>
-                            <a:rPr lang="pt-BR" b="0" i="1" smtClean="0">
-                              <a:latin typeface="Cambria Math" panose="02040503050406030204" pitchFamily="18" charset="0"/>
-                            </a:rPr>
-                            <m:t>2</m:t>
-                          </m:r>
-                        </m:sub>
-                      </m:sSub>
-                      <m:r>
-                        <a:rPr lang="pt-BR" b="0" i="1" smtClean="0">
-                          <a:latin typeface="Cambria Math" panose="02040503050406030204" pitchFamily="18" charset="0"/>
-                        </a:rPr>
-                        <m:t>+</m:t>
-                      </m:r>
-                      <m:r>
-                        <a:rPr lang="pt-BR" b="1" i="1">
-                          <a:latin typeface="Cambria Math" panose="02040503050406030204" pitchFamily="18" charset="0"/>
-                        </a:rPr>
-                        <m:t>…</m:t>
-                      </m:r>
-                      <m:r>
-                        <a:rPr lang="pt-BR" b="0" i="1" smtClean="0">
-                          <a:latin typeface="Cambria Math" panose="02040503050406030204" pitchFamily="18" charset="0"/>
-                        </a:rPr>
-                        <m:t>+</m:t>
-                      </m:r>
-                      <m:sSub>
-                        <m:sSubPr>
-                          <m:ctrlPr>
-                            <a:rPr lang="pt-BR" i="1">
-                              <a:latin typeface="Cambria Math" panose="02040503050406030204" pitchFamily="18" charset="0"/>
-                            </a:rPr>
-                          </m:ctrlPr>
-                        </m:sSubPr>
-                        <m:e>
-                          <m:r>
-                            <a:rPr lang="pt-BR" i="1">
-                              <a:latin typeface="Cambria Math" panose="02040503050406030204" pitchFamily="18" charset="0"/>
-                            </a:rPr>
-                            <m:t>𝑎</m:t>
-                          </m:r>
-                        </m:e>
-                        <m:sub>
-                          <m:r>
-                            <a:rPr lang="pt-BR" b="0" i="1" smtClean="0">
-                              <a:latin typeface="Cambria Math" panose="02040503050406030204" pitchFamily="18" charset="0"/>
-                            </a:rPr>
-                            <m:t>𝐾</m:t>
-                          </m:r>
-                        </m:sub>
-                      </m:sSub>
-                      <m:sSub>
-                        <m:sSubPr>
-                          <m:ctrlPr>
-                            <a:rPr lang="pt-BR" i="1">
-                              <a:latin typeface="Cambria Math" panose="02040503050406030204" pitchFamily="18" charset="0"/>
-                            </a:rPr>
-                          </m:ctrlPr>
-                        </m:sSubPr>
-                        <m:e>
-                          <m:r>
-                            <a:rPr lang="pt-BR" i="1">
-                              <a:latin typeface="Cambria Math" panose="02040503050406030204" pitchFamily="18" charset="0"/>
-                            </a:rPr>
-                            <m:t>𝑥</m:t>
-                          </m:r>
-                        </m:e>
-                        <m:sub>
-                          <m:r>
-                            <a:rPr lang="pt-BR" b="0" i="1" smtClean="0">
-                              <a:latin typeface="Cambria Math" panose="02040503050406030204" pitchFamily="18" charset="0"/>
-                            </a:rPr>
-                            <m:t>𝐾</m:t>
-                          </m:r>
-                        </m:sub>
-                      </m:sSub>
-                      <m:r>
-                        <a:rPr lang="pt-BR" b="0" i="1" smtClean="0">
-                          <a:latin typeface="Cambria Math" panose="02040503050406030204" pitchFamily="18" charset="0"/>
-                        </a:rPr>
-                        <m:t>=</m:t>
-                      </m:r>
-                      <m:sSup>
-                        <m:sSupPr>
-                          <m:ctrlPr>
-                            <a:rPr lang="pt-BR" i="1">
-                              <a:latin typeface="Cambria Math" panose="02040503050406030204" pitchFamily="18" charset="0"/>
-                            </a:rPr>
-                          </m:ctrlPr>
-                        </m:sSupPr>
-                        <m:e>
-                          <m:r>
-                            <a:rPr lang="pt-BR" b="1" i="1">
-                              <a:latin typeface="Cambria Math" panose="02040503050406030204" pitchFamily="18" charset="0"/>
-                            </a:rPr>
-                            <m:t>𝒂</m:t>
-                          </m:r>
-                        </m:e>
-                        <m:sup>
-                          <m:r>
-                            <a:rPr lang="pt-BR" i="1">
-                              <a:latin typeface="Cambria Math" panose="02040503050406030204" pitchFamily="18" charset="0"/>
-                            </a:rPr>
-                            <m:t>𝑇</m:t>
-                          </m:r>
-                        </m:sup>
-                      </m:sSup>
-                      <m:r>
-                        <a:rPr lang="pt-BR" b="1" i="1">
-                          <a:latin typeface="Cambria Math" panose="02040503050406030204" pitchFamily="18" charset="0"/>
-                        </a:rPr>
-                        <m:t>𝒙</m:t>
-                      </m:r>
-                      <m:r>
-                        <a:rPr lang="pt-BR" b="1" i="0" smtClean="0">
-                          <a:latin typeface="Cambria Math" panose="02040503050406030204" pitchFamily="18" charset="0"/>
-                        </a:rPr>
-                        <m:t>.</m:t>
-                      </m:r>
-                    </m:oMath>
-                  </m:oMathPara>
-                </a14:m>
-                <a:endParaRPr lang="pt-BR" dirty="0"/>
-              </a:p>
-              <a:p>
-                <a:r>
-                  <a:rPr lang="pt-BR" dirty="0"/>
-                  <a:t>Um </a:t>
-                </a:r>
-                <a:r>
-                  <a:rPr lang="pt-BR" b="1" i="1" dirty="0"/>
-                  <a:t>hiperplano</a:t>
-                </a:r>
-                <a:r>
-                  <a:rPr lang="pt-BR" dirty="0"/>
-                  <a:t> pode ser 1 ponto em 1D, uma reta em 2D, um plano em 3D, etc.</a:t>
-                </a:r>
-              </a:p>
-              <a:p>
-                <a:pPr lvl="1">
-                  <a:buFont typeface="Wingdings" panose="05000000000000000000" pitchFamily="2" charset="2"/>
-                  <a:buChar char="§"/>
-                </a:pPr>
-                <a:r>
-                  <a:rPr lang="pt-BR" dirty="0"/>
-                  <a:t>O coeficiente </a:t>
-                </a:r>
-                <a14:m>
-                  <m:oMath xmlns:m="http://schemas.openxmlformats.org/officeDocument/2006/math">
-                    <m:sSub>
-                      <m:sSubPr>
-                        <m:ctrlPr>
-                          <a:rPr lang="pt-BR" i="1">
-                            <a:latin typeface="Cambria Math" panose="02040503050406030204" pitchFamily="18" charset="0"/>
-                          </a:rPr>
-                        </m:ctrlPr>
-                      </m:sSubPr>
-                      <m:e>
-                        <m:r>
-                          <a:rPr lang="pt-BR" i="1">
-                            <a:latin typeface="Cambria Math" panose="02040503050406030204" pitchFamily="18" charset="0"/>
-                          </a:rPr>
-                          <m:t>𝑎</m:t>
-                        </m:r>
-                      </m:e>
-                      <m:sub>
-                        <m:r>
-                          <a:rPr lang="pt-BR" i="1">
-                            <a:latin typeface="Cambria Math" panose="02040503050406030204" pitchFamily="18" charset="0"/>
-                          </a:rPr>
-                          <m:t>0</m:t>
-                        </m:r>
-                      </m:sub>
-                    </m:sSub>
-                  </m:oMath>
-                </a14:m>
-                <a:r>
-                  <a:rPr lang="pt-BR" dirty="0"/>
-                  <a:t> (</a:t>
-                </a:r>
-                <a:r>
-                  <a:rPr lang="pt-BR" b="1" i="1" dirty="0"/>
-                  <a:t>bias</a:t>
-                </a:r>
-                <a:r>
-                  <a:rPr lang="pt-BR" dirty="0"/>
-                  <a:t>) dá o deslocamento com relação à origem.</a:t>
-                </a:r>
-              </a:p>
-              <a:p>
-                <a:pPr lvl="1">
-                  <a:buFont typeface="Wingdings" panose="05000000000000000000" pitchFamily="2" charset="2"/>
-                  <a:buChar char="§"/>
-                </a:pPr>
-                <a:r>
-                  <a:rPr lang="pt-BR" dirty="0"/>
-                  <a:t>O restante dos pesos determina a orientação do </a:t>
-                </a:r>
-                <a:r>
-                  <a:rPr lang="pt-BR" b="1" i="1" dirty="0"/>
-                  <a:t>hiperplano</a:t>
-                </a:r>
-                <a:r>
-                  <a:rPr lang="pt-BR" dirty="0"/>
-                  <a:t>.</a:t>
-                </a:r>
-              </a:p>
-              <a:p>
-                <a:r>
-                  <a:rPr lang="pt-BR" dirty="0"/>
-                  <a:t>Lembrem-se que </a:t>
-                </a:r>
-                <a:r>
-                  <a:rPr lang="pt-BR" b="1" i="1" dirty="0">
-                    <a:solidFill>
-                      <a:schemeClr val="accent2"/>
-                    </a:solidFill>
-                  </a:rPr>
-                  <a:t>hiperplanos</a:t>
-                </a:r>
-                <a:r>
-                  <a:rPr lang="pt-BR" dirty="0"/>
-                  <a:t> fazem </a:t>
-                </a:r>
-                <a:r>
-                  <a:rPr lang="pt-BR" b="1" i="1" dirty="0">
-                    <a:solidFill>
-                      <a:schemeClr val="accent5"/>
-                    </a:solidFill>
-                  </a:rPr>
-                  <a:t>mapeamentos lineares </a:t>
-                </a:r>
-                <a:r>
-                  <a:rPr lang="pt-BR" dirty="0"/>
-                  <a:t>dos atributos nas saídas.</a:t>
-                </a:r>
-              </a:p>
-            </p:txBody>
-          </p:sp>
-        </mc:Choice>
-        <mc:Fallback xmlns="">
-          <p:sp>
-            <p:nvSpPr>
-              <p:cNvPr id="3" name="Espaço Reservado para Conteúdo 2">
-                <a:extLst>
-                  <a:ext uri="{FF2B5EF4-FFF2-40B4-BE49-F238E27FC236}">
-                    <a16:creationId xmlns:a16="http://schemas.microsoft.com/office/drawing/2014/main" id="{057DDB69-30DD-CFD2-808A-F52FDB98EF88}"/>
-                  </a:ext>
-                </a:extLst>
-              </p:cNvPr>
-              <p:cNvSpPr>
-                <a:spLocks noGrp="1" noRot="1" noChangeAspect="1" noMove="1" noResize="1" noEditPoints="1" noAdjustHandles="1" noChangeArrowheads="1" noChangeShapeType="1" noTextEdit="1"/>
-              </p:cNvSpPr>
-              <p:nvPr>
-                <p:ph idx="1"/>
-              </p:nvPr>
-            </p:nvSpPr>
-            <p:spPr>
-              <a:xfrm>
-                <a:off x="4876800" y="1825624"/>
-                <a:ext cx="7153275" cy="5032375"/>
-              </a:xfrm>
-              <a:blipFill>
-                <a:blip r:embed="rId3"/>
-                <a:stretch>
-                  <a:fillRect l="-1535" t="-1937" r="-426"/>
-                </a:stretch>
-              </a:blipFill>
-            </p:spPr>
-            <p:txBody>
-              <a:bodyPr/>
-              <a:lstStyle/>
-              <a:p>
-                <a:r>
-                  <a:rPr lang="en-US">
-                    <a:noFill/>
-                  </a:rPr>
-                  <a:t> </a:t>
-                </a:r>
-              </a:p>
-            </p:txBody>
-          </p:sp>
-        </mc:Fallback>
-      </mc:AlternateContent>
-      <p:pic>
-        <p:nvPicPr>
-          <p:cNvPr id="4" name="Picture 3">
-            <a:extLst>
-              <a:ext uri="{FF2B5EF4-FFF2-40B4-BE49-F238E27FC236}">
-                <a16:creationId xmlns:a16="http://schemas.microsoft.com/office/drawing/2014/main" id="{DF06FD70-E89F-BC52-2900-5506EBD6CF3F}"/>
-              </a:ext>
-            </a:extLst>
-          </p:cNvPr>
-          <p:cNvPicPr>
-            <a:picLocks noChangeAspect="1"/>
-          </p:cNvPicPr>
-          <p:nvPr/>
-        </p:nvPicPr>
-        <p:blipFill rotWithShape="1">
-          <a:blip r:embed="rId4">
-            <a:extLst>
-              <a:ext uri="{28A0092B-C50C-407E-A947-70E740481C1C}">
-                <a14:useLocalDpi xmlns:a14="http://schemas.microsoft.com/office/drawing/2010/main" val="0"/>
-              </a:ext>
-            </a:extLst>
-          </a:blip>
-          <a:srcRect l="6368" t="2623" r="7430" b="1353"/>
-          <a:stretch/>
-        </p:blipFill>
-        <p:spPr>
-          <a:xfrm>
-            <a:off x="1139670" y="2602756"/>
-            <a:ext cx="2841780" cy="3263704"/>
-          </a:xfrm>
-          <a:prstGeom prst="rect">
-            <a:avLst/>
-          </a:prstGeom>
-        </p:spPr>
-      </p:pic>
-    </p:spTree>
-    <p:extLst>
-      <p:ext uri="{BB962C8B-B14F-4D97-AF65-F5344CB8AC3E}">
-        <p14:creationId xmlns:p14="http://schemas.microsoft.com/office/powerpoint/2010/main" val="1806652215"/>
-      </p:ext>
-    </p:extLst>
-  </p:cSld>
-  <p:clrMapOvr>
-    <a:masterClrMapping/>
-  </p:clrMapOvr>
-</p:sld>
-</file>
-
-<file path=ppt/slides/slide19.xml><?xml version="1.0" encoding="utf-8"?>
-<p:sld xmlns:a="http://schemas.openxmlformats.org/drawingml/2006/main" xmlns:r="http://schemas.openxmlformats.org/officeDocument/2006/relationships" xmlns:p="http://schemas.openxmlformats.org/presentationml/2006/main">
-  <p:cSld>
-    <p:spTree>
-      <p:nvGrpSpPr>
-        <p:cNvPr id="1" name=""/>
-        <p:cNvGrpSpPr/>
-        <p:nvPr/>
-      </p:nvGrpSpPr>
-      <p:grpSpPr>
-        <a:xfrm>
-          <a:off x="0" y="0"/>
-          <a:ext cx="0" cy="0"/>
-          <a:chOff x="0" y="0"/>
-          <a:chExt cx="0" cy="0"/>
-        </a:xfrm>
-      </p:grpSpPr>
-      <p:sp>
-        <p:nvSpPr>
           <p:cNvPr id="2" name="Título 1">
             <a:extLst>
               <a:ext uri="{FF2B5EF4-FFF2-40B4-BE49-F238E27FC236}">
@@ -11973,8 +11266,8 @@
           </a:p>
         </p:txBody>
       </p:sp>
-      <mc:AlternateContent xmlns:mc="http://schemas.openxmlformats.org/markup-compatibility/2006" xmlns:a14="http://schemas.microsoft.com/office/drawing/2010/main">
-        <mc:Choice Requires="a14">
+      <mc:AlternateContent xmlns:mc="http://schemas.openxmlformats.org/markup-compatibility/2006">
+        <mc:Choice xmlns:a14="http://schemas.microsoft.com/office/drawing/2010/main" Requires="a14">
           <p:sp>
             <p:nvSpPr>
               <p:cNvPr id="3" name="Espaço Reservado para Conteúdo 2">
@@ -11993,8 +11286,8 @@
             </p:nvSpPr>
             <p:spPr>
               <a:xfrm>
-                <a:off x="4648201" y="1825624"/>
-                <a:ext cx="7448550" cy="5032375"/>
+                <a:off x="4256314" y="1825624"/>
+                <a:ext cx="7840438" cy="5032375"/>
               </a:xfrm>
             </p:spPr>
             <p:txBody>
@@ -12005,39 +11298,27 @@
               <a:p>
                 <a:r>
                   <a:rPr lang="pt-BR" dirty="0"/>
-                  <a:t>Nosso </a:t>
-                </a:r>
-                <a:r>
-                  <a:rPr lang="pt-BR" b="1" i="1" dirty="0">
-                    <a:solidFill>
-                      <a:schemeClr val="accent2"/>
-                    </a:solidFill>
-                  </a:rPr>
+                  <a:t>No caso da </a:t>
+                </a:r>
+                <a:r>
+                  <a:rPr lang="pt-BR" b="1" dirty="0"/>
+                  <a:t>classificação binária</a:t>
+                </a:r>
+                <a:r>
+                  <a:rPr lang="pt-BR" dirty="0"/>
+                  <a:t>, nosso </a:t>
+                </a:r>
+                <a:r>
+                  <a:rPr lang="pt-BR" b="1" dirty="0"/>
                   <a:t>objetivo</a:t>
                 </a:r>
                 <a:r>
-                  <a:rPr lang="pt-BR" b="1" i="1" dirty="0">
-                    <a:solidFill>
-                      <a:srgbClr val="00B050"/>
-                    </a:solidFill>
-                  </a:rPr>
-                  <a:t> é </a:t>
-                </a:r>
-                <a:r>
-                  <a:rPr lang="pt-BR" b="1" i="1" dirty="0">
-                    <a:solidFill>
-                      <a:schemeClr val="accent2"/>
-                    </a:solidFill>
-                  </a:rPr>
-                  <a:t>encontrar os pesos </a:t>
-                </a:r>
-                <a:r>
-                  <a:rPr lang="pt-BR" b="1" i="1" dirty="0">
-                    <a:solidFill>
-                      <a:srgbClr val="00B050"/>
-                    </a:solidFill>
-                  </a:rPr>
-                  <a:t>da função discriminante </a:t>
+                  <a:rPr lang="pt-BR" dirty="0"/>
+                  <a:t> é encontrar o </a:t>
+                </a:r>
+                <a:r>
+                  <a:rPr lang="pt-BR" b="1" dirty="0"/>
+                  <a:t>grau e os pesos da função discriminante (polinomial) </a:t>
                 </a:r>
                 <a:r>
                   <a:rPr lang="pt-BR" dirty="0"/>
@@ -12054,6 +11335,24 @@
                         <a:latin typeface="Cambria Math" panose="02040503050406030204" pitchFamily="18" charset="0"/>
                       </a:rPr>
                       <m:t>𝒙</m:t>
+                    </m:r>
+                    <m:r>
+                      <a:rPr lang="pt-BR" b="0" i="1" smtClean="0">
+                        <a:latin typeface="Cambria Math" panose="02040503050406030204" pitchFamily="18" charset="0"/>
+                      </a:rPr>
+                      <m:t>(</m:t>
+                    </m:r>
+                    <m:r>
+                      <a:rPr lang="pt-BR" b="0" i="1" smtClean="0">
+                        <a:latin typeface="Cambria Math" panose="02040503050406030204" pitchFamily="18" charset="0"/>
+                      </a:rPr>
+                      <m:t>𝑖</m:t>
+                    </m:r>
+                    <m:r>
+                      <a:rPr lang="pt-BR" b="0" i="1" smtClean="0">
+                        <a:latin typeface="Cambria Math" panose="02040503050406030204" pitchFamily="18" charset="0"/>
+                      </a:rPr>
+                      <m:t>)</m:t>
                     </m:r>
                   </m:oMath>
                 </a14:m>
@@ -12075,32 +11374,24 @@
                       <m:sSub>
                         <m:sSubPr>
                           <m:ctrlPr>
-                            <a:rPr lang="pt-BR" sz="2400" i="1">
-                              <a:latin typeface="Cambria Math" panose="02040503050406030204" pitchFamily="18" charset="0"/>
-                            </a:rPr>
+                            <a:rPr lang="pt-BR" sz="2000"/>
                           </m:ctrlPr>
                         </m:sSubPr>
                         <m:e>
                           <m:r>
-                            <a:rPr lang="pt-BR" sz="2400" i="1">
-                              <a:latin typeface="Cambria Math" panose="02040503050406030204" pitchFamily="18" charset="0"/>
-                            </a:rPr>
+                            <a:rPr lang="pt-BR" sz="2000"/>
                             <m:t>𝐶</m:t>
                           </m:r>
                         </m:e>
                         <m:sub>
                           <m:r>
-                            <a:rPr lang="pt-BR" sz="2400" b="0" i="1" smtClean="0">
-                              <a:latin typeface="Cambria Math" panose="02040503050406030204" pitchFamily="18" charset="0"/>
-                            </a:rPr>
+                            <a:rPr lang="pt-BR" sz="2000"/>
                             <m:t>𝑞</m:t>
                           </m:r>
                         </m:sub>
                       </m:sSub>
                       <m:r>
-                        <a:rPr lang="pt-BR" sz="2400" b="1" i="1">
-                          <a:latin typeface="Cambria Math" panose="02040503050406030204" pitchFamily="18" charset="0"/>
-                        </a:rPr>
+                        <a:rPr lang="pt-BR" sz="2000"/>
                         <m:t>=</m:t>
                       </m:r>
                       <m:d>
@@ -12108,110 +11399,270 @@
                           <m:begChr m:val="{"/>
                           <m:endChr m:val=""/>
                           <m:ctrlPr>
-                            <a:rPr lang="pt-BR" sz="2400" b="1" i="1">
-                              <a:latin typeface="Cambria Math" panose="02040503050406030204" pitchFamily="18" charset="0"/>
-                            </a:rPr>
+                            <a:rPr lang="pt-BR" sz="2000"/>
                           </m:ctrlPr>
                         </m:dPr>
                         <m:e>
                           <m:eqArr>
                             <m:eqArrPr>
                               <m:ctrlPr>
-                                <a:rPr lang="pt-BR" sz="2400" i="1">
-                                  <a:latin typeface="Cambria Math" panose="02040503050406030204" pitchFamily="18" charset="0"/>
-                                </a:rPr>
+                                <a:rPr lang="pt-BR" sz="2000"/>
                               </m:ctrlPr>
                             </m:eqArrPr>
                             <m:e>
                               <m:r>
-                                <a:rPr lang="pt-BR" sz="2400" b="0" i="1" smtClean="0">
-                                  <a:latin typeface="Cambria Math" panose="02040503050406030204" pitchFamily="18" charset="0"/>
-                                </a:rPr>
+                                <a:rPr lang="pt-BR" sz="2000"/>
                                 <m:t>𝑞</m:t>
                               </m:r>
                               <m:r>
-                                <a:rPr lang="pt-BR" sz="2400" b="0" i="1" smtClean="0">
-                                  <a:latin typeface="Cambria Math" panose="02040503050406030204" pitchFamily="18" charset="0"/>
-                                </a:rPr>
+                                <a:rPr lang="pt-BR" sz="2000"/>
                                 <m:t>=1,                    </m:t>
                               </m:r>
                               <m:r>
-                                <a:rPr lang="pt-BR" sz="2400" b="0" i="1">
+                                <a:rPr lang="pt-BR" sz="2000" b="0" i="0" smtClean="0">
                                   <a:latin typeface="Cambria Math" panose="02040503050406030204" pitchFamily="18" charset="0"/>
                                 </a:rPr>
+                                <m:t>    </m:t>
+                              </m:r>
+                              <m:r>
+                                <a:rPr lang="pt-BR" sz="2000"/>
                                 <m:t>𝑔</m:t>
                               </m:r>
                               <m:d>
                                 <m:dPr>
                                   <m:ctrlPr>
-                                    <a:rPr lang="pt-BR" sz="2400" i="1">
-                                      <a:latin typeface="Cambria Math" panose="02040503050406030204" pitchFamily="18" charset="0"/>
-                                    </a:rPr>
+                                    <a:rPr lang="pt-BR" sz="2000"/>
                                   </m:ctrlPr>
                                 </m:dPr>
                                 <m:e>
                                   <m:r>
-                                    <a:rPr lang="pt-BR" sz="2400" b="1" i="1">
+                                    <a:rPr lang="pt-BR" sz="2000"/>
+                                    <m:t>𝒙</m:t>
+                                  </m:r>
+                                  <m:r>
+                                    <a:rPr lang="pt-BR" sz="2000" i="1">
                                       <a:latin typeface="Cambria Math" panose="02040503050406030204" pitchFamily="18" charset="0"/>
                                     </a:rPr>
-                                    <m:t>𝒙</m:t>
+                                    <m:t>(</m:t>
+                                  </m:r>
+                                  <m:r>
+                                    <a:rPr lang="pt-BR" sz="2000" i="1">
+                                      <a:latin typeface="Cambria Math" panose="02040503050406030204" pitchFamily="18" charset="0"/>
+                                    </a:rPr>
+                                    <m:t>𝑖</m:t>
+                                  </m:r>
+                                  <m:r>
+                                    <a:rPr lang="pt-BR" sz="2000" i="1">
+                                      <a:latin typeface="Cambria Math" panose="02040503050406030204" pitchFamily="18" charset="0"/>
+                                    </a:rPr>
+                                    <m:t>)</m:t>
                                   </m:r>
                                 </m:e>
                               </m:d>
                               <m:r>
-                                <a:rPr lang="pt-BR" sz="2400" b="0" i="1" smtClean="0">
-                                  <a:latin typeface="Cambria Math" panose="02040503050406030204" pitchFamily="18" charset="0"/>
-                                </a:rPr>
-                                <m:t>&lt;</m:t>
+                                <a:rPr lang="pt-BR" sz="2000"/>
+                                <m:t>&lt;0 (</m:t>
                               </m:r>
                               <m:r>
-                                <a:rPr lang="pt-BR" sz="2400" b="0" i="1">
-                                  <a:latin typeface="Cambria Math" panose="02040503050406030204" pitchFamily="18" charset="0"/>
-                                </a:rPr>
-                                <m:t>0</m:t>
+                                <m:rPr>
+                                  <m:nor/>
+                                </m:rPr>
+                                <a:rPr lang="pt-BR" sz="2000"/>
+                                <m:t>Amostra</m:t>
+                              </m:r>
+                              <m:r>
+                                <m:rPr>
+                                  <m:nor/>
+                                </m:rPr>
+                                <a:rPr lang="pt-BR" sz="2000"/>
+                                <m:t> </m:t>
+                              </m:r>
+                              <m:r>
+                                <m:rPr>
+                                  <m:nor/>
+                                </m:rPr>
+                                <a:rPr lang="pt-BR" sz="2000"/>
+                                <m:t>acima</m:t>
+                              </m:r>
+                              <m:r>
+                                <m:rPr>
+                                  <m:nor/>
+                                </m:rPr>
+                                <a:rPr lang="pt-BR" sz="2000" dirty="0"/>
+                                <m:t> </m:t>
+                              </m:r>
+                              <m:r>
+                                <m:rPr>
+                                  <m:nor/>
+                                </m:rPr>
+                                <a:rPr lang="pt-BR" sz="2000" dirty="0"/>
+                                <m:t>da</m:t>
+                              </m:r>
+                              <m:r>
+                                <m:rPr>
+                                  <m:nor/>
+                                </m:rPr>
+                                <a:rPr lang="pt-BR" sz="2000" dirty="0"/>
+                                <m:t> </m:t>
+                              </m:r>
+                              <m:r>
+                                <m:rPr>
+                                  <m:nor/>
+                                </m:rPr>
+                                <a:rPr lang="pt-BR" sz="2000" dirty="0"/>
+                                <m:t>fun</m:t>
+                              </m:r>
+                              <m:r>
+                                <m:rPr>
+                                  <m:nor/>
+                                </m:rPr>
+                                <a:rPr lang="pt-BR" sz="2000" dirty="0"/>
+                                <m:t>çã</m:t>
+                              </m:r>
+                              <m:r>
+                                <m:rPr>
+                                  <m:nor/>
+                                </m:rPr>
+                                <a:rPr lang="pt-BR" sz="2000" dirty="0"/>
+                                <m:t>o</m:t>
+                              </m:r>
+                              <m:r>
+                                <m:rPr>
+                                  <m:nor/>
+                                </m:rPr>
+                                <a:rPr lang="pt-BR" sz="2000" dirty="0"/>
+                                <m:t>)</m:t>
                               </m:r>
                             </m:e>
                             <m:e>
                               <m:r>
-                                <a:rPr lang="pt-BR" sz="2400" b="0" i="1" smtClean="0">
+                                <a:rPr lang="pt-BR" sz="2000" b="0" i="0" smtClean="0">
                                   <a:latin typeface="Cambria Math" panose="02040503050406030204" pitchFamily="18" charset="0"/>
                                 </a:rPr>
+                                <m:t> </m:t>
+                              </m:r>
+                              <m:r>
+                                <a:rPr lang="pt-BR" sz="2000"/>
                                 <m:t>𝑞</m:t>
                               </m:r>
                               <m:r>
-                                <a:rPr lang="pt-BR" sz="2400" b="0" i="1" smtClean="0">
-                                  <a:latin typeface="Cambria Math" panose="02040503050406030204" pitchFamily="18" charset="0"/>
-                                </a:rPr>
+                                <a:rPr lang="pt-BR" sz="2000"/>
                                 <m:t>=2,                     </m:t>
                               </m:r>
                               <m:r>
-                                <a:rPr lang="pt-BR" sz="2400" b="0" i="1" smtClean="0">
+                                <a:rPr lang="pt-BR" sz="2000" b="0" i="0" smtClean="0">
                                   <a:latin typeface="Cambria Math" panose="02040503050406030204" pitchFamily="18" charset="0"/>
                                 </a:rPr>
+                                <m:t>    </m:t>
+                              </m:r>
+                              <m:r>
+                                <a:rPr lang="pt-BR" sz="2000"/>
                                 <m:t>𝑔</m:t>
                               </m:r>
                               <m:d>
                                 <m:dPr>
                                   <m:ctrlPr>
-                                    <a:rPr lang="pt-BR" sz="2400" i="1">
-                                      <a:latin typeface="Cambria Math" panose="02040503050406030204" pitchFamily="18" charset="0"/>
-                                    </a:rPr>
+                                    <a:rPr lang="pt-BR" sz="2000"/>
                                   </m:ctrlPr>
                                 </m:dPr>
                                 <m:e>
                                   <m:r>
-                                    <a:rPr lang="pt-BR" sz="2400" b="1" i="1" smtClean="0">
+                                    <a:rPr lang="pt-BR" sz="2000"/>
+                                    <m:t>𝒙</m:t>
+                                  </m:r>
+                                  <m:r>
+                                    <a:rPr lang="pt-BR" sz="2000" i="1">
                                       <a:latin typeface="Cambria Math" panose="02040503050406030204" pitchFamily="18" charset="0"/>
                                     </a:rPr>
-                                    <m:t>𝒙</m:t>
+                                    <m:t>(</m:t>
+                                  </m:r>
+                                  <m:r>
+                                    <a:rPr lang="pt-BR" sz="2000" i="1">
+                                      <a:latin typeface="Cambria Math" panose="02040503050406030204" pitchFamily="18" charset="0"/>
+                                    </a:rPr>
+                                    <m:t>𝑖</m:t>
+                                  </m:r>
+                                  <m:r>
+                                    <a:rPr lang="pt-BR" sz="2000" i="1">
+                                      <a:latin typeface="Cambria Math" panose="02040503050406030204" pitchFamily="18" charset="0"/>
+                                    </a:rPr>
+                                    <m:t>)</m:t>
                                   </m:r>
                                 </m:e>
                               </m:d>
                               <m:r>
-                                <a:rPr lang="pt-BR" sz="2400" b="0" i="1" smtClean="0">
-                                  <a:latin typeface="Cambria Math" panose="02040503050406030204" pitchFamily="18" charset="0"/>
-                                </a:rPr>
-                                <m:t>&gt;0</m:t>
+                                <a:rPr lang="pt-BR" sz="2000"/>
+                                <m:t>&gt;0 (</m:t>
+                              </m:r>
+                              <m:r>
+                                <m:rPr>
+                                  <m:nor/>
+                                </m:rPr>
+                                <a:rPr lang="pt-BR" sz="2000" dirty="0"/>
+                                <m:t>Amostra</m:t>
+                              </m:r>
+                              <m:r>
+                                <m:rPr>
+                                  <m:nor/>
+                                </m:rPr>
+                                <a:rPr lang="pt-BR" sz="2000" dirty="0"/>
+                                <m:t> </m:t>
+                              </m:r>
+                              <m:r>
+                                <m:rPr>
+                                  <m:nor/>
+                                </m:rPr>
+                                <a:rPr lang="pt-BR" sz="2000" dirty="0"/>
+                                <m:t>abaixo</m:t>
+                              </m:r>
+                              <m:r>
+                                <m:rPr>
+                                  <m:nor/>
+                                </m:rPr>
+                                <a:rPr lang="pt-BR" sz="2000" dirty="0"/>
+                                <m:t> </m:t>
+                              </m:r>
+                              <m:r>
+                                <m:rPr>
+                                  <m:nor/>
+                                </m:rPr>
+                                <a:rPr lang="pt-BR" sz="2000" dirty="0"/>
+                                <m:t>da</m:t>
+                              </m:r>
+                              <m:r>
+                                <m:rPr>
+                                  <m:nor/>
+                                </m:rPr>
+                                <a:rPr lang="pt-BR" sz="2000" dirty="0"/>
+                                <m:t> </m:t>
+                              </m:r>
+                              <m:r>
+                                <m:rPr>
+                                  <m:nor/>
+                                </m:rPr>
+                                <a:rPr lang="pt-BR" sz="2000" dirty="0"/>
+                                <m:t>fun</m:t>
+                              </m:r>
+                              <m:r>
+                                <m:rPr>
+                                  <m:nor/>
+                                </m:rPr>
+                                <a:rPr lang="pt-BR" sz="2000" dirty="0"/>
+                                <m:t>çã</m:t>
+                              </m:r>
+                              <m:r>
+                                <m:rPr>
+                                  <m:nor/>
+                                </m:rPr>
+                                <a:rPr lang="pt-BR" sz="2000" dirty="0"/>
+                                <m:t>o</m:t>
+                              </m:r>
+                              <m:r>
+                                <m:rPr>
+                                  <m:nor/>
+                                </m:rPr>
+                                <a:rPr lang="pt-BR" sz="2000" dirty="0"/>
+                                <m:t>)</m:t>
                               </m:r>
                             </m:e>
                             <m:e>
@@ -12219,110 +11670,191 @@
                                 <m:rPr>
                                   <m:nor/>
                                 </m:rPr>
-                                <a:rPr lang="pt-BR" sz="2400" b="0" i="0" smtClean="0">
-                                  <a:latin typeface="Cambria Math" panose="02040503050406030204" pitchFamily="18" charset="0"/>
-                                </a:rPr>
+                                <a:rPr lang="pt-BR" sz="2000"/>
                                 <m:t>i</m:t>
                               </m:r>
                               <m:r>
                                 <m:rPr>
                                   <m:nor/>
                                 </m:rPr>
-                                <a:rPr lang="pt-BR" sz="2400" dirty="0"/>
+                                <a:rPr lang="pt-BR" sz="2000" dirty="0"/>
                                 <m:t>ndetermina</m:t>
                               </m:r>
                               <m:r>
                                 <m:rPr>
                                   <m:nor/>
                                 </m:rPr>
-                                <a:rPr lang="pt-BR" sz="2400" dirty="0"/>
+                                <a:rPr lang="pt-BR" sz="2000" dirty="0"/>
                                 <m:t>çã</m:t>
                               </m:r>
                               <m:r>
                                 <m:rPr>
                                   <m:nor/>
                                 </m:rPr>
-                                <a:rPr lang="pt-BR" sz="2400" dirty="0"/>
+                                <a:rPr lang="pt-BR" sz="2000" dirty="0"/>
                                 <m:t>o</m:t>
                               </m:r>
                               <m:r>
-                                <a:rPr lang="pt-BR" sz="2400" i="1">
+                                <a:rPr lang="pt-BR" sz="2000"/>
+                                <m:t>, </m:t>
+                              </m:r>
+                              <m:r>
+                                <a:rPr lang="pt-BR" sz="2000" b="0" i="0" smtClean="0">
                                   <a:latin typeface="Cambria Math" panose="02040503050406030204" pitchFamily="18" charset="0"/>
                                 </a:rPr>
-                                <m:t>,</m:t>
+                                <m:t> </m:t>
                               </m:r>
                               <m:r>
-                                <a:rPr lang="pt-BR" sz="2400" b="0" i="1" smtClean="0">
-                                  <a:latin typeface="Cambria Math" panose="02040503050406030204" pitchFamily="18" charset="0"/>
-                                </a:rPr>
-                                <m:t>  </m:t>
-                              </m:r>
-                              <m:r>
-                                <a:rPr lang="pt-BR" sz="2400" i="1">
-                                  <a:latin typeface="Cambria Math" panose="02040503050406030204" pitchFamily="18" charset="0"/>
-                                </a:rPr>
+                                <a:rPr lang="pt-BR" sz="2000"/>
                                 <m:t>𝑔</m:t>
                               </m:r>
                               <m:d>
                                 <m:dPr>
                                   <m:ctrlPr>
-                                    <a:rPr lang="pt-BR" sz="2400" i="1">
-                                      <a:latin typeface="Cambria Math" panose="02040503050406030204" pitchFamily="18" charset="0"/>
-                                    </a:rPr>
+                                    <a:rPr lang="pt-BR" sz="2000"/>
                                   </m:ctrlPr>
                                 </m:dPr>
                                 <m:e>
                                   <m:r>
-                                    <a:rPr lang="pt-BR" sz="2400" b="1" i="1">
+                                    <a:rPr lang="pt-BR" sz="2000"/>
+                                    <m:t>𝒙</m:t>
+                                  </m:r>
+                                  <m:r>
+                                    <a:rPr lang="pt-BR" sz="2000" i="1">
                                       <a:latin typeface="Cambria Math" panose="02040503050406030204" pitchFamily="18" charset="0"/>
                                     </a:rPr>
-                                    <m:t>𝒙</m:t>
+                                    <m:t>(</m:t>
+                                  </m:r>
+                                  <m:r>
+                                    <a:rPr lang="pt-BR" sz="2000" i="1">
+                                      <a:latin typeface="Cambria Math" panose="02040503050406030204" pitchFamily="18" charset="0"/>
+                                    </a:rPr>
+                                    <m:t>𝑖</m:t>
+                                  </m:r>
+                                  <m:r>
+                                    <a:rPr lang="pt-BR" sz="2000" i="1">
+                                      <a:latin typeface="Cambria Math" panose="02040503050406030204" pitchFamily="18" charset="0"/>
+                                    </a:rPr>
+                                    <m:t>)</m:t>
                                   </m:r>
                                 </m:e>
                               </m:d>
                               <m:r>
-                                <a:rPr lang="pt-BR" sz="2400" b="0" i="1" smtClean="0">
-                                  <a:latin typeface="Cambria Math" panose="02040503050406030204" pitchFamily="18" charset="0"/>
-                                </a:rPr>
-                                <m:t>=</m:t>
+                                <a:rPr lang="pt-BR" sz="2000"/>
+                                <m:t>=0 (</m:t>
                               </m:r>
                               <m:r>
-                                <a:rPr lang="pt-BR" sz="2400" i="1">
-                                  <a:latin typeface="Cambria Math" panose="02040503050406030204" pitchFamily="18" charset="0"/>
-                                </a:rPr>
-                                <m:t>0</m:t>
+                                <m:rPr>
+                                  <m:nor/>
+                                </m:rPr>
+                                <a:rPr lang="pt-BR" sz="2000"/>
+                                <m:t>A</m:t>
+                              </m:r>
+                              <m:r>
+                                <m:rPr>
+                                  <m:nor/>
+                                </m:rPr>
+                                <a:rPr lang="pt-BR" sz="2000" dirty="0"/>
+                                <m:t>mostra</m:t>
+                              </m:r>
+                              <m:r>
+                                <m:rPr>
+                                  <m:nor/>
+                                </m:rPr>
+                                <a:rPr lang="pt-BR" sz="2000" dirty="0"/>
+                                <m:t> </m:t>
+                              </m:r>
+                              <m:r>
+                                <m:rPr>
+                                  <m:nor/>
+                                </m:rPr>
+                                <a:rPr lang="pt-BR" sz="2000" dirty="0"/>
+                                <m:t>sobre</m:t>
+                              </m:r>
+                              <m:r>
+                                <m:rPr>
+                                  <m:nor/>
+                                </m:rPr>
+                                <a:rPr lang="pt-BR" sz="2000" dirty="0"/>
+                                <m:t> </m:t>
+                              </m:r>
+                              <m:r>
+                                <m:rPr>
+                                  <m:nor/>
+                                </m:rPr>
+                                <a:rPr lang="pt-BR" sz="2000" dirty="0"/>
+                                <m:t>a</m:t>
+                              </m:r>
+                              <m:r>
+                                <m:rPr>
+                                  <m:nor/>
+                                </m:rPr>
+                                <a:rPr lang="pt-BR" sz="2000" dirty="0"/>
+                                <m:t> </m:t>
+                              </m:r>
+                              <m:r>
+                                <m:rPr>
+                                  <m:nor/>
+                                </m:rPr>
+                                <a:rPr lang="pt-BR" sz="2000" dirty="0"/>
+                                <m:t>fun</m:t>
+                              </m:r>
+                              <m:r>
+                                <m:rPr>
+                                  <m:nor/>
+                                </m:rPr>
+                                <a:rPr lang="pt-BR" sz="2000" dirty="0"/>
+                                <m:t>çã</m:t>
+                              </m:r>
+                              <m:r>
+                                <m:rPr>
+                                  <m:nor/>
+                                </m:rPr>
+                                <a:rPr lang="pt-BR" sz="2000" dirty="0"/>
+                                <m:t>o</m:t>
+                              </m:r>
+                              <m:r>
+                                <m:rPr>
+                                  <m:nor/>
+                                </m:rPr>
+                                <a:rPr lang="pt-BR" sz="2000" b="0" i="0" dirty="0" smtClean="0"/>
+                                <m:t>)</m:t>
+                              </m:r>
+                              <m:r>
+                                <m:rPr>
+                                  <m:nor/>
+                                </m:rPr>
+                                <a:rPr lang="pt-BR" sz="2000" dirty="0"/>
+                                <m:t> </m:t>
                               </m:r>
                             </m:e>
                           </m:eqArr>
                         </m:e>
                       </m:d>
+                      <m:r>
+                        <a:rPr lang="pt-BR" sz="2000" b="0" i="0" smtClean="0">
+                          <a:latin typeface="Cambria Math" panose="02040503050406030204" pitchFamily="18" charset="0"/>
+                        </a:rPr>
+                        <m:t>.</m:t>
+                      </m:r>
                     </m:oMath>
                   </m:oMathPara>
                 </a14:m>
-                <a:endParaRPr lang="pt-BR" sz="2700" dirty="0"/>
+                <a:endParaRPr lang="pt-BR" sz="2400" dirty="0"/>
               </a:p>
               <a:p>
                 <a:r>
                   <a:rPr lang="pt-BR" dirty="0"/>
-                  <a:t>OBS.: Podemos usar também </a:t>
-                </a:r>
-                <a:r>
-                  <a:rPr lang="pt-BR" b="1" i="1" dirty="0"/>
-                  <a:t>funções discriminantes com </a:t>
-                </a:r>
-                <a:r>
-                  <a:rPr lang="pt-BR" b="1" i="1" dirty="0">
-                    <a:solidFill>
-                      <a:srgbClr val="7030A0"/>
-                    </a:solidFill>
-                  </a:rPr>
-                  <a:t>mapeamentos não-lineares.</a:t>
-                </a:r>
-                <a:endParaRPr lang="pt-BR" dirty="0">
-                  <a:solidFill>
-                    <a:srgbClr val="7030A0"/>
-                  </a:solidFill>
-                </a:endParaRPr>
+                  <a:t>Em caso de </a:t>
+                </a:r>
+                <a:r>
+                  <a:rPr lang="pt-BR" b="1" dirty="0"/>
+                  <a:t>indeterminação</a:t>
+                </a:r>
+                <a:r>
+                  <a:rPr lang="pt-BR" dirty="0"/>
+                  <a:t>, podemos </a:t>
+                </a:r>
               </a:p>
               <a:p>
                 <a:pPr lvl="1">
@@ -12331,217 +11863,37 @@
                 </a:pPr>
                 <a:r>
                   <a:rPr lang="pt-BR" dirty="0"/>
-                  <a:t>Exemplo: </a:t>
-                </a:r>
-                <a14:m>
-                  <m:oMath xmlns:m="http://schemas.openxmlformats.org/officeDocument/2006/math">
-                    <m:r>
-                      <a:rPr lang="pt-BR" i="1">
-                        <a:latin typeface="Cambria Math" panose="02040503050406030204" pitchFamily="18" charset="0"/>
-                      </a:rPr>
-                      <m:t>𝑔</m:t>
-                    </m:r>
-                    <m:d>
-                      <m:dPr>
-                        <m:ctrlPr>
-                          <a:rPr lang="pt-BR" i="1">
-                            <a:latin typeface="Cambria Math" panose="02040503050406030204" pitchFamily="18" charset="0"/>
-                          </a:rPr>
-                        </m:ctrlPr>
-                      </m:dPr>
-                      <m:e>
-                        <m:r>
-                          <a:rPr lang="pt-BR" b="1" i="1">
-                            <a:latin typeface="Cambria Math" panose="02040503050406030204" pitchFamily="18" charset="0"/>
-                          </a:rPr>
-                          <m:t>𝒙</m:t>
-                        </m:r>
-                      </m:e>
-                    </m:d>
-                    <m:r>
-                      <a:rPr lang="pt-BR" i="1">
-                        <a:latin typeface="Cambria Math" panose="02040503050406030204" pitchFamily="18" charset="0"/>
-                      </a:rPr>
-                      <m:t>=</m:t>
-                    </m:r>
-                    <m:sSub>
-                      <m:sSubPr>
-                        <m:ctrlPr>
-                          <a:rPr lang="pt-BR" i="1">
-                            <a:latin typeface="Cambria Math" panose="02040503050406030204" pitchFamily="18" charset="0"/>
-                          </a:rPr>
-                        </m:ctrlPr>
-                      </m:sSubPr>
-                      <m:e>
-                        <m:r>
-                          <a:rPr lang="pt-BR" i="1">
-                            <a:latin typeface="Cambria Math" panose="02040503050406030204" pitchFamily="18" charset="0"/>
-                          </a:rPr>
-                          <m:t>𝑎</m:t>
-                        </m:r>
-                      </m:e>
-                      <m:sub>
-                        <m:r>
-                          <a:rPr lang="pt-BR" i="1">
-                            <a:latin typeface="Cambria Math" panose="02040503050406030204" pitchFamily="18" charset="0"/>
-                          </a:rPr>
-                          <m:t>0</m:t>
-                        </m:r>
-                      </m:sub>
-                    </m:sSub>
-                    <m:r>
-                      <a:rPr lang="pt-BR" i="1">
-                        <a:latin typeface="Cambria Math" panose="02040503050406030204" pitchFamily="18" charset="0"/>
-                      </a:rPr>
-                      <m:t>+</m:t>
-                    </m:r>
-                    <m:sSubSup>
-                      <m:sSubSupPr>
-                        <m:ctrlPr>
-                          <a:rPr lang="pt-BR" i="1" smtClean="0">
-                            <a:latin typeface="Cambria Math" panose="02040503050406030204" pitchFamily="18" charset="0"/>
-                          </a:rPr>
-                        </m:ctrlPr>
-                      </m:sSubSupPr>
-                      <m:e>
-                        <m:r>
-                          <a:rPr lang="pt-BR" b="0" i="1" smtClean="0">
-                            <a:latin typeface="Cambria Math" panose="02040503050406030204" pitchFamily="18" charset="0"/>
-                          </a:rPr>
-                          <m:t>𝑥</m:t>
-                        </m:r>
-                      </m:e>
-                      <m:sub>
-                        <m:r>
-                          <a:rPr lang="pt-BR" b="0" i="1" smtClean="0">
-                            <a:latin typeface="Cambria Math" panose="02040503050406030204" pitchFamily="18" charset="0"/>
-                          </a:rPr>
-                          <m:t>1</m:t>
-                        </m:r>
-                      </m:sub>
-                      <m:sup>
-                        <m:r>
-                          <a:rPr lang="pt-BR" b="0" i="1" smtClean="0">
-                            <a:latin typeface="Cambria Math" panose="02040503050406030204" pitchFamily="18" charset="0"/>
-                          </a:rPr>
-                          <m:t>2</m:t>
-                        </m:r>
-                      </m:sup>
-                    </m:sSubSup>
-                    <m:r>
-                      <a:rPr lang="pt-BR" i="1">
-                        <a:latin typeface="Cambria Math" panose="02040503050406030204" pitchFamily="18" charset="0"/>
-                      </a:rPr>
-                      <m:t>+</m:t>
-                    </m:r>
-                    <m:sSubSup>
-                      <m:sSubSupPr>
-                        <m:ctrlPr>
-                          <a:rPr lang="pt-BR" i="1">
-                            <a:latin typeface="Cambria Math" panose="02040503050406030204" pitchFamily="18" charset="0"/>
-                          </a:rPr>
-                        </m:ctrlPr>
-                      </m:sSubSupPr>
-                      <m:e>
-                        <m:r>
-                          <a:rPr lang="pt-BR" i="1">
-                            <a:latin typeface="Cambria Math" panose="02040503050406030204" pitchFamily="18" charset="0"/>
-                          </a:rPr>
-                          <m:t>𝑥</m:t>
-                        </m:r>
-                      </m:e>
-                      <m:sub>
-                        <m:r>
-                          <a:rPr lang="pt-BR" b="0" i="1" smtClean="0">
-                            <a:latin typeface="Cambria Math" panose="02040503050406030204" pitchFamily="18" charset="0"/>
-                          </a:rPr>
-                          <m:t>2</m:t>
-                        </m:r>
-                      </m:sub>
-                      <m:sup>
-                        <m:r>
-                          <a:rPr lang="pt-BR" i="1">
-                            <a:latin typeface="Cambria Math" panose="02040503050406030204" pitchFamily="18" charset="0"/>
-                          </a:rPr>
-                          <m:t>2</m:t>
-                        </m:r>
-                      </m:sup>
-                    </m:sSubSup>
-                  </m:oMath>
-                </a14:m>
+                  <a:t>atribuir arbitrariamente a uma das duas classes,</a:t>
+                </a:r>
+              </a:p>
+              <a:p>
+                <a:pPr lvl="1">
+                  <a:buFont typeface="Wingdings" panose="05000000000000000000" pitchFamily="2" charset="2"/>
+                  <a:buChar char="§"/>
+                </a:pPr>
                 <a:r>
                   <a:rPr lang="pt-BR" dirty="0"/>
-                  <a:t> (eq. de um círculo centrado na origem, onde </a:t>
-                </a:r>
-                <a14:m>
-                  <m:oMath xmlns:m="http://schemas.openxmlformats.org/officeDocument/2006/math">
-                    <m:sSub>
-                      <m:sSubPr>
-                        <m:ctrlPr>
-                          <a:rPr lang="pt-BR" i="1">
-                            <a:latin typeface="Cambria Math" panose="02040503050406030204" pitchFamily="18" charset="0"/>
-                          </a:rPr>
-                        </m:ctrlPr>
-                      </m:sSubPr>
-                      <m:e>
-                        <m:r>
-                          <a:rPr lang="pt-BR" i="1">
-                            <a:latin typeface="Cambria Math" panose="02040503050406030204" pitchFamily="18" charset="0"/>
-                          </a:rPr>
-                          <m:t>𝑎</m:t>
-                        </m:r>
-                      </m:e>
-                      <m:sub>
-                        <m:r>
-                          <a:rPr lang="pt-BR" i="1">
-                            <a:latin typeface="Cambria Math" panose="02040503050406030204" pitchFamily="18" charset="0"/>
-                          </a:rPr>
-                          <m:t>0</m:t>
-                        </m:r>
-                      </m:sub>
-                    </m:sSub>
-                    <m:r>
-                      <a:rPr lang="pt-BR" b="0" i="1" smtClean="0">
-                        <a:latin typeface="Cambria Math" panose="02040503050406030204" pitchFamily="18" charset="0"/>
-                      </a:rPr>
-                      <m:t>=−</m:t>
-                    </m:r>
-                    <m:sSup>
-                      <m:sSupPr>
-                        <m:ctrlPr>
-                          <a:rPr lang="pt-BR" b="0" i="1" smtClean="0">
-                            <a:latin typeface="Cambria Math" panose="02040503050406030204" pitchFamily="18" charset="0"/>
-                          </a:rPr>
-                        </m:ctrlPr>
-                      </m:sSupPr>
-                      <m:e>
-                        <m:r>
-                          <a:rPr lang="pt-BR" b="0" i="1" smtClean="0">
-                            <a:latin typeface="Cambria Math" panose="02040503050406030204" pitchFamily="18" charset="0"/>
-                          </a:rPr>
-                          <m:t>𝑟</m:t>
-                        </m:r>
-                      </m:e>
-                      <m:sup>
-                        <m:r>
-                          <a:rPr lang="pt-BR" b="0" i="1" smtClean="0">
-                            <a:latin typeface="Cambria Math" panose="02040503050406030204" pitchFamily="18" charset="0"/>
-                          </a:rPr>
-                          <m:t>2</m:t>
-                        </m:r>
-                      </m:sup>
-                    </m:sSup>
-                  </m:oMath>
-                </a14:m>
+                  <a:t>escolher a classe que possui maior número de exemplos </a:t>
+                </a:r>
+              </a:p>
+              <a:p>
+                <a:pPr lvl="1">
+                  <a:buFont typeface="Wingdings" panose="05000000000000000000" pitchFamily="2" charset="2"/>
+                  <a:buChar char="§"/>
+                </a:pPr>
                 <a:r>
                   <a:rPr lang="pt-BR" dirty="0"/>
-                  <a:t>).</a:t>
+                  <a:t>ou a mais frequente.</a:t>
+                </a:r>
+                <a:r>
+                  <a:rPr lang="pt-BR" sz="2400" dirty="0"/>
+                  <a:t> </a:t>
                 </a:r>
               </a:p>
             </p:txBody>
           </p:sp>
         </mc:Choice>
-        <mc:Fallback xmlns="">
+        <mc:Fallback>
           <p:sp>
             <p:nvSpPr>
               <p:cNvPr id="3" name="Espaço Reservado para Conteúdo 2">
@@ -12560,13 +11912,13 @@
             </p:nvSpPr>
             <p:spPr>
               <a:xfrm>
-                <a:off x="4648201" y="1825624"/>
-                <a:ext cx="7448550" cy="5032375"/>
+                <a:off x="4256314" y="1825624"/>
+                <a:ext cx="7840438" cy="5032375"/>
               </a:xfrm>
               <a:blipFill>
                 <a:blip r:embed="rId3"/>
                 <a:stretch>
-                  <a:fillRect l="-1474" t="-1937"/>
+                  <a:fillRect l="-1400" t="-1937" r="-1633"/>
                 </a:stretch>
               </a:blipFill>
             </p:spPr>
@@ -12585,87 +11937,6 @@
           </p:sp>
         </mc:Fallback>
       </mc:AlternateContent>
-      <p:sp>
-        <p:nvSpPr>
-          <p:cNvPr id="5" name="Rectangle 4">
-            <a:extLst>
-              <a:ext uri="{FF2B5EF4-FFF2-40B4-BE49-F238E27FC236}">
-                <a16:creationId xmlns:a16="http://schemas.microsoft.com/office/drawing/2014/main" id="{645F5C35-CA80-831D-CD26-407BBC3BE21C}"/>
-              </a:ext>
-            </a:extLst>
-          </p:cNvPr>
-          <p:cNvSpPr/>
-          <p:nvPr/>
-        </p:nvSpPr>
-        <p:spPr>
-          <a:xfrm>
-            <a:off x="10793207" y="3750882"/>
-            <a:ext cx="1219200" cy="769441"/>
-          </a:xfrm>
-          <a:prstGeom prst="rect">
-            <a:avLst/>
-          </a:prstGeom>
-        </p:spPr>
-        <p:txBody>
-          <a:bodyPr wrap="square">
-            <a:spAutoFit/>
-          </a:bodyPr>
-          <a:lstStyle/>
-          <a:p>
-            <a:pPr lvl="0" algn="ctr">
-              <a:defRPr/>
-            </a:pPr>
-            <a:r>
-              <a:rPr lang="pt-BR" sz="1100" dirty="0"/>
-              <a:t>empate entre as classes, pois a amostra está sobre a função.</a:t>
-            </a:r>
-          </a:p>
-        </p:txBody>
-      </p:sp>
-      <p:cxnSp>
-        <p:nvCxnSpPr>
-          <p:cNvPr id="6" name="Straight Arrow Connector 6">
-            <a:extLst>
-              <a:ext uri="{FF2B5EF4-FFF2-40B4-BE49-F238E27FC236}">
-                <a16:creationId xmlns:a16="http://schemas.microsoft.com/office/drawing/2014/main" id="{2EC6DCB0-48FC-CD2A-E18F-D7B490834350}"/>
-              </a:ext>
-            </a:extLst>
-          </p:cNvPr>
-          <p:cNvCxnSpPr>
-            <a:cxnSpLocks/>
-          </p:cNvCxnSpPr>
-          <p:nvPr/>
-        </p:nvCxnSpPr>
-        <p:spPr>
-          <a:xfrm flipH="1">
-            <a:off x="10747027" y="3902516"/>
-            <a:ext cx="177800" cy="104822"/>
-          </a:xfrm>
-          <a:prstGeom prst="straightConnector1">
-            <a:avLst/>
-          </a:prstGeom>
-          <a:ln>
-            <a:solidFill>
-              <a:srgbClr val="FF0000"/>
-            </a:solidFill>
-            <a:tailEnd type="triangle"/>
-          </a:ln>
-        </p:spPr>
-        <p:style>
-          <a:lnRef idx="1">
-            <a:schemeClr val="accent1"/>
-          </a:lnRef>
-          <a:fillRef idx="0">
-            <a:schemeClr val="accent1"/>
-          </a:fillRef>
-          <a:effectRef idx="0">
-            <a:schemeClr val="accent1"/>
-          </a:effectRef>
-          <a:fontRef idx="minor">
-            <a:schemeClr val="tx1"/>
-          </a:fontRef>
-        </p:style>
-      </p:cxnSp>
       <p:pic>
         <p:nvPicPr>
           <p:cNvPr id="16" name="Picture 3">
@@ -12693,7 +11964,7 @@
         </p:blipFill>
         <p:spPr>
           <a:xfrm>
-            <a:off x="1139670" y="2602756"/>
+            <a:off x="922562" y="2625467"/>
             <a:ext cx="2841780" cy="3263704"/>
           </a:xfrm>
           <a:prstGeom prst="rect">
@@ -12701,172 +11972,619 @@
           </a:prstGeom>
         </p:spPr>
       </p:pic>
+    </p:spTree>
+    <p:extLst>
+      <p:ext uri="{BB962C8B-B14F-4D97-AF65-F5344CB8AC3E}">
+        <p14:creationId xmlns:p14="http://schemas.microsoft.com/office/powerpoint/2010/main" val="1435435992"/>
+      </p:ext>
+    </p:extLst>
+  </p:cSld>
+  <p:clrMapOvr>
+    <a:masterClrMapping/>
+  </p:clrMapOvr>
+</p:sld>
+</file>
+
+<file path=ppt/slides/slide18.xml><?xml version="1.0" encoding="utf-8"?>
+<p:sld xmlns:a="http://schemas.openxmlformats.org/drawingml/2006/main" xmlns:r="http://schemas.openxmlformats.org/officeDocument/2006/relationships" xmlns:p="http://schemas.openxmlformats.org/presentationml/2006/main">
+  <p:cSld>
+    <p:spTree>
+      <p:nvGrpSpPr>
+        <p:cNvPr id="1" name="">
+          <a:extLst>
+            <a:ext uri="{FF2B5EF4-FFF2-40B4-BE49-F238E27FC236}">
+              <a16:creationId xmlns:a16="http://schemas.microsoft.com/office/drawing/2014/main" id="{681BC3B9-C36D-49B5-70A3-4BC587561B8D}"/>
+            </a:ext>
+          </a:extLst>
+        </p:cNvPr>
+        <p:cNvGrpSpPr/>
+        <p:nvPr/>
+      </p:nvGrpSpPr>
+      <p:grpSpPr>
+        <a:xfrm>
+          <a:off x="0" y="0"/>
+          <a:ext cx="0" cy="0"/>
+          <a:chOff x="0" y="0"/>
+          <a:chExt cx="0" cy="0"/>
+        </a:xfrm>
+      </p:grpSpPr>
       <p:sp>
         <p:nvSpPr>
-          <p:cNvPr id="4" name="Rectangle 4">
+          <p:cNvPr id="2" name="Título 1">
             <a:extLst>
               <a:ext uri="{FF2B5EF4-FFF2-40B4-BE49-F238E27FC236}">
-                <a16:creationId xmlns:a16="http://schemas.microsoft.com/office/drawing/2014/main" id="{6CF5207C-210F-5440-56B3-8F1EAD36FFAF}"/>
+                <a16:creationId xmlns:a16="http://schemas.microsoft.com/office/drawing/2014/main" id="{777D7044-033A-83CB-744E-0A0EF1C533B0}"/>
               </a:ext>
             </a:extLst>
           </p:cNvPr>
-          <p:cNvSpPr/>
+          <p:cNvSpPr>
+            <a:spLocks noGrp="1"/>
+          </p:cNvSpPr>
+          <p:nvPr>
+            <p:ph type="title"/>
+          </p:nvPr>
+        </p:nvSpPr>
+        <p:spPr/>
+        <p:txBody>
+          <a:bodyPr/>
+          <a:lstStyle/>
+          <a:p>
+            <a:r>
+              <a:rPr lang="pt-BR" dirty="0"/>
+              <a:t>Funções discriminantes</a:t>
+            </a:r>
+          </a:p>
+        </p:txBody>
+      </p:sp>
+      <mc:AlternateContent xmlns:mc="http://schemas.openxmlformats.org/markup-compatibility/2006">
+        <mc:Choice xmlns:a14="http://schemas.microsoft.com/office/drawing/2010/main" Requires="a14">
+          <p:sp>
+            <p:nvSpPr>
+              <p:cNvPr id="3" name="Espaço Reservado para Conteúdo 2">
+                <a:extLst>
+                  <a:ext uri="{FF2B5EF4-FFF2-40B4-BE49-F238E27FC236}">
+                    <a16:creationId xmlns:a16="http://schemas.microsoft.com/office/drawing/2014/main" id="{CE2D84F5-4801-80A5-C74A-52605D59919E}"/>
+                  </a:ext>
+                </a:extLst>
+              </p:cNvPr>
+              <p:cNvSpPr>
+                <a:spLocks noGrp="1"/>
+              </p:cNvSpPr>
+              <p:nvPr>
+                <p:ph idx="1"/>
+              </p:nvPr>
+            </p:nvSpPr>
+            <p:spPr>
+              <a:xfrm>
+                <a:off x="4757057" y="1825624"/>
+                <a:ext cx="7339694" cy="5032375"/>
+              </a:xfrm>
+            </p:spPr>
+            <p:txBody>
+              <a:bodyPr>
+                <a:normAutofit/>
+              </a:bodyPr>
+              <a:lstStyle/>
+              <a:p>
+                <a:r>
+                  <a:rPr lang="pt-BR" dirty="0"/>
+                  <a:t>No caso da classificação </a:t>
+                </a:r>
+                <a:r>
+                  <a:rPr lang="pt-BR" b="1" dirty="0"/>
+                  <a:t>multiclasses</a:t>
+                </a:r>
+                <a:r>
+                  <a:rPr lang="pt-BR" dirty="0"/>
+                  <a:t>, o </a:t>
+                </a:r>
+                <a:r>
+                  <a:rPr lang="pt-BR" b="1" dirty="0"/>
+                  <a:t>objetivo é encontrar os graus e os pesos das funções discriminantes (polinomiais) </a:t>
+                </a:r>
+                <a:r>
+                  <a:rPr lang="pt-BR" dirty="0"/>
+                  <a:t>de tal forma que que a classe atribuída a um exemplo de entrada,</a:t>
+                </a:r>
+                <a:r>
+                  <a:rPr lang="pt-BR" b="1" dirty="0"/>
+                  <a:t> </a:t>
+                </a:r>
+                <a14:m>
+                  <m:oMath xmlns:m="http://schemas.openxmlformats.org/officeDocument/2006/math">
+                    <m:r>
+                      <a:rPr lang="pt-BR" b="1" i="1">
+                        <a:latin typeface="Cambria Math" panose="02040503050406030204" pitchFamily="18" charset="0"/>
+                      </a:rPr>
+                      <m:t>𝒙</m:t>
+                    </m:r>
+                    <m:r>
+                      <a:rPr lang="pt-BR" i="1">
+                        <a:latin typeface="Cambria Math" panose="02040503050406030204" pitchFamily="18" charset="0"/>
+                      </a:rPr>
+                      <m:t>(</m:t>
+                    </m:r>
+                    <m:r>
+                      <a:rPr lang="pt-BR" i="1">
+                        <a:latin typeface="Cambria Math" panose="02040503050406030204" pitchFamily="18" charset="0"/>
+                      </a:rPr>
+                      <m:t>𝑖</m:t>
+                    </m:r>
+                    <m:r>
+                      <a:rPr lang="pt-BR" i="1">
+                        <a:latin typeface="Cambria Math" panose="02040503050406030204" pitchFamily="18" charset="0"/>
+                      </a:rPr>
+                      <m:t>)</m:t>
+                    </m:r>
+                  </m:oMath>
+                </a14:m>
+                <a:r>
+                  <a:rPr lang="pt-BR" dirty="0"/>
+                  <a:t>, seja:</a:t>
+                </a:r>
+              </a:p>
+              <a:p>
+                <a:pPr marL="0" indent="0">
+                  <a:buNone/>
+                </a:pPr>
+                <a14:m>
+                  <m:oMathPara xmlns:m="http://schemas.openxmlformats.org/officeDocument/2006/math">
+                    <m:oMathParaPr>
+                      <m:jc m:val="centerGroup"/>
+                    </m:oMathParaPr>
+                    <m:oMath xmlns:m="http://schemas.openxmlformats.org/officeDocument/2006/math">
+                      <m:sSub>
+                        <m:sSubPr>
+                          <m:ctrlPr>
+                            <a:rPr lang="pt-BR" i="1">
+                              <a:latin typeface="Cambria Math" panose="02040503050406030204" pitchFamily="18" charset="0"/>
+                            </a:rPr>
+                          </m:ctrlPr>
+                        </m:sSubPr>
+                        <m:e>
+                          <m:r>
+                            <a:rPr lang="pt-BR" i="1">
+                              <a:latin typeface="Cambria Math" panose="02040503050406030204" pitchFamily="18" charset="0"/>
+                            </a:rPr>
+                            <m:t>𝐶</m:t>
+                          </m:r>
+                        </m:e>
+                        <m:sub>
+                          <m:r>
+                            <a:rPr lang="pt-BR" i="1">
+                              <a:latin typeface="Cambria Math" panose="02040503050406030204" pitchFamily="18" charset="0"/>
+                            </a:rPr>
+                            <m:t>𝑞</m:t>
+                          </m:r>
+                        </m:sub>
+                      </m:sSub>
+                      <m:r>
+                        <a:rPr lang="pt-BR" i="1">
+                          <a:latin typeface="Cambria Math" panose="02040503050406030204" pitchFamily="18" charset="0"/>
+                        </a:rPr>
+                        <m:t>=</m:t>
+                      </m:r>
+                      <m:r>
+                        <m:rPr>
+                          <m:nor/>
+                        </m:rPr>
+                        <a:rPr lang="pt-BR" dirty="0"/>
+                        <m:t>arg</m:t>
+                      </m:r>
+                      <m:r>
+                        <m:rPr>
+                          <m:nor/>
+                        </m:rPr>
+                        <a:rPr lang="pt-BR" dirty="0"/>
+                        <m:t>. </m:t>
+                      </m:r>
+                      <m:func>
+                        <m:funcPr>
+                          <m:ctrlPr>
+                            <a:rPr lang="pt-BR" i="1">
+                              <a:latin typeface="Cambria Math" panose="02040503050406030204" pitchFamily="18" charset="0"/>
+                            </a:rPr>
+                          </m:ctrlPr>
+                        </m:funcPr>
+                        <m:fName>
+                          <m:limLow>
+                            <m:limLowPr>
+                              <m:ctrlPr>
+                                <a:rPr lang="pt-BR" i="1" smtClean="0">
+                                  <a:latin typeface="Cambria Math" panose="02040503050406030204" pitchFamily="18" charset="0"/>
+                                </a:rPr>
+                              </m:ctrlPr>
+                            </m:limLowPr>
+                            <m:e>
+                              <m:r>
+                                <m:rPr>
+                                  <m:sty m:val="p"/>
+                                </m:rPr>
+                                <a:rPr lang="pt-BR">
+                                  <a:latin typeface="Cambria Math" panose="02040503050406030204" pitchFamily="18" charset="0"/>
+                                </a:rPr>
+                                <m:t>max</m:t>
+                              </m:r>
+                            </m:e>
+                            <m:lim>
+                              <m:r>
+                                <a:rPr lang="pt-BR" i="1">
+                                  <a:latin typeface="Cambria Math" panose="02040503050406030204" pitchFamily="18" charset="0"/>
+                                </a:rPr>
+                                <m:t>𝑞</m:t>
+                              </m:r>
+                              <m:r>
+                                <a:rPr lang="pt-BR" b="0" i="1" smtClean="0">
+                                  <a:latin typeface="Cambria Math" panose="02040503050406030204" pitchFamily="18" charset="0"/>
+                                </a:rPr>
+                                <m:t> </m:t>
+                              </m:r>
+                              <m:r>
+                                <a:rPr lang="pt-BR" i="1" smtClean="0">
+                                  <a:latin typeface="Cambria Math" panose="02040503050406030204" pitchFamily="18" charset="0"/>
+                                  <a:ea typeface="Cambria Math" panose="02040503050406030204" pitchFamily="18" charset="0"/>
+                                </a:rPr>
+                                <m:t>∈</m:t>
+                              </m:r>
+                              <m:r>
+                                <a:rPr lang="pt-BR" b="0" i="1" smtClean="0">
+                                  <a:latin typeface="Cambria Math" panose="02040503050406030204" pitchFamily="18" charset="0"/>
+                                  <a:ea typeface="Cambria Math" panose="02040503050406030204" pitchFamily="18" charset="0"/>
+                                </a:rPr>
+                                <m:t> </m:t>
+                              </m:r>
+                              <m:d>
+                                <m:dPr>
+                                  <m:begChr m:val="{"/>
+                                  <m:endChr m:val="}"/>
+                                  <m:ctrlPr>
+                                    <a:rPr lang="pt-BR" i="1" smtClean="0">
+                                      <a:latin typeface="Cambria Math" panose="02040503050406030204" pitchFamily="18" charset="0"/>
+                                      <a:ea typeface="Cambria Math" panose="02040503050406030204" pitchFamily="18" charset="0"/>
+                                    </a:rPr>
+                                  </m:ctrlPr>
+                                </m:dPr>
+                                <m:e>
+                                  <m:r>
+                                    <a:rPr lang="pt-BR" b="0" i="1" smtClean="0">
+                                      <a:latin typeface="Cambria Math" panose="02040503050406030204" pitchFamily="18" charset="0"/>
+                                      <a:ea typeface="Cambria Math" panose="02040503050406030204" pitchFamily="18" charset="0"/>
+                                    </a:rPr>
+                                    <m:t>1,…,</m:t>
+                                  </m:r>
+                                  <m:r>
+                                    <a:rPr lang="pt-BR" b="0" i="1" smtClean="0">
+                                      <a:latin typeface="Cambria Math" panose="02040503050406030204" pitchFamily="18" charset="0"/>
+                                      <a:ea typeface="Cambria Math" panose="02040503050406030204" pitchFamily="18" charset="0"/>
+                                    </a:rPr>
+                                    <m:t>𝑄</m:t>
+                                  </m:r>
+                                </m:e>
+                              </m:d>
+                            </m:lim>
+                          </m:limLow>
+                        </m:fName>
+                        <m:e>
+                          <m:sSub>
+                            <m:sSubPr>
+                              <m:ctrlPr>
+                                <a:rPr lang="pt-BR" i="1">
+                                  <a:latin typeface="Cambria Math" panose="02040503050406030204" pitchFamily="18" charset="0"/>
+                                </a:rPr>
+                              </m:ctrlPr>
+                            </m:sSubPr>
+                            <m:e>
+                              <m:r>
+                                <a:rPr lang="pt-BR" i="1">
+                                  <a:latin typeface="Cambria Math" panose="02040503050406030204" pitchFamily="18" charset="0"/>
+                                </a:rPr>
+                                <m:t>𝑔</m:t>
+                              </m:r>
+                            </m:e>
+                            <m:sub>
+                              <m:r>
+                                <a:rPr lang="pt-BR" i="1">
+                                  <a:latin typeface="Cambria Math" panose="02040503050406030204" pitchFamily="18" charset="0"/>
+                                </a:rPr>
+                                <m:t>𝑞</m:t>
+                              </m:r>
+                            </m:sub>
+                          </m:sSub>
+                          <m:d>
+                            <m:dPr>
+                              <m:ctrlPr>
+                                <a:rPr lang="pt-BR" b="1" i="1">
+                                  <a:latin typeface="Cambria Math" panose="02040503050406030204" pitchFamily="18" charset="0"/>
+                                </a:rPr>
+                              </m:ctrlPr>
+                            </m:dPr>
+                            <m:e>
+                              <m:r>
+                                <a:rPr lang="pt-BR" b="1" i="1">
+                                  <a:latin typeface="Cambria Math" panose="02040503050406030204" pitchFamily="18" charset="0"/>
+                                </a:rPr>
+                                <m:t>𝒙</m:t>
+                              </m:r>
+                              <m:d>
+                                <m:dPr>
+                                  <m:ctrlPr>
+                                    <a:rPr lang="pt-BR" b="1" i="1">
+                                      <a:latin typeface="Cambria Math" panose="02040503050406030204" pitchFamily="18" charset="0"/>
+                                    </a:rPr>
+                                  </m:ctrlPr>
+                                </m:dPr>
+                                <m:e>
+                                  <m:r>
+                                    <a:rPr lang="pt-BR" i="1">
+                                      <a:latin typeface="Cambria Math" panose="02040503050406030204" pitchFamily="18" charset="0"/>
+                                    </a:rPr>
+                                    <m:t>𝑖</m:t>
+                                  </m:r>
+                                </m:e>
+                              </m:d>
+                            </m:e>
+                          </m:d>
+                        </m:e>
+                      </m:func>
+                      <m:r>
+                        <a:rPr lang="pt-BR" b="1" i="1" smtClean="0">
+                          <a:latin typeface="Cambria Math" panose="02040503050406030204" pitchFamily="18" charset="0"/>
+                        </a:rPr>
+                        <m:t>,</m:t>
+                      </m:r>
+                    </m:oMath>
+                  </m:oMathPara>
+                </a14:m>
+                <a:endParaRPr lang="pt-BR" dirty="0"/>
+              </a:p>
+              <a:p>
+                <a:pPr marL="0" indent="0">
+                  <a:buNone/>
+                </a:pPr>
+                <a:r>
+                  <a:rPr lang="pt-BR" dirty="0"/>
+                  <a:t>onde </a:t>
+                </a:r>
+                <a14:m>
+                  <m:oMath xmlns:m="http://schemas.openxmlformats.org/officeDocument/2006/math">
+                    <m:sSub>
+                      <m:sSubPr>
+                        <m:ctrlPr>
+                          <a:rPr lang="pt-BR" i="1">
+                            <a:latin typeface="Cambria Math" panose="02040503050406030204" pitchFamily="18" charset="0"/>
+                          </a:rPr>
+                        </m:ctrlPr>
+                      </m:sSubPr>
+                      <m:e>
+                        <m:r>
+                          <a:rPr lang="pt-BR" i="1">
+                            <a:latin typeface="Cambria Math" panose="02040503050406030204" pitchFamily="18" charset="0"/>
+                          </a:rPr>
+                          <m:t>𝑔</m:t>
+                        </m:r>
+                      </m:e>
+                      <m:sub>
+                        <m:r>
+                          <a:rPr lang="pt-BR" i="1">
+                            <a:latin typeface="Cambria Math" panose="02040503050406030204" pitchFamily="18" charset="0"/>
+                          </a:rPr>
+                          <m:t>𝑞</m:t>
+                        </m:r>
+                      </m:sub>
+                    </m:sSub>
+                    <m:d>
+                      <m:dPr>
+                        <m:ctrlPr>
+                          <a:rPr lang="pt-BR" b="1" i="1">
+                            <a:latin typeface="Cambria Math" panose="02040503050406030204" pitchFamily="18" charset="0"/>
+                          </a:rPr>
+                        </m:ctrlPr>
+                      </m:dPr>
+                      <m:e>
+                        <m:r>
+                          <a:rPr lang="pt-BR" b="1" i="1" smtClean="0">
+                            <a:latin typeface="Cambria Math" panose="02040503050406030204" pitchFamily="18" charset="0"/>
+                          </a:rPr>
+                          <m:t>.</m:t>
+                        </m:r>
+                      </m:e>
+                    </m:d>
+                  </m:oMath>
+                </a14:m>
+                <a:r>
+                  <a:rPr lang="pt-BR" dirty="0"/>
+                  <a:t> é a </a:t>
+                </a:r>
+                <a14:m>
+                  <m:oMath xmlns:m="http://schemas.openxmlformats.org/officeDocument/2006/math">
+                    <m:r>
+                      <a:rPr lang="pt-BR" i="1">
+                        <a:latin typeface="Cambria Math" panose="02040503050406030204" pitchFamily="18" charset="0"/>
+                      </a:rPr>
+                      <m:t>𝑞</m:t>
+                    </m:r>
+                  </m:oMath>
+                </a14:m>
+                <a:r>
+                  <a:rPr lang="pt-BR" dirty="0"/>
+                  <a:t>-</a:t>
+                </a:r>
+                <a:r>
+                  <a:rPr lang="pt-BR" dirty="0" err="1"/>
+                  <a:t>ésima</a:t>
+                </a:r>
+                <a:r>
+                  <a:rPr lang="pt-BR" dirty="0"/>
+                  <a:t> função discriminante.</a:t>
+                </a:r>
+              </a:p>
+              <a:p>
+                <a:pPr marL="0" indent="0">
+                  <a:buNone/>
+                </a:pPr>
+                <a:endParaRPr lang="pt-BR" sz="2700" dirty="0"/>
+              </a:p>
+            </p:txBody>
+          </p:sp>
+        </mc:Choice>
+        <mc:Fallback>
+          <p:sp>
+            <p:nvSpPr>
+              <p:cNvPr id="3" name="Espaço Reservado para Conteúdo 2">
+                <a:extLst>
+                  <a:ext uri="{FF2B5EF4-FFF2-40B4-BE49-F238E27FC236}">
+                    <a16:creationId xmlns:a16="http://schemas.microsoft.com/office/drawing/2014/main" id="{CE2D84F5-4801-80A5-C74A-52605D59919E}"/>
+                  </a:ext>
+                </a:extLst>
+              </p:cNvPr>
+              <p:cNvSpPr>
+                <a:spLocks noGrp="1" noRot="1" noChangeAspect="1" noMove="1" noResize="1" noEditPoints="1" noAdjustHandles="1" noChangeArrowheads="1" noChangeShapeType="1" noTextEdit="1"/>
+              </p:cNvSpPr>
+              <p:nvPr>
+                <p:ph idx="1"/>
+              </p:nvPr>
+            </p:nvSpPr>
+            <p:spPr>
+              <a:xfrm>
+                <a:off x="4757057" y="1825624"/>
+                <a:ext cx="7339694" cy="5032375"/>
+              </a:xfrm>
+              <a:blipFill>
+                <a:blip r:embed="rId3"/>
+                <a:stretch>
+                  <a:fillRect l="-1661" t="-1937" r="-1412"/>
+                </a:stretch>
+              </a:blipFill>
+            </p:spPr>
+            <p:txBody>
+              <a:bodyPr/>
+              <a:lstStyle/>
+              <a:p>
+                <a:r>
+                  <a:rPr lang="en-US">
+                    <a:noFill/>
+                  </a:rPr>
+                  <a:t> </a:t>
+                </a:r>
+              </a:p>
+            </p:txBody>
+          </p:sp>
+        </mc:Fallback>
+      </mc:AlternateContent>
+      <p:pic>
+        <p:nvPicPr>
+          <p:cNvPr id="10" name="Picture 9">
+            <a:extLst>
+              <a:ext uri="{FF2B5EF4-FFF2-40B4-BE49-F238E27FC236}">
+                <a16:creationId xmlns:a16="http://schemas.microsoft.com/office/drawing/2014/main" id="{8317135C-B768-15DB-007E-9233AE5ABB00}"/>
+              </a:ext>
+            </a:extLst>
+          </p:cNvPr>
+          <p:cNvPicPr>
+            <a:picLocks noChangeAspect="1"/>
+          </p:cNvPicPr>
           <p:nvPr/>
-        </p:nvSpPr>
+        </p:nvPicPr>
+        <p:blipFill rotWithShape="1">
+          <a:blip r:embed="rId4">
+            <a:extLst>
+              <a:ext uri="{28A0092B-C50C-407E-A947-70E740481C1C}">
+                <a14:useLocalDpi xmlns:a14="http://schemas.microsoft.com/office/drawing/2010/main" val="0"/>
+              </a:ext>
+            </a:extLst>
+          </a:blip>
+          <a:srcRect l="6486" t="3773" r="7252"/>
+          <a:stretch/>
+        </p:blipFill>
         <p:spPr>
           <a:xfrm>
-            <a:off x="10793207" y="2912025"/>
-            <a:ext cx="1219200" cy="261610"/>
+            <a:off x="426319" y="2760454"/>
+            <a:ext cx="3663479" cy="2802147"/>
           </a:xfrm>
           <a:prstGeom prst="rect">
             <a:avLst/>
           </a:prstGeom>
         </p:spPr>
-        <p:txBody>
-          <a:bodyPr wrap="square">
-            <a:spAutoFit/>
-          </a:bodyPr>
-          <a:lstStyle/>
-          <a:p>
-            <a:pPr lvl="0" algn="ctr">
-              <a:defRPr/>
-            </a:pPr>
-            <a:r>
-              <a:rPr lang="pt-BR" sz="1100" dirty="0"/>
-              <a:t>Acima da função.</a:t>
-            </a:r>
-          </a:p>
-        </p:txBody>
-      </p:sp>
-      <p:cxnSp>
-        <p:nvCxnSpPr>
-          <p:cNvPr id="7" name="Straight Arrow Connector 6">
+      </p:pic>
+    </p:spTree>
+    <p:extLst>
+      <p:ext uri="{BB962C8B-B14F-4D97-AF65-F5344CB8AC3E}">
+        <p14:creationId xmlns:p14="http://schemas.microsoft.com/office/powerpoint/2010/main" val="2200168807"/>
+      </p:ext>
+    </p:extLst>
+  </p:cSld>
+  <p:clrMapOvr>
+    <a:masterClrMapping/>
+  </p:clrMapOvr>
+</p:sld>
+</file>
+
+<file path=ppt/slides/slide19.xml><?xml version="1.0" encoding="utf-8"?>
+<p:sld xmlns:a="http://schemas.openxmlformats.org/drawingml/2006/main" xmlns:r="http://schemas.openxmlformats.org/officeDocument/2006/relationships" xmlns:p="http://schemas.openxmlformats.org/presentationml/2006/main">
+  <p:cSld>
+    <p:spTree>
+      <p:nvGrpSpPr>
+        <p:cNvPr id="1" name="">
+          <a:extLst>
+            <a:ext uri="{FF2B5EF4-FFF2-40B4-BE49-F238E27FC236}">
+              <a16:creationId xmlns:a16="http://schemas.microsoft.com/office/drawing/2014/main" id="{724E4B1E-477E-FFD4-7402-E83E77BF2EF4}"/>
+            </a:ext>
+          </a:extLst>
+        </p:cNvPr>
+        <p:cNvGrpSpPr/>
+        <p:nvPr/>
+      </p:nvGrpSpPr>
+      <p:grpSpPr>
+        <a:xfrm>
+          <a:off x="0" y="0"/>
+          <a:ext cx="0" cy="0"/>
+          <a:chOff x="0" y="0"/>
+          <a:chExt cx="0" cy="0"/>
+        </a:xfrm>
+      </p:grpSpPr>
+      <p:sp>
+        <p:nvSpPr>
+          <p:cNvPr id="3" name="Content Placeholder 2">
             <a:extLst>
               <a:ext uri="{FF2B5EF4-FFF2-40B4-BE49-F238E27FC236}">
-                <a16:creationId xmlns:a16="http://schemas.microsoft.com/office/drawing/2014/main" id="{F671CBD8-E5F7-29C9-3744-56F52318FE10}"/>
+                <a16:creationId xmlns:a16="http://schemas.microsoft.com/office/drawing/2014/main" id="{F8959B32-CD26-D2CA-3E0C-4F8F0704DEBE}"/>
               </a:ext>
             </a:extLst>
           </p:cNvPr>
-          <p:cNvCxnSpPr>
-            <a:cxnSpLocks/>
-          </p:cNvCxnSpPr>
-          <p:nvPr/>
-        </p:nvCxnSpPr>
-        <p:spPr>
-          <a:xfrm flipH="1">
-            <a:off x="10756264" y="3119682"/>
-            <a:ext cx="177800" cy="104822"/>
-          </a:xfrm>
-          <a:prstGeom prst="straightConnector1">
-            <a:avLst/>
-          </a:prstGeom>
-          <a:ln>
-            <a:solidFill>
-              <a:srgbClr val="FF0000"/>
-            </a:solidFill>
-            <a:tailEnd type="triangle"/>
-          </a:ln>
-        </p:spPr>
-        <p:style>
-          <a:lnRef idx="1">
-            <a:schemeClr val="accent1"/>
-          </a:lnRef>
-          <a:fillRef idx="0">
-            <a:schemeClr val="accent1"/>
-          </a:fillRef>
-          <a:effectRef idx="0">
-            <a:schemeClr val="accent1"/>
-          </a:effectRef>
-          <a:fontRef idx="minor">
-            <a:schemeClr val="tx1"/>
-          </a:fontRef>
-        </p:style>
-      </p:cxnSp>
-      <p:sp>
-        <p:nvSpPr>
-          <p:cNvPr id="8" name="Rectangle 4">
-            <a:extLst>
-              <a:ext uri="{FF2B5EF4-FFF2-40B4-BE49-F238E27FC236}">
-                <a16:creationId xmlns:a16="http://schemas.microsoft.com/office/drawing/2014/main" id="{B8052885-3BC2-70B9-B921-5DDB2DD151B4}"/>
-              </a:ext>
-            </a:extLst>
-          </p:cNvPr>
-          <p:cNvSpPr/>
-          <p:nvPr/>
+          <p:cNvSpPr>
+            <a:spLocks noGrp="1"/>
+          </p:cNvSpPr>
+          <p:nvPr>
+            <p:ph idx="1"/>
+          </p:nvPr>
         </p:nvSpPr>
         <p:spPr>
           <a:xfrm>
-            <a:off x="10774735" y="3365237"/>
-            <a:ext cx="1219200" cy="261610"/>
+            <a:off x="560614" y="2476103"/>
+            <a:ext cx="11070771" cy="1905794"/>
           </a:xfrm>
-          <a:prstGeom prst="rect">
-            <a:avLst/>
-          </a:prstGeom>
         </p:spPr>
         <p:txBody>
-          <a:bodyPr wrap="square">
-            <a:spAutoFit/>
+          <a:bodyPr>
+            <a:normAutofit/>
           </a:bodyPr>
           <a:lstStyle/>
           <a:p>
-            <a:pPr lvl="0" algn="ctr">
-              <a:defRPr/>
+            <a:pPr marL="0" indent="0" algn="ctr">
+              <a:buNone/>
             </a:pPr>
             <a:r>
-              <a:rPr lang="pt-BR" sz="1100" dirty="0"/>
-              <a:t>Abaixo da função.</a:t>
-            </a:r>
+              <a:rPr lang="pt-BR" sz="6000" i="1" dirty="0"/>
+              <a:t>Como encontramos o grau e pesos das funções discriminantes?</a:t>
+            </a:r>
+            <a:endParaRPr lang="en-US" sz="6000" i="1" dirty="0"/>
           </a:p>
         </p:txBody>
       </p:sp>
-      <p:cxnSp>
-        <p:nvCxnSpPr>
-          <p:cNvPr id="9" name="Straight Arrow Connector 6">
-            <a:extLst>
-              <a:ext uri="{FF2B5EF4-FFF2-40B4-BE49-F238E27FC236}">
-                <a16:creationId xmlns:a16="http://schemas.microsoft.com/office/drawing/2014/main" id="{D8DB8446-863A-7210-136E-FC97FB27A3F5}"/>
-              </a:ext>
-            </a:extLst>
-          </p:cNvPr>
-          <p:cNvCxnSpPr>
-            <a:cxnSpLocks/>
-          </p:cNvCxnSpPr>
-          <p:nvPr/>
-        </p:nvCxnSpPr>
-        <p:spPr>
-          <a:xfrm flipH="1">
-            <a:off x="10747027" y="3563510"/>
-            <a:ext cx="177800" cy="104822"/>
-          </a:xfrm>
-          <a:prstGeom prst="straightConnector1">
-            <a:avLst/>
-          </a:prstGeom>
-          <a:ln>
-            <a:solidFill>
-              <a:srgbClr val="FF0000"/>
-            </a:solidFill>
-            <a:tailEnd type="triangle"/>
-          </a:ln>
-        </p:spPr>
-        <p:style>
-          <a:lnRef idx="1">
-            <a:schemeClr val="accent1"/>
-          </a:lnRef>
-          <a:fillRef idx="0">
-            <a:schemeClr val="accent1"/>
-          </a:fillRef>
-          <a:effectRef idx="0">
-            <a:schemeClr val="accent1"/>
-          </a:effectRef>
-          <a:fontRef idx="minor">
-            <a:schemeClr val="tx1"/>
-          </a:fontRef>
-        </p:style>
-      </p:cxnSp>
     </p:spTree>
     <p:extLst>
       <p:ext uri="{BB962C8B-B14F-4D97-AF65-F5344CB8AC3E}">
-        <p14:creationId xmlns:p14="http://schemas.microsoft.com/office/powerpoint/2010/main" val="1435435992"/>
+        <p14:creationId xmlns:p14="http://schemas.microsoft.com/office/powerpoint/2010/main" val="561645333"/>
       </p:ext>
     </p:extLst>
   </p:cSld>
@@ -13723,7 +13441,31 @@
           <a:bodyPr/>
           <a:lstStyle/>
           <a:p>
-            <a:endParaRPr lang="en-US"/>
+            <a:r>
+              <a:rPr lang="pt-BR" dirty="0"/>
+              <a:t>Da mesma forma que com </a:t>
+            </a:r>
+            <a:r>
+              <a:rPr lang="pt-BR"/>
+              <a:t>a regressão, usando </a:t>
+            </a:r>
+            <a:r>
+              <a:rPr lang="pt-BR" dirty="0"/>
+              <a:t>o gradiente descendente e validação cruzada, como o </a:t>
+            </a:r>
+            <a:r>
+              <a:rPr lang="pt-BR" i="1" dirty="0"/>
+              <a:t>k-</a:t>
+            </a:r>
+            <a:r>
+              <a:rPr lang="pt-BR" i="1" dirty="0" err="1"/>
+              <a:t>fold</a:t>
+            </a:r>
+            <a:r>
+              <a:rPr lang="pt-BR" dirty="0"/>
+              <a:t>, por exemplo.</a:t>
+            </a:r>
+            <a:endParaRPr lang="en-US" dirty="0"/>
           </a:p>
         </p:txBody>
       </p:sp>

--- a/slides/C24_Classificação.pptx
+++ b/slides/C24_Classificação.pptx
@@ -5,10 +5,10 @@
     <p:sldMasterId id="2147483648" r:id="rId1"/>
   </p:sldMasterIdLst>
   <p:notesMasterIdLst>
-    <p:notesMasterId r:id="rId25"/>
+    <p:notesMasterId r:id="rId26"/>
   </p:notesMasterIdLst>
   <p:handoutMasterIdLst>
-    <p:handoutMasterId r:id="rId26"/>
+    <p:handoutMasterId r:id="rId27"/>
   </p:handoutMasterIdLst>
   <p:sldIdLst>
     <p:sldId id="256" r:id="rId2"/>
@@ -30,10 +30,11 @@
     <p:sldId id="362" r:id="rId18"/>
     <p:sldId id="363" r:id="rId19"/>
     <p:sldId id="364" r:id="rId20"/>
-    <p:sldId id="356" r:id="rId21"/>
-    <p:sldId id="352" r:id="rId22"/>
-    <p:sldId id="293" r:id="rId23"/>
-    <p:sldId id="306" r:id="rId24"/>
+    <p:sldId id="365" r:id="rId21"/>
+    <p:sldId id="356" r:id="rId22"/>
+    <p:sldId id="352" r:id="rId23"/>
+    <p:sldId id="293" r:id="rId24"/>
+    <p:sldId id="306" r:id="rId25"/>
   </p:sldIdLst>
   <p:sldSz cx="12192000" cy="6858000"/>
   <p:notesSz cx="7315200" cy="9601200"/>
@@ -363,7 +364,7 @@
           <a:p>
             <a:fld id="{F7E56D9B-79AD-444A-AFED-DEC23408F8B4}" type="slidenum">
               <a:rPr lang="nl-BE" smtClean="0"/>
-              <a:t>‹#›</a:t>
+              <a:t>‹nº›</a:t>
             </a:fld>
             <a:endParaRPr lang="nl-BE"/>
           </a:p>
@@ -620,7 +621,7 @@
           <a:p>
             <a:fld id="{6FC8D850-966F-45A6-8DE7-15B891E7D40D}" type="slidenum">
               <a:rPr lang="pt-BR" smtClean="0"/>
-              <a:t>‹#›</a:t>
+              <a:t>‹nº›</a:t>
             </a:fld>
             <a:endParaRPr lang="pt-BR"/>
           </a:p>
@@ -797,6 +798,10 @@
             </a:r>
           </a:p>
           <a:p>
+            <a:r>
+              <a:rPr lang="pt-BR" dirty="0"/>
+              <a:t/>
+            </a:r>
             <a:br>
               <a:rPr lang="pt-BR" dirty="0"/>
             </a:br>
@@ -911,6 +916,10 @@
             </a:r>
           </a:p>
           <a:p>
+            <a:r>
+              <a:rPr lang="pt-BR" dirty="0"/>
+              <a:t/>
+            </a:r>
             <a:br>
               <a:rPr lang="pt-BR" dirty="0"/>
             </a:br>
@@ -1046,6 +1055,10 @@
             </a:r>
           </a:p>
           <a:p>
+            <a:r>
+              <a:rPr lang="pt-BR" dirty="0"/>
+              <a:t/>
+            </a:r>
             <a:br>
               <a:rPr lang="pt-BR" dirty="0"/>
             </a:br>
@@ -1120,6 +1133,10 @@
               <a:rPr lang="pt-BR" b="1" dirty="0"/>
               <a:t>não particionam o espaço</a:t>
             </a:r>
+            <a:r>
+              <a:rPr lang="pt-BR" dirty="0"/>
+              <a:t/>
+            </a:r>
             <a:br>
               <a:rPr lang="pt-BR" dirty="0"/>
             </a:br>
@@ -1140,6 +1157,10 @@
             </a:r>
           </a:p>
           <a:p>
+            <a:r>
+              <a:rPr lang="pt-BR" dirty="0"/>
+              <a:t/>
+            </a:r>
             <a:br>
               <a:rPr lang="pt-BR" dirty="0"/>
             </a:br>
@@ -1225,6 +1246,10 @@
               <a:rPr lang="pt-BR" b="1" dirty="0"/>
               <a:t>sobrepor</a:t>
             </a:r>
+            <a:r>
+              <a:rPr lang="pt-BR" dirty="0"/>
+              <a:t/>
+            </a:r>
             <a:br>
               <a:rPr lang="pt-BR" dirty="0"/>
             </a:br>
@@ -1234,6 +1259,10 @@
             </a:r>
           </a:p>
           <a:p>
+            <a:r>
+              <a:rPr lang="pt-BR" dirty="0"/>
+              <a:t/>
+            </a:r>
             <a:br>
               <a:rPr lang="pt-BR" dirty="0"/>
             </a:br>
@@ -1268,6 +1297,10 @@
               <a:rPr lang="pt-BR" i="1" dirty="0"/>
               <a:t>particionado</a:t>
             </a:r>
+            <a:r>
+              <a:rPr lang="pt-BR" dirty="0"/>
+              <a:t/>
+            </a:r>
             <a:br>
               <a:rPr lang="pt-BR" dirty="0"/>
             </a:br>
@@ -1310,6 +1343,10 @@
             </a:r>
           </a:p>
           <a:p>
+            <a:r>
+              <a:rPr lang="pt-BR" dirty="0"/>
+              <a:t/>
+            </a:r>
             <a:br>
               <a:rPr lang="pt-BR" dirty="0"/>
             </a:br>
@@ -1382,6 +1419,10 @@
             </a:r>
           </a:p>
           <a:p>
+            <a:r>
+              <a:rPr lang="pt-BR" dirty="0"/>
+              <a:t/>
+            </a:r>
             <a:br>
               <a:rPr lang="pt-BR" dirty="0"/>
             </a:br>
@@ -1491,6 +1532,10 @@
             <a:endParaRPr lang="pt-BR" dirty="0"/>
           </a:p>
           <a:p>
+            <a:r>
+              <a:rPr lang="pt-BR" dirty="0"/>
+              <a:t/>
+            </a:r>
             <a:br>
               <a:rPr lang="pt-BR" dirty="0"/>
             </a:br>
@@ -1538,6 +1583,10 @@
             </a:r>
           </a:p>
           <a:p>
+            <a:r>
+              <a:rPr lang="pt-BR" dirty="0"/>
+              <a:t/>
+            </a:r>
             <a:br>
               <a:rPr lang="pt-BR" dirty="0"/>
             </a:br>
@@ -1855,7 +1904,7 @@
         <p:cNvPr id="1" name="">
           <a:extLst>
             <a:ext uri="{FF2B5EF4-FFF2-40B4-BE49-F238E27FC236}">
-              <a16:creationId xmlns:a16="http://schemas.microsoft.com/office/drawing/2014/main" id="{232DA5E1-00E0-2F8D-E426-C2BE1BC8766D}"/>
+              <a16:creationId xmlns:a16="http://schemas.microsoft.com/office/drawing/2014/main" xmlns="" id="{232DA5E1-00E0-2F8D-E426-C2BE1BC8766D}"/>
             </a:ext>
           </a:extLst>
         </p:cNvPr>
@@ -1875,7 +1924,7 @@
           <p:cNvPr id="2" name="Slide Image Placeholder 1">
             <a:extLst>
               <a:ext uri="{FF2B5EF4-FFF2-40B4-BE49-F238E27FC236}">
-                <a16:creationId xmlns:a16="http://schemas.microsoft.com/office/drawing/2014/main" id="{755444DB-79D2-76F0-537D-343DD7EF78F8}"/>
+                <a16:creationId xmlns:a16="http://schemas.microsoft.com/office/drawing/2014/main" xmlns="" id="{755444DB-79D2-76F0-537D-343DD7EF78F8}"/>
               </a:ext>
             </a:extLst>
           </p:cNvPr>
@@ -1893,7 +1942,7 @@
           <p:cNvPr id="3" name="Notes Placeholder 2">
             <a:extLst>
               <a:ext uri="{FF2B5EF4-FFF2-40B4-BE49-F238E27FC236}">
-                <a16:creationId xmlns:a16="http://schemas.microsoft.com/office/drawing/2014/main" id="{FA229730-5EFD-DF7F-FC23-84032A9E7498}"/>
+                <a16:creationId xmlns:a16="http://schemas.microsoft.com/office/drawing/2014/main" xmlns="" id="{FA229730-5EFD-DF7F-FC23-84032A9E7498}"/>
               </a:ext>
             </a:extLst>
           </p:cNvPr>
@@ -1918,7 +1967,7 @@
           <p:cNvPr id="4" name="Slide Number Placeholder 3">
             <a:extLst>
               <a:ext uri="{FF2B5EF4-FFF2-40B4-BE49-F238E27FC236}">
-                <a16:creationId xmlns:a16="http://schemas.microsoft.com/office/drawing/2014/main" id="{B47740AF-93D3-5439-F324-AEC42AF75759}"/>
+                <a16:creationId xmlns:a16="http://schemas.microsoft.com/office/drawing/2014/main" xmlns="" id="{B47740AF-93D3-5439-F324-AEC42AF75759}"/>
               </a:ext>
             </a:extLst>
           </p:cNvPr>
@@ -2477,7 +2526,7 @@
         <p:cNvPr id="1" name="">
           <a:extLst>
             <a:ext uri="{FF2B5EF4-FFF2-40B4-BE49-F238E27FC236}">
-              <a16:creationId xmlns:a16="http://schemas.microsoft.com/office/drawing/2014/main" id="{7A098F72-2922-82B3-5C99-E3BEF8098714}"/>
+              <a16:creationId xmlns:a16="http://schemas.microsoft.com/office/drawing/2014/main" xmlns="" id="{7A098F72-2922-82B3-5C99-E3BEF8098714}"/>
             </a:ext>
           </a:extLst>
         </p:cNvPr>
@@ -2497,7 +2546,7 @@
           <p:cNvPr id="2" name="Espaço Reservado para Imagem de Slide 1">
             <a:extLst>
               <a:ext uri="{FF2B5EF4-FFF2-40B4-BE49-F238E27FC236}">
-                <a16:creationId xmlns:a16="http://schemas.microsoft.com/office/drawing/2014/main" id="{B532C96A-22C4-D1DD-3FBA-62861D4BDF04}"/>
+                <a16:creationId xmlns:a16="http://schemas.microsoft.com/office/drawing/2014/main" xmlns="" id="{B532C96A-22C4-D1DD-3FBA-62861D4BDF04}"/>
               </a:ext>
             </a:extLst>
           </p:cNvPr>
@@ -2515,7 +2564,7 @@
           <p:cNvPr id="3" name="Espaço Reservado para Anotações 2">
             <a:extLst>
               <a:ext uri="{FF2B5EF4-FFF2-40B4-BE49-F238E27FC236}">
-                <a16:creationId xmlns:a16="http://schemas.microsoft.com/office/drawing/2014/main" id="{1B3956BA-58DA-02D3-A28D-2E027144F603}"/>
+                <a16:creationId xmlns:a16="http://schemas.microsoft.com/office/drawing/2014/main" xmlns="" id="{1B3956BA-58DA-02D3-A28D-2E027144F603}"/>
               </a:ext>
             </a:extLst>
           </p:cNvPr>
@@ -2566,7 +2615,7 @@
           <p:cNvPr id="4" name="Espaço Reservado para Número de Slide 3">
             <a:extLst>
               <a:ext uri="{FF2B5EF4-FFF2-40B4-BE49-F238E27FC236}">
-                <a16:creationId xmlns:a16="http://schemas.microsoft.com/office/drawing/2014/main" id="{FBF6E418-7A70-5EBA-2166-ABCAA4B4C523}"/>
+                <a16:creationId xmlns:a16="http://schemas.microsoft.com/office/drawing/2014/main" xmlns="" id="{FBF6E418-7A70-5EBA-2166-ABCAA4B4C523}"/>
               </a:ext>
             </a:extLst>
           </p:cNvPr>
@@ -2625,7 +2674,7 @@
           <p:cNvPr id="2" name="Título 1">
             <a:extLst>
               <a:ext uri="{FF2B5EF4-FFF2-40B4-BE49-F238E27FC236}">
-                <a16:creationId xmlns:a16="http://schemas.microsoft.com/office/drawing/2014/main" id="{1DB9B4FF-B06E-403C-A326-BDC64D8FF94E}"/>
+                <a16:creationId xmlns:a16="http://schemas.microsoft.com/office/drawing/2014/main" xmlns="" id="{1DB9B4FF-B06E-403C-A326-BDC64D8FF94E}"/>
               </a:ext>
             </a:extLst>
           </p:cNvPr>
@@ -2662,7 +2711,7 @@
           <p:cNvPr id="3" name="Subtítulo 2">
             <a:extLst>
               <a:ext uri="{FF2B5EF4-FFF2-40B4-BE49-F238E27FC236}">
-                <a16:creationId xmlns:a16="http://schemas.microsoft.com/office/drawing/2014/main" id="{247BDFCE-746E-45BF-A319-4733D58D1632}"/>
+                <a16:creationId xmlns:a16="http://schemas.microsoft.com/office/drawing/2014/main" xmlns="" id="{247BDFCE-746E-45BF-A319-4733D58D1632}"/>
               </a:ext>
             </a:extLst>
           </p:cNvPr>
@@ -2732,7 +2781,7 @@
           <p:cNvPr id="4" name="Espaço Reservado para Data 3">
             <a:extLst>
               <a:ext uri="{FF2B5EF4-FFF2-40B4-BE49-F238E27FC236}">
-                <a16:creationId xmlns:a16="http://schemas.microsoft.com/office/drawing/2014/main" id="{9EDE2778-5372-4104-B96D-968184DA8288}"/>
+                <a16:creationId xmlns:a16="http://schemas.microsoft.com/office/drawing/2014/main" xmlns="" id="{9EDE2778-5372-4104-B96D-968184DA8288}"/>
               </a:ext>
             </a:extLst>
           </p:cNvPr>
@@ -2761,7 +2810,7 @@
           <p:cNvPr id="5" name="Espaço Reservado para Rodapé 4">
             <a:extLst>
               <a:ext uri="{FF2B5EF4-FFF2-40B4-BE49-F238E27FC236}">
-                <a16:creationId xmlns:a16="http://schemas.microsoft.com/office/drawing/2014/main" id="{C1DD0F41-C861-4051-988D-3024A37A4B93}"/>
+                <a16:creationId xmlns:a16="http://schemas.microsoft.com/office/drawing/2014/main" xmlns="" id="{C1DD0F41-C861-4051-988D-3024A37A4B93}"/>
               </a:ext>
             </a:extLst>
           </p:cNvPr>
@@ -2786,7 +2835,7 @@
           <p:cNvPr id="6" name="Espaço Reservado para Número de Slide 5">
             <a:extLst>
               <a:ext uri="{FF2B5EF4-FFF2-40B4-BE49-F238E27FC236}">
-                <a16:creationId xmlns:a16="http://schemas.microsoft.com/office/drawing/2014/main" id="{07E5967E-D980-431A-A5DB-3F0C5030A81E}"/>
+                <a16:creationId xmlns:a16="http://schemas.microsoft.com/office/drawing/2014/main" xmlns="" id="{07E5967E-D980-431A-A5DB-3F0C5030A81E}"/>
               </a:ext>
             </a:extLst>
           </p:cNvPr>
@@ -2804,7 +2853,7 @@
           <a:p>
             <a:fld id="{1A7E88B7-70CE-4035-AE73-13FA6FB985D4}" type="slidenum">
               <a:rPr lang="pt-BR" smtClean="0"/>
-              <a:t>‹#›</a:t>
+              <a:t>‹nº›</a:t>
             </a:fld>
             <a:endParaRPr lang="pt-BR"/>
           </a:p>
@@ -2845,7 +2894,7 @@
           <p:cNvPr id="2" name="Título 1">
             <a:extLst>
               <a:ext uri="{FF2B5EF4-FFF2-40B4-BE49-F238E27FC236}">
-                <a16:creationId xmlns:a16="http://schemas.microsoft.com/office/drawing/2014/main" id="{9036C49F-3E68-4175-81BA-3C3FEE44308A}"/>
+                <a16:creationId xmlns:a16="http://schemas.microsoft.com/office/drawing/2014/main" xmlns="" id="{9036C49F-3E68-4175-81BA-3C3FEE44308A}"/>
               </a:ext>
             </a:extLst>
           </p:cNvPr>
@@ -2873,7 +2922,7 @@
           <p:cNvPr id="3" name="Espaço Reservado para Texto Vertical 2">
             <a:extLst>
               <a:ext uri="{FF2B5EF4-FFF2-40B4-BE49-F238E27FC236}">
-                <a16:creationId xmlns:a16="http://schemas.microsoft.com/office/drawing/2014/main" id="{426FA736-3DD3-4D4E-B57B-BBE1D8F7D424}"/>
+                <a16:creationId xmlns:a16="http://schemas.microsoft.com/office/drawing/2014/main" xmlns="" id="{426FA736-3DD3-4D4E-B57B-BBE1D8F7D424}"/>
               </a:ext>
             </a:extLst>
           </p:cNvPr>
@@ -2930,7 +2979,7 @@
           <p:cNvPr id="4" name="Espaço Reservado para Data 3">
             <a:extLst>
               <a:ext uri="{FF2B5EF4-FFF2-40B4-BE49-F238E27FC236}">
-                <a16:creationId xmlns:a16="http://schemas.microsoft.com/office/drawing/2014/main" id="{99E8855C-D8FD-48F6-B14E-861E0DE4D915}"/>
+                <a16:creationId xmlns:a16="http://schemas.microsoft.com/office/drawing/2014/main" xmlns="" id="{99E8855C-D8FD-48F6-B14E-861E0DE4D915}"/>
               </a:ext>
             </a:extLst>
           </p:cNvPr>
@@ -2959,7 +3008,7 @@
           <p:cNvPr id="5" name="Espaço Reservado para Rodapé 4">
             <a:extLst>
               <a:ext uri="{FF2B5EF4-FFF2-40B4-BE49-F238E27FC236}">
-                <a16:creationId xmlns:a16="http://schemas.microsoft.com/office/drawing/2014/main" id="{97C0BB88-2F21-42A5-ACFF-83DA47F2D340}"/>
+                <a16:creationId xmlns:a16="http://schemas.microsoft.com/office/drawing/2014/main" xmlns="" id="{97C0BB88-2F21-42A5-ACFF-83DA47F2D340}"/>
               </a:ext>
             </a:extLst>
           </p:cNvPr>
@@ -2984,7 +3033,7 @@
           <p:cNvPr id="6" name="Espaço Reservado para Número de Slide 5">
             <a:extLst>
               <a:ext uri="{FF2B5EF4-FFF2-40B4-BE49-F238E27FC236}">
-                <a16:creationId xmlns:a16="http://schemas.microsoft.com/office/drawing/2014/main" id="{6CB462B3-1F22-4C05-B4B8-7A279FB7D5E9}"/>
+                <a16:creationId xmlns:a16="http://schemas.microsoft.com/office/drawing/2014/main" xmlns="" id="{6CB462B3-1F22-4C05-B4B8-7A279FB7D5E9}"/>
               </a:ext>
             </a:extLst>
           </p:cNvPr>
@@ -3002,7 +3051,7 @@
           <a:p>
             <a:fld id="{1A7E88B7-70CE-4035-AE73-13FA6FB985D4}" type="slidenum">
               <a:rPr lang="pt-BR" smtClean="0"/>
-              <a:t>‹#›</a:t>
+              <a:t>‹nº›</a:t>
             </a:fld>
             <a:endParaRPr lang="pt-BR"/>
           </a:p>
@@ -3043,7 +3092,7 @@
           <p:cNvPr id="2" name="Título Vertical 1">
             <a:extLst>
               <a:ext uri="{FF2B5EF4-FFF2-40B4-BE49-F238E27FC236}">
-                <a16:creationId xmlns:a16="http://schemas.microsoft.com/office/drawing/2014/main" id="{EAEAB728-701C-4207-A9D5-23FF45C60502}"/>
+                <a16:creationId xmlns:a16="http://schemas.microsoft.com/office/drawing/2014/main" xmlns="" id="{EAEAB728-701C-4207-A9D5-23FF45C60502}"/>
               </a:ext>
             </a:extLst>
           </p:cNvPr>
@@ -3076,7 +3125,7 @@
           <p:cNvPr id="3" name="Espaço Reservado para Texto Vertical 2">
             <a:extLst>
               <a:ext uri="{FF2B5EF4-FFF2-40B4-BE49-F238E27FC236}">
-                <a16:creationId xmlns:a16="http://schemas.microsoft.com/office/drawing/2014/main" id="{BA8C8CCF-7823-480A-9A19-0F664DD17E3B}"/>
+                <a16:creationId xmlns:a16="http://schemas.microsoft.com/office/drawing/2014/main" xmlns="" id="{BA8C8CCF-7823-480A-9A19-0F664DD17E3B}"/>
               </a:ext>
             </a:extLst>
           </p:cNvPr>
@@ -3138,7 +3187,7 @@
           <p:cNvPr id="4" name="Espaço Reservado para Data 3">
             <a:extLst>
               <a:ext uri="{FF2B5EF4-FFF2-40B4-BE49-F238E27FC236}">
-                <a16:creationId xmlns:a16="http://schemas.microsoft.com/office/drawing/2014/main" id="{721D5734-7B1F-425D-942F-6EB73344027C}"/>
+                <a16:creationId xmlns:a16="http://schemas.microsoft.com/office/drawing/2014/main" xmlns="" id="{721D5734-7B1F-425D-942F-6EB73344027C}"/>
               </a:ext>
             </a:extLst>
           </p:cNvPr>
@@ -3167,7 +3216,7 @@
           <p:cNvPr id="5" name="Espaço Reservado para Rodapé 4">
             <a:extLst>
               <a:ext uri="{FF2B5EF4-FFF2-40B4-BE49-F238E27FC236}">
-                <a16:creationId xmlns:a16="http://schemas.microsoft.com/office/drawing/2014/main" id="{1E1AAEAC-F08D-45FE-89EC-B1B349A868C9}"/>
+                <a16:creationId xmlns:a16="http://schemas.microsoft.com/office/drawing/2014/main" xmlns="" id="{1E1AAEAC-F08D-45FE-89EC-B1B349A868C9}"/>
               </a:ext>
             </a:extLst>
           </p:cNvPr>
@@ -3192,7 +3241,7 @@
           <p:cNvPr id="6" name="Espaço Reservado para Número de Slide 5">
             <a:extLst>
               <a:ext uri="{FF2B5EF4-FFF2-40B4-BE49-F238E27FC236}">
-                <a16:creationId xmlns:a16="http://schemas.microsoft.com/office/drawing/2014/main" id="{BAA44493-9911-47B2-87A6-C2141A972BC8}"/>
+                <a16:creationId xmlns:a16="http://schemas.microsoft.com/office/drawing/2014/main" xmlns="" id="{BAA44493-9911-47B2-87A6-C2141A972BC8}"/>
               </a:ext>
             </a:extLst>
           </p:cNvPr>
@@ -3210,7 +3259,7 @@
           <a:p>
             <a:fld id="{1A7E88B7-70CE-4035-AE73-13FA6FB985D4}" type="slidenum">
               <a:rPr lang="pt-BR" smtClean="0"/>
-              <a:t>‹#›</a:t>
+              <a:t>‹nº›</a:t>
             </a:fld>
             <a:endParaRPr lang="pt-BR"/>
           </a:p>
@@ -3251,7 +3300,7 @@
           <p:cNvPr id="2" name="Título 1">
             <a:extLst>
               <a:ext uri="{FF2B5EF4-FFF2-40B4-BE49-F238E27FC236}">
-                <a16:creationId xmlns:a16="http://schemas.microsoft.com/office/drawing/2014/main" id="{71BD44A5-8F21-4626-A01D-48A1C874B1D5}"/>
+                <a16:creationId xmlns:a16="http://schemas.microsoft.com/office/drawing/2014/main" xmlns="" id="{71BD44A5-8F21-4626-A01D-48A1C874B1D5}"/>
               </a:ext>
             </a:extLst>
           </p:cNvPr>
@@ -3279,7 +3328,7 @@
           <p:cNvPr id="3" name="Espaço Reservado para Conteúdo 2">
             <a:extLst>
               <a:ext uri="{FF2B5EF4-FFF2-40B4-BE49-F238E27FC236}">
-                <a16:creationId xmlns:a16="http://schemas.microsoft.com/office/drawing/2014/main" id="{B79E8085-65A9-48AA-951D-71D978BFF4ED}"/>
+                <a16:creationId xmlns:a16="http://schemas.microsoft.com/office/drawing/2014/main" xmlns="" id="{B79E8085-65A9-48AA-951D-71D978BFF4ED}"/>
               </a:ext>
             </a:extLst>
           </p:cNvPr>
@@ -3336,7 +3385,7 @@
           <p:cNvPr id="4" name="Espaço Reservado para Data 3">
             <a:extLst>
               <a:ext uri="{FF2B5EF4-FFF2-40B4-BE49-F238E27FC236}">
-                <a16:creationId xmlns:a16="http://schemas.microsoft.com/office/drawing/2014/main" id="{F05BE1AF-51EA-425D-B188-DE7BD675009F}"/>
+                <a16:creationId xmlns:a16="http://schemas.microsoft.com/office/drawing/2014/main" xmlns="" id="{F05BE1AF-51EA-425D-B188-DE7BD675009F}"/>
               </a:ext>
             </a:extLst>
           </p:cNvPr>
@@ -3365,7 +3414,7 @@
           <p:cNvPr id="5" name="Espaço Reservado para Rodapé 4">
             <a:extLst>
               <a:ext uri="{FF2B5EF4-FFF2-40B4-BE49-F238E27FC236}">
-                <a16:creationId xmlns:a16="http://schemas.microsoft.com/office/drawing/2014/main" id="{121BE632-29CF-4CB9-B365-C9EF38F89BE6}"/>
+                <a16:creationId xmlns:a16="http://schemas.microsoft.com/office/drawing/2014/main" xmlns="" id="{121BE632-29CF-4CB9-B365-C9EF38F89BE6}"/>
               </a:ext>
             </a:extLst>
           </p:cNvPr>
@@ -3390,7 +3439,7 @@
           <p:cNvPr id="6" name="Espaço Reservado para Número de Slide 5">
             <a:extLst>
               <a:ext uri="{FF2B5EF4-FFF2-40B4-BE49-F238E27FC236}">
-                <a16:creationId xmlns:a16="http://schemas.microsoft.com/office/drawing/2014/main" id="{60CF3DD1-9AEC-4A57-B461-4E4DD86FAC18}"/>
+                <a16:creationId xmlns:a16="http://schemas.microsoft.com/office/drawing/2014/main" xmlns="" id="{60CF3DD1-9AEC-4A57-B461-4E4DD86FAC18}"/>
               </a:ext>
             </a:extLst>
           </p:cNvPr>
@@ -3408,7 +3457,7 @@
           <a:p>
             <a:fld id="{1A7E88B7-70CE-4035-AE73-13FA6FB985D4}" type="slidenum">
               <a:rPr lang="pt-BR" smtClean="0"/>
-              <a:t>‹#›</a:t>
+              <a:t>‹nº›</a:t>
             </a:fld>
             <a:endParaRPr lang="pt-BR"/>
           </a:p>
@@ -3449,7 +3498,7 @@
           <p:cNvPr id="2" name="Título 1">
             <a:extLst>
               <a:ext uri="{FF2B5EF4-FFF2-40B4-BE49-F238E27FC236}">
-                <a16:creationId xmlns:a16="http://schemas.microsoft.com/office/drawing/2014/main" id="{34AB2FF0-A4D7-4E28-991D-FF26140D5988}"/>
+                <a16:creationId xmlns:a16="http://schemas.microsoft.com/office/drawing/2014/main" xmlns="" id="{34AB2FF0-A4D7-4E28-991D-FF26140D5988}"/>
               </a:ext>
             </a:extLst>
           </p:cNvPr>
@@ -3486,7 +3535,7 @@
           <p:cNvPr id="3" name="Espaço Reservado para Texto 2">
             <a:extLst>
               <a:ext uri="{FF2B5EF4-FFF2-40B4-BE49-F238E27FC236}">
-                <a16:creationId xmlns:a16="http://schemas.microsoft.com/office/drawing/2014/main" id="{E2AC45B0-4145-40DB-8E61-105461170604}"/>
+                <a16:creationId xmlns:a16="http://schemas.microsoft.com/office/drawing/2014/main" xmlns="" id="{E2AC45B0-4145-40DB-8E61-105461170604}"/>
               </a:ext>
             </a:extLst>
           </p:cNvPr>
@@ -3611,7 +3660,7 @@
           <p:cNvPr id="4" name="Espaço Reservado para Data 3">
             <a:extLst>
               <a:ext uri="{FF2B5EF4-FFF2-40B4-BE49-F238E27FC236}">
-                <a16:creationId xmlns:a16="http://schemas.microsoft.com/office/drawing/2014/main" id="{50F1D3FB-740A-4EBA-A309-2CE71D12ECFB}"/>
+                <a16:creationId xmlns:a16="http://schemas.microsoft.com/office/drawing/2014/main" xmlns="" id="{50F1D3FB-740A-4EBA-A309-2CE71D12ECFB}"/>
               </a:ext>
             </a:extLst>
           </p:cNvPr>
@@ -3640,7 +3689,7 @@
           <p:cNvPr id="5" name="Espaço Reservado para Rodapé 4">
             <a:extLst>
               <a:ext uri="{FF2B5EF4-FFF2-40B4-BE49-F238E27FC236}">
-                <a16:creationId xmlns:a16="http://schemas.microsoft.com/office/drawing/2014/main" id="{BDCAB18F-8715-4465-A940-F9C193A2ACE9}"/>
+                <a16:creationId xmlns:a16="http://schemas.microsoft.com/office/drawing/2014/main" xmlns="" id="{BDCAB18F-8715-4465-A940-F9C193A2ACE9}"/>
               </a:ext>
             </a:extLst>
           </p:cNvPr>
@@ -3665,7 +3714,7 @@
           <p:cNvPr id="6" name="Espaço Reservado para Número de Slide 5">
             <a:extLst>
               <a:ext uri="{FF2B5EF4-FFF2-40B4-BE49-F238E27FC236}">
-                <a16:creationId xmlns:a16="http://schemas.microsoft.com/office/drawing/2014/main" id="{353466C6-8248-429F-8056-FF040BF509EB}"/>
+                <a16:creationId xmlns:a16="http://schemas.microsoft.com/office/drawing/2014/main" xmlns="" id="{353466C6-8248-429F-8056-FF040BF509EB}"/>
               </a:ext>
             </a:extLst>
           </p:cNvPr>
@@ -3683,7 +3732,7 @@
           <a:p>
             <a:fld id="{1A7E88B7-70CE-4035-AE73-13FA6FB985D4}" type="slidenum">
               <a:rPr lang="pt-BR" smtClean="0"/>
-              <a:t>‹#›</a:t>
+              <a:t>‹nº›</a:t>
             </a:fld>
             <a:endParaRPr lang="pt-BR"/>
           </a:p>
@@ -3724,7 +3773,7 @@
           <p:cNvPr id="2" name="Título 1">
             <a:extLst>
               <a:ext uri="{FF2B5EF4-FFF2-40B4-BE49-F238E27FC236}">
-                <a16:creationId xmlns:a16="http://schemas.microsoft.com/office/drawing/2014/main" id="{BC7BB9F0-F14B-4A91-B2B7-35BC47FE4DE7}"/>
+                <a16:creationId xmlns:a16="http://schemas.microsoft.com/office/drawing/2014/main" xmlns="" id="{BC7BB9F0-F14B-4A91-B2B7-35BC47FE4DE7}"/>
               </a:ext>
             </a:extLst>
           </p:cNvPr>
@@ -3752,7 +3801,7 @@
           <p:cNvPr id="3" name="Espaço Reservado para Conteúdo 2">
             <a:extLst>
               <a:ext uri="{FF2B5EF4-FFF2-40B4-BE49-F238E27FC236}">
-                <a16:creationId xmlns:a16="http://schemas.microsoft.com/office/drawing/2014/main" id="{EC1FC1C4-73DA-47A6-8496-B0B457F7D39A}"/>
+                <a16:creationId xmlns:a16="http://schemas.microsoft.com/office/drawing/2014/main" xmlns="" id="{EC1FC1C4-73DA-47A6-8496-B0B457F7D39A}"/>
               </a:ext>
             </a:extLst>
           </p:cNvPr>
@@ -3814,7 +3863,7 @@
           <p:cNvPr id="4" name="Espaço Reservado para Conteúdo 3">
             <a:extLst>
               <a:ext uri="{FF2B5EF4-FFF2-40B4-BE49-F238E27FC236}">
-                <a16:creationId xmlns:a16="http://schemas.microsoft.com/office/drawing/2014/main" id="{E92F06A8-A449-4D92-9912-76873E529B38}"/>
+                <a16:creationId xmlns:a16="http://schemas.microsoft.com/office/drawing/2014/main" xmlns="" id="{E92F06A8-A449-4D92-9912-76873E529B38}"/>
               </a:ext>
             </a:extLst>
           </p:cNvPr>
@@ -3876,7 +3925,7 @@
           <p:cNvPr id="5" name="Espaço Reservado para Data 4">
             <a:extLst>
               <a:ext uri="{FF2B5EF4-FFF2-40B4-BE49-F238E27FC236}">
-                <a16:creationId xmlns:a16="http://schemas.microsoft.com/office/drawing/2014/main" id="{938070A4-BC2F-4D55-BD8D-DEAF11BB9EE9}"/>
+                <a16:creationId xmlns:a16="http://schemas.microsoft.com/office/drawing/2014/main" xmlns="" id="{938070A4-BC2F-4D55-BD8D-DEAF11BB9EE9}"/>
               </a:ext>
             </a:extLst>
           </p:cNvPr>
@@ -3905,7 +3954,7 @@
           <p:cNvPr id="6" name="Espaço Reservado para Rodapé 5">
             <a:extLst>
               <a:ext uri="{FF2B5EF4-FFF2-40B4-BE49-F238E27FC236}">
-                <a16:creationId xmlns:a16="http://schemas.microsoft.com/office/drawing/2014/main" id="{45CC2DB8-844A-465F-BA9A-7734C80C7F43}"/>
+                <a16:creationId xmlns:a16="http://schemas.microsoft.com/office/drawing/2014/main" xmlns="" id="{45CC2DB8-844A-465F-BA9A-7734C80C7F43}"/>
               </a:ext>
             </a:extLst>
           </p:cNvPr>
@@ -3930,7 +3979,7 @@
           <p:cNvPr id="7" name="Espaço Reservado para Número de Slide 6">
             <a:extLst>
               <a:ext uri="{FF2B5EF4-FFF2-40B4-BE49-F238E27FC236}">
-                <a16:creationId xmlns:a16="http://schemas.microsoft.com/office/drawing/2014/main" id="{4CC606A8-097B-4040-94E0-CD8C88280D8F}"/>
+                <a16:creationId xmlns:a16="http://schemas.microsoft.com/office/drawing/2014/main" xmlns="" id="{4CC606A8-097B-4040-94E0-CD8C88280D8F}"/>
               </a:ext>
             </a:extLst>
           </p:cNvPr>
@@ -3948,7 +3997,7 @@
           <a:p>
             <a:fld id="{1A7E88B7-70CE-4035-AE73-13FA6FB985D4}" type="slidenum">
               <a:rPr lang="pt-BR" smtClean="0"/>
-              <a:t>‹#›</a:t>
+              <a:t>‹nº›</a:t>
             </a:fld>
             <a:endParaRPr lang="pt-BR"/>
           </a:p>
@@ -3989,7 +4038,7 @@
           <p:cNvPr id="2" name="Título 1">
             <a:extLst>
               <a:ext uri="{FF2B5EF4-FFF2-40B4-BE49-F238E27FC236}">
-                <a16:creationId xmlns:a16="http://schemas.microsoft.com/office/drawing/2014/main" id="{76D66686-0143-4CB6-8C09-BA326F1E7ACA}"/>
+                <a16:creationId xmlns:a16="http://schemas.microsoft.com/office/drawing/2014/main" xmlns="" id="{76D66686-0143-4CB6-8C09-BA326F1E7ACA}"/>
               </a:ext>
             </a:extLst>
           </p:cNvPr>
@@ -4022,7 +4071,7 @@
           <p:cNvPr id="3" name="Espaço Reservado para Texto 2">
             <a:extLst>
               <a:ext uri="{FF2B5EF4-FFF2-40B4-BE49-F238E27FC236}">
-                <a16:creationId xmlns:a16="http://schemas.microsoft.com/office/drawing/2014/main" id="{0227AB85-F59E-4BCE-B846-4FA0992C2F23}"/>
+                <a16:creationId xmlns:a16="http://schemas.microsoft.com/office/drawing/2014/main" xmlns="" id="{0227AB85-F59E-4BCE-B846-4FA0992C2F23}"/>
               </a:ext>
             </a:extLst>
           </p:cNvPr>
@@ -4093,7 +4142,7 @@
           <p:cNvPr id="4" name="Espaço Reservado para Conteúdo 3">
             <a:extLst>
               <a:ext uri="{FF2B5EF4-FFF2-40B4-BE49-F238E27FC236}">
-                <a16:creationId xmlns:a16="http://schemas.microsoft.com/office/drawing/2014/main" id="{3373456C-7319-4D0A-827D-D29F6B083F5D}"/>
+                <a16:creationId xmlns:a16="http://schemas.microsoft.com/office/drawing/2014/main" xmlns="" id="{3373456C-7319-4D0A-827D-D29F6B083F5D}"/>
               </a:ext>
             </a:extLst>
           </p:cNvPr>
@@ -4155,7 +4204,7 @@
           <p:cNvPr id="5" name="Espaço Reservado para Texto 4">
             <a:extLst>
               <a:ext uri="{FF2B5EF4-FFF2-40B4-BE49-F238E27FC236}">
-                <a16:creationId xmlns:a16="http://schemas.microsoft.com/office/drawing/2014/main" id="{4CD109D0-2E83-4262-8029-A871CEC47406}"/>
+                <a16:creationId xmlns:a16="http://schemas.microsoft.com/office/drawing/2014/main" xmlns="" id="{4CD109D0-2E83-4262-8029-A871CEC47406}"/>
               </a:ext>
             </a:extLst>
           </p:cNvPr>
@@ -4226,7 +4275,7 @@
           <p:cNvPr id="6" name="Espaço Reservado para Conteúdo 5">
             <a:extLst>
               <a:ext uri="{FF2B5EF4-FFF2-40B4-BE49-F238E27FC236}">
-                <a16:creationId xmlns:a16="http://schemas.microsoft.com/office/drawing/2014/main" id="{AD706E3A-CFBB-4A6C-A65F-D0360A9E74FE}"/>
+                <a16:creationId xmlns:a16="http://schemas.microsoft.com/office/drawing/2014/main" xmlns="" id="{AD706E3A-CFBB-4A6C-A65F-D0360A9E74FE}"/>
               </a:ext>
             </a:extLst>
           </p:cNvPr>
@@ -4288,7 +4337,7 @@
           <p:cNvPr id="7" name="Espaço Reservado para Data 6">
             <a:extLst>
               <a:ext uri="{FF2B5EF4-FFF2-40B4-BE49-F238E27FC236}">
-                <a16:creationId xmlns:a16="http://schemas.microsoft.com/office/drawing/2014/main" id="{4172C0E5-5AF0-4805-BB51-443733CD2BD5}"/>
+                <a16:creationId xmlns:a16="http://schemas.microsoft.com/office/drawing/2014/main" xmlns="" id="{4172C0E5-5AF0-4805-BB51-443733CD2BD5}"/>
               </a:ext>
             </a:extLst>
           </p:cNvPr>
@@ -4317,7 +4366,7 @@
           <p:cNvPr id="8" name="Espaço Reservado para Rodapé 7">
             <a:extLst>
               <a:ext uri="{FF2B5EF4-FFF2-40B4-BE49-F238E27FC236}">
-                <a16:creationId xmlns:a16="http://schemas.microsoft.com/office/drawing/2014/main" id="{0E801648-156F-497E-99CF-797DF48051E1}"/>
+                <a16:creationId xmlns:a16="http://schemas.microsoft.com/office/drawing/2014/main" xmlns="" id="{0E801648-156F-497E-99CF-797DF48051E1}"/>
               </a:ext>
             </a:extLst>
           </p:cNvPr>
@@ -4342,7 +4391,7 @@
           <p:cNvPr id="9" name="Espaço Reservado para Número de Slide 8">
             <a:extLst>
               <a:ext uri="{FF2B5EF4-FFF2-40B4-BE49-F238E27FC236}">
-                <a16:creationId xmlns:a16="http://schemas.microsoft.com/office/drawing/2014/main" id="{EEE23D32-80E7-4796-A137-66BF842E4B53}"/>
+                <a16:creationId xmlns:a16="http://schemas.microsoft.com/office/drawing/2014/main" xmlns="" id="{EEE23D32-80E7-4796-A137-66BF842E4B53}"/>
               </a:ext>
             </a:extLst>
           </p:cNvPr>
@@ -4360,7 +4409,7 @@
           <a:p>
             <a:fld id="{1A7E88B7-70CE-4035-AE73-13FA6FB985D4}" type="slidenum">
               <a:rPr lang="pt-BR" smtClean="0"/>
-              <a:t>‹#›</a:t>
+              <a:t>‹nº›</a:t>
             </a:fld>
             <a:endParaRPr lang="pt-BR"/>
           </a:p>
@@ -4401,7 +4450,7 @@
           <p:cNvPr id="2" name="Título 1">
             <a:extLst>
               <a:ext uri="{FF2B5EF4-FFF2-40B4-BE49-F238E27FC236}">
-                <a16:creationId xmlns:a16="http://schemas.microsoft.com/office/drawing/2014/main" id="{2BCE2379-C78F-47E1-8CFC-B846E7AF148D}"/>
+                <a16:creationId xmlns:a16="http://schemas.microsoft.com/office/drawing/2014/main" xmlns="" id="{2BCE2379-C78F-47E1-8CFC-B846E7AF148D}"/>
               </a:ext>
             </a:extLst>
           </p:cNvPr>
@@ -4429,7 +4478,7 @@
           <p:cNvPr id="3" name="Espaço Reservado para Data 2">
             <a:extLst>
               <a:ext uri="{FF2B5EF4-FFF2-40B4-BE49-F238E27FC236}">
-                <a16:creationId xmlns:a16="http://schemas.microsoft.com/office/drawing/2014/main" id="{342600A9-7F92-4E22-9D94-E4717252A817}"/>
+                <a16:creationId xmlns:a16="http://schemas.microsoft.com/office/drawing/2014/main" xmlns="" id="{342600A9-7F92-4E22-9D94-E4717252A817}"/>
               </a:ext>
             </a:extLst>
           </p:cNvPr>
@@ -4458,7 +4507,7 @@
           <p:cNvPr id="4" name="Espaço Reservado para Rodapé 3">
             <a:extLst>
               <a:ext uri="{FF2B5EF4-FFF2-40B4-BE49-F238E27FC236}">
-                <a16:creationId xmlns:a16="http://schemas.microsoft.com/office/drawing/2014/main" id="{192E6BED-F546-40CC-A2DF-99CBA853654E}"/>
+                <a16:creationId xmlns:a16="http://schemas.microsoft.com/office/drawing/2014/main" xmlns="" id="{192E6BED-F546-40CC-A2DF-99CBA853654E}"/>
               </a:ext>
             </a:extLst>
           </p:cNvPr>
@@ -4483,7 +4532,7 @@
           <p:cNvPr id="5" name="Espaço Reservado para Número de Slide 4">
             <a:extLst>
               <a:ext uri="{FF2B5EF4-FFF2-40B4-BE49-F238E27FC236}">
-                <a16:creationId xmlns:a16="http://schemas.microsoft.com/office/drawing/2014/main" id="{6091CC40-A8C4-4063-80EB-CC5099621678}"/>
+                <a16:creationId xmlns:a16="http://schemas.microsoft.com/office/drawing/2014/main" xmlns="" id="{6091CC40-A8C4-4063-80EB-CC5099621678}"/>
               </a:ext>
             </a:extLst>
           </p:cNvPr>
@@ -4501,7 +4550,7 @@
           <a:p>
             <a:fld id="{1A7E88B7-70CE-4035-AE73-13FA6FB985D4}" type="slidenum">
               <a:rPr lang="pt-BR" smtClean="0"/>
-              <a:t>‹#›</a:t>
+              <a:t>‹nº›</a:t>
             </a:fld>
             <a:endParaRPr lang="pt-BR"/>
           </a:p>
@@ -4542,7 +4591,7 @@
           <p:cNvPr id="2" name="Espaço Reservado para Data 1">
             <a:extLst>
               <a:ext uri="{FF2B5EF4-FFF2-40B4-BE49-F238E27FC236}">
-                <a16:creationId xmlns:a16="http://schemas.microsoft.com/office/drawing/2014/main" id="{DD19515C-212C-4EAE-84A3-8FF4BC844F1B}"/>
+                <a16:creationId xmlns:a16="http://schemas.microsoft.com/office/drawing/2014/main" xmlns="" id="{DD19515C-212C-4EAE-84A3-8FF4BC844F1B}"/>
               </a:ext>
             </a:extLst>
           </p:cNvPr>
@@ -4571,7 +4620,7 @@
           <p:cNvPr id="3" name="Espaço Reservado para Rodapé 2">
             <a:extLst>
               <a:ext uri="{FF2B5EF4-FFF2-40B4-BE49-F238E27FC236}">
-                <a16:creationId xmlns:a16="http://schemas.microsoft.com/office/drawing/2014/main" id="{94D3D120-B3E8-4C96-861D-7A4F12F49B3A}"/>
+                <a16:creationId xmlns:a16="http://schemas.microsoft.com/office/drawing/2014/main" xmlns="" id="{94D3D120-B3E8-4C96-861D-7A4F12F49B3A}"/>
               </a:ext>
             </a:extLst>
           </p:cNvPr>
@@ -4596,7 +4645,7 @@
           <p:cNvPr id="4" name="Espaço Reservado para Número de Slide 3">
             <a:extLst>
               <a:ext uri="{FF2B5EF4-FFF2-40B4-BE49-F238E27FC236}">
-                <a16:creationId xmlns:a16="http://schemas.microsoft.com/office/drawing/2014/main" id="{42E49B68-FA1B-468B-9F17-D5C09243D454}"/>
+                <a16:creationId xmlns:a16="http://schemas.microsoft.com/office/drawing/2014/main" xmlns="" id="{42E49B68-FA1B-468B-9F17-D5C09243D454}"/>
               </a:ext>
             </a:extLst>
           </p:cNvPr>
@@ -4614,7 +4663,7 @@
           <a:p>
             <a:fld id="{1A7E88B7-70CE-4035-AE73-13FA6FB985D4}" type="slidenum">
               <a:rPr lang="pt-BR" smtClean="0"/>
-              <a:t>‹#›</a:t>
+              <a:t>‹nº›</a:t>
             </a:fld>
             <a:endParaRPr lang="pt-BR"/>
           </a:p>
@@ -4655,7 +4704,7 @@
           <p:cNvPr id="2" name="Título 1">
             <a:extLst>
               <a:ext uri="{FF2B5EF4-FFF2-40B4-BE49-F238E27FC236}">
-                <a16:creationId xmlns:a16="http://schemas.microsoft.com/office/drawing/2014/main" id="{1C17BCBE-A897-4319-85EC-D87909C24980}"/>
+                <a16:creationId xmlns:a16="http://schemas.microsoft.com/office/drawing/2014/main" xmlns="" id="{1C17BCBE-A897-4319-85EC-D87909C24980}"/>
               </a:ext>
             </a:extLst>
           </p:cNvPr>
@@ -4692,7 +4741,7 @@
           <p:cNvPr id="3" name="Espaço Reservado para Conteúdo 2">
             <a:extLst>
               <a:ext uri="{FF2B5EF4-FFF2-40B4-BE49-F238E27FC236}">
-                <a16:creationId xmlns:a16="http://schemas.microsoft.com/office/drawing/2014/main" id="{4226F885-0204-4913-868B-4B8B82576F17}"/>
+                <a16:creationId xmlns:a16="http://schemas.microsoft.com/office/drawing/2014/main" xmlns="" id="{4226F885-0204-4913-868B-4B8B82576F17}"/>
               </a:ext>
             </a:extLst>
           </p:cNvPr>
@@ -4782,7 +4831,7 @@
           <p:cNvPr id="4" name="Espaço Reservado para Texto 3">
             <a:extLst>
               <a:ext uri="{FF2B5EF4-FFF2-40B4-BE49-F238E27FC236}">
-                <a16:creationId xmlns:a16="http://schemas.microsoft.com/office/drawing/2014/main" id="{00F9F784-A858-441B-8AB5-697098141751}"/>
+                <a16:creationId xmlns:a16="http://schemas.microsoft.com/office/drawing/2014/main" xmlns="" id="{00F9F784-A858-441B-8AB5-697098141751}"/>
               </a:ext>
             </a:extLst>
           </p:cNvPr>
@@ -4853,7 +4902,7 @@
           <p:cNvPr id="5" name="Espaço Reservado para Data 4">
             <a:extLst>
               <a:ext uri="{FF2B5EF4-FFF2-40B4-BE49-F238E27FC236}">
-                <a16:creationId xmlns:a16="http://schemas.microsoft.com/office/drawing/2014/main" id="{A4DC363A-5000-472E-8B17-02E7DCB8840A}"/>
+                <a16:creationId xmlns:a16="http://schemas.microsoft.com/office/drawing/2014/main" xmlns="" id="{A4DC363A-5000-472E-8B17-02E7DCB8840A}"/>
               </a:ext>
             </a:extLst>
           </p:cNvPr>
@@ -4882,7 +4931,7 @@
           <p:cNvPr id="6" name="Espaço Reservado para Rodapé 5">
             <a:extLst>
               <a:ext uri="{FF2B5EF4-FFF2-40B4-BE49-F238E27FC236}">
-                <a16:creationId xmlns:a16="http://schemas.microsoft.com/office/drawing/2014/main" id="{5548425D-2C21-4C56-BAD4-662978775C28}"/>
+                <a16:creationId xmlns:a16="http://schemas.microsoft.com/office/drawing/2014/main" xmlns="" id="{5548425D-2C21-4C56-BAD4-662978775C28}"/>
               </a:ext>
             </a:extLst>
           </p:cNvPr>
@@ -4907,7 +4956,7 @@
           <p:cNvPr id="7" name="Espaço Reservado para Número de Slide 6">
             <a:extLst>
               <a:ext uri="{FF2B5EF4-FFF2-40B4-BE49-F238E27FC236}">
-                <a16:creationId xmlns:a16="http://schemas.microsoft.com/office/drawing/2014/main" id="{C63E9726-E64C-42B2-AE8A-8C235A956B48}"/>
+                <a16:creationId xmlns:a16="http://schemas.microsoft.com/office/drawing/2014/main" xmlns="" id="{C63E9726-E64C-42B2-AE8A-8C235A956B48}"/>
               </a:ext>
             </a:extLst>
           </p:cNvPr>
@@ -4925,7 +4974,7 @@
           <a:p>
             <a:fld id="{1A7E88B7-70CE-4035-AE73-13FA6FB985D4}" type="slidenum">
               <a:rPr lang="pt-BR" smtClean="0"/>
-              <a:t>‹#›</a:t>
+              <a:t>‹nº›</a:t>
             </a:fld>
             <a:endParaRPr lang="pt-BR"/>
           </a:p>
@@ -4966,7 +5015,7 @@
           <p:cNvPr id="2" name="Título 1">
             <a:extLst>
               <a:ext uri="{FF2B5EF4-FFF2-40B4-BE49-F238E27FC236}">
-                <a16:creationId xmlns:a16="http://schemas.microsoft.com/office/drawing/2014/main" id="{11086A78-3E74-450C-96A6-CA8AC37AF772}"/>
+                <a16:creationId xmlns:a16="http://schemas.microsoft.com/office/drawing/2014/main" xmlns="" id="{11086A78-3E74-450C-96A6-CA8AC37AF772}"/>
               </a:ext>
             </a:extLst>
           </p:cNvPr>
@@ -5003,7 +5052,7 @@
           <p:cNvPr id="3" name="Espaço Reservado para Imagem 2">
             <a:extLst>
               <a:ext uri="{FF2B5EF4-FFF2-40B4-BE49-F238E27FC236}">
-                <a16:creationId xmlns:a16="http://schemas.microsoft.com/office/drawing/2014/main" id="{5F5B7312-975A-4DBC-9B2F-3652ADA006FD}"/>
+                <a16:creationId xmlns:a16="http://schemas.microsoft.com/office/drawing/2014/main" xmlns="" id="{5F5B7312-975A-4DBC-9B2F-3652ADA006FD}"/>
               </a:ext>
             </a:extLst>
           </p:cNvPr>
@@ -5070,7 +5119,7 @@
           <p:cNvPr id="4" name="Espaço Reservado para Texto 3">
             <a:extLst>
               <a:ext uri="{FF2B5EF4-FFF2-40B4-BE49-F238E27FC236}">
-                <a16:creationId xmlns:a16="http://schemas.microsoft.com/office/drawing/2014/main" id="{AAF805F5-1DFF-41C6-944C-7D79FE0D0963}"/>
+                <a16:creationId xmlns:a16="http://schemas.microsoft.com/office/drawing/2014/main" xmlns="" id="{AAF805F5-1DFF-41C6-944C-7D79FE0D0963}"/>
               </a:ext>
             </a:extLst>
           </p:cNvPr>
@@ -5141,7 +5190,7 @@
           <p:cNvPr id="5" name="Espaço Reservado para Data 4">
             <a:extLst>
               <a:ext uri="{FF2B5EF4-FFF2-40B4-BE49-F238E27FC236}">
-                <a16:creationId xmlns:a16="http://schemas.microsoft.com/office/drawing/2014/main" id="{02113D81-8665-4516-BD81-C6A1F254EECD}"/>
+                <a16:creationId xmlns:a16="http://schemas.microsoft.com/office/drawing/2014/main" xmlns="" id="{02113D81-8665-4516-BD81-C6A1F254EECD}"/>
               </a:ext>
             </a:extLst>
           </p:cNvPr>
@@ -5170,7 +5219,7 @@
           <p:cNvPr id="6" name="Espaço Reservado para Rodapé 5">
             <a:extLst>
               <a:ext uri="{FF2B5EF4-FFF2-40B4-BE49-F238E27FC236}">
-                <a16:creationId xmlns:a16="http://schemas.microsoft.com/office/drawing/2014/main" id="{2B00C88B-FF32-40AA-A187-727D96FD7862}"/>
+                <a16:creationId xmlns:a16="http://schemas.microsoft.com/office/drawing/2014/main" xmlns="" id="{2B00C88B-FF32-40AA-A187-727D96FD7862}"/>
               </a:ext>
             </a:extLst>
           </p:cNvPr>
@@ -5195,7 +5244,7 @@
           <p:cNvPr id="7" name="Espaço Reservado para Número de Slide 6">
             <a:extLst>
               <a:ext uri="{FF2B5EF4-FFF2-40B4-BE49-F238E27FC236}">
-                <a16:creationId xmlns:a16="http://schemas.microsoft.com/office/drawing/2014/main" id="{A04D1A2D-69F7-4B8F-A730-BC26DC340BA6}"/>
+                <a16:creationId xmlns:a16="http://schemas.microsoft.com/office/drawing/2014/main" xmlns="" id="{A04D1A2D-69F7-4B8F-A730-BC26DC340BA6}"/>
               </a:ext>
             </a:extLst>
           </p:cNvPr>
@@ -5213,7 +5262,7 @@
           <a:p>
             <a:fld id="{1A7E88B7-70CE-4035-AE73-13FA6FB985D4}" type="slidenum">
               <a:rPr lang="pt-BR" smtClean="0"/>
-              <a:t>‹#›</a:t>
+              <a:t>‹nº›</a:t>
             </a:fld>
             <a:endParaRPr lang="pt-BR"/>
           </a:p>
@@ -5259,7 +5308,7 @@
           <p:cNvPr id="2" name="Espaço Reservado para Título 1">
             <a:extLst>
               <a:ext uri="{FF2B5EF4-FFF2-40B4-BE49-F238E27FC236}">
-                <a16:creationId xmlns:a16="http://schemas.microsoft.com/office/drawing/2014/main" id="{E69A0273-1966-4A1B-9370-4C1CE5036371}"/>
+                <a16:creationId xmlns:a16="http://schemas.microsoft.com/office/drawing/2014/main" xmlns="" id="{E69A0273-1966-4A1B-9370-4C1CE5036371}"/>
               </a:ext>
             </a:extLst>
           </p:cNvPr>
@@ -5297,7 +5346,7 @@
           <p:cNvPr id="3" name="Espaço Reservado para Texto 2">
             <a:extLst>
               <a:ext uri="{FF2B5EF4-FFF2-40B4-BE49-F238E27FC236}">
-                <a16:creationId xmlns:a16="http://schemas.microsoft.com/office/drawing/2014/main" id="{3B9CF87A-0448-49A7-AB25-EBC1D56A40EF}"/>
+                <a16:creationId xmlns:a16="http://schemas.microsoft.com/office/drawing/2014/main" xmlns="" id="{3B9CF87A-0448-49A7-AB25-EBC1D56A40EF}"/>
               </a:ext>
             </a:extLst>
           </p:cNvPr>
@@ -5364,7 +5413,7 @@
           <p:cNvPr id="4" name="Espaço Reservado para Data 3">
             <a:extLst>
               <a:ext uri="{FF2B5EF4-FFF2-40B4-BE49-F238E27FC236}">
-                <a16:creationId xmlns:a16="http://schemas.microsoft.com/office/drawing/2014/main" id="{2EF7B1F2-BB5A-44D0-816D-16AD2C71430E}"/>
+                <a16:creationId xmlns:a16="http://schemas.microsoft.com/office/drawing/2014/main" xmlns="" id="{2EF7B1F2-BB5A-44D0-816D-16AD2C71430E}"/>
               </a:ext>
             </a:extLst>
           </p:cNvPr>
@@ -5411,7 +5460,7 @@
           <p:cNvPr id="5" name="Espaço Reservado para Rodapé 4">
             <a:extLst>
               <a:ext uri="{FF2B5EF4-FFF2-40B4-BE49-F238E27FC236}">
-                <a16:creationId xmlns:a16="http://schemas.microsoft.com/office/drawing/2014/main" id="{C703F94C-2CC8-4DAA-BC35-14FC3E841DCD}"/>
+                <a16:creationId xmlns:a16="http://schemas.microsoft.com/office/drawing/2014/main" xmlns="" id="{C703F94C-2CC8-4DAA-BC35-14FC3E841DCD}"/>
               </a:ext>
             </a:extLst>
           </p:cNvPr>
@@ -5454,7 +5503,7 @@
           <p:cNvPr id="6" name="Espaço Reservado para Número de Slide 5">
             <a:extLst>
               <a:ext uri="{FF2B5EF4-FFF2-40B4-BE49-F238E27FC236}">
-                <a16:creationId xmlns:a16="http://schemas.microsoft.com/office/drawing/2014/main" id="{64051336-7048-457A-8B61-D94291D71648}"/>
+                <a16:creationId xmlns:a16="http://schemas.microsoft.com/office/drawing/2014/main" xmlns="" id="{64051336-7048-457A-8B61-D94291D71648}"/>
               </a:ext>
             </a:extLst>
           </p:cNvPr>
@@ -5490,7 +5539,7 @@
           <a:p>
             <a:fld id="{1A7E88B7-70CE-4035-AE73-13FA6FB985D4}" type="slidenum">
               <a:rPr lang="pt-BR" smtClean="0"/>
-              <a:t>‹#›</a:t>
+              <a:t>‹nº›</a:t>
             </a:fld>
             <a:endParaRPr lang="pt-BR"/>
           </a:p>
@@ -5822,7 +5871,7 @@
           <p:cNvPr id="4" name="CaixaDeTexto 3">
             <a:extLst>
               <a:ext uri="{FF2B5EF4-FFF2-40B4-BE49-F238E27FC236}">
-                <a16:creationId xmlns:a16="http://schemas.microsoft.com/office/drawing/2014/main" id="{430EB894-B7D4-434C-9D1A-A14094D9BEEC}"/>
+                <a16:creationId xmlns:a16="http://schemas.microsoft.com/office/drawing/2014/main" xmlns="" id="{430EB894-B7D4-434C-9D1A-A14094D9BEEC}"/>
               </a:ext>
             </a:extLst>
           </p:cNvPr>
@@ -5866,7 +5915,7 @@
           <p:cNvPr id="1026" name="Picture 2" descr="Logo">
             <a:extLst>
               <a:ext uri="{FF2B5EF4-FFF2-40B4-BE49-F238E27FC236}">
-                <a16:creationId xmlns:a16="http://schemas.microsoft.com/office/drawing/2014/main" id="{3F2642E0-4F6A-4196-8F58-E77D36E9A33F}"/>
+                <a16:creationId xmlns:a16="http://schemas.microsoft.com/office/drawing/2014/main" xmlns="" id="{3F2642E0-4F6A-4196-8F58-E77D36E9A33F}"/>
               </a:ext>
             </a:extLst>
           </p:cNvPr>
@@ -5911,7 +5960,7 @@
           <p:cNvPr id="5122" name="Picture 2" descr="Image result for machine learning">
             <a:extLst>
               <a:ext uri="{FF2B5EF4-FFF2-40B4-BE49-F238E27FC236}">
-                <a16:creationId xmlns:a16="http://schemas.microsoft.com/office/drawing/2014/main" id="{810CE0A2-4102-44A6-A370-175E7896CDCB}"/>
+                <a16:creationId xmlns:a16="http://schemas.microsoft.com/office/drawing/2014/main" xmlns="" id="{810CE0A2-4102-44A6-A370-175E7896CDCB}"/>
               </a:ext>
             </a:extLst>
           </p:cNvPr>
@@ -5956,7 +6005,7 @@
           <p:cNvPr id="7" name="Título 1">
             <a:extLst>
               <a:ext uri="{FF2B5EF4-FFF2-40B4-BE49-F238E27FC236}">
-                <a16:creationId xmlns:a16="http://schemas.microsoft.com/office/drawing/2014/main" id="{32666AC8-2E17-4DB4-B0F5-60C640CCFD2E}"/>
+                <a16:creationId xmlns:a16="http://schemas.microsoft.com/office/drawing/2014/main" xmlns="" id="{32666AC8-2E17-4DB4-B0F5-60C640CCFD2E}"/>
               </a:ext>
             </a:extLst>
           </p:cNvPr>
@@ -5982,6 +6031,10 @@
             <a:r>
               <a:rPr lang="pt-BR" sz="6600" dirty="0"/>
               <a:t>C24 – Inteligência Artificial:</a:t>
+            </a:r>
+            <a:r>
+              <a:rPr lang="pt-BR" sz="7200" dirty="0"/>
+              <a:t/>
             </a:r>
             <a:br>
               <a:rPr lang="pt-BR" sz="7200" dirty="0"/>
@@ -6914,7 +6967,7 @@
         <p:cNvPr id="1" name="">
           <a:extLst>
             <a:ext uri="{FF2B5EF4-FFF2-40B4-BE49-F238E27FC236}">
-              <a16:creationId xmlns:a16="http://schemas.microsoft.com/office/drawing/2014/main" id="{4AC37BFF-244C-0D73-96E1-47543A4C245F}"/>
+              <a16:creationId xmlns:a16="http://schemas.microsoft.com/office/drawing/2014/main" xmlns="" id="{4AC37BFF-244C-0D73-96E1-47543A4C245F}"/>
             </a:ext>
           </a:extLst>
         </p:cNvPr>
@@ -6934,7 +6987,7 @@
           <p:cNvPr id="2" name="Title 1">
             <a:extLst>
               <a:ext uri="{FF2B5EF4-FFF2-40B4-BE49-F238E27FC236}">
-                <a16:creationId xmlns:a16="http://schemas.microsoft.com/office/drawing/2014/main" id="{CD893F73-D553-1C61-9D7D-AAB3F59096AD}"/>
+                <a16:creationId xmlns:a16="http://schemas.microsoft.com/office/drawing/2014/main" xmlns="" id="{CD893F73-D553-1C61-9D7D-AAB3F59096AD}"/>
               </a:ext>
             </a:extLst>
           </p:cNvPr>
@@ -6973,7 +7026,7 @@
               <p:cNvPr id="3" name="Content Placeholder 2">
                 <a:extLst>
                   <a:ext uri="{FF2B5EF4-FFF2-40B4-BE49-F238E27FC236}">
-                    <a16:creationId xmlns:a16="http://schemas.microsoft.com/office/drawing/2014/main" id="{5D34CF39-62BC-DA90-F244-DCDEF2E97DC7}"/>
+                    <a16:creationId xmlns:a16="http://schemas.microsoft.com/office/drawing/2014/main" xmlns="" id="{5D34CF39-62BC-DA90-F244-DCDEF2E97DC7}"/>
                   </a:ext>
                 </a:extLst>
               </p:cNvPr>
@@ -7175,7 +7228,14 @@
                             <a:latin typeface="Cambria Math" panose="02040503050406030204" pitchFamily="18" charset="0"/>
                             <a:ea typeface="Cambria Math" panose="02040503050406030204" pitchFamily="18" charset="0"/>
                           </a:rPr>
-                          <m:t>×1</m:t>
+                          <m:t>×</m:t>
+                        </m:r>
+                        <m:r>
+                          <a:rPr lang="pt-BR" b="0" i="1" smtClean="0">
+                            <a:latin typeface="Cambria Math" panose="02040503050406030204" pitchFamily="18" charset="0"/>
+                            <a:ea typeface="Cambria Math" panose="02040503050406030204" pitchFamily="18" charset="0"/>
+                          </a:rPr>
+                          <m:t>1</m:t>
                         </m:r>
                       </m:sup>
                     </m:sSubSup>
@@ -8204,7 +8264,7 @@
         <p:cNvPr id="1" name="">
           <a:extLst>
             <a:ext uri="{FF2B5EF4-FFF2-40B4-BE49-F238E27FC236}">
-              <a16:creationId xmlns:a16="http://schemas.microsoft.com/office/drawing/2014/main" id="{8FC9AE89-C8AC-DBE6-CA38-DEEF4996DFD9}"/>
+              <a16:creationId xmlns:a16="http://schemas.microsoft.com/office/drawing/2014/main" xmlns="" id="{8FC9AE89-C8AC-DBE6-CA38-DEEF4996DFD9}"/>
             </a:ext>
           </a:extLst>
         </p:cNvPr>
@@ -8224,7 +8284,7 @@
           <p:cNvPr id="2" name="Title 1">
             <a:extLst>
               <a:ext uri="{FF2B5EF4-FFF2-40B4-BE49-F238E27FC236}">
-                <a16:creationId xmlns:a16="http://schemas.microsoft.com/office/drawing/2014/main" id="{2CE4CC5F-008A-ECCB-8340-EE6C2C24E916}"/>
+                <a16:creationId xmlns:a16="http://schemas.microsoft.com/office/drawing/2014/main" xmlns="" id="{2CE4CC5F-008A-ECCB-8340-EE6C2C24E916}"/>
               </a:ext>
             </a:extLst>
           </p:cNvPr>
@@ -8263,7 +8323,7 @@
               <p:cNvPr id="3" name="Content Placeholder 2">
                 <a:extLst>
                   <a:ext uri="{FF2B5EF4-FFF2-40B4-BE49-F238E27FC236}">
-                    <a16:creationId xmlns:a16="http://schemas.microsoft.com/office/drawing/2014/main" id="{1237A257-D85C-E351-5085-80BCF81401BB}"/>
+                    <a16:creationId xmlns:a16="http://schemas.microsoft.com/office/drawing/2014/main" xmlns="" id="{1237A257-D85C-E351-5085-80BCF81401BB}"/>
                   </a:ext>
                 </a:extLst>
               </p:cNvPr>
@@ -9701,7 +9761,7 @@
           <p:cNvPr id="2" name="Title 1">
             <a:extLst>
               <a:ext uri="{FF2B5EF4-FFF2-40B4-BE49-F238E27FC236}">
-                <a16:creationId xmlns:a16="http://schemas.microsoft.com/office/drawing/2014/main" id="{5B5C9F62-7684-5A29-B15B-4CEB812641BF}"/>
+                <a16:creationId xmlns:a16="http://schemas.microsoft.com/office/drawing/2014/main" xmlns="" id="{5B5C9F62-7684-5A29-B15B-4CEB812641BF}"/>
               </a:ext>
             </a:extLst>
           </p:cNvPr>
@@ -9726,7 +9786,7 @@
           <p:cNvPr id="3" name="Content Placeholder 2">
             <a:extLst>
               <a:ext uri="{FF2B5EF4-FFF2-40B4-BE49-F238E27FC236}">
-                <a16:creationId xmlns:a16="http://schemas.microsoft.com/office/drawing/2014/main" id="{B8C9293E-FE0D-E03B-8391-5AFFEBCBCCE2}"/>
+                <a16:creationId xmlns:a16="http://schemas.microsoft.com/office/drawing/2014/main" xmlns="" id="{B8C9293E-FE0D-E03B-8391-5AFFEBCBCCE2}"/>
               </a:ext>
             </a:extLst>
           </p:cNvPr>
@@ -10163,7 +10223,7 @@
           <p:cNvPr id="12" name="Agrupar 11">
             <a:extLst>
               <a:ext uri="{FF2B5EF4-FFF2-40B4-BE49-F238E27FC236}">
-                <a16:creationId xmlns:a16="http://schemas.microsoft.com/office/drawing/2014/main" id="{745C0A43-FD12-CEC1-71CC-612BDB16C776}"/>
+                <a16:creationId xmlns:a16="http://schemas.microsoft.com/office/drawing/2014/main" xmlns="" id="{745C0A43-FD12-CEC1-71CC-612BDB16C776}"/>
               </a:ext>
             </a:extLst>
           </p:cNvPr>
@@ -10183,7 +10243,7 @@
             <p:cNvPr id="13" name="Picture 3">
               <a:extLst>
                 <a:ext uri="{FF2B5EF4-FFF2-40B4-BE49-F238E27FC236}">
-                  <a16:creationId xmlns:a16="http://schemas.microsoft.com/office/drawing/2014/main" id="{64DA2A01-47B5-2B94-DBFC-FB53B1B8205D}"/>
+                  <a16:creationId xmlns:a16="http://schemas.microsoft.com/office/drawing/2014/main" xmlns="" id="{64DA2A01-47B5-2B94-DBFC-FB53B1B8205D}"/>
                 </a:ext>
               </a:extLst>
             </p:cNvPr>
@@ -10218,7 +10278,7 @@
             <p:cNvPr id="14" name="TextBox 6">
               <a:extLst>
                 <a:ext uri="{FF2B5EF4-FFF2-40B4-BE49-F238E27FC236}">
-                  <a16:creationId xmlns:a16="http://schemas.microsoft.com/office/drawing/2014/main" id="{5ACECBBD-5168-48DA-64EF-8BDD58AE7E65}"/>
+                  <a16:creationId xmlns:a16="http://schemas.microsoft.com/office/drawing/2014/main" xmlns="" id="{5ACECBBD-5168-48DA-64EF-8BDD58AE7E65}"/>
                 </a:ext>
               </a:extLst>
             </p:cNvPr>
@@ -10258,7 +10318,7 @@
             <p:cNvPr id="15" name="Curved Connector 8">
               <a:extLst>
                 <a:ext uri="{FF2B5EF4-FFF2-40B4-BE49-F238E27FC236}">
-                  <a16:creationId xmlns:a16="http://schemas.microsoft.com/office/drawing/2014/main" id="{7D2B1880-C7A7-A071-10B2-08F118026EDA}"/>
+                  <a16:creationId xmlns:a16="http://schemas.microsoft.com/office/drawing/2014/main" xmlns="" id="{7D2B1880-C7A7-A071-10B2-08F118026EDA}"/>
                 </a:ext>
               </a:extLst>
             </p:cNvPr>
@@ -10299,7 +10359,7 @@
                 <p:cNvPr id="16" name="Retângulo 15">
                   <a:extLst>
                     <a:ext uri="{FF2B5EF4-FFF2-40B4-BE49-F238E27FC236}">
-                      <a16:creationId xmlns:a16="http://schemas.microsoft.com/office/drawing/2014/main" id="{036F5727-D9EE-E211-8459-926C7C8C80B1}"/>
+                      <a16:creationId xmlns:a16="http://schemas.microsoft.com/office/drawing/2014/main" xmlns="" id="{036F5727-D9EE-E211-8459-926C7C8C80B1}"/>
                     </a:ext>
                   </a:extLst>
                 </p:cNvPr>
@@ -10452,8 +10512,8 @@
           </a:p>
         </p:txBody>
       </p:sp>
-      <mc:AlternateContent xmlns:mc="http://schemas.openxmlformats.org/markup-compatibility/2006">
-        <mc:Choice xmlns:a14="http://schemas.microsoft.com/office/drawing/2010/main" Requires="a14">
+      <mc:AlternateContent xmlns:mc="http://schemas.openxmlformats.org/markup-compatibility/2006" xmlns:a14="http://schemas.microsoft.com/office/drawing/2010/main">
+        <mc:Choice Requires="a14">
           <p:sp>
             <p:nvSpPr>
               <p:cNvPr id="3" name="Content Placeholder 2"/>
@@ -10681,7 +10741,7 @@
             </p:txBody>
           </p:sp>
         </mc:Choice>
-        <mc:Fallback>
+        <mc:Fallback xmlns="">
           <p:sp>
             <p:nvSpPr>
               <p:cNvPr id="3" name="Content Placeholder 2"/>
@@ -10724,7 +10784,7 @@
           <p:cNvPr id="14" name="Agrupar 13">
             <a:extLst>
               <a:ext uri="{FF2B5EF4-FFF2-40B4-BE49-F238E27FC236}">
-                <a16:creationId xmlns:a16="http://schemas.microsoft.com/office/drawing/2014/main" id="{D3D49D8E-0821-33E1-5823-3E158A4FB182}"/>
+                <a16:creationId xmlns:a16="http://schemas.microsoft.com/office/drawing/2014/main" xmlns="" id="{D3D49D8E-0821-33E1-5823-3E158A4FB182}"/>
               </a:ext>
             </a:extLst>
           </p:cNvPr>
@@ -10744,7 +10804,7 @@
             <p:cNvPr id="15" name="Picture 3">
               <a:extLst>
                 <a:ext uri="{FF2B5EF4-FFF2-40B4-BE49-F238E27FC236}">
-                  <a16:creationId xmlns:a16="http://schemas.microsoft.com/office/drawing/2014/main" id="{BD3F5D0C-F310-ED7B-BBE9-A892027EAD08}"/>
+                  <a16:creationId xmlns:a16="http://schemas.microsoft.com/office/drawing/2014/main" xmlns="" id="{BD3F5D0C-F310-ED7B-BBE9-A892027EAD08}"/>
                 </a:ext>
               </a:extLst>
             </p:cNvPr>
@@ -10779,7 +10839,7 @@
             <p:cNvPr id="16" name="TextBox 6">
               <a:extLst>
                 <a:ext uri="{FF2B5EF4-FFF2-40B4-BE49-F238E27FC236}">
-                  <a16:creationId xmlns:a16="http://schemas.microsoft.com/office/drawing/2014/main" id="{D474B403-303E-639E-341F-AA50DF86D3BE}"/>
+                  <a16:creationId xmlns:a16="http://schemas.microsoft.com/office/drawing/2014/main" xmlns="" id="{D474B403-303E-639E-341F-AA50DF86D3BE}"/>
                 </a:ext>
               </a:extLst>
             </p:cNvPr>
@@ -10819,7 +10879,7 @@
             <p:cNvPr id="17" name="Curved Connector 8">
               <a:extLst>
                 <a:ext uri="{FF2B5EF4-FFF2-40B4-BE49-F238E27FC236}">
-                  <a16:creationId xmlns:a16="http://schemas.microsoft.com/office/drawing/2014/main" id="{B45603A2-AC84-D66F-F06E-0371CA5BE810}"/>
+                  <a16:creationId xmlns:a16="http://schemas.microsoft.com/office/drawing/2014/main" xmlns="" id="{B45603A2-AC84-D66F-F06E-0371CA5BE810}"/>
                 </a:ext>
               </a:extLst>
             </p:cNvPr>
@@ -10860,7 +10920,7 @@
                 <p:cNvPr id="18" name="Retângulo 17">
                   <a:extLst>
                     <a:ext uri="{FF2B5EF4-FFF2-40B4-BE49-F238E27FC236}">
-                      <a16:creationId xmlns:a16="http://schemas.microsoft.com/office/drawing/2014/main" id="{C5162CC1-DD2F-DFBD-35CF-B876410E54B6}"/>
+                      <a16:creationId xmlns:a16="http://schemas.microsoft.com/office/drawing/2014/main" xmlns="" id="{C5162CC1-DD2F-DFBD-35CF-B876410E54B6}"/>
                     </a:ext>
                   </a:extLst>
                 </p:cNvPr>
@@ -11243,7 +11303,7 @@
           <p:cNvPr id="2" name="Título 1">
             <a:extLst>
               <a:ext uri="{FF2B5EF4-FFF2-40B4-BE49-F238E27FC236}">
-                <a16:creationId xmlns:a16="http://schemas.microsoft.com/office/drawing/2014/main" id="{14850ACD-2DE0-7E6B-F65F-1A40170C1B2F}"/>
+                <a16:creationId xmlns:a16="http://schemas.microsoft.com/office/drawing/2014/main" xmlns="" id="{14850ACD-2DE0-7E6B-F65F-1A40170C1B2F}"/>
               </a:ext>
             </a:extLst>
           </p:cNvPr>
@@ -11273,7 +11333,7 @@
               <p:cNvPr id="3" name="Espaço Reservado para Conteúdo 2">
                 <a:extLst>
                   <a:ext uri="{FF2B5EF4-FFF2-40B4-BE49-F238E27FC236}">
-                    <a16:creationId xmlns:a16="http://schemas.microsoft.com/office/drawing/2014/main" id="{1C254C3E-10F9-2C66-DDBB-99D1164F61E7}"/>
+                    <a16:creationId xmlns:a16="http://schemas.microsoft.com/office/drawing/2014/main" xmlns="" id="{1C254C3E-10F9-2C66-DDBB-99D1164F61E7}"/>
                   </a:ext>
                 </a:extLst>
               </p:cNvPr>
@@ -11286,8 +11346,8 @@
             </p:nvSpPr>
             <p:spPr>
               <a:xfrm>
-                <a:off x="4256314" y="1825624"/>
-                <a:ext cx="7840438" cy="5032375"/>
+                <a:off x="3557847" y="1825624"/>
+                <a:ext cx="8634153" cy="5032375"/>
               </a:xfrm>
             </p:spPr>
             <p:txBody>
@@ -11297,7 +11357,7 @@
               <a:lstStyle/>
               <a:p>
                 <a:r>
-                  <a:rPr lang="pt-BR" dirty="0"/>
+                  <a:rPr lang="pt-BR" dirty="0" smtClean="0"/>
                   <a:t>No caso da </a:t>
                 </a:r>
                 <a:r>
@@ -11374,24 +11434,32 @@
                       <m:sSub>
                         <m:sSubPr>
                           <m:ctrlPr>
-                            <a:rPr lang="pt-BR" sz="2000"/>
+                            <a:rPr lang="pt-BR" i="1">
+                              <a:latin typeface="Cambria Math" panose="02040503050406030204" pitchFamily="18" charset="0"/>
+                            </a:rPr>
                           </m:ctrlPr>
                         </m:sSubPr>
                         <m:e>
                           <m:r>
-                            <a:rPr lang="pt-BR" sz="2000"/>
+                            <a:rPr lang="pt-BR">
+                              <a:latin typeface="Cambria Math" panose="02040503050406030204" pitchFamily="18" charset="0"/>
+                            </a:rPr>
                             <m:t>𝐶</m:t>
                           </m:r>
                         </m:e>
                         <m:sub>
                           <m:r>
-                            <a:rPr lang="pt-BR" sz="2000"/>
+                            <a:rPr lang="pt-BR">
+                              <a:latin typeface="Cambria Math" panose="02040503050406030204" pitchFamily="18" charset="0"/>
+                            </a:rPr>
                             <m:t>𝑞</m:t>
                           </m:r>
                         </m:sub>
                       </m:sSub>
                       <m:r>
-                        <a:rPr lang="pt-BR" sz="2000"/>
+                        <a:rPr lang="pt-BR">
+                          <a:latin typeface="Cambria Math" panose="02040503050406030204" pitchFamily="18" charset="0"/>
+                        </a:rPr>
                         <m:t>=</m:t>
                       </m:r>
                       <m:d>
@@ -11399,432 +11467,291 @@
                           <m:begChr m:val="{"/>
                           <m:endChr m:val=""/>
                           <m:ctrlPr>
-                            <a:rPr lang="pt-BR" sz="2000"/>
+                            <a:rPr lang="pt-BR" i="1">
+                              <a:latin typeface="Cambria Math" panose="02040503050406030204" pitchFamily="18" charset="0"/>
+                            </a:rPr>
                           </m:ctrlPr>
                         </m:dPr>
                         <m:e>
                           <m:eqArr>
                             <m:eqArrPr>
                               <m:ctrlPr>
-                                <a:rPr lang="pt-BR" sz="2000"/>
+                                <a:rPr lang="pt-BR" i="1">
+                                  <a:latin typeface="Cambria Math" panose="02040503050406030204" pitchFamily="18" charset="0"/>
+                                </a:rPr>
                               </m:ctrlPr>
                             </m:eqArrPr>
                             <m:e>
+                              <m:m>
+                                <m:mPr>
+                                  <m:mcs>
+                                    <m:mc>
+                                      <m:mcPr>
+                                        <m:count m:val="2"/>
+                                        <m:mcJc m:val="center"/>
+                                      </m:mcPr>
+                                    </m:mc>
+                                  </m:mcs>
+                                  <m:ctrlPr>
+                                    <a:rPr lang="pt-BR" i="1" smtClean="0">
+                                      <a:latin typeface="Cambria Math" panose="02040503050406030204" pitchFamily="18" charset="0"/>
+                                    </a:rPr>
+                                  </m:ctrlPr>
+                                </m:mPr>
+                                <m:mr>
+                                  <m:e>
+                                    <m:r>
+                                      <m:rPr>
+                                        <m:brk m:alnAt="7"/>
+                                      </m:rPr>
+                                      <a:rPr lang="pt-BR" b="0" i="1" smtClean="0">
+                                        <a:latin typeface="Cambria Math" panose="02040503050406030204" pitchFamily="18" charset="0"/>
+                                      </a:rPr>
+                                      <m:t>0,</m:t>
+                                    </m:r>
+                                  </m:e>
+                                  <m:e>
+                                    <m:r>
+                                      <a:rPr lang="pt-BR">
+                                        <a:latin typeface="Cambria Math" panose="02040503050406030204" pitchFamily="18" charset="0"/>
+                                      </a:rPr>
+                                      <m:t>𝑔</m:t>
+                                    </m:r>
+                                    <m:d>
+                                      <m:dPr>
+                                        <m:ctrlPr>
+                                          <a:rPr lang="pt-BR" i="1">
+                                            <a:latin typeface="Cambria Math" panose="02040503050406030204" pitchFamily="18" charset="0"/>
+                                          </a:rPr>
+                                        </m:ctrlPr>
+                                      </m:dPr>
+                                      <m:e>
+                                        <m:r>
+                                          <a:rPr lang="pt-BR">
+                                            <a:latin typeface="Cambria Math" panose="02040503050406030204" pitchFamily="18" charset="0"/>
+                                          </a:rPr>
+                                          <m:t>𝒙</m:t>
+                                        </m:r>
+                                        <m:r>
+                                          <a:rPr lang="pt-BR" i="1">
+                                            <a:latin typeface="Cambria Math" panose="02040503050406030204" pitchFamily="18" charset="0"/>
+                                          </a:rPr>
+                                          <m:t>(</m:t>
+                                        </m:r>
+                                        <m:r>
+                                          <a:rPr lang="pt-BR" i="1">
+                                            <a:latin typeface="Cambria Math" panose="02040503050406030204" pitchFamily="18" charset="0"/>
+                                          </a:rPr>
+                                          <m:t>𝑖</m:t>
+                                        </m:r>
+                                        <m:r>
+                                          <a:rPr lang="pt-BR" i="1">
+                                            <a:latin typeface="Cambria Math" panose="02040503050406030204" pitchFamily="18" charset="0"/>
+                                          </a:rPr>
+                                          <m:t>)</m:t>
+                                        </m:r>
+                                      </m:e>
+                                    </m:d>
+                                    <m:r>
+                                      <a:rPr lang="pt-BR">
+                                        <a:latin typeface="Cambria Math" panose="02040503050406030204" pitchFamily="18" charset="0"/>
+                                      </a:rPr>
+                                      <m:t>&lt;0</m:t>
+                                    </m:r>
+                                  </m:e>
+                                </m:mr>
+                              </m:m>
+                            </m:e>
+                            <m:e>
+                              <m:m>
+                                <m:mPr>
+                                  <m:mcs>
+                                    <m:mc>
+                                      <m:mcPr>
+                                        <m:count m:val="2"/>
+                                        <m:mcJc m:val="center"/>
+                                      </m:mcPr>
+                                    </m:mc>
+                                  </m:mcs>
+                                  <m:ctrlPr>
+                                    <a:rPr lang="pt-BR" i="1" dirty="0" smtClean="0">
+                                      <a:latin typeface="Cambria Math" panose="02040503050406030204" pitchFamily="18" charset="0"/>
+                                    </a:rPr>
+                                  </m:ctrlPr>
+                                </m:mPr>
+                                <m:mr>
+                                  <m:e>
+                                    <m:r>
+                                      <m:rPr>
+                                        <m:brk m:alnAt="7"/>
+                                      </m:rPr>
+                                      <a:rPr lang="pt-BR" b="0" i="1" dirty="0" smtClean="0">
+                                        <a:latin typeface="Cambria Math" panose="02040503050406030204" pitchFamily="18" charset="0"/>
+                                      </a:rPr>
+                                      <m:t>1,</m:t>
+                                    </m:r>
+                                  </m:e>
+                                  <m:e>
+                                    <m:r>
+                                      <a:rPr lang="pt-BR">
+                                        <a:latin typeface="Cambria Math" panose="02040503050406030204" pitchFamily="18" charset="0"/>
+                                      </a:rPr>
+                                      <m:t>𝑔</m:t>
+                                    </m:r>
+                                    <m:d>
+                                      <m:dPr>
+                                        <m:ctrlPr>
+                                          <a:rPr lang="pt-BR" i="1">
+                                            <a:latin typeface="Cambria Math" panose="02040503050406030204" pitchFamily="18" charset="0"/>
+                                          </a:rPr>
+                                        </m:ctrlPr>
+                                      </m:dPr>
+                                      <m:e>
+                                        <m:r>
+                                          <a:rPr lang="pt-BR">
+                                            <a:latin typeface="Cambria Math" panose="02040503050406030204" pitchFamily="18" charset="0"/>
+                                          </a:rPr>
+                                          <m:t>𝒙</m:t>
+                                        </m:r>
+                                        <m:r>
+                                          <a:rPr lang="pt-BR" i="1">
+                                            <a:latin typeface="Cambria Math" panose="02040503050406030204" pitchFamily="18" charset="0"/>
+                                          </a:rPr>
+                                          <m:t>(</m:t>
+                                        </m:r>
+                                        <m:r>
+                                          <a:rPr lang="pt-BR" i="1">
+                                            <a:latin typeface="Cambria Math" panose="02040503050406030204" pitchFamily="18" charset="0"/>
+                                          </a:rPr>
+                                          <m:t>𝑖</m:t>
+                                        </m:r>
+                                        <m:r>
+                                          <a:rPr lang="pt-BR" i="1">
+                                            <a:latin typeface="Cambria Math" panose="02040503050406030204" pitchFamily="18" charset="0"/>
+                                          </a:rPr>
+                                          <m:t>)</m:t>
+                                        </m:r>
+                                      </m:e>
+                                    </m:d>
+                                    <m:r>
+                                      <a:rPr lang="pt-BR">
+                                        <a:latin typeface="Cambria Math" panose="02040503050406030204" pitchFamily="18" charset="0"/>
+                                      </a:rPr>
+                                      <m:t>&gt;0</m:t>
+                                    </m:r>
+                                  </m:e>
+                                </m:mr>
+                              </m:m>
+                            </m:e>
+                            <m:e>
+                              <m:m>
+                                <m:mPr>
+                                  <m:mcs>
+                                    <m:mc>
+                                      <m:mcPr>
+                                        <m:count m:val="2"/>
+                                        <m:mcJc m:val="center"/>
+                                      </m:mcPr>
+                                    </m:mc>
+                                  </m:mcs>
+                                  <m:ctrlPr>
+                                    <a:rPr lang="pt-BR" i="1" dirty="0" smtClean="0">
+                                      <a:latin typeface="Cambria Math" panose="02040503050406030204" pitchFamily="18" charset="0"/>
+                                    </a:rPr>
+                                  </m:ctrlPr>
+                                </m:mPr>
+                                <m:mr>
+                                  <m:e>
+                                    <m:r>
+                                      <m:rPr>
+                                        <m:sty m:val="p"/>
+                                        <m:brk m:alnAt="7"/>
+                                      </m:rPr>
+                                      <a:rPr lang="pt-BR" b="0" i="0" dirty="0" smtClean="0">
+                                        <a:latin typeface="Cambria Math" panose="02040503050406030204" pitchFamily="18" charset="0"/>
+                                      </a:rPr>
+                                      <m:t>Indetermina</m:t>
+                                    </m:r>
+                                    <m:r>
+                                      <a:rPr lang="pt-BR" b="0" i="0" dirty="0" smtClean="0">
+                                        <a:latin typeface="Cambria Math" panose="02040503050406030204" pitchFamily="18" charset="0"/>
+                                      </a:rPr>
+                                      <m:t>çã</m:t>
+                                    </m:r>
+                                    <m:r>
+                                      <m:rPr>
+                                        <m:sty m:val="p"/>
+                                      </m:rPr>
+                                      <a:rPr lang="pt-BR" b="0" i="0" dirty="0" smtClean="0">
+                                        <a:latin typeface="Cambria Math" panose="02040503050406030204" pitchFamily="18" charset="0"/>
+                                      </a:rPr>
+                                      <m:t>o</m:t>
+                                    </m:r>
+                                    <m:r>
+                                      <m:rPr>
+                                        <m:brk m:alnAt="7"/>
+                                      </m:rPr>
+                                      <a:rPr lang="pt-BR" b="0" i="1" dirty="0" smtClean="0">
+                                        <a:latin typeface="Cambria Math" panose="02040503050406030204" pitchFamily="18" charset="0"/>
+                                      </a:rPr>
+                                      <m:t>,</m:t>
+                                    </m:r>
+                                  </m:e>
+                                  <m:e>
+                                    <m:r>
+                                      <a:rPr lang="pt-BR">
+                                        <a:latin typeface="Cambria Math" panose="02040503050406030204" pitchFamily="18" charset="0"/>
+                                      </a:rPr>
+                                      <m:t>𝑔</m:t>
+                                    </m:r>
+                                    <m:d>
+                                      <m:dPr>
+                                        <m:ctrlPr>
+                                          <a:rPr lang="pt-BR" i="1">
+                                            <a:latin typeface="Cambria Math" panose="02040503050406030204" pitchFamily="18" charset="0"/>
+                                          </a:rPr>
+                                        </m:ctrlPr>
+                                      </m:dPr>
+                                      <m:e>
+                                        <m:r>
+                                          <a:rPr lang="pt-BR">
+                                            <a:latin typeface="Cambria Math" panose="02040503050406030204" pitchFamily="18" charset="0"/>
+                                          </a:rPr>
+                                          <m:t>𝒙</m:t>
+                                        </m:r>
+                                        <m:r>
+                                          <a:rPr lang="pt-BR" i="1">
+                                            <a:latin typeface="Cambria Math" panose="02040503050406030204" pitchFamily="18" charset="0"/>
+                                          </a:rPr>
+                                          <m:t>(</m:t>
+                                        </m:r>
+                                        <m:r>
+                                          <a:rPr lang="pt-BR" i="1">
+                                            <a:latin typeface="Cambria Math" panose="02040503050406030204" pitchFamily="18" charset="0"/>
+                                          </a:rPr>
+                                          <m:t>𝑖</m:t>
+                                        </m:r>
+                                        <m:r>
+                                          <a:rPr lang="pt-BR" i="1">
+                                            <a:latin typeface="Cambria Math" panose="02040503050406030204" pitchFamily="18" charset="0"/>
+                                          </a:rPr>
+                                          <m:t>)</m:t>
+                                        </m:r>
+                                      </m:e>
+                                    </m:d>
+                                    <m:r>
+                                      <a:rPr lang="pt-BR">
+                                        <a:latin typeface="Cambria Math" panose="02040503050406030204" pitchFamily="18" charset="0"/>
+                                      </a:rPr>
+                                      <m:t>=0</m:t>
+                                    </m:r>
+                                  </m:e>
+                                </m:mr>
+                              </m:m>
                               <m:r>
-                                <a:rPr lang="pt-BR" sz="2000"/>
-                                <m:t>𝑞</m:t>
-                              </m:r>
-                              <m:r>
-                                <a:rPr lang="pt-BR" sz="2000"/>
-                                <m:t>=1,                    </m:t>
-                              </m:r>
-                              <m:r>
-                                <a:rPr lang="pt-BR" sz="2000" b="0" i="0" smtClean="0">
+                                <a:rPr lang="pt-BR" i="1" smtClean="0">
                                   <a:latin typeface="Cambria Math" panose="02040503050406030204" pitchFamily="18" charset="0"/>
                                 </a:rPr>
-                                <m:t>    </m:t>
-                              </m:r>
-                              <m:r>
-                                <a:rPr lang="pt-BR" sz="2000"/>
-                                <m:t>𝑔</m:t>
-                              </m:r>
-                              <m:d>
-                                <m:dPr>
-                                  <m:ctrlPr>
-                                    <a:rPr lang="pt-BR" sz="2000"/>
-                                  </m:ctrlPr>
-                                </m:dPr>
-                                <m:e>
-                                  <m:r>
-                                    <a:rPr lang="pt-BR" sz="2000"/>
-                                    <m:t>𝒙</m:t>
-                                  </m:r>
-                                  <m:r>
-                                    <a:rPr lang="pt-BR" sz="2000" i="1">
-                                      <a:latin typeface="Cambria Math" panose="02040503050406030204" pitchFamily="18" charset="0"/>
-                                    </a:rPr>
-                                    <m:t>(</m:t>
-                                  </m:r>
-                                  <m:r>
-                                    <a:rPr lang="pt-BR" sz="2000" i="1">
-                                      <a:latin typeface="Cambria Math" panose="02040503050406030204" pitchFamily="18" charset="0"/>
-                                    </a:rPr>
-                                    <m:t>𝑖</m:t>
-                                  </m:r>
-                                  <m:r>
-                                    <a:rPr lang="pt-BR" sz="2000" i="1">
-                                      <a:latin typeface="Cambria Math" panose="02040503050406030204" pitchFamily="18" charset="0"/>
-                                    </a:rPr>
-                                    <m:t>)</m:t>
-                                  </m:r>
-                                </m:e>
-                              </m:d>
-                              <m:r>
-                                <a:rPr lang="pt-BR" sz="2000"/>
-                                <m:t>&lt;0 (</m:t>
-                              </m:r>
-                              <m:r>
-                                <m:rPr>
-                                  <m:nor/>
-                                </m:rPr>
-                                <a:rPr lang="pt-BR" sz="2000"/>
-                                <m:t>Amostra</m:t>
-                              </m:r>
-                              <m:r>
-                                <m:rPr>
-                                  <m:nor/>
-                                </m:rPr>
-                                <a:rPr lang="pt-BR" sz="2000"/>
-                                <m:t> </m:t>
-                              </m:r>
-                              <m:r>
-                                <m:rPr>
-                                  <m:nor/>
-                                </m:rPr>
-                                <a:rPr lang="pt-BR" sz="2000"/>
-                                <m:t>acima</m:t>
-                              </m:r>
-                              <m:r>
-                                <m:rPr>
-                                  <m:nor/>
-                                </m:rPr>
-                                <a:rPr lang="pt-BR" sz="2000" dirty="0"/>
-                                <m:t> </m:t>
-                              </m:r>
-                              <m:r>
-                                <m:rPr>
-                                  <m:nor/>
-                                </m:rPr>
-                                <a:rPr lang="pt-BR" sz="2000" dirty="0"/>
-                                <m:t>da</m:t>
-                              </m:r>
-                              <m:r>
-                                <m:rPr>
-                                  <m:nor/>
-                                </m:rPr>
-                                <a:rPr lang="pt-BR" sz="2000" dirty="0"/>
-                                <m:t> </m:t>
-                              </m:r>
-                              <m:r>
-                                <m:rPr>
-                                  <m:nor/>
-                                </m:rPr>
-                                <a:rPr lang="pt-BR" sz="2000" dirty="0"/>
-                                <m:t>fun</m:t>
-                              </m:r>
-                              <m:r>
-                                <m:rPr>
-                                  <m:nor/>
-                                </m:rPr>
-                                <a:rPr lang="pt-BR" sz="2000" dirty="0"/>
-                                <m:t>çã</m:t>
-                              </m:r>
-                              <m:r>
-                                <m:rPr>
-                                  <m:nor/>
-                                </m:rPr>
-                                <a:rPr lang="pt-BR" sz="2000" dirty="0"/>
-                                <m:t>o</m:t>
-                              </m:r>
-                              <m:r>
-                                <m:rPr>
-                                  <m:nor/>
-                                </m:rPr>
-                                <a:rPr lang="pt-BR" sz="2000" dirty="0"/>
-                                <m:t>)</m:t>
-                              </m:r>
-                            </m:e>
-                            <m:e>
-                              <m:r>
-                                <a:rPr lang="pt-BR" sz="2000" b="0" i="0" smtClean="0">
-                                  <a:latin typeface="Cambria Math" panose="02040503050406030204" pitchFamily="18" charset="0"/>
-                                </a:rPr>
-                                <m:t> </m:t>
-                              </m:r>
-                              <m:r>
-                                <a:rPr lang="pt-BR" sz="2000"/>
-                                <m:t>𝑞</m:t>
-                              </m:r>
-                              <m:r>
-                                <a:rPr lang="pt-BR" sz="2000"/>
-                                <m:t>=2,                     </m:t>
-                              </m:r>
-                              <m:r>
-                                <a:rPr lang="pt-BR" sz="2000" b="0" i="0" smtClean="0">
-                                  <a:latin typeface="Cambria Math" panose="02040503050406030204" pitchFamily="18" charset="0"/>
-                                </a:rPr>
-                                <m:t>    </m:t>
-                              </m:r>
-                              <m:r>
-                                <a:rPr lang="pt-BR" sz="2000"/>
-                                <m:t>𝑔</m:t>
-                              </m:r>
-                              <m:d>
-                                <m:dPr>
-                                  <m:ctrlPr>
-                                    <a:rPr lang="pt-BR" sz="2000"/>
-                                  </m:ctrlPr>
-                                </m:dPr>
-                                <m:e>
-                                  <m:r>
-                                    <a:rPr lang="pt-BR" sz="2000"/>
-                                    <m:t>𝒙</m:t>
-                                  </m:r>
-                                  <m:r>
-                                    <a:rPr lang="pt-BR" sz="2000" i="1">
-                                      <a:latin typeface="Cambria Math" panose="02040503050406030204" pitchFamily="18" charset="0"/>
-                                    </a:rPr>
-                                    <m:t>(</m:t>
-                                  </m:r>
-                                  <m:r>
-                                    <a:rPr lang="pt-BR" sz="2000" i="1">
-                                      <a:latin typeface="Cambria Math" panose="02040503050406030204" pitchFamily="18" charset="0"/>
-                                    </a:rPr>
-                                    <m:t>𝑖</m:t>
-                                  </m:r>
-                                  <m:r>
-                                    <a:rPr lang="pt-BR" sz="2000" i="1">
-                                      <a:latin typeface="Cambria Math" panose="02040503050406030204" pitchFamily="18" charset="0"/>
-                                    </a:rPr>
-                                    <m:t>)</m:t>
-                                  </m:r>
-                                </m:e>
-                              </m:d>
-                              <m:r>
-                                <a:rPr lang="pt-BR" sz="2000"/>
-                                <m:t>&gt;0 (</m:t>
-                              </m:r>
-                              <m:r>
-                                <m:rPr>
-                                  <m:nor/>
-                                </m:rPr>
-                                <a:rPr lang="pt-BR" sz="2000" dirty="0"/>
-                                <m:t>Amostra</m:t>
-                              </m:r>
-                              <m:r>
-                                <m:rPr>
-                                  <m:nor/>
-                                </m:rPr>
-                                <a:rPr lang="pt-BR" sz="2000" dirty="0"/>
-                                <m:t> </m:t>
-                              </m:r>
-                              <m:r>
-                                <m:rPr>
-                                  <m:nor/>
-                                </m:rPr>
-                                <a:rPr lang="pt-BR" sz="2000" dirty="0"/>
-                                <m:t>abaixo</m:t>
-                              </m:r>
-                              <m:r>
-                                <m:rPr>
-                                  <m:nor/>
-                                </m:rPr>
-                                <a:rPr lang="pt-BR" sz="2000" dirty="0"/>
-                                <m:t> </m:t>
-                              </m:r>
-                              <m:r>
-                                <m:rPr>
-                                  <m:nor/>
-                                </m:rPr>
-                                <a:rPr lang="pt-BR" sz="2000" dirty="0"/>
-                                <m:t>da</m:t>
-                              </m:r>
-                              <m:r>
-                                <m:rPr>
-                                  <m:nor/>
-                                </m:rPr>
-                                <a:rPr lang="pt-BR" sz="2000" dirty="0"/>
-                                <m:t> </m:t>
-                              </m:r>
-                              <m:r>
-                                <m:rPr>
-                                  <m:nor/>
-                                </m:rPr>
-                                <a:rPr lang="pt-BR" sz="2000" dirty="0"/>
-                                <m:t>fun</m:t>
-                              </m:r>
-                              <m:r>
-                                <m:rPr>
-                                  <m:nor/>
-                                </m:rPr>
-                                <a:rPr lang="pt-BR" sz="2000" dirty="0"/>
-                                <m:t>çã</m:t>
-                              </m:r>
-                              <m:r>
-                                <m:rPr>
-                                  <m:nor/>
-                                </m:rPr>
-                                <a:rPr lang="pt-BR" sz="2000" dirty="0"/>
-                                <m:t>o</m:t>
-                              </m:r>
-                              <m:r>
-                                <m:rPr>
-                                  <m:nor/>
-                                </m:rPr>
-                                <a:rPr lang="pt-BR" sz="2000" dirty="0"/>
-                                <m:t>)</m:t>
-                              </m:r>
-                            </m:e>
-                            <m:e>
-                              <m:r>
-                                <m:rPr>
-                                  <m:nor/>
-                                </m:rPr>
-                                <a:rPr lang="pt-BR" sz="2000"/>
-                                <m:t>i</m:t>
-                              </m:r>
-                              <m:r>
-                                <m:rPr>
-                                  <m:nor/>
-                                </m:rPr>
-                                <a:rPr lang="pt-BR" sz="2000" dirty="0"/>
-                                <m:t>ndetermina</m:t>
-                              </m:r>
-                              <m:r>
-                                <m:rPr>
-                                  <m:nor/>
-                                </m:rPr>
-                                <a:rPr lang="pt-BR" sz="2000" dirty="0"/>
-                                <m:t>çã</m:t>
-                              </m:r>
-                              <m:r>
-                                <m:rPr>
-                                  <m:nor/>
-                                </m:rPr>
-                                <a:rPr lang="pt-BR" sz="2000" dirty="0"/>
-                                <m:t>o</m:t>
-                              </m:r>
-                              <m:r>
-                                <a:rPr lang="pt-BR" sz="2000"/>
-                                <m:t>, </m:t>
-                              </m:r>
-                              <m:r>
-                                <a:rPr lang="pt-BR" sz="2000" b="0" i="0" smtClean="0">
-                                  <a:latin typeface="Cambria Math" panose="02040503050406030204" pitchFamily="18" charset="0"/>
-                                </a:rPr>
-                                <m:t> </m:t>
-                              </m:r>
-                              <m:r>
-                                <a:rPr lang="pt-BR" sz="2000"/>
-                                <m:t>𝑔</m:t>
-                              </m:r>
-                              <m:d>
-                                <m:dPr>
-                                  <m:ctrlPr>
-                                    <a:rPr lang="pt-BR" sz="2000"/>
-                                  </m:ctrlPr>
-                                </m:dPr>
-                                <m:e>
-                                  <m:r>
-                                    <a:rPr lang="pt-BR" sz="2000"/>
-                                    <m:t>𝒙</m:t>
-                                  </m:r>
-                                  <m:r>
-                                    <a:rPr lang="pt-BR" sz="2000" i="1">
-                                      <a:latin typeface="Cambria Math" panose="02040503050406030204" pitchFamily="18" charset="0"/>
-                                    </a:rPr>
-                                    <m:t>(</m:t>
-                                  </m:r>
-                                  <m:r>
-                                    <a:rPr lang="pt-BR" sz="2000" i="1">
-                                      <a:latin typeface="Cambria Math" panose="02040503050406030204" pitchFamily="18" charset="0"/>
-                                    </a:rPr>
-                                    <m:t>𝑖</m:t>
-                                  </m:r>
-                                  <m:r>
-                                    <a:rPr lang="pt-BR" sz="2000" i="1">
-                                      <a:latin typeface="Cambria Math" panose="02040503050406030204" pitchFamily="18" charset="0"/>
-                                    </a:rPr>
-                                    <m:t>)</m:t>
-                                  </m:r>
-                                </m:e>
-                              </m:d>
-                              <m:r>
-                                <a:rPr lang="pt-BR" sz="2000"/>
-                                <m:t>=0 (</m:t>
-                              </m:r>
-                              <m:r>
-                                <m:rPr>
-                                  <m:nor/>
-                                </m:rPr>
-                                <a:rPr lang="pt-BR" sz="2000"/>
-                                <m:t>A</m:t>
-                              </m:r>
-                              <m:r>
-                                <m:rPr>
-                                  <m:nor/>
-                                </m:rPr>
-                                <a:rPr lang="pt-BR" sz="2000" dirty="0"/>
-                                <m:t>mostra</m:t>
-                              </m:r>
-                              <m:r>
-                                <m:rPr>
-                                  <m:nor/>
-                                </m:rPr>
-                                <a:rPr lang="pt-BR" sz="2000" dirty="0"/>
-                                <m:t> </m:t>
-                              </m:r>
-                              <m:r>
-                                <m:rPr>
-                                  <m:nor/>
-                                </m:rPr>
-                                <a:rPr lang="pt-BR" sz="2000" dirty="0"/>
-                                <m:t>sobre</m:t>
-                              </m:r>
-                              <m:r>
-                                <m:rPr>
-                                  <m:nor/>
-                                </m:rPr>
-                                <a:rPr lang="pt-BR" sz="2000" dirty="0"/>
-                                <m:t> </m:t>
-                              </m:r>
-                              <m:r>
-                                <m:rPr>
-                                  <m:nor/>
-                                </m:rPr>
-                                <a:rPr lang="pt-BR" sz="2000" dirty="0"/>
-                                <m:t>a</m:t>
-                              </m:r>
-                              <m:r>
-                                <m:rPr>
-                                  <m:nor/>
-                                </m:rPr>
-                                <a:rPr lang="pt-BR" sz="2000" dirty="0"/>
-                                <m:t> </m:t>
-                              </m:r>
-                              <m:r>
-                                <m:rPr>
-                                  <m:nor/>
-                                </m:rPr>
-                                <a:rPr lang="pt-BR" sz="2000" dirty="0"/>
-                                <m:t>fun</m:t>
-                              </m:r>
-                              <m:r>
-                                <m:rPr>
-                                  <m:nor/>
-                                </m:rPr>
-                                <a:rPr lang="pt-BR" sz="2000" dirty="0"/>
-                                <m:t>çã</m:t>
-                              </m:r>
-                              <m:r>
-                                <m:rPr>
-                                  <m:nor/>
-                                </m:rPr>
-                                <a:rPr lang="pt-BR" sz="2000" dirty="0"/>
-                                <m:t>o</m:t>
-                              </m:r>
-                              <m:r>
-                                <m:rPr>
-                                  <m:nor/>
-                                </m:rPr>
-                                <a:rPr lang="pt-BR" sz="2000" b="0" i="0" dirty="0" smtClean="0"/>
-                                <m:t>)</m:t>
-                              </m:r>
-                              <m:r>
-                                <m:rPr>
-                                  <m:nor/>
-                                </m:rPr>
-                                <a:rPr lang="pt-BR" sz="2000" dirty="0"/>
                                 <m:t> </m:t>
                               </m:r>
                             </m:e>
@@ -11832,7 +11759,7 @@
                         </m:e>
                       </m:d>
                       <m:r>
-                        <a:rPr lang="pt-BR" sz="2000" b="0" i="0" smtClean="0">
+                        <a:rPr lang="pt-BR" b="0" i="0" smtClean="0">
                           <a:latin typeface="Cambria Math" panose="02040503050406030204" pitchFamily="18" charset="0"/>
                         </a:rPr>
                         <m:t>.</m:t>
@@ -11840,7 +11767,7 @@
                     </m:oMath>
                   </m:oMathPara>
                 </a14:m>
-                <a:endParaRPr lang="pt-BR" sz="2400" dirty="0"/>
+                <a:endParaRPr lang="pt-BR" sz="3200" dirty="0"/>
               </a:p>
               <a:p>
                 <a:r>
@@ -11899,7 +11826,7 @@
               <p:cNvPr id="3" name="Espaço Reservado para Conteúdo 2">
                 <a:extLst>
                   <a:ext uri="{FF2B5EF4-FFF2-40B4-BE49-F238E27FC236}">
-                    <a16:creationId xmlns:a16="http://schemas.microsoft.com/office/drawing/2014/main" id="{1C254C3E-10F9-2C66-DDBB-99D1164F61E7}"/>
+                    <a16:creationId xmlns:a16="http://schemas.microsoft.com/office/drawing/2014/main" xmlns:a14="http://schemas.microsoft.com/office/drawing/2010/main" xmlns="" id="{1C254C3E-10F9-2C66-DDBB-99D1164F61E7}"/>
                   </a:ext>
                 </a:extLst>
               </p:cNvPr>
@@ -11912,13 +11839,13 @@
             </p:nvSpPr>
             <p:spPr>
               <a:xfrm>
-                <a:off x="4256314" y="1825624"/>
-                <a:ext cx="7840438" cy="5032375"/>
+                <a:off x="3557847" y="1825624"/>
+                <a:ext cx="8634153" cy="5032375"/>
               </a:xfrm>
-              <a:blipFill>
+              <a:blipFill rotWithShape="0">
                 <a:blip r:embed="rId3"/>
                 <a:stretch>
-                  <a:fillRect l="-1400" t="-1937" r="-1633"/>
+                  <a:fillRect l="-1271" t="-1937"/>
                 </a:stretch>
               </a:blipFill>
             </p:spPr>
@@ -11927,7 +11854,7 @@
               <a:lstStyle/>
               <a:p>
                 <a:r>
-                  <a:rPr lang="en-US">
+                  <a:rPr lang="pt-BR">
                     <a:noFill/>
                   </a:rPr>
                   <a:t> </a:t>
@@ -11942,7 +11869,7 @@
           <p:cNvPr id="16" name="Picture 3">
             <a:extLst>
               <a:ext uri="{FF2B5EF4-FFF2-40B4-BE49-F238E27FC236}">
-                <a16:creationId xmlns:a16="http://schemas.microsoft.com/office/drawing/2014/main" id="{797B4B4A-0E8F-6A84-F64E-0B174596F8C7}"/>
+                <a16:creationId xmlns:a16="http://schemas.microsoft.com/office/drawing/2014/main" xmlns="" id="{797B4B4A-0E8F-6A84-F64E-0B174596F8C7}"/>
               </a:ext>
             </a:extLst>
           </p:cNvPr>
@@ -11964,7 +11891,7 @@
         </p:blipFill>
         <p:spPr>
           <a:xfrm>
-            <a:off x="922562" y="2625467"/>
+            <a:off x="390548" y="2592216"/>
             <a:ext cx="2841780" cy="3263704"/>
           </a:xfrm>
           <a:prstGeom prst="rect">
@@ -11972,6 +11899,476 @@
           </a:prstGeom>
         </p:spPr>
       </p:pic>
+      <mc:AlternateContent xmlns:mc="http://schemas.openxmlformats.org/markup-compatibility/2006">
+        <mc:Choice xmlns:a14="http://schemas.microsoft.com/office/drawing/2010/main" Requires="a14">
+          <p:sp>
+            <p:nvSpPr>
+              <p:cNvPr id="4" name="Retângulo 3"/>
+              <p:cNvSpPr/>
+              <p:nvPr/>
+            </p:nvSpPr>
+            <p:spPr>
+              <a:xfrm>
+                <a:off x="11121143" y="3078080"/>
+                <a:ext cx="2792751" cy="369332"/>
+              </a:xfrm>
+              <a:prstGeom prst="rect">
+                <a:avLst/>
+              </a:prstGeom>
+            </p:spPr>
+            <p:txBody>
+              <a:bodyPr wrap="none">
+                <a:spAutoFit/>
+              </a:bodyPr>
+              <a:lstStyle/>
+              <a:p>
+                <a14:m>
+                  <m:oMathPara xmlns:m="http://schemas.openxmlformats.org/officeDocument/2006/math">
+                    <m:oMathParaPr>
+                      <m:jc m:val="centerGroup"/>
+                    </m:oMathParaPr>
+                    <m:oMath xmlns:m="http://schemas.openxmlformats.org/officeDocument/2006/math">
+                      <m:r>
+                        <a:rPr lang="pt-BR">
+                          <a:latin typeface="Cambria Math" panose="02040503050406030204" pitchFamily="18" charset="0"/>
+                        </a:rPr>
+                        <m:t>(</m:t>
+                      </m:r>
+                      <m:r>
+                        <m:rPr>
+                          <m:nor/>
+                        </m:rPr>
+                        <a:rPr lang="pt-BR"/>
+                        <m:t>Amostra</m:t>
+                      </m:r>
+                      <m:r>
+                        <m:rPr>
+                          <m:nor/>
+                        </m:rPr>
+                        <a:rPr lang="pt-BR"/>
+                        <m:t> </m:t>
+                      </m:r>
+                      <m:r>
+                        <m:rPr>
+                          <m:nor/>
+                        </m:rPr>
+                        <a:rPr lang="pt-BR"/>
+                        <m:t>acima</m:t>
+                      </m:r>
+                      <m:r>
+                        <m:rPr>
+                          <m:nor/>
+                        </m:rPr>
+                        <a:rPr lang="pt-BR" dirty="0"/>
+                        <m:t> </m:t>
+                      </m:r>
+                      <m:r>
+                        <m:rPr>
+                          <m:nor/>
+                        </m:rPr>
+                        <a:rPr lang="pt-BR" dirty="0"/>
+                        <m:t>da</m:t>
+                      </m:r>
+                      <m:r>
+                        <m:rPr>
+                          <m:nor/>
+                        </m:rPr>
+                        <a:rPr lang="pt-BR" dirty="0"/>
+                        <m:t> </m:t>
+                      </m:r>
+                      <m:r>
+                        <m:rPr>
+                          <m:nor/>
+                        </m:rPr>
+                        <a:rPr lang="pt-BR" dirty="0"/>
+                        <m:t>fun</m:t>
+                      </m:r>
+                      <m:r>
+                        <m:rPr>
+                          <m:nor/>
+                        </m:rPr>
+                        <a:rPr lang="pt-BR" dirty="0"/>
+                        <m:t>çã</m:t>
+                      </m:r>
+                      <m:r>
+                        <m:rPr>
+                          <m:nor/>
+                        </m:rPr>
+                        <a:rPr lang="pt-BR" dirty="0"/>
+                        <m:t>o</m:t>
+                      </m:r>
+                      <m:r>
+                        <m:rPr>
+                          <m:nor/>
+                        </m:rPr>
+                        <a:rPr lang="pt-BR" dirty="0"/>
+                        <m:t>)</m:t>
+                      </m:r>
+                    </m:oMath>
+                  </m:oMathPara>
+                </a14:m>
+                <a:endParaRPr lang="pt-BR" dirty="0"/>
+              </a:p>
+            </p:txBody>
+          </p:sp>
+        </mc:Choice>
+        <mc:Fallback>
+          <p:sp>
+            <p:nvSpPr>
+              <p:cNvPr id="4" name="Retângulo 3"/>
+              <p:cNvSpPr>
+                <a:spLocks noRot="1" noChangeAspect="1" noMove="1" noResize="1" noEditPoints="1" noAdjustHandles="1" noChangeArrowheads="1" noChangeShapeType="1" noTextEdit="1"/>
+              </p:cNvSpPr>
+              <p:nvPr/>
+            </p:nvSpPr>
+            <p:spPr>
+              <a:xfrm>
+                <a:off x="11121143" y="3078080"/>
+                <a:ext cx="2792751" cy="369332"/>
+              </a:xfrm>
+              <a:prstGeom prst="rect">
+                <a:avLst/>
+              </a:prstGeom>
+              <a:blipFill rotWithShape="0">
+                <a:blip r:embed="rId5"/>
+                <a:stretch>
+                  <a:fillRect b="-11475"/>
+                </a:stretch>
+              </a:blipFill>
+            </p:spPr>
+            <p:txBody>
+              <a:bodyPr/>
+              <a:lstStyle/>
+              <a:p>
+                <a:r>
+                  <a:rPr lang="pt-BR">
+                    <a:noFill/>
+                  </a:rPr>
+                  <a:t> </a:t>
+                </a:r>
+              </a:p>
+            </p:txBody>
+          </p:sp>
+        </mc:Fallback>
+      </mc:AlternateContent>
+      <mc:AlternateContent xmlns:mc="http://schemas.openxmlformats.org/markup-compatibility/2006">
+        <mc:Choice xmlns:a14="http://schemas.microsoft.com/office/drawing/2010/main" Requires="a14">
+          <p:sp>
+            <p:nvSpPr>
+              <p:cNvPr id="5" name="Retângulo 4"/>
+              <p:cNvSpPr/>
+              <p:nvPr/>
+            </p:nvSpPr>
+            <p:spPr>
+              <a:xfrm>
+                <a:off x="11626114" y="3447412"/>
+                <a:ext cx="2853666" cy="369332"/>
+              </a:xfrm>
+              <a:prstGeom prst="rect">
+                <a:avLst/>
+              </a:prstGeom>
+            </p:spPr>
+            <p:txBody>
+              <a:bodyPr wrap="none">
+                <a:spAutoFit/>
+              </a:bodyPr>
+              <a:lstStyle/>
+              <a:p>
+                <a14:m>
+                  <m:oMathPara xmlns:m="http://schemas.openxmlformats.org/officeDocument/2006/math">
+                    <m:oMathParaPr>
+                      <m:jc m:val="centerGroup"/>
+                    </m:oMathParaPr>
+                    <m:oMath xmlns:m="http://schemas.openxmlformats.org/officeDocument/2006/math">
+                      <m:r>
+                        <a:rPr lang="pt-BR">
+                          <a:latin typeface="Cambria Math" panose="02040503050406030204" pitchFamily="18" charset="0"/>
+                        </a:rPr>
+                        <m:t>(</m:t>
+                      </m:r>
+                      <m:r>
+                        <m:rPr>
+                          <m:nor/>
+                        </m:rPr>
+                        <a:rPr lang="pt-BR" dirty="0"/>
+                        <m:t>Amostra</m:t>
+                      </m:r>
+                      <m:r>
+                        <m:rPr>
+                          <m:nor/>
+                        </m:rPr>
+                        <a:rPr lang="pt-BR" dirty="0"/>
+                        <m:t> </m:t>
+                      </m:r>
+                      <m:r>
+                        <m:rPr>
+                          <m:nor/>
+                        </m:rPr>
+                        <a:rPr lang="pt-BR" dirty="0"/>
+                        <m:t>abaixo</m:t>
+                      </m:r>
+                      <m:r>
+                        <m:rPr>
+                          <m:nor/>
+                        </m:rPr>
+                        <a:rPr lang="pt-BR" dirty="0"/>
+                        <m:t> </m:t>
+                      </m:r>
+                      <m:r>
+                        <m:rPr>
+                          <m:nor/>
+                        </m:rPr>
+                        <a:rPr lang="pt-BR" dirty="0"/>
+                        <m:t>da</m:t>
+                      </m:r>
+                      <m:r>
+                        <m:rPr>
+                          <m:nor/>
+                        </m:rPr>
+                        <a:rPr lang="pt-BR" dirty="0"/>
+                        <m:t> </m:t>
+                      </m:r>
+                      <m:r>
+                        <m:rPr>
+                          <m:nor/>
+                        </m:rPr>
+                        <a:rPr lang="pt-BR" dirty="0"/>
+                        <m:t>fun</m:t>
+                      </m:r>
+                      <m:r>
+                        <m:rPr>
+                          <m:nor/>
+                        </m:rPr>
+                        <a:rPr lang="pt-BR" dirty="0"/>
+                        <m:t>çã</m:t>
+                      </m:r>
+                      <m:r>
+                        <m:rPr>
+                          <m:nor/>
+                        </m:rPr>
+                        <a:rPr lang="pt-BR" dirty="0"/>
+                        <m:t>o</m:t>
+                      </m:r>
+                      <m:r>
+                        <m:rPr>
+                          <m:nor/>
+                        </m:rPr>
+                        <a:rPr lang="pt-BR" dirty="0"/>
+                        <m:t>)</m:t>
+                      </m:r>
+                    </m:oMath>
+                  </m:oMathPara>
+                </a14:m>
+                <a:endParaRPr lang="pt-BR" dirty="0"/>
+              </a:p>
+            </p:txBody>
+          </p:sp>
+        </mc:Choice>
+        <mc:Fallback>
+          <p:sp>
+            <p:nvSpPr>
+              <p:cNvPr id="5" name="Retângulo 4"/>
+              <p:cNvSpPr>
+                <a:spLocks noRot="1" noChangeAspect="1" noMove="1" noResize="1" noEditPoints="1" noAdjustHandles="1" noChangeArrowheads="1" noChangeShapeType="1" noTextEdit="1"/>
+              </p:cNvSpPr>
+              <p:nvPr/>
+            </p:nvSpPr>
+            <p:spPr>
+              <a:xfrm>
+                <a:off x="11626114" y="3447412"/>
+                <a:ext cx="2853666" cy="369332"/>
+              </a:xfrm>
+              <a:prstGeom prst="rect">
+                <a:avLst/>
+              </a:prstGeom>
+              <a:blipFill rotWithShape="0">
+                <a:blip r:embed="rId6"/>
+                <a:stretch>
+                  <a:fillRect b="-13333"/>
+                </a:stretch>
+              </a:blipFill>
+            </p:spPr>
+            <p:txBody>
+              <a:bodyPr/>
+              <a:lstStyle/>
+              <a:p>
+                <a:r>
+                  <a:rPr lang="pt-BR">
+                    <a:noFill/>
+                  </a:rPr>
+                  <a:t> </a:t>
+                </a:r>
+              </a:p>
+            </p:txBody>
+          </p:sp>
+        </mc:Fallback>
+      </mc:AlternateContent>
+      <mc:AlternateContent xmlns:mc="http://schemas.openxmlformats.org/markup-compatibility/2006">
+        <mc:Choice xmlns:a14="http://schemas.microsoft.com/office/drawing/2010/main" Requires="a14">
+          <p:sp>
+            <p:nvSpPr>
+              <p:cNvPr id="6" name="Retângulo 5"/>
+              <p:cNvSpPr/>
+              <p:nvPr/>
+            </p:nvSpPr>
+            <p:spPr>
+              <a:xfrm>
+                <a:off x="12517518" y="4265048"/>
+                <a:ext cx="2696571" cy="369332"/>
+              </a:xfrm>
+              <a:prstGeom prst="rect">
+                <a:avLst/>
+              </a:prstGeom>
+            </p:spPr>
+            <p:txBody>
+              <a:bodyPr wrap="none">
+                <a:spAutoFit/>
+              </a:bodyPr>
+              <a:lstStyle/>
+              <a:p>
+                <a14:m>
+                  <m:oMathPara xmlns:m="http://schemas.openxmlformats.org/officeDocument/2006/math">
+                    <m:oMathParaPr>
+                      <m:jc m:val="centerGroup"/>
+                    </m:oMathParaPr>
+                    <m:oMath xmlns:m="http://schemas.openxmlformats.org/officeDocument/2006/math">
+                      <m:r>
+                        <a:rPr lang="pt-BR">
+                          <a:latin typeface="Cambria Math" panose="02040503050406030204" pitchFamily="18" charset="0"/>
+                        </a:rPr>
+                        <m:t>(</m:t>
+                      </m:r>
+                      <m:r>
+                        <m:rPr>
+                          <m:nor/>
+                        </m:rPr>
+                        <a:rPr lang="pt-BR"/>
+                        <m:t>A</m:t>
+                      </m:r>
+                      <m:r>
+                        <m:rPr>
+                          <m:nor/>
+                        </m:rPr>
+                        <a:rPr lang="pt-BR" dirty="0"/>
+                        <m:t>mostra</m:t>
+                      </m:r>
+                      <m:r>
+                        <m:rPr>
+                          <m:nor/>
+                        </m:rPr>
+                        <a:rPr lang="pt-BR" dirty="0"/>
+                        <m:t> </m:t>
+                      </m:r>
+                      <m:r>
+                        <m:rPr>
+                          <m:nor/>
+                        </m:rPr>
+                        <a:rPr lang="pt-BR" dirty="0"/>
+                        <m:t>sobre</m:t>
+                      </m:r>
+                      <m:r>
+                        <m:rPr>
+                          <m:nor/>
+                        </m:rPr>
+                        <a:rPr lang="pt-BR" dirty="0"/>
+                        <m:t> </m:t>
+                      </m:r>
+                      <m:r>
+                        <m:rPr>
+                          <m:nor/>
+                        </m:rPr>
+                        <a:rPr lang="pt-BR" dirty="0"/>
+                        <m:t>a</m:t>
+                      </m:r>
+                      <m:r>
+                        <m:rPr>
+                          <m:nor/>
+                        </m:rPr>
+                        <a:rPr lang="pt-BR" dirty="0"/>
+                        <m:t> </m:t>
+                      </m:r>
+                      <m:r>
+                        <m:rPr>
+                          <m:nor/>
+                        </m:rPr>
+                        <a:rPr lang="pt-BR" dirty="0"/>
+                        <m:t>fun</m:t>
+                      </m:r>
+                      <m:r>
+                        <m:rPr>
+                          <m:nor/>
+                        </m:rPr>
+                        <a:rPr lang="pt-BR" dirty="0"/>
+                        <m:t>çã</m:t>
+                      </m:r>
+                      <m:r>
+                        <m:rPr>
+                          <m:nor/>
+                        </m:rPr>
+                        <a:rPr lang="pt-BR" dirty="0"/>
+                        <m:t>o</m:t>
+                      </m:r>
+                      <m:r>
+                        <m:rPr>
+                          <m:nor/>
+                        </m:rPr>
+                        <a:rPr lang="pt-BR" dirty="0"/>
+                        <m:t>)</m:t>
+                      </m:r>
+                      <m:r>
+                        <m:rPr>
+                          <m:nor/>
+                        </m:rPr>
+                        <a:rPr lang="pt-BR" dirty="0"/>
+                        <m:t> </m:t>
+                      </m:r>
+                    </m:oMath>
+                  </m:oMathPara>
+                </a14:m>
+                <a:endParaRPr lang="pt-BR" dirty="0"/>
+              </a:p>
+            </p:txBody>
+          </p:sp>
+        </mc:Choice>
+        <mc:Fallback>
+          <p:sp>
+            <p:nvSpPr>
+              <p:cNvPr id="6" name="Retângulo 5"/>
+              <p:cNvSpPr>
+                <a:spLocks noRot="1" noChangeAspect="1" noMove="1" noResize="1" noEditPoints="1" noAdjustHandles="1" noChangeArrowheads="1" noChangeShapeType="1" noTextEdit="1"/>
+              </p:cNvSpPr>
+              <p:nvPr/>
+            </p:nvSpPr>
+            <p:spPr>
+              <a:xfrm>
+                <a:off x="12517518" y="4265048"/>
+                <a:ext cx="2696571" cy="369332"/>
+              </a:xfrm>
+              <a:prstGeom prst="rect">
+                <a:avLst/>
+              </a:prstGeom>
+              <a:blipFill rotWithShape="0">
+                <a:blip r:embed="rId7"/>
+                <a:stretch>
+                  <a:fillRect b="-13333"/>
+                </a:stretch>
+              </a:blipFill>
+            </p:spPr>
+            <p:txBody>
+              <a:bodyPr/>
+              <a:lstStyle/>
+              <a:p>
+                <a:r>
+                  <a:rPr lang="pt-BR">
+                    <a:noFill/>
+                  </a:rPr>
+                  <a:t> </a:t>
+                </a:r>
+              </a:p>
+            </p:txBody>
+          </p:sp>
+        </mc:Fallback>
+      </mc:AlternateContent>
     </p:spTree>
     <p:extLst>
       <p:ext uri="{BB962C8B-B14F-4D97-AF65-F5344CB8AC3E}">
@@ -11993,7 +12390,7 @@
         <p:cNvPr id="1" name="">
           <a:extLst>
             <a:ext uri="{FF2B5EF4-FFF2-40B4-BE49-F238E27FC236}">
-              <a16:creationId xmlns:a16="http://schemas.microsoft.com/office/drawing/2014/main" id="{681BC3B9-C36D-49B5-70A3-4BC587561B8D}"/>
+              <a16:creationId xmlns:a16="http://schemas.microsoft.com/office/drawing/2014/main" xmlns="" id="{681BC3B9-C36D-49B5-70A3-4BC587561B8D}"/>
             </a:ext>
           </a:extLst>
         </p:cNvPr>
@@ -12013,7 +12410,7 @@
           <p:cNvPr id="2" name="Título 1">
             <a:extLst>
               <a:ext uri="{FF2B5EF4-FFF2-40B4-BE49-F238E27FC236}">
-                <a16:creationId xmlns:a16="http://schemas.microsoft.com/office/drawing/2014/main" id="{777D7044-033A-83CB-744E-0A0EF1C533B0}"/>
+                <a16:creationId xmlns:a16="http://schemas.microsoft.com/office/drawing/2014/main" xmlns="" id="{777D7044-033A-83CB-744E-0A0EF1C533B0}"/>
               </a:ext>
             </a:extLst>
           </p:cNvPr>
@@ -12036,14 +12433,14 @@
           </a:p>
         </p:txBody>
       </p:sp>
-      <mc:AlternateContent xmlns:mc="http://schemas.openxmlformats.org/markup-compatibility/2006">
-        <mc:Choice xmlns:a14="http://schemas.microsoft.com/office/drawing/2010/main" Requires="a14">
+      <mc:AlternateContent xmlns:mc="http://schemas.openxmlformats.org/markup-compatibility/2006" xmlns:a14="http://schemas.microsoft.com/office/drawing/2010/main">
+        <mc:Choice Requires="a14">
           <p:sp>
             <p:nvSpPr>
               <p:cNvPr id="3" name="Espaço Reservado para Conteúdo 2">
                 <a:extLst>
                   <a:ext uri="{FF2B5EF4-FFF2-40B4-BE49-F238E27FC236}">
-                    <a16:creationId xmlns:a16="http://schemas.microsoft.com/office/drawing/2014/main" id="{CE2D84F5-4801-80A5-C74A-52605D59919E}"/>
+                    <a16:creationId xmlns:a16="http://schemas.microsoft.com/office/drawing/2014/main" xmlns="" id="{CE2D84F5-4801-80A5-C74A-52605D59919E}"/>
                   </a:ext>
                 </a:extLst>
               </p:cNvPr>
@@ -12427,7 +12824,7 @@
             </p:txBody>
           </p:sp>
         </mc:Choice>
-        <mc:Fallback>
+        <mc:Fallback xmlns="">
           <p:sp>
             <p:nvSpPr>
               <p:cNvPr id="3" name="Espaço Reservado para Conteúdo 2">
@@ -12476,7 +12873,7 @@
           <p:cNvPr id="10" name="Picture 9">
             <a:extLst>
               <a:ext uri="{FF2B5EF4-FFF2-40B4-BE49-F238E27FC236}">
-                <a16:creationId xmlns:a16="http://schemas.microsoft.com/office/drawing/2014/main" id="{8317135C-B768-15DB-007E-9233AE5ABB00}"/>
+                <a16:creationId xmlns:a16="http://schemas.microsoft.com/office/drawing/2014/main" xmlns="" id="{8317135C-B768-15DB-007E-9233AE5ABB00}"/>
               </a:ext>
             </a:extLst>
           </p:cNvPr>
@@ -12527,7 +12924,7 @@
         <p:cNvPr id="1" name="">
           <a:extLst>
             <a:ext uri="{FF2B5EF4-FFF2-40B4-BE49-F238E27FC236}">
-              <a16:creationId xmlns:a16="http://schemas.microsoft.com/office/drawing/2014/main" id="{724E4B1E-477E-FFD4-7402-E83E77BF2EF4}"/>
+              <a16:creationId xmlns:a16="http://schemas.microsoft.com/office/drawing/2014/main" xmlns="" id="{724E4B1E-477E-FFD4-7402-E83E77BF2EF4}"/>
             </a:ext>
           </a:extLst>
         </p:cNvPr>
@@ -12547,7 +12944,7 @@
           <p:cNvPr id="3" name="Content Placeholder 2">
             <a:extLst>
               <a:ext uri="{FF2B5EF4-FFF2-40B4-BE49-F238E27FC236}">
-                <a16:creationId xmlns:a16="http://schemas.microsoft.com/office/drawing/2014/main" id="{F8959B32-CD26-D2CA-3E0C-4F8F0704DEBE}"/>
+                <a16:creationId xmlns:a16="http://schemas.microsoft.com/office/drawing/2014/main" xmlns="" id="{F8959B32-CD26-D2CA-3E0C-4F8F0704DEBE}"/>
               </a:ext>
             </a:extLst>
           </p:cNvPr>
@@ -13116,7 +13513,7 @@
               <p:cNvPr id="6" name="CaixaDeTexto 5">
                 <a:extLst>
                   <a:ext uri="{FF2B5EF4-FFF2-40B4-BE49-F238E27FC236}">
-                    <a16:creationId xmlns:a16="http://schemas.microsoft.com/office/drawing/2014/main" id="{CECF4BC9-393F-92F3-2241-24670E5635B4}"/>
+                    <a16:creationId xmlns:a16="http://schemas.microsoft.com/office/drawing/2014/main" xmlns="" id="{CECF4BC9-393F-92F3-2241-24670E5635B4}"/>
                   </a:ext>
                 </a:extLst>
               </p:cNvPr>
@@ -13244,7 +13641,7 @@
               <p:cNvPr id="8" name="CaixaDeTexto 5">
                 <a:extLst>
                   <a:ext uri="{FF2B5EF4-FFF2-40B4-BE49-F238E27FC236}">
-                    <a16:creationId xmlns:a16="http://schemas.microsoft.com/office/drawing/2014/main" id="{48D3A820-D198-F9AB-C6B3-3F78DA6684D0}"/>
+                    <a16:creationId xmlns:a16="http://schemas.microsoft.com/office/drawing/2014/main" xmlns="" id="{48D3A820-D198-F9AB-C6B3-3F78DA6684D0}"/>
                   </a:ext>
                 </a:extLst>
               </p:cNvPr>
@@ -13383,7 +13780,13 @@
   <p:cSld>
     <p:spTree>
       <p:nvGrpSpPr>
-        <p:cNvPr id="1" name=""/>
+        <p:cNvPr id="1" name="">
+          <a:extLst>
+            <a:ext uri="{FF2B5EF4-FFF2-40B4-BE49-F238E27FC236}">
+              <a16:creationId xmlns:a16="http://schemas.microsoft.com/office/drawing/2014/main" xmlns="" id="{724E4B1E-477E-FFD4-7402-E83E77BF2EF4}"/>
+            </a:ext>
+          </a:extLst>
+        </p:cNvPr>
         <p:cNvGrpSpPr/>
         <p:nvPr/>
       </p:nvGrpSpPr>
@@ -13397,35 +13800,10 @@
       </p:grpSpPr>
       <p:sp>
         <p:nvSpPr>
-          <p:cNvPr id="2" name="Title 1">
-            <a:extLst>
-              <a:ext uri="{FF2B5EF4-FFF2-40B4-BE49-F238E27FC236}">
-                <a16:creationId xmlns:a16="http://schemas.microsoft.com/office/drawing/2014/main" id="{DA7FDC7F-B899-B1A6-F69A-351822C6EFD7}"/>
-              </a:ext>
-            </a:extLst>
-          </p:cNvPr>
-          <p:cNvSpPr>
-            <a:spLocks noGrp="1"/>
-          </p:cNvSpPr>
-          <p:nvPr>
-            <p:ph type="title"/>
-          </p:nvPr>
-        </p:nvSpPr>
-        <p:spPr/>
-        <p:txBody>
-          <a:bodyPr/>
-          <a:lstStyle/>
-          <a:p>
-            <a:endParaRPr lang="en-US"/>
-          </a:p>
-        </p:txBody>
-      </p:sp>
-      <p:sp>
-        <p:nvSpPr>
           <p:cNvPr id="3" name="Content Placeholder 2">
             <a:extLst>
               <a:ext uri="{FF2B5EF4-FFF2-40B4-BE49-F238E27FC236}">
-                <a16:creationId xmlns:a16="http://schemas.microsoft.com/office/drawing/2014/main" id="{E5A0C298-3D62-58C4-3B44-8F0C5C3E0A0C}"/>
+                <a16:creationId xmlns:a16="http://schemas.microsoft.com/office/drawing/2014/main" xmlns="" id="{F8959B32-CD26-D2CA-3E0C-4F8F0704DEBE}"/>
               </a:ext>
             </a:extLst>
           </p:cNvPr>
@@ -13436,43 +13814,45 @@
             <p:ph idx="1"/>
           </p:nvPr>
         </p:nvSpPr>
-        <p:spPr/>
+        <p:spPr>
+          <a:xfrm>
+            <a:off x="610490" y="1794459"/>
+            <a:ext cx="11070771" cy="3475810"/>
+          </a:xfrm>
+        </p:spPr>
         <p:txBody>
-          <a:bodyPr/>
+          <a:bodyPr>
+            <a:normAutofit/>
+          </a:bodyPr>
           <a:lstStyle/>
           <a:p>
-            <a:r>
-              <a:rPr lang="pt-BR" dirty="0"/>
-              <a:t>Da mesma forma que com </a:t>
-            </a:r>
-            <a:r>
-              <a:rPr lang="pt-BR"/>
-              <a:t>a regressão, usando </a:t>
-            </a:r>
-            <a:r>
-              <a:rPr lang="pt-BR" dirty="0"/>
-              <a:t>o gradiente descendente e validação cruzada, como o </a:t>
-            </a:r>
-            <a:r>
-              <a:rPr lang="pt-BR" i="1" dirty="0"/>
+            <a:pPr marL="0" indent="0" algn="ctr">
+              <a:buNone/>
+            </a:pPr>
+            <a:r>
+              <a:rPr lang="pt-BR" sz="6000" dirty="0"/>
+              <a:t>Da mesma forma que com a regressão, usando o gradiente descendente e validação cruzada, como o </a:t>
+            </a:r>
+            <a:r>
+              <a:rPr lang="pt-BR" sz="6000" i="1" dirty="0"/>
               <a:t>k-</a:t>
             </a:r>
             <a:r>
-              <a:rPr lang="pt-BR" i="1" dirty="0" err="1"/>
+              <a:rPr lang="pt-BR" sz="6000" i="1" dirty="0" err="1"/>
               <a:t>fold</a:t>
             </a:r>
             <a:r>
-              <a:rPr lang="pt-BR" dirty="0"/>
+              <a:rPr lang="pt-BR" sz="6000" dirty="0"/>
               <a:t>, por exemplo.</a:t>
             </a:r>
-            <a:endParaRPr lang="en-US" dirty="0"/>
+            <a:endParaRPr lang="en-US" sz="6000" dirty="0"/>
           </a:p>
         </p:txBody>
       </p:sp>
     </p:spTree>
     <p:extLst>
       <p:ext uri="{BB962C8B-B14F-4D97-AF65-F5344CB8AC3E}">
-        <p14:creationId xmlns:p14="http://schemas.microsoft.com/office/powerpoint/2010/main" val="3414813146"/>
+        <p14:creationId xmlns:p14="http://schemas.microsoft.com/office/powerpoint/2010/main" val="1322526149"/>
       </p:ext>
     </p:extLst>
   </p:cSld>
@@ -13504,7 +13884,7 @@
           <p:cNvPr id="2" name="Title 1">
             <a:extLst>
               <a:ext uri="{FF2B5EF4-FFF2-40B4-BE49-F238E27FC236}">
-                <a16:creationId xmlns:a16="http://schemas.microsoft.com/office/drawing/2014/main" id="{F1CB30D0-D052-EC03-3C25-35C106AA1077}"/>
+                <a16:creationId xmlns:a16="http://schemas.microsoft.com/office/drawing/2014/main" xmlns="" id="{DA7FDC7F-B899-B1A6-F69A-351822C6EFD7}"/>
               </a:ext>
             </a:extLst>
           </p:cNvPr>
@@ -13520,6 +13900,142 @@
           <a:bodyPr/>
           <a:lstStyle/>
           <a:p>
+            <a:endParaRPr lang="en-US"/>
+          </a:p>
+        </p:txBody>
+      </p:sp>
+      <p:sp>
+        <p:nvSpPr>
+          <p:cNvPr id="3" name="Content Placeholder 2">
+            <a:extLst>
+              <a:ext uri="{FF2B5EF4-FFF2-40B4-BE49-F238E27FC236}">
+                <a16:creationId xmlns:a16="http://schemas.microsoft.com/office/drawing/2014/main" xmlns="" id="{E5A0C298-3D62-58C4-3B44-8F0C5C3E0A0C}"/>
+              </a:ext>
+            </a:extLst>
+          </p:cNvPr>
+          <p:cNvSpPr>
+            <a:spLocks noGrp="1"/>
+          </p:cNvSpPr>
+          <p:nvPr>
+            <p:ph idx="1"/>
+          </p:nvPr>
+        </p:nvSpPr>
+        <p:spPr/>
+        <p:txBody>
+          <a:bodyPr/>
+          <a:lstStyle/>
+          <a:p>
+            <a:r>
+              <a:rPr lang="en-US" dirty="0" err="1" smtClean="0"/>
+              <a:t>Quem</a:t>
+            </a:r>
+            <a:r>
+              <a:rPr lang="en-US" dirty="0" smtClean="0"/>
+              <a:t> </a:t>
+            </a:r>
+            <a:r>
+              <a:rPr lang="en-US" dirty="0" err="1" smtClean="0"/>
+              <a:t>mapeia</a:t>
+            </a:r>
+            <a:r>
+              <a:rPr lang="en-US" dirty="0" smtClean="0"/>
+              <a:t> </a:t>
+            </a:r>
+            <a:r>
+              <a:rPr lang="en-US" dirty="0" err="1" smtClean="0"/>
+              <a:t>os</a:t>
+            </a:r>
+            <a:r>
+              <a:rPr lang="en-US" dirty="0" smtClean="0"/>
+              <a:t> </a:t>
+            </a:r>
+            <a:r>
+              <a:rPr lang="en-US" dirty="0" err="1" smtClean="0"/>
+              <a:t>valores</a:t>
+            </a:r>
+            <a:r>
+              <a:rPr lang="en-US" dirty="0" smtClean="0"/>
+              <a:t> das </a:t>
+            </a:r>
+            <a:r>
+              <a:rPr lang="en-US" dirty="0" err="1" smtClean="0"/>
+              <a:t>funções</a:t>
+            </a:r>
+            <a:r>
+              <a:rPr lang="en-US" dirty="0" smtClean="0"/>
+              <a:t> discriminates </a:t>
+            </a:r>
+            <a:r>
+              <a:rPr lang="en-US" dirty="0" err="1" smtClean="0"/>
+              <a:t>em</a:t>
+            </a:r>
+            <a:r>
+              <a:rPr lang="en-US" dirty="0" smtClean="0"/>
+              <a:t> </a:t>
+            </a:r>
+            <a:r>
+              <a:rPr lang="en-US" dirty="0" err="1" smtClean="0"/>
+              <a:t>valores</a:t>
+            </a:r>
+            <a:r>
+              <a:rPr lang="en-US" dirty="0" smtClean="0"/>
+              <a:t> </a:t>
+            </a:r>
+            <a:endParaRPr lang="en-US" dirty="0"/>
+          </a:p>
+        </p:txBody>
+      </p:sp>
+    </p:spTree>
+    <p:extLst>
+      <p:ext uri="{BB962C8B-B14F-4D97-AF65-F5344CB8AC3E}">
+        <p14:creationId xmlns:p14="http://schemas.microsoft.com/office/powerpoint/2010/main" val="3414813146"/>
+      </p:ext>
+    </p:extLst>
+  </p:cSld>
+  <p:clrMapOvr>
+    <a:masterClrMapping/>
+  </p:clrMapOvr>
+</p:sld>
+</file>
+
+<file path=ppt/slides/slide22.xml><?xml version="1.0" encoding="utf-8"?>
+<p:sld xmlns:a="http://schemas.openxmlformats.org/drawingml/2006/main" xmlns:r="http://schemas.openxmlformats.org/officeDocument/2006/relationships" xmlns:p="http://schemas.openxmlformats.org/presentationml/2006/main">
+  <p:cSld>
+    <p:spTree>
+      <p:nvGrpSpPr>
+        <p:cNvPr id="1" name=""/>
+        <p:cNvGrpSpPr/>
+        <p:nvPr/>
+      </p:nvGrpSpPr>
+      <p:grpSpPr>
+        <a:xfrm>
+          <a:off x="0" y="0"/>
+          <a:ext cx="0" cy="0"/>
+          <a:chOff x="0" y="0"/>
+          <a:chExt cx="0" cy="0"/>
+        </a:xfrm>
+      </p:grpSpPr>
+      <p:sp>
+        <p:nvSpPr>
+          <p:cNvPr id="2" name="Title 1">
+            <a:extLst>
+              <a:ext uri="{FF2B5EF4-FFF2-40B4-BE49-F238E27FC236}">
+                <a16:creationId xmlns:a16="http://schemas.microsoft.com/office/drawing/2014/main" xmlns="" id="{F1CB30D0-D052-EC03-3C25-35C106AA1077}"/>
+              </a:ext>
+            </a:extLst>
+          </p:cNvPr>
+          <p:cNvSpPr>
+            <a:spLocks noGrp="1"/>
+          </p:cNvSpPr>
+          <p:nvPr>
+            <p:ph type="title"/>
+          </p:nvPr>
+        </p:nvSpPr>
+        <p:spPr/>
+        <p:txBody>
+          <a:bodyPr/>
+          <a:lstStyle/>
+          <a:p>
             <a:r>
               <a:rPr lang="pt-BR" dirty="0"/>
               <a:t>Matriz de confusão</a:t>
@@ -13533,7 +14049,7 @@
           <p:cNvPr id="2050" name="Picture 2" descr="Validate me Constructive criticism permitted – @gallusrostromegalus on  Tumblr">
             <a:extLst>
               <a:ext uri="{FF2B5EF4-FFF2-40B4-BE49-F238E27FC236}">
-                <a16:creationId xmlns:a16="http://schemas.microsoft.com/office/drawing/2014/main" id="{A9C68C0F-3A42-8D60-0B8A-979695E4072E}"/>
+                <a16:creationId xmlns:a16="http://schemas.microsoft.com/office/drawing/2014/main" xmlns="" id="{A9C68C0F-3A42-8D60-0B8A-979695E4072E}"/>
               </a:ext>
             </a:extLst>
           </p:cNvPr>
@@ -13588,7 +14104,7 @@
 </p:sld>
 </file>
 
-<file path=ppt/slides/slide22.xml><?xml version="1.0" encoding="utf-8"?>
+<file path=ppt/slides/slide23.xml><?xml version="1.0" encoding="utf-8"?>
 <p:sld xmlns:a="http://schemas.openxmlformats.org/drawingml/2006/main" xmlns:r="http://schemas.openxmlformats.org/officeDocument/2006/relationships" xmlns:p="http://schemas.openxmlformats.org/presentationml/2006/main">
   <p:cSld>
     <p:spTree>
@@ -13610,7 +14126,7 @@
           <p:cNvPr id="4" name="Título 1">
             <a:extLst>
               <a:ext uri="{FF2B5EF4-FFF2-40B4-BE49-F238E27FC236}">
-                <a16:creationId xmlns:a16="http://schemas.microsoft.com/office/drawing/2014/main" id="{32666AC8-2E17-4DB4-B0F5-60C640CCFD2E}"/>
+                <a16:creationId xmlns:a16="http://schemas.microsoft.com/office/drawing/2014/main" xmlns="" id="{32666AC8-2E17-4DB4-B0F5-60C640CCFD2E}"/>
               </a:ext>
             </a:extLst>
           </p:cNvPr>
@@ -13674,7 +14190,7 @@
 </p:sld>
 </file>
 
-<file path=ppt/slides/slide23.xml><?xml version="1.0" encoding="utf-8"?>
+<file path=ppt/slides/slide24.xml><?xml version="1.0" encoding="utf-8"?>
 <p:sld xmlns:a="http://schemas.openxmlformats.org/drawingml/2006/main" xmlns:r="http://schemas.openxmlformats.org/officeDocument/2006/relationships" xmlns:p="http://schemas.openxmlformats.org/presentationml/2006/main">
   <p:cSld>
     <p:spTree>
@@ -13696,7 +14212,7 @@
           <p:cNvPr id="4" name="Título 1">
             <a:extLst>
               <a:ext uri="{FF2B5EF4-FFF2-40B4-BE49-F238E27FC236}">
-                <a16:creationId xmlns:a16="http://schemas.microsoft.com/office/drawing/2014/main" id="{32666AC8-2E17-4DB4-B0F5-60C640CCFD2E}"/>
+                <a16:creationId xmlns:a16="http://schemas.microsoft.com/office/drawing/2014/main" xmlns="" id="{32666AC8-2E17-4DB4-B0F5-60C640CCFD2E}"/>
               </a:ext>
             </a:extLst>
           </p:cNvPr>
@@ -13870,7 +14386,7 @@
           <p:cNvPr id="4" name="Picture 5" descr="Image result for supervised learning">
             <a:extLst>
               <a:ext uri="{FF2B5EF4-FFF2-40B4-BE49-F238E27FC236}">
-                <a16:creationId xmlns:a16="http://schemas.microsoft.com/office/drawing/2014/main" id="{2520F4EA-1E3E-4F3B-97C0-DF47861DCD42}"/>
+                <a16:creationId xmlns:a16="http://schemas.microsoft.com/office/drawing/2014/main" xmlns="" id="{2520F4EA-1E3E-4F3B-97C0-DF47861DCD42}"/>
               </a:ext>
             </a:extLst>
           </p:cNvPr>
@@ -14198,7 +14714,7 @@
           <p:cNvPr id="2" name="Picture 2">
             <a:extLst>
               <a:ext uri="{FF2B5EF4-FFF2-40B4-BE49-F238E27FC236}">
-                <a16:creationId xmlns:a16="http://schemas.microsoft.com/office/drawing/2014/main" id="{A9D184C6-ECA9-05BF-F6B4-C0965441E4E9}"/>
+                <a16:creationId xmlns:a16="http://schemas.microsoft.com/office/drawing/2014/main" xmlns="" id="{A9D184C6-ECA9-05BF-F6B4-C0965441E4E9}"/>
               </a:ext>
             </a:extLst>
           </p:cNvPr>
@@ -14273,7 +14789,7 @@
           <p:cNvPr id="1026" name="Picture 2" descr="but it happened 😂 #DeepLearning #AI #MachineLearning">
             <a:extLst>
               <a:ext uri="{FF2B5EF4-FFF2-40B4-BE49-F238E27FC236}">
-                <a16:creationId xmlns:a16="http://schemas.microsoft.com/office/drawing/2014/main" id="{F25FF98E-22C0-F45E-2254-540617F2FD27}"/>
+                <a16:creationId xmlns:a16="http://schemas.microsoft.com/office/drawing/2014/main" xmlns="" id="{F25FF98E-22C0-F45E-2254-540617F2FD27}"/>
               </a:ext>
             </a:extLst>
           </p:cNvPr>
@@ -14350,7 +14866,7 @@
           <p:cNvPr id="2" name="Title 1">
             <a:extLst>
               <a:ext uri="{FF2B5EF4-FFF2-40B4-BE49-F238E27FC236}">
-                <a16:creationId xmlns:a16="http://schemas.microsoft.com/office/drawing/2014/main" id="{C2C95A22-E872-4069-E235-358A1FCDD284}"/>
+                <a16:creationId xmlns:a16="http://schemas.microsoft.com/office/drawing/2014/main" xmlns="" id="{C2C95A22-E872-4069-E235-358A1FCDD284}"/>
               </a:ext>
             </a:extLst>
           </p:cNvPr>
@@ -14381,7 +14897,7 @@
               <p:cNvPr id="3" name="Content Placeholder 2">
                 <a:extLst>
                   <a:ext uri="{FF2B5EF4-FFF2-40B4-BE49-F238E27FC236}">
-                    <a16:creationId xmlns:a16="http://schemas.microsoft.com/office/drawing/2014/main" id="{76965F31-6E51-4FAB-4852-DECB11BED972}"/>
+                    <a16:creationId xmlns:a16="http://schemas.microsoft.com/office/drawing/2014/main" xmlns="" id="{76965F31-6E51-4FAB-4852-DECB11BED972}"/>
                   </a:ext>
                 </a:extLst>
               </p:cNvPr>
@@ -14635,7 +15151,7 @@
         <p:cNvPr id="1" name="">
           <a:extLst>
             <a:ext uri="{FF2B5EF4-FFF2-40B4-BE49-F238E27FC236}">
-              <a16:creationId xmlns:a16="http://schemas.microsoft.com/office/drawing/2014/main" id="{183AE076-4457-7BD3-2388-70AAD71222AC}"/>
+              <a16:creationId xmlns:a16="http://schemas.microsoft.com/office/drawing/2014/main" xmlns="" id="{183AE076-4457-7BD3-2388-70AAD71222AC}"/>
             </a:ext>
           </a:extLst>
         </p:cNvPr>
@@ -14655,7 +15171,7 @@
           <p:cNvPr id="2" name="Title 1">
             <a:extLst>
               <a:ext uri="{FF2B5EF4-FFF2-40B4-BE49-F238E27FC236}">
-                <a16:creationId xmlns:a16="http://schemas.microsoft.com/office/drawing/2014/main" id="{C39F8340-2935-1CC3-CE87-3E1A76A73E3F}"/>
+                <a16:creationId xmlns:a16="http://schemas.microsoft.com/office/drawing/2014/main" xmlns="" id="{C39F8340-2935-1CC3-CE87-3E1A76A73E3F}"/>
               </a:ext>
             </a:extLst>
           </p:cNvPr>
@@ -14684,7 +15200,7 @@
           <p:cNvPr id="3" name="Content Placeholder 2">
             <a:extLst>
               <a:ext uri="{FF2B5EF4-FFF2-40B4-BE49-F238E27FC236}">
-                <a16:creationId xmlns:a16="http://schemas.microsoft.com/office/drawing/2014/main" id="{310FC0EC-BE21-C1F6-BD0D-5113525C20D7}"/>
+                <a16:creationId xmlns:a16="http://schemas.microsoft.com/office/drawing/2014/main" xmlns="" id="{310FC0EC-BE21-C1F6-BD0D-5113525C20D7}"/>
               </a:ext>
             </a:extLst>
           </p:cNvPr>
@@ -14878,7 +15394,7 @@
           <p:cNvPr id="2" name="Title 1">
             <a:extLst>
               <a:ext uri="{FF2B5EF4-FFF2-40B4-BE49-F238E27FC236}">
-                <a16:creationId xmlns:a16="http://schemas.microsoft.com/office/drawing/2014/main" id="{341127B6-6972-D992-E732-0F4C9D9283E8}"/>
+                <a16:creationId xmlns:a16="http://schemas.microsoft.com/office/drawing/2014/main" xmlns="" id="{341127B6-6972-D992-E732-0F4C9D9283E8}"/>
               </a:ext>
             </a:extLst>
           </p:cNvPr>
@@ -14907,7 +15423,7 @@
           <p:cNvPr id="3" name="Content Placeholder 2">
             <a:extLst>
               <a:ext uri="{FF2B5EF4-FFF2-40B4-BE49-F238E27FC236}">
-                <a16:creationId xmlns:a16="http://schemas.microsoft.com/office/drawing/2014/main" id="{0F650875-3EEC-71D0-1DC4-489808F8210D}"/>
+                <a16:creationId xmlns:a16="http://schemas.microsoft.com/office/drawing/2014/main" xmlns="" id="{0F650875-3EEC-71D0-1DC4-489808F8210D}"/>
               </a:ext>
             </a:extLst>
           </p:cNvPr>
@@ -15116,7 +15632,7 @@
           <p:cNvPr id="3" name="Content Placeholder 2">
             <a:extLst>
               <a:ext uri="{FF2B5EF4-FFF2-40B4-BE49-F238E27FC236}">
-                <a16:creationId xmlns:a16="http://schemas.microsoft.com/office/drawing/2014/main" id="{D30302BD-A868-44A9-D6B7-B33026A62A80}"/>
+                <a16:creationId xmlns:a16="http://schemas.microsoft.com/office/drawing/2014/main" xmlns="" id="{D30302BD-A868-44A9-D6B7-B33026A62A80}"/>
               </a:ext>
             </a:extLst>
           </p:cNvPr>

--- a/slides/C24_Classificação.pptx
+++ b/slides/C24_Classificação.pptx
@@ -5,10 +5,10 @@
     <p:sldMasterId id="2147483648" r:id="rId1"/>
   </p:sldMasterIdLst>
   <p:notesMasterIdLst>
-    <p:notesMasterId r:id="rId26"/>
+    <p:notesMasterId r:id="rId39"/>
   </p:notesMasterIdLst>
   <p:handoutMasterIdLst>
-    <p:handoutMasterId r:id="rId27"/>
+    <p:handoutMasterId r:id="rId40"/>
   </p:handoutMasterIdLst>
   <p:sldIdLst>
     <p:sldId id="256" r:id="rId2"/>
@@ -23,18 +23,31 @@
     <p:sldId id="332" r:id="rId11"/>
     <p:sldId id="358" r:id="rId12"/>
     <p:sldId id="359" r:id="rId13"/>
-    <p:sldId id="357" r:id="rId14"/>
-    <p:sldId id="344" r:id="rId15"/>
-    <p:sldId id="360" r:id="rId16"/>
-    <p:sldId id="345" r:id="rId17"/>
-    <p:sldId id="362" r:id="rId18"/>
-    <p:sldId id="363" r:id="rId19"/>
-    <p:sldId id="364" r:id="rId20"/>
-    <p:sldId id="365" r:id="rId21"/>
-    <p:sldId id="356" r:id="rId22"/>
-    <p:sldId id="352" r:id="rId23"/>
-    <p:sldId id="293" r:id="rId24"/>
-    <p:sldId id="306" r:id="rId25"/>
+    <p:sldId id="344" r:id="rId14"/>
+    <p:sldId id="360" r:id="rId15"/>
+    <p:sldId id="345" r:id="rId16"/>
+    <p:sldId id="362" r:id="rId17"/>
+    <p:sldId id="363" r:id="rId18"/>
+    <p:sldId id="364" r:id="rId19"/>
+    <p:sldId id="365" r:id="rId20"/>
+    <p:sldId id="356" r:id="rId21"/>
+    <p:sldId id="375" r:id="rId22"/>
+    <p:sldId id="392" r:id="rId23"/>
+    <p:sldId id="376" r:id="rId24"/>
+    <p:sldId id="390" r:id="rId25"/>
+    <p:sldId id="395" r:id="rId26"/>
+    <p:sldId id="385" r:id="rId27"/>
+    <p:sldId id="387" r:id="rId28"/>
+    <p:sldId id="398" r:id="rId29"/>
+    <p:sldId id="386" r:id="rId30"/>
+    <p:sldId id="393" r:id="rId31"/>
+    <p:sldId id="357" r:id="rId32"/>
+    <p:sldId id="396" r:id="rId33"/>
+    <p:sldId id="394" r:id="rId34"/>
+    <p:sldId id="366" r:id="rId35"/>
+    <p:sldId id="352" r:id="rId36"/>
+    <p:sldId id="293" r:id="rId37"/>
+    <p:sldId id="306" r:id="rId38"/>
   </p:sldIdLst>
   <p:sldSz cx="12192000" cy="6858000"/>
   <p:notesSz cx="7315200" cy="9601200"/>
@@ -298,7 +311,7 @@
           <a:p>
             <a:fld id="{144F1436-6906-4D93-B7A2-786C327BFA14}" type="datetimeFigureOut">
               <a:rPr lang="nl-BE" smtClean="0"/>
-              <a:t>19/02/2026</a:t>
+              <a:t>20/02/2026</a:t>
             </a:fld>
             <a:endParaRPr lang="nl-BE"/>
           </a:p>
@@ -364,7 +377,7 @@
           <a:p>
             <a:fld id="{F7E56D9B-79AD-444A-AFED-DEC23408F8B4}" type="slidenum">
               <a:rPr lang="nl-BE" smtClean="0"/>
-              <a:t>‹nº›</a:t>
+              <a:t>‹#›</a:t>
             </a:fld>
             <a:endParaRPr lang="nl-BE"/>
           </a:p>
@@ -463,7 +476,7 @@
           <a:p>
             <a:fld id="{AA8CD09E-2914-4F47-B6C1-51B2C31814C9}" type="datetimeFigureOut">
               <a:rPr lang="pt-BR" smtClean="0"/>
-              <a:t>19/02/2026</a:t>
+              <a:t>20/02/2026</a:t>
             </a:fld>
             <a:endParaRPr lang="pt-BR"/>
           </a:p>
@@ -621,7 +634,7 @@
           <a:p>
             <a:fld id="{6FC8D850-966F-45A6-8DE7-15B891E7D40D}" type="slidenum">
               <a:rPr lang="pt-BR" smtClean="0"/>
-              <a:t>‹nº›</a:t>
+              <a:t>‹#›</a:t>
             </a:fld>
             <a:endParaRPr lang="pt-BR"/>
           </a:p>
@@ -798,10 +811,6 @@
             </a:r>
           </a:p>
           <a:p>
-            <a:r>
-              <a:rPr lang="pt-BR" dirty="0"/>
-              <a:t/>
-            </a:r>
             <a:br>
               <a:rPr lang="pt-BR" dirty="0"/>
             </a:br>
@@ -916,10 +925,6 @@
             </a:r>
           </a:p>
           <a:p>
-            <a:r>
-              <a:rPr lang="pt-BR" dirty="0"/>
-              <a:t/>
-            </a:r>
             <a:br>
               <a:rPr lang="pt-BR" dirty="0"/>
             </a:br>
@@ -1055,10 +1060,6 @@
             </a:r>
           </a:p>
           <a:p>
-            <a:r>
-              <a:rPr lang="pt-BR" dirty="0"/>
-              <a:t/>
-            </a:r>
             <a:br>
               <a:rPr lang="pt-BR" dirty="0"/>
             </a:br>
@@ -1133,10 +1134,6 @@
               <a:rPr lang="pt-BR" b="1" dirty="0"/>
               <a:t>não particionam o espaço</a:t>
             </a:r>
-            <a:r>
-              <a:rPr lang="pt-BR" dirty="0"/>
-              <a:t/>
-            </a:r>
             <a:br>
               <a:rPr lang="pt-BR" dirty="0"/>
             </a:br>
@@ -1157,10 +1154,6 @@
             </a:r>
           </a:p>
           <a:p>
-            <a:r>
-              <a:rPr lang="pt-BR" dirty="0"/>
-              <a:t/>
-            </a:r>
             <a:br>
               <a:rPr lang="pt-BR" dirty="0"/>
             </a:br>
@@ -1246,10 +1239,6 @@
               <a:rPr lang="pt-BR" b="1" dirty="0"/>
               <a:t>sobrepor</a:t>
             </a:r>
-            <a:r>
-              <a:rPr lang="pt-BR" dirty="0"/>
-              <a:t/>
-            </a:r>
             <a:br>
               <a:rPr lang="pt-BR" dirty="0"/>
             </a:br>
@@ -1259,10 +1248,6 @@
             </a:r>
           </a:p>
           <a:p>
-            <a:r>
-              <a:rPr lang="pt-BR" dirty="0"/>
-              <a:t/>
-            </a:r>
             <a:br>
               <a:rPr lang="pt-BR" dirty="0"/>
             </a:br>
@@ -1297,10 +1282,6 @@
               <a:rPr lang="pt-BR" i="1" dirty="0"/>
               <a:t>particionado</a:t>
             </a:r>
-            <a:r>
-              <a:rPr lang="pt-BR" dirty="0"/>
-              <a:t/>
-            </a:r>
             <a:br>
               <a:rPr lang="pt-BR" dirty="0"/>
             </a:br>
@@ -1343,10 +1324,6 @@
             </a:r>
           </a:p>
           <a:p>
-            <a:r>
-              <a:rPr lang="pt-BR" dirty="0"/>
-              <a:t/>
-            </a:r>
             <a:br>
               <a:rPr lang="pt-BR" dirty="0"/>
             </a:br>
@@ -1419,10 +1396,6 @@
             </a:r>
           </a:p>
           <a:p>
-            <a:r>
-              <a:rPr lang="pt-BR" dirty="0"/>
-              <a:t/>
-            </a:r>
             <a:br>
               <a:rPr lang="pt-BR" dirty="0"/>
             </a:br>
@@ -1532,10 +1505,6 @@
             <a:endParaRPr lang="pt-BR" dirty="0"/>
           </a:p>
           <a:p>
-            <a:r>
-              <a:rPr lang="pt-BR" dirty="0"/>
-              <a:t/>
-            </a:r>
             <a:br>
               <a:rPr lang="pt-BR" dirty="0"/>
             </a:br>
@@ -1583,10 +1552,6 @@
             </a:r>
           </a:p>
           <a:p>
-            <a:r>
-              <a:rPr lang="pt-BR" dirty="0"/>
-              <a:t/>
-            </a:r>
             <a:br>
               <a:rPr lang="pt-BR" dirty="0"/>
             </a:br>
@@ -1679,6 +1644,497 @@
     <p:extLst>
       <p:ext uri="{BB962C8B-B14F-4D97-AF65-F5344CB8AC3E}">
         <p14:creationId xmlns:p14="http://schemas.microsoft.com/office/powerpoint/2010/main" val="1660747467"/>
+      </p:ext>
+    </p:extLst>
+  </p:cSld>
+  <p:clrMapOvr>
+    <a:masterClrMapping/>
+  </p:clrMapOvr>
+</p:notes>
+</file>
+
+<file path=ppt/notesSlides/notesSlide10.xml><?xml version="1.0" encoding="utf-8"?>
+<p:notes xmlns:a="http://schemas.openxmlformats.org/drawingml/2006/main" xmlns:r="http://schemas.openxmlformats.org/officeDocument/2006/relationships" xmlns:p="http://schemas.openxmlformats.org/presentationml/2006/main">
+  <p:cSld>
+    <p:spTree>
+      <p:nvGrpSpPr>
+        <p:cNvPr id="1" name=""/>
+        <p:cNvGrpSpPr/>
+        <p:nvPr/>
+      </p:nvGrpSpPr>
+      <p:grpSpPr>
+        <a:xfrm>
+          <a:off x="0" y="0"/>
+          <a:ext cx="0" cy="0"/>
+          <a:chOff x="0" y="0"/>
+          <a:chExt cx="0" cy="0"/>
+        </a:xfrm>
+      </p:grpSpPr>
+      <p:sp>
+        <p:nvSpPr>
+          <p:cNvPr id="2" name="Slide Image Placeholder 1"/>
+          <p:cNvSpPr>
+            <a:spLocks noGrp="1" noRot="1" noChangeAspect="1"/>
+          </p:cNvSpPr>
+          <p:nvPr>
+            <p:ph type="sldImg"/>
+          </p:nvPr>
+        </p:nvSpPr>
+        <p:spPr/>
+      </p:sp>
+      <p:sp>
+        <p:nvSpPr>
+          <p:cNvPr id="3" name="Notes Placeholder 2"/>
+          <p:cNvSpPr>
+            <a:spLocks noGrp="1"/>
+          </p:cNvSpPr>
+          <p:nvPr>
+            <p:ph type="body" idx="1"/>
+          </p:nvPr>
+        </p:nvSpPr>
+        <p:spPr/>
+        <p:txBody>
+          <a:bodyPr/>
+          <a:lstStyle/>
+          <a:p>
+            <a:r>
+              <a:rPr lang="pt-BR" dirty="0"/>
+              <a:t>O classificador sempre anuncia uma previsão completamente confiante de 0 ou 1, mesmo para exemplos muito próximos do limite. Em muitas situações, precisamos realmente de previsões mais graduadas.</a:t>
+            </a:r>
+          </a:p>
+        </p:txBody>
+      </p:sp>
+      <p:sp>
+        <p:nvSpPr>
+          <p:cNvPr id="4" name="Slide Number Placeholder 3"/>
+          <p:cNvSpPr>
+            <a:spLocks noGrp="1"/>
+          </p:cNvSpPr>
+          <p:nvPr>
+            <p:ph type="sldNum" sz="quarter" idx="10"/>
+          </p:nvPr>
+        </p:nvSpPr>
+        <p:spPr/>
+        <p:txBody>
+          <a:bodyPr/>
+          <a:lstStyle/>
+          <a:p>
+            <a:fld id="{F430A2A4-8C14-4B1A-AD48-7B6401078BF7}" type="slidenum">
+              <a:rPr lang="pt-BR" smtClean="0"/>
+              <a:t>24</a:t>
+            </a:fld>
+            <a:endParaRPr lang="pt-BR"/>
+          </a:p>
+        </p:txBody>
+      </p:sp>
+    </p:spTree>
+    <p:extLst>
+      <p:ext uri="{BB962C8B-B14F-4D97-AF65-F5344CB8AC3E}">
+        <p14:creationId xmlns:p14="http://schemas.microsoft.com/office/powerpoint/2010/main" val="3710794323"/>
+      </p:ext>
+    </p:extLst>
+  </p:cSld>
+  <p:clrMapOvr>
+    <a:masterClrMapping/>
+  </p:clrMapOvr>
+</p:notes>
+</file>
+
+<file path=ppt/notesSlides/notesSlide11.xml><?xml version="1.0" encoding="utf-8"?>
+<p:notes xmlns:a="http://schemas.openxmlformats.org/drawingml/2006/main" xmlns:r="http://schemas.openxmlformats.org/officeDocument/2006/relationships" xmlns:p="http://schemas.openxmlformats.org/presentationml/2006/main">
+  <p:cSld>
+    <p:spTree>
+      <p:nvGrpSpPr>
+        <p:cNvPr id="1" name="">
+          <a:extLst>
+            <a:ext uri="{FF2B5EF4-FFF2-40B4-BE49-F238E27FC236}">
+              <a16:creationId xmlns:a16="http://schemas.microsoft.com/office/drawing/2014/main" id="{B6B676CD-D7AC-2B3E-F1F4-285137D78C5A}"/>
+            </a:ext>
+          </a:extLst>
+        </p:cNvPr>
+        <p:cNvGrpSpPr/>
+        <p:nvPr/>
+      </p:nvGrpSpPr>
+      <p:grpSpPr>
+        <a:xfrm>
+          <a:off x="0" y="0"/>
+          <a:ext cx="0" cy="0"/>
+          <a:chOff x="0" y="0"/>
+          <a:chExt cx="0" cy="0"/>
+        </a:xfrm>
+      </p:grpSpPr>
+      <p:sp>
+        <p:nvSpPr>
+          <p:cNvPr id="2" name="Slide Image Placeholder 1">
+            <a:extLst>
+              <a:ext uri="{FF2B5EF4-FFF2-40B4-BE49-F238E27FC236}">
+                <a16:creationId xmlns:a16="http://schemas.microsoft.com/office/drawing/2014/main" id="{CBD83C45-BD26-CB76-54F0-14BDDCDD7662}"/>
+              </a:ext>
+            </a:extLst>
+          </p:cNvPr>
+          <p:cNvSpPr>
+            <a:spLocks noGrp="1" noRot="1" noChangeAspect="1"/>
+          </p:cNvSpPr>
+          <p:nvPr>
+            <p:ph type="sldImg"/>
+          </p:nvPr>
+        </p:nvSpPr>
+        <p:spPr/>
+      </p:sp>
+      <p:sp>
+        <p:nvSpPr>
+          <p:cNvPr id="3" name="Notes Placeholder 2">
+            <a:extLst>
+              <a:ext uri="{FF2B5EF4-FFF2-40B4-BE49-F238E27FC236}">
+                <a16:creationId xmlns:a16="http://schemas.microsoft.com/office/drawing/2014/main" id="{EEB35AEB-BD45-C559-CA69-3F6AAF8D9918}"/>
+              </a:ext>
+            </a:extLst>
+          </p:cNvPr>
+          <p:cNvSpPr>
+            <a:spLocks noGrp="1"/>
+          </p:cNvSpPr>
+          <p:nvPr>
+            <p:ph type="body" idx="1"/>
+          </p:nvPr>
+        </p:nvSpPr>
+        <p:spPr/>
+        <p:txBody>
+          <a:bodyPr/>
+          <a:lstStyle/>
+          <a:p>
+            <a:r>
+              <a:rPr lang="pt-BR" dirty="0"/>
+              <a:t>O classificador sempre anuncia uma previsão completamente confiante de 0 ou 1, mesmo para exemplos muito próximos do limite. Em muitas situações, precisamos realmente de previsões mais graduadas.</a:t>
+            </a:r>
+          </a:p>
+        </p:txBody>
+      </p:sp>
+      <p:sp>
+        <p:nvSpPr>
+          <p:cNvPr id="4" name="Slide Number Placeholder 3">
+            <a:extLst>
+              <a:ext uri="{FF2B5EF4-FFF2-40B4-BE49-F238E27FC236}">
+                <a16:creationId xmlns:a16="http://schemas.microsoft.com/office/drawing/2014/main" id="{E7989778-0D21-4998-A9E3-F299024619AA}"/>
+              </a:ext>
+            </a:extLst>
+          </p:cNvPr>
+          <p:cNvSpPr>
+            <a:spLocks noGrp="1"/>
+          </p:cNvSpPr>
+          <p:nvPr>
+            <p:ph type="sldNum" sz="quarter" idx="10"/>
+          </p:nvPr>
+        </p:nvSpPr>
+        <p:spPr/>
+        <p:txBody>
+          <a:bodyPr/>
+          <a:lstStyle/>
+          <a:p>
+            <a:fld id="{F430A2A4-8C14-4B1A-AD48-7B6401078BF7}" type="slidenum">
+              <a:rPr lang="pt-BR" smtClean="0"/>
+              <a:t>25</a:t>
+            </a:fld>
+            <a:endParaRPr lang="pt-BR"/>
+          </a:p>
+        </p:txBody>
+      </p:sp>
+    </p:spTree>
+    <p:extLst>
+      <p:ext uri="{BB962C8B-B14F-4D97-AF65-F5344CB8AC3E}">
+        <p14:creationId xmlns:p14="http://schemas.microsoft.com/office/powerpoint/2010/main" val="6642444"/>
+      </p:ext>
+    </p:extLst>
+  </p:cSld>
+  <p:clrMapOvr>
+    <a:masterClrMapping/>
+  </p:clrMapOvr>
+</p:notes>
+</file>
+
+<file path=ppt/notesSlides/notesSlide12.xml><?xml version="1.0" encoding="utf-8"?>
+<p:notes xmlns:a="http://schemas.openxmlformats.org/drawingml/2006/main" xmlns:r="http://schemas.openxmlformats.org/officeDocument/2006/relationships" xmlns:p="http://schemas.openxmlformats.org/presentationml/2006/main">
+  <p:cSld>
+    <p:spTree>
+      <p:nvGrpSpPr>
+        <p:cNvPr id="1" name=""/>
+        <p:cNvGrpSpPr/>
+        <p:nvPr/>
+      </p:nvGrpSpPr>
+      <p:grpSpPr>
+        <a:xfrm>
+          <a:off x="0" y="0"/>
+          <a:ext cx="0" cy="0"/>
+          <a:chOff x="0" y="0"/>
+          <a:chExt cx="0" cy="0"/>
+        </a:xfrm>
+      </p:grpSpPr>
+      <p:sp>
+        <p:nvSpPr>
+          <p:cNvPr id="2" name="Espaço Reservado para Imagem de Slide 1"/>
+          <p:cNvSpPr>
+            <a:spLocks noGrp="1" noRot="1" noChangeAspect="1"/>
+          </p:cNvSpPr>
+          <p:nvPr>
+            <p:ph type="sldImg"/>
+          </p:nvPr>
+        </p:nvSpPr>
+        <p:spPr/>
+      </p:sp>
+      <p:sp>
+        <p:nvSpPr>
+          <p:cNvPr id="3" name="Espaço Reservado para Anotações 2"/>
+          <p:cNvSpPr>
+            <a:spLocks noGrp="1"/>
+          </p:cNvSpPr>
+          <p:nvPr>
+            <p:ph type="body" idx="1"/>
+          </p:nvPr>
+        </p:nvSpPr>
+        <p:spPr/>
+        <p:txBody>
+          <a:bodyPr/>
+          <a:lstStyle/>
+          <a:p>
+            <a:endParaRPr lang="pt-BR" dirty="0"/>
+          </a:p>
+        </p:txBody>
+      </p:sp>
+      <p:sp>
+        <p:nvSpPr>
+          <p:cNvPr id="4" name="Espaço Reservado para Número de Slide 3"/>
+          <p:cNvSpPr>
+            <a:spLocks noGrp="1"/>
+          </p:cNvSpPr>
+          <p:nvPr>
+            <p:ph type="sldNum" sz="quarter" idx="5"/>
+          </p:nvPr>
+        </p:nvSpPr>
+        <p:spPr/>
+        <p:txBody>
+          <a:bodyPr/>
+          <a:lstStyle/>
+          <a:p>
+            <a:fld id="{6FC8D850-966F-45A6-8DE7-15B891E7D40D}" type="slidenum">
+              <a:rPr lang="pt-BR" smtClean="0"/>
+              <a:t>27</a:t>
+            </a:fld>
+            <a:endParaRPr lang="pt-BR"/>
+          </a:p>
+        </p:txBody>
+      </p:sp>
+    </p:spTree>
+    <p:extLst>
+      <p:ext uri="{BB962C8B-B14F-4D97-AF65-F5344CB8AC3E}">
+        <p14:creationId xmlns:p14="http://schemas.microsoft.com/office/powerpoint/2010/main" val="1455485540"/>
+      </p:ext>
+    </p:extLst>
+  </p:cSld>
+  <p:clrMapOvr>
+    <a:masterClrMapping/>
+  </p:clrMapOvr>
+</p:notes>
+</file>
+
+<file path=ppt/notesSlides/notesSlide13.xml><?xml version="1.0" encoding="utf-8"?>
+<p:notes xmlns:a="http://schemas.openxmlformats.org/drawingml/2006/main" xmlns:r="http://schemas.openxmlformats.org/officeDocument/2006/relationships" xmlns:p="http://schemas.openxmlformats.org/presentationml/2006/main">
+  <p:cSld>
+    <p:spTree>
+      <p:nvGrpSpPr>
+        <p:cNvPr id="1" name="">
+          <a:extLst>
+            <a:ext uri="{FF2B5EF4-FFF2-40B4-BE49-F238E27FC236}">
+              <a16:creationId xmlns:a16="http://schemas.microsoft.com/office/drawing/2014/main" id="{1BFBDC55-BB4D-2F06-71BF-76ED1A14AFED}"/>
+            </a:ext>
+          </a:extLst>
+        </p:cNvPr>
+        <p:cNvGrpSpPr/>
+        <p:nvPr/>
+      </p:nvGrpSpPr>
+      <p:grpSpPr>
+        <a:xfrm>
+          <a:off x="0" y="0"/>
+          <a:ext cx="0" cy="0"/>
+          <a:chOff x="0" y="0"/>
+          <a:chExt cx="0" cy="0"/>
+        </a:xfrm>
+      </p:grpSpPr>
+      <p:sp>
+        <p:nvSpPr>
+          <p:cNvPr id="2" name="Espaço Reservado para Imagem de Slide 1">
+            <a:extLst>
+              <a:ext uri="{FF2B5EF4-FFF2-40B4-BE49-F238E27FC236}">
+                <a16:creationId xmlns:a16="http://schemas.microsoft.com/office/drawing/2014/main" id="{13FDBDE3-54FF-D34A-6455-B4D01E3B3A99}"/>
+              </a:ext>
+            </a:extLst>
+          </p:cNvPr>
+          <p:cNvSpPr>
+            <a:spLocks noGrp="1" noRot="1" noChangeAspect="1"/>
+          </p:cNvSpPr>
+          <p:nvPr>
+            <p:ph type="sldImg"/>
+          </p:nvPr>
+        </p:nvSpPr>
+        <p:spPr/>
+      </p:sp>
+      <p:sp>
+        <p:nvSpPr>
+          <p:cNvPr id="3" name="Espaço Reservado para Anotações 2">
+            <a:extLst>
+              <a:ext uri="{FF2B5EF4-FFF2-40B4-BE49-F238E27FC236}">
+                <a16:creationId xmlns:a16="http://schemas.microsoft.com/office/drawing/2014/main" id="{B159710A-028C-37C9-8B04-776EB9E8B78A}"/>
+              </a:ext>
+            </a:extLst>
+          </p:cNvPr>
+          <p:cNvSpPr>
+            <a:spLocks noGrp="1"/>
+          </p:cNvSpPr>
+          <p:nvPr>
+            <p:ph type="body" idx="1"/>
+          </p:nvPr>
+        </p:nvSpPr>
+        <p:spPr/>
+        <p:txBody>
+          <a:bodyPr/>
+          <a:lstStyle/>
+          <a:p>
+            <a:endParaRPr lang="pt-BR" dirty="0"/>
+          </a:p>
+        </p:txBody>
+      </p:sp>
+      <p:sp>
+        <p:nvSpPr>
+          <p:cNvPr id="4" name="Espaço Reservado para Número de Slide 3">
+            <a:extLst>
+              <a:ext uri="{FF2B5EF4-FFF2-40B4-BE49-F238E27FC236}">
+                <a16:creationId xmlns:a16="http://schemas.microsoft.com/office/drawing/2014/main" id="{697E3764-6735-3BB1-4FF7-5946552F4788}"/>
+              </a:ext>
+            </a:extLst>
+          </p:cNvPr>
+          <p:cNvSpPr>
+            <a:spLocks noGrp="1"/>
+          </p:cNvSpPr>
+          <p:nvPr>
+            <p:ph type="sldNum" sz="quarter" idx="5"/>
+          </p:nvPr>
+        </p:nvSpPr>
+        <p:spPr/>
+        <p:txBody>
+          <a:bodyPr/>
+          <a:lstStyle/>
+          <a:p>
+            <a:fld id="{6FC8D850-966F-45A6-8DE7-15B891E7D40D}" type="slidenum">
+              <a:rPr lang="pt-BR" smtClean="0"/>
+              <a:t>28</a:t>
+            </a:fld>
+            <a:endParaRPr lang="pt-BR"/>
+          </a:p>
+        </p:txBody>
+      </p:sp>
+    </p:spTree>
+    <p:extLst>
+      <p:ext uri="{BB962C8B-B14F-4D97-AF65-F5344CB8AC3E}">
+        <p14:creationId xmlns:p14="http://schemas.microsoft.com/office/powerpoint/2010/main" val="455318536"/>
+      </p:ext>
+    </p:extLst>
+  </p:cSld>
+  <p:clrMapOvr>
+    <a:masterClrMapping/>
+  </p:clrMapOvr>
+</p:notes>
+</file>
+
+<file path=ppt/notesSlides/notesSlide14.xml><?xml version="1.0" encoding="utf-8"?>
+<p:notes xmlns:a="http://schemas.openxmlformats.org/drawingml/2006/main" xmlns:r="http://schemas.openxmlformats.org/officeDocument/2006/relationships" xmlns:p="http://schemas.openxmlformats.org/presentationml/2006/main">
+  <p:cSld>
+    <p:spTree>
+      <p:nvGrpSpPr>
+        <p:cNvPr id="1" name=""/>
+        <p:cNvGrpSpPr/>
+        <p:nvPr/>
+      </p:nvGrpSpPr>
+      <p:grpSpPr>
+        <a:xfrm>
+          <a:off x="0" y="0"/>
+          <a:ext cx="0" cy="0"/>
+          <a:chOff x="0" y="0"/>
+          <a:chExt cx="0" cy="0"/>
+        </a:xfrm>
+      </p:grpSpPr>
+      <p:sp>
+        <p:nvSpPr>
+          <p:cNvPr id="2" name="Espaço Reservado para Imagem de Slide 1"/>
+          <p:cNvSpPr>
+            <a:spLocks noGrp="1" noRot="1" noChangeAspect="1"/>
+          </p:cNvSpPr>
+          <p:nvPr>
+            <p:ph type="sldImg"/>
+          </p:nvPr>
+        </p:nvSpPr>
+        <p:spPr/>
+      </p:sp>
+      <p:sp>
+        <p:nvSpPr>
+          <p:cNvPr id="3" name="Espaço Reservado para Anotações 2"/>
+          <p:cNvSpPr>
+            <a:spLocks noGrp="1"/>
+          </p:cNvSpPr>
+          <p:nvPr>
+            <p:ph type="body" idx="1"/>
+          </p:nvPr>
+        </p:nvSpPr>
+        <p:spPr/>
+        <p:txBody>
+          <a:bodyPr/>
+          <a:lstStyle/>
+          <a:p>
+            <a:pPr marL="0" marR="0" lvl="0" indent="0" algn="l" defTabSz="914400" rtl="0" eaLnBrk="1" fontAlgn="auto" latinLnBrk="0" hangingPunct="1">
+              <a:lnSpc>
+                <a:spcPct val="100000"/>
+              </a:lnSpc>
+              <a:spcBef>
+                <a:spcPts val="0"/>
+              </a:spcBef>
+              <a:spcAft>
+                <a:spcPts val="0"/>
+              </a:spcAft>
+              <a:buClrTx/>
+              <a:buSzTx/>
+              <a:buFontTx/>
+              <a:buNone/>
+              <a:tabLst/>
+              <a:defRPr/>
+            </a:pPr>
+            <a:endParaRPr lang="pt-BR" dirty="0"/>
+          </a:p>
+        </p:txBody>
+      </p:sp>
+      <p:sp>
+        <p:nvSpPr>
+          <p:cNvPr id="4" name="Espaço Reservado para Número de Slide 3"/>
+          <p:cNvSpPr>
+            <a:spLocks noGrp="1"/>
+          </p:cNvSpPr>
+          <p:nvPr>
+            <p:ph type="sldNum" sz="quarter" idx="5"/>
+          </p:nvPr>
+        </p:nvSpPr>
+        <p:spPr/>
+        <p:txBody>
+          <a:bodyPr/>
+          <a:lstStyle/>
+          <a:p>
+            <a:fld id="{6FC8D850-966F-45A6-8DE7-15B891E7D40D}" type="slidenum">
+              <a:rPr lang="pt-BR" smtClean="0"/>
+              <a:t>29</a:t>
+            </a:fld>
+            <a:endParaRPr lang="pt-BR"/>
+          </a:p>
+        </p:txBody>
+      </p:sp>
+    </p:spTree>
+    <p:extLst>
+      <p:ext uri="{BB962C8B-B14F-4D97-AF65-F5344CB8AC3E}">
+        <p14:creationId xmlns:p14="http://schemas.microsoft.com/office/powerpoint/2010/main" val="3151563493"/>
       </p:ext>
     </p:extLst>
   </p:cSld>
@@ -1904,7 +2360,7 @@
         <p:cNvPr id="1" name="">
           <a:extLst>
             <a:ext uri="{FF2B5EF4-FFF2-40B4-BE49-F238E27FC236}">
-              <a16:creationId xmlns:a16="http://schemas.microsoft.com/office/drawing/2014/main" xmlns="" id="{232DA5E1-00E0-2F8D-E426-C2BE1BC8766D}"/>
+              <a16:creationId xmlns:a16="http://schemas.microsoft.com/office/drawing/2014/main" id="{232DA5E1-00E0-2F8D-E426-C2BE1BC8766D}"/>
             </a:ext>
           </a:extLst>
         </p:cNvPr>
@@ -1924,7 +2380,7 @@
           <p:cNvPr id="2" name="Slide Image Placeholder 1">
             <a:extLst>
               <a:ext uri="{FF2B5EF4-FFF2-40B4-BE49-F238E27FC236}">
-                <a16:creationId xmlns:a16="http://schemas.microsoft.com/office/drawing/2014/main" xmlns="" id="{755444DB-79D2-76F0-537D-343DD7EF78F8}"/>
+                <a16:creationId xmlns:a16="http://schemas.microsoft.com/office/drawing/2014/main" id="{755444DB-79D2-76F0-537D-343DD7EF78F8}"/>
               </a:ext>
             </a:extLst>
           </p:cNvPr>
@@ -1942,7 +2398,7 @@
           <p:cNvPr id="3" name="Notes Placeholder 2">
             <a:extLst>
               <a:ext uri="{FF2B5EF4-FFF2-40B4-BE49-F238E27FC236}">
-                <a16:creationId xmlns:a16="http://schemas.microsoft.com/office/drawing/2014/main" xmlns="" id="{FA229730-5EFD-DF7F-FC23-84032A9E7498}"/>
+                <a16:creationId xmlns:a16="http://schemas.microsoft.com/office/drawing/2014/main" id="{FA229730-5EFD-DF7F-FC23-84032A9E7498}"/>
               </a:ext>
             </a:extLst>
           </p:cNvPr>
@@ -1967,7 +2423,7 @@
           <p:cNvPr id="4" name="Slide Number Placeholder 3">
             <a:extLst>
               <a:ext uri="{FF2B5EF4-FFF2-40B4-BE49-F238E27FC236}">
-                <a16:creationId xmlns:a16="http://schemas.microsoft.com/office/drawing/2014/main" xmlns="" id="{B47740AF-93D3-5439-F324-AEC42AF75759}"/>
+                <a16:creationId xmlns:a16="http://schemas.microsoft.com/office/drawing/2014/main" id="{B47740AF-93D3-5439-F324-AEC42AF75759}"/>
               </a:ext>
             </a:extLst>
           </p:cNvPr>
@@ -2131,7 +2587,7 @@
           <a:p>
             <a:fld id="{6FC8D850-966F-45A6-8DE7-15B891E7D40D}" type="slidenum">
               <a:rPr lang="pt-BR" smtClean="0"/>
-              <a:t>14</a:t>
+              <a:t>13</a:t>
             </a:fld>
             <a:endParaRPr lang="pt-BR"/>
           </a:p>
@@ -2277,7 +2733,7 @@
           <a:p>
             <a:fld id="{6FC8D850-966F-45A6-8DE7-15B891E7D40D}" type="slidenum">
               <a:rPr lang="pt-BR" smtClean="0"/>
-              <a:t>15</a:t>
+              <a:t>14</a:t>
             </a:fld>
             <a:endParaRPr lang="pt-BR"/>
           </a:p>
@@ -2389,7 +2845,7 @@
           <a:p>
             <a:fld id="{6FC8D850-966F-45A6-8DE7-15B891E7D40D}" type="slidenum">
               <a:rPr lang="pt-BR" smtClean="0"/>
-              <a:t>16</a:t>
+              <a:t>15</a:t>
             </a:fld>
             <a:endParaRPr lang="pt-BR"/>
           </a:p>
@@ -2499,7 +2955,7 @@
           <a:p>
             <a:fld id="{6FC8D850-966F-45A6-8DE7-15B891E7D40D}" type="slidenum">
               <a:rPr lang="pt-BR" smtClean="0"/>
-              <a:t>17</a:t>
+              <a:t>16</a:t>
             </a:fld>
             <a:endParaRPr lang="pt-BR"/>
           </a:p>
@@ -2526,7 +2982,7 @@
         <p:cNvPr id="1" name="">
           <a:extLst>
             <a:ext uri="{FF2B5EF4-FFF2-40B4-BE49-F238E27FC236}">
-              <a16:creationId xmlns:a16="http://schemas.microsoft.com/office/drawing/2014/main" xmlns="" id="{7A098F72-2922-82B3-5C99-E3BEF8098714}"/>
+              <a16:creationId xmlns:a16="http://schemas.microsoft.com/office/drawing/2014/main" id="{7A098F72-2922-82B3-5C99-E3BEF8098714}"/>
             </a:ext>
           </a:extLst>
         </p:cNvPr>
@@ -2546,7 +3002,7 @@
           <p:cNvPr id="2" name="Espaço Reservado para Imagem de Slide 1">
             <a:extLst>
               <a:ext uri="{FF2B5EF4-FFF2-40B4-BE49-F238E27FC236}">
-                <a16:creationId xmlns:a16="http://schemas.microsoft.com/office/drawing/2014/main" xmlns="" id="{B532C96A-22C4-D1DD-3FBA-62861D4BDF04}"/>
+                <a16:creationId xmlns:a16="http://schemas.microsoft.com/office/drawing/2014/main" id="{B532C96A-22C4-D1DD-3FBA-62861D4BDF04}"/>
               </a:ext>
             </a:extLst>
           </p:cNvPr>
@@ -2564,7 +3020,7 @@
           <p:cNvPr id="3" name="Espaço Reservado para Anotações 2">
             <a:extLst>
               <a:ext uri="{FF2B5EF4-FFF2-40B4-BE49-F238E27FC236}">
-                <a16:creationId xmlns:a16="http://schemas.microsoft.com/office/drawing/2014/main" xmlns="" id="{1B3956BA-58DA-02D3-A28D-2E027144F603}"/>
+                <a16:creationId xmlns:a16="http://schemas.microsoft.com/office/drawing/2014/main" id="{1B3956BA-58DA-02D3-A28D-2E027144F603}"/>
               </a:ext>
             </a:extLst>
           </p:cNvPr>
@@ -2615,7 +3071,7 @@
           <p:cNvPr id="4" name="Espaço Reservado para Número de Slide 3">
             <a:extLst>
               <a:ext uri="{FF2B5EF4-FFF2-40B4-BE49-F238E27FC236}">
-                <a16:creationId xmlns:a16="http://schemas.microsoft.com/office/drawing/2014/main" xmlns="" id="{FBF6E418-7A70-5EBA-2166-ABCAA4B4C523}"/>
+                <a16:creationId xmlns:a16="http://schemas.microsoft.com/office/drawing/2014/main" id="{FBF6E418-7A70-5EBA-2166-ABCAA4B4C523}"/>
               </a:ext>
             </a:extLst>
           </p:cNvPr>
@@ -2633,7 +3089,7 @@
           <a:p>
             <a:fld id="{6FC8D850-966F-45A6-8DE7-15B891E7D40D}" type="slidenum">
               <a:rPr lang="pt-BR" smtClean="0"/>
-              <a:t>18</a:t>
+              <a:t>17</a:t>
             </a:fld>
             <a:endParaRPr lang="pt-BR"/>
           </a:p>
@@ -2674,7 +3130,7 @@
           <p:cNvPr id="2" name="Título 1">
             <a:extLst>
               <a:ext uri="{FF2B5EF4-FFF2-40B4-BE49-F238E27FC236}">
-                <a16:creationId xmlns:a16="http://schemas.microsoft.com/office/drawing/2014/main" xmlns="" id="{1DB9B4FF-B06E-403C-A326-BDC64D8FF94E}"/>
+                <a16:creationId xmlns:a16="http://schemas.microsoft.com/office/drawing/2014/main" id="{1DB9B4FF-B06E-403C-A326-BDC64D8FF94E}"/>
               </a:ext>
             </a:extLst>
           </p:cNvPr>
@@ -2711,7 +3167,7 @@
           <p:cNvPr id="3" name="Subtítulo 2">
             <a:extLst>
               <a:ext uri="{FF2B5EF4-FFF2-40B4-BE49-F238E27FC236}">
-                <a16:creationId xmlns:a16="http://schemas.microsoft.com/office/drawing/2014/main" xmlns="" id="{247BDFCE-746E-45BF-A319-4733D58D1632}"/>
+                <a16:creationId xmlns:a16="http://schemas.microsoft.com/office/drawing/2014/main" id="{247BDFCE-746E-45BF-A319-4733D58D1632}"/>
               </a:ext>
             </a:extLst>
           </p:cNvPr>
@@ -2781,7 +3237,7 @@
           <p:cNvPr id="4" name="Espaço Reservado para Data 3">
             <a:extLst>
               <a:ext uri="{FF2B5EF4-FFF2-40B4-BE49-F238E27FC236}">
-                <a16:creationId xmlns:a16="http://schemas.microsoft.com/office/drawing/2014/main" xmlns="" id="{9EDE2778-5372-4104-B96D-968184DA8288}"/>
+                <a16:creationId xmlns:a16="http://schemas.microsoft.com/office/drawing/2014/main" id="{9EDE2778-5372-4104-B96D-968184DA8288}"/>
               </a:ext>
             </a:extLst>
           </p:cNvPr>
@@ -2799,7 +3255,7 @@
           <a:p>
             <a:fld id="{63289F7E-B80B-496E-81B4-D396C37C9454}" type="datetimeFigureOut">
               <a:rPr lang="pt-BR" smtClean="0"/>
-              <a:t>19/02/2026</a:t>
+              <a:t>20/02/2026</a:t>
             </a:fld>
             <a:endParaRPr lang="pt-BR"/>
           </a:p>
@@ -2810,7 +3266,7 @@
           <p:cNvPr id="5" name="Espaço Reservado para Rodapé 4">
             <a:extLst>
               <a:ext uri="{FF2B5EF4-FFF2-40B4-BE49-F238E27FC236}">
-                <a16:creationId xmlns:a16="http://schemas.microsoft.com/office/drawing/2014/main" xmlns="" id="{C1DD0F41-C861-4051-988D-3024A37A4B93}"/>
+                <a16:creationId xmlns:a16="http://schemas.microsoft.com/office/drawing/2014/main" id="{C1DD0F41-C861-4051-988D-3024A37A4B93}"/>
               </a:ext>
             </a:extLst>
           </p:cNvPr>
@@ -2835,7 +3291,7 @@
           <p:cNvPr id="6" name="Espaço Reservado para Número de Slide 5">
             <a:extLst>
               <a:ext uri="{FF2B5EF4-FFF2-40B4-BE49-F238E27FC236}">
-                <a16:creationId xmlns:a16="http://schemas.microsoft.com/office/drawing/2014/main" xmlns="" id="{07E5967E-D980-431A-A5DB-3F0C5030A81E}"/>
+                <a16:creationId xmlns:a16="http://schemas.microsoft.com/office/drawing/2014/main" id="{07E5967E-D980-431A-A5DB-3F0C5030A81E}"/>
               </a:ext>
             </a:extLst>
           </p:cNvPr>
@@ -2853,7 +3309,7 @@
           <a:p>
             <a:fld id="{1A7E88B7-70CE-4035-AE73-13FA6FB985D4}" type="slidenum">
               <a:rPr lang="pt-BR" smtClean="0"/>
-              <a:t>‹nº›</a:t>
+              <a:t>‹#›</a:t>
             </a:fld>
             <a:endParaRPr lang="pt-BR"/>
           </a:p>
@@ -2894,7 +3350,7 @@
           <p:cNvPr id="2" name="Título 1">
             <a:extLst>
               <a:ext uri="{FF2B5EF4-FFF2-40B4-BE49-F238E27FC236}">
-                <a16:creationId xmlns:a16="http://schemas.microsoft.com/office/drawing/2014/main" xmlns="" id="{9036C49F-3E68-4175-81BA-3C3FEE44308A}"/>
+                <a16:creationId xmlns:a16="http://schemas.microsoft.com/office/drawing/2014/main" id="{9036C49F-3E68-4175-81BA-3C3FEE44308A}"/>
               </a:ext>
             </a:extLst>
           </p:cNvPr>
@@ -2922,7 +3378,7 @@
           <p:cNvPr id="3" name="Espaço Reservado para Texto Vertical 2">
             <a:extLst>
               <a:ext uri="{FF2B5EF4-FFF2-40B4-BE49-F238E27FC236}">
-                <a16:creationId xmlns:a16="http://schemas.microsoft.com/office/drawing/2014/main" xmlns="" id="{426FA736-3DD3-4D4E-B57B-BBE1D8F7D424}"/>
+                <a16:creationId xmlns:a16="http://schemas.microsoft.com/office/drawing/2014/main" id="{426FA736-3DD3-4D4E-B57B-BBE1D8F7D424}"/>
               </a:ext>
             </a:extLst>
           </p:cNvPr>
@@ -2979,7 +3435,7 @@
           <p:cNvPr id="4" name="Espaço Reservado para Data 3">
             <a:extLst>
               <a:ext uri="{FF2B5EF4-FFF2-40B4-BE49-F238E27FC236}">
-                <a16:creationId xmlns:a16="http://schemas.microsoft.com/office/drawing/2014/main" xmlns="" id="{99E8855C-D8FD-48F6-B14E-861E0DE4D915}"/>
+                <a16:creationId xmlns:a16="http://schemas.microsoft.com/office/drawing/2014/main" id="{99E8855C-D8FD-48F6-B14E-861E0DE4D915}"/>
               </a:ext>
             </a:extLst>
           </p:cNvPr>
@@ -2997,7 +3453,7 @@
           <a:p>
             <a:fld id="{63289F7E-B80B-496E-81B4-D396C37C9454}" type="datetimeFigureOut">
               <a:rPr lang="pt-BR" smtClean="0"/>
-              <a:t>19/02/2026</a:t>
+              <a:t>20/02/2026</a:t>
             </a:fld>
             <a:endParaRPr lang="pt-BR"/>
           </a:p>
@@ -3008,7 +3464,7 @@
           <p:cNvPr id="5" name="Espaço Reservado para Rodapé 4">
             <a:extLst>
               <a:ext uri="{FF2B5EF4-FFF2-40B4-BE49-F238E27FC236}">
-                <a16:creationId xmlns:a16="http://schemas.microsoft.com/office/drawing/2014/main" xmlns="" id="{97C0BB88-2F21-42A5-ACFF-83DA47F2D340}"/>
+                <a16:creationId xmlns:a16="http://schemas.microsoft.com/office/drawing/2014/main" id="{97C0BB88-2F21-42A5-ACFF-83DA47F2D340}"/>
               </a:ext>
             </a:extLst>
           </p:cNvPr>
@@ -3033,7 +3489,7 @@
           <p:cNvPr id="6" name="Espaço Reservado para Número de Slide 5">
             <a:extLst>
               <a:ext uri="{FF2B5EF4-FFF2-40B4-BE49-F238E27FC236}">
-                <a16:creationId xmlns:a16="http://schemas.microsoft.com/office/drawing/2014/main" xmlns="" id="{6CB462B3-1F22-4C05-B4B8-7A279FB7D5E9}"/>
+                <a16:creationId xmlns:a16="http://schemas.microsoft.com/office/drawing/2014/main" id="{6CB462B3-1F22-4C05-B4B8-7A279FB7D5E9}"/>
               </a:ext>
             </a:extLst>
           </p:cNvPr>
@@ -3051,7 +3507,7 @@
           <a:p>
             <a:fld id="{1A7E88B7-70CE-4035-AE73-13FA6FB985D4}" type="slidenum">
               <a:rPr lang="pt-BR" smtClean="0"/>
-              <a:t>‹nº›</a:t>
+              <a:t>‹#›</a:t>
             </a:fld>
             <a:endParaRPr lang="pt-BR"/>
           </a:p>
@@ -3092,7 +3548,7 @@
           <p:cNvPr id="2" name="Título Vertical 1">
             <a:extLst>
               <a:ext uri="{FF2B5EF4-FFF2-40B4-BE49-F238E27FC236}">
-                <a16:creationId xmlns:a16="http://schemas.microsoft.com/office/drawing/2014/main" xmlns="" id="{EAEAB728-701C-4207-A9D5-23FF45C60502}"/>
+                <a16:creationId xmlns:a16="http://schemas.microsoft.com/office/drawing/2014/main" id="{EAEAB728-701C-4207-A9D5-23FF45C60502}"/>
               </a:ext>
             </a:extLst>
           </p:cNvPr>
@@ -3125,7 +3581,7 @@
           <p:cNvPr id="3" name="Espaço Reservado para Texto Vertical 2">
             <a:extLst>
               <a:ext uri="{FF2B5EF4-FFF2-40B4-BE49-F238E27FC236}">
-                <a16:creationId xmlns:a16="http://schemas.microsoft.com/office/drawing/2014/main" xmlns="" id="{BA8C8CCF-7823-480A-9A19-0F664DD17E3B}"/>
+                <a16:creationId xmlns:a16="http://schemas.microsoft.com/office/drawing/2014/main" id="{BA8C8CCF-7823-480A-9A19-0F664DD17E3B}"/>
               </a:ext>
             </a:extLst>
           </p:cNvPr>
@@ -3187,7 +3643,7 @@
           <p:cNvPr id="4" name="Espaço Reservado para Data 3">
             <a:extLst>
               <a:ext uri="{FF2B5EF4-FFF2-40B4-BE49-F238E27FC236}">
-                <a16:creationId xmlns:a16="http://schemas.microsoft.com/office/drawing/2014/main" xmlns="" id="{721D5734-7B1F-425D-942F-6EB73344027C}"/>
+                <a16:creationId xmlns:a16="http://schemas.microsoft.com/office/drawing/2014/main" id="{721D5734-7B1F-425D-942F-6EB73344027C}"/>
               </a:ext>
             </a:extLst>
           </p:cNvPr>
@@ -3205,7 +3661,7 @@
           <a:p>
             <a:fld id="{63289F7E-B80B-496E-81B4-D396C37C9454}" type="datetimeFigureOut">
               <a:rPr lang="pt-BR" smtClean="0"/>
-              <a:t>19/02/2026</a:t>
+              <a:t>20/02/2026</a:t>
             </a:fld>
             <a:endParaRPr lang="pt-BR"/>
           </a:p>
@@ -3216,7 +3672,7 @@
           <p:cNvPr id="5" name="Espaço Reservado para Rodapé 4">
             <a:extLst>
               <a:ext uri="{FF2B5EF4-FFF2-40B4-BE49-F238E27FC236}">
-                <a16:creationId xmlns:a16="http://schemas.microsoft.com/office/drawing/2014/main" xmlns="" id="{1E1AAEAC-F08D-45FE-89EC-B1B349A868C9}"/>
+                <a16:creationId xmlns:a16="http://schemas.microsoft.com/office/drawing/2014/main" id="{1E1AAEAC-F08D-45FE-89EC-B1B349A868C9}"/>
               </a:ext>
             </a:extLst>
           </p:cNvPr>
@@ -3241,7 +3697,7 @@
           <p:cNvPr id="6" name="Espaço Reservado para Número de Slide 5">
             <a:extLst>
               <a:ext uri="{FF2B5EF4-FFF2-40B4-BE49-F238E27FC236}">
-                <a16:creationId xmlns:a16="http://schemas.microsoft.com/office/drawing/2014/main" xmlns="" id="{BAA44493-9911-47B2-87A6-C2141A972BC8}"/>
+                <a16:creationId xmlns:a16="http://schemas.microsoft.com/office/drawing/2014/main" id="{BAA44493-9911-47B2-87A6-C2141A972BC8}"/>
               </a:ext>
             </a:extLst>
           </p:cNvPr>
@@ -3259,7 +3715,7 @@
           <a:p>
             <a:fld id="{1A7E88B7-70CE-4035-AE73-13FA6FB985D4}" type="slidenum">
               <a:rPr lang="pt-BR" smtClean="0"/>
-              <a:t>‹nº›</a:t>
+              <a:t>‹#›</a:t>
             </a:fld>
             <a:endParaRPr lang="pt-BR"/>
           </a:p>
@@ -3300,7 +3756,7 @@
           <p:cNvPr id="2" name="Título 1">
             <a:extLst>
               <a:ext uri="{FF2B5EF4-FFF2-40B4-BE49-F238E27FC236}">
-                <a16:creationId xmlns:a16="http://schemas.microsoft.com/office/drawing/2014/main" xmlns="" id="{71BD44A5-8F21-4626-A01D-48A1C874B1D5}"/>
+                <a16:creationId xmlns:a16="http://schemas.microsoft.com/office/drawing/2014/main" id="{71BD44A5-8F21-4626-A01D-48A1C874B1D5}"/>
               </a:ext>
             </a:extLst>
           </p:cNvPr>
@@ -3328,7 +3784,7 @@
           <p:cNvPr id="3" name="Espaço Reservado para Conteúdo 2">
             <a:extLst>
               <a:ext uri="{FF2B5EF4-FFF2-40B4-BE49-F238E27FC236}">
-                <a16:creationId xmlns:a16="http://schemas.microsoft.com/office/drawing/2014/main" xmlns="" id="{B79E8085-65A9-48AA-951D-71D978BFF4ED}"/>
+                <a16:creationId xmlns:a16="http://schemas.microsoft.com/office/drawing/2014/main" id="{B79E8085-65A9-48AA-951D-71D978BFF4ED}"/>
               </a:ext>
             </a:extLst>
           </p:cNvPr>
@@ -3385,7 +3841,7 @@
           <p:cNvPr id="4" name="Espaço Reservado para Data 3">
             <a:extLst>
               <a:ext uri="{FF2B5EF4-FFF2-40B4-BE49-F238E27FC236}">
-                <a16:creationId xmlns:a16="http://schemas.microsoft.com/office/drawing/2014/main" xmlns="" id="{F05BE1AF-51EA-425D-B188-DE7BD675009F}"/>
+                <a16:creationId xmlns:a16="http://schemas.microsoft.com/office/drawing/2014/main" id="{F05BE1AF-51EA-425D-B188-DE7BD675009F}"/>
               </a:ext>
             </a:extLst>
           </p:cNvPr>
@@ -3403,7 +3859,7 @@
           <a:p>
             <a:fld id="{63289F7E-B80B-496E-81B4-D396C37C9454}" type="datetimeFigureOut">
               <a:rPr lang="pt-BR" smtClean="0"/>
-              <a:t>19/02/2026</a:t>
+              <a:t>20/02/2026</a:t>
             </a:fld>
             <a:endParaRPr lang="pt-BR"/>
           </a:p>
@@ -3414,7 +3870,7 @@
           <p:cNvPr id="5" name="Espaço Reservado para Rodapé 4">
             <a:extLst>
               <a:ext uri="{FF2B5EF4-FFF2-40B4-BE49-F238E27FC236}">
-                <a16:creationId xmlns:a16="http://schemas.microsoft.com/office/drawing/2014/main" xmlns="" id="{121BE632-29CF-4CB9-B365-C9EF38F89BE6}"/>
+                <a16:creationId xmlns:a16="http://schemas.microsoft.com/office/drawing/2014/main" id="{121BE632-29CF-4CB9-B365-C9EF38F89BE6}"/>
               </a:ext>
             </a:extLst>
           </p:cNvPr>
@@ -3439,7 +3895,7 @@
           <p:cNvPr id="6" name="Espaço Reservado para Número de Slide 5">
             <a:extLst>
               <a:ext uri="{FF2B5EF4-FFF2-40B4-BE49-F238E27FC236}">
-                <a16:creationId xmlns:a16="http://schemas.microsoft.com/office/drawing/2014/main" xmlns="" id="{60CF3DD1-9AEC-4A57-B461-4E4DD86FAC18}"/>
+                <a16:creationId xmlns:a16="http://schemas.microsoft.com/office/drawing/2014/main" id="{60CF3DD1-9AEC-4A57-B461-4E4DD86FAC18}"/>
               </a:ext>
             </a:extLst>
           </p:cNvPr>
@@ -3457,7 +3913,7 @@
           <a:p>
             <a:fld id="{1A7E88B7-70CE-4035-AE73-13FA6FB985D4}" type="slidenum">
               <a:rPr lang="pt-BR" smtClean="0"/>
-              <a:t>‹nº›</a:t>
+              <a:t>‹#›</a:t>
             </a:fld>
             <a:endParaRPr lang="pt-BR"/>
           </a:p>
@@ -3498,7 +3954,7 @@
           <p:cNvPr id="2" name="Título 1">
             <a:extLst>
               <a:ext uri="{FF2B5EF4-FFF2-40B4-BE49-F238E27FC236}">
-                <a16:creationId xmlns:a16="http://schemas.microsoft.com/office/drawing/2014/main" xmlns="" id="{34AB2FF0-A4D7-4E28-991D-FF26140D5988}"/>
+                <a16:creationId xmlns:a16="http://schemas.microsoft.com/office/drawing/2014/main" id="{34AB2FF0-A4D7-4E28-991D-FF26140D5988}"/>
               </a:ext>
             </a:extLst>
           </p:cNvPr>
@@ -3535,7 +3991,7 @@
           <p:cNvPr id="3" name="Espaço Reservado para Texto 2">
             <a:extLst>
               <a:ext uri="{FF2B5EF4-FFF2-40B4-BE49-F238E27FC236}">
-                <a16:creationId xmlns:a16="http://schemas.microsoft.com/office/drawing/2014/main" xmlns="" id="{E2AC45B0-4145-40DB-8E61-105461170604}"/>
+                <a16:creationId xmlns:a16="http://schemas.microsoft.com/office/drawing/2014/main" id="{E2AC45B0-4145-40DB-8E61-105461170604}"/>
               </a:ext>
             </a:extLst>
           </p:cNvPr>
@@ -3660,7 +4116,7 @@
           <p:cNvPr id="4" name="Espaço Reservado para Data 3">
             <a:extLst>
               <a:ext uri="{FF2B5EF4-FFF2-40B4-BE49-F238E27FC236}">
-                <a16:creationId xmlns:a16="http://schemas.microsoft.com/office/drawing/2014/main" xmlns="" id="{50F1D3FB-740A-4EBA-A309-2CE71D12ECFB}"/>
+                <a16:creationId xmlns:a16="http://schemas.microsoft.com/office/drawing/2014/main" id="{50F1D3FB-740A-4EBA-A309-2CE71D12ECFB}"/>
               </a:ext>
             </a:extLst>
           </p:cNvPr>
@@ -3678,7 +4134,7 @@
           <a:p>
             <a:fld id="{63289F7E-B80B-496E-81B4-D396C37C9454}" type="datetimeFigureOut">
               <a:rPr lang="pt-BR" smtClean="0"/>
-              <a:t>19/02/2026</a:t>
+              <a:t>20/02/2026</a:t>
             </a:fld>
             <a:endParaRPr lang="pt-BR"/>
           </a:p>
@@ -3689,7 +4145,7 @@
           <p:cNvPr id="5" name="Espaço Reservado para Rodapé 4">
             <a:extLst>
               <a:ext uri="{FF2B5EF4-FFF2-40B4-BE49-F238E27FC236}">
-                <a16:creationId xmlns:a16="http://schemas.microsoft.com/office/drawing/2014/main" xmlns="" id="{BDCAB18F-8715-4465-A940-F9C193A2ACE9}"/>
+                <a16:creationId xmlns:a16="http://schemas.microsoft.com/office/drawing/2014/main" id="{BDCAB18F-8715-4465-A940-F9C193A2ACE9}"/>
               </a:ext>
             </a:extLst>
           </p:cNvPr>
@@ -3714,7 +4170,7 @@
           <p:cNvPr id="6" name="Espaço Reservado para Número de Slide 5">
             <a:extLst>
               <a:ext uri="{FF2B5EF4-FFF2-40B4-BE49-F238E27FC236}">
-                <a16:creationId xmlns:a16="http://schemas.microsoft.com/office/drawing/2014/main" xmlns="" id="{353466C6-8248-429F-8056-FF040BF509EB}"/>
+                <a16:creationId xmlns:a16="http://schemas.microsoft.com/office/drawing/2014/main" id="{353466C6-8248-429F-8056-FF040BF509EB}"/>
               </a:ext>
             </a:extLst>
           </p:cNvPr>
@@ -3732,7 +4188,7 @@
           <a:p>
             <a:fld id="{1A7E88B7-70CE-4035-AE73-13FA6FB985D4}" type="slidenum">
               <a:rPr lang="pt-BR" smtClean="0"/>
-              <a:t>‹nº›</a:t>
+              <a:t>‹#›</a:t>
             </a:fld>
             <a:endParaRPr lang="pt-BR"/>
           </a:p>
@@ -3773,7 +4229,7 @@
           <p:cNvPr id="2" name="Título 1">
             <a:extLst>
               <a:ext uri="{FF2B5EF4-FFF2-40B4-BE49-F238E27FC236}">
-                <a16:creationId xmlns:a16="http://schemas.microsoft.com/office/drawing/2014/main" xmlns="" id="{BC7BB9F0-F14B-4A91-B2B7-35BC47FE4DE7}"/>
+                <a16:creationId xmlns:a16="http://schemas.microsoft.com/office/drawing/2014/main" id="{BC7BB9F0-F14B-4A91-B2B7-35BC47FE4DE7}"/>
               </a:ext>
             </a:extLst>
           </p:cNvPr>
@@ -3801,7 +4257,7 @@
           <p:cNvPr id="3" name="Espaço Reservado para Conteúdo 2">
             <a:extLst>
               <a:ext uri="{FF2B5EF4-FFF2-40B4-BE49-F238E27FC236}">
-                <a16:creationId xmlns:a16="http://schemas.microsoft.com/office/drawing/2014/main" xmlns="" id="{EC1FC1C4-73DA-47A6-8496-B0B457F7D39A}"/>
+                <a16:creationId xmlns:a16="http://schemas.microsoft.com/office/drawing/2014/main" id="{EC1FC1C4-73DA-47A6-8496-B0B457F7D39A}"/>
               </a:ext>
             </a:extLst>
           </p:cNvPr>
@@ -3863,7 +4319,7 @@
           <p:cNvPr id="4" name="Espaço Reservado para Conteúdo 3">
             <a:extLst>
               <a:ext uri="{FF2B5EF4-FFF2-40B4-BE49-F238E27FC236}">
-                <a16:creationId xmlns:a16="http://schemas.microsoft.com/office/drawing/2014/main" xmlns="" id="{E92F06A8-A449-4D92-9912-76873E529B38}"/>
+                <a16:creationId xmlns:a16="http://schemas.microsoft.com/office/drawing/2014/main" id="{E92F06A8-A449-4D92-9912-76873E529B38}"/>
               </a:ext>
             </a:extLst>
           </p:cNvPr>
@@ -3925,7 +4381,7 @@
           <p:cNvPr id="5" name="Espaço Reservado para Data 4">
             <a:extLst>
               <a:ext uri="{FF2B5EF4-FFF2-40B4-BE49-F238E27FC236}">
-                <a16:creationId xmlns:a16="http://schemas.microsoft.com/office/drawing/2014/main" xmlns="" id="{938070A4-BC2F-4D55-BD8D-DEAF11BB9EE9}"/>
+                <a16:creationId xmlns:a16="http://schemas.microsoft.com/office/drawing/2014/main" id="{938070A4-BC2F-4D55-BD8D-DEAF11BB9EE9}"/>
               </a:ext>
             </a:extLst>
           </p:cNvPr>
@@ -3943,7 +4399,7 @@
           <a:p>
             <a:fld id="{63289F7E-B80B-496E-81B4-D396C37C9454}" type="datetimeFigureOut">
               <a:rPr lang="pt-BR" smtClean="0"/>
-              <a:t>19/02/2026</a:t>
+              <a:t>20/02/2026</a:t>
             </a:fld>
             <a:endParaRPr lang="pt-BR"/>
           </a:p>
@@ -3954,7 +4410,7 @@
           <p:cNvPr id="6" name="Espaço Reservado para Rodapé 5">
             <a:extLst>
               <a:ext uri="{FF2B5EF4-FFF2-40B4-BE49-F238E27FC236}">
-                <a16:creationId xmlns:a16="http://schemas.microsoft.com/office/drawing/2014/main" xmlns="" id="{45CC2DB8-844A-465F-BA9A-7734C80C7F43}"/>
+                <a16:creationId xmlns:a16="http://schemas.microsoft.com/office/drawing/2014/main" id="{45CC2DB8-844A-465F-BA9A-7734C80C7F43}"/>
               </a:ext>
             </a:extLst>
           </p:cNvPr>
@@ -3979,7 +4435,7 @@
           <p:cNvPr id="7" name="Espaço Reservado para Número de Slide 6">
             <a:extLst>
               <a:ext uri="{FF2B5EF4-FFF2-40B4-BE49-F238E27FC236}">
-                <a16:creationId xmlns:a16="http://schemas.microsoft.com/office/drawing/2014/main" xmlns="" id="{4CC606A8-097B-4040-94E0-CD8C88280D8F}"/>
+                <a16:creationId xmlns:a16="http://schemas.microsoft.com/office/drawing/2014/main" id="{4CC606A8-097B-4040-94E0-CD8C88280D8F}"/>
               </a:ext>
             </a:extLst>
           </p:cNvPr>
@@ -3997,7 +4453,7 @@
           <a:p>
             <a:fld id="{1A7E88B7-70CE-4035-AE73-13FA6FB985D4}" type="slidenum">
               <a:rPr lang="pt-BR" smtClean="0"/>
-              <a:t>‹nº›</a:t>
+              <a:t>‹#›</a:t>
             </a:fld>
             <a:endParaRPr lang="pt-BR"/>
           </a:p>
@@ -4038,7 +4494,7 @@
           <p:cNvPr id="2" name="Título 1">
             <a:extLst>
               <a:ext uri="{FF2B5EF4-FFF2-40B4-BE49-F238E27FC236}">
-                <a16:creationId xmlns:a16="http://schemas.microsoft.com/office/drawing/2014/main" xmlns="" id="{76D66686-0143-4CB6-8C09-BA326F1E7ACA}"/>
+                <a16:creationId xmlns:a16="http://schemas.microsoft.com/office/drawing/2014/main" id="{76D66686-0143-4CB6-8C09-BA326F1E7ACA}"/>
               </a:ext>
             </a:extLst>
           </p:cNvPr>
@@ -4071,7 +4527,7 @@
           <p:cNvPr id="3" name="Espaço Reservado para Texto 2">
             <a:extLst>
               <a:ext uri="{FF2B5EF4-FFF2-40B4-BE49-F238E27FC236}">
-                <a16:creationId xmlns:a16="http://schemas.microsoft.com/office/drawing/2014/main" xmlns="" id="{0227AB85-F59E-4BCE-B846-4FA0992C2F23}"/>
+                <a16:creationId xmlns:a16="http://schemas.microsoft.com/office/drawing/2014/main" id="{0227AB85-F59E-4BCE-B846-4FA0992C2F23}"/>
               </a:ext>
             </a:extLst>
           </p:cNvPr>
@@ -4142,7 +4598,7 @@
           <p:cNvPr id="4" name="Espaço Reservado para Conteúdo 3">
             <a:extLst>
               <a:ext uri="{FF2B5EF4-FFF2-40B4-BE49-F238E27FC236}">
-                <a16:creationId xmlns:a16="http://schemas.microsoft.com/office/drawing/2014/main" xmlns="" id="{3373456C-7319-4D0A-827D-D29F6B083F5D}"/>
+                <a16:creationId xmlns:a16="http://schemas.microsoft.com/office/drawing/2014/main" id="{3373456C-7319-4D0A-827D-D29F6B083F5D}"/>
               </a:ext>
             </a:extLst>
           </p:cNvPr>
@@ -4204,7 +4660,7 @@
           <p:cNvPr id="5" name="Espaço Reservado para Texto 4">
             <a:extLst>
               <a:ext uri="{FF2B5EF4-FFF2-40B4-BE49-F238E27FC236}">
-                <a16:creationId xmlns:a16="http://schemas.microsoft.com/office/drawing/2014/main" xmlns="" id="{4CD109D0-2E83-4262-8029-A871CEC47406}"/>
+                <a16:creationId xmlns:a16="http://schemas.microsoft.com/office/drawing/2014/main" id="{4CD109D0-2E83-4262-8029-A871CEC47406}"/>
               </a:ext>
             </a:extLst>
           </p:cNvPr>
@@ -4275,7 +4731,7 @@
           <p:cNvPr id="6" name="Espaço Reservado para Conteúdo 5">
             <a:extLst>
               <a:ext uri="{FF2B5EF4-FFF2-40B4-BE49-F238E27FC236}">
-                <a16:creationId xmlns:a16="http://schemas.microsoft.com/office/drawing/2014/main" xmlns="" id="{AD706E3A-CFBB-4A6C-A65F-D0360A9E74FE}"/>
+                <a16:creationId xmlns:a16="http://schemas.microsoft.com/office/drawing/2014/main" id="{AD706E3A-CFBB-4A6C-A65F-D0360A9E74FE}"/>
               </a:ext>
             </a:extLst>
           </p:cNvPr>
@@ -4337,7 +4793,7 @@
           <p:cNvPr id="7" name="Espaço Reservado para Data 6">
             <a:extLst>
               <a:ext uri="{FF2B5EF4-FFF2-40B4-BE49-F238E27FC236}">
-                <a16:creationId xmlns:a16="http://schemas.microsoft.com/office/drawing/2014/main" xmlns="" id="{4172C0E5-5AF0-4805-BB51-443733CD2BD5}"/>
+                <a16:creationId xmlns:a16="http://schemas.microsoft.com/office/drawing/2014/main" id="{4172C0E5-5AF0-4805-BB51-443733CD2BD5}"/>
               </a:ext>
             </a:extLst>
           </p:cNvPr>
@@ -4355,7 +4811,7 @@
           <a:p>
             <a:fld id="{63289F7E-B80B-496E-81B4-D396C37C9454}" type="datetimeFigureOut">
               <a:rPr lang="pt-BR" smtClean="0"/>
-              <a:t>19/02/2026</a:t>
+              <a:t>20/02/2026</a:t>
             </a:fld>
             <a:endParaRPr lang="pt-BR"/>
           </a:p>
@@ -4366,7 +4822,7 @@
           <p:cNvPr id="8" name="Espaço Reservado para Rodapé 7">
             <a:extLst>
               <a:ext uri="{FF2B5EF4-FFF2-40B4-BE49-F238E27FC236}">
-                <a16:creationId xmlns:a16="http://schemas.microsoft.com/office/drawing/2014/main" xmlns="" id="{0E801648-156F-497E-99CF-797DF48051E1}"/>
+                <a16:creationId xmlns:a16="http://schemas.microsoft.com/office/drawing/2014/main" id="{0E801648-156F-497E-99CF-797DF48051E1}"/>
               </a:ext>
             </a:extLst>
           </p:cNvPr>
@@ -4391,7 +4847,7 @@
           <p:cNvPr id="9" name="Espaço Reservado para Número de Slide 8">
             <a:extLst>
               <a:ext uri="{FF2B5EF4-FFF2-40B4-BE49-F238E27FC236}">
-                <a16:creationId xmlns:a16="http://schemas.microsoft.com/office/drawing/2014/main" xmlns="" id="{EEE23D32-80E7-4796-A137-66BF842E4B53}"/>
+                <a16:creationId xmlns:a16="http://schemas.microsoft.com/office/drawing/2014/main" id="{EEE23D32-80E7-4796-A137-66BF842E4B53}"/>
               </a:ext>
             </a:extLst>
           </p:cNvPr>
@@ -4409,7 +4865,7 @@
           <a:p>
             <a:fld id="{1A7E88B7-70CE-4035-AE73-13FA6FB985D4}" type="slidenum">
               <a:rPr lang="pt-BR" smtClean="0"/>
-              <a:t>‹nº›</a:t>
+              <a:t>‹#›</a:t>
             </a:fld>
             <a:endParaRPr lang="pt-BR"/>
           </a:p>
@@ -4450,7 +4906,7 @@
           <p:cNvPr id="2" name="Título 1">
             <a:extLst>
               <a:ext uri="{FF2B5EF4-FFF2-40B4-BE49-F238E27FC236}">
-                <a16:creationId xmlns:a16="http://schemas.microsoft.com/office/drawing/2014/main" xmlns="" id="{2BCE2379-C78F-47E1-8CFC-B846E7AF148D}"/>
+                <a16:creationId xmlns:a16="http://schemas.microsoft.com/office/drawing/2014/main" id="{2BCE2379-C78F-47E1-8CFC-B846E7AF148D}"/>
               </a:ext>
             </a:extLst>
           </p:cNvPr>
@@ -4478,7 +4934,7 @@
           <p:cNvPr id="3" name="Espaço Reservado para Data 2">
             <a:extLst>
               <a:ext uri="{FF2B5EF4-FFF2-40B4-BE49-F238E27FC236}">
-                <a16:creationId xmlns:a16="http://schemas.microsoft.com/office/drawing/2014/main" xmlns="" id="{342600A9-7F92-4E22-9D94-E4717252A817}"/>
+                <a16:creationId xmlns:a16="http://schemas.microsoft.com/office/drawing/2014/main" id="{342600A9-7F92-4E22-9D94-E4717252A817}"/>
               </a:ext>
             </a:extLst>
           </p:cNvPr>
@@ -4496,7 +4952,7 @@
           <a:p>
             <a:fld id="{63289F7E-B80B-496E-81B4-D396C37C9454}" type="datetimeFigureOut">
               <a:rPr lang="pt-BR" smtClean="0"/>
-              <a:t>19/02/2026</a:t>
+              <a:t>20/02/2026</a:t>
             </a:fld>
             <a:endParaRPr lang="pt-BR"/>
           </a:p>
@@ -4507,7 +4963,7 @@
           <p:cNvPr id="4" name="Espaço Reservado para Rodapé 3">
             <a:extLst>
               <a:ext uri="{FF2B5EF4-FFF2-40B4-BE49-F238E27FC236}">
-                <a16:creationId xmlns:a16="http://schemas.microsoft.com/office/drawing/2014/main" xmlns="" id="{192E6BED-F546-40CC-A2DF-99CBA853654E}"/>
+                <a16:creationId xmlns:a16="http://schemas.microsoft.com/office/drawing/2014/main" id="{192E6BED-F546-40CC-A2DF-99CBA853654E}"/>
               </a:ext>
             </a:extLst>
           </p:cNvPr>
@@ -4532,7 +4988,7 @@
           <p:cNvPr id="5" name="Espaço Reservado para Número de Slide 4">
             <a:extLst>
               <a:ext uri="{FF2B5EF4-FFF2-40B4-BE49-F238E27FC236}">
-                <a16:creationId xmlns:a16="http://schemas.microsoft.com/office/drawing/2014/main" xmlns="" id="{6091CC40-A8C4-4063-80EB-CC5099621678}"/>
+                <a16:creationId xmlns:a16="http://schemas.microsoft.com/office/drawing/2014/main" id="{6091CC40-A8C4-4063-80EB-CC5099621678}"/>
               </a:ext>
             </a:extLst>
           </p:cNvPr>
@@ -4550,7 +5006,7 @@
           <a:p>
             <a:fld id="{1A7E88B7-70CE-4035-AE73-13FA6FB985D4}" type="slidenum">
               <a:rPr lang="pt-BR" smtClean="0"/>
-              <a:t>‹nº›</a:t>
+              <a:t>‹#›</a:t>
             </a:fld>
             <a:endParaRPr lang="pt-BR"/>
           </a:p>
@@ -4591,7 +5047,7 @@
           <p:cNvPr id="2" name="Espaço Reservado para Data 1">
             <a:extLst>
               <a:ext uri="{FF2B5EF4-FFF2-40B4-BE49-F238E27FC236}">
-                <a16:creationId xmlns:a16="http://schemas.microsoft.com/office/drawing/2014/main" xmlns="" id="{DD19515C-212C-4EAE-84A3-8FF4BC844F1B}"/>
+                <a16:creationId xmlns:a16="http://schemas.microsoft.com/office/drawing/2014/main" id="{DD19515C-212C-4EAE-84A3-8FF4BC844F1B}"/>
               </a:ext>
             </a:extLst>
           </p:cNvPr>
@@ -4609,7 +5065,7 @@
           <a:p>
             <a:fld id="{63289F7E-B80B-496E-81B4-D396C37C9454}" type="datetimeFigureOut">
               <a:rPr lang="pt-BR" smtClean="0"/>
-              <a:t>19/02/2026</a:t>
+              <a:t>20/02/2026</a:t>
             </a:fld>
             <a:endParaRPr lang="pt-BR"/>
           </a:p>
@@ -4620,7 +5076,7 @@
           <p:cNvPr id="3" name="Espaço Reservado para Rodapé 2">
             <a:extLst>
               <a:ext uri="{FF2B5EF4-FFF2-40B4-BE49-F238E27FC236}">
-                <a16:creationId xmlns:a16="http://schemas.microsoft.com/office/drawing/2014/main" xmlns="" id="{94D3D120-B3E8-4C96-861D-7A4F12F49B3A}"/>
+                <a16:creationId xmlns:a16="http://schemas.microsoft.com/office/drawing/2014/main" id="{94D3D120-B3E8-4C96-861D-7A4F12F49B3A}"/>
               </a:ext>
             </a:extLst>
           </p:cNvPr>
@@ -4645,7 +5101,7 @@
           <p:cNvPr id="4" name="Espaço Reservado para Número de Slide 3">
             <a:extLst>
               <a:ext uri="{FF2B5EF4-FFF2-40B4-BE49-F238E27FC236}">
-                <a16:creationId xmlns:a16="http://schemas.microsoft.com/office/drawing/2014/main" xmlns="" id="{42E49B68-FA1B-468B-9F17-D5C09243D454}"/>
+                <a16:creationId xmlns:a16="http://schemas.microsoft.com/office/drawing/2014/main" id="{42E49B68-FA1B-468B-9F17-D5C09243D454}"/>
               </a:ext>
             </a:extLst>
           </p:cNvPr>
@@ -4663,7 +5119,7 @@
           <a:p>
             <a:fld id="{1A7E88B7-70CE-4035-AE73-13FA6FB985D4}" type="slidenum">
               <a:rPr lang="pt-BR" smtClean="0"/>
-              <a:t>‹nº›</a:t>
+              <a:t>‹#›</a:t>
             </a:fld>
             <a:endParaRPr lang="pt-BR"/>
           </a:p>
@@ -4704,7 +5160,7 @@
           <p:cNvPr id="2" name="Título 1">
             <a:extLst>
               <a:ext uri="{FF2B5EF4-FFF2-40B4-BE49-F238E27FC236}">
-                <a16:creationId xmlns:a16="http://schemas.microsoft.com/office/drawing/2014/main" xmlns="" id="{1C17BCBE-A897-4319-85EC-D87909C24980}"/>
+                <a16:creationId xmlns:a16="http://schemas.microsoft.com/office/drawing/2014/main" id="{1C17BCBE-A897-4319-85EC-D87909C24980}"/>
               </a:ext>
             </a:extLst>
           </p:cNvPr>
@@ -4741,7 +5197,7 @@
           <p:cNvPr id="3" name="Espaço Reservado para Conteúdo 2">
             <a:extLst>
               <a:ext uri="{FF2B5EF4-FFF2-40B4-BE49-F238E27FC236}">
-                <a16:creationId xmlns:a16="http://schemas.microsoft.com/office/drawing/2014/main" xmlns="" id="{4226F885-0204-4913-868B-4B8B82576F17}"/>
+                <a16:creationId xmlns:a16="http://schemas.microsoft.com/office/drawing/2014/main" id="{4226F885-0204-4913-868B-4B8B82576F17}"/>
               </a:ext>
             </a:extLst>
           </p:cNvPr>
@@ -4831,7 +5287,7 @@
           <p:cNvPr id="4" name="Espaço Reservado para Texto 3">
             <a:extLst>
               <a:ext uri="{FF2B5EF4-FFF2-40B4-BE49-F238E27FC236}">
-                <a16:creationId xmlns:a16="http://schemas.microsoft.com/office/drawing/2014/main" xmlns="" id="{00F9F784-A858-441B-8AB5-697098141751}"/>
+                <a16:creationId xmlns:a16="http://schemas.microsoft.com/office/drawing/2014/main" id="{00F9F784-A858-441B-8AB5-697098141751}"/>
               </a:ext>
             </a:extLst>
           </p:cNvPr>
@@ -4902,7 +5358,7 @@
           <p:cNvPr id="5" name="Espaço Reservado para Data 4">
             <a:extLst>
               <a:ext uri="{FF2B5EF4-FFF2-40B4-BE49-F238E27FC236}">
-                <a16:creationId xmlns:a16="http://schemas.microsoft.com/office/drawing/2014/main" xmlns="" id="{A4DC363A-5000-472E-8B17-02E7DCB8840A}"/>
+                <a16:creationId xmlns:a16="http://schemas.microsoft.com/office/drawing/2014/main" id="{A4DC363A-5000-472E-8B17-02E7DCB8840A}"/>
               </a:ext>
             </a:extLst>
           </p:cNvPr>
@@ -4920,7 +5376,7 @@
           <a:p>
             <a:fld id="{63289F7E-B80B-496E-81B4-D396C37C9454}" type="datetimeFigureOut">
               <a:rPr lang="pt-BR" smtClean="0"/>
-              <a:t>19/02/2026</a:t>
+              <a:t>20/02/2026</a:t>
             </a:fld>
             <a:endParaRPr lang="pt-BR"/>
           </a:p>
@@ -4931,7 +5387,7 @@
           <p:cNvPr id="6" name="Espaço Reservado para Rodapé 5">
             <a:extLst>
               <a:ext uri="{FF2B5EF4-FFF2-40B4-BE49-F238E27FC236}">
-                <a16:creationId xmlns:a16="http://schemas.microsoft.com/office/drawing/2014/main" xmlns="" id="{5548425D-2C21-4C56-BAD4-662978775C28}"/>
+                <a16:creationId xmlns:a16="http://schemas.microsoft.com/office/drawing/2014/main" id="{5548425D-2C21-4C56-BAD4-662978775C28}"/>
               </a:ext>
             </a:extLst>
           </p:cNvPr>
@@ -4956,7 +5412,7 @@
           <p:cNvPr id="7" name="Espaço Reservado para Número de Slide 6">
             <a:extLst>
               <a:ext uri="{FF2B5EF4-FFF2-40B4-BE49-F238E27FC236}">
-                <a16:creationId xmlns:a16="http://schemas.microsoft.com/office/drawing/2014/main" xmlns="" id="{C63E9726-E64C-42B2-AE8A-8C235A956B48}"/>
+                <a16:creationId xmlns:a16="http://schemas.microsoft.com/office/drawing/2014/main" id="{C63E9726-E64C-42B2-AE8A-8C235A956B48}"/>
               </a:ext>
             </a:extLst>
           </p:cNvPr>
@@ -4974,7 +5430,7 @@
           <a:p>
             <a:fld id="{1A7E88B7-70CE-4035-AE73-13FA6FB985D4}" type="slidenum">
               <a:rPr lang="pt-BR" smtClean="0"/>
-              <a:t>‹nº›</a:t>
+              <a:t>‹#›</a:t>
             </a:fld>
             <a:endParaRPr lang="pt-BR"/>
           </a:p>
@@ -5015,7 +5471,7 @@
           <p:cNvPr id="2" name="Título 1">
             <a:extLst>
               <a:ext uri="{FF2B5EF4-FFF2-40B4-BE49-F238E27FC236}">
-                <a16:creationId xmlns:a16="http://schemas.microsoft.com/office/drawing/2014/main" xmlns="" id="{11086A78-3E74-450C-96A6-CA8AC37AF772}"/>
+                <a16:creationId xmlns:a16="http://schemas.microsoft.com/office/drawing/2014/main" id="{11086A78-3E74-450C-96A6-CA8AC37AF772}"/>
               </a:ext>
             </a:extLst>
           </p:cNvPr>
@@ -5052,7 +5508,7 @@
           <p:cNvPr id="3" name="Espaço Reservado para Imagem 2">
             <a:extLst>
               <a:ext uri="{FF2B5EF4-FFF2-40B4-BE49-F238E27FC236}">
-                <a16:creationId xmlns:a16="http://schemas.microsoft.com/office/drawing/2014/main" xmlns="" id="{5F5B7312-975A-4DBC-9B2F-3652ADA006FD}"/>
+                <a16:creationId xmlns:a16="http://schemas.microsoft.com/office/drawing/2014/main" id="{5F5B7312-975A-4DBC-9B2F-3652ADA006FD}"/>
               </a:ext>
             </a:extLst>
           </p:cNvPr>
@@ -5119,7 +5575,7 @@
           <p:cNvPr id="4" name="Espaço Reservado para Texto 3">
             <a:extLst>
               <a:ext uri="{FF2B5EF4-FFF2-40B4-BE49-F238E27FC236}">
-                <a16:creationId xmlns:a16="http://schemas.microsoft.com/office/drawing/2014/main" xmlns="" id="{AAF805F5-1DFF-41C6-944C-7D79FE0D0963}"/>
+                <a16:creationId xmlns:a16="http://schemas.microsoft.com/office/drawing/2014/main" id="{AAF805F5-1DFF-41C6-944C-7D79FE0D0963}"/>
               </a:ext>
             </a:extLst>
           </p:cNvPr>
@@ -5190,7 +5646,7 @@
           <p:cNvPr id="5" name="Espaço Reservado para Data 4">
             <a:extLst>
               <a:ext uri="{FF2B5EF4-FFF2-40B4-BE49-F238E27FC236}">
-                <a16:creationId xmlns:a16="http://schemas.microsoft.com/office/drawing/2014/main" xmlns="" id="{02113D81-8665-4516-BD81-C6A1F254EECD}"/>
+                <a16:creationId xmlns:a16="http://schemas.microsoft.com/office/drawing/2014/main" id="{02113D81-8665-4516-BD81-C6A1F254EECD}"/>
               </a:ext>
             </a:extLst>
           </p:cNvPr>
@@ -5208,7 +5664,7 @@
           <a:p>
             <a:fld id="{63289F7E-B80B-496E-81B4-D396C37C9454}" type="datetimeFigureOut">
               <a:rPr lang="pt-BR" smtClean="0"/>
-              <a:t>19/02/2026</a:t>
+              <a:t>20/02/2026</a:t>
             </a:fld>
             <a:endParaRPr lang="pt-BR"/>
           </a:p>
@@ -5219,7 +5675,7 @@
           <p:cNvPr id="6" name="Espaço Reservado para Rodapé 5">
             <a:extLst>
               <a:ext uri="{FF2B5EF4-FFF2-40B4-BE49-F238E27FC236}">
-                <a16:creationId xmlns:a16="http://schemas.microsoft.com/office/drawing/2014/main" xmlns="" id="{2B00C88B-FF32-40AA-A187-727D96FD7862}"/>
+                <a16:creationId xmlns:a16="http://schemas.microsoft.com/office/drawing/2014/main" id="{2B00C88B-FF32-40AA-A187-727D96FD7862}"/>
               </a:ext>
             </a:extLst>
           </p:cNvPr>
@@ -5244,7 +5700,7 @@
           <p:cNvPr id="7" name="Espaço Reservado para Número de Slide 6">
             <a:extLst>
               <a:ext uri="{FF2B5EF4-FFF2-40B4-BE49-F238E27FC236}">
-                <a16:creationId xmlns:a16="http://schemas.microsoft.com/office/drawing/2014/main" xmlns="" id="{A04D1A2D-69F7-4B8F-A730-BC26DC340BA6}"/>
+                <a16:creationId xmlns:a16="http://schemas.microsoft.com/office/drawing/2014/main" id="{A04D1A2D-69F7-4B8F-A730-BC26DC340BA6}"/>
               </a:ext>
             </a:extLst>
           </p:cNvPr>
@@ -5262,7 +5718,7 @@
           <a:p>
             <a:fld id="{1A7E88B7-70CE-4035-AE73-13FA6FB985D4}" type="slidenum">
               <a:rPr lang="pt-BR" smtClean="0"/>
-              <a:t>‹nº›</a:t>
+              <a:t>‹#›</a:t>
             </a:fld>
             <a:endParaRPr lang="pt-BR"/>
           </a:p>
@@ -5308,7 +5764,7 @@
           <p:cNvPr id="2" name="Espaço Reservado para Título 1">
             <a:extLst>
               <a:ext uri="{FF2B5EF4-FFF2-40B4-BE49-F238E27FC236}">
-                <a16:creationId xmlns:a16="http://schemas.microsoft.com/office/drawing/2014/main" xmlns="" id="{E69A0273-1966-4A1B-9370-4C1CE5036371}"/>
+                <a16:creationId xmlns:a16="http://schemas.microsoft.com/office/drawing/2014/main" id="{E69A0273-1966-4A1B-9370-4C1CE5036371}"/>
               </a:ext>
             </a:extLst>
           </p:cNvPr>
@@ -5346,7 +5802,7 @@
           <p:cNvPr id="3" name="Espaço Reservado para Texto 2">
             <a:extLst>
               <a:ext uri="{FF2B5EF4-FFF2-40B4-BE49-F238E27FC236}">
-                <a16:creationId xmlns:a16="http://schemas.microsoft.com/office/drawing/2014/main" xmlns="" id="{3B9CF87A-0448-49A7-AB25-EBC1D56A40EF}"/>
+                <a16:creationId xmlns:a16="http://schemas.microsoft.com/office/drawing/2014/main" id="{3B9CF87A-0448-49A7-AB25-EBC1D56A40EF}"/>
               </a:ext>
             </a:extLst>
           </p:cNvPr>
@@ -5413,7 +5869,7 @@
           <p:cNvPr id="4" name="Espaço Reservado para Data 3">
             <a:extLst>
               <a:ext uri="{FF2B5EF4-FFF2-40B4-BE49-F238E27FC236}">
-                <a16:creationId xmlns:a16="http://schemas.microsoft.com/office/drawing/2014/main" xmlns="" id="{2EF7B1F2-BB5A-44D0-816D-16AD2C71430E}"/>
+                <a16:creationId xmlns:a16="http://schemas.microsoft.com/office/drawing/2014/main" id="{2EF7B1F2-BB5A-44D0-816D-16AD2C71430E}"/>
               </a:ext>
             </a:extLst>
           </p:cNvPr>
@@ -5449,7 +5905,7 @@
           <a:p>
             <a:fld id="{63289F7E-B80B-496E-81B4-D396C37C9454}" type="datetimeFigureOut">
               <a:rPr lang="pt-BR" smtClean="0"/>
-              <a:t>19/02/2026</a:t>
+              <a:t>20/02/2026</a:t>
             </a:fld>
             <a:endParaRPr lang="pt-BR"/>
           </a:p>
@@ -5460,7 +5916,7 @@
           <p:cNvPr id="5" name="Espaço Reservado para Rodapé 4">
             <a:extLst>
               <a:ext uri="{FF2B5EF4-FFF2-40B4-BE49-F238E27FC236}">
-                <a16:creationId xmlns:a16="http://schemas.microsoft.com/office/drawing/2014/main" xmlns="" id="{C703F94C-2CC8-4DAA-BC35-14FC3E841DCD}"/>
+                <a16:creationId xmlns:a16="http://schemas.microsoft.com/office/drawing/2014/main" id="{C703F94C-2CC8-4DAA-BC35-14FC3E841DCD}"/>
               </a:ext>
             </a:extLst>
           </p:cNvPr>
@@ -5503,7 +5959,7 @@
           <p:cNvPr id="6" name="Espaço Reservado para Número de Slide 5">
             <a:extLst>
               <a:ext uri="{FF2B5EF4-FFF2-40B4-BE49-F238E27FC236}">
-                <a16:creationId xmlns:a16="http://schemas.microsoft.com/office/drawing/2014/main" xmlns="" id="{64051336-7048-457A-8B61-D94291D71648}"/>
+                <a16:creationId xmlns:a16="http://schemas.microsoft.com/office/drawing/2014/main" id="{64051336-7048-457A-8B61-D94291D71648}"/>
               </a:ext>
             </a:extLst>
           </p:cNvPr>
@@ -5539,7 +5995,7 @@
           <a:p>
             <a:fld id="{1A7E88B7-70CE-4035-AE73-13FA6FB985D4}" type="slidenum">
               <a:rPr lang="pt-BR" smtClean="0"/>
-              <a:t>‹nº›</a:t>
+              <a:t>‹#›</a:t>
             </a:fld>
             <a:endParaRPr lang="pt-BR"/>
           </a:p>
@@ -5871,7 +6327,7 @@
           <p:cNvPr id="4" name="CaixaDeTexto 3">
             <a:extLst>
               <a:ext uri="{FF2B5EF4-FFF2-40B4-BE49-F238E27FC236}">
-                <a16:creationId xmlns:a16="http://schemas.microsoft.com/office/drawing/2014/main" xmlns="" id="{430EB894-B7D4-434C-9D1A-A14094D9BEEC}"/>
+                <a16:creationId xmlns:a16="http://schemas.microsoft.com/office/drawing/2014/main" id="{430EB894-B7D4-434C-9D1A-A14094D9BEEC}"/>
               </a:ext>
             </a:extLst>
           </p:cNvPr>
@@ -5915,7 +6371,7 @@
           <p:cNvPr id="1026" name="Picture 2" descr="Logo">
             <a:extLst>
               <a:ext uri="{FF2B5EF4-FFF2-40B4-BE49-F238E27FC236}">
-                <a16:creationId xmlns:a16="http://schemas.microsoft.com/office/drawing/2014/main" xmlns="" id="{3F2642E0-4F6A-4196-8F58-E77D36E9A33F}"/>
+                <a16:creationId xmlns:a16="http://schemas.microsoft.com/office/drawing/2014/main" id="{3F2642E0-4F6A-4196-8F58-E77D36E9A33F}"/>
               </a:ext>
             </a:extLst>
           </p:cNvPr>
@@ -5960,7 +6416,7 @@
           <p:cNvPr id="5122" name="Picture 2" descr="Image result for machine learning">
             <a:extLst>
               <a:ext uri="{FF2B5EF4-FFF2-40B4-BE49-F238E27FC236}">
-                <a16:creationId xmlns:a16="http://schemas.microsoft.com/office/drawing/2014/main" xmlns="" id="{810CE0A2-4102-44A6-A370-175E7896CDCB}"/>
+                <a16:creationId xmlns:a16="http://schemas.microsoft.com/office/drawing/2014/main" id="{810CE0A2-4102-44A6-A370-175E7896CDCB}"/>
               </a:ext>
             </a:extLst>
           </p:cNvPr>
@@ -6005,7 +6461,7 @@
           <p:cNvPr id="7" name="Título 1">
             <a:extLst>
               <a:ext uri="{FF2B5EF4-FFF2-40B4-BE49-F238E27FC236}">
-                <a16:creationId xmlns:a16="http://schemas.microsoft.com/office/drawing/2014/main" xmlns="" id="{32666AC8-2E17-4DB4-B0F5-60C640CCFD2E}"/>
+                <a16:creationId xmlns:a16="http://schemas.microsoft.com/office/drawing/2014/main" id="{32666AC8-2E17-4DB4-B0F5-60C640CCFD2E}"/>
               </a:ext>
             </a:extLst>
           </p:cNvPr>
@@ -6031,10 +6487,6 @@
             <a:r>
               <a:rPr lang="pt-BR" sz="6600" dirty="0"/>
               <a:t>C24 – Inteligência Artificial:</a:t>
-            </a:r>
-            <a:r>
-              <a:rPr lang="pt-BR" sz="7200" dirty="0"/>
-              <a:t/>
             </a:r>
             <a:br>
               <a:rPr lang="pt-BR" sz="7200" dirty="0"/>
@@ -6967,7 +7419,7 @@
         <p:cNvPr id="1" name="">
           <a:extLst>
             <a:ext uri="{FF2B5EF4-FFF2-40B4-BE49-F238E27FC236}">
-              <a16:creationId xmlns:a16="http://schemas.microsoft.com/office/drawing/2014/main" xmlns="" id="{4AC37BFF-244C-0D73-96E1-47543A4C245F}"/>
+              <a16:creationId xmlns:a16="http://schemas.microsoft.com/office/drawing/2014/main" id="{4AC37BFF-244C-0D73-96E1-47543A4C245F}"/>
             </a:ext>
           </a:extLst>
         </p:cNvPr>
@@ -6987,7 +7439,7 @@
           <p:cNvPr id="2" name="Title 1">
             <a:extLst>
               <a:ext uri="{FF2B5EF4-FFF2-40B4-BE49-F238E27FC236}">
-                <a16:creationId xmlns:a16="http://schemas.microsoft.com/office/drawing/2014/main" xmlns="" id="{CD893F73-D553-1C61-9D7D-AAB3F59096AD}"/>
+                <a16:creationId xmlns:a16="http://schemas.microsoft.com/office/drawing/2014/main" id="{CD893F73-D553-1C61-9D7D-AAB3F59096AD}"/>
               </a:ext>
             </a:extLst>
           </p:cNvPr>
@@ -7026,7 +7478,7 @@
               <p:cNvPr id="3" name="Content Placeholder 2">
                 <a:extLst>
                   <a:ext uri="{FF2B5EF4-FFF2-40B4-BE49-F238E27FC236}">
-                    <a16:creationId xmlns:a16="http://schemas.microsoft.com/office/drawing/2014/main" xmlns="" id="{5D34CF39-62BC-DA90-F244-DCDEF2E97DC7}"/>
+                    <a16:creationId xmlns:a16="http://schemas.microsoft.com/office/drawing/2014/main" id="{5D34CF39-62BC-DA90-F244-DCDEF2E97DC7}"/>
                   </a:ext>
                 </a:extLst>
               </p:cNvPr>
@@ -7228,14 +7680,7 @@
                             <a:latin typeface="Cambria Math" panose="02040503050406030204" pitchFamily="18" charset="0"/>
                             <a:ea typeface="Cambria Math" panose="02040503050406030204" pitchFamily="18" charset="0"/>
                           </a:rPr>
-                          <m:t>×</m:t>
-                        </m:r>
-                        <m:r>
-                          <a:rPr lang="pt-BR" b="0" i="1" smtClean="0">
-                            <a:latin typeface="Cambria Math" panose="02040503050406030204" pitchFamily="18" charset="0"/>
-                            <a:ea typeface="Cambria Math" panose="02040503050406030204" pitchFamily="18" charset="0"/>
-                          </a:rPr>
-                          <m:t>1</m:t>
+                          <m:t>×1</m:t>
                         </m:r>
                       </m:sup>
                     </m:sSubSup>
@@ -8264,7 +8709,7 @@
         <p:cNvPr id="1" name="">
           <a:extLst>
             <a:ext uri="{FF2B5EF4-FFF2-40B4-BE49-F238E27FC236}">
-              <a16:creationId xmlns:a16="http://schemas.microsoft.com/office/drawing/2014/main" xmlns="" id="{8FC9AE89-C8AC-DBE6-CA38-DEEF4996DFD9}"/>
+              <a16:creationId xmlns:a16="http://schemas.microsoft.com/office/drawing/2014/main" id="{8FC9AE89-C8AC-DBE6-CA38-DEEF4996DFD9}"/>
             </a:ext>
           </a:extLst>
         </p:cNvPr>
@@ -8284,7 +8729,7 @@
           <p:cNvPr id="2" name="Title 1">
             <a:extLst>
               <a:ext uri="{FF2B5EF4-FFF2-40B4-BE49-F238E27FC236}">
-                <a16:creationId xmlns:a16="http://schemas.microsoft.com/office/drawing/2014/main" xmlns="" id="{2CE4CC5F-008A-ECCB-8340-EE6C2C24E916}"/>
+                <a16:creationId xmlns:a16="http://schemas.microsoft.com/office/drawing/2014/main" id="{2CE4CC5F-008A-ECCB-8340-EE6C2C24E916}"/>
               </a:ext>
             </a:extLst>
           </p:cNvPr>
@@ -8323,7 +8768,7 @@
               <p:cNvPr id="3" name="Content Placeholder 2">
                 <a:extLst>
                   <a:ext uri="{FF2B5EF4-FFF2-40B4-BE49-F238E27FC236}">
-                    <a16:creationId xmlns:a16="http://schemas.microsoft.com/office/drawing/2014/main" xmlns="" id="{1237A257-D85C-E351-5085-80BCF81401BB}"/>
+                    <a16:creationId xmlns:a16="http://schemas.microsoft.com/office/drawing/2014/main" id="{1237A257-D85C-E351-5085-80BCF81401BB}"/>
                   </a:ext>
                 </a:extLst>
               </p:cNvPr>
@@ -9758,100 +10203,6 @@
       </p:grpSpPr>
       <p:sp>
         <p:nvSpPr>
-          <p:cNvPr id="2" name="Title 1">
-            <a:extLst>
-              <a:ext uri="{FF2B5EF4-FFF2-40B4-BE49-F238E27FC236}">
-                <a16:creationId xmlns:a16="http://schemas.microsoft.com/office/drawing/2014/main" xmlns="" id="{5B5C9F62-7684-5A29-B15B-4CEB812641BF}"/>
-              </a:ext>
-            </a:extLst>
-          </p:cNvPr>
-          <p:cNvSpPr>
-            <a:spLocks noGrp="1"/>
-          </p:cNvSpPr>
-          <p:nvPr>
-            <p:ph type="title"/>
-          </p:nvPr>
-        </p:nvSpPr>
-        <p:spPr/>
-        <p:txBody>
-          <a:bodyPr/>
-          <a:lstStyle/>
-          <a:p>
-            <a:endParaRPr lang="en-US"/>
-          </a:p>
-        </p:txBody>
-      </p:sp>
-      <p:sp>
-        <p:nvSpPr>
-          <p:cNvPr id="3" name="Content Placeholder 2">
-            <a:extLst>
-              <a:ext uri="{FF2B5EF4-FFF2-40B4-BE49-F238E27FC236}">
-                <a16:creationId xmlns:a16="http://schemas.microsoft.com/office/drawing/2014/main" xmlns="" id="{B8C9293E-FE0D-E03B-8391-5AFFEBCBCCE2}"/>
-              </a:ext>
-            </a:extLst>
-          </p:cNvPr>
-          <p:cNvSpPr>
-            <a:spLocks noGrp="1"/>
-          </p:cNvSpPr>
-          <p:nvPr>
-            <p:ph idx="1"/>
-          </p:nvPr>
-        </p:nvSpPr>
-        <p:spPr/>
-        <p:txBody>
-          <a:bodyPr>
-            <a:normAutofit/>
-          </a:bodyPr>
-          <a:lstStyle/>
-          <a:p>
-            <a:r>
-              <a:rPr lang="pt-BR" sz="8000" b="1" dirty="0">
-                <a:solidFill>
-                  <a:srgbClr val="FF0000"/>
-                </a:solidFill>
-              </a:rPr>
-              <a:t>PAREI AQUI!!!!!!</a:t>
-            </a:r>
-            <a:endParaRPr lang="en-US" sz="8000" b="1" dirty="0">
-              <a:solidFill>
-                <a:srgbClr val="FF0000"/>
-              </a:solidFill>
-            </a:endParaRPr>
-          </a:p>
-        </p:txBody>
-      </p:sp>
-    </p:spTree>
-    <p:extLst>
-      <p:ext uri="{BB962C8B-B14F-4D97-AF65-F5344CB8AC3E}">
-        <p14:creationId xmlns:p14="http://schemas.microsoft.com/office/powerpoint/2010/main" val="1385393323"/>
-      </p:ext>
-    </p:extLst>
-  </p:cSld>
-  <p:clrMapOvr>
-    <a:masterClrMapping/>
-  </p:clrMapOvr>
-</p:sld>
-</file>
-
-<file path=ppt/slides/slide14.xml><?xml version="1.0" encoding="utf-8"?>
-<p:sld xmlns:a="http://schemas.openxmlformats.org/drawingml/2006/main" xmlns:r="http://schemas.openxmlformats.org/officeDocument/2006/relationships" xmlns:p="http://schemas.openxmlformats.org/presentationml/2006/main">
-  <p:cSld>
-    <p:spTree>
-      <p:nvGrpSpPr>
-        <p:cNvPr id="1" name=""/>
-        <p:cNvGrpSpPr/>
-        <p:nvPr/>
-      </p:nvGrpSpPr>
-      <p:grpSpPr>
-        <a:xfrm>
-          <a:off x="0" y="0"/>
-          <a:ext cx="0" cy="0"/>
-          <a:chOff x="0" y="0"/>
-          <a:chExt cx="0" cy="0"/>
-        </a:xfrm>
-      </p:grpSpPr>
-      <p:sp>
-        <p:nvSpPr>
           <p:cNvPr id="2" name="Title 1"/>
           <p:cNvSpPr>
             <a:spLocks noGrp="1"/>
@@ -10223,7 +10574,7 @@
           <p:cNvPr id="12" name="Agrupar 11">
             <a:extLst>
               <a:ext uri="{FF2B5EF4-FFF2-40B4-BE49-F238E27FC236}">
-                <a16:creationId xmlns:a16="http://schemas.microsoft.com/office/drawing/2014/main" xmlns="" id="{745C0A43-FD12-CEC1-71CC-612BDB16C776}"/>
+                <a16:creationId xmlns:a16="http://schemas.microsoft.com/office/drawing/2014/main" id="{745C0A43-FD12-CEC1-71CC-612BDB16C776}"/>
               </a:ext>
             </a:extLst>
           </p:cNvPr>
@@ -10243,7 +10594,7 @@
             <p:cNvPr id="13" name="Picture 3">
               <a:extLst>
                 <a:ext uri="{FF2B5EF4-FFF2-40B4-BE49-F238E27FC236}">
-                  <a16:creationId xmlns:a16="http://schemas.microsoft.com/office/drawing/2014/main" xmlns="" id="{64DA2A01-47B5-2B94-DBFC-FB53B1B8205D}"/>
+                  <a16:creationId xmlns:a16="http://schemas.microsoft.com/office/drawing/2014/main" id="{64DA2A01-47B5-2B94-DBFC-FB53B1B8205D}"/>
                 </a:ext>
               </a:extLst>
             </p:cNvPr>
@@ -10278,7 +10629,7 @@
             <p:cNvPr id="14" name="TextBox 6">
               <a:extLst>
                 <a:ext uri="{FF2B5EF4-FFF2-40B4-BE49-F238E27FC236}">
-                  <a16:creationId xmlns:a16="http://schemas.microsoft.com/office/drawing/2014/main" xmlns="" id="{5ACECBBD-5168-48DA-64EF-8BDD58AE7E65}"/>
+                  <a16:creationId xmlns:a16="http://schemas.microsoft.com/office/drawing/2014/main" id="{5ACECBBD-5168-48DA-64EF-8BDD58AE7E65}"/>
                 </a:ext>
               </a:extLst>
             </p:cNvPr>
@@ -10318,7 +10669,7 @@
             <p:cNvPr id="15" name="Curved Connector 8">
               <a:extLst>
                 <a:ext uri="{FF2B5EF4-FFF2-40B4-BE49-F238E27FC236}">
-                  <a16:creationId xmlns:a16="http://schemas.microsoft.com/office/drawing/2014/main" xmlns="" id="{7D2B1880-C7A7-A071-10B2-08F118026EDA}"/>
+                  <a16:creationId xmlns:a16="http://schemas.microsoft.com/office/drawing/2014/main" id="{7D2B1880-C7A7-A071-10B2-08F118026EDA}"/>
                 </a:ext>
               </a:extLst>
             </p:cNvPr>
@@ -10359,7 +10710,7 @@
                 <p:cNvPr id="16" name="Retângulo 15">
                   <a:extLst>
                     <a:ext uri="{FF2B5EF4-FFF2-40B4-BE49-F238E27FC236}">
-                      <a16:creationId xmlns:a16="http://schemas.microsoft.com/office/drawing/2014/main" xmlns="" id="{036F5727-D9EE-E211-8459-926C7C8C80B1}"/>
+                      <a16:creationId xmlns:a16="http://schemas.microsoft.com/office/drawing/2014/main" id="{036F5727-D9EE-E211-8459-926C7C8C80B1}"/>
                     </a:ext>
                   </a:extLst>
                 </p:cNvPr>
@@ -10473,7 +10824,7 @@
 </p:sld>
 </file>
 
-<file path=ppt/slides/slide15.xml><?xml version="1.0" encoding="utf-8"?>
+<file path=ppt/slides/slide14.xml><?xml version="1.0" encoding="utf-8"?>
 <p:sld xmlns:a="http://schemas.openxmlformats.org/drawingml/2006/main" xmlns:r="http://schemas.openxmlformats.org/officeDocument/2006/relationships" xmlns:p="http://schemas.openxmlformats.org/presentationml/2006/main">
   <p:cSld>
     <p:spTree>
@@ -10784,7 +11135,7 @@
           <p:cNvPr id="14" name="Agrupar 13">
             <a:extLst>
               <a:ext uri="{FF2B5EF4-FFF2-40B4-BE49-F238E27FC236}">
-                <a16:creationId xmlns:a16="http://schemas.microsoft.com/office/drawing/2014/main" xmlns="" id="{D3D49D8E-0821-33E1-5823-3E158A4FB182}"/>
+                <a16:creationId xmlns:a16="http://schemas.microsoft.com/office/drawing/2014/main" id="{D3D49D8E-0821-33E1-5823-3E158A4FB182}"/>
               </a:ext>
             </a:extLst>
           </p:cNvPr>
@@ -10804,7 +11155,7 @@
             <p:cNvPr id="15" name="Picture 3">
               <a:extLst>
                 <a:ext uri="{FF2B5EF4-FFF2-40B4-BE49-F238E27FC236}">
-                  <a16:creationId xmlns:a16="http://schemas.microsoft.com/office/drawing/2014/main" xmlns="" id="{BD3F5D0C-F310-ED7B-BBE9-A892027EAD08}"/>
+                  <a16:creationId xmlns:a16="http://schemas.microsoft.com/office/drawing/2014/main" id="{BD3F5D0C-F310-ED7B-BBE9-A892027EAD08}"/>
                 </a:ext>
               </a:extLst>
             </p:cNvPr>
@@ -10839,7 +11190,7 @@
             <p:cNvPr id="16" name="TextBox 6">
               <a:extLst>
                 <a:ext uri="{FF2B5EF4-FFF2-40B4-BE49-F238E27FC236}">
-                  <a16:creationId xmlns:a16="http://schemas.microsoft.com/office/drawing/2014/main" xmlns="" id="{D474B403-303E-639E-341F-AA50DF86D3BE}"/>
+                  <a16:creationId xmlns:a16="http://schemas.microsoft.com/office/drawing/2014/main" id="{D474B403-303E-639E-341F-AA50DF86D3BE}"/>
                 </a:ext>
               </a:extLst>
             </p:cNvPr>
@@ -10879,7 +11230,7 @@
             <p:cNvPr id="17" name="Curved Connector 8">
               <a:extLst>
                 <a:ext uri="{FF2B5EF4-FFF2-40B4-BE49-F238E27FC236}">
-                  <a16:creationId xmlns:a16="http://schemas.microsoft.com/office/drawing/2014/main" xmlns="" id="{B45603A2-AC84-D66F-F06E-0371CA5BE810}"/>
+                  <a16:creationId xmlns:a16="http://schemas.microsoft.com/office/drawing/2014/main" id="{B45603A2-AC84-D66F-F06E-0371CA5BE810}"/>
                 </a:ext>
               </a:extLst>
             </p:cNvPr>
@@ -10920,7 +11271,7 @@
                 <p:cNvPr id="18" name="Retângulo 17">
                   <a:extLst>
                     <a:ext uri="{FF2B5EF4-FFF2-40B4-BE49-F238E27FC236}">
-                      <a16:creationId xmlns:a16="http://schemas.microsoft.com/office/drawing/2014/main" xmlns="" id="{C5162CC1-DD2F-DFBD-35CF-B876410E54B6}"/>
+                      <a16:creationId xmlns:a16="http://schemas.microsoft.com/office/drawing/2014/main" id="{C5162CC1-DD2F-DFBD-35CF-B876410E54B6}"/>
                     </a:ext>
                   </a:extLst>
                 </p:cNvPr>
@@ -11034,7 +11385,7 @@
 </p:sld>
 </file>
 
-<file path=ppt/slides/slide16.xml><?xml version="1.0" encoding="utf-8"?>
+<file path=ppt/slides/slide15.xml><?xml version="1.0" encoding="utf-8"?>
 <p:sld xmlns:a="http://schemas.openxmlformats.org/drawingml/2006/main" xmlns:r="http://schemas.openxmlformats.org/officeDocument/2006/relationships" xmlns:p="http://schemas.openxmlformats.org/presentationml/2006/main">
   <p:cSld>
     <p:spTree>
@@ -11281,7 +11632,7 @@
 </p:sld>
 </file>
 
-<file path=ppt/slides/slide17.xml><?xml version="1.0" encoding="utf-8"?>
+<file path=ppt/slides/slide16.xml><?xml version="1.0" encoding="utf-8"?>
 <p:sld xmlns:a="http://schemas.openxmlformats.org/drawingml/2006/main" xmlns:r="http://schemas.openxmlformats.org/officeDocument/2006/relationships" xmlns:p="http://schemas.openxmlformats.org/presentationml/2006/main">
   <p:cSld>
     <p:spTree>
@@ -11303,7 +11654,7 @@
           <p:cNvPr id="2" name="Título 1">
             <a:extLst>
               <a:ext uri="{FF2B5EF4-FFF2-40B4-BE49-F238E27FC236}">
-                <a16:creationId xmlns:a16="http://schemas.microsoft.com/office/drawing/2014/main" xmlns="" id="{14850ACD-2DE0-7E6B-F65F-1A40170C1B2F}"/>
+                <a16:creationId xmlns:a16="http://schemas.microsoft.com/office/drawing/2014/main" id="{14850ACD-2DE0-7E6B-F65F-1A40170C1B2F}"/>
               </a:ext>
             </a:extLst>
           </p:cNvPr>
@@ -11333,7 +11684,7 @@
               <p:cNvPr id="3" name="Espaço Reservado para Conteúdo 2">
                 <a:extLst>
                   <a:ext uri="{FF2B5EF4-FFF2-40B4-BE49-F238E27FC236}">
-                    <a16:creationId xmlns:a16="http://schemas.microsoft.com/office/drawing/2014/main" xmlns="" id="{1C254C3E-10F9-2C66-DDBB-99D1164F61E7}"/>
+                    <a16:creationId xmlns:a16="http://schemas.microsoft.com/office/drawing/2014/main" id="{1C254C3E-10F9-2C66-DDBB-99D1164F61E7}"/>
                   </a:ext>
                 </a:extLst>
               </p:cNvPr>
@@ -11357,12 +11708,12 @@
               <a:lstStyle/>
               <a:p>
                 <a:r>
-                  <a:rPr lang="pt-BR" dirty="0" smtClean="0"/>
-                  <a:t>No caso da </a:t>
+                  <a:rPr lang="pt-BR" dirty="0"/>
+                  <a:t>No caso </a:t>
                 </a:r>
                 <a:r>
                   <a:rPr lang="pt-BR" b="1" dirty="0"/>
-                  <a:t>classificação binária</a:t>
+                  <a:t>binário</a:t>
                 </a:r>
                 <a:r>
                   <a:rPr lang="pt-BR" dirty="0"/>
@@ -11382,7 +11733,7 @@
                 </a:r>
                 <a:r>
                   <a:rPr lang="pt-BR" dirty="0"/>
-                  <a:t>de tal forma que que a classe atribuída a um exemplo de entrada,</a:t>
+                  <a:t>de tal forma que que a classe atribuída a</a:t>
                 </a:r>
                 <a:r>
                   <a:rPr lang="pt-BR" b="1" dirty="0"/>
@@ -11418,7 +11769,7 @@
                 </a14:m>
                 <a:r>
                   <a:rPr lang="pt-BR" dirty="0"/>
-                  <a:t>, seja:</a:t>
+                  <a:t> seja:</a:t>
                 </a:r>
               </a:p>
               <a:p>
@@ -11434,14 +11785,14 @@
                       <m:sSub>
                         <m:sSubPr>
                           <m:ctrlPr>
-                            <a:rPr lang="pt-BR" i="1">
+                            <a:rPr lang="pt-BR" sz="2400" i="1">
                               <a:latin typeface="Cambria Math" panose="02040503050406030204" pitchFamily="18" charset="0"/>
                             </a:rPr>
                           </m:ctrlPr>
                         </m:sSubPr>
                         <m:e>
                           <m:r>
-                            <a:rPr lang="pt-BR">
+                            <a:rPr lang="pt-BR" sz="2400">
                               <a:latin typeface="Cambria Math" panose="02040503050406030204" pitchFamily="18" charset="0"/>
                             </a:rPr>
                             <m:t>𝐶</m:t>
@@ -11449,7 +11800,7 @@
                         </m:e>
                         <m:sub>
                           <m:r>
-                            <a:rPr lang="pt-BR">
+                            <a:rPr lang="pt-BR" sz="2400" b="0" i="1" smtClean="0">
                               <a:latin typeface="Cambria Math" panose="02040503050406030204" pitchFamily="18" charset="0"/>
                             </a:rPr>
                             <m:t>𝑞</m:t>
@@ -11457,7 +11808,7 @@
                         </m:sub>
                       </m:sSub>
                       <m:r>
-                        <a:rPr lang="pt-BR">
+                        <a:rPr lang="pt-BR" sz="2400">
                           <a:latin typeface="Cambria Math" panose="02040503050406030204" pitchFamily="18" charset="0"/>
                         </a:rPr>
                         <m:t>=</m:t>
@@ -11467,7 +11818,7 @@
                           <m:begChr m:val="{"/>
                           <m:endChr m:val=""/>
                           <m:ctrlPr>
-                            <a:rPr lang="pt-BR" i="1">
+                            <a:rPr lang="pt-BR" sz="2400" i="1">
                               <a:latin typeface="Cambria Math" panose="02040503050406030204" pitchFamily="18" charset="0"/>
                             </a:rPr>
                           </m:ctrlPr>
@@ -11476,7 +11827,7 @@
                           <m:eqArr>
                             <m:eqArrPr>
                               <m:ctrlPr>
-                                <a:rPr lang="pt-BR" i="1">
+                                <a:rPr lang="pt-BR" sz="2400" i="1">
                                   <a:latin typeface="Cambria Math" panose="02040503050406030204" pitchFamily="18" charset="0"/>
                                 </a:rPr>
                               </m:ctrlPr>
@@ -11493,7 +11844,7 @@
                                     </m:mc>
                                   </m:mcs>
                                   <m:ctrlPr>
-                                    <a:rPr lang="pt-BR" i="1" smtClean="0">
+                                    <a:rPr lang="pt-BR" sz="2400" i="1" smtClean="0">
                                       <a:latin typeface="Cambria Math" panose="02040503050406030204" pitchFamily="18" charset="0"/>
                                     </a:rPr>
                                   </m:ctrlPr>
@@ -11504,15 +11855,21 @@
                                       <m:rPr>
                                         <m:brk m:alnAt="7"/>
                                       </m:rPr>
-                                      <a:rPr lang="pt-BR" b="0" i="1" smtClean="0">
+                                      <a:rPr lang="pt-BR" sz="2400" b="0" i="1" smtClean="0">
                                         <a:latin typeface="Cambria Math" panose="02040503050406030204" pitchFamily="18" charset="0"/>
                                       </a:rPr>
-                                      <m:t>0,</m:t>
+                                      <m:t>𝑞</m:t>
+                                    </m:r>
+                                    <m:r>
+                                      <a:rPr lang="pt-BR" sz="2400" b="0" i="1" smtClean="0">
+                                        <a:latin typeface="Cambria Math" panose="02040503050406030204" pitchFamily="18" charset="0"/>
+                                      </a:rPr>
+                                      <m:t>=1,</m:t>
                                     </m:r>
                                   </m:e>
                                   <m:e>
                                     <m:r>
-                                      <a:rPr lang="pt-BR">
+                                      <a:rPr lang="pt-BR" sz="2400">
                                         <a:latin typeface="Cambria Math" panose="02040503050406030204" pitchFamily="18" charset="0"/>
                                       </a:rPr>
                                       <m:t>𝑔</m:t>
@@ -11520,32 +11877,32 @@
                                     <m:d>
                                       <m:dPr>
                                         <m:ctrlPr>
-                                          <a:rPr lang="pt-BR" i="1">
+                                          <a:rPr lang="pt-BR" sz="2400" i="1">
                                             <a:latin typeface="Cambria Math" panose="02040503050406030204" pitchFamily="18" charset="0"/>
                                           </a:rPr>
                                         </m:ctrlPr>
                                       </m:dPr>
                                       <m:e>
                                         <m:r>
-                                          <a:rPr lang="pt-BR">
+                                          <a:rPr lang="pt-BR" sz="2400">
                                             <a:latin typeface="Cambria Math" panose="02040503050406030204" pitchFamily="18" charset="0"/>
                                           </a:rPr>
                                           <m:t>𝒙</m:t>
                                         </m:r>
                                         <m:r>
-                                          <a:rPr lang="pt-BR" i="1">
+                                          <a:rPr lang="pt-BR" sz="2400" i="1">
                                             <a:latin typeface="Cambria Math" panose="02040503050406030204" pitchFamily="18" charset="0"/>
                                           </a:rPr>
                                           <m:t>(</m:t>
                                         </m:r>
                                         <m:r>
-                                          <a:rPr lang="pt-BR" i="1">
+                                          <a:rPr lang="pt-BR" sz="2400" i="1">
                                             <a:latin typeface="Cambria Math" panose="02040503050406030204" pitchFamily="18" charset="0"/>
                                           </a:rPr>
                                           <m:t>𝑖</m:t>
                                         </m:r>
                                         <m:r>
-                                          <a:rPr lang="pt-BR" i="1">
+                                          <a:rPr lang="pt-BR" sz="2400" i="1">
                                             <a:latin typeface="Cambria Math" panose="02040503050406030204" pitchFamily="18" charset="0"/>
                                           </a:rPr>
                                           <m:t>)</m:t>
@@ -11553,7 +11910,7 @@
                                       </m:e>
                                     </m:d>
                                     <m:r>
-                                      <a:rPr lang="pt-BR">
+                                      <a:rPr lang="pt-BR" sz="2400">
                                         <a:latin typeface="Cambria Math" panose="02040503050406030204" pitchFamily="18" charset="0"/>
                                       </a:rPr>
                                       <m:t>&lt;0</m:t>
@@ -11574,7 +11931,7 @@
                                     </m:mc>
                                   </m:mcs>
                                   <m:ctrlPr>
-                                    <a:rPr lang="pt-BR" i="1" dirty="0" smtClean="0">
+                                    <a:rPr lang="pt-BR" sz="2400" i="1" dirty="0" smtClean="0">
                                       <a:latin typeface="Cambria Math" panose="02040503050406030204" pitchFamily="18" charset="0"/>
                                     </a:rPr>
                                   </m:ctrlPr>
@@ -11585,15 +11942,21 @@
                                       <m:rPr>
                                         <m:brk m:alnAt="7"/>
                                       </m:rPr>
-                                      <a:rPr lang="pt-BR" b="0" i="1" dirty="0" smtClean="0">
+                                      <a:rPr lang="pt-BR" sz="2400" b="0" i="1" dirty="0" smtClean="0">
                                         <a:latin typeface="Cambria Math" panose="02040503050406030204" pitchFamily="18" charset="0"/>
                                       </a:rPr>
-                                      <m:t>1,</m:t>
+                                      <m:t>𝑞</m:t>
+                                    </m:r>
+                                    <m:r>
+                                      <a:rPr lang="pt-BR" sz="2400" b="0" i="1" dirty="0" smtClean="0">
+                                        <a:latin typeface="Cambria Math" panose="02040503050406030204" pitchFamily="18" charset="0"/>
+                                      </a:rPr>
+                                      <m:t>=2,</m:t>
                                     </m:r>
                                   </m:e>
                                   <m:e>
                                     <m:r>
-                                      <a:rPr lang="pt-BR">
+                                      <a:rPr lang="pt-BR" sz="2400">
                                         <a:latin typeface="Cambria Math" panose="02040503050406030204" pitchFamily="18" charset="0"/>
                                       </a:rPr>
                                       <m:t>𝑔</m:t>
@@ -11601,32 +11964,32 @@
                                     <m:d>
                                       <m:dPr>
                                         <m:ctrlPr>
-                                          <a:rPr lang="pt-BR" i="1">
+                                          <a:rPr lang="pt-BR" sz="2400" i="1">
                                             <a:latin typeface="Cambria Math" panose="02040503050406030204" pitchFamily="18" charset="0"/>
                                           </a:rPr>
                                         </m:ctrlPr>
                                       </m:dPr>
                                       <m:e>
                                         <m:r>
-                                          <a:rPr lang="pt-BR">
+                                          <a:rPr lang="pt-BR" sz="2400">
                                             <a:latin typeface="Cambria Math" panose="02040503050406030204" pitchFamily="18" charset="0"/>
                                           </a:rPr>
                                           <m:t>𝒙</m:t>
                                         </m:r>
                                         <m:r>
-                                          <a:rPr lang="pt-BR" i="1">
+                                          <a:rPr lang="pt-BR" sz="2400" i="1">
                                             <a:latin typeface="Cambria Math" panose="02040503050406030204" pitchFamily="18" charset="0"/>
                                           </a:rPr>
                                           <m:t>(</m:t>
                                         </m:r>
                                         <m:r>
-                                          <a:rPr lang="pt-BR" i="1">
+                                          <a:rPr lang="pt-BR" sz="2400" i="1">
                                             <a:latin typeface="Cambria Math" panose="02040503050406030204" pitchFamily="18" charset="0"/>
                                           </a:rPr>
                                           <m:t>𝑖</m:t>
                                         </m:r>
                                         <m:r>
-                                          <a:rPr lang="pt-BR" i="1">
+                                          <a:rPr lang="pt-BR" sz="2400" i="1">
                                             <a:latin typeface="Cambria Math" panose="02040503050406030204" pitchFamily="18" charset="0"/>
                                           </a:rPr>
                                           <m:t>)</m:t>
@@ -11634,7 +11997,7 @@
                                       </m:e>
                                     </m:d>
                                     <m:r>
-                                      <a:rPr lang="pt-BR">
+                                      <a:rPr lang="pt-BR" sz="2400">
                                         <a:latin typeface="Cambria Math" panose="02040503050406030204" pitchFamily="18" charset="0"/>
                                       </a:rPr>
                                       <m:t>&gt;0</m:t>
@@ -11655,7 +12018,7 @@
                                     </m:mc>
                                   </m:mcs>
                                   <m:ctrlPr>
-                                    <a:rPr lang="pt-BR" i="1" dirty="0" smtClean="0">
+                                    <a:rPr lang="pt-BR" sz="2400" i="1" dirty="0" smtClean="0">
                                       <a:latin typeface="Cambria Math" panose="02040503050406030204" pitchFamily="18" charset="0"/>
                                     </a:rPr>
                                   </m:ctrlPr>
@@ -11667,13 +12030,22 @@
                                         <m:sty m:val="p"/>
                                         <m:brk m:alnAt="7"/>
                                       </m:rPr>
-                                      <a:rPr lang="pt-BR" b="0" i="0" dirty="0" smtClean="0">
+                                      <a:rPr lang="pt-BR" sz="2400" b="0" i="0" dirty="0" smtClean="0">
                                         <a:latin typeface="Cambria Math" panose="02040503050406030204" pitchFamily="18" charset="0"/>
                                       </a:rPr>
-                                      <m:t>Indetermina</m:t>
+                                      <m:t>I</m:t>
                                     </m:r>
                                     <m:r>
-                                      <a:rPr lang="pt-BR" b="0" i="0" dirty="0" smtClean="0">
+                                      <m:rPr>
+                                        <m:sty m:val="p"/>
+                                      </m:rPr>
+                                      <a:rPr lang="pt-BR" sz="2400" b="0" i="0" dirty="0" smtClean="0">
+                                        <a:latin typeface="Cambria Math" panose="02040503050406030204" pitchFamily="18" charset="0"/>
+                                      </a:rPr>
+                                      <m:t>ndetermina</m:t>
+                                    </m:r>
+                                    <m:r>
+                                      <a:rPr lang="pt-BR" sz="2400" b="0" i="0" dirty="0" smtClean="0">
                                         <a:latin typeface="Cambria Math" panose="02040503050406030204" pitchFamily="18" charset="0"/>
                                       </a:rPr>
                                       <m:t>çã</m:t>
@@ -11682,7 +12054,7 @@
                                       <m:rPr>
                                         <m:sty m:val="p"/>
                                       </m:rPr>
-                                      <a:rPr lang="pt-BR" b="0" i="0" dirty="0" smtClean="0">
+                                      <a:rPr lang="pt-BR" sz="2400" b="0" i="0" dirty="0" smtClean="0">
                                         <a:latin typeface="Cambria Math" panose="02040503050406030204" pitchFamily="18" charset="0"/>
                                       </a:rPr>
                                       <m:t>o</m:t>
@@ -11691,7 +12063,7 @@
                                       <m:rPr>
                                         <m:brk m:alnAt="7"/>
                                       </m:rPr>
-                                      <a:rPr lang="pt-BR" b="0" i="1" dirty="0" smtClean="0">
+                                      <a:rPr lang="pt-BR" sz="2400" b="0" i="1" dirty="0" smtClean="0">
                                         <a:latin typeface="Cambria Math" panose="02040503050406030204" pitchFamily="18" charset="0"/>
                                       </a:rPr>
                                       <m:t>,</m:t>
@@ -11699,7 +12071,7 @@
                                   </m:e>
                                   <m:e>
                                     <m:r>
-                                      <a:rPr lang="pt-BR">
+                                      <a:rPr lang="pt-BR" sz="2400">
                                         <a:latin typeface="Cambria Math" panose="02040503050406030204" pitchFamily="18" charset="0"/>
                                       </a:rPr>
                                       <m:t>𝑔</m:t>
@@ -11707,32 +12079,32 @@
                                     <m:d>
                                       <m:dPr>
                                         <m:ctrlPr>
-                                          <a:rPr lang="pt-BR" i="1">
+                                          <a:rPr lang="pt-BR" sz="2400" i="1">
                                             <a:latin typeface="Cambria Math" panose="02040503050406030204" pitchFamily="18" charset="0"/>
                                           </a:rPr>
                                         </m:ctrlPr>
                                       </m:dPr>
                                       <m:e>
                                         <m:r>
-                                          <a:rPr lang="pt-BR">
+                                          <a:rPr lang="pt-BR" sz="2400">
                                             <a:latin typeface="Cambria Math" panose="02040503050406030204" pitchFamily="18" charset="0"/>
                                           </a:rPr>
                                           <m:t>𝒙</m:t>
                                         </m:r>
                                         <m:r>
-                                          <a:rPr lang="pt-BR" i="1">
+                                          <a:rPr lang="pt-BR" sz="2400" i="1">
                                             <a:latin typeface="Cambria Math" panose="02040503050406030204" pitchFamily="18" charset="0"/>
                                           </a:rPr>
                                           <m:t>(</m:t>
                                         </m:r>
                                         <m:r>
-                                          <a:rPr lang="pt-BR" i="1">
+                                          <a:rPr lang="pt-BR" sz="2400" i="1">
                                             <a:latin typeface="Cambria Math" panose="02040503050406030204" pitchFamily="18" charset="0"/>
                                           </a:rPr>
                                           <m:t>𝑖</m:t>
                                         </m:r>
                                         <m:r>
-                                          <a:rPr lang="pt-BR" i="1">
+                                          <a:rPr lang="pt-BR" sz="2400" i="1">
                                             <a:latin typeface="Cambria Math" panose="02040503050406030204" pitchFamily="18" charset="0"/>
                                           </a:rPr>
                                           <m:t>)</m:t>
@@ -11740,7 +12112,7 @@
                                       </m:e>
                                     </m:d>
                                     <m:r>
-                                      <a:rPr lang="pt-BR">
+                                      <a:rPr lang="pt-BR" sz="2400">
                                         <a:latin typeface="Cambria Math" panose="02040503050406030204" pitchFamily="18" charset="0"/>
                                       </a:rPr>
                                       <m:t>=0</m:t>
@@ -11749,7 +12121,7 @@
                                 </m:mr>
                               </m:m>
                               <m:r>
-                                <a:rPr lang="pt-BR" i="1" smtClean="0">
+                                <a:rPr lang="pt-BR" sz="2400" i="1" smtClean="0">
                                   <a:latin typeface="Cambria Math" panose="02040503050406030204" pitchFamily="18" charset="0"/>
                                 </a:rPr>
                                 <m:t> </m:t>
@@ -11758,12 +12130,6 @@
                           </m:eqArr>
                         </m:e>
                       </m:d>
-                      <m:r>
-                        <a:rPr lang="pt-BR" b="0" i="0" smtClean="0">
-                          <a:latin typeface="Cambria Math" panose="02040503050406030204" pitchFamily="18" charset="0"/>
-                        </a:rPr>
-                        <m:t>.</m:t>
-                      </m:r>
                     </m:oMath>
                   </m:oMathPara>
                 </a14:m>
@@ -11800,21 +12166,44 @@
                 </a:pPr>
                 <a:r>
                   <a:rPr lang="pt-BR" dirty="0"/>
-                  <a:t>escolher a classe que possui maior número de exemplos </a:t>
+                  <a:t>escolher a classe que possui mais amostras ou a mais frequente.</a:t>
                 </a:r>
               </a:p>
               <a:p>
-                <a:pPr lvl="1">
-                  <a:buFont typeface="Wingdings" panose="05000000000000000000" pitchFamily="2" charset="2"/>
-                  <a:buChar char="§"/>
-                </a:pPr>
                 <a:r>
                   <a:rPr lang="pt-BR" dirty="0"/>
-                  <a:t>ou a mais frequente.</a:t>
-                </a:r>
-                <a:r>
-                  <a:rPr lang="pt-BR" sz="2400" dirty="0"/>
-                  <a:t> </a:t>
+                  <a:t>Quanto mais distante a amostra estiver da fronteira de decisão, maior é o valor absoluto de </a:t>
+                </a:r>
+                <a14:m>
+                  <m:oMath xmlns:m="http://schemas.openxmlformats.org/officeDocument/2006/math">
+                    <m:r>
+                      <a:rPr lang="pt-BR" i="1">
+                        <a:latin typeface="Cambria Math" panose="02040503050406030204" pitchFamily="18" charset="0"/>
+                      </a:rPr>
+                      <m:t>𝑔</m:t>
+                    </m:r>
+                    <m:d>
+                      <m:dPr>
+                        <m:ctrlPr>
+                          <a:rPr lang="pt-BR" i="1">
+                            <a:latin typeface="Cambria Math" panose="02040503050406030204" pitchFamily="18" charset="0"/>
+                          </a:rPr>
+                        </m:ctrlPr>
+                      </m:dPr>
+                      <m:e>
+                        <m:r>
+                          <a:rPr lang="pt-BR" b="1" i="1">
+                            <a:latin typeface="Cambria Math" panose="02040503050406030204" pitchFamily="18" charset="0"/>
+                          </a:rPr>
+                          <m:t>𝒙</m:t>
+                        </m:r>
+                      </m:e>
+                    </m:d>
+                  </m:oMath>
+                </a14:m>
+                <a:r>
+                  <a:rPr lang="pt-BR" dirty="0"/>
+                  <a:t> e vice versa.</a:t>
                 </a:r>
               </a:p>
             </p:txBody>
@@ -11826,7 +12215,7 @@
               <p:cNvPr id="3" name="Espaço Reservado para Conteúdo 2">
                 <a:extLst>
                   <a:ext uri="{FF2B5EF4-FFF2-40B4-BE49-F238E27FC236}">
-                    <a16:creationId xmlns:a16="http://schemas.microsoft.com/office/drawing/2014/main" xmlns:a14="http://schemas.microsoft.com/office/drawing/2010/main" xmlns="" id="{1C254C3E-10F9-2C66-DDBB-99D1164F61E7}"/>
+                    <a16:creationId xmlns:a16="http://schemas.microsoft.com/office/drawing/2014/main" id="{1C254C3E-10F9-2C66-DDBB-99D1164F61E7}"/>
                   </a:ext>
                 </a:extLst>
               </p:cNvPr>
@@ -11842,10 +12231,10 @@
                 <a:off x="3557847" y="1825624"/>
                 <a:ext cx="8634153" cy="5032375"/>
               </a:xfrm>
-              <a:blipFill rotWithShape="0">
+              <a:blipFill>
                 <a:blip r:embed="rId3"/>
                 <a:stretch>
-                  <a:fillRect l="-1271" t="-1937"/>
+                  <a:fillRect l="-1271" t="-1937" r="-2048" b="-2421"/>
                 </a:stretch>
               </a:blipFill>
             </p:spPr>
@@ -11854,7 +12243,7 @@
               <a:lstStyle/>
               <a:p>
                 <a:r>
-                  <a:rPr lang="pt-BR">
+                  <a:rPr lang="en-US">
                     <a:noFill/>
                   </a:rPr>
                   <a:t> </a:t>
@@ -11869,7 +12258,7 @@
           <p:cNvPr id="16" name="Picture 3">
             <a:extLst>
               <a:ext uri="{FF2B5EF4-FFF2-40B4-BE49-F238E27FC236}">
-                <a16:creationId xmlns:a16="http://schemas.microsoft.com/office/drawing/2014/main" xmlns="" id="{797B4B4A-0E8F-6A84-F64E-0B174596F8C7}"/>
+                <a16:creationId xmlns:a16="http://schemas.microsoft.com/office/drawing/2014/main" id="{797B4B4A-0E8F-6A84-F64E-0B174596F8C7}"/>
               </a:ext>
             </a:extLst>
           </p:cNvPr>
@@ -11909,27 +12298,28 @@
             </p:nvSpPr>
             <p:spPr>
               <a:xfrm>
-                <a:off x="11121143" y="3078080"/>
-                <a:ext cx="2792751" cy="369332"/>
+                <a:off x="9764484" y="3061412"/>
+                <a:ext cx="1963999" cy="276999"/>
               </a:xfrm>
               <a:prstGeom prst="rect">
                 <a:avLst/>
               </a:prstGeom>
             </p:spPr>
             <p:txBody>
-              <a:bodyPr wrap="none">
+              <a:bodyPr wrap="square">
                 <a:spAutoFit/>
               </a:bodyPr>
               <a:lstStyle/>
               <a:p>
+                <a:pPr/>
                 <a14:m>
                   <m:oMathPara xmlns:m="http://schemas.openxmlformats.org/officeDocument/2006/math">
                     <m:oMathParaPr>
-                      <m:jc m:val="centerGroup"/>
+                      <m:jc m:val="center"/>
                     </m:oMathParaPr>
                     <m:oMath xmlns:m="http://schemas.openxmlformats.org/officeDocument/2006/math">
                       <m:r>
-                        <a:rPr lang="pt-BR">
+                        <a:rPr lang="pt-BR" sz="1200">
                           <a:latin typeface="Cambria Math" panose="02040503050406030204" pitchFamily="18" charset="0"/>
                         </a:rPr>
                         <m:t>(</m:t>
@@ -11938,76 +12328,76 @@
                         <m:rPr>
                           <m:nor/>
                         </m:rPr>
-                        <a:rPr lang="pt-BR"/>
+                        <a:rPr lang="pt-BR" sz="1200"/>
                         <m:t>Amostra</m:t>
                       </m:r>
                       <m:r>
                         <m:rPr>
                           <m:nor/>
                         </m:rPr>
-                        <a:rPr lang="pt-BR"/>
+                        <a:rPr lang="pt-BR" sz="1200"/>
                         <m:t> </m:t>
                       </m:r>
                       <m:r>
                         <m:rPr>
                           <m:nor/>
                         </m:rPr>
-                        <a:rPr lang="pt-BR"/>
+                        <a:rPr lang="pt-BR" sz="1200"/>
                         <m:t>acima</m:t>
                       </m:r>
                       <m:r>
                         <m:rPr>
                           <m:nor/>
                         </m:rPr>
-                        <a:rPr lang="pt-BR" dirty="0"/>
+                        <a:rPr lang="pt-BR" sz="1200" dirty="0"/>
                         <m:t> </m:t>
                       </m:r>
                       <m:r>
                         <m:rPr>
                           <m:nor/>
                         </m:rPr>
-                        <a:rPr lang="pt-BR" dirty="0"/>
+                        <a:rPr lang="pt-BR" sz="1200" dirty="0"/>
                         <m:t>da</m:t>
                       </m:r>
                       <m:r>
                         <m:rPr>
                           <m:nor/>
                         </m:rPr>
-                        <a:rPr lang="pt-BR" dirty="0"/>
+                        <a:rPr lang="pt-BR" sz="1200" dirty="0"/>
                         <m:t> </m:t>
                       </m:r>
                       <m:r>
                         <m:rPr>
                           <m:nor/>
                         </m:rPr>
-                        <a:rPr lang="pt-BR" dirty="0"/>
+                        <a:rPr lang="pt-BR" sz="1200" dirty="0"/>
                         <m:t>fun</m:t>
                       </m:r>
                       <m:r>
                         <m:rPr>
                           <m:nor/>
                         </m:rPr>
-                        <a:rPr lang="pt-BR" dirty="0"/>
+                        <a:rPr lang="pt-BR" sz="1200" dirty="0"/>
                         <m:t>çã</m:t>
                       </m:r>
                       <m:r>
                         <m:rPr>
                           <m:nor/>
                         </m:rPr>
-                        <a:rPr lang="pt-BR" dirty="0"/>
+                        <a:rPr lang="pt-BR" sz="1200" dirty="0"/>
                         <m:t>o</m:t>
                       </m:r>
                       <m:r>
                         <m:rPr>
                           <m:nor/>
                         </m:rPr>
-                        <a:rPr lang="pt-BR" dirty="0"/>
+                        <a:rPr lang="pt-BR" sz="1200" dirty="0"/>
                         <m:t>)</m:t>
                       </m:r>
                     </m:oMath>
                   </m:oMathPara>
                 </a14:m>
-                <a:endParaRPr lang="pt-BR" dirty="0"/>
+                <a:endParaRPr lang="pt-BR" sz="1200" dirty="0"/>
               </a:p>
             </p:txBody>
           </p:sp>
@@ -12023,16 +12413,16 @@
             </p:nvSpPr>
             <p:spPr>
               <a:xfrm>
-                <a:off x="11121143" y="3078080"/>
-                <a:ext cx="2792751" cy="369332"/>
+                <a:off x="9764484" y="3061412"/>
+                <a:ext cx="1963999" cy="276999"/>
               </a:xfrm>
               <a:prstGeom prst="rect">
                 <a:avLst/>
               </a:prstGeom>
-              <a:blipFill rotWithShape="0">
+              <a:blipFill>
                 <a:blip r:embed="rId5"/>
                 <a:stretch>
-                  <a:fillRect b="-11475"/>
+                  <a:fillRect b="-6522"/>
                 </a:stretch>
               </a:blipFill>
             </p:spPr>
@@ -12041,7 +12431,7 @@
               <a:lstStyle/>
               <a:p>
                 <a:r>
-                  <a:rPr lang="pt-BR">
+                  <a:rPr lang="en-US">
                     <a:noFill/>
                   </a:rPr>
                   <a:t> </a:t>
@@ -12061,8 +12451,8 @@
             </p:nvSpPr>
             <p:spPr>
               <a:xfrm>
-                <a:off x="11626114" y="3447412"/>
-                <a:ext cx="2853666" cy="369332"/>
+                <a:off x="9764484" y="3472544"/>
+                <a:ext cx="1963999" cy="276999"/>
               </a:xfrm>
               <a:prstGeom prst="rect">
                 <a:avLst/>
@@ -12074,6 +12464,7 @@
               </a:bodyPr>
               <a:lstStyle/>
               <a:p>
+                <a:pPr/>
                 <a14:m>
                   <m:oMathPara xmlns:m="http://schemas.openxmlformats.org/officeDocument/2006/math">
                     <m:oMathParaPr>
@@ -12081,7 +12472,7 @@
                     </m:oMathParaPr>
                     <m:oMath xmlns:m="http://schemas.openxmlformats.org/officeDocument/2006/math">
                       <m:r>
-                        <a:rPr lang="pt-BR">
+                        <a:rPr lang="pt-BR" sz="1200">
                           <a:latin typeface="Cambria Math" panose="02040503050406030204" pitchFamily="18" charset="0"/>
                         </a:rPr>
                         <m:t>(</m:t>
@@ -12090,76 +12481,76 @@
                         <m:rPr>
                           <m:nor/>
                         </m:rPr>
-                        <a:rPr lang="pt-BR" dirty="0"/>
+                        <a:rPr lang="pt-BR" sz="1200" dirty="0"/>
                         <m:t>Amostra</m:t>
                       </m:r>
                       <m:r>
                         <m:rPr>
                           <m:nor/>
                         </m:rPr>
-                        <a:rPr lang="pt-BR" dirty="0"/>
+                        <a:rPr lang="pt-BR" sz="1200" dirty="0"/>
                         <m:t> </m:t>
                       </m:r>
                       <m:r>
                         <m:rPr>
                           <m:nor/>
                         </m:rPr>
-                        <a:rPr lang="pt-BR" dirty="0"/>
+                        <a:rPr lang="pt-BR" sz="1200" dirty="0"/>
                         <m:t>abaixo</m:t>
                       </m:r>
                       <m:r>
                         <m:rPr>
                           <m:nor/>
                         </m:rPr>
-                        <a:rPr lang="pt-BR" dirty="0"/>
+                        <a:rPr lang="pt-BR" sz="1200" dirty="0"/>
                         <m:t> </m:t>
                       </m:r>
                       <m:r>
                         <m:rPr>
                           <m:nor/>
                         </m:rPr>
-                        <a:rPr lang="pt-BR" dirty="0"/>
+                        <a:rPr lang="pt-BR" sz="1200" dirty="0"/>
                         <m:t>da</m:t>
                       </m:r>
                       <m:r>
                         <m:rPr>
                           <m:nor/>
                         </m:rPr>
-                        <a:rPr lang="pt-BR" dirty="0"/>
+                        <a:rPr lang="pt-BR" sz="1200" dirty="0"/>
                         <m:t> </m:t>
                       </m:r>
                       <m:r>
                         <m:rPr>
                           <m:nor/>
                         </m:rPr>
-                        <a:rPr lang="pt-BR" dirty="0"/>
+                        <a:rPr lang="pt-BR" sz="1200" dirty="0"/>
                         <m:t>fun</m:t>
                       </m:r>
                       <m:r>
                         <m:rPr>
                           <m:nor/>
                         </m:rPr>
-                        <a:rPr lang="pt-BR" dirty="0"/>
+                        <a:rPr lang="pt-BR" sz="1200" dirty="0"/>
                         <m:t>çã</m:t>
                       </m:r>
                       <m:r>
                         <m:rPr>
                           <m:nor/>
                         </m:rPr>
-                        <a:rPr lang="pt-BR" dirty="0"/>
+                        <a:rPr lang="pt-BR" sz="1200" dirty="0"/>
                         <m:t>o</m:t>
                       </m:r>
                       <m:r>
                         <m:rPr>
                           <m:nor/>
                         </m:rPr>
-                        <a:rPr lang="pt-BR" dirty="0"/>
+                        <a:rPr lang="pt-BR" sz="1200" dirty="0"/>
                         <m:t>)</m:t>
                       </m:r>
                     </m:oMath>
                   </m:oMathPara>
                 </a14:m>
-                <a:endParaRPr lang="pt-BR" dirty="0"/>
+                <a:endParaRPr lang="pt-BR" sz="1200" dirty="0"/>
               </a:p>
             </p:txBody>
           </p:sp>
@@ -12175,16 +12566,16 @@
             </p:nvSpPr>
             <p:spPr>
               <a:xfrm>
-                <a:off x="11626114" y="3447412"/>
-                <a:ext cx="2853666" cy="369332"/>
+                <a:off x="9764484" y="3472544"/>
+                <a:ext cx="1963999" cy="276999"/>
               </a:xfrm>
               <a:prstGeom prst="rect">
                 <a:avLst/>
               </a:prstGeom>
-              <a:blipFill rotWithShape="0">
+              <a:blipFill>
                 <a:blip r:embed="rId6"/>
                 <a:stretch>
-                  <a:fillRect b="-13333"/>
+                  <a:fillRect b="-8889"/>
                 </a:stretch>
               </a:blipFill>
             </p:spPr>
@@ -12193,7 +12584,7 @@
               <a:lstStyle/>
               <a:p>
                 <a:r>
-                  <a:rPr lang="pt-BR">
+                  <a:rPr lang="en-US">
                     <a:noFill/>
                   </a:rPr>
                   <a:t> </a:t>
@@ -12213,8 +12604,8 @@
             </p:nvSpPr>
             <p:spPr>
               <a:xfrm>
-                <a:off x="12517518" y="4265048"/>
-                <a:ext cx="2696571" cy="369332"/>
+                <a:off x="10332197" y="3851018"/>
+                <a:ext cx="1859803" cy="276999"/>
               </a:xfrm>
               <a:prstGeom prst="rect">
                 <a:avLst/>
@@ -12226,6 +12617,7 @@
               </a:bodyPr>
               <a:lstStyle/>
               <a:p>
+                <a:pPr/>
                 <a14:m>
                   <m:oMathPara xmlns:m="http://schemas.openxmlformats.org/officeDocument/2006/math">
                     <m:oMathParaPr>
@@ -12233,7 +12625,7 @@
                     </m:oMathParaPr>
                     <m:oMath xmlns:m="http://schemas.openxmlformats.org/officeDocument/2006/math">
                       <m:r>
-                        <a:rPr lang="pt-BR">
+                        <a:rPr lang="pt-BR" sz="1200">
                           <a:latin typeface="Cambria Math" panose="02040503050406030204" pitchFamily="18" charset="0"/>
                         </a:rPr>
                         <m:t>(</m:t>
@@ -12242,90 +12634,83 @@
                         <m:rPr>
                           <m:nor/>
                         </m:rPr>
-                        <a:rPr lang="pt-BR"/>
+                        <a:rPr lang="pt-BR" sz="1200"/>
                         <m:t>A</m:t>
                       </m:r>
                       <m:r>
                         <m:rPr>
                           <m:nor/>
                         </m:rPr>
-                        <a:rPr lang="pt-BR" dirty="0"/>
+                        <a:rPr lang="pt-BR" sz="1200" dirty="0"/>
                         <m:t>mostra</m:t>
                       </m:r>
                       <m:r>
                         <m:rPr>
                           <m:nor/>
                         </m:rPr>
-                        <a:rPr lang="pt-BR" dirty="0"/>
+                        <a:rPr lang="pt-BR" sz="1200" dirty="0"/>
                         <m:t> </m:t>
                       </m:r>
                       <m:r>
                         <m:rPr>
                           <m:nor/>
                         </m:rPr>
-                        <a:rPr lang="pt-BR" dirty="0"/>
+                        <a:rPr lang="pt-BR" sz="1200" dirty="0"/>
                         <m:t>sobre</m:t>
                       </m:r>
                       <m:r>
                         <m:rPr>
                           <m:nor/>
                         </m:rPr>
-                        <a:rPr lang="pt-BR" dirty="0"/>
+                        <a:rPr lang="pt-BR" sz="1200" dirty="0"/>
                         <m:t> </m:t>
                       </m:r>
                       <m:r>
                         <m:rPr>
                           <m:nor/>
                         </m:rPr>
-                        <a:rPr lang="pt-BR" dirty="0"/>
+                        <a:rPr lang="pt-BR" sz="1200" dirty="0"/>
                         <m:t>a</m:t>
                       </m:r>
                       <m:r>
                         <m:rPr>
                           <m:nor/>
                         </m:rPr>
-                        <a:rPr lang="pt-BR" dirty="0"/>
+                        <a:rPr lang="pt-BR" sz="1200" dirty="0"/>
                         <m:t> </m:t>
                       </m:r>
                       <m:r>
                         <m:rPr>
                           <m:nor/>
                         </m:rPr>
-                        <a:rPr lang="pt-BR" dirty="0"/>
+                        <a:rPr lang="pt-BR" sz="1200" dirty="0"/>
                         <m:t>fun</m:t>
                       </m:r>
                       <m:r>
                         <m:rPr>
                           <m:nor/>
                         </m:rPr>
-                        <a:rPr lang="pt-BR" dirty="0"/>
+                        <a:rPr lang="pt-BR" sz="1200" dirty="0"/>
                         <m:t>çã</m:t>
                       </m:r>
                       <m:r>
                         <m:rPr>
                           <m:nor/>
                         </m:rPr>
-                        <a:rPr lang="pt-BR" dirty="0"/>
+                        <a:rPr lang="pt-BR" sz="1200" dirty="0"/>
                         <m:t>o</m:t>
                       </m:r>
                       <m:r>
                         <m:rPr>
                           <m:nor/>
                         </m:rPr>
-                        <a:rPr lang="pt-BR" dirty="0"/>
-                        <m:t>)</m:t>
-                      </m:r>
-                      <m:r>
-                        <m:rPr>
-                          <m:nor/>
-                        </m:rPr>
-                        <a:rPr lang="pt-BR" dirty="0"/>
-                        <m:t> </m:t>
+                        <a:rPr lang="pt-BR" sz="1200" dirty="0"/>
+                        <m:t>) </m:t>
                       </m:r>
                     </m:oMath>
                   </m:oMathPara>
                 </a14:m>
-                <a:endParaRPr lang="pt-BR" dirty="0"/>
+                <a:endParaRPr lang="pt-BR" sz="1200" dirty="0"/>
               </a:p>
             </p:txBody>
           </p:sp>
@@ -12341,16 +12726,16 @@
             </p:nvSpPr>
             <p:spPr>
               <a:xfrm>
-                <a:off x="12517518" y="4265048"/>
-                <a:ext cx="2696571" cy="369332"/>
+                <a:off x="10332197" y="3851018"/>
+                <a:ext cx="1859803" cy="276999"/>
               </a:xfrm>
               <a:prstGeom prst="rect">
                 <a:avLst/>
               </a:prstGeom>
-              <a:blipFill rotWithShape="0">
+              <a:blipFill>
                 <a:blip r:embed="rId7"/>
                 <a:stretch>
-                  <a:fillRect b="-13333"/>
+                  <a:fillRect b="-8889"/>
                 </a:stretch>
               </a:blipFill>
             </p:spPr>
@@ -12359,7 +12744,7 @@
               <a:lstStyle/>
               <a:p>
                 <a:r>
-                  <a:rPr lang="pt-BR">
+                  <a:rPr lang="en-US">
                     <a:noFill/>
                   </a:rPr>
                   <a:t> </a:t>
@@ -12382,7 +12767,7 @@
 </p:sld>
 </file>
 
-<file path=ppt/slides/slide18.xml><?xml version="1.0" encoding="utf-8"?>
+<file path=ppt/slides/slide17.xml><?xml version="1.0" encoding="utf-8"?>
 <p:sld xmlns:a="http://schemas.openxmlformats.org/drawingml/2006/main" xmlns:r="http://schemas.openxmlformats.org/officeDocument/2006/relationships" xmlns:p="http://schemas.openxmlformats.org/presentationml/2006/main">
   <p:cSld>
     <p:spTree>
@@ -12390,7 +12775,7 @@
         <p:cNvPr id="1" name="">
           <a:extLst>
             <a:ext uri="{FF2B5EF4-FFF2-40B4-BE49-F238E27FC236}">
-              <a16:creationId xmlns:a16="http://schemas.microsoft.com/office/drawing/2014/main" xmlns="" id="{681BC3B9-C36D-49B5-70A3-4BC587561B8D}"/>
+              <a16:creationId xmlns:a16="http://schemas.microsoft.com/office/drawing/2014/main" id="{681BC3B9-C36D-49B5-70A3-4BC587561B8D}"/>
             </a:ext>
           </a:extLst>
         </p:cNvPr>
@@ -12410,7 +12795,7 @@
           <p:cNvPr id="2" name="Título 1">
             <a:extLst>
               <a:ext uri="{FF2B5EF4-FFF2-40B4-BE49-F238E27FC236}">
-                <a16:creationId xmlns:a16="http://schemas.microsoft.com/office/drawing/2014/main" xmlns="" id="{777D7044-033A-83CB-744E-0A0EF1C533B0}"/>
+                <a16:creationId xmlns:a16="http://schemas.microsoft.com/office/drawing/2014/main" id="{777D7044-033A-83CB-744E-0A0EF1C533B0}"/>
               </a:ext>
             </a:extLst>
           </p:cNvPr>
@@ -12440,7 +12825,7 @@
               <p:cNvPr id="3" name="Espaço Reservado para Conteúdo 2">
                 <a:extLst>
                   <a:ext uri="{FF2B5EF4-FFF2-40B4-BE49-F238E27FC236}">
-                    <a16:creationId xmlns:a16="http://schemas.microsoft.com/office/drawing/2014/main" xmlns="" id="{CE2D84F5-4801-80A5-C74A-52605D59919E}"/>
+                    <a16:creationId xmlns:a16="http://schemas.microsoft.com/office/drawing/2014/main" id="{CE2D84F5-4801-80A5-C74A-52605D59919E}"/>
                   </a:ext>
                 </a:extLst>
               </p:cNvPr>
@@ -12873,7 +13258,7 @@
           <p:cNvPr id="10" name="Picture 9">
             <a:extLst>
               <a:ext uri="{FF2B5EF4-FFF2-40B4-BE49-F238E27FC236}">
-                <a16:creationId xmlns:a16="http://schemas.microsoft.com/office/drawing/2014/main" xmlns="" id="{8317135C-B768-15DB-007E-9233AE5ABB00}"/>
+                <a16:creationId xmlns:a16="http://schemas.microsoft.com/office/drawing/2014/main" id="{8317135C-B768-15DB-007E-9233AE5ABB00}"/>
               </a:ext>
             </a:extLst>
           </p:cNvPr>
@@ -12916,7 +13301,7 @@
 </p:sld>
 </file>
 
-<file path=ppt/slides/slide19.xml><?xml version="1.0" encoding="utf-8"?>
+<file path=ppt/slides/slide18.xml><?xml version="1.0" encoding="utf-8"?>
 <p:sld xmlns:a="http://schemas.openxmlformats.org/drawingml/2006/main" xmlns:r="http://schemas.openxmlformats.org/officeDocument/2006/relationships" xmlns:p="http://schemas.openxmlformats.org/presentationml/2006/main">
   <p:cSld>
     <p:spTree>
@@ -12924,7 +13309,7 @@
         <p:cNvPr id="1" name="">
           <a:extLst>
             <a:ext uri="{FF2B5EF4-FFF2-40B4-BE49-F238E27FC236}">
-              <a16:creationId xmlns:a16="http://schemas.microsoft.com/office/drawing/2014/main" xmlns="" id="{724E4B1E-477E-FFD4-7402-E83E77BF2EF4}"/>
+              <a16:creationId xmlns:a16="http://schemas.microsoft.com/office/drawing/2014/main" id="{724E4B1E-477E-FFD4-7402-E83E77BF2EF4}"/>
             </a:ext>
           </a:extLst>
         </p:cNvPr>
@@ -12944,7 +13329,7 @@
           <p:cNvPr id="3" name="Content Placeholder 2">
             <a:extLst>
               <a:ext uri="{FF2B5EF4-FFF2-40B4-BE49-F238E27FC236}">
-                <a16:creationId xmlns:a16="http://schemas.microsoft.com/office/drawing/2014/main" xmlns="" id="{F8959B32-CD26-D2CA-3E0C-4F8F0704DEBE}"/>
+                <a16:creationId xmlns:a16="http://schemas.microsoft.com/office/drawing/2014/main" id="{F8959B32-CD26-D2CA-3E0C-4F8F0704DEBE}"/>
               </a:ext>
             </a:extLst>
           </p:cNvPr>
@@ -12982,6 +13367,109 @@
     <p:extLst>
       <p:ext uri="{BB962C8B-B14F-4D97-AF65-F5344CB8AC3E}">
         <p14:creationId xmlns:p14="http://schemas.microsoft.com/office/powerpoint/2010/main" val="561645333"/>
+      </p:ext>
+    </p:extLst>
+  </p:cSld>
+  <p:clrMapOvr>
+    <a:masterClrMapping/>
+  </p:clrMapOvr>
+</p:sld>
+</file>
+
+<file path=ppt/slides/slide19.xml><?xml version="1.0" encoding="utf-8"?>
+<p:sld xmlns:a="http://schemas.openxmlformats.org/drawingml/2006/main" xmlns:r="http://schemas.openxmlformats.org/officeDocument/2006/relationships" xmlns:p="http://schemas.openxmlformats.org/presentationml/2006/main">
+  <p:cSld>
+    <p:spTree>
+      <p:nvGrpSpPr>
+        <p:cNvPr id="1" name="">
+          <a:extLst>
+            <a:ext uri="{FF2B5EF4-FFF2-40B4-BE49-F238E27FC236}">
+              <a16:creationId xmlns:a16="http://schemas.microsoft.com/office/drawing/2014/main" id="{724E4B1E-477E-FFD4-7402-E83E77BF2EF4}"/>
+            </a:ext>
+          </a:extLst>
+        </p:cNvPr>
+        <p:cNvGrpSpPr/>
+        <p:nvPr/>
+      </p:nvGrpSpPr>
+      <p:grpSpPr>
+        <a:xfrm>
+          <a:off x="0" y="0"/>
+          <a:ext cx="0" cy="0"/>
+          <a:chOff x="0" y="0"/>
+          <a:chExt cx="0" cy="0"/>
+        </a:xfrm>
+      </p:grpSpPr>
+      <p:sp>
+        <p:nvSpPr>
+          <p:cNvPr id="3" name="Content Placeholder 2">
+            <a:extLst>
+              <a:ext uri="{FF2B5EF4-FFF2-40B4-BE49-F238E27FC236}">
+                <a16:creationId xmlns:a16="http://schemas.microsoft.com/office/drawing/2014/main" id="{F8959B32-CD26-D2CA-3E0C-4F8F0704DEBE}"/>
+              </a:ext>
+            </a:extLst>
+          </p:cNvPr>
+          <p:cNvSpPr>
+            <a:spLocks noGrp="1"/>
+          </p:cNvSpPr>
+          <p:nvPr>
+            <p:ph idx="1"/>
+          </p:nvPr>
+        </p:nvSpPr>
+        <p:spPr>
+          <a:xfrm>
+            <a:off x="610490" y="1794459"/>
+            <a:ext cx="11070771" cy="3475810"/>
+          </a:xfrm>
+        </p:spPr>
+        <p:txBody>
+          <a:bodyPr>
+            <a:normAutofit/>
+          </a:bodyPr>
+          <a:lstStyle/>
+          <a:p>
+            <a:pPr marL="0" indent="0" algn="ctr">
+              <a:buNone/>
+            </a:pPr>
+            <a:r>
+              <a:rPr lang="pt-BR" sz="6000" dirty="0"/>
+              <a:t>Da mesma forma que com a regressão, usando o </a:t>
+            </a:r>
+            <a:r>
+              <a:rPr lang="pt-BR" sz="6000" b="1" dirty="0"/>
+              <a:t>gradiente descendente</a:t>
+            </a:r>
+            <a:r>
+              <a:rPr lang="pt-BR" sz="6000" dirty="0"/>
+              <a:t> e </a:t>
+            </a:r>
+            <a:r>
+              <a:rPr lang="pt-BR" sz="6000" b="1" dirty="0"/>
+              <a:t>validação cruzada</a:t>
+            </a:r>
+            <a:r>
+              <a:rPr lang="pt-BR" sz="6000" dirty="0"/>
+              <a:t>, como o </a:t>
+            </a:r>
+            <a:r>
+              <a:rPr lang="pt-BR" sz="6000" i="1" dirty="0"/>
+              <a:t>k-</a:t>
+            </a:r>
+            <a:r>
+              <a:rPr lang="pt-BR" sz="6000" i="1" dirty="0" err="1"/>
+              <a:t>fold</a:t>
+            </a:r>
+            <a:r>
+              <a:rPr lang="pt-BR" sz="6000" dirty="0"/>
+              <a:t>, por exemplo.</a:t>
+            </a:r>
+            <a:endParaRPr lang="en-US" sz="6000" dirty="0"/>
+          </a:p>
+        </p:txBody>
+      </p:sp>
+    </p:spTree>
+    <p:extLst>
+      <p:ext uri="{BB962C8B-B14F-4D97-AF65-F5344CB8AC3E}">
+        <p14:creationId xmlns:p14="http://schemas.microsoft.com/office/powerpoint/2010/main" val="1322526149"/>
       </p:ext>
     </p:extLst>
   </p:cSld>
@@ -13513,7 +14001,7 @@
               <p:cNvPr id="6" name="CaixaDeTexto 5">
                 <a:extLst>
                   <a:ext uri="{FF2B5EF4-FFF2-40B4-BE49-F238E27FC236}">
-                    <a16:creationId xmlns:a16="http://schemas.microsoft.com/office/drawing/2014/main" xmlns="" id="{CECF4BC9-393F-92F3-2241-24670E5635B4}"/>
+                    <a16:creationId xmlns:a16="http://schemas.microsoft.com/office/drawing/2014/main" id="{CECF4BC9-393F-92F3-2241-24670E5635B4}"/>
                   </a:ext>
                 </a:extLst>
               </p:cNvPr>
@@ -13641,7 +14129,7 @@
               <p:cNvPr id="8" name="CaixaDeTexto 5">
                 <a:extLst>
                   <a:ext uri="{FF2B5EF4-FFF2-40B4-BE49-F238E27FC236}">
-                    <a16:creationId xmlns:a16="http://schemas.microsoft.com/office/drawing/2014/main" xmlns="" id="{48D3A820-D198-F9AB-C6B3-3F78DA6684D0}"/>
+                    <a16:creationId xmlns:a16="http://schemas.microsoft.com/office/drawing/2014/main" id="{48D3A820-D198-F9AB-C6B3-3F78DA6684D0}"/>
                   </a:ext>
                 </a:extLst>
               </p:cNvPr>
@@ -13780,13 +14268,7 @@
   <p:cSld>
     <p:spTree>
       <p:nvGrpSpPr>
-        <p:cNvPr id="1" name="">
-          <a:extLst>
-            <a:ext uri="{FF2B5EF4-FFF2-40B4-BE49-F238E27FC236}">
-              <a16:creationId xmlns:a16="http://schemas.microsoft.com/office/drawing/2014/main" xmlns="" id="{724E4B1E-477E-FFD4-7402-E83E77BF2EF4}"/>
-            </a:ext>
-          </a:extLst>
-        </p:cNvPr>
+        <p:cNvPr id="1" name=""/>
         <p:cNvGrpSpPr/>
         <p:nvPr/>
       </p:nvGrpSpPr>
@@ -13798,61 +14280,692 @@
           <a:chExt cx="0" cy="0"/>
         </a:xfrm>
       </p:grpSpPr>
-      <p:sp>
-        <p:nvSpPr>
-          <p:cNvPr id="3" name="Content Placeholder 2">
+      <mc:AlternateContent xmlns:mc="http://schemas.openxmlformats.org/markup-compatibility/2006">
+        <mc:Choice xmlns:a14="http://schemas.microsoft.com/office/drawing/2010/main" Requires="a14">
+          <p:sp>
+            <p:nvSpPr>
+              <p:cNvPr id="2" name="Title 1">
+                <a:extLst>
+                  <a:ext uri="{FF2B5EF4-FFF2-40B4-BE49-F238E27FC236}">
+                    <a16:creationId xmlns:a16="http://schemas.microsoft.com/office/drawing/2014/main" id="{DA7FDC7F-B899-B1A6-F69A-351822C6EFD7}"/>
+                  </a:ext>
+                </a:extLst>
+              </p:cNvPr>
+              <p:cNvSpPr>
+                <a:spLocks noGrp="1"/>
+              </p:cNvSpPr>
+              <p:nvPr>
+                <p:ph type="title"/>
+              </p:nvPr>
+            </p:nvSpPr>
+            <p:spPr/>
+            <p:txBody>
+              <a:bodyPr/>
+              <a:lstStyle/>
+              <a:p>
+                <a:r>
+                  <a:rPr lang="en-US" dirty="0"/>
+                  <a:t>Como </a:t>
+                </a:r>
+                <a:r>
+                  <a:rPr lang="en-US" dirty="0" err="1"/>
+                  <a:t>mapeamos</a:t>
+                </a:r>
+                <a:r>
+                  <a:rPr lang="en-US" dirty="0"/>
+                  <a:t> </a:t>
+                </a:r>
+                <a14:m>
+                  <m:oMath xmlns:m="http://schemas.openxmlformats.org/officeDocument/2006/math">
+                    <m:r>
+                      <a:rPr lang="pt-BR" i="1">
+                        <a:latin typeface="Cambria Math" panose="02040503050406030204" pitchFamily="18" charset="0"/>
+                      </a:rPr>
+                      <m:t>𝑔</m:t>
+                    </m:r>
+                    <m:r>
+                      <a:rPr lang="pt-BR" i="1">
+                        <a:latin typeface="Cambria Math" panose="02040503050406030204" pitchFamily="18" charset="0"/>
+                      </a:rPr>
+                      <m:t>(</m:t>
+                    </m:r>
+                    <m:r>
+                      <a:rPr lang="pt-BR" b="1" i="1">
+                        <a:latin typeface="Cambria Math" panose="02040503050406030204" pitchFamily="18" charset="0"/>
+                      </a:rPr>
+                      <m:t>𝒙</m:t>
+                    </m:r>
+                    <m:r>
+                      <a:rPr lang="pt-BR" i="1">
+                        <a:latin typeface="Cambria Math" panose="02040503050406030204" pitchFamily="18" charset="0"/>
+                      </a:rPr>
+                      <m:t>(</m:t>
+                    </m:r>
+                    <m:r>
+                      <a:rPr lang="pt-BR" i="1">
+                        <a:latin typeface="Cambria Math" panose="02040503050406030204" pitchFamily="18" charset="0"/>
+                      </a:rPr>
+                      <m:t>𝑖</m:t>
+                    </m:r>
+                    <m:r>
+                      <a:rPr lang="pt-BR" i="1">
+                        <a:latin typeface="Cambria Math" panose="02040503050406030204" pitchFamily="18" charset="0"/>
+                      </a:rPr>
+                      <m:t>))</m:t>
+                    </m:r>
+                  </m:oMath>
+                </a14:m>
+                <a:r>
+                  <a:rPr lang="en-US" dirty="0"/>
+                  <a:t> </a:t>
+                </a:r>
+                <a:r>
+                  <a:rPr lang="en-US" dirty="0" err="1"/>
+                  <a:t>nas</a:t>
+                </a:r>
+                <a:r>
+                  <a:rPr lang="en-US" dirty="0"/>
+                  <a:t> classes?</a:t>
+                </a:r>
+              </a:p>
+            </p:txBody>
+          </p:sp>
+        </mc:Choice>
+        <mc:Fallback>
+          <p:sp>
+            <p:nvSpPr>
+              <p:cNvPr id="2" name="Title 1">
+                <a:extLst>
+                  <a:ext uri="{FF2B5EF4-FFF2-40B4-BE49-F238E27FC236}">
+                    <a16:creationId xmlns:a16="http://schemas.microsoft.com/office/drawing/2014/main" id="{DA7FDC7F-B899-B1A6-F69A-351822C6EFD7}"/>
+                  </a:ext>
+                </a:extLst>
+              </p:cNvPr>
+              <p:cNvSpPr>
+                <a:spLocks noGrp="1" noRot="1" noChangeAspect="1" noMove="1" noResize="1" noEditPoints="1" noAdjustHandles="1" noChangeArrowheads="1" noChangeShapeType="1" noTextEdit="1"/>
+              </p:cNvSpPr>
+              <p:nvPr>
+                <p:ph type="title"/>
+              </p:nvPr>
+            </p:nvSpPr>
+            <p:spPr>
+              <a:blipFill>
+                <a:blip r:embed="rId2"/>
+                <a:stretch>
+                  <a:fillRect l="-2377"/>
+                </a:stretch>
+              </a:blipFill>
+            </p:spPr>
+            <p:txBody>
+              <a:bodyPr/>
+              <a:lstStyle/>
+              <a:p>
+                <a:r>
+                  <a:rPr lang="en-US">
+                    <a:noFill/>
+                  </a:rPr>
+                  <a:t> </a:t>
+                </a:r>
+              </a:p>
+            </p:txBody>
+          </p:sp>
+        </mc:Fallback>
+      </mc:AlternateContent>
+      <mc:AlternateContent xmlns:mc="http://schemas.openxmlformats.org/markup-compatibility/2006">
+        <mc:Choice xmlns:a14="http://schemas.microsoft.com/office/drawing/2010/main" Requires="a14">
+          <p:sp>
+            <p:nvSpPr>
+              <p:cNvPr id="3" name="Content Placeholder 2">
+                <a:extLst>
+                  <a:ext uri="{FF2B5EF4-FFF2-40B4-BE49-F238E27FC236}">
+                    <a16:creationId xmlns:a16="http://schemas.microsoft.com/office/drawing/2014/main" id="{E5A0C298-3D62-58C4-3B44-8F0C5C3E0A0C}"/>
+                  </a:ext>
+                </a:extLst>
+              </p:cNvPr>
+              <p:cNvSpPr>
+                <a:spLocks noGrp="1"/>
+              </p:cNvSpPr>
+              <p:nvPr>
+                <p:ph idx="1"/>
+              </p:nvPr>
+            </p:nvSpPr>
+            <p:spPr>
+              <a:xfrm>
+                <a:off x="4789714" y="1825624"/>
+                <a:ext cx="7304315" cy="5032375"/>
+              </a:xfrm>
+            </p:spPr>
+            <p:txBody>
+              <a:bodyPr>
+                <a:normAutofit/>
+              </a:bodyPr>
+              <a:lstStyle/>
+              <a:p>
+                <a:r>
+                  <a:rPr lang="en-US" dirty="0"/>
+                  <a:t>Vocês </a:t>
+                </a:r>
+                <a:r>
+                  <a:rPr lang="en-US" dirty="0" err="1"/>
+                  <a:t>perceberam</a:t>
+                </a:r>
+                <a:r>
+                  <a:rPr lang="en-US" dirty="0"/>
+                  <a:t> </a:t>
+                </a:r>
+                <a:r>
+                  <a:rPr lang="en-US" dirty="0" err="1"/>
+                  <a:t>que</a:t>
+                </a:r>
+                <a:r>
+                  <a:rPr lang="en-US" dirty="0"/>
+                  <a:t> as </a:t>
+                </a:r>
+                <a:r>
+                  <a:rPr lang="en-US" dirty="0" err="1"/>
+                  <a:t>saídas</a:t>
+                </a:r>
+                <a:r>
+                  <a:rPr lang="en-US" dirty="0"/>
+                  <a:t> das </a:t>
+                </a:r>
+                <a:r>
+                  <a:rPr lang="en-US" dirty="0" err="1"/>
+                  <a:t>funções</a:t>
+                </a:r>
+                <a:r>
+                  <a:rPr lang="en-US" dirty="0"/>
+                  <a:t> </a:t>
+                </a:r>
+                <a:r>
+                  <a:rPr lang="en-US" dirty="0" err="1"/>
+                  <a:t>discriminantes</a:t>
+                </a:r>
+                <a:r>
+                  <a:rPr lang="en-US" dirty="0"/>
+                  <a:t> </a:t>
+                </a:r>
+                <a:r>
+                  <a:rPr lang="en-US" dirty="0" err="1"/>
+                  <a:t>podem</a:t>
+                </a:r>
+                <a:r>
+                  <a:rPr lang="en-US" dirty="0"/>
+                  <a:t> </a:t>
+                </a:r>
+                <a:r>
+                  <a:rPr lang="en-US" dirty="0" err="1"/>
+                  <a:t>assumir</a:t>
+                </a:r>
+                <a:r>
+                  <a:rPr lang="en-US" dirty="0"/>
+                  <a:t> </a:t>
+                </a:r>
+                <a:r>
+                  <a:rPr lang="en-US" dirty="0" err="1"/>
+                  <a:t>infinitos</a:t>
+                </a:r>
+                <a:r>
+                  <a:rPr lang="en-US" dirty="0"/>
+                  <a:t> </a:t>
+                </a:r>
+                <a:r>
+                  <a:rPr lang="en-US" dirty="0" err="1"/>
+                  <a:t>valores</a:t>
+                </a:r>
+                <a:r>
+                  <a:rPr lang="en-US" dirty="0"/>
+                  <a:t>?</a:t>
+                </a:r>
+              </a:p>
+              <a:p>
+                <a:pPr marL="0" indent="0">
+                  <a:buNone/>
+                </a:pPr>
+                <a14:m>
+                  <m:oMathPara xmlns:m="http://schemas.openxmlformats.org/officeDocument/2006/math">
+                    <m:oMathParaPr>
+                      <m:jc m:val="centerGroup"/>
+                    </m:oMathParaPr>
+                    <m:oMath xmlns:m="http://schemas.openxmlformats.org/officeDocument/2006/math">
+                      <m:r>
+                        <a:rPr lang="pt-BR" b="0" i="1" smtClean="0">
+                          <a:latin typeface="Cambria Math" panose="02040503050406030204" pitchFamily="18" charset="0"/>
+                        </a:rPr>
+                        <m:t>𝑔</m:t>
+                      </m:r>
+                      <m:r>
+                        <a:rPr lang="pt-BR" b="0" i="1" smtClean="0">
+                          <a:latin typeface="Cambria Math" panose="02040503050406030204" pitchFamily="18" charset="0"/>
+                        </a:rPr>
+                        <m:t>(</m:t>
+                      </m:r>
+                      <m:r>
+                        <a:rPr lang="pt-BR" b="1" i="1" smtClean="0">
+                          <a:latin typeface="Cambria Math" panose="02040503050406030204" pitchFamily="18" charset="0"/>
+                        </a:rPr>
+                        <m:t>𝒙</m:t>
+                      </m:r>
+                      <m:r>
+                        <a:rPr lang="pt-BR" b="0" i="1" smtClean="0">
+                          <a:latin typeface="Cambria Math" panose="02040503050406030204" pitchFamily="18" charset="0"/>
+                        </a:rPr>
+                        <m:t>(</m:t>
+                      </m:r>
+                      <m:r>
+                        <a:rPr lang="pt-BR" b="0" i="1" smtClean="0">
+                          <a:latin typeface="Cambria Math" panose="02040503050406030204" pitchFamily="18" charset="0"/>
+                        </a:rPr>
+                        <m:t>𝑖</m:t>
+                      </m:r>
+                      <m:r>
+                        <a:rPr lang="pt-BR" b="0" i="1" smtClean="0">
+                          <a:latin typeface="Cambria Math" panose="02040503050406030204" pitchFamily="18" charset="0"/>
+                        </a:rPr>
+                        <m:t>))∈</m:t>
+                      </m:r>
+                      <m:d>
+                        <m:dPr>
+                          <m:begChr m:val="["/>
+                          <m:endChr m:val="]"/>
+                          <m:ctrlPr>
+                            <a:rPr lang="pt-BR" b="0" i="1" smtClean="0">
+                              <a:latin typeface="Cambria Math" panose="02040503050406030204" pitchFamily="18" charset="0"/>
+                              <a:ea typeface="Cambria Math" panose="02040503050406030204" pitchFamily="18" charset="0"/>
+                            </a:rPr>
+                          </m:ctrlPr>
+                        </m:dPr>
+                        <m:e>
+                          <m:r>
+                            <a:rPr lang="pt-BR" b="0" i="1" smtClean="0">
+                              <a:latin typeface="Cambria Math" panose="02040503050406030204" pitchFamily="18" charset="0"/>
+                              <a:ea typeface="Cambria Math" panose="02040503050406030204" pitchFamily="18" charset="0"/>
+                            </a:rPr>
+                            <m:t>−∞,+∞</m:t>
+                          </m:r>
+                        </m:e>
+                      </m:d>
+                    </m:oMath>
+                  </m:oMathPara>
+                </a14:m>
+                <a:endParaRPr lang="en-US" dirty="0"/>
+              </a:p>
+              <a:p>
+                <a:r>
+                  <a:rPr lang="en-US" dirty="0" err="1"/>
+                  <a:t>Porém</a:t>
+                </a:r>
+                <a:r>
+                  <a:rPr lang="en-US" dirty="0"/>
+                  <a:t>, </a:t>
+                </a:r>
+                <a:r>
+                  <a:rPr lang="en-US" dirty="0" err="1"/>
+                  <a:t>estamos</a:t>
+                </a:r>
+                <a:r>
+                  <a:rPr lang="en-US" dirty="0"/>
+                  <a:t> </a:t>
+                </a:r>
+                <a:r>
+                  <a:rPr lang="en-US" dirty="0" err="1"/>
+                  <a:t>lidando</a:t>
+                </a:r>
+                <a:r>
+                  <a:rPr lang="en-US" dirty="0"/>
+                  <a:t> com </a:t>
+                </a:r>
+                <a:r>
+                  <a:rPr lang="en-US" dirty="0" err="1"/>
+                  <a:t>problemas</a:t>
+                </a:r>
+                <a:r>
+                  <a:rPr lang="en-US" dirty="0"/>
+                  <a:t> de </a:t>
+                </a:r>
+                <a:r>
+                  <a:rPr lang="en-US" dirty="0" err="1"/>
+                  <a:t>classificação</a:t>
+                </a:r>
+                <a:r>
+                  <a:rPr lang="en-US" dirty="0"/>
+                  <a:t>.</a:t>
+                </a:r>
+              </a:p>
+              <a:p>
+                <a:pPr lvl="1">
+                  <a:buFont typeface="Wingdings" panose="05000000000000000000" pitchFamily="2" charset="2"/>
+                  <a:buChar char="§"/>
+                </a:pPr>
+                <a:r>
+                  <a:rPr lang="pt-BR" dirty="0"/>
+                  <a:t>O objetivo é atribuir uma classe ao vetor de atributos, </a:t>
+                </a:r>
+                <a14:m>
+                  <m:oMath xmlns:m="http://schemas.openxmlformats.org/officeDocument/2006/math">
+                    <m:r>
+                      <a:rPr lang="pt-BR" b="1" i="1">
+                        <a:latin typeface="Cambria Math" panose="02040503050406030204" pitchFamily="18" charset="0"/>
+                      </a:rPr>
+                      <m:t>𝒙</m:t>
+                    </m:r>
+                  </m:oMath>
+                </a14:m>
+                <a:r>
+                  <a:rPr lang="pt-BR" dirty="0"/>
+                  <a:t>.</a:t>
+                </a:r>
+              </a:p>
+              <a:p>
+                <a:r>
+                  <a:rPr lang="en-US" dirty="0"/>
+                  <a:t>Para </a:t>
+                </a:r>
+                <a:r>
+                  <a:rPr lang="en-US" dirty="0" err="1"/>
+                  <a:t>calcular</a:t>
+                </a:r>
+                <a:r>
+                  <a:rPr lang="en-US" dirty="0"/>
+                  <a:t> o </a:t>
+                </a:r>
+                <a:r>
+                  <a:rPr lang="en-US" dirty="0" err="1"/>
+                  <a:t>erro</a:t>
+                </a:r>
+                <a:r>
+                  <a:rPr lang="en-US" dirty="0"/>
+                  <a:t> entre </a:t>
+                </a:r>
+                <a:r>
+                  <a:rPr lang="en-US" dirty="0" err="1"/>
+                  <a:t>os</a:t>
+                </a:r>
+                <a:r>
+                  <a:rPr lang="en-US" dirty="0"/>
+                  <a:t> </a:t>
+                </a:r>
+                <a:r>
+                  <a:rPr lang="en-US" dirty="0" err="1"/>
+                  <a:t>rótulos</a:t>
+                </a:r>
+                <a:r>
+                  <a:rPr lang="en-US" dirty="0"/>
+                  <a:t>, </a:t>
+                </a:r>
+                <a14:m>
+                  <m:oMath xmlns:m="http://schemas.openxmlformats.org/officeDocument/2006/math">
+                    <m:r>
+                      <a:rPr lang="pt-BR" i="1">
+                        <a:latin typeface="Cambria Math" panose="02040503050406030204" pitchFamily="18" charset="0"/>
+                      </a:rPr>
+                      <m:t>𝑦</m:t>
+                    </m:r>
+                  </m:oMath>
+                </a14:m>
+                <a:r>
+                  <a:rPr lang="en-US" dirty="0"/>
+                  <a:t>, e a </a:t>
+                </a:r>
+                <a:r>
+                  <a:rPr lang="en-US" dirty="0" err="1"/>
+                  <a:t>saída</a:t>
+                </a:r>
+                <a:r>
+                  <a:rPr lang="en-US" dirty="0"/>
+                  <a:t> do </a:t>
+                </a:r>
+                <a:r>
+                  <a:rPr lang="en-US" dirty="0" err="1"/>
+                  <a:t>modelo</a:t>
+                </a:r>
+                <a:r>
+                  <a:rPr lang="en-US" dirty="0"/>
+                  <a:t>, </a:t>
+                </a:r>
+                <a14:m>
+                  <m:oMath xmlns:m="http://schemas.openxmlformats.org/officeDocument/2006/math">
+                    <m:acc>
+                      <m:accPr>
+                        <m:chr m:val="̂"/>
+                        <m:ctrlPr>
+                          <a:rPr lang="en-US" i="1">
+                            <a:latin typeface="Cambria Math" panose="02040503050406030204" pitchFamily="18" charset="0"/>
+                          </a:rPr>
+                        </m:ctrlPr>
+                      </m:accPr>
+                      <m:e>
+                        <m:r>
+                          <a:rPr lang="pt-BR" i="1">
+                            <a:latin typeface="Cambria Math" panose="02040503050406030204" pitchFamily="18" charset="0"/>
+                          </a:rPr>
+                          <m:t>𝑦</m:t>
+                        </m:r>
+                      </m:e>
+                    </m:acc>
+                  </m:oMath>
+                </a14:m>
+                <a:r>
+                  <a:rPr lang="en-US" dirty="0"/>
+                  <a:t>, ela </a:t>
+                </a:r>
+                <a:r>
+                  <a:rPr lang="en-US" dirty="0" err="1"/>
+                  <a:t>deve</a:t>
+                </a:r>
+                <a:r>
+                  <a:rPr lang="en-US" dirty="0"/>
+                  <a:t> </a:t>
+                </a:r>
+                <a:r>
+                  <a:rPr lang="en-US" dirty="0" err="1"/>
+                  <a:t>estar</a:t>
+                </a:r>
+                <a:r>
+                  <a:rPr lang="en-US" dirty="0"/>
+                  <a:t> no </a:t>
+                </a:r>
+                <a:r>
+                  <a:rPr lang="en-US" dirty="0" err="1"/>
+                  <a:t>intervalo</a:t>
+                </a:r>
+                <a:r>
+                  <a:rPr lang="en-US" dirty="0"/>
+                  <a:t> </a:t>
+                </a:r>
+                <a14:m>
+                  <m:oMath xmlns:m="http://schemas.openxmlformats.org/officeDocument/2006/math">
+                    <m:d>
+                      <m:dPr>
+                        <m:begChr m:val="["/>
+                        <m:endChr m:val="]"/>
+                        <m:ctrlPr>
+                          <a:rPr lang="pt-BR" sz="2400" i="1">
+                            <a:latin typeface="Cambria Math" panose="02040503050406030204" pitchFamily="18" charset="0"/>
+                          </a:rPr>
+                        </m:ctrlPr>
+                      </m:dPr>
+                      <m:e>
+                        <m:r>
+                          <a:rPr lang="pt-BR" sz="2400">
+                            <a:latin typeface="Cambria Math" panose="02040503050406030204" pitchFamily="18" charset="0"/>
+                          </a:rPr>
+                          <m:t>𝟎</m:t>
+                        </m:r>
+                        <m:r>
+                          <a:rPr lang="pt-BR" sz="2400">
+                            <a:latin typeface="Cambria Math" panose="02040503050406030204" pitchFamily="18" charset="0"/>
+                          </a:rPr>
+                          <m:t>, </m:t>
+                        </m:r>
+                        <m:r>
+                          <a:rPr lang="pt-BR" sz="2400">
+                            <a:latin typeface="Cambria Math" panose="02040503050406030204" pitchFamily="18" charset="0"/>
+                          </a:rPr>
+                          <m:t>𝟏</m:t>
+                        </m:r>
+                      </m:e>
+                    </m:d>
+                  </m:oMath>
+                </a14:m>
+                <a:r>
+                  <a:rPr lang="en-US" sz="2400" dirty="0"/>
+                  <a:t>.</a:t>
+                </a:r>
+                <a:endParaRPr lang="en-US" dirty="0"/>
+              </a:p>
+              <a:p>
+                <a:r>
+                  <a:rPr lang="en-US" dirty="0"/>
+                  <a:t>Como </a:t>
+                </a:r>
+                <a:r>
+                  <a:rPr lang="en-US" dirty="0" err="1"/>
+                  <a:t>mapeamos</a:t>
+                </a:r>
+                <a:r>
+                  <a:rPr lang="en-US" dirty="0"/>
+                  <a:t> </a:t>
+                </a:r>
+                <a14:m>
+                  <m:oMath xmlns:m="http://schemas.openxmlformats.org/officeDocument/2006/math">
+                    <m:r>
+                      <a:rPr lang="pt-BR" i="1">
+                        <a:latin typeface="Cambria Math" panose="02040503050406030204" pitchFamily="18" charset="0"/>
+                      </a:rPr>
+                      <m:t>𝑔</m:t>
+                    </m:r>
+                    <m:r>
+                      <a:rPr lang="pt-BR" i="1">
+                        <a:latin typeface="Cambria Math" panose="02040503050406030204" pitchFamily="18" charset="0"/>
+                      </a:rPr>
+                      <m:t>(</m:t>
+                    </m:r>
+                    <m:r>
+                      <a:rPr lang="pt-BR" b="1" i="1">
+                        <a:latin typeface="Cambria Math" panose="02040503050406030204" pitchFamily="18" charset="0"/>
+                      </a:rPr>
+                      <m:t>𝒙</m:t>
+                    </m:r>
+                    <m:r>
+                      <a:rPr lang="pt-BR" i="1">
+                        <a:latin typeface="Cambria Math" panose="02040503050406030204" pitchFamily="18" charset="0"/>
+                      </a:rPr>
+                      <m:t>(</m:t>
+                    </m:r>
+                    <m:r>
+                      <a:rPr lang="pt-BR" i="1">
+                        <a:latin typeface="Cambria Math" panose="02040503050406030204" pitchFamily="18" charset="0"/>
+                      </a:rPr>
+                      <m:t>𝑖</m:t>
+                    </m:r>
+                    <m:r>
+                      <a:rPr lang="pt-BR" i="1">
+                        <a:latin typeface="Cambria Math" panose="02040503050406030204" pitchFamily="18" charset="0"/>
+                      </a:rPr>
+                      <m:t>))</m:t>
+                    </m:r>
+                  </m:oMath>
+                </a14:m>
+                <a:r>
+                  <a:rPr lang="en-US" dirty="0"/>
+                  <a:t> </a:t>
+                </a:r>
+                <a:r>
+                  <a:rPr lang="en-US" dirty="0" err="1"/>
+                  <a:t>nas</a:t>
+                </a:r>
+                <a:r>
+                  <a:rPr lang="en-US" dirty="0"/>
+                  <a:t> classes?</a:t>
+                </a:r>
+              </a:p>
+            </p:txBody>
+          </p:sp>
+        </mc:Choice>
+        <mc:Fallback>
+          <p:sp>
+            <p:nvSpPr>
+              <p:cNvPr id="3" name="Content Placeholder 2">
+                <a:extLst>
+                  <a:ext uri="{FF2B5EF4-FFF2-40B4-BE49-F238E27FC236}">
+                    <a16:creationId xmlns:a16="http://schemas.microsoft.com/office/drawing/2014/main" id="{E5A0C298-3D62-58C4-3B44-8F0C5C3E0A0C}"/>
+                  </a:ext>
+                </a:extLst>
+              </p:cNvPr>
+              <p:cNvSpPr>
+                <a:spLocks noGrp="1" noRot="1" noChangeAspect="1" noMove="1" noResize="1" noEditPoints="1" noAdjustHandles="1" noChangeArrowheads="1" noChangeShapeType="1" noTextEdit="1"/>
+              </p:cNvSpPr>
+              <p:nvPr>
+                <p:ph idx="1"/>
+              </p:nvPr>
+            </p:nvSpPr>
+            <p:spPr>
+              <a:xfrm>
+                <a:off x="4789714" y="1825624"/>
+                <a:ext cx="7304315" cy="5032375"/>
+              </a:xfrm>
+              <a:blipFill>
+                <a:blip r:embed="rId3"/>
+                <a:stretch>
+                  <a:fillRect l="-1503" t="-1937" b="-2421"/>
+                </a:stretch>
+              </a:blipFill>
+            </p:spPr>
+            <p:txBody>
+              <a:bodyPr/>
+              <a:lstStyle/>
+              <a:p>
+                <a:r>
+                  <a:rPr lang="en-US">
+                    <a:noFill/>
+                  </a:rPr>
+                  <a:t> </a:t>
+                </a:r>
+              </a:p>
+            </p:txBody>
+          </p:sp>
+        </mc:Fallback>
+      </mc:AlternateContent>
+      <p:pic>
+        <p:nvPicPr>
+          <p:cNvPr id="4" name="Picture 3">
             <a:extLst>
               <a:ext uri="{FF2B5EF4-FFF2-40B4-BE49-F238E27FC236}">
-                <a16:creationId xmlns:a16="http://schemas.microsoft.com/office/drawing/2014/main" xmlns="" id="{F8959B32-CD26-D2CA-3E0C-4F8F0704DEBE}"/>
+                <a16:creationId xmlns:a16="http://schemas.microsoft.com/office/drawing/2014/main" id="{D3EAB0E4-3975-9C7B-4E5B-C9F1614737E4}"/>
               </a:ext>
             </a:extLst>
           </p:cNvPr>
-          <p:cNvSpPr>
-            <a:spLocks noGrp="1"/>
-          </p:cNvSpPr>
-          <p:nvPr>
-            <p:ph idx="1"/>
-          </p:nvPr>
-        </p:nvSpPr>
+          <p:cNvPicPr>
+            <a:picLocks noChangeAspect="1"/>
+          </p:cNvPicPr>
+          <p:nvPr/>
+        </p:nvPicPr>
+        <p:blipFill rotWithShape="1">
+          <a:blip r:embed="rId4">
+            <a:extLst>
+              <a:ext uri="{28A0092B-C50C-407E-A947-70E740481C1C}">
+                <a14:useLocalDpi xmlns:a14="http://schemas.microsoft.com/office/drawing/2010/main" val="0"/>
+              </a:ext>
+            </a:extLst>
+          </a:blip>
+          <a:srcRect l="6368" t="2623" r="7430" b="1353"/>
+          <a:stretch/>
+        </p:blipFill>
         <p:spPr>
           <a:xfrm>
-            <a:off x="610490" y="1794459"/>
-            <a:ext cx="11070771" cy="3475810"/>
+            <a:off x="586490" y="2253182"/>
+            <a:ext cx="3691595" cy="4239693"/>
           </a:xfrm>
+          <a:prstGeom prst="rect">
+            <a:avLst/>
+          </a:prstGeom>
         </p:spPr>
-        <p:txBody>
-          <a:bodyPr>
-            <a:normAutofit/>
-          </a:bodyPr>
-          <a:lstStyle/>
-          <a:p>
-            <a:pPr marL="0" indent="0" algn="ctr">
-              <a:buNone/>
-            </a:pPr>
-            <a:r>
-              <a:rPr lang="pt-BR" sz="6000" dirty="0"/>
-              <a:t>Da mesma forma que com a regressão, usando o gradiente descendente e validação cruzada, como o </a:t>
-            </a:r>
-            <a:r>
-              <a:rPr lang="pt-BR" sz="6000" i="1" dirty="0"/>
-              <a:t>k-</a:t>
-            </a:r>
-            <a:r>
-              <a:rPr lang="pt-BR" sz="6000" i="1" dirty="0" err="1"/>
-              <a:t>fold</a:t>
-            </a:r>
-            <a:r>
-              <a:rPr lang="pt-BR" sz="6000" dirty="0"/>
-              <a:t>, por exemplo.</a:t>
-            </a:r>
-            <a:endParaRPr lang="en-US" sz="6000" dirty="0"/>
-          </a:p>
-        </p:txBody>
-      </p:sp>
+      </p:pic>
     </p:spTree>
     <p:extLst>
       <p:ext uri="{BB962C8B-B14F-4D97-AF65-F5344CB8AC3E}">
-        <p14:creationId xmlns:p14="http://schemas.microsoft.com/office/powerpoint/2010/main" val="1322526149"/>
+        <p14:creationId xmlns:p14="http://schemas.microsoft.com/office/powerpoint/2010/main" val="3414813146"/>
       </p:ext>
     </p:extLst>
   </p:cSld>
@@ -13881,10 +14994,10 @@
       </p:grpSpPr>
       <p:sp>
         <p:nvSpPr>
-          <p:cNvPr id="2" name="Title 1">
+          <p:cNvPr id="2" name="Título 1">
             <a:extLst>
               <a:ext uri="{FF2B5EF4-FFF2-40B4-BE49-F238E27FC236}">
-                <a16:creationId xmlns:a16="http://schemas.microsoft.com/office/drawing/2014/main" xmlns="" id="{DA7FDC7F-B899-B1A6-F69A-351822C6EFD7}"/>
+                <a16:creationId xmlns:a16="http://schemas.microsoft.com/office/drawing/2014/main" id="{5D1F02FD-3573-18C5-6B1F-6FB93C24215E}"/>
               </a:ext>
             </a:extLst>
           </p:cNvPr>
@@ -13900,95 +15013,874 @@
           <a:bodyPr/>
           <a:lstStyle/>
           <a:p>
-            <a:endParaRPr lang="en-US"/>
+            <a:r>
+              <a:rPr lang="pt-BR" dirty="0"/>
+              <a:t>Função hipótese de classificação</a:t>
+            </a:r>
           </a:p>
         </p:txBody>
       </p:sp>
-      <p:sp>
-        <p:nvSpPr>
-          <p:cNvPr id="3" name="Content Placeholder 2">
+      <mc:AlternateContent xmlns:mc="http://schemas.openxmlformats.org/markup-compatibility/2006">
+        <mc:Choice xmlns:a14="http://schemas.microsoft.com/office/drawing/2010/main" Requires="a14">
+          <p:sp>
+            <p:nvSpPr>
+              <p:cNvPr id="3" name="Espaço Reservado para Conteúdo 2">
+                <a:extLst>
+                  <a:ext uri="{FF2B5EF4-FFF2-40B4-BE49-F238E27FC236}">
+                    <a16:creationId xmlns:a16="http://schemas.microsoft.com/office/drawing/2014/main" id="{CA5EA8E2-9C93-A464-A824-B648FE8ECA8E}"/>
+                  </a:ext>
+                </a:extLst>
+              </p:cNvPr>
+              <p:cNvSpPr>
+                <a:spLocks noGrp="1"/>
+              </p:cNvSpPr>
+              <p:nvPr>
+                <p:ph idx="1"/>
+              </p:nvPr>
+            </p:nvSpPr>
+            <p:spPr>
+              <a:xfrm>
+                <a:off x="4732101" y="1825624"/>
+                <a:ext cx="7459899" cy="5032375"/>
+              </a:xfrm>
+            </p:spPr>
+            <p:txBody>
+              <a:bodyPr>
+                <a:normAutofit/>
+              </a:bodyPr>
+              <a:lstStyle/>
+              <a:p>
+                <a:r>
+                  <a:rPr lang="pt-BR" dirty="0"/>
+                  <a:t>No caso </a:t>
+                </a:r>
+                <a:r>
+                  <a:rPr lang="pt-BR" b="1" dirty="0"/>
+                  <a:t>binário</a:t>
+                </a:r>
+                <a:r>
+                  <a:rPr lang="pt-BR" dirty="0"/>
+                  <a:t>, o mapeamento pode ser feito através da definição de uma </a:t>
+                </a:r>
+                <a:r>
+                  <a:rPr lang="pt-BR" b="1" dirty="0"/>
+                  <a:t>estrutura condicional</a:t>
+                </a:r>
+                <a:r>
+                  <a:rPr lang="pt-BR" dirty="0"/>
+                  <a:t>:</a:t>
+                </a:r>
+              </a:p>
+              <a:p>
+                <a:pPr marL="0" indent="0" algn="ctr">
+                  <a:buNone/>
+                </a:pPr>
+                <a14:m>
+                  <m:oMathPara xmlns:m="http://schemas.openxmlformats.org/officeDocument/2006/math">
+                    <m:oMathParaPr>
+                      <m:jc m:val="centerGroup"/>
+                    </m:oMathParaPr>
+                    <m:oMath xmlns:m="http://schemas.openxmlformats.org/officeDocument/2006/math">
+                      <m:acc>
+                        <m:accPr>
+                          <m:chr m:val="̂"/>
+                          <m:ctrlPr>
+                            <a:rPr lang="pt-BR" i="1">
+                              <a:latin typeface="Cambria Math" panose="02040503050406030204" pitchFamily="18" charset="0"/>
+                            </a:rPr>
+                          </m:ctrlPr>
+                        </m:accPr>
+                        <m:e>
+                          <m:r>
+                            <a:rPr lang="pt-BR" i="1">
+                              <a:latin typeface="Cambria Math" panose="02040503050406030204" pitchFamily="18" charset="0"/>
+                            </a:rPr>
+                            <m:t>𝑦</m:t>
+                          </m:r>
+                        </m:e>
+                      </m:acc>
+                      <m:r>
+                        <a:rPr lang="pt-BR" i="1">
+                          <a:latin typeface="Cambria Math" panose="02040503050406030204" pitchFamily="18" charset="0"/>
+                        </a:rPr>
+                        <m:t>=</m:t>
+                      </m:r>
+                      <m:sSub>
+                        <m:sSubPr>
+                          <m:ctrlPr>
+                            <a:rPr lang="pt-BR" i="1">
+                              <a:latin typeface="Cambria Math" panose="02040503050406030204" pitchFamily="18" charset="0"/>
+                            </a:rPr>
+                          </m:ctrlPr>
+                        </m:sSubPr>
+                        <m:e>
+                          <m:r>
+                            <a:rPr lang="pt-BR" i="1">
+                              <a:latin typeface="Cambria Math" panose="02040503050406030204" pitchFamily="18" charset="0"/>
+                            </a:rPr>
+                            <m:t>h</m:t>
+                          </m:r>
+                        </m:e>
+                        <m:sub>
+                          <m:r>
+                            <a:rPr lang="pt-BR" b="1" i="1">
+                              <a:latin typeface="Cambria Math" panose="02040503050406030204" pitchFamily="18" charset="0"/>
+                            </a:rPr>
+                            <m:t>𝒂</m:t>
+                          </m:r>
+                        </m:sub>
+                      </m:sSub>
+                      <m:d>
+                        <m:dPr>
+                          <m:ctrlPr>
+                            <a:rPr lang="pt-BR" i="1">
+                              <a:latin typeface="Cambria Math" panose="02040503050406030204" pitchFamily="18" charset="0"/>
+                            </a:rPr>
+                          </m:ctrlPr>
+                        </m:dPr>
+                        <m:e>
+                          <m:r>
+                            <a:rPr lang="pt-BR" b="1" i="1">
+                              <a:latin typeface="Cambria Math" panose="02040503050406030204" pitchFamily="18" charset="0"/>
+                            </a:rPr>
+                            <m:t>𝒙</m:t>
+                          </m:r>
+                        </m:e>
+                      </m:d>
+                      <m:r>
+                        <a:rPr lang="pt-BR" b="1" i="1">
+                          <a:latin typeface="Cambria Math" panose="02040503050406030204" pitchFamily="18" charset="0"/>
+                        </a:rPr>
+                        <m:t>=</m:t>
+                      </m:r>
+                      <m:d>
+                        <m:dPr>
+                          <m:begChr m:val="{"/>
+                          <m:endChr m:val=""/>
+                          <m:ctrlPr>
+                            <a:rPr lang="pt-BR" b="1" i="1">
+                              <a:latin typeface="Cambria Math" panose="02040503050406030204" pitchFamily="18" charset="0"/>
+                            </a:rPr>
+                          </m:ctrlPr>
+                        </m:dPr>
+                        <m:e>
+                          <m:eqArr>
+                            <m:eqArrPr>
+                              <m:ctrlPr>
+                                <a:rPr lang="pt-BR" b="1" i="1">
+                                  <a:latin typeface="Cambria Math" panose="02040503050406030204" pitchFamily="18" charset="0"/>
+                                </a:rPr>
+                              </m:ctrlPr>
+                            </m:eqArrPr>
+                            <m:e>
+                              <m:r>
+                                <a:rPr lang="pt-BR" i="1">
+                                  <a:latin typeface="Cambria Math" panose="02040503050406030204" pitchFamily="18" charset="0"/>
+                                </a:rPr>
+                                <m:t>0</m:t>
+                              </m:r>
+                              <m:r>
+                                <a:rPr lang="pt-BR" b="1" i="1">
+                                  <a:latin typeface="Cambria Math" panose="02040503050406030204" pitchFamily="18" charset="0"/>
+                                </a:rPr>
+                                <m:t>,  </m:t>
+                              </m:r>
+                              <m:r>
+                                <a:rPr lang="pt-BR" i="1">
+                                  <a:latin typeface="Cambria Math" panose="02040503050406030204" pitchFamily="18" charset="0"/>
+                                </a:rPr>
+                                <m:t>𝑔</m:t>
+                              </m:r>
+                              <m:d>
+                                <m:dPr>
+                                  <m:ctrlPr>
+                                    <a:rPr lang="pt-BR" i="1">
+                                      <a:latin typeface="Cambria Math" panose="02040503050406030204" pitchFamily="18" charset="0"/>
+                                    </a:rPr>
+                                  </m:ctrlPr>
+                                </m:dPr>
+                                <m:e>
+                                  <m:r>
+                                    <a:rPr lang="pt-BR" b="1" i="1">
+                                      <a:latin typeface="Cambria Math" panose="02040503050406030204" pitchFamily="18" charset="0"/>
+                                    </a:rPr>
+                                    <m:t>𝒙</m:t>
+                                  </m:r>
+                                </m:e>
+                              </m:d>
+                              <m:r>
+                                <a:rPr lang="pt-BR" smtClean="0">
+                                  <a:latin typeface="Cambria Math" panose="02040503050406030204" pitchFamily="18" charset="0"/>
+                                </a:rPr>
+                                <m:t>=</m:t>
+                              </m:r>
+                              <m:sSup>
+                                <m:sSupPr>
+                                  <m:ctrlPr>
+                                    <a:rPr lang="pt-BR" i="1" smtClean="0">
+                                      <a:latin typeface="Cambria Math" panose="02040503050406030204" pitchFamily="18" charset="0"/>
+                                    </a:rPr>
+                                  </m:ctrlPr>
+                                </m:sSupPr>
+                                <m:e>
+                                  <m:r>
+                                    <a:rPr lang="pt-BR" b="1" i="1">
+                                      <a:latin typeface="Cambria Math" panose="02040503050406030204" pitchFamily="18" charset="0"/>
+                                    </a:rPr>
+                                    <m:t>𝒙</m:t>
+                                  </m:r>
+                                </m:e>
+                                <m:sup>
+                                  <m:r>
+                                    <a:rPr lang="pt-BR" i="1">
+                                      <a:latin typeface="Cambria Math" panose="02040503050406030204" pitchFamily="18" charset="0"/>
+                                    </a:rPr>
+                                    <m:t>𝑇</m:t>
+                                  </m:r>
+                                </m:sup>
+                              </m:sSup>
+                              <m:r>
+                                <a:rPr lang="pt-BR" b="1" i="1">
+                                  <a:latin typeface="Cambria Math" panose="02040503050406030204" pitchFamily="18" charset="0"/>
+                                </a:rPr>
+                                <m:t>𝒂</m:t>
+                              </m:r>
+                              <m:r>
+                                <a:rPr lang="el-GR" i="1">
+                                  <a:latin typeface="Cambria Math" panose="02040503050406030204" pitchFamily="18" charset="0"/>
+                                  <a:ea typeface="Cambria Math" panose="02040503050406030204" pitchFamily="18" charset="0"/>
+                                </a:rPr>
+                                <m:t>&lt;</m:t>
+                              </m:r>
+                              <m:r>
+                                <a:rPr lang="pt-BR" i="1">
+                                  <a:latin typeface="Cambria Math" panose="02040503050406030204" pitchFamily="18" charset="0"/>
+                                  <a:ea typeface="Cambria Math" panose="02040503050406030204" pitchFamily="18" charset="0"/>
+                                </a:rPr>
+                                <m:t>0</m:t>
+                              </m:r>
+                              <m:r>
+                                <a:rPr lang="pt-BR" b="0" i="1" smtClean="0">
+                                  <a:latin typeface="Cambria Math" panose="02040503050406030204" pitchFamily="18" charset="0"/>
+                                  <a:ea typeface="Cambria Math" panose="02040503050406030204" pitchFamily="18" charset="0"/>
+                                </a:rPr>
+                                <m:t> </m:t>
+                              </m:r>
+                              <m:r>
+                                <a:rPr lang="pt-BR" b="0" i="0" smtClean="0">
+                                  <a:latin typeface="Cambria Math" panose="02040503050406030204" pitchFamily="18" charset="0"/>
+                                  <a:ea typeface="Cambria Math" panose="02040503050406030204" pitchFamily="18" charset="0"/>
+                                </a:rPr>
+                                <m:t>(</m:t>
+                              </m:r>
+                              <m:r>
+                                <m:rPr>
+                                  <m:sty m:val="p"/>
+                                </m:rPr>
+                                <a:rPr lang="pt-BR" b="0" i="0" smtClean="0">
+                                  <a:latin typeface="Cambria Math" panose="02040503050406030204" pitchFamily="18" charset="0"/>
+                                  <a:ea typeface="Cambria Math" panose="02040503050406030204" pitchFamily="18" charset="0"/>
+                                </a:rPr>
+                                <m:t>Classe</m:t>
+                              </m:r>
+                              <m:r>
+                                <a:rPr lang="pt-BR" b="0" i="0" smtClean="0">
+                                  <a:latin typeface="Cambria Math" panose="02040503050406030204" pitchFamily="18" charset="0"/>
+                                  <a:ea typeface="Cambria Math" panose="02040503050406030204" pitchFamily="18" charset="0"/>
+                                </a:rPr>
+                                <m:t> −)</m:t>
+                              </m:r>
+                            </m:e>
+                            <m:e>
+                              <m:r>
+                                <a:rPr lang="pt-BR" b="1" i="1">
+                                  <a:latin typeface="Cambria Math" panose="02040503050406030204" pitchFamily="18" charset="0"/>
+                                </a:rPr>
+                                <m:t>&amp;</m:t>
+                              </m:r>
+                              <m:r>
+                                <a:rPr lang="pt-BR" i="1">
+                                  <a:latin typeface="Cambria Math" panose="02040503050406030204" pitchFamily="18" charset="0"/>
+                                </a:rPr>
+                                <m:t>1</m:t>
+                              </m:r>
+                              <m:r>
+                                <a:rPr lang="pt-BR" b="1" i="1">
+                                  <a:latin typeface="Cambria Math" panose="02040503050406030204" pitchFamily="18" charset="0"/>
+                                </a:rPr>
+                                <m:t>,  </m:t>
+                              </m:r>
+                              <m:r>
+                                <a:rPr lang="pt-BR" i="1">
+                                  <a:latin typeface="Cambria Math" panose="02040503050406030204" pitchFamily="18" charset="0"/>
+                                </a:rPr>
+                                <m:t>𝑔</m:t>
+                              </m:r>
+                              <m:d>
+                                <m:dPr>
+                                  <m:ctrlPr>
+                                    <a:rPr lang="pt-BR" i="1">
+                                      <a:latin typeface="Cambria Math" panose="02040503050406030204" pitchFamily="18" charset="0"/>
+                                    </a:rPr>
+                                  </m:ctrlPr>
+                                </m:dPr>
+                                <m:e>
+                                  <m:r>
+                                    <a:rPr lang="pt-BR" b="1" i="1">
+                                      <a:latin typeface="Cambria Math" panose="02040503050406030204" pitchFamily="18" charset="0"/>
+                                    </a:rPr>
+                                    <m:t>𝒙</m:t>
+                                  </m:r>
+                                </m:e>
+                              </m:d>
+                              <m:r>
+                                <a:rPr lang="pt-BR">
+                                  <a:latin typeface="Cambria Math" panose="02040503050406030204" pitchFamily="18" charset="0"/>
+                                </a:rPr>
+                                <m:t>=</m:t>
+                              </m:r>
+                              <m:sSup>
+                                <m:sSupPr>
+                                  <m:ctrlPr>
+                                    <a:rPr lang="pt-BR" i="1">
+                                      <a:latin typeface="Cambria Math" panose="02040503050406030204" pitchFamily="18" charset="0"/>
+                                    </a:rPr>
+                                  </m:ctrlPr>
+                                </m:sSupPr>
+                                <m:e>
+                                  <m:r>
+                                    <a:rPr lang="pt-BR" b="1" i="1">
+                                      <a:latin typeface="Cambria Math" panose="02040503050406030204" pitchFamily="18" charset="0"/>
+                                    </a:rPr>
+                                    <m:t>𝒙</m:t>
+                                  </m:r>
+                                </m:e>
+                                <m:sup>
+                                  <m:r>
+                                    <a:rPr lang="pt-BR" i="1">
+                                      <a:latin typeface="Cambria Math" panose="02040503050406030204" pitchFamily="18" charset="0"/>
+                                    </a:rPr>
+                                    <m:t>𝑇</m:t>
+                                  </m:r>
+                                </m:sup>
+                              </m:sSup>
+                              <m:r>
+                                <a:rPr lang="pt-BR" b="1" i="1">
+                                  <a:latin typeface="Cambria Math" panose="02040503050406030204" pitchFamily="18" charset="0"/>
+                                </a:rPr>
+                                <m:t>𝒂</m:t>
+                              </m:r>
+                              <m:r>
+                                <a:rPr lang="el-GR" i="1">
+                                  <a:latin typeface="Cambria Math" panose="02040503050406030204" pitchFamily="18" charset="0"/>
+                                  <a:ea typeface="Cambria Math" panose="02040503050406030204" pitchFamily="18" charset="0"/>
+                                </a:rPr>
+                                <m:t>≥</m:t>
+                              </m:r>
+                              <m:r>
+                                <a:rPr lang="pt-BR" i="1">
+                                  <a:latin typeface="Cambria Math" panose="02040503050406030204" pitchFamily="18" charset="0"/>
+                                  <a:ea typeface="Cambria Math" panose="02040503050406030204" pitchFamily="18" charset="0"/>
+                                </a:rPr>
+                                <m:t>0 </m:t>
+                              </m:r>
+                              <m:r>
+                                <a:rPr lang="pt-BR" i="0">
+                                  <a:latin typeface="Cambria Math" panose="02040503050406030204" pitchFamily="18" charset="0"/>
+                                  <a:ea typeface="Cambria Math" panose="02040503050406030204" pitchFamily="18" charset="0"/>
+                                </a:rPr>
+                                <m:t>(</m:t>
+                              </m:r>
+                              <m:r>
+                                <m:rPr>
+                                  <m:sty m:val="p"/>
+                                </m:rPr>
+                                <a:rPr lang="pt-BR" i="0">
+                                  <a:latin typeface="Cambria Math" panose="02040503050406030204" pitchFamily="18" charset="0"/>
+                                  <a:ea typeface="Cambria Math" panose="02040503050406030204" pitchFamily="18" charset="0"/>
+                                </a:rPr>
+                                <m:t>Classe</m:t>
+                              </m:r>
+                              <m:r>
+                                <a:rPr lang="pt-BR" b="0" i="0" smtClean="0">
+                                  <a:latin typeface="Cambria Math" panose="02040503050406030204" pitchFamily="18" charset="0"/>
+                                  <a:ea typeface="Cambria Math" panose="02040503050406030204" pitchFamily="18" charset="0"/>
+                                </a:rPr>
+                                <m:t>+</m:t>
+                              </m:r>
+                              <m:r>
+                                <a:rPr lang="pt-BR" i="0">
+                                  <a:latin typeface="Cambria Math" panose="02040503050406030204" pitchFamily="18" charset="0"/>
+                                  <a:ea typeface="Cambria Math" panose="02040503050406030204" pitchFamily="18" charset="0"/>
+                                </a:rPr>
+                                <m:t>)</m:t>
+                              </m:r>
+                            </m:e>
+                          </m:eqArr>
+                        </m:e>
+                      </m:d>
+                    </m:oMath>
+                  </m:oMathPara>
+                </a14:m>
+                <a:endParaRPr lang="pt-BR" b="1" dirty="0">
+                  <a:ea typeface="Cambria Math" panose="02040503050406030204" pitchFamily="18" charset="0"/>
+                </a:endParaRPr>
+              </a:p>
+              <a:p>
+                <a:r>
+                  <a:rPr lang="pt-BR" dirty="0"/>
+                  <a:t>O resultado final do mapeamento de </a:t>
+                </a:r>
+                <a14:m>
+                  <m:oMath xmlns:m="http://schemas.openxmlformats.org/officeDocument/2006/math">
+                    <m:r>
+                      <a:rPr lang="pt-BR" i="1">
+                        <a:latin typeface="Cambria Math" panose="02040503050406030204" pitchFamily="18" charset="0"/>
+                      </a:rPr>
+                      <m:t>𝑔</m:t>
+                    </m:r>
+                    <m:d>
+                      <m:dPr>
+                        <m:ctrlPr>
+                          <a:rPr lang="pt-BR" i="1">
+                            <a:latin typeface="Cambria Math" panose="02040503050406030204" pitchFamily="18" charset="0"/>
+                          </a:rPr>
+                        </m:ctrlPr>
+                      </m:dPr>
+                      <m:e>
+                        <m:r>
+                          <a:rPr lang="pt-BR" b="1" i="1">
+                            <a:latin typeface="Cambria Math" panose="02040503050406030204" pitchFamily="18" charset="0"/>
+                          </a:rPr>
+                          <m:t>𝒙</m:t>
+                        </m:r>
+                      </m:e>
+                    </m:d>
+                  </m:oMath>
+                </a14:m>
+                <a:r>
+                  <a:rPr lang="pt-BR" dirty="0"/>
+                  <a:t> em classes é chamado de </a:t>
+                </a:r>
+                <a:r>
+                  <a:rPr lang="pt-BR" b="1" dirty="0"/>
+                  <a:t>função hipótese de </a:t>
+                </a:r>
+                <a:r>
+                  <a:rPr lang="pt-BR" b="1" dirty="0">
+                    <a:solidFill>
+                      <a:srgbClr val="7030A0"/>
+                    </a:solidFill>
+                  </a:rPr>
+                  <a:t>classificação</a:t>
+                </a:r>
+                <a:r>
+                  <a:rPr lang="pt-BR" b="1" dirty="0"/>
+                  <a:t>.</a:t>
+                </a:r>
+                <a:endParaRPr lang="pt-BR" dirty="0"/>
+              </a:p>
+              <a:p>
+                <a:r>
+                  <a:rPr lang="pt-BR" dirty="0"/>
+                  <a:t>Percebam que a saída da </a:t>
+                </a:r>
+                <a:r>
+                  <a:rPr lang="pt-BR" b="1" dirty="0"/>
+                  <a:t>função hipótese de classificação</a:t>
+                </a:r>
+                <a:r>
+                  <a:rPr lang="pt-BR" dirty="0"/>
+                  <a:t> é </a:t>
+                </a:r>
+                <a:r>
+                  <a:rPr lang="pt-BR" b="1" dirty="0">
+                    <a:solidFill>
+                      <a:srgbClr val="00B050"/>
+                    </a:solidFill>
+                  </a:rPr>
+                  <a:t>binária.</a:t>
+                </a:r>
+                <a:endParaRPr lang="pt-BR" dirty="0"/>
+              </a:p>
+            </p:txBody>
+          </p:sp>
+        </mc:Choice>
+        <mc:Fallback>
+          <p:sp>
+            <p:nvSpPr>
+              <p:cNvPr id="3" name="Espaço Reservado para Conteúdo 2">
+                <a:extLst>
+                  <a:ext uri="{FF2B5EF4-FFF2-40B4-BE49-F238E27FC236}">
+                    <a16:creationId xmlns:a16="http://schemas.microsoft.com/office/drawing/2014/main" id="{CA5EA8E2-9C93-A464-A824-B648FE8ECA8E}"/>
+                  </a:ext>
+                </a:extLst>
+              </p:cNvPr>
+              <p:cNvSpPr>
+                <a:spLocks noGrp="1" noRot="1" noChangeAspect="1" noMove="1" noResize="1" noEditPoints="1" noAdjustHandles="1" noChangeArrowheads="1" noChangeShapeType="1" noTextEdit="1"/>
+              </p:cNvSpPr>
+              <p:nvPr>
+                <p:ph idx="1"/>
+              </p:nvPr>
+            </p:nvSpPr>
+            <p:spPr>
+              <a:xfrm>
+                <a:off x="4732101" y="1825624"/>
+                <a:ext cx="7459899" cy="5032375"/>
+              </a:xfrm>
+              <a:blipFill>
+                <a:blip r:embed="rId2"/>
+                <a:stretch>
+                  <a:fillRect l="-1471" t="-1937"/>
+                </a:stretch>
+              </a:blipFill>
+            </p:spPr>
+            <p:txBody>
+              <a:bodyPr/>
+              <a:lstStyle/>
+              <a:p>
+                <a:r>
+                  <a:rPr lang="en-US">
+                    <a:noFill/>
+                  </a:rPr>
+                  <a:t> </a:t>
+                </a:r>
+              </a:p>
+            </p:txBody>
+          </p:sp>
+        </mc:Fallback>
+      </mc:AlternateContent>
+      <p:grpSp>
+        <p:nvGrpSpPr>
+          <p:cNvPr id="4" name="Group 11">
             <a:extLst>
               <a:ext uri="{FF2B5EF4-FFF2-40B4-BE49-F238E27FC236}">
-                <a16:creationId xmlns:a16="http://schemas.microsoft.com/office/drawing/2014/main" xmlns="" id="{E5A0C298-3D62-58C4-3B44-8F0C5C3E0A0C}"/>
+                <a16:creationId xmlns:a16="http://schemas.microsoft.com/office/drawing/2014/main" id="{AE4F4277-6964-0C1E-0DD3-569D7AE44CFF}"/>
               </a:ext>
             </a:extLst>
           </p:cNvPr>
-          <p:cNvSpPr>
-            <a:spLocks noGrp="1"/>
-          </p:cNvSpPr>
-          <p:nvPr>
-            <p:ph idx="1"/>
-          </p:nvPr>
-        </p:nvSpPr>
-        <p:spPr/>
-        <p:txBody>
-          <a:bodyPr/>
-          <a:lstStyle/>
-          <a:p>
-            <a:r>
-              <a:rPr lang="en-US" dirty="0" err="1" smtClean="0"/>
-              <a:t>Quem</a:t>
-            </a:r>
-            <a:r>
-              <a:rPr lang="en-US" dirty="0" smtClean="0"/>
-              <a:t> </a:t>
-            </a:r>
-            <a:r>
-              <a:rPr lang="en-US" dirty="0" err="1" smtClean="0"/>
-              <a:t>mapeia</a:t>
-            </a:r>
-            <a:r>
-              <a:rPr lang="en-US" dirty="0" smtClean="0"/>
-              <a:t> </a:t>
-            </a:r>
-            <a:r>
-              <a:rPr lang="en-US" dirty="0" err="1" smtClean="0"/>
-              <a:t>os</a:t>
-            </a:r>
-            <a:r>
-              <a:rPr lang="en-US" dirty="0" smtClean="0"/>
-              <a:t> </a:t>
-            </a:r>
-            <a:r>
-              <a:rPr lang="en-US" dirty="0" err="1" smtClean="0"/>
-              <a:t>valores</a:t>
-            </a:r>
-            <a:r>
-              <a:rPr lang="en-US" dirty="0" smtClean="0"/>
-              <a:t> das </a:t>
-            </a:r>
-            <a:r>
-              <a:rPr lang="en-US" dirty="0" err="1" smtClean="0"/>
-              <a:t>funções</a:t>
-            </a:r>
-            <a:r>
-              <a:rPr lang="en-US" dirty="0" smtClean="0"/>
-              <a:t> discriminates </a:t>
-            </a:r>
-            <a:r>
-              <a:rPr lang="en-US" dirty="0" err="1" smtClean="0"/>
-              <a:t>em</a:t>
-            </a:r>
-            <a:r>
-              <a:rPr lang="en-US" dirty="0" smtClean="0"/>
-              <a:t> </a:t>
-            </a:r>
-            <a:r>
-              <a:rPr lang="en-US" dirty="0" err="1" smtClean="0"/>
-              <a:t>valores</a:t>
-            </a:r>
-            <a:r>
-              <a:rPr lang="en-US" dirty="0" smtClean="0"/>
-              <a:t> </a:t>
-            </a:r>
-            <a:endParaRPr lang="en-US" dirty="0"/>
-          </a:p>
-        </p:txBody>
-      </p:sp>
+          <p:cNvGrpSpPr/>
+          <p:nvPr/>
+        </p:nvGrpSpPr>
+        <p:grpSpPr>
+          <a:xfrm>
+            <a:off x="525236" y="1961540"/>
+            <a:ext cx="3665764" cy="3840545"/>
+            <a:chOff x="8763755" y="2154390"/>
+            <a:chExt cx="3428245" cy="3487817"/>
+          </a:xfrm>
+        </p:grpSpPr>
+        <p:sp>
+          <p:nvSpPr>
+            <p:cNvPr id="5" name="TextBox 4">
+              <a:extLst>
+                <a:ext uri="{FF2B5EF4-FFF2-40B4-BE49-F238E27FC236}">
+                  <a16:creationId xmlns:a16="http://schemas.microsoft.com/office/drawing/2014/main" id="{27E02729-99B0-0A9C-BFBC-8A2DA40E9922}"/>
+                </a:ext>
+              </a:extLst>
+            </p:cNvPr>
+            <p:cNvSpPr txBox="1"/>
+            <p:nvPr/>
+          </p:nvSpPr>
+          <p:spPr>
+            <a:xfrm>
+              <a:off x="8835105" y="2154390"/>
+              <a:ext cx="1665991" cy="448157"/>
+            </a:xfrm>
+            <a:prstGeom prst="rect">
+              <a:avLst/>
+            </a:prstGeom>
+            <a:noFill/>
+          </p:spPr>
+          <p:txBody>
+            <a:bodyPr wrap="square" rtlCol="0">
+              <a:spAutoFit/>
+            </a:bodyPr>
+            <a:lstStyle/>
+            <a:p>
+              <a:pPr algn="ctr"/>
+              <a:r>
+                <a:rPr lang="pt-BR" sz="1100" dirty="0"/>
+                <a:t>Frontreira de decisão, onde </a:t>
+              </a:r>
+              <a:r>
+                <a:rPr lang="pt-BR" sz="1100" i="1" dirty="0"/>
+                <a:t>g</a:t>
+              </a:r>
+              <a:r>
+                <a:rPr lang="pt-BR" sz="1100" dirty="0"/>
+                <a:t>(</a:t>
+              </a:r>
+              <a:r>
+                <a:rPr lang="pt-BR" sz="1100" b="1" i="1" dirty="0"/>
+                <a:t>x</a:t>
+              </a:r>
+              <a:r>
+                <a:rPr lang="pt-BR" sz="1100" dirty="0"/>
+                <a:t>) = 0</a:t>
+              </a:r>
+            </a:p>
+          </p:txBody>
+        </p:sp>
+        <p:grpSp>
+          <p:nvGrpSpPr>
+            <p:cNvPr id="6" name="Group 5">
+              <a:extLst>
+                <a:ext uri="{FF2B5EF4-FFF2-40B4-BE49-F238E27FC236}">
+                  <a16:creationId xmlns:a16="http://schemas.microsoft.com/office/drawing/2014/main" id="{747F032D-ACF4-5F87-06B9-C7A56B4B81C1}"/>
+                </a:ext>
+              </a:extLst>
+            </p:cNvPr>
+            <p:cNvGrpSpPr/>
+            <p:nvPr/>
+          </p:nvGrpSpPr>
+          <p:grpSpPr>
+            <a:xfrm>
+              <a:off x="8763755" y="2675878"/>
+              <a:ext cx="3428245" cy="2966329"/>
+              <a:chOff x="8763755" y="2675878"/>
+              <a:chExt cx="3428245" cy="2966329"/>
+            </a:xfrm>
+          </p:grpSpPr>
+          <p:grpSp>
+            <p:nvGrpSpPr>
+              <p:cNvPr id="8" name="Group 6">
+                <a:extLst>
+                  <a:ext uri="{FF2B5EF4-FFF2-40B4-BE49-F238E27FC236}">
+                    <a16:creationId xmlns:a16="http://schemas.microsoft.com/office/drawing/2014/main" id="{1C779583-0B37-EC5B-B6F1-0D8459340FB7}"/>
+                  </a:ext>
+                </a:extLst>
+              </p:cNvPr>
+              <p:cNvGrpSpPr/>
+              <p:nvPr/>
+            </p:nvGrpSpPr>
+            <p:grpSpPr>
+              <a:xfrm>
+                <a:off x="8763755" y="2675878"/>
+                <a:ext cx="3289300" cy="2966329"/>
+                <a:chOff x="7391400" y="1415171"/>
+                <a:chExt cx="3289300" cy="2966329"/>
+              </a:xfrm>
+            </p:grpSpPr>
+            <p:pic>
+              <p:nvPicPr>
+                <p:cNvPr id="11" name="Picture 9">
+                  <a:extLst>
+                    <a:ext uri="{FF2B5EF4-FFF2-40B4-BE49-F238E27FC236}">
+                      <a16:creationId xmlns:a16="http://schemas.microsoft.com/office/drawing/2014/main" id="{5EDAFFC9-D7AA-48D9-9403-C033C61678E3}"/>
+                    </a:ext>
+                  </a:extLst>
+                </p:cNvPr>
+                <p:cNvPicPr>
+                  <a:picLocks noChangeAspect="1"/>
+                </p:cNvPicPr>
+                <p:nvPr/>
+              </p:nvPicPr>
+              <p:blipFill rotWithShape="1">
+                <a:blip r:embed="rId3"/>
+                <a:srcRect l="4242" t="5371" r="8525" b="1204"/>
+                <a:stretch/>
+              </p:blipFill>
+              <p:spPr>
+                <a:xfrm>
+                  <a:off x="7391400" y="1415171"/>
+                  <a:ext cx="3289300" cy="2966329"/>
+                </a:xfrm>
+                <a:prstGeom prst="rect">
+                  <a:avLst/>
+                </a:prstGeom>
+              </p:spPr>
+            </p:pic>
+            <p:cxnSp>
+              <p:nvCxnSpPr>
+                <p:cNvPr id="12" name="Straight Connector 10">
+                  <a:extLst>
+                    <a:ext uri="{FF2B5EF4-FFF2-40B4-BE49-F238E27FC236}">
+                      <a16:creationId xmlns:a16="http://schemas.microsoft.com/office/drawing/2014/main" id="{69C23BC7-60E3-3B5A-BCC8-7053B9A6F855}"/>
+                    </a:ext>
+                  </a:extLst>
+                </p:cNvPr>
+                <p:cNvCxnSpPr/>
+                <p:nvPr/>
+              </p:nvCxnSpPr>
+              <p:spPr>
+                <a:xfrm flipV="1">
+                  <a:off x="7986117" y="1483242"/>
+                  <a:ext cx="1703388" cy="2582200"/>
+                </a:xfrm>
+                <a:prstGeom prst="line">
+                  <a:avLst/>
+                </a:prstGeom>
+                <a:ln>
+                  <a:solidFill>
+                    <a:schemeClr val="tx1"/>
+                  </a:solidFill>
+                  <a:prstDash val="dash"/>
+                </a:ln>
+              </p:spPr>
+              <p:style>
+                <a:lnRef idx="1">
+                  <a:schemeClr val="accent1"/>
+                </a:lnRef>
+                <a:fillRef idx="0">
+                  <a:schemeClr val="accent1"/>
+                </a:fillRef>
+                <a:effectRef idx="0">
+                  <a:schemeClr val="accent1"/>
+                </a:effectRef>
+                <a:fontRef idx="minor">
+                  <a:schemeClr val="tx1"/>
+                </a:fontRef>
+              </p:style>
+            </p:cxnSp>
+          </p:grpSp>
+          <p:sp>
+            <p:nvSpPr>
+              <p:cNvPr id="9" name="TextBox 7">
+                <a:extLst>
+                  <a:ext uri="{FF2B5EF4-FFF2-40B4-BE49-F238E27FC236}">
+                    <a16:creationId xmlns:a16="http://schemas.microsoft.com/office/drawing/2014/main" id="{2648BF23-0635-71F0-258F-B7728EA4A750}"/>
+                  </a:ext>
+                </a:extLst>
+              </p:cNvPr>
+              <p:cNvSpPr txBox="1"/>
+              <p:nvPr/>
+            </p:nvSpPr>
+            <p:spPr>
+              <a:xfrm>
+                <a:off x="10679273" y="4392529"/>
+                <a:ext cx="1512727" cy="261610"/>
+              </a:xfrm>
+              <a:prstGeom prst="rect">
+                <a:avLst/>
+              </a:prstGeom>
+              <a:noFill/>
+            </p:spPr>
+            <p:txBody>
+              <a:bodyPr wrap="square" rtlCol="0">
+                <a:spAutoFit/>
+              </a:bodyPr>
+              <a:lstStyle/>
+              <a:p>
+                <a:pPr algn="ctr"/>
+                <a:r>
+                  <a:rPr lang="pt-BR" sz="1100" i="1" dirty="0"/>
+                  <a:t>g</a:t>
+                </a:r>
+                <a:r>
+                  <a:rPr lang="pt-BR" sz="1100" dirty="0"/>
+                  <a:t>(</a:t>
+                </a:r>
+                <a:r>
+                  <a:rPr lang="pt-BR" sz="1100" b="1" i="1" dirty="0"/>
+                  <a:t>x</a:t>
+                </a:r>
+                <a:r>
+                  <a:rPr lang="pt-BR" sz="1100" dirty="0"/>
+                  <a:t>) ≥ 0</a:t>
+                </a:r>
+              </a:p>
+            </p:txBody>
+          </p:sp>
+          <p:sp>
+            <p:nvSpPr>
+              <p:cNvPr id="10" name="TextBox 8">
+                <a:extLst>
+                  <a:ext uri="{FF2B5EF4-FFF2-40B4-BE49-F238E27FC236}">
+                    <a16:creationId xmlns:a16="http://schemas.microsoft.com/office/drawing/2014/main" id="{D97F304C-2141-D333-74F5-8CCC51F5313F}"/>
+                  </a:ext>
+                </a:extLst>
+              </p:cNvPr>
+              <p:cNvSpPr txBox="1"/>
+              <p:nvPr/>
+            </p:nvSpPr>
+            <p:spPr>
+              <a:xfrm>
+                <a:off x="8767760" y="3290116"/>
+                <a:ext cx="1512727" cy="261610"/>
+              </a:xfrm>
+              <a:prstGeom prst="rect">
+                <a:avLst/>
+              </a:prstGeom>
+              <a:noFill/>
+            </p:spPr>
+            <p:txBody>
+              <a:bodyPr wrap="square" rtlCol="0">
+                <a:spAutoFit/>
+              </a:bodyPr>
+              <a:lstStyle/>
+              <a:p>
+                <a:pPr algn="ctr"/>
+                <a:r>
+                  <a:rPr lang="pt-BR" sz="1100" i="1" dirty="0"/>
+                  <a:t>g</a:t>
+                </a:r>
+                <a:r>
+                  <a:rPr lang="pt-BR" sz="1100" dirty="0"/>
+                  <a:t>(</a:t>
+                </a:r>
+                <a:r>
+                  <a:rPr lang="pt-BR" sz="1100" b="1" i="1" dirty="0"/>
+                  <a:t>x</a:t>
+                </a:r>
+                <a:r>
+                  <a:rPr lang="pt-BR" sz="1100" dirty="0"/>
+                  <a:t>) &lt; 0</a:t>
+                </a:r>
+              </a:p>
+            </p:txBody>
+          </p:sp>
+        </p:grpSp>
+        <p:cxnSp>
+          <p:nvCxnSpPr>
+            <p:cNvPr id="7" name="Curved Connector 3">
+              <a:extLst>
+                <a:ext uri="{FF2B5EF4-FFF2-40B4-BE49-F238E27FC236}">
+                  <a16:creationId xmlns:a16="http://schemas.microsoft.com/office/drawing/2014/main" id="{5C7C173C-95FF-CFC4-3A67-7626A47D5636}"/>
+                </a:ext>
+              </a:extLst>
+            </p:cNvPr>
+            <p:cNvCxnSpPr>
+              <a:cxnSpLocks/>
+              <a:endCxn id="5" idx="3"/>
+            </p:cNvCxnSpPr>
+            <p:nvPr/>
+          </p:nvCxnSpPr>
+          <p:spPr>
+            <a:xfrm rot="16200000" flipV="1">
+              <a:off x="10320967" y="2558599"/>
+              <a:ext cx="701656" cy="341398"/>
+            </a:xfrm>
+            <a:prstGeom prst="curvedConnector2">
+              <a:avLst/>
+            </a:prstGeom>
+            <a:ln>
+              <a:solidFill>
+                <a:schemeClr val="tx1"/>
+              </a:solidFill>
+              <a:tailEnd type="triangle"/>
+            </a:ln>
+          </p:spPr>
+          <p:style>
+            <a:lnRef idx="1">
+              <a:schemeClr val="accent1"/>
+            </a:lnRef>
+            <a:fillRef idx="0">
+              <a:schemeClr val="accent1"/>
+            </a:fillRef>
+            <a:effectRef idx="0">
+              <a:schemeClr val="accent1"/>
+            </a:effectRef>
+            <a:fontRef idx="minor">
+              <a:schemeClr val="tx1"/>
+            </a:fontRef>
+          </p:style>
+        </p:cxnSp>
+      </p:grpSp>
     </p:spTree>
     <p:extLst>
       <p:ext uri="{BB962C8B-B14F-4D97-AF65-F5344CB8AC3E}">
-        <p14:creationId xmlns:p14="http://schemas.microsoft.com/office/powerpoint/2010/main" val="3414813146"/>
+        <p14:creationId xmlns:p14="http://schemas.microsoft.com/office/powerpoint/2010/main" val="3278550370"/>
       </p:ext>
     </p:extLst>
   </p:cSld>
@@ -14003,7 +15895,13 @@
   <p:cSld>
     <p:spTree>
       <p:nvGrpSpPr>
-        <p:cNvPr id="1" name=""/>
+        <p:cNvPr id="1" name="">
+          <a:extLst>
+            <a:ext uri="{FF2B5EF4-FFF2-40B4-BE49-F238E27FC236}">
+              <a16:creationId xmlns:a16="http://schemas.microsoft.com/office/drawing/2014/main" id="{0562D167-B7A4-F76C-EA8F-FFE81D1FCE1E}"/>
+            </a:ext>
+          </a:extLst>
+        </p:cNvPr>
         <p:cNvGrpSpPr/>
         <p:nvPr/>
       </p:nvGrpSpPr>
@@ -14017,10 +15915,10 @@
       </p:grpSpPr>
       <p:sp>
         <p:nvSpPr>
-          <p:cNvPr id="2" name="Title 1">
+          <p:cNvPr id="2" name="Título 1">
             <a:extLst>
               <a:ext uri="{FF2B5EF4-FFF2-40B4-BE49-F238E27FC236}">
-                <a16:creationId xmlns:a16="http://schemas.microsoft.com/office/drawing/2014/main" xmlns="" id="{F1CB30D0-D052-EC03-3C25-35C106AA1077}"/>
+                <a16:creationId xmlns:a16="http://schemas.microsoft.com/office/drawing/2014/main" id="{37D71349-C9D5-2310-AF15-EDB45A962D3D}"/>
               </a:ext>
             </a:extLst>
           </p:cNvPr>
@@ -14038,63 +15936,578 @@
           <a:p>
             <a:r>
               <a:rPr lang="pt-BR" dirty="0"/>
-              <a:t>Matriz de confusão</a:t>
-            </a:r>
-            <a:endParaRPr lang="en-US" dirty="0"/>
+              <a:t>Função de limiar de decisão ou de ativação</a:t>
+            </a:r>
           </a:p>
         </p:txBody>
       </p:sp>
-      <p:pic>
-        <p:nvPicPr>
-          <p:cNvPr id="2050" name="Picture 2" descr="Validate me Constructive criticism permitted – @gallusrostromegalus on  Tumblr">
+      <mc:AlternateContent xmlns:mc="http://schemas.openxmlformats.org/markup-compatibility/2006">
+        <mc:Choice xmlns:a14="http://schemas.microsoft.com/office/drawing/2010/main" Requires="a14">
+          <p:sp>
+            <p:nvSpPr>
+              <p:cNvPr id="3" name="Espaço Reservado para Conteúdo 2">
+                <a:extLst>
+                  <a:ext uri="{FF2B5EF4-FFF2-40B4-BE49-F238E27FC236}">
+                    <a16:creationId xmlns:a16="http://schemas.microsoft.com/office/drawing/2014/main" id="{6D94C719-3B63-1EE5-01EF-C213CC62F079}"/>
+                  </a:ext>
+                </a:extLst>
+              </p:cNvPr>
+              <p:cNvSpPr>
+                <a:spLocks noGrp="1"/>
+              </p:cNvSpPr>
+              <p:nvPr>
+                <p:ph idx="1"/>
+              </p:nvPr>
+            </p:nvSpPr>
+            <p:spPr>
+              <a:xfrm>
+                <a:off x="5028446" y="1825624"/>
+                <a:ext cx="7054698" cy="5032375"/>
+              </a:xfrm>
+            </p:spPr>
+            <p:txBody>
+              <a:bodyPr>
+                <a:normAutofit/>
+              </a:bodyPr>
+              <a:lstStyle/>
+              <a:p>
+                <a:r>
+                  <a:rPr lang="pt-BR" dirty="0"/>
+                  <a:t>O mapeamento entre </a:t>
+                </a:r>
+                <a14:m>
+                  <m:oMath xmlns:m="http://schemas.openxmlformats.org/officeDocument/2006/math">
+                    <m:r>
+                      <a:rPr lang="pt-BR" i="1">
+                        <a:latin typeface="Cambria Math" panose="02040503050406030204" pitchFamily="18" charset="0"/>
+                      </a:rPr>
+                      <m:t>𝑔</m:t>
+                    </m:r>
+                    <m:d>
+                      <m:dPr>
+                        <m:ctrlPr>
+                          <a:rPr lang="pt-BR" i="1">
+                            <a:latin typeface="Cambria Math" panose="02040503050406030204" pitchFamily="18" charset="0"/>
+                          </a:rPr>
+                        </m:ctrlPr>
+                      </m:dPr>
+                      <m:e>
+                        <m:r>
+                          <a:rPr lang="pt-BR" b="1" i="1">
+                            <a:latin typeface="Cambria Math" panose="02040503050406030204" pitchFamily="18" charset="0"/>
+                          </a:rPr>
+                          <m:t>𝒙</m:t>
+                        </m:r>
+                        <m:r>
+                          <a:rPr lang="pt-BR" b="0" i="1" smtClean="0">
+                            <a:latin typeface="Cambria Math" panose="02040503050406030204" pitchFamily="18" charset="0"/>
+                          </a:rPr>
+                          <m:t>(</m:t>
+                        </m:r>
+                        <m:r>
+                          <a:rPr lang="pt-BR" b="0" i="1" smtClean="0">
+                            <a:latin typeface="Cambria Math" panose="02040503050406030204" pitchFamily="18" charset="0"/>
+                          </a:rPr>
+                          <m:t>𝑖</m:t>
+                        </m:r>
+                        <m:r>
+                          <a:rPr lang="pt-BR" b="0" i="1" smtClean="0">
+                            <a:latin typeface="Cambria Math" panose="02040503050406030204" pitchFamily="18" charset="0"/>
+                          </a:rPr>
+                          <m:t>)</m:t>
+                        </m:r>
+                      </m:e>
+                    </m:d>
+                  </m:oMath>
+                </a14:m>
+                <a:r>
+                  <a:rPr lang="pt-BR" dirty="0"/>
+                  <a:t> e a saída 0 ou 1 é feito através da </a:t>
+                </a:r>
+                <a:r>
+                  <a:rPr lang="pt-BR" b="1" dirty="0"/>
+                  <a:t>função de limiar de decisão</a:t>
+                </a:r>
+                <a:r>
+                  <a:rPr lang="pt-BR" dirty="0"/>
+                  <a:t>, </a:t>
+                </a:r>
+                <a14:m>
+                  <m:oMath xmlns:m="http://schemas.openxmlformats.org/officeDocument/2006/math">
+                    <m:r>
+                      <a:rPr lang="en-US" i="1">
+                        <a:latin typeface="Cambria Math" panose="02040503050406030204" pitchFamily="18" charset="0"/>
+                      </a:rPr>
+                      <m:t>𝑓</m:t>
+                    </m:r>
+                    <m:r>
+                      <a:rPr lang="en-US" i="1">
+                        <a:latin typeface="Cambria Math" panose="02040503050406030204" pitchFamily="18" charset="0"/>
+                      </a:rPr>
+                      <m:t>(.)</m:t>
+                    </m:r>
+                  </m:oMath>
+                </a14:m>
+                <a:endParaRPr lang="pt-BR" dirty="0"/>
+              </a:p>
+              <a:p>
+                <a:pPr lvl="1">
+                  <a:buFont typeface="Wingdings" panose="05000000000000000000" pitchFamily="2" charset="2"/>
+                  <a:buChar char="§"/>
+                </a:pPr>
+                <a:r>
+                  <a:rPr lang="pt-BR" dirty="0"/>
+                  <a:t>Também conhecida como </a:t>
+                </a:r>
+                <a:r>
+                  <a:rPr lang="pt-BR" b="1" dirty="0"/>
+                  <a:t>função de ativação</a:t>
+                </a:r>
+                <a:r>
+                  <a:rPr lang="pt-BR" dirty="0"/>
+                  <a:t>.</a:t>
+                </a:r>
+              </a:p>
+              <a:p>
+                <a:r>
+                  <a:rPr lang="pt-BR" dirty="0"/>
+                  <a:t>No slide anterior, </a:t>
+                </a:r>
+                <a14:m>
+                  <m:oMath xmlns:m="http://schemas.openxmlformats.org/officeDocument/2006/math">
+                    <m:r>
+                      <a:rPr lang="en-US" i="1">
+                        <a:latin typeface="Cambria Math" panose="02040503050406030204" pitchFamily="18" charset="0"/>
+                      </a:rPr>
+                      <m:t>𝑓</m:t>
+                    </m:r>
+                    <m:r>
+                      <a:rPr lang="en-US" i="1">
+                        <a:latin typeface="Cambria Math" panose="02040503050406030204" pitchFamily="18" charset="0"/>
+                      </a:rPr>
+                      <m:t>(.)</m:t>
+                    </m:r>
+                  </m:oMath>
+                </a14:m>
+                <a:r>
+                  <a:rPr lang="pt-BR" dirty="0"/>
+                  <a:t> são as condições.</a:t>
+                </a:r>
+              </a:p>
+              <a:p>
+                <a:r>
+                  <a:rPr lang="pt-BR" dirty="0"/>
+                  <a:t>Porém, para </a:t>
+                </a:r>
+                <a:r>
+                  <a:rPr lang="pt-BR" b="1" dirty="0"/>
+                  <a:t>treinarmos</a:t>
+                </a:r>
+                <a:r>
+                  <a:rPr lang="pt-BR" dirty="0"/>
+                  <a:t> o modelo de classificação, precisamos definir uma </a:t>
+                </a:r>
+                <a:r>
+                  <a:rPr lang="pt-BR" b="1" dirty="0"/>
+                  <a:t>função matemática </a:t>
+                </a:r>
+                <a:r>
+                  <a:rPr lang="pt-BR" dirty="0"/>
+                  <a:t>que implemente as </a:t>
+                </a:r>
+                <a:r>
+                  <a:rPr lang="pt-BR" b="1" dirty="0"/>
+                  <a:t>condições</a:t>
+                </a:r>
+                <a:r>
+                  <a:rPr lang="pt-BR" dirty="0"/>
+                  <a:t>. </a:t>
+                </a:r>
+              </a:p>
+              <a:p>
+                <a:r>
+                  <a:rPr lang="pt-BR" dirty="0"/>
+                  <a:t>Qual função poderia ser usada?</a:t>
+                </a:r>
+              </a:p>
+            </p:txBody>
+          </p:sp>
+        </mc:Choice>
+        <mc:Fallback>
+          <p:sp>
+            <p:nvSpPr>
+              <p:cNvPr id="3" name="Espaço Reservado para Conteúdo 2">
+                <a:extLst>
+                  <a:ext uri="{FF2B5EF4-FFF2-40B4-BE49-F238E27FC236}">
+                    <a16:creationId xmlns:a16="http://schemas.microsoft.com/office/drawing/2014/main" id="{6D94C719-3B63-1EE5-01EF-C213CC62F079}"/>
+                  </a:ext>
+                </a:extLst>
+              </p:cNvPr>
+              <p:cNvSpPr>
+                <a:spLocks noGrp="1" noRot="1" noChangeAspect="1" noMove="1" noResize="1" noEditPoints="1" noAdjustHandles="1" noChangeArrowheads="1" noChangeShapeType="1" noTextEdit="1"/>
+              </p:cNvSpPr>
+              <p:nvPr>
+                <p:ph idx="1"/>
+              </p:nvPr>
+            </p:nvSpPr>
+            <p:spPr>
+              <a:xfrm>
+                <a:off x="5028446" y="1825624"/>
+                <a:ext cx="7054698" cy="5032375"/>
+              </a:xfrm>
+              <a:blipFill>
+                <a:blip r:embed="rId2"/>
+                <a:stretch>
+                  <a:fillRect l="-1556" t="-1937"/>
+                </a:stretch>
+              </a:blipFill>
+            </p:spPr>
+            <p:txBody>
+              <a:bodyPr/>
+              <a:lstStyle/>
+              <a:p>
+                <a:r>
+                  <a:rPr lang="en-US">
+                    <a:noFill/>
+                  </a:rPr>
+                  <a:t> </a:t>
+                </a:r>
+              </a:p>
+            </p:txBody>
+          </p:sp>
+        </mc:Fallback>
+      </mc:AlternateContent>
+      <p:grpSp>
+        <p:nvGrpSpPr>
+          <p:cNvPr id="4" name="Group 11">
             <a:extLst>
               <a:ext uri="{FF2B5EF4-FFF2-40B4-BE49-F238E27FC236}">
-                <a16:creationId xmlns:a16="http://schemas.microsoft.com/office/drawing/2014/main" xmlns="" id="{A9C68C0F-3A42-8D60-0B8A-979695E4072E}"/>
+                <a16:creationId xmlns:a16="http://schemas.microsoft.com/office/drawing/2014/main" id="{E9BB80B0-A5E6-191D-8E5E-CF49701CABB8}"/>
               </a:ext>
             </a:extLst>
           </p:cNvPr>
-          <p:cNvPicPr>
-            <a:picLocks noChangeAspect="1" noChangeArrowheads="1"/>
-          </p:cNvPicPr>
+          <p:cNvGrpSpPr/>
           <p:nvPr/>
-        </p:nvPicPr>
-        <p:blipFill>
-          <a:blip r:embed="rId2">
-            <a:extLst>
-              <a:ext uri="{28A0092B-C50C-407E-A947-70E740481C1C}">
-                <a14:useLocalDpi xmlns:a14="http://schemas.microsoft.com/office/drawing/2010/main" val="0"/>
-              </a:ext>
-            </a:extLst>
-          </a:blip>
-          <a:srcRect/>
-          <a:stretch>
-            <a:fillRect/>
-          </a:stretch>
-        </p:blipFill>
-        <p:spPr bwMode="auto">
+        </p:nvGrpSpPr>
+        <p:grpSpPr>
           <a:xfrm>
-            <a:off x="4199561" y="1690688"/>
-            <a:ext cx="5635002" cy="5167312"/>
+            <a:off x="753835" y="2048627"/>
+            <a:ext cx="3731079" cy="3927630"/>
+            <a:chOff x="8763755" y="2154390"/>
+            <a:chExt cx="3428245" cy="3487817"/>
           </a:xfrm>
-          <a:prstGeom prst="rect">
-            <a:avLst/>
-          </a:prstGeom>
-          <a:noFill/>
-          <a:extLst>
-            <a:ext uri="{909E8E84-426E-40DD-AFC4-6F175D3DCCD1}">
-              <a14:hiddenFill xmlns:a14="http://schemas.microsoft.com/office/drawing/2010/main">
-                <a:solidFill>
-                  <a:srgbClr val="FFFFFF"/>
-                </a:solidFill>
-              </a14:hiddenFill>
-            </a:ext>
-          </a:extLst>
-        </p:spPr>
-      </p:pic>
+        </p:grpSpPr>
+        <p:sp>
+          <p:nvSpPr>
+            <p:cNvPr id="5" name="TextBox 4">
+              <a:extLst>
+                <a:ext uri="{FF2B5EF4-FFF2-40B4-BE49-F238E27FC236}">
+                  <a16:creationId xmlns:a16="http://schemas.microsoft.com/office/drawing/2014/main" id="{439721E2-BA20-D77E-32F0-07751CA19503}"/>
+                </a:ext>
+              </a:extLst>
+            </p:cNvPr>
+            <p:cNvSpPr txBox="1"/>
+            <p:nvPr/>
+          </p:nvSpPr>
+          <p:spPr>
+            <a:xfrm>
+              <a:off x="8835105" y="2154390"/>
+              <a:ext cx="1665991" cy="448157"/>
+            </a:xfrm>
+            <a:prstGeom prst="rect">
+              <a:avLst/>
+            </a:prstGeom>
+            <a:noFill/>
+          </p:spPr>
+          <p:txBody>
+            <a:bodyPr wrap="square" rtlCol="0">
+              <a:spAutoFit/>
+            </a:bodyPr>
+            <a:lstStyle/>
+            <a:p>
+              <a:pPr algn="ctr"/>
+              <a:r>
+                <a:rPr lang="pt-BR" sz="1100" dirty="0"/>
+                <a:t>Frontreira de decisão, onde </a:t>
+              </a:r>
+              <a:r>
+                <a:rPr lang="pt-BR" sz="1100" i="1" dirty="0"/>
+                <a:t>g</a:t>
+              </a:r>
+              <a:r>
+                <a:rPr lang="pt-BR" sz="1100" dirty="0"/>
+                <a:t>(</a:t>
+              </a:r>
+              <a:r>
+                <a:rPr lang="pt-BR" sz="1100" b="1" i="1" dirty="0"/>
+                <a:t>x</a:t>
+              </a:r>
+              <a:r>
+                <a:rPr lang="pt-BR" sz="1100" dirty="0"/>
+                <a:t>) = 0</a:t>
+              </a:r>
+            </a:p>
+          </p:txBody>
+        </p:sp>
+        <p:grpSp>
+          <p:nvGrpSpPr>
+            <p:cNvPr id="6" name="Group 5">
+              <a:extLst>
+                <a:ext uri="{FF2B5EF4-FFF2-40B4-BE49-F238E27FC236}">
+                  <a16:creationId xmlns:a16="http://schemas.microsoft.com/office/drawing/2014/main" id="{9FAC3E94-7B82-94B8-E5E8-BD17798CDB88}"/>
+                </a:ext>
+              </a:extLst>
+            </p:cNvPr>
+            <p:cNvGrpSpPr/>
+            <p:nvPr/>
+          </p:nvGrpSpPr>
+          <p:grpSpPr>
+            <a:xfrm>
+              <a:off x="8763755" y="2675878"/>
+              <a:ext cx="3428245" cy="2966329"/>
+              <a:chOff x="8763755" y="2675878"/>
+              <a:chExt cx="3428245" cy="2966329"/>
+            </a:xfrm>
+          </p:grpSpPr>
+          <p:grpSp>
+            <p:nvGrpSpPr>
+              <p:cNvPr id="8" name="Group 6">
+                <a:extLst>
+                  <a:ext uri="{FF2B5EF4-FFF2-40B4-BE49-F238E27FC236}">
+                    <a16:creationId xmlns:a16="http://schemas.microsoft.com/office/drawing/2014/main" id="{5042AD3C-C929-FE26-38F9-B637B69A3A36}"/>
+                  </a:ext>
+                </a:extLst>
+              </p:cNvPr>
+              <p:cNvGrpSpPr/>
+              <p:nvPr/>
+            </p:nvGrpSpPr>
+            <p:grpSpPr>
+              <a:xfrm>
+                <a:off x="8763755" y="2675878"/>
+                <a:ext cx="3289300" cy="2966329"/>
+                <a:chOff x="7391400" y="1415171"/>
+                <a:chExt cx="3289300" cy="2966329"/>
+              </a:xfrm>
+            </p:grpSpPr>
+            <p:pic>
+              <p:nvPicPr>
+                <p:cNvPr id="11" name="Picture 9">
+                  <a:extLst>
+                    <a:ext uri="{FF2B5EF4-FFF2-40B4-BE49-F238E27FC236}">
+                      <a16:creationId xmlns:a16="http://schemas.microsoft.com/office/drawing/2014/main" id="{CBB1631B-4833-A4F6-9105-1C830E097B7A}"/>
+                    </a:ext>
+                  </a:extLst>
+                </p:cNvPr>
+                <p:cNvPicPr>
+                  <a:picLocks noChangeAspect="1"/>
+                </p:cNvPicPr>
+                <p:nvPr/>
+              </p:nvPicPr>
+              <p:blipFill rotWithShape="1">
+                <a:blip r:embed="rId3"/>
+                <a:srcRect l="4242" t="5371" r="8525" b="1204"/>
+                <a:stretch/>
+              </p:blipFill>
+              <p:spPr>
+                <a:xfrm>
+                  <a:off x="7391400" y="1415171"/>
+                  <a:ext cx="3289300" cy="2966329"/>
+                </a:xfrm>
+                <a:prstGeom prst="rect">
+                  <a:avLst/>
+                </a:prstGeom>
+              </p:spPr>
+            </p:pic>
+            <p:cxnSp>
+              <p:nvCxnSpPr>
+                <p:cNvPr id="12" name="Straight Connector 10">
+                  <a:extLst>
+                    <a:ext uri="{FF2B5EF4-FFF2-40B4-BE49-F238E27FC236}">
+                      <a16:creationId xmlns:a16="http://schemas.microsoft.com/office/drawing/2014/main" id="{D94CA792-387F-834D-A4FC-BE7605BD074A}"/>
+                    </a:ext>
+                  </a:extLst>
+                </p:cNvPr>
+                <p:cNvCxnSpPr/>
+                <p:nvPr/>
+              </p:nvCxnSpPr>
+              <p:spPr>
+                <a:xfrm flipV="1">
+                  <a:off x="7986117" y="1483242"/>
+                  <a:ext cx="1703388" cy="2582200"/>
+                </a:xfrm>
+                <a:prstGeom prst="line">
+                  <a:avLst/>
+                </a:prstGeom>
+                <a:ln>
+                  <a:solidFill>
+                    <a:schemeClr val="tx1"/>
+                  </a:solidFill>
+                  <a:prstDash val="dash"/>
+                </a:ln>
+              </p:spPr>
+              <p:style>
+                <a:lnRef idx="1">
+                  <a:schemeClr val="accent1"/>
+                </a:lnRef>
+                <a:fillRef idx="0">
+                  <a:schemeClr val="accent1"/>
+                </a:fillRef>
+                <a:effectRef idx="0">
+                  <a:schemeClr val="accent1"/>
+                </a:effectRef>
+                <a:fontRef idx="minor">
+                  <a:schemeClr val="tx1"/>
+                </a:fontRef>
+              </p:style>
+            </p:cxnSp>
+          </p:grpSp>
+          <p:sp>
+            <p:nvSpPr>
+              <p:cNvPr id="9" name="TextBox 7">
+                <a:extLst>
+                  <a:ext uri="{FF2B5EF4-FFF2-40B4-BE49-F238E27FC236}">
+                    <a16:creationId xmlns:a16="http://schemas.microsoft.com/office/drawing/2014/main" id="{28A004EE-ED86-54F4-2156-D1E356EE7525}"/>
+                  </a:ext>
+                </a:extLst>
+              </p:cNvPr>
+              <p:cNvSpPr txBox="1"/>
+              <p:nvPr/>
+            </p:nvSpPr>
+            <p:spPr>
+              <a:xfrm>
+                <a:off x="10679273" y="4392529"/>
+                <a:ext cx="1512727" cy="261610"/>
+              </a:xfrm>
+              <a:prstGeom prst="rect">
+                <a:avLst/>
+              </a:prstGeom>
+              <a:noFill/>
+            </p:spPr>
+            <p:txBody>
+              <a:bodyPr wrap="square" rtlCol="0">
+                <a:spAutoFit/>
+              </a:bodyPr>
+              <a:lstStyle/>
+              <a:p>
+                <a:pPr algn="ctr"/>
+                <a:r>
+                  <a:rPr lang="pt-BR" sz="1100" i="1" dirty="0"/>
+                  <a:t>g</a:t>
+                </a:r>
+                <a:r>
+                  <a:rPr lang="pt-BR" sz="1100" dirty="0"/>
+                  <a:t>(</a:t>
+                </a:r>
+                <a:r>
+                  <a:rPr lang="pt-BR" sz="1100" b="1" i="1" dirty="0"/>
+                  <a:t>x</a:t>
+                </a:r>
+                <a:r>
+                  <a:rPr lang="pt-BR" sz="1100" dirty="0"/>
+                  <a:t>) ≥ 0</a:t>
+                </a:r>
+              </a:p>
+            </p:txBody>
+          </p:sp>
+          <p:sp>
+            <p:nvSpPr>
+              <p:cNvPr id="10" name="TextBox 8">
+                <a:extLst>
+                  <a:ext uri="{FF2B5EF4-FFF2-40B4-BE49-F238E27FC236}">
+                    <a16:creationId xmlns:a16="http://schemas.microsoft.com/office/drawing/2014/main" id="{58BF80C7-9C37-36F1-F5C1-A104939A438C}"/>
+                  </a:ext>
+                </a:extLst>
+              </p:cNvPr>
+              <p:cNvSpPr txBox="1"/>
+              <p:nvPr/>
+            </p:nvSpPr>
+            <p:spPr>
+              <a:xfrm>
+                <a:off x="8767760" y="3290116"/>
+                <a:ext cx="1512727" cy="261610"/>
+              </a:xfrm>
+              <a:prstGeom prst="rect">
+                <a:avLst/>
+              </a:prstGeom>
+              <a:noFill/>
+            </p:spPr>
+            <p:txBody>
+              <a:bodyPr wrap="square" rtlCol="0">
+                <a:spAutoFit/>
+              </a:bodyPr>
+              <a:lstStyle/>
+              <a:p>
+                <a:pPr algn="ctr"/>
+                <a:r>
+                  <a:rPr lang="pt-BR" sz="1100" i="1" dirty="0"/>
+                  <a:t>g</a:t>
+                </a:r>
+                <a:r>
+                  <a:rPr lang="pt-BR" sz="1100" dirty="0"/>
+                  <a:t>(</a:t>
+                </a:r>
+                <a:r>
+                  <a:rPr lang="pt-BR" sz="1100" b="1" i="1" dirty="0"/>
+                  <a:t>x</a:t>
+                </a:r>
+                <a:r>
+                  <a:rPr lang="pt-BR" sz="1100" dirty="0"/>
+                  <a:t>) &lt; 0</a:t>
+                </a:r>
+              </a:p>
+            </p:txBody>
+          </p:sp>
+        </p:grpSp>
+        <p:cxnSp>
+          <p:nvCxnSpPr>
+            <p:cNvPr id="7" name="Curved Connector 3">
+              <a:extLst>
+                <a:ext uri="{FF2B5EF4-FFF2-40B4-BE49-F238E27FC236}">
+                  <a16:creationId xmlns:a16="http://schemas.microsoft.com/office/drawing/2014/main" id="{7BB08527-0455-8AD0-346B-16B8DBF7E47E}"/>
+                </a:ext>
+              </a:extLst>
+            </p:cNvPr>
+            <p:cNvCxnSpPr>
+              <a:cxnSpLocks/>
+              <a:endCxn id="5" idx="3"/>
+            </p:cNvCxnSpPr>
+            <p:nvPr/>
+          </p:nvCxnSpPr>
+          <p:spPr>
+            <a:xfrm rot="16200000" flipV="1">
+              <a:off x="10320967" y="2558599"/>
+              <a:ext cx="701656" cy="341398"/>
+            </a:xfrm>
+            <a:prstGeom prst="curvedConnector2">
+              <a:avLst/>
+            </a:prstGeom>
+            <a:ln>
+              <a:solidFill>
+                <a:schemeClr val="tx1"/>
+              </a:solidFill>
+              <a:tailEnd type="triangle"/>
+            </a:ln>
+          </p:spPr>
+          <p:style>
+            <a:lnRef idx="1">
+              <a:schemeClr val="accent1"/>
+            </a:lnRef>
+            <a:fillRef idx="0">
+              <a:schemeClr val="accent1"/>
+            </a:fillRef>
+            <a:effectRef idx="0">
+              <a:schemeClr val="accent1"/>
+            </a:effectRef>
+            <a:fontRef idx="minor">
+              <a:schemeClr val="tx1"/>
+            </a:fontRef>
+          </p:style>
+        </p:cxnSp>
+      </p:grpSp>
     </p:spTree>
     <p:extLst>
       <p:ext uri="{BB962C8B-B14F-4D97-AF65-F5344CB8AC3E}">
-        <p14:creationId xmlns:p14="http://schemas.microsoft.com/office/powerpoint/2010/main" val="2456464638"/>
+        <p14:creationId xmlns:p14="http://schemas.microsoft.com/office/powerpoint/2010/main" val="3952403725"/>
       </p:ext>
     </p:extLst>
   </p:cSld>
@@ -14123,64 +16536,742 @@
       </p:grpSpPr>
       <p:sp>
         <p:nvSpPr>
-          <p:cNvPr id="4" name="Título 1">
+          <p:cNvPr id="2" name="Título 1">
             <a:extLst>
               <a:ext uri="{FF2B5EF4-FFF2-40B4-BE49-F238E27FC236}">
-                <a16:creationId xmlns:a16="http://schemas.microsoft.com/office/drawing/2014/main" xmlns="" id="{32666AC8-2E17-4DB4-B0F5-60C640CCFD2E}"/>
+                <a16:creationId xmlns:a16="http://schemas.microsoft.com/office/drawing/2014/main" id="{B2DF1BE3-A387-1199-902E-AC1680BF9682}"/>
               </a:ext>
             </a:extLst>
           </p:cNvPr>
-          <p:cNvSpPr txBox="1">
-            <a:spLocks/>
+          <p:cNvSpPr>
+            <a:spLocks noGrp="1"/>
           </p:cNvSpPr>
-          <p:nvPr/>
+          <p:nvPr>
+            <p:ph type="title"/>
+          </p:nvPr>
         </p:nvSpPr>
-        <p:spPr>
-          <a:xfrm>
-            <a:off x="1431533" y="2720526"/>
-            <a:ext cx="9144000" cy="1029541"/>
-          </a:xfrm>
-          <a:prstGeom prst="rect">
-            <a:avLst/>
-          </a:prstGeom>
-        </p:spPr>
+        <p:spPr/>
         <p:txBody>
-          <a:bodyPr vert="horz" lIns="91440" tIns="45720" rIns="91440" bIns="45720" rtlCol="0" anchor="ctr">
-            <a:normAutofit/>
-          </a:bodyPr>
-          <a:lstStyle>
-            <a:lvl1pPr algn="l" defTabSz="914400" rtl="0" eaLnBrk="1" latinLnBrk="0" hangingPunct="1">
-              <a:lnSpc>
-                <a:spcPct val="90000"/>
-              </a:lnSpc>
-              <a:spcBef>
-                <a:spcPct val="0"/>
-              </a:spcBef>
-              <a:buNone/>
-              <a:defRPr sz="4400" kern="1200">
-                <a:solidFill>
-                  <a:schemeClr val="tx1"/>
-                </a:solidFill>
-                <a:latin typeface="+mj-lt"/>
-                <a:ea typeface="+mj-ea"/>
-                <a:cs typeface="+mj-cs"/>
-              </a:defRPr>
-            </a:lvl1pPr>
-          </a:lstStyle>
-          <a:p>
-            <a:pPr algn="ctr"/>
-            <a:r>
-              <a:rPr lang="pt-BR" sz="6600" dirty="0"/>
-              <a:t>Perguntas?</a:t>
-            </a:r>
-            <a:endParaRPr lang="pt-BR" sz="6600" b="1" i="1" dirty="0"/>
+          <a:bodyPr/>
+          <a:lstStyle/>
+          <a:p>
+            <a:r>
+              <a:rPr lang="pt-BR" dirty="0"/>
+              <a:t>Função de limiar de decisão ou de ativação</a:t>
+            </a:r>
           </a:p>
         </p:txBody>
       </p:sp>
+      <mc:AlternateContent xmlns:mc="http://schemas.openxmlformats.org/markup-compatibility/2006">
+        <mc:Choice xmlns:a14="http://schemas.microsoft.com/office/drawing/2010/main" Requires="a14">
+          <p:sp>
+            <p:nvSpPr>
+              <p:cNvPr id="3" name="Espaço Reservado para Conteúdo 2">
+                <a:extLst>
+                  <a:ext uri="{FF2B5EF4-FFF2-40B4-BE49-F238E27FC236}">
+                    <a16:creationId xmlns:a16="http://schemas.microsoft.com/office/drawing/2014/main" id="{D4A261E2-EE7B-ABC6-0440-76C231BADC90}"/>
+                  </a:ext>
+                </a:extLst>
+              </p:cNvPr>
+              <p:cNvSpPr>
+                <a:spLocks noGrp="1"/>
+              </p:cNvSpPr>
+              <p:nvPr>
+                <p:ph idx="1"/>
+              </p:nvPr>
+            </p:nvSpPr>
+            <p:spPr>
+              <a:xfrm>
+                <a:off x="4746172" y="1825624"/>
+                <a:ext cx="7274378" cy="5032375"/>
+              </a:xfrm>
+            </p:spPr>
+            <p:txBody>
+              <a:bodyPr/>
+              <a:lstStyle/>
+              <a:p>
+                <a:r>
+                  <a:rPr lang="pt-BR" dirty="0"/>
+                  <a:t>Podemos usar a </a:t>
+                </a:r>
+                <a:r>
+                  <a:rPr lang="pt-BR" b="1" dirty="0"/>
+                  <a:t>função degrau</a:t>
+                </a:r>
+                <a:r>
+                  <a:rPr lang="pt-BR" dirty="0"/>
+                  <a:t>.</a:t>
+                </a:r>
+              </a:p>
+              <a:p>
+                <a:pPr lvl="1">
+                  <a:buFont typeface="Wingdings" panose="05000000000000000000" pitchFamily="2" charset="2"/>
+                  <a:buChar char="§"/>
+                </a:pPr>
+                <a:r>
+                  <a:rPr lang="pt-BR" dirty="0"/>
+                  <a:t>Também conhecida como </a:t>
+                </a:r>
+                <a:r>
+                  <a:rPr lang="pt-BR" i="1" dirty="0" err="1"/>
+                  <a:t>heaviside</a:t>
+                </a:r>
+                <a:r>
+                  <a:rPr lang="pt-BR" dirty="0"/>
+                  <a:t> ou limiar de decisão rígido.</a:t>
+                </a:r>
+              </a:p>
+              <a:p>
+                <a:r>
+                  <a:rPr lang="pt-BR" dirty="0"/>
+                  <a:t>A qual é definida como</a:t>
+                </a:r>
+              </a:p>
+              <a:p>
+                <a:pPr marL="0" indent="0">
+                  <a:buNone/>
+                </a:pPr>
+                <a14:m>
+                  <m:oMath xmlns:m="http://schemas.openxmlformats.org/officeDocument/2006/math">
+                    <m:acc>
+                      <m:accPr>
+                        <m:chr m:val="̂"/>
+                        <m:ctrlPr>
+                          <a:rPr lang="pt-BR" i="1">
+                            <a:latin typeface="Cambria Math" panose="02040503050406030204" pitchFamily="18" charset="0"/>
+                          </a:rPr>
+                        </m:ctrlPr>
+                      </m:accPr>
+                      <m:e>
+                        <m:r>
+                          <a:rPr lang="pt-BR" i="1">
+                            <a:latin typeface="Cambria Math" panose="02040503050406030204" pitchFamily="18" charset="0"/>
+                          </a:rPr>
+                          <m:t>𝑦</m:t>
+                        </m:r>
+                      </m:e>
+                    </m:acc>
+                    <m:r>
+                      <a:rPr lang="pt-BR" b="0" i="1" smtClean="0">
+                        <a:latin typeface="Cambria Math" panose="02040503050406030204" pitchFamily="18" charset="0"/>
+                      </a:rPr>
+                      <m:t>=</m:t>
+                    </m:r>
+                    <m:r>
+                      <a:rPr lang="pt-BR" b="0" i="1" smtClean="0">
+                        <a:latin typeface="Cambria Math" panose="02040503050406030204" pitchFamily="18" charset="0"/>
+                      </a:rPr>
+                      <m:t>𝑓</m:t>
+                    </m:r>
+                    <m:d>
+                      <m:dPr>
+                        <m:ctrlPr>
+                          <a:rPr lang="pt-BR" i="1">
+                            <a:latin typeface="Cambria Math" panose="02040503050406030204" pitchFamily="18" charset="0"/>
+                          </a:rPr>
+                        </m:ctrlPr>
+                      </m:dPr>
+                      <m:e>
+                        <m:r>
+                          <a:rPr lang="pt-BR" b="0" i="1" smtClean="0">
+                            <a:latin typeface="Cambria Math" panose="02040503050406030204" pitchFamily="18" charset="0"/>
+                          </a:rPr>
+                          <m:t>𝑔</m:t>
+                        </m:r>
+                        <m:r>
+                          <a:rPr lang="pt-BR" b="0" i="1" smtClean="0">
+                            <a:latin typeface="Cambria Math" panose="02040503050406030204" pitchFamily="18" charset="0"/>
+                          </a:rPr>
+                          <m:t>(</m:t>
+                        </m:r>
+                        <m:r>
+                          <a:rPr lang="pt-BR" b="1" i="1" smtClean="0">
+                            <a:latin typeface="Cambria Math" panose="02040503050406030204" pitchFamily="18" charset="0"/>
+                          </a:rPr>
+                          <m:t>𝒙</m:t>
+                        </m:r>
+                        <m:r>
+                          <a:rPr lang="pt-BR" b="0" i="1" smtClean="0">
+                            <a:latin typeface="Cambria Math" panose="02040503050406030204" pitchFamily="18" charset="0"/>
+                          </a:rPr>
+                          <m:t>)</m:t>
+                        </m:r>
+                      </m:e>
+                    </m:d>
+                    <m:r>
+                      <a:rPr lang="pt-BR" b="1" i="1">
+                        <a:latin typeface="Cambria Math" panose="02040503050406030204" pitchFamily="18" charset="0"/>
+                      </a:rPr>
+                      <m:t>=</m:t>
+                    </m:r>
+                    <m:d>
+                      <m:dPr>
+                        <m:begChr m:val="{"/>
+                        <m:endChr m:val=""/>
+                        <m:ctrlPr>
+                          <a:rPr lang="pt-BR" b="1" i="1">
+                            <a:latin typeface="Cambria Math" panose="02040503050406030204" pitchFamily="18" charset="0"/>
+                          </a:rPr>
+                        </m:ctrlPr>
+                      </m:dPr>
+                      <m:e>
+                        <m:eqArr>
+                          <m:eqArrPr>
+                            <m:ctrlPr>
+                              <a:rPr lang="pt-BR" b="1" i="1">
+                                <a:latin typeface="Cambria Math" panose="02040503050406030204" pitchFamily="18" charset="0"/>
+                              </a:rPr>
+                            </m:ctrlPr>
+                          </m:eqArrPr>
+                          <m:e>
+                            <m:r>
+                              <a:rPr lang="pt-BR" b="0" i="1" smtClean="0">
+                                <a:latin typeface="Cambria Math" panose="02040503050406030204" pitchFamily="18" charset="0"/>
+                              </a:rPr>
+                              <m:t>0</m:t>
+                            </m:r>
+                            <m:r>
+                              <a:rPr lang="pt-BR" b="1" i="1">
+                                <a:latin typeface="Cambria Math" panose="02040503050406030204" pitchFamily="18" charset="0"/>
+                              </a:rPr>
+                              <m:t>,</m:t>
+                            </m:r>
+                            <m:r>
+                              <a:rPr lang="pt-BR" b="0" i="1" smtClean="0">
+                                <a:latin typeface="Cambria Math" panose="02040503050406030204" pitchFamily="18" charset="0"/>
+                              </a:rPr>
+                              <m:t>                             </m:t>
+                            </m:r>
+                            <m:r>
+                              <a:rPr lang="pt-BR" i="1">
+                                <a:latin typeface="Cambria Math" panose="02040503050406030204" pitchFamily="18" charset="0"/>
+                              </a:rPr>
+                              <m:t>𝑔</m:t>
+                            </m:r>
+                            <m:r>
+                              <a:rPr lang="pt-BR" i="1">
+                                <a:latin typeface="Cambria Math" panose="02040503050406030204" pitchFamily="18" charset="0"/>
+                              </a:rPr>
+                              <m:t>(</m:t>
+                            </m:r>
+                            <m:r>
+                              <a:rPr lang="pt-BR" b="1" i="1">
+                                <a:latin typeface="Cambria Math" panose="02040503050406030204" pitchFamily="18" charset="0"/>
+                              </a:rPr>
+                              <m:t>𝒙</m:t>
+                            </m:r>
+                            <m:r>
+                              <a:rPr lang="pt-BR" i="1">
+                                <a:latin typeface="Cambria Math" panose="02040503050406030204" pitchFamily="18" charset="0"/>
+                              </a:rPr>
+                              <m:t>)&lt;0</m:t>
+                            </m:r>
+                          </m:e>
+                          <m:e>
+                            <m:r>
+                              <a:rPr lang="pt-BR" b="1" i="1">
+                                <a:latin typeface="Cambria Math" panose="02040503050406030204" pitchFamily="18" charset="0"/>
+                              </a:rPr>
+                              <m:t>&amp;</m:t>
+                            </m:r>
+                            <m:r>
+                              <a:rPr lang="pt-BR" i="1">
+                                <a:latin typeface="Cambria Math" panose="02040503050406030204" pitchFamily="18" charset="0"/>
+                              </a:rPr>
+                              <m:t>1</m:t>
+                            </m:r>
+                            <m:r>
+                              <a:rPr lang="pt-BR" b="1" i="1">
+                                <a:latin typeface="Cambria Math" panose="02040503050406030204" pitchFamily="18" charset="0"/>
+                              </a:rPr>
+                              <m:t>,</m:t>
+                            </m:r>
+                            <m:r>
+                              <a:rPr lang="pt-BR" b="0" i="1" smtClean="0">
+                                <a:latin typeface="Cambria Math" panose="02040503050406030204" pitchFamily="18" charset="0"/>
+                              </a:rPr>
+                              <m:t>                             </m:t>
+                            </m:r>
+                            <m:r>
+                              <a:rPr lang="pt-BR" i="1">
+                                <a:latin typeface="Cambria Math" panose="02040503050406030204" pitchFamily="18" charset="0"/>
+                              </a:rPr>
+                              <m:t>𝑔</m:t>
+                            </m:r>
+                            <m:r>
+                              <a:rPr lang="pt-BR" i="1">
+                                <a:latin typeface="Cambria Math" panose="02040503050406030204" pitchFamily="18" charset="0"/>
+                              </a:rPr>
+                              <m:t>(</m:t>
+                            </m:r>
+                            <m:r>
+                              <a:rPr lang="pt-BR" b="1" i="1">
+                                <a:latin typeface="Cambria Math" panose="02040503050406030204" pitchFamily="18" charset="0"/>
+                              </a:rPr>
+                              <m:t>𝒙</m:t>
+                            </m:r>
+                            <m:r>
+                              <a:rPr lang="pt-BR" i="1" smtClean="0">
+                                <a:latin typeface="Cambria Math" panose="02040503050406030204" pitchFamily="18" charset="0"/>
+                              </a:rPr>
+                              <m:t>)</m:t>
+                            </m:r>
+                            <m:r>
+                              <a:rPr lang="pt-BR" i="1">
+                                <a:latin typeface="Cambria Math" panose="02040503050406030204" pitchFamily="18" charset="0"/>
+                              </a:rPr>
+                              <m:t>&gt;0</m:t>
+                            </m:r>
+                          </m:e>
+                          <m:e>
+                            <m:r>
+                              <m:rPr>
+                                <m:sty m:val="p"/>
+                              </m:rPr>
+                              <a:rPr lang="pt-BR" b="0" i="0" smtClean="0">
+                                <a:latin typeface="Cambria Math" panose="02040503050406030204" pitchFamily="18" charset="0"/>
+                                <a:ea typeface="Cambria Math" panose="02040503050406030204" pitchFamily="18" charset="0"/>
+                              </a:rPr>
+                              <m:t>Indeterminado</m:t>
+                            </m:r>
+                            <m:r>
+                              <a:rPr lang="pt-BR" b="1" i="1">
+                                <a:latin typeface="Cambria Math" panose="02040503050406030204" pitchFamily="18" charset="0"/>
+                              </a:rPr>
+                              <m:t>,</m:t>
+                            </m:r>
+                            <m:r>
+                              <a:rPr lang="pt-BR" b="0" i="1" smtClean="0">
+                                <a:latin typeface="Cambria Math" panose="02040503050406030204" pitchFamily="18" charset="0"/>
+                              </a:rPr>
+                              <m:t>  </m:t>
+                            </m:r>
+                            <m:r>
+                              <a:rPr lang="pt-BR" i="1">
+                                <a:latin typeface="Cambria Math" panose="02040503050406030204" pitchFamily="18" charset="0"/>
+                              </a:rPr>
+                              <m:t>𝑔</m:t>
+                            </m:r>
+                            <m:r>
+                              <a:rPr lang="pt-BR" i="1">
+                                <a:latin typeface="Cambria Math" panose="02040503050406030204" pitchFamily="18" charset="0"/>
+                              </a:rPr>
+                              <m:t>(</m:t>
+                            </m:r>
+                            <m:r>
+                              <a:rPr lang="pt-BR" b="1" i="1">
+                                <a:latin typeface="Cambria Math" panose="02040503050406030204" pitchFamily="18" charset="0"/>
+                              </a:rPr>
+                              <m:t>𝒙</m:t>
+                            </m:r>
+                            <m:r>
+                              <a:rPr lang="pt-BR" i="1">
+                                <a:latin typeface="Cambria Math" panose="02040503050406030204" pitchFamily="18" charset="0"/>
+                              </a:rPr>
+                              <m:t>)=0</m:t>
+                            </m:r>
+                          </m:e>
+                        </m:eqArr>
+                      </m:e>
+                    </m:d>
+                  </m:oMath>
+                </a14:m>
+                <a:r>
+                  <a:rPr lang="pt-BR" dirty="0"/>
+                  <a:t>.</a:t>
+                </a:r>
+              </a:p>
+              <a:p>
+                <a:r>
+                  <a:rPr lang="pt-BR" dirty="0"/>
+                  <a:t>Entretanto, existem alguns problemas relacionados ao uso desta função.</a:t>
+                </a:r>
+              </a:p>
+            </p:txBody>
+          </p:sp>
+        </mc:Choice>
+        <mc:Fallback>
+          <p:sp>
+            <p:nvSpPr>
+              <p:cNvPr id="3" name="Espaço Reservado para Conteúdo 2">
+                <a:extLst>
+                  <a:ext uri="{FF2B5EF4-FFF2-40B4-BE49-F238E27FC236}">
+                    <a16:creationId xmlns:a16="http://schemas.microsoft.com/office/drawing/2014/main" id="{D4A261E2-EE7B-ABC6-0440-76C231BADC90}"/>
+                  </a:ext>
+                </a:extLst>
+              </p:cNvPr>
+              <p:cNvSpPr>
+                <a:spLocks noGrp="1" noRot="1" noChangeAspect="1" noMove="1" noResize="1" noEditPoints="1" noAdjustHandles="1" noChangeArrowheads="1" noChangeShapeType="1" noTextEdit="1"/>
+              </p:cNvSpPr>
+              <p:nvPr>
+                <p:ph idx="1"/>
+              </p:nvPr>
+            </p:nvSpPr>
+            <p:spPr>
+              <a:xfrm>
+                <a:off x="4746172" y="1825624"/>
+                <a:ext cx="7274378" cy="5032375"/>
+              </a:xfrm>
+              <a:blipFill>
+                <a:blip r:embed="rId2"/>
+                <a:stretch>
+                  <a:fillRect l="-1509" t="-1937"/>
+                </a:stretch>
+              </a:blipFill>
+            </p:spPr>
+            <p:txBody>
+              <a:bodyPr/>
+              <a:lstStyle/>
+              <a:p>
+                <a:r>
+                  <a:rPr lang="en-US">
+                    <a:noFill/>
+                  </a:rPr>
+                  <a:t> </a:t>
+                </a:r>
+              </a:p>
+            </p:txBody>
+          </p:sp>
+        </mc:Fallback>
+      </mc:AlternateContent>
+      <p:grpSp>
+        <p:nvGrpSpPr>
+          <p:cNvPr id="16" name="Agrupar 15">
+            <a:extLst>
+              <a:ext uri="{FF2B5EF4-FFF2-40B4-BE49-F238E27FC236}">
+                <a16:creationId xmlns:a16="http://schemas.microsoft.com/office/drawing/2014/main" id="{E1BC3B28-A877-B1F8-8724-FEC92B3B8AB1}"/>
+              </a:ext>
+            </a:extLst>
+          </p:cNvPr>
+          <p:cNvGrpSpPr/>
+          <p:nvPr/>
+        </p:nvGrpSpPr>
+        <p:grpSpPr>
+          <a:xfrm>
+            <a:off x="257177" y="2194676"/>
+            <a:ext cx="3838573" cy="3796878"/>
+            <a:chOff x="257177" y="2194676"/>
+            <a:chExt cx="3838573" cy="3796878"/>
+          </a:xfrm>
+        </p:grpSpPr>
+        <p:pic>
+          <p:nvPicPr>
+            <p:cNvPr id="4" name="Picture 16">
+              <a:extLst>
+                <a:ext uri="{FF2B5EF4-FFF2-40B4-BE49-F238E27FC236}">
+                  <a16:creationId xmlns:a16="http://schemas.microsoft.com/office/drawing/2014/main" id="{7F40541D-F948-44BC-4E48-39EBFFB9640C}"/>
+                </a:ext>
+              </a:extLst>
+            </p:cNvPr>
+            <p:cNvPicPr>
+              <a:picLocks noChangeAspect="1"/>
+            </p:cNvPicPr>
+            <p:nvPr/>
+          </p:nvPicPr>
+          <p:blipFill rotWithShape="1">
+            <a:blip r:embed="rId3"/>
+            <a:srcRect l="3046" t="5896" r="8832"/>
+            <a:stretch/>
+          </p:blipFill>
+          <p:spPr>
+            <a:xfrm>
+              <a:off x="476250" y="2447642"/>
+              <a:ext cx="3619500" cy="3359246"/>
+            </a:xfrm>
+            <a:prstGeom prst="rect">
+              <a:avLst/>
+            </a:prstGeom>
+          </p:spPr>
+        </p:pic>
+        <p:sp>
+          <p:nvSpPr>
+            <p:cNvPr id="5" name="Rectangle 17">
+              <a:extLst>
+                <a:ext uri="{FF2B5EF4-FFF2-40B4-BE49-F238E27FC236}">
+                  <a16:creationId xmlns:a16="http://schemas.microsoft.com/office/drawing/2014/main" id="{11D202E4-A9E4-6400-B6B5-08509661CB6A}"/>
+                </a:ext>
+              </a:extLst>
+            </p:cNvPr>
+            <p:cNvSpPr/>
+            <p:nvPr/>
+          </p:nvSpPr>
+          <p:spPr>
+            <a:xfrm>
+              <a:off x="914400" y="2194676"/>
+              <a:ext cx="3181350" cy="338554"/>
+            </a:xfrm>
+            <a:prstGeom prst="rect">
+              <a:avLst/>
+            </a:prstGeom>
+          </p:spPr>
+          <p:txBody>
+            <a:bodyPr wrap="square">
+              <a:spAutoFit/>
+            </a:bodyPr>
+            <a:lstStyle/>
+            <a:p>
+              <a:pPr algn="ctr"/>
+              <a:r>
+                <a:rPr lang="pt-BR" sz="1600" b="1" dirty="0"/>
+                <a:t>Função heaviside</a:t>
+              </a:r>
+            </a:p>
+          </p:txBody>
+        </p:sp>
+        <mc:AlternateContent xmlns:mc="http://schemas.openxmlformats.org/markup-compatibility/2006" xmlns:a14="http://schemas.microsoft.com/office/drawing/2010/main">
+          <mc:Choice Requires="a14">
+            <p:sp>
+              <p:nvSpPr>
+                <p:cNvPr id="13" name="CaixaDeTexto 12">
+                  <a:extLst>
+                    <a:ext uri="{FF2B5EF4-FFF2-40B4-BE49-F238E27FC236}">
+                      <a16:creationId xmlns:a16="http://schemas.microsoft.com/office/drawing/2014/main" id="{618FA8DE-2726-6E85-B79D-64F78B73160C}"/>
+                    </a:ext>
+                  </a:extLst>
+                </p:cNvPr>
+                <p:cNvSpPr txBox="1"/>
+                <p:nvPr/>
+              </p:nvSpPr>
+              <p:spPr>
+                <a:xfrm>
+                  <a:off x="1828798" y="5622222"/>
+                  <a:ext cx="1266826" cy="369332"/>
+                </a:xfrm>
+                <a:prstGeom prst="rect">
+                  <a:avLst/>
+                </a:prstGeom>
+                <a:solidFill>
+                  <a:schemeClr val="bg1"/>
+                </a:solidFill>
+              </p:spPr>
+              <p:txBody>
+                <a:bodyPr wrap="square">
+                  <a:spAutoFit/>
+                </a:bodyPr>
+                <a:lstStyle/>
+                <a:p>
+                  <a:pPr/>
+                  <a14:m>
+                    <m:oMathPara xmlns:m="http://schemas.openxmlformats.org/officeDocument/2006/math">
+                      <m:oMathParaPr>
+                        <m:jc m:val="centerGroup"/>
+                      </m:oMathParaPr>
+                      <m:oMath xmlns:m="http://schemas.openxmlformats.org/officeDocument/2006/math">
+                        <m:r>
+                          <a:rPr lang="pt-BR" b="0" i="1" smtClean="0">
+                            <a:latin typeface="Cambria Math" panose="02040503050406030204" pitchFamily="18" charset="0"/>
+                          </a:rPr>
+                          <m:t>𝑔</m:t>
+                        </m:r>
+                        <m:r>
+                          <a:rPr lang="pt-BR" b="0" i="1" smtClean="0">
+                            <a:latin typeface="Cambria Math" panose="02040503050406030204" pitchFamily="18" charset="0"/>
+                          </a:rPr>
+                          <m:t>(</m:t>
+                        </m:r>
+                        <m:r>
+                          <a:rPr lang="pt-BR" b="1" i="1" smtClean="0">
+                            <a:latin typeface="Cambria Math" panose="02040503050406030204" pitchFamily="18" charset="0"/>
+                          </a:rPr>
+                          <m:t>𝒙</m:t>
+                        </m:r>
+                        <m:r>
+                          <a:rPr lang="pt-BR" b="0" i="1" smtClean="0">
+                            <a:latin typeface="Cambria Math" panose="02040503050406030204" pitchFamily="18" charset="0"/>
+                          </a:rPr>
+                          <m:t>)</m:t>
+                        </m:r>
+                      </m:oMath>
+                    </m:oMathPara>
+                  </a14:m>
+                  <a:endParaRPr lang="pt-BR" dirty="0"/>
+                </a:p>
+              </p:txBody>
+            </p:sp>
+          </mc:Choice>
+          <mc:Fallback xmlns="">
+            <p:sp>
+              <p:nvSpPr>
+                <p:cNvPr id="13" name="CaixaDeTexto 12">
+                  <a:extLst>
+                    <a:ext uri="{FF2B5EF4-FFF2-40B4-BE49-F238E27FC236}">
+                      <a16:creationId xmlns:a16="http://schemas.microsoft.com/office/drawing/2014/main" id="{618FA8DE-2726-6E85-B79D-64F78B73160C}"/>
+                    </a:ext>
+                  </a:extLst>
+                </p:cNvPr>
+                <p:cNvSpPr txBox="1">
+                  <a:spLocks noRot="1" noChangeAspect="1" noMove="1" noResize="1" noEditPoints="1" noAdjustHandles="1" noChangeArrowheads="1" noChangeShapeType="1" noTextEdit="1"/>
+                </p:cNvSpPr>
+                <p:nvPr/>
+              </p:nvSpPr>
+              <p:spPr>
+                <a:xfrm>
+                  <a:off x="1828798" y="5622222"/>
+                  <a:ext cx="1266826" cy="369332"/>
+                </a:xfrm>
+                <a:prstGeom prst="rect">
+                  <a:avLst/>
+                </a:prstGeom>
+                <a:blipFill>
+                  <a:blip r:embed="rId4"/>
+                  <a:stretch>
+                    <a:fillRect b="-13115"/>
+                  </a:stretch>
+                </a:blipFill>
+              </p:spPr>
+              <p:txBody>
+                <a:bodyPr/>
+                <a:lstStyle/>
+                <a:p>
+                  <a:r>
+                    <a:rPr lang="pt-BR">
+                      <a:noFill/>
+                    </a:rPr>
+                    <a:t> </a:t>
+                  </a:r>
+                </a:p>
+              </p:txBody>
+            </p:sp>
+          </mc:Fallback>
+        </mc:AlternateContent>
+        <mc:AlternateContent xmlns:mc="http://schemas.openxmlformats.org/markup-compatibility/2006" xmlns:a14="http://schemas.microsoft.com/office/drawing/2010/main">
+          <mc:Choice Requires="a14">
+            <p:sp>
+              <p:nvSpPr>
+                <p:cNvPr id="15" name="CaixaDeTexto 14">
+                  <a:extLst>
+                    <a:ext uri="{FF2B5EF4-FFF2-40B4-BE49-F238E27FC236}">
+                      <a16:creationId xmlns:a16="http://schemas.microsoft.com/office/drawing/2014/main" id="{5C2FEE03-FCD1-7E66-0281-BFC9FB634050}"/>
+                    </a:ext>
+                  </a:extLst>
+                </p:cNvPr>
+                <p:cNvSpPr txBox="1"/>
+                <p:nvPr/>
+              </p:nvSpPr>
+              <p:spPr>
+                <a:xfrm rot="16200000">
+                  <a:off x="-67745" y="3753921"/>
+                  <a:ext cx="1019175" cy="369332"/>
+                </a:xfrm>
+                <a:prstGeom prst="rect">
+                  <a:avLst/>
+                </a:prstGeom>
+                <a:solidFill>
+                  <a:schemeClr val="bg1"/>
+                </a:solidFill>
+              </p:spPr>
+              <p:txBody>
+                <a:bodyPr wrap="square">
+                  <a:spAutoFit/>
+                </a:bodyPr>
+                <a:lstStyle/>
+                <a:p>
+                  <a:pPr/>
+                  <a14:m>
+                    <m:oMathPara xmlns:m="http://schemas.openxmlformats.org/officeDocument/2006/math">
+                      <m:oMathParaPr>
+                        <m:jc m:val="centerGroup"/>
+                      </m:oMathParaPr>
+                      <m:oMath xmlns:m="http://schemas.openxmlformats.org/officeDocument/2006/math">
+                        <m:r>
+                          <a:rPr lang="pt-BR" b="0" i="1" smtClean="0">
+                            <a:latin typeface="Cambria Math" panose="02040503050406030204" pitchFamily="18" charset="0"/>
+                          </a:rPr>
+                          <m:t>𝑓</m:t>
+                        </m:r>
+                        <m:d>
+                          <m:dPr>
+                            <m:ctrlPr>
+                              <a:rPr lang="pt-BR" i="1">
+                                <a:latin typeface="Cambria Math" panose="02040503050406030204" pitchFamily="18" charset="0"/>
+                              </a:rPr>
+                            </m:ctrlPr>
+                          </m:dPr>
+                          <m:e>
+                            <m:r>
+                              <a:rPr lang="pt-BR" b="0" i="1" smtClean="0">
+                                <a:latin typeface="Cambria Math" panose="02040503050406030204" pitchFamily="18" charset="0"/>
+                              </a:rPr>
+                              <m:t>𝑔</m:t>
+                            </m:r>
+                            <m:r>
+                              <a:rPr lang="pt-BR" b="0" i="1" smtClean="0">
+                                <a:latin typeface="Cambria Math" panose="02040503050406030204" pitchFamily="18" charset="0"/>
+                              </a:rPr>
+                              <m:t>(</m:t>
+                            </m:r>
+                            <m:r>
+                              <a:rPr lang="pt-BR" b="1" i="1" smtClean="0">
+                                <a:latin typeface="Cambria Math" panose="02040503050406030204" pitchFamily="18" charset="0"/>
+                              </a:rPr>
+                              <m:t>𝒙</m:t>
+                            </m:r>
+                            <m:r>
+                              <a:rPr lang="pt-BR" b="0" i="1" smtClean="0">
+                                <a:latin typeface="Cambria Math" panose="02040503050406030204" pitchFamily="18" charset="0"/>
+                              </a:rPr>
+                              <m:t>)</m:t>
+                            </m:r>
+                          </m:e>
+                        </m:d>
+                      </m:oMath>
+                    </m:oMathPara>
+                  </a14:m>
+                  <a:endParaRPr lang="pt-BR" dirty="0"/>
+                </a:p>
+              </p:txBody>
+            </p:sp>
+          </mc:Choice>
+          <mc:Fallback xmlns="">
+            <p:sp>
+              <p:nvSpPr>
+                <p:cNvPr id="15" name="CaixaDeTexto 14">
+                  <a:extLst>
+                    <a:ext uri="{FF2B5EF4-FFF2-40B4-BE49-F238E27FC236}">
+                      <a16:creationId xmlns:a16="http://schemas.microsoft.com/office/drawing/2014/main" id="{5C2FEE03-FCD1-7E66-0281-BFC9FB634050}"/>
+                    </a:ext>
+                  </a:extLst>
+                </p:cNvPr>
+                <p:cNvSpPr txBox="1">
+                  <a:spLocks noRot="1" noChangeAspect="1" noMove="1" noResize="1" noEditPoints="1" noAdjustHandles="1" noChangeArrowheads="1" noChangeShapeType="1" noTextEdit="1"/>
+                </p:cNvSpPr>
+                <p:nvPr/>
+              </p:nvSpPr>
+              <p:spPr>
+                <a:xfrm rot="16200000">
+                  <a:off x="-67745" y="3753921"/>
+                  <a:ext cx="1019175" cy="369332"/>
+                </a:xfrm>
+                <a:prstGeom prst="rect">
+                  <a:avLst/>
+                </a:prstGeom>
+                <a:blipFill>
+                  <a:blip r:embed="rId5"/>
+                  <a:stretch>
+                    <a:fillRect r="-13115"/>
+                  </a:stretch>
+                </a:blipFill>
+              </p:spPr>
+              <p:txBody>
+                <a:bodyPr/>
+                <a:lstStyle/>
+                <a:p>
+                  <a:r>
+                    <a:rPr lang="pt-BR">
+                      <a:noFill/>
+                    </a:rPr>
+                    <a:t> </a:t>
+                  </a:r>
+                </a:p>
+              </p:txBody>
+            </p:sp>
+          </mc:Fallback>
+        </mc:AlternateContent>
+      </p:grpSp>
     </p:spTree>
     <p:extLst>
       <p:ext uri="{BB962C8B-B14F-4D97-AF65-F5344CB8AC3E}">
-        <p14:creationId xmlns:p14="http://schemas.microsoft.com/office/powerpoint/2010/main" val="3773005660"/>
+        <p14:creationId xmlns:p14="http://schemas.microsoft.com/office/powerpoint/2010/main" val="2032918122"/>
       </p:ext>
     </p:extLst>
   </p:cSld>
@@ -14209,64 +17300,2840 @@
       </p:grpSpPr>
       <p:sp>
         <p:nvSpPr>
-          <p:cNvPr id="4" name="Título 1">
+          <p:cNvPr id="2" name="Title 1"/>
+          <p:cNvSpPr>
+            <a:spLocks noGrp="1"/>
+          </p:cNvSpPr>
+          <p:nvPr>
+            <p:ph type="title"/>
+          </p:nvPr>
+        </p:nvSpPr>
+        <p:spPr/>
+        <p:txBody>
+          <a:bodyPr/>
+          <a:lstStyle/>
+          <a:p>
+            <a:r>
+              <a:rPr lang="pt-BR" dirty="0"/>
+              <a:t>Função de limiar de decisão ou de ativação</a:t>
+            </a:r>
+          </a:p>
+        </p:txBody>
+      </p:sp>
+      <p:sp>
+        <p:nvSpPr>
+          <p:cNvPr id="3" name="Content Placeholder 2"/>
+          <p:cNvSpPr>
+            <a:spLocks noGrp="1"/>
+          </p:cNvSpPr>
+          <p:nvPr>
+            <p:ph idx="1"/>
+          </p:nvPr>
+        </p:nvSpPr>
+        <p:spPr>
+          <a:xfrm>
+            <a:off x="4762895" y="1898980"/>
+            <a:ext cx="7331133" cy="4959020"/>
+          </a:xfrm>
+        </p:spPr>
+        <p:txBody>
+          <a:bodyPr>
+            <a:normAutofit/>
+          </a:bodyPr>
+          <a:lstStyle/>
+          <a:p>
+            <a:r>
+              <a:rPr lang="pt-BR" dirty="0"/>
+              <a:t>Como no caso da regressão, queremos encontrar um modelo de classificação (i.e., a </a:t>
+            </a:r>
+            <a:r>
+              <a:rPr lang="pt-BR" b="1" dirty="0"/>
+              <a:t>função hipótese de </a:t>
+            </a:r>
+            <a:r>
+              <a:rPr lang="pt-BR" b="1" dirty="0">
+                <a:solidFill>
+                  <a:srgbClr val="7030A0"/>
+                </a:solidFill>
+              </a:rPr>
+              <a:t>classificação</a:t>
+            </a:r>
+            <a:r>
+              <a:rPr lang="pt-BR" dirty="0"/>
+              <a:t>) que minimize uma dada função de erro (de classificação).</a:t>
+            </a:r>
+          </a:p>
+          <a:p>
+            <a:r>
+              <a:rPr lang="pt-BR" dirty="0"/>
+              <a:t>Na </a:t>
+            </a:r>
+            <a:r>
+              <a:rPr lang="pt-BR" b="1" dirty="0"/>
+              <a:t>regressão</a:t>
+            </a:r>
+            <a:r>
+              <a:rPr lang="pt-BR" dirty="0"/>
+              <a:t>, podemos fazer de duas maneiras: </a:t>
+            </a:r>
+          </a:p>
+          <a:p>
+            <a:pPr marL="971550" lvl="1" indent="-514350">
+              <a:buFont typeface="+mj-lt"/>
+              <a:buAutoNum type="romanLcPeriod"/>
+            </a:pPr>
+            <a:r>
+              <a:rPr lang="pt-BR" dirty="0"/>
+              <a:t>de forma fechada (i.e., </a:t>
+            </a:r>
+            <a:r>
+              <a:rPr lang="pt-BR" b="1" dirty="0"/>
+              <a:t>equação normal</a:t>
+            </a:r>
+            <a:r>
+              <a:rPr lang="pt-BR" dirty="0"/>
+              <a:t>) tomando a derivada parcial do erro em relação aos pesos, igualando a zero e resolvendo a equação em função dos pesos;</a:t>
+            </a:r>
+          </a:p>
+          <a:p>
+            <a:pPr marL="971550" lvl="1" indent="-514350">
+              <a:buFont typeface="+mj-lt"/>
+              <a:buAutoNum type="romanLcPeriod"/>
+            </a:pPr>
+            <a:r>
+              <a:rPr lang="pt-BR" dirty="0"/>
+              <a:t>e através do algoritmo do </a:t>
+            </a:r>
+            <a:r>
+              <a:rPr lang="pt-BR" b="1" dirty="0"/>
+              <a:t>gradiente descendente</a:t>
+            </a:r>
+            <a:r>
+              <a:rPr lang="pt-BR" dirty="0"/>
+              <a:t>, usando as derivadas parciais do erro em relação aos pesos.</a:t>
+            </a:r>
+          </a:p>
+        </p:txBody>
+      </p:sp>
+      <p:grpSp>
+        <p:nvGrpSpPr>
+          <p:cNvPr id="4" name="Agrupar 3">
             <a:extLst>
               <a:ext uri="{FF2B5EF4-FFF2-40B4-BE49-F238E27FC236}">
-                <a16:creationId xmlns:a16="http://schemas.microsoft.com/office/drawing/2014/main" xmlns="" id="{32666AC8-2E17-4DB4-B0F5-60C640CCFD2E}"/>
+                <a16:creationId xmlns:a16="http://schemas.microsoft.com/office/drawing/2014/main" id="{9167699E-C148-E6E4-AA25-95745C8A9E72}"/>
               </a:ext>
             </a:extLst>
           </p:cNvPr>
-          <p:cNvSpPr txBox="1">
-            <a:spLocks/>
+          <p:cNvGrpSpPr/>
+          <p:nvPr/>
+        </p:nvGrpSpPr>
+        <p:grpSpPr>
+          <a:xfrm>
+            <a:off x="375957" y="2211906"/>
+            <a:ext cx="3838573" cy="3796878"/>
+            <a:chOff x="257177" y="2194676"/>
+            <a:chExt cx="3838573" cy="3796878"/>
+          </a:xfrm>
+        </p:grpSpPr>
+        <p:pic>
+          <p:nvPicPr>
+            <p:cNvPr id="6" name="Picture 16">
+              <a:extLst>
+                <a:ext uri="{FF2B5EF4-FFF2-40B4-BE49-F238E27FC236}">
+                  <a16:creationId xmlns:a16="http://schemas.microsoft.com/office/drawing/2014/main" id="{43A50A77-EC5B-72A7-708D-F766435B42BA}"/>
+                </a:ext>
+              </a:extLst>
+            </p:cNvPr>
+            <p:cNvPicPr>
+              <a:picLocks noChangeAspect="1"/>
+            </p:cNvPicPr>
+            <p:nvPr/>
+          </p:nvPicPr>
+          <p:blipFill rotWithShape="1">
+            <a:blip r:embed="rId3"/>
+            <a:srcRect l="3046" t="5896" r="8832"/>
+            <a:stretch/>
+          </p:blipFill>
+          <p:spPr>
+            <a:xfrm>
+              <a:off x="476250" y="2447642"/>
+              <a:ext cx="3619500" cy="3359246"/>
+            </a:xfrm>
+            <a:prstGeom prst="rect">
+              <a:avLst/>
+            </a:prstGeom>
+          </p:spPr>
+        </p:pic>
+        <p:sp>
+          <p:nvSpPr>
+            <p:cNvPr id="7" name="Rectangle 17">
+              <a:extLst>
+                <a:ext uri="{FF2B5EF4-FFF2-40B4-BE49-F238E27FC236}">
+                  <a16:creationId xmlns:a16="http://schemas.microsoft.com/office/drawing/2014/main" id="{78B0EA9B-5D67-2FF5-DDBD-1D93340B6BAD}"/>
+                </a:ext>
+              </a:extLst>
+            </p:cNvPr>
+            <p:cNvSpPr/>
+            <p:nvPr/>
+          </p:nvSpPr>
+          <p:spPr>
+            <a:xfrm>
+              <a:off x="914400" y="2194676"/>
+              <a:ext cx="3181350" cy="338554"/>
+            </a:xfrm>
+            <a:prstGeom prst="rect">
+              <a:avLst/>
+            </a:prstGeom>
+          </p:spPr>
+          <p:txBody>
+            <a:bodyPr wrap="square">
+              <a:spAutoFit/>
+            </a:bodyPr>
+            <a:lstStyle/>
+            <a:p>
+              <a:pPr algn="ctr"/>
+              <a:r>
+                <a:rPr lang="pt-BR" sz="1600" b="1" dirty="0"/>
+                <a:t>Função heaviside</a:t>
+              </a:r>
+            </a:p>
+          </p:txBody>
+        </p:sp>
+        <mc:AlternateContent xmlns:mc="http://schemas.openxmlformats.org/markup-compatibility/2006" xmlns:a14="http://schemas.microsoft.com/office/drawing/2010/main">
+          <mc:Choice Requires="a14">
+            <p:sp>
+              <p:nvSpPr>
+                <p:cNvPr id="8" name="CaixaDeTexto 7">
+                  <a:extLst>
+                    <a:ext uri="{FF2B5EF4-FFF2-40B4-BE49-F238E27FC236}">
+                      <a16:creationId xmlns:a16="http://schemas.microsoft.com/office/drawing/2014/main" id="{AF29DA71-4710-10E0-14BD-1B1438F22A8F}"/>
+                    </a:ext>
+                  </a:extLst>
+                </p:cNvPr>
+                <p:cNvSpPr txBox="1"/>
+                <p:nvPr/>
+              </p:nvSpPr>
+              <p:spPr>
+                <a:xfrm>
+                  <a:off x="1828798" y="5622222"/>
+                  <a:ext cx="1266826" cy="369332"/>
+                </a:xfrm>
+                <a:prstGeom prst="rect">
+                  <a:avLst/>
+                </a:prstGeom>
+                <a:solidFill>
+                  <a:schemeClr val="bg1"/>
+                </a:solidFill>
+              </p:spPr>
+              <p:txBody>
+                <a:bodyPr wrap="square">
+                  <a:spAutoFit/>
+                </a:bodyPr>
+                <a:lstStyle/>
+                <a:p>
+                  <a:pPr/>
+                  <a14:m>
+                    <m:oMathPara xmlns:m="http://schemas.openxmlformats.org/officeDocument/2006/math">
+                      <m:oMathParaPr>
+                        <m:jc m:val="centerGroup"/>
+                      </m:oMathParaPr>
+                      <m:oMath xmlns:m="http://schemas.openxmlformats.org/officeDocument/2006/math">
+                        <m:r>
+                          <a:rPr lang="pt-BR" b="0" i="1" smtClean="0">
+                            <a:latin typeface="Cambria Math" panose="02040503050406030204" pitchFamily="18" charset="0"/>
+                          </a:rPr>
+                          <m:t>𝑔</m:t>
+                        </m:r>
+                        <m:r>
+                          <a:rPr lang="pt-BR" b="0" i="1" smtClean="0">
+                            <a:latin typeface="Cambria Math" panose="02040503050406030204" pitchFamily="18" charset="0"/>
+                          </a:rPr>
+                          <m:t>(</m:t>
+                        </m:r>
+                        <m:r>
+                          <a:rPr lang="pt-BR" b="1" i="1" smtClean="0">
+                            <a:latin typeface="Cambria Math" panose="02040503050406030204" pitchFamily="18" charset="0"/>
+                          </a:rPr>
+                          <m:t>𝒙</m:t>
+                        </m:r>
+                        <m:r>
+                          <a:rPr lang="pt-BR" b="0" i="1" smtClean="0">
+                            <a:latin typeface="Cambria Math" panose="02040503050406030204" pitchFamily="18" charset="0"/>
+                          </a:rPr>
+                          <m:t>)</m:t>
+                        </m:r>
+                      </m:oMath>
+                    </m:oMathPara>
+                  </a14:m>
+                  <a:endParaRPr lang="pt-BR" dirty="0"/>
+                </a:p>
+              </p:txBody>
+            </p:sp>
+          </mc:Choice>
+          <mc:Fallback xmlns="">
+            <p:sp>
+              <p:nvSpPr>
+                <p:cNvPr id="8" name="CaixaDeTexto 7">
+                  <a:extLst>
+                    <a:ext uri="{FF2B5EF4-FFF2-40B4-BE49-F238E27FC236}">
+                      <a16:creationId xmlns:a16="http://schemas.microsoft.com/office/drawing/2014/main" id="{AF29DA71-4710-10E0-14BD-1B1438F22A8F}"/>
+                    </a:ext>
+                  </a:extLst>
+                </p:cNvPr>
+                <p:cNvSpPr txBox="1">
+                  <a:spLocks noRot="1" noChangeAspect="1" noMove="1" noResize="1" noEditPoints="1" noAdjustHandles="1" noChangeArrowheads="1" noChangeShapeType="1" noTextEdit="1"/>
+                </p:cNvSpPr>
+                <p:nvPr/>
+              </p:nvSpPr>
+              <p:spPr>
+                <a:xfrm>
+                  <a:off x="1828798" y="5622222"/>
+                  <a:ext cx="1266826" cy="369332"/>
+                </a:xfrm>
+                <a:prstGeom prst="rect">
+                  <a:avLst/>
+                </a:prstGeom>
+                <a:blipFill>
+                  <a:blip r:embed="rId5"/>
+                  <a:stretch>
+                    <a:fillRect b="-13115"/>
+                  </a:stretch>
+                </a:blipFill>
+              </p:spPr>
+              <p:txBody>
+                <a:bodyPr/>
+                <a:lstStyle/>
+                <a:p>
+                  <a:r>
+                    <a:rPr lang="pt-BR">
+                      <a:noFill/>
+                    </a:rPr>
+                    <a:t> </a:t>
+                  </a:r>
+                </a:p>
+              </p:txBody>
+            </p:sp>
+          </mc:Fallback>
+        </mc:AlternateContent>
+        <mc:AlternateContent xmlns:mc="http://schemas.openxmlformats.org/markup-compatibility/2006" xmlns:a14="http://schemas.microsoft.com/office/drawing/2010/main">
+          <mc:Choice Requires="a14">
+            <p:sp>
+              <p:nvSpPr>
+                <p:cNvPr id="9" name="CaixaDeTexto 8">
+                  <a:extLst>
+                    <a:ext uri="{FF2B5EF4-FFF2-40B4-BE49-F238E27FC236}">
+                      <a16:creationId xmlns:a16="http://schemas.microsoft.com/office/drawing/2014/main" id="{60F2DECC-8C19-18FE-B4F8-959EE96B8D82}"/>
+                    </a:ext>
+                  </a:extLst>
+                </p:cNvPr>
+                <p:cNvSpPr txBox="1"/>
+                <p:nvPr/>
+              </p:nvSpPr>
+              <p:spPr>
+                <a:xfrm rot="16200000">
+                  <a:off x="-67745" y="3753921"/>
+                  <a:ext cx="1019175" cy="369332"/>
+                </a:xfrm>
+                <a:prstGeom prst="rect">
+                  <a:avLst/>
+                </a:prstGeom>
+                <a:solidFill>
+                  <a:schemeClr val="bg1"/>
+                </a:solidFill>
+              </p:spPr>
+              <p:txBody>
+                <a:bodyPr wrap="square">
+                  <a:spAutoFit/>
+                </a:bodyPr>
+                <a:lstStyle/>
+                <a:p>
+                  <a:pPr/>
+                  <a14:m>
+                    <m:oMathPara xmlns:m="http://schemas.openxmlformats.org/officeDocument/2006/math">
+                      <m:oMathParaPr>
+                        <m:jc m:val="centerGroup"/>
+                      </m:oMathParaPr>
+                      <m:oMath xmlns:m="http://schemas.openxmlformats.org/officeDocument/2006/math">
+                        <m:r>
+                          <a:rPr lang="pt-BR" b="0" i="1" smtClean="0">
+                            <a:latin typeface="Cambria Math" panose="02040503050406030204" pitchFamily="18" charset="0"/>
+                          </a:rPr>
+                          <m:t>𝑓</m:t>
+                        </m:r>
+                        <m:d>
+                          <m:dPr>
+                            <m:ctrlPr>
+                              <a:rPr lang="pt-BR" i="1">
+                                <a:latin typeface="Cambria Math" panose="02040503050406030204" pitchFamily="18" charset="0"/>
+                              </a:rPr>
+                            </m:ctrlPr>
+                          </m:dPr>
+                          <m:e>
+                            <m:r>
+                              <a:rPr lang="pt-BR" b="0" i="1" smtClean="0">
+                                <a:latin typeface="Cambria Math" panose="02040503050406030204" pitchFamily="18" charset="0"/>
+                              </a:rPr>
+                              <m:t>𝑔</m:t>
+                            </m:r>
+                            <m:r>
+                              <a:rPr lang="pt-BR" b="0" i="1" smtClean="0">
+                                <a:latin typeface="Cambria Math" panose="02040503050406030204" pitchFamily="18" charset="0"/>
+                              </a:rPr>
+                              <m:t>(</m:t>
+                            </m:r>
+                            <m:r>
+                              <a:rPr lang="pt-BR" b="1" i="1" smtClean="0">
+                                <a:latin typeface="Cambria Math" panose="02040503050406030204" pitchFamily="18" charset="0"/>
+                              </a:rPr>
+                              <m:t>𝒙</m:t>
+                            </m:r>
+                            <m:r>
+                              <a:rPr lang="pt-BR" b="0" i="1" smtClean="0">
+                                <a:latin typeface="Cambria Math" panose="02040503050406030204" pitchFamily="18" charset="0"/>
+                              </a:rPr>
+                              <m:t>)</m:t>
+                            </m:r>
+                          </m:e>
+                        </m:d>
+                      </m:oMath>
+                    </m:oMathPara>
+                  </a14:m>
+                  <a:endParaRPr lang="pt-BR" dirty="0"/>
+                </a:p>
+              </p:txBody>
+            </p:sp>
+          </mc:Choice>
+          <mc:Fallback xmlns="">
+            <p:sp>
+              <p:nvSpPr>
+                <p:cNvPr id="9" name="CaixaDeTexto 8">
+                  <a:extLst>
+                    <a:ext uri="{FF2B5EF4-FFF2-40B4-BE49-F238E27FC236}">
+                      <a16:creationId xmlns:a16="http://schemas.microsoft.com/office/drawing/2014/main" id="{60F2DECC-8C19-18FE-B4F8-959EE96B8D82}"/>
+                    </a:ext>
+                  </a:extLst>
+                </p:cNvPr>
+                <p:cNvSpPr txBox="1">
+                  <a:spLocks noRot="1" noChangeAspect="1" noMove="1" noResize="1" noEditPoints="1" noAdjustHandles="1" noChangeArrowheads="1" noChangeShapeType="1" noTextEdit="1"/>
+                </p:cNvSpPr>
+                <p:nvPr/>
+              </p:nvSpPr>
+              <p:spPr>
+                <a:xfrm rot="16200000">
+                  <a:off x="-67745" y="3753921"/>
+                  <a:ext cx="1019175" cy="369332"/>
+                </a:xfrm>
+                <a:prstGeom prst="rect">
+                  <a:avLst/>
+                </a:prstGeom>
+                <a:blipFill>
+                  <a:blip r:embed="rId6"/>
+                  <a:stretch>
+                    <a:fillRect r="-13115"/>
+                  </a:stretch>
+                </a:blipFill>
+              </p:spPr>
+              <p:txBody>
+                <a:bodyPr/>
+                <a:lstStyle/>
+                <a:p>
+                  <a:r>
+                    <a:rPr lang="pt-BR">
+                      <a:noFill/>
+                    </a:rPr>
+                    <a:t> </a:t>
+                  </a:r>
+                </a:p>
+              </p:txBody>
+            </p:sp>
+          </mc:Fallback>
+        </mc:AlternateContent>
+      </p:grpSp>
+    </p:spTree>
+    <p:extLst>
+      <p:ext uri="{BB962C8B-B14F-4D97-AF65-F5344CB8AC3E}">
+        <p14:creationId xmlns:p14="http://schemas.microsoft.com/office/powerpoint/2010/main" val="3051340437"/>
+      </p:ext>
+    </p:extLst>
+  </p:cSld>
+  <p:clrMapOvr>
+    <a:masterClrMapping/>
+  </p:clrMapOvr>
+</p:sld>
+</file>
+
+<file path=ppt/slides/slide25.xml><?xml version="1.0" encoding="utf-8"?>
+<p:sld xmlns:a="http://schemas.openxmlformats.org/drawingml/2006/main" xmlns:r="http://schemas.openxmlformats.org/officeDocument/2006/relationships" xmlns:p="http://schemas.openxmlformats.org/presentationml/2006/main">
+  <p:cSld>
+    <p:spTree>
+      <p:nvGrpSpPr>
+        <p:cNvPr id="1" name="">
+          <a:extLst>
+            <a:ext uri="{FF2B5EF4-FFF2-40B4-BE49-F238E27FC236}">
+              <a16:creationId xmlns:a16="http://schemas.microsoft.com/office/drawing/2014/main" id="{E62A5D62-5663-9DE6-E2A1-F9577788EAFA}"/>
+            </a:ext>
+          </a:extLst>
+        </p:cNvPr>
+        <p:cNvGrpSpPr/>
+        <p:nvPr/>
+      </p:nvGrpSpPr>
+      <p:grpSpPr>
+        <a:xfrm>
+          <a:off x="0" y="0"/>
+          <a:ext cx="0" cy="0"/>
+          <a:chOff x="0" y="0"/>
+          <a:chExt cx="0" cy="0"/>
+        </a:xfrm>
+      </p:grpSpPr>
+      <p:sp>
+        <p:nvSpPr>
+          <p:cNvPr id="2" name="Title 1">
+            <a:extLst>
+              <a:ext uri="{FF2B5EF4-FFF2-40B4-BE49-F238E27FC236}">
+                <a16:creationId xmlns:a16="http://schemas.microsoft.com/office/drawing/2014/main" id="{15065EFE-B8FE-5CBC-5DD0-CE251F6A3EFF}"/>
+              </a:ext>
+            </a:extLst>
+          </p:cNvPr>
+          <p:cNvSpPr>
+            <a:spLocks noGrp="1"/>
           </p:cNvSpPr>
+          <p:nvPr>
+            <p:ph type="title"/>
+          </p:nvPr>
+        </p:nvSpPr>
+        <p:spPr/>
+        <p:txBody>
+          <a:bodyPr/>
+          <a:lstStyle/>
+          <a:p>
+            <a:r>
+              <a:rPr lang="pt-BR" dirty="0"/>
+              <a:t>Função de limiar de decisão ou de ativação</a:t>
+            </a:r>
+          </a:p>
+        </p:txBody>
+      </p:sp>
+      <mc:AlternateContent xmlns:mc="http://schemas.openxmlformats.org/markup-compatibility/2006" xmlns:a14="http://schemas.microsoft.com/office/drawing/2010/main">
+        <mc:Choice Requires="a14">
+          <p:sp>
+            <p:nvSpPr>
+              <p:cNvPr id="3" name="Content Placeholder 2">
+                <a:extLst>
+                  <a:ext uri="{FF2B5EF4-FFF2-40B4-BE49-F238E27FC236}">
+                    <a16:creationId xmlns:a16="http://schemas.microsoft.com/office/drawing/2014/main" id="{2D709016-9081-3D58-87D4-2A2F8AE3F7C7}"/>
+                  </a:ext>
+                </a:extLst>
+              </p:cNvPr>
+              <p:cNvSpPr>
+                <a:spLocks noGrp="1"/>
+              </p:cNvSpPr>
+              <p:nvPr>
+                <p:ph idx="1"/>
+              </p:nvPr>
+            </p:nvSpPr>
+            <p:spPr>
+              <a:xfrm>
+                <a:off x="5229621" y="1898980"/>
+                <a:ext cx="6838552" cy="4959020"/>
+              </a:xfrm>
+            </p:spPr>
+            <p:txBody>
+              <a:bodyPr>
+                <a:normAutofit/>
+              </a:bodyPr>
+              <a:lstStyle/>
+              <a:p>
+                <a:r>
+                  <a:rPr lang="pt-BR" dirty="0"/>
+                  <a:t>Entretanto, com a </a:t>
+                </a:r>
+                <a:r>
+                  <a:rPr lang="pt-BR" b="1" dirty="0"/>
+                  <a:t>função degrau</a:t>
+                </a:r>
+                <a:r>
+                  <a:rPr lang="pt-BR" dirty="0"/>
+                  <a:t>, </a:t>
+                </a:r>
+                <a:r>
+                  <a:rPr lang="pt-BR" b="1" dirty="0">
+                    <a:solidFill>
+                      <a:srgbClr val="FF0000"/>
+                    </a:solidFill>
+                  </a:rPr>
+                  <a:t>nenhuma das duas abordagens é possível </a:t>
+                </a:r>
+                <a:r>
+                  <a:rPr lang="pt-BR" dirty="0"/>
+                  <a:t>devido à </a:t>
+                </a:r>
+                <a:r>
+                  <a:rPr lang="pt-BR" b="1" dirty="0"/>
+                  <a:t>derivada</a:t>
+                </a:r>
+                <a:r>
+                  <a:rPr lang="pt-BR" dirty="0"/>
+                  <a:t> de </a:t>
+                </a:r>
+                <a14:m>
+                  <m:oMath xmlns:m="http://schemas.openxmlformats.org/officeDocument/2006/math">
+                    <m:r>
+                      <a:rPr lang="en-US" i="1">
+                        <a:latin typeface="Cambria Math" panose="02040503050406030204" pitchFamily="18" charset="0"/>
+                      </a:rPr>
+                      <m:t>𝑓</m:t>
+                    </m:r>
+                    <m:r>
+                      <a:rPr lang="en-US" i="1">
+                        <a:latin typeface="Cambria Math" panose="02040503050406030204" pitchFamily="18" charset="0"/>
+                      </a:rPr>
+                      <m:t>(</m:t>
+                    </m:r>
+                    <m:r>
+                      <a:rPr lang="pt-BR" i="1">
+                        <a:latin typeface="Cambria Math" panose="02040503050406030204" pitchFamily="18" charset="0"/>
+                      </a:rPr>
+                      <m:t>𝑔</m:t>
+                    </m:r>
+                    <m:d>
+                      <m:dPr>
+                        <m:ctrlPr>
+                          <a:rPr lang="pt-BR" i="1">
+                            <a:latin typeface="Cambria Math" panose="02040503050406030204" pitchFamily="18" charset="0"/>
+                          </a:rPr>
+                        </m:ctrlPr>
+                      </m:dPr>
+                      <m:e>
+                        <m:r>
+                          <a:rPr lang="pt-BR" b="1" i="1">
+                            <a:latin typeface="Cambria Math" panose="02040503050406030204" pitchFamily="18" charset="0"/>
+                          </a:rPr>
+                          <m:t>𝒙</m:t>
+                        </m:r>
+                      </m:e>
+                    </m:d>
+                    <m:r>
+                      <a:rPr lang="en-US" i="1">
+                        <a:latin typeface="Cambria Math" panose="02040503050406030204" pitchFamily="18" charset="0"/>
+                      </a:rPr>
+                      <m:t>) </m:t>
+                    </m:r>
+                  </m:oMath>
+                </a14:m>
+                <a:r>
+                  <a:rPr lang="pt-BR" dirty="0"/>
+                  <a:t>ser igual a zero em todos os pontos exceto em </a:t>
+                </a:r>
+                <a14:m>
+                  <m:oMath xmlns:m="http://schemas.openxmlformats.org/officeDocument/2006/math">
+                    <m:r>
+                      <a:rPr lang="pt-BR" i="1">
+                        <a:latin typeface="Cambria Math" panose="02040503050406030204" pitchFamily="18" charset="0"/>
+                      </a:rPr>
+                      <m:t>𝑔</m:t>
+                    </m:r>
+                    <m:d>
+                      <m:dPr>
+                        <m:ctrlPr>
+                          <a:rPr lang="pt-BR" i="1">
+                            <a:latin typeface="Cambria Math" panose="02040503050406030204" pitchFamily="18" charset="0"/>
+                          </a:rPr>
+                        </m:ctrlPr>
+                      </m:dPr>
+                      <m:e>
+                        <m:r>
+                          <a:rPr lang="pt-BR" b="1" i="1">
+                            <a:latin typeface="Cambria Math" panose="02040503050406030204" pitchFamily="18" charset="0"/>
+                          </a:rPr>
+                          <m:t>𝒙</m:t>
+                        </m:r>
+                      </m:e>
+                    </m:d>
+                    <m:r>
+                      <a:rPr lang="pt-BR" b="0" i="1" smtClean="0">
+                        <a:latin typeface="Cambria Math" panose="02040503050406030204" pitchFamily="18" charset="0"/>
+                        <a:ea typeface="Cambria Math" panose="02040503050406030204" pitchFamily="18" charset="0"/>
+                      </a:rPr>
+                      <m:t>=0</m:t>
+                    </m:r>
+                  </m:oMath>
+                </a14:m>
+                <a:r>
+                  <a:rPr lang="pt-BR" dirty="0"/>
+                  <a:t>, onde ela é indeterminada.</a:t>
+                </a:r>
+              </a:p>
+              <a:p>
+                <a:r>
+                  <a:rPr lang="pt-BR" dirty="0"/>
+                  <a:t>Além disto, existe um outro problema.</a:t>
+                </a:r>
+              </a:p>
+            </p:txBody>
+          </p:sp>
+        </mc:Choice>
+        <mc:Fallback xmlns="">
+          <p:sp>
+            <p:nvSpPr>
+              <p:cNvPr id="3" name="Content Placeholder 2">
+                <a:extLst>
+                  <a:ext uri="{FF2B5EF4-FFF2-40B4-BE49-F238E27FC236}">
+                    <a16:creationId xmlns:a16="http://schemas.microsoft.com/office/drawing/2014/main" id="{2D709016-9081-3D58-87D4-2A2F8AE3F7C7}"/>
+                  </a:ext>
+                </a:extLst>
+              </p:cNvPr>
+              <p:cNvSpPr>
+                <a:spLocks noGrp="1" noRot="1" noChangeAspect="1" noMove="1" noResize="1" noEditPoints="1" noAdjustHandles="1" noChangeArrowheads="1" noChangeShapeType="1" noTextEdit="1"/>
+              </p:cNvSpPr>
+              <p:nvPr>
+                <p:ph idx="1"/>
+              </p:nvPr>
+            </p:nvSpPr>
+            <p:spPr>
+              <a:xfrm>
+                <a:off x="5229621" y="1898980"/>
+                <a:ext cx="6838552" cy="4959020"/>
+              </a:xfrm>
+              <a:blipFill>
+                <a:blip r:embed="rId3"/>
+                <a:stretch>
+                  <a:fillRect l="-1604" t="-2091" r="-1783"/>
+                </a:stretch>
+              </a:blipFill>
+            </p:spPr>
+            <p:txBody>
+              <a:bodyPr/>
+              <a:lstStyle/>
+              <a:p>
+                <a:r>
+                  <a:rPr lang="en-US">
+                    <a:noFill/>
+                  </a:rPr>
+                  <a:t> </a:t>
+                </a:r>
+              </a:p>
+            </p:txBody>
+          </p:sp>
+        </mc:Fallback>
+      </mc:AlternateContent>
+      <p:grpSp>
+        <p:nvGrpSpPr>
+          <p:cNvPr id="4" name="Agrupar 3">
+            <a:extLst>
+              <a:ext uri="{FF2B5EF4-FFF2-40B4-BE49-F238E27FC236}">
+                <a16:creationId xmlns:a16="http://schemas.microsoft.com/office/drawing/2014/main" id="{9DB76842-BA4E-0008-49EF-13FF7D823841}"/>
+              </a:ext>
+            </a:extLst>
+          </p:cNvPr>
+          <p:cNvGrpSpPr/>
           <p:nvPr/>
+        </p:nvGrpSpPr>
+        <p:grpSpPr>
+          <a:xfrm>
+            <a:off x="506586" y="2103049"/>
+            <a:ext cx="3838573" cy="3796878"/>
+            <a:chOff x="257177" y="2194676"/>
+            <a:chExt cx="3838573" cy="3796878"/>
+          </a:xfrm>
+        </p:grpSpPr>
+        <p:pic>
+          <p:nvPicPr>
+            <p:cNvPr id="6" name="Picture 16">
+              <a:extLst>
+                <a:ext uri="{FF2B5EF4-FFF2-40B4-BE49-F238E27FC236}">
+                  <a16:creationId xmlns:a16="http://schemas.microsoft.com/office/drawing/2014/main" id="{B9EACBDA-DDE2-3024-9098-AA3F6A805DDC}"/>
+                </a:ext>
+              </a:extLst>
+            </p:cNvPr>
+            <p:cNvPicPr>
+              <a:picLocks noChangeAspect="1"/>
+            </p:cNvPicPr>
+            <p:nvPr/>
+          </p:nvPicPr>
+          <p:blipFill rotWithShape="1">
+            <a:blip r:embed="rId4"/>
+            <a:srcRect l="3046" t="5896" r="8832"/>
+            <a:stretch/>
+          </p:blipFill>
+          <p:spPr>
+            <a:xfrm>
+              <a:off x="476250" y="2447642"/>
+              <a:ext cx="3619500" cy="3359246"/>
+            </a:xfrm>
+            <a:prstGeom prst="rect">
+              <a:avLst/>
+            </a:prstGeom>
+          </p:spPr>
+        </p:pic>
+        <p:sp>
+          <p:nvSpPr>
+            <p:cNvPr id="7" name="Rectangle 17">
+              <a:extLst>
+                <a:ext uri="{FF2B5EF4-FFF2-40B4-BE49-F238E27FC236}">
+                  <a16:creationId xmlns:a16="http://schemas.microsoft.com/office/drawing/2014/main" id="{0BD67B1E-63FF-FBE8-E7CD-3F156A445685}"/>
+                </a:ext>
+              </a:extLst>
+            </p:cNvPr>
+            <p:cNvSpPr/>
+            <p:nvPr/>
+          </p:nvSpPr>
+          <p:spPr>
+            <a:xfrm>
+              <a:off x="914400" y="2194676"/>
+              <a:ext cx="3181350" cy="338554"/>
+            </a:xfrm>
+            <a:prstGeom prst="rect">
+              <a:avLst/>
+            </a:prstGeom>
+          </p:spPr>
+          <p:txBody>
+            <a:bodyPr wrap="square">
+              <a:spAutoFit/>
+            </a:bodyPr>
+            <a:lstStyle/>
+            <a:p>
+              <a:pPr algn="ctr"/>
+              <a:r>
+                <a:rPr lang="pt-BR" sz="1600" b="1" dirty="0"/>
+                <a:t>Função heaviside</a:t>
+              </a:r>
+            </a:p>
+          </p:txBody>
+        </p:sp>
+        <mc:AlternateContent xmlns:mc="http://schemas.openxmlformats.org/markup-compatibility/2006" xmlns:a14="http://schemas.microsoft.com/office/drawing/2010/main">
+          <mc:Choice Requires="a14">
+            <p:sp>
+              <p:nvSpPr>
+                <p:cNvPr id="8" name="CaixaDeTexto 7">
+                  <a:extLst>
+                    <a:ext uri="{FF2B5EF4-FFF2-40B4-BE49-F238E27FC236}">
+                      <a16:creationId xmlns:a16="http://schemas.microsoft.com/office/drawing/2014/main" id="{2214E5AD-266E-78D1-4ED8-C90A5A01F50C}"/>
+                    </a:ext>
+                  </a:extLst>
+                </p:cNvPr>
+                <p:cNvSpPr txBox="1"/>
+                <p:nvPr/>
+              </p:nvSpPr>
+              <p:spPr>
+                <a:xfrm>
+                  <a:off x="1828798" y="5622222"/>
+                  <a:ext cx="1266826" cy="369332"/>
+                </a:xfrm>
+                <a:prstGeom prst="rect">
+                  <a:avLst/>
+                </a:prstGeom>
+                <a:solidFill>
+                  <a:schemeClr val="bg1"/>
+                </a:solidFill>
+              </p:spPr>
+              <p:txBody>
+                <a:bodyPr wrap="square">
+                  <a:spAutoFit/>
+                </a:bodyPr>
+                <a:lstStyle/>
+                <a:p>
+                  <a:pPr/>
+                  <a14:m>
+                    <m:oMathPara xmlns:m="http://schemas.openxmlformats.org/officeDocument/2006/math">
+                      <m:oMathParaPr>
+                        <m:jc m:val="centerGroup"/>
+                      </m:oMathParaPr>
+                      <m:oMath xmlns:m="http://schemas.openxmlformats.org/officeDocument/2006/math">
+                        <m:r>
+                          <a:rPr lang="pt-BR" b="0" i="1" smtClean="0">
+                            <a:latin typeface="Cambria Math" panose="02040503050406030204" pitchFamily="18" charset="0"/>
+                          </a:rPr>
+                          <m:t>𝑔</m:t>
+                        </m:r>
+                        <m:r>
+                          <a:rPr lang="pt-BR" b="0" i="1" smtClean="0">
+                            <a:latin typeface="Cambria Math" panose="02040503050406030204" pitchFamily="18" charset="0"/>
+                          </a:rPr>
+                          <m:t>(</m:t>
+                        </m:r>
+                        <m:r>
+                          <a:rPr lang="pt-BR" b="1" i="1" smtClean="0">
+                            <a:latin typeface="Cambria Math" panose="02040503050406030204" pitchFamily="18" charset="0"/>
+                          </a:rPr>
+                          <m:t>𝒙</m:t>
+                        </m:r>
+                        <m:r>
+                          <a:rPr lang="pt-BR" b="0" i="1" smtClean="0">
+                            <a:latin typeface="Cambria Math" panose="02040503050406030204" pitchFamily="18" charset="0"/>
+                          </a:rPr>
+                          <m:t>)</m:t>
+                        </m:r>
+                      </m:oMath>
+                    </m:oMathPara>
+                  </a14:m>
+                  <a:endParaRPr lang="pt-BR" dirty="0"/>
+                </a:p>
+              </p:txBody>
+            </p:sp>
+          </mc:Choice>
+          <mc:Fallback xmlns="">
+            <p:sp>
+              <p:nvSpPr>
+                <p:cNvPr id="8" name="CaixaDeTexto 7">
+                  <a:extLst>
+                    <a:ext uri="{FF2B5EF4-FFF2-40B4-BE49-F238E27FC236}">
+                      <a16:creationId xmlns:a16="http://schemas.microsoft.com/office/drawing/2014/main" id="{AF29DA71-4710-10E0-14BD-1B1438F22A8F}"/>
+                    </a:ext>
+                  </a:extLst>
+                </p:cNvPr>
+                <p:cNvSpPr txBox="1">
+                  <a:spLocks noRot="1" noChangeAspect="1" noMove="1" noResize="1" noEditPoints="1" noAdjustHandles="1" noChangeArrowheads="1" noChangeShapeType="1" noTextEdit="1"/>
+                </p:cNvSpPr>
+                <p:nvPr/>
+              </p:nvSpPr>
+              <p:spPr>
+                <a:xfrm>
+                  <a:off x="1828798" y="5622222"/>
+                  <a:ext cx="1266826" cy="369332"/>
+                </a:xfrm>
+                <a:prstGeom prst="rect">
+                  <a:avLst/>
+                </a:prstGeom>
+                <a:blipFill>
+                  <a:blip r:embed="rId5"/>
+                  <a:stretch>
+                    <a:fillRect b="-13115"/>
+                  </a:stretch>
+                </a:blipFill>
+              </p:spPr>
+              <p:txBody>
+                <a:bodyPr/>
+                <a:lstStyle/>
+                <a:p>
+                  <a:r>
+                    <a:rPr lang="pt-BR">
+                      <a:noFill/>
+                    </a:rPr>
+                    <a:t> </a:t>
+                  </a:r>
+                </a:p>
+              </p:txBody>
+            </p:sp>
+          </mc:Fallback>
+        </mc:AlternateContent>
+        <mc:AlternateContent xmlns:mc="http://schemas.openxmlformats.org/markup-compatibility/2006" xmlns:a14="http://schemas.microsoft.com/office/drawing/2010/main">
+          <mc:Choice Requires="a14">
+            <p:sp>
+              <p:nvSpPr>
+                <p:cNvPr id="9" name="CaixaDeTexto 8">
+                  <a:extLst>
+                    <a:ext uri="{FF2B5EF4-FFF2-40B4-BE49-F238E27FC236}">
+                      <a16:creationId xmlns:a16="http://schemas.microsoft.com/office/drawing/2014/main" id="{F7FB3B1C-2D7B-FB91-00B6-C8572C8292C6}"/>
+                    </a:ext>
+                  </a:extLst>
+                </p:cNvPr>
+                <p:cNvSpPr txBox="1"/>
+                <p:nvPr/>
+              </p:nvSpPr>
+              <p:spPr>
+                <a:xfrm rot="16200000">
+                  <a:off x="-67745" y="3753921"/>
+                  <a:ext cx="1019175" cy="369332"/>
+                </a:xfrm>
+                <a:prstGeom prst="rect">
+                  <a:avLst/>
+                </a:prstGeom>
+                <a:solidFill>
+                  <a:schemeClr val="bg1"/>
+                </a:solidFill>
+              </p:spPr>
+              <p:txBody>
+                <a:bodyPr wrap="square">
+                  <a:spAutoFit/>
+                </a:bodyPr>
+                <a:lstStyle/>
+                <a:p>
+                  <a:pPr/>
+                  <a14:m>
+                    <m:oMathPara xmlns:m="http://schemas.openxmlformats.org/officeDocument/2006/math">
+                      <m:oMathParaPr>
+                        <m:jc m:val="centerGroup"/>
+                      </m:oMathParaPr>
+                      <m:oMath xmlns:m="http://schemas.openxmlformats.org/officeDocument/2006/math">
+                        <m:r>
+                          <a:rPr lang="pt-BR" b="0" i="1" smtClean="0">
+                            <a:latin typeface="Cambria Math" panose="02040503050406030204" pitchFamily="18" charset="0"/>
+                          </a:rPr>
+                          <m:t>𝑓</m:t>
+                        </m:r>
+                        <m:d>
+                          <m:dPr>
+                            <m:ctrlPr>
+                              <a:rPr lang="pt-BR" i="1">
+                                <a:latin typeface="Cambria Math" panose="02040503050406030204" pitchFamily="18" charset="0"/>
+                              </a:rPr>
+                            </m:ctrlPr>
+                          </m:dPr>
+                          <m:e>
+                            <m:r>
+                              <a:rPr lang="pt-BR" b="0" i="1" smtClean="0">
+                                <a:latin typeface="Cambria Math" panose="02040503050406030204" pitchFamily="18" charset="0"/>
+                              </a:rPr>
+                              <m:t>𝑔</m:t>
+                            </m:r>
+                            <m:r>
+                              <a:rPr lang="pt-BR" b="0" i="1" smtClean="0">
+                                <a:latin typeface="Cambria Math" panose="02040503050406030204" pitchFamily="18" charset="0"/>
+                              </a:rPr>
+                              <m:t>(</m:t>
+                            </m:r>
+                            <m:r>
+                              <a:rPr lang="pt-BR" b="1" i="1" smtClean="0">
+                                <a:latin typeface="Cambria Math" panose="02040503050406030204" pitchFamily="18" charset="0"/>
+                              </a:rPr>
+                              <m:t>𝒙</m:t>
+                            </m:r>
+                            <m:r>
+                              <a:rPr lang="pt-BR" b="0" i="1" smtClean="0">
+                                <a:latin typeface="Cambria Math" panose="02040503050406030204" pitchFamily="18" charset="0"/>
+                              </a:rPr>
+                              <m:t>)</m:t>
+                            </m:r>
+                          </m:e>
+                        </m:d>
+                      </m:oMath>
+                    </m:oMathPara>
+                  </a14:m>
+                  <a:endParaRPr lang="pt-BR" dirty="0"/>
+                </a:p>
+              </p:txBody>
+            </p:sp>
+          </mc:Choice>
+          <mc:Fallback xmlns="">
+            <p:sp>
+              <p:nvSpPr>
+                <p:cNvPr id="9" name="CaixaDeTexto 8">
+                  <a:extLst>
+                    <a:ext uri="{FF2B5EF4-FFF2-40B4-BE49-F238E27FC236}">
+                      <a16:creationId xmlns:a16="http://schemas.microsoft.com/office/drawing/2014/main" id="{60F2DECC-8C19-18FE-B4F8-959EE96B8D82}"/>
+                    </a:ext>
+                  </a:extLst>
+                </p:cNvPr>
+                <p:cNvSpPr txBox="1">
+                  <a:spLocks noRot="1" noChangeAspect="1" noMove="1" noResize="1" noEditPoints="1" noAdjustHandles="1" noChangeArrowheads="1" noChangeShapeType="1" noTextEdit="1"/>
+                </p:cNvSpPr>
+                <p:nvPr/>
+              </p:nvSpPr>
+              <p:spPr>
+                <a:xfrm rot="16200000">
+                  <a:off x="-67745" y="3753921"/>
+                  <a:ext cx="1019175" cy="369332"/>
+                </a:xfrm>
+                <a:prstGeom prst="rect">
+                  <a:avLst/>
+                </a:prstGeom>
+                <a:blipFill>
+                  <a:blip r:embed="rId6"/>
+                  <a:stretch>
+                    <a:fillRect r="-13115"/>
+                  </a:stretch>
+                </a:blipFill>
+              </p:spPr>
+              <p:txBody>
+                <a:bodyPr/>
+                <a:lstStyle/>
+                <a:p>
+                  <a:r>
+                    <a:rPr lang="pt-BR">
+                      <a:noFill/>
+                    </a:rPr>
+                    <a:t> </a:t>
+                  </a:r>
+                </a:p>
+              </p:txBody>
+            </p:sp>
+          </mc:Fallback>
+        </mc:AlternateContent>
+      </p:grpSp>
+    </p:spTree>
+    <p:extLst>
+      <p:ext uri="{BB962C8B-B14F-4D97-AF65-F5344CB8AC3E}">
+        <p14:creationId xmlns:p14="http://schemas.microsoft.com/office/powerpoint/2010/main" val="2479616250"/>
+      </p:ext>
+    </p:extLst>
+  </p:cSld>
+  <p:clrMapOvr>
+    <a:masterClrMapping/>
+  </p:clrMapOvr>
+</p:sld>
+</file>
+
+<file path=ppt/slides/slide26.xml><?xml version="1.0" encoding="utf-8"?>
+<p:sld xmlns:a="http://schemas.openxmlformats.org/drawingml/2006/main" xmlns:r="http://schemas.openxmlformats.org/officeDocument/2006/relationships" xmlns:p="http://schemas.openxmlformats.org/presentationml/2006/main">
+  <p:cSld>
+    <p:spTree>
+      <p:nvGrpSpPr>
+        <p:cNvPr id="1" name=""/>
+        <p:cNvGrpSpPr/>
+        <p:nvPr/>
+      </p:nvGrpSpPr>
+      <p:grpSpPr>
+        <a:xfrm>
+          <a:off x="0" y="0"/>
+          <a:ext cx="0" cy="0"/>
+          <a:chOff x="0" y="0"/>
+          <a:chExt cx="0" cy="0"/>
+        </a:xfrm>
+      </p:grpSpPr>
+      <p:sp>
+        <p:nvSpPr>
+          <p:cNvPr id="2" name="Title 1"/>
+          <p:cNvSpPr>
+            <a:spLocks noGrp="1"/>
+          </p:cNvSpPr>
+          <p:nvPr>
+            <p:ph type="title"/>
+          </p:nvPr>
+        </p:nvSpPr>
+        <p:spPr/>
+        <p:txBody>
+          <a:bodyPr/>
+          <a:lstStyle/>
+          <a:p>
+            <a:r>
+              <a:rPr lang="pt-BR" dirty="0"/>
+              <a:t>Classificação com limiar de decisão rígido</a:t>
+            </a:r>
+          </a:p>
+        </p:txBody>
+      </p:sp>
+      <p:sp>
+        <p:nvSpPr>
+          <p:cNvPr id="3" name="Content Placeholder 2"/>
+          <p:cNvSpPr>
+            <a:spLocks noGrp="1"/>
+          </p:cNvSpPr>
+          <p:nvPr>
+            <p:ph idx="1"/>
+          </p:nvPr>
         </p:nvSpPr>
         <p:spPr>
           <a:xfrm>
-            <a:off x="1431533" y="2720526"/>
-            <a:ext cx="9144000" cy="1029541"/>
+            <a:off x="5464628" y="1825624"/>
+            <a:ext cx="6651171" cy="5032376"/>
+          </a:xfrm>
+        </p:spPr>
+        <p:txBody>
+          <a:bodyPr>
+            <a:normAutofit/>
+          </a:bodyPr>
+          <a:lstStyle/>
+          <a:p>
+            <a:r>
+              <a:rPr lang="pt-BR" dirty="0"/>
+              <a:t>Outro problema é a </a:t>
+            </a:r>
+            <a:r>
+              <a:rPr lang="pt-BR" b="1" dirty="0">
+                <a:solidFill>
+                  <a:srgbClr val="00B050"/>
+                </a:solidFill>
+              </a:rPr>
+              <a:t>falta de informação sobre a confiança</a:t>
+            </a:r>
+            <a:r>
+              <a:rPr lang="pt-BR" dirty="0"/>
+              <a:t> de uma classificação.</a:t>
+            </a:r>
+          </a:p>
+          <a:p>
+            <a:r>
+              <a:rPr lang="pt-BR" dirty="0"/>
+              <a:t>Na figura ao lado, dois exemplos estão bem próximos da </a:t>
+            </a:r>
+            <a:r>
+              <a:rPr lang="pt-BR" b="1" dirty="0"/>
+              <a:t>fronteira de decisão </a:t>
+            </a:r>
+            <a:r>
+              <a:rPr lang="pt-BR" dirty="0"/>
+              <a:t>enquanto outros dois estão bem distantes.</a:t>
+            </a:r>
+          </a:p>
+          <a:p>
+            <a:r>
+              <a:rPr lang="pt-BR" dirty="0"/>
+              <a:t>Como o classificador com </a:t>
+            </a:r>
+            <a:r>
+              <a:rPr lang="pt-BR" b="1" dirty="0"/>
+              <a:t>limiar de decisão rígido </a:t>
+            </a:r>
+            <a:r>
+              <a:rPr lang="pt-BR" dirty="0"/>
+              <a:t>classificaria esses exemplos?</a:t>
+            </a:r>
+          </a:p>
+        </p:txBody>
+      </p:sp>
+      <p:pic>
+        <p:nvPicPr>
+          <p:cNvPr id="5" name="Imagem 4">
+            <a:extLst>
+              <a:ext uri="{FF2B5EF4-FFF2-40B4-BE49-F238E27FC236}">
+                <a16:creationId xmlns:a16="http://schemas.microsoft.com/office/drawing/2014/main" id="{5FD9BD3A-EECA-05F4-C300-1441F18AB71D}"/>
+              </a:ext>
+            </a:extLst>
+          </p:cNvPr>
+          <p:cNvPicPr>
+            <a:picLocks noChangeAspect="1"/>
+          </p:cNvPicPr>
+          <p:nvPr/>
+        </p:nvPicPr>
+        <p:blipFill rotWithShape="1">
+          <a:blip r:embed="rId2" cstate="print">
+            <a:extLst>
+              <a:ext uri="{28A0092B-C50C-407E-A947-70E740481C1C}">
+                <a14:useLocalDpi xmlns:a14="http://schemas.microsoft.com/office/drawing/2010/main" val="0"/>
+              </a:ext>
+            </a:extLst>
+          </a:blip>
+          <a:srcRect l="6649" r="7298"/>
+          <a:stretch/>
+        </p:blipFill>
+        <p:spPr>
+          <a:xfrm>
+            <a:off x="315379" y="2328616"/>
+            <a:ext cx="4214207" cy="3685588"/>
           </a:xfrm>
           <a:prstGeom prst="rect">
             <a:avLst/>
           </a:prstGeom>
         </p:spPr>
-        <p:txBody>
-          <a:bodyPr vert="horz" lIns="91440" tIns="45720" rIns="91440" bIns="45720" rtlCol="0" anchor="ctr">
-            <a:normAutofit/>
-          </a:bodyPr>
-          <a:lstStyle>
-            <a:lvl1pPr algn="l" defTabSz="914400" rtl="0" eaLnBrk="1" latinLnBrk="0" hangingPunct="1">
-              <a:lnSpc>
-                <a:spcPct val="90000"/>
-              </a:lnSpc>
-              <a:spcBef>
-                <a:spcPct val="0"/>
-              </a:spcBef>
-              <a:buNone/>
-              <a:defRPr sz="4400" kern="1200">
-                <a:solidFill>
-                  <a:schemeClr val="tx1"/>
-                </a:solidFill>
-                <a:latin typeface="+mj-lt"/>
-                <a:ea typeface="+mj-ea"/>
-                <a:cs typeface="+mj-cs"/>
-              </a:defRPr>
-            </a:lvl1pPr>
-          </a:lstStyle>
-          <a:p>
-            <a:pPr algn="ctr"/>
-            <a:r>
-              <a:rPr lang="pt-BR" sz="6600" dirty="0"/>
-              <a:t>Obrigado!</a:t>
-            </a:r>
-            <a:endParaRPr lang="pt-BR" sz="6600" b="1" i="1" dirty="0"/>
-          </a:p>
-        </p:txBody>
-      </p:sp>
+      </p:pic>
     </p:spTree>
     <p:extLst>
       <p:ext uri="{BB962C8B-B14F-4D97-AF65-F5344CB8AC3E}">
-        <p14:creationId xmlns:p14="http://schemas.microsoft.com/office/powerpoint/2010/main" val="2655704619"/>
+        <p14:creationId xmlns:p14="http://schemas.microsoft.com/office/powerpoint/2010/main" val="2498397298"/>
+      </p:ext>
+    </p:extLst>
+  </p:cSld>
+  <p:clrMapOvr>
+    <a:masterClrMapping/>
+  </p:clrMapOvr>
+</p:sld>
+</file>
+
+<file path=ppt/slides/slide27.xml><?xml version="1.0" encoding="utf-8"?>
+<p:sld xmlns:a="http://schemas.openxmlformats.org/drawingml/2006/main" xmlns:r="http://schemas.openxmlformats.org/officeDocument/2006/relationships" xmlns:p="http://schemas.openxmlformats.org/presentationml/2006/main">
+  <p:cSld>
+    <p:spTree>
+      <p:nvGrpSpPr>
+        <p:cNvPr id="1" name=""/>
+        <p:cNvGrpSpPr/>
+        <p:nvPr/>
+      </p:nvGrpSpPr>
+      <p:grpSpPr>
+        <a:xfrm>
+          <a:off x="0" y="0"/>
+          <a:ext cx="0" cy="0"/>
+          <a:chOff x="0" y="0"/>
+          <a:chExt cx="0" cy="0"/>
+        </a:xfrm>
+      </p:grpSpPr>
+      <p:sp>
+        <p:nvSpPr>
+          <p:cNvPr id="2" name="Title 1"/>
+          <p:cNvSpPr>
+            <a:spLocks noGrp="1"/>
+          </p:cNvSpPr>
+          <p:nvPr>
+            <p:ph type="title"/>
+          </p:nvPr>
+        </p:nvSpPr>
+        <p:spPr/>
+        <p:txBody>
+          <a:bodyPr/>
+          <a:lstStyle/>
+          <a:p>
+            <a:r>
+              <a:rPr lang="pt-BR" dirty="0"/>
+              <a:t>Classificação com limiar de decisão rígido</a:t>
+            </a:r>
+          </a:p>
+        </p:txBody>
+      </p:sp>
+      <mc:AlternateContent xmlns:mc="http://schemas.openxmlformats.org/markup-compatibility/2006">
+        <mc:Choice xmlns:a14="http://schemas.microsoft.com/office/drawing/2010/main" Requires="a14">
+          <p:sp>
+            <p:nvSpPr>
+              <p:cNvPr id="3" name="Content Placeholder 2"/>
+              <p:cNvSpPr>
+                <a:spLocks noGrp="1"/>
+              </p:cNvSpPr>
+              <p:nvPr>
+                <p:ph idx="1"/>
+              </p:nvPr>
+            </p:nvSpPr>
+            <p:spPr>
+              <a:xfrm>
+                <a:off x="5138805" y="1825624"/>
+                <a:ext cx="6902774" cy="5032376"/>
+              </a:xfrm>
+            </p:spPr>
+            <p:txBody>
+              <a:bodyPr>
+                <a:normAutofit/>
+              </a:bodyPr>
+              <a:lstStyle/>
+              <a:p>
+                <a:r>
+                  <a:rPr lang="pt-BR" dirty="0"/>
+                  <a:t>Olhando para a função degrau, percebemos que o classificador faz predições </a:t>
+                </a:r>
+                <a:r>
+                  <a:rPr lang="pt-BR" b="1" dirty="0">
+                    <a:solidFill>
+                      <a:srgbClr val="7030A0"/>
+                    </a:solidFill>
+                  </a:rPr>
+                  <a:t>muito confiantes</a:t>
+                </a:r>
+                <a:r>
+                  <a:rPr lang="pt-BR" dirty="0">
+                    <a:solidFill>
+                      <a:srgbClr val="7030A0"/>
+                    </a:solidFill>
+                  </a:rPr>
+                  <a:t> </a:t>
+                </a:r>
+                <a:r>
+                  <a:rPr lang="pt-BR" dirty="0"/>
+                  <a:t>sempre iguais 0 para </a:t>
+                </a:r>
+                <a14:m>
+                  <m:oMath xmlns:m="http://schemas.openxmlformats.org/officeDocument/2006/math">
+                    <m:r>
+                      <a:rPr lang="pt-BR" b="0" i="1" smtClean="0">
+                        <a:latin typeface="Cambria Math" panose="02040503050406030204" pitchFamily="18" charset="0"/>
+                      </a:rPr>
+                      <m:t>𝑔</m:t>
+                    </m:r>
+                    <m:d>
+                      <m:dPr>
+                        <m:ctrlPr>
+                          <a:rPr lang="pt-BR" b="0" i="1" smtClean="0">
+                            <a:latin typeface="Cambria Math" panose="02040503050406030204" pitchFamily="18" charset="0"/>
+                          </a:rPr>
+                        </m:ctrlPr>
+                      </m:dPr>
+                      <m:e>
+                        <m:r>
+                          <a:rPr lang="pt-BR" b="1" i="1" smtClean="0">
+                            <a:latin typeface="Cambria Math" panose="02040503050406030204" pitchFamily="18" charset="0"/>
+                          </a:rPr>
+                          <m:t>𝒙</m:t>
+                        </m:r>
+                      </m:e>
+                    </m:d>
+                    <m:r>
+                      <a:rPr lang="pt-BR" b="0" i="1" smtClean="0">
+                        <a:latin typeface="Cambria Math" panose="02040503050406030204" pitchFamily="18" charset="0"/>
+                      </a:rPr>
+                      <m:t>&lt;0</m:t>
+                    </m:r>
+                  </m:oMath>
+                </a14:m>
+                <a:r>
+                  <a:rPr lang="pt-BR" dirty="0"/>
+                  <a:t> e iguais a 1 quando </a:t>
+                </a:r>
+                <a14:m>
+                  <m:oMath xmlns:m="http://schemas.openxmlformats.org/officeDocument/2006/math">
+                    <m:r>
+                      <a:rPr lang="pt-BR" i="1">
+                        <a:latin typeface="Cambria Math" panose="02040503050406030204" pitchFamily="18" charset="0"/>
+                      </a:rPr>
+                      <m:t>𝑔</m:t>
+                    </m:r>
+                    <m:d>
+                      <m:dPr>
+                        <m:ctrlPr>
+                          <a:rPr lang="pt-BR" i="1">
+                            <a:latin typeface="Cambria Math" panose="02040503050406030204" pitchFamily="18" charset="0"/>
+                          </a:rPr>
+                        </m:ctrlPr>
+                      </m:dPr>
+                      <m:e>
+                        <m:r>
+                          <a:rPr lang="pt-BR" b="1" i="1">
+                            <a:latin typeface="Cambria Math" panose="02040503050406030204" pitchFamily="18" charset="0"/>
+                          </a:rPr>
+                          <m:t>𝒙</m:t>
+                        </m:r>
+                      </m:e>
+                    </m:d>
+                    <m:r>
+                      <a:rPr lang="pt-BR" b="0" i="1" smtClean="0">
+                        <a:latin typeface="Cambria Math" panose="02040503050406030204" pitchFamily="18" charset="0"/>
+                      </a:rPr>
+                      <m:t>&gt;0</m:t>
+                    </m:r>
+                  </m:oMath>
+                </a14:m>
+                <a:r>
+                  <a:rPr lang="pt-BR" dirty="0"/>
+                  <a:t>, </a:t>
+                </a:r>
+                <a:r>
+                  <a:rPr lang="pt-BR" b="1" dirty="0">
+                    <a:solidFill>
+                      <a:srgbClr val="00B050"/>
+                    </a:solidFill>
+                  </a:rPr>
+                  <a:t>independente se o exemplo está distante ou próximo da fronteira de decisão</a:t>
+                </a:r>
+                <a:r>
+                  <a:rPr lang="pt-BR" dirty="0"/>
+                  <a:t>.</a:t>
+                </a:r>
+              </a:p>
+              <a:p>
+                <a:pPr lvl="1">
+                  <a:buFont typeface="Wingdings" panose="05000000000000000000" pitchFamily="2" charset="2"/>
+                  <a:buChar char="§"/>
+                </a:pPr>
+                <a:r>
+                  <a:rPr lang="pt-BR" dirty="0"/>
+                  <a:t>Os dois pontos azuis são classificados como pertencentes à classe negativa.</a:t>
+                </a:r>
+              </a:p>
+              <a:p>
+                <a:pPr lvl="1">
+                  <a:buFont typeface="Wingdings" panose="05000000000000000000" pitchFamily="2" charset="2"/>
+                  <a:buChar char="§"/>
+                </a:pPr>
+                <a:r>
+                  <a:rPr lang="pt-BR" dirty="0"/>
+                  <a:t>Os dois triângulos vermelhos são classificados como pertencentes à classe positiva.</a:t>
+                </a:r>
+              </a:p>
+              <a:p>
+                <a:pPr marL="0" indent="0">
+                  <a:buNone/>
+                </a:pPr>
+                <a:endParaRPr lang="pt-BR" dirty="0"/>
+              </a:p>
+            </p:txBody>
+          </p:sp>
+        </mc:Choice>
+        <mc:Fallback>
+          <p:sp>
+            <p:nvSpPr>
+              <p:cNvPr id="3" name="Content Placeholder 2"/>
+              <p:cNvSpPr>
+                <a:spLocks noGrp="1" noRot="1" noChangeAspect="1" noMove="1" noResize="1" noEditPoints="1" noAdjustHandles="1" noChangeArrowheads="1" noChangeShapeType="1" noTextEdit="1"/>
+              </p:cNvSpPr>
+              <p:nvPr>
+                <p:ph idx="1"/>
+              </p:nvPr>
+            </p:nvSpPr>
+            <p:spPr>
+              <a:xfrm>
+                <a:off x="5138805" y="1825624"/>
+                <a:ext cx="6902774" cy="5032376"/>
+              </a:xfrm>
+              <a:blipFill>
+                <a:blip r:embed="rId3"/>
+                <a:stretch>
+                  <a:fillRect l="-1590" t="-1937" r="-530"/>
+                </a:stretch>
+              </a:blipFill>
+            </p:spPr>
+            <p:txBody>
+              <a:bodyPr/>
+              <a:lstStyle/>
+              <a:p>
+                <a:r>
+                  <a:rPr lang="en-US">
+                    <a:noFill/>
+                  </a:rPr>
+                  <a:t> </a:t>
+                </a:r>
+              </a:p>
+            </p:txBody>
+          </p:sp>
+        </mc:Fallback>
+      </mc:AlternateContent>
+      <p:grpSp>
+        <p:nvGrpSpPr>
+          <p:cNvPr id="17" name="Agrupar 16">
+            <a:extLst>
+              <a:ext uri="{FF2B5EF4-FFF2-40B4-BE49-F238E27FC236}">
+                <a16:creationId xmlns:a16="http://schemas.microsoft.com/office/drawing/2014/main" id="{852A6A1D-DA43-B970-7D3B-CD86E9299F8C}"/>
+              </a:ext>
+            </a:extLst>
+          </p:cNvPr>
+          <p:cNvGrpSpPr/>
+          <p:nvPr/>
+        </p:nvGrpSpPr>
+        <p:grpSpPr>
+          <a:xfrm>
+            <a:off x="858078" y="1642941"/>
+            <a:ext cx="3354287" cy="5215059"/>
+            <a:chOff x="453276" y="1631131"/>
+            <a:chExt cx="3354287" cy="5215059"/>
+          </a:xfrm>
+        </p:grpSpPr>
+        <p:pic>
+          <p:nvPicPr>
+            <p:cNvPr id="13" name="Imagem 12">
+              <a:extLst>
+                <a:ext uri="{FF2B5EF4-FFF2-40B4-BE49-F238E27FC236}">
+                  <a16:creationId xmlns:a16="http://schemas.microsoft.com/office/drawing/2014/main" id="{4B4DD64C-FB97-65B7-AD47-6491E6E5E7F1}"/>
+                </a:ext>
+              </a:extLst>
+            </p:cNvPr>
+            <p:cNvPicPr>
+              <a:picLocks noChangeAspect="1"/>
+            </p:cNvPicPr>
+            <p:nvPr/>
+          </p:nvPicPr>
+          <p:blipFill rotWithShape="1">
+            <a:blip r:embed="rId4" cstate="print">
+              <a:extLst>
+                <a:ext uri="{28A0092B-C50C-407E-A947-70E740481C1C}">
+                  <a14:useLocalDpi xmlns:a14="http://schemas.microsoft.com/office/drawing/2010/main" val="0"/>
+                </a:ext>
+              </a:extLst>
+            </a:blip>
+            <a:srcRect l="7607" t="5177" r="7347"/>
+            <a:stretch/>
+          </p:blipFill>
+          <p:spPr>
+            <a:xfrm>
+              <a:off x="844653" y="1631131"/>
+              <a:ext cx="2962910" cy="2297801"/>
+            </a:xfrm>
+            <a:prstGeom prst="rect">
+              <a:avLst/>
+            </a:prstGeom>
+          </p:spPr>
+        </p:pic>
+        <p:pic>
+          <p:nvPicPr>
+            <p:cNvPr id="6" name="Picture 16">
+              <a:extLst>
+                <a:ext uri="{FF2B5EF4-FFF2-40B4-BE49-F238E27FC236}">
+                  <a16:creationId xmlns:a16="http://schemas.microsoft.com/office/drawing/2014/main" id="{256166DD-0A30-8757-3512-E3DEA440F495}"/>
+                </a:ext>
+              </a:extLst>
+            </p:cNvPr>
+            <p:cNvPicPr>
+              <a:picLocks noChangeAspect="1"/>
+            </p:cNvPicPr>
+            <p:nvPr/>
+          </p:nvPicPr>
+          <p:blipFill rotWithShape="1">
+            <a:blip r:embed="rId5"/>
+            <a:srcRect l="3046" t="5896" r="8832"/>
+            <a:stretch/>
+          </p:blipFill>
+          <p:spPr>
+            <a:xfrm>
+              <a:off x="638472" y="4049377"/>
+              <a:ext cx="2831997" cy="2628367"/>
+            </a:xfrm>
+            <a:prstGeom prst="rect">
+              <a:avLst/>
+            </a:prstGeom>
+          </p:spPr>
+        </p:pic>
+        <mc:AlternateContent xmlns:mc="http://schemas.openxmlformats.org/markup-compatibility/2006" xmlns:a14="http://schemas.microsoft.com/office/drawing/2010/main">
+          <mc:Choice Requires="a14">
+            <p:sp>
+              <p:nvSpPr>
+                <p:cNvPr id="8" name="CaixaDeTexto 7">
+                  <a:extLst>
+                    <a:ext uri="{FF2B5EF4-FFF2-40B4-BE49-F238E27FC236}">
+                      <a16:creationId xmlns:a16="http://schemas.microsoft.com/office/drawing/2014/main" id="{FE29F1DF-B6FA-783E-169F-125859E9A35D}"/>
+                    </a:ext>
+                  </a:extLst>
+                </p:cNvPr>
+                <p:cNvSpPr txBox="1"/>
+                <p:nvPr/>
+              </p:nvSpPr>
+              <p:spPr>
+                <a:xfrm>
+                  <a:off x="1564912" y="6538413"/>
+                  <a:ext cx="1266826" cy="307777"/>
+                </a:xfrm>
+                <a:prstGeom prst="rect">
+                  <a:avLst/>
+                </a:prstGeom>
+                <a:solidFill>
+                  <a:schemeClr val="bg1"/>
+                </a:solidFill>
+              </p:spPr>
+              <p:txBody>
+                <a:bodyPr wrap="square">
+                  <a:spAutoFit/>
+                </a:bodyPr>
+                <a:lstStyle/>
+                <a:p>
+                  <a:pPr/>
+                  <a14:m>
+                    <m:oMathPara xmlns:m="http://schemas.openxmlformats.org/officeDocument/2006/math">
+                      <m:oMathParaPr>
+                        <m:jc m:val="centerGroup"/>
+                      </m:oMathParaPr>
+                      <m:oMath xmlns:m="http://schemas.openxmlformats.org/officeDocument/2006/math">
+                        <m:r>
+                          <a:rPr lang="pt-BR" sz="1400" b="0" i="1" smtClean="0">
+                            <a:latin typeface="Cambria Math" panose="02040503050406030204" pitchFamily="18" charset="0"/>
+                          </a:rPr>
+                          <m:t>𝑔</m:t>
+                        </m:r>
+                        <m:r>
+                          <a:rPr lang="pt-BR" sz="1400" b="0" i="1" smtClean="0">
+                            <a:latin typeface="Cambria Math" panose="02040503050406030204" pitchFamily="18" charset="0"/>
+                          </a:rPr>
+                          <m:t>(</m:t>
+                        </m:r>
+                        <m:r>
+                          <a:rPr lang="pt-BR" sz="1400" b="1" i="1" smtClean="0">
+                            <a:latin typeface="Cambria Math" panose="02040503050406030204" pitchFamily="18" charset="0"/>
+                          </a:rPr>
+                          <m:t>𝒙</m:t>
+                        </m:r>
+                        <m:r>
+                          <a:rPr lang="pt-BR" sz="1400" b="0" i="1" smtClean="0">
+                            <a:latin typeface="Cambria Math" panose="02040503050406030204" pitchFamily="18" charset="0"/>
+                          </a:rPr>
+                          <m:t>)</m:t>
+                        </m:r>
+                      </m:oMath>
+                    </m:oMathPara>
+                  </a14:m>
+                  <a:endParaRPr lang="pt-BR" sz="1400" dirty="0"/>
+                </a:p>
+              </p:txBody>
+            </p:sp>
+          </mc:Choice>
+          <mc:Fallback xmlns="">
+            <p:sp>
+              <p:nvSpPr>
+                <p:cNvPr id="8" name="CaixaDeTexto 7">
+                  <a:extLst>
+                    <a:ext uri="{FF2B5EF4-FFF2-40B4-BE49-F238E27FC236}">
+                      <a16:creationId xmlns:a16="http://schemas.microsoft.com/office/drawing/2014/main" id="{FE29F1DF-B6FA-783E-169F-125859E9A35D}"/>
+                    </a:ext>
+                  </a:extLst>
+                </p:cNvPr>
+                <p:cNvSpPr txBox="1">
+                  <a:spLocks noRot="1" noChangeAspect="1" noMove="1" noResize="1" noEditPoints="1" noAdjustHandles="1" noChangeArrowheads="1" noChangeShapeType="1" noTextEdit="1"/>
+                </p:cNvSpPr>
+                <p:nvPr/>
+              </p:nvSpPr>
+              <p:spPr>
+                <a:xfrm>
+                  <a:off x="1564912" y="6538413"/>
+                  <a:ext cx="1266826" cy="307777"/>
+                </a:xfrm>
+                <a:prstGeom prst="rect">
+                  <a:avLst/>
+                </a:prstGeom>
+                <a:blipFill>
+                  <a:blip r:embed="rId6"/>
+                  <a:stretch>
+                    <a:fillRect b="-8000"/>
+                  </a:stretch>
+                </a:blipFill>
+              </p:spPr>
+              <p:txBody>
+                <a:bodyPr/>
+                <a:lstStyle/>
+                <a:p>
+                  <a:r>
+                    <a:rPr lang="pt-BR">
+                      <a:noFill/>
+                    </a:rPr>
+                    <a:t> </a:t>
+                  </a:r>
+                </a:p>
+              </p:txBody>
+            </p:sp>
+          </mc:Fallback>
+        </mc:AlternateContent>
+        <mc:AlternateContent xmlns:mc="http://schemas.openxmlformats.org/markup-compatibility/2006" xmlns:a14="http://schemas.microsoft.com/office/drawing/2010/main">
+          <mc:Choice Requires="a14">
+            <p:sp>
+              <p:nvSpPr>
+                <p:cNvPr id="9" name="CaixaDeTexto 8">
+                  <a:extLst>
+                    <a:ext uri="{FF2B5EF4-FFF2-40B4-BE49-F238E27FC236}">
+                      <a16:creationId xmlns:a16="http://schemas.microsoft.com/office/drawing/2014/main" id="{4C0855C4-B563-8234-DFE3-4B6C2B7E81F9}"/>
+                    </a:ext>
+                  </a:extLst>
+                </p:cNvPr>
+                <p:cNvSpPr txBox="1"/>
+                <p:nvPr/>
+              </p:nvSpPr>
+              <p:spPr>
+                <a:xfrm rot="16200000">
+                  <a:off x="216483" y="5087088"/>
+                  <a:ext cx="781363" cy="307777"/>
+                </a:xfrm>
+                <a:prstGeom prst="rect">
+                  <a:avLst/>
+                </a:prstGeom>
+                <a:solidFill>
+                  <a:schemeClr val="bg1"/>
+                </a:solidFill>
+              </p:spPr>
+              <p:txBody>
+                <a:bodyPr wrap="square">
+                  <a:spAutoFit/>
+                </a:bodyPr>
+                <a:lstStyle/>
+                <a:p>
+                  <a:pPr/>
+                  <a14:m>
+                    <m:oMathPara xmlns:m="http://schemas.openxmlformats.org/officeDocument/2006/math">
+                      <m:oMathParaPr>
+                        <m:jc m:val="centerGroup"/>
+                      </m:oMathParaPr>
+                      <m:oMath xmlns:m="http://schemas.openxmlformats.org/officeDocument/2006/math">
+                        <m:r>
+                          <a:rPr lang="pt-BR" sz="1400" b="0" i="1" smtClean="0">
+                            <a:latin typeface="Cambria Math" panose="02040503050406030204" pitchFamily="18" charset="0"/>
+                          </a:rPr>
+                          <m:t>𝑓</m:t>
+                        </m:r>
+                        <m:d>
+                          <m:dPr>
+                            <m:ctrlPr>
+                              <a:rPr lang="pt-BR" sz="1400" i="1">
+                                <a:latin typeface="Cambria Math" panose="02040503050406030204" pitchFamily="18" charset="0"/>
+                              </a:rPr>
+                            </m:ctrlPr>
+                          </m:dPr>
+                          <m:e>
+                            <m:r>
+                              <a:rPr lang="pt-BR" sz="1400" b="0" i="1" smtClean="0">
+                                <a:latin typeface="Cambria Math" panose="02040503050406030204" pitchFamily="18" charset="0"/>
+                              </a:rPr>
+                              <m:t>𝑔</m:t>
+                            </m:r>
+                            <m:r>
+                              <a:rPr lang="pt-BR" sz="1400" b="0" i="1" smtClean="0">
+                                <a:latin typeface="Cambria Math" panose="02040503050406030204" pitchFamily="18" charset="0"/>
+                              </a:rPr>
+                              <m:t>(</m:t>
+                            </m:r>
+                            <m:r>
+                              <a:rPr lang="pt-BR" sz="1400" b="1" i="1" smtClean="0">
+                                <a:latin typeface="Cambria Math" panose="02040503050406030204" pitchFamily="18" charset="0"/>
+                              </a:rPr>
+                              <m:t>𝒙</m:t>
+                            </m:r>
+                            <m:r>
+                              <a:rPr lang="pt-BR" sz="1400" b="0" i="1" smtClean="0">
+                                <a:latin typeface="Cambria Math" panose="02040503050406030204" pitchFamily="18" charset="0"/>
+                              </a:rPr>
+                              <m:t>)</m:t>
+                            </m:r>
+                          </m:e>
+                        </m:d>
+                      </m:oMath>
+                    </m:oMathPara>
+                  </a14:m>
+                  <a:endParaRPr lang="pt-BR" sz="1400" dirty="0"/>
+                </a:p>
+              </p:txBody>
+            </p:sp>
+          </mc:Choice>
+          <mc:Fallback xmlns="">
+            <p:sp>
+              <p:nvSpPr>
+                <p:cNvPr id="9" name="CaixaDeTexto 8">
+                  <a:extLst>
+                    <a:ext uri="{FF2B5EF4-FFF2-40B4-BE49-F238E27FC236}">
+                      <a16:creationId xmlns:a16="http://schemas.microsoft.com/office/drawing/2014/main" id="{4C0855C4-B563-8234-DFE3-4B6C2B7E81F9}"/>
+                    </a:ext>
+                  </a:extLst>
+                </p:cNvPr>
+                <p:cNvSpPr txBox="1">
+                  <a:spLocks noRot="1" noChangeAspect="1" noMove="1" noResize="1" noEditPoints="1" noAdjustHandles="1" noChangeArrowheads="1" noChangeShapeType="1" noTextEdit="1"/>
+                </p:cNvSpPr>
+                <p:nvPr/>
+              </p:nvSpPr>
+              <p:spPr>
+                <a:xfrm rot="16200000">
+                  <a:off x="216483" y="5087088"/>
+                  <a:ext cx="781363" cy="307777"/>
+                </a:xfrm>
+                <a:prstGeom prst="rect">
+                  <a:avLst/>
+                </a:prstGeom>
+                <a:blipFill>
+                  <a:blip r:embed="rId7"/>
+                  <a:stretch>
+                    <a:fillRect r="-8000"/>
+                  </a:stretch>
+                </a:blipFill>
+              </p:spPr>
+              <p:txBody>
+                <a:bodyPr/>
+                <a:lstStyle/>
+                <a:p>
+                  <a:r>
+                    <a:rPr lang="pt-BR">
+                      <a:noFill/>
+                    </a:rPr>
+                    <a:t> </a:t>
+                  </a:r>
+                </a:p>
+              </p:txBody>
+            </p:sp>
+          </mc:Fallback>
+        </mc:AlternateContent>
+        <p:sp>
+          <p:nvSpPr>
+            <p:cNvPr id="11" name="Retângulo 10">
+              <a:extLst>
+                <a:ext uri="{FF2B5EF4-FFF2-40B4-BE49-F238E27FC236}">
+                  <a16:creationId xmlns:a16="http://schemas.microsoft.com/office/drawing/2014/main" id="{C66842E7-77DB-DED6-551A-CFBE055B87A7}"/>
+                </a:ext>
+              </a:extLst>
+            </p:cNvPr>
+            <p:cNvSpPr/>
+            <p:nvPr/>
+          </p:nvSpPr>
+          <p:spPr>
+            <a:xfrm rot="1995663">
+              <a:off x="712352" y="2785892"/>
+              <a:ext cx="2971946" cy="155530"/>
+            </a:xfrm>
+            <a:prstGeom prst="rect">
+              <a:avLst/>
+            </a:prstGeom>
+            <a:noFill/>
+            <a:ln w="38100">
+              <a:solidFill>
+                <a:srgbClr val="FF0000"/>
+              </a:solidFill>
+            </a:ln>
+          </p:spPr>
+          <p:style>
+            <a:lnRef idx="2">
+              <a:schemeClr val="accent1">
+                <a:shade val="15000"/>
+              </a:schemeClr>
+            </a:lnRef>
+            <a:fillRef idx="1">
+              <a:schemeClr val="accent1"/>
+            </a:fillRef>
+            <a:effectRef idx="0">
+              <a:schemeClr val="accent1"/>
+            </a:effectRef>
+            <a:fontRef idx="minor">
+              <a:schemeClr val="lt1"/>
+            </a:fontRef>
+          </p:style>
+          <p:txBody>
+            <a:bodyPr rtlCol="0" anchor="ctr"/>
+            <a:lstStyle/>
+            <a:p>
+              <a:pPr algn="ctr"/>
+              <a:endParaRPr lang="pt-BR"/>
+            </a:p>
+          </p:txBody>
+        </p:sp>
+        <p:cxnSp>
+          <p:nvCxnSpPr>
+            <p:cNvPr id="15" name="Conector de Seta Reta 14">
+              <a:extLst>
+                <a:ext uri="{FF2B5EF4-FFF2-40B4-BE49-F238E27FC236}">
+                  <a16:creationId xmlns:a16="http://schemas.microsoft.com/office/drawing/2014/main" id="{851D0E37-E94F-E50F-4120-E98CB2FF97BE}"/>
+                </a:ext>
+              </a:extLst>
+            </p:cNvPr>
+            <p:cNvCxnSpPr>
+              <a:cxnSpLocks/>
+            </p:cNvCxnSpPr>
+            <p:nvPr/>
+          </p:nvCxnSpPr>
+          <p:spPr>
+            <a:xfrm>
+              <a:off x="2202180" y="2977599"/>
+              <a:ext cx="0" cy="1057220"/>
+            </a:xfrm>
+            <a:prstGeom prst="straightConnector1">
+              <a:avLst/>
+            </a:prstGeom>
+            <a:ln w="38100">
+              <a:solidFill>
+                <a:srgbClr val="FF0000"/>
+              </a:solidFill>
+              <a:tailEnd type="triangle"/>
+            </a:ln>
+          </p:spPr>
+          <p:style>
+            <a:lnRef idx="1">
+              <a:schemeClr val="accent1"/>
+            </a:lnRef>
+            <a:fillRef idx="0">
+              <a:schemeClr val="accent1"/>
+            </a:fillRef>
+            <a:effectRef idx="0">
+              <a:schemeClr val="accent1"/>
+            </a:effectRef>
+            <a:fontRef idx="minor">
+              <a:schemeClr val="tx1"/>
+            </a:fontRef>
+          </p:style>
+        </p:cxnSp>
+      </p:grpSp>
+    </p:spTree>
+    <p:extLst>
+      <p:ext uri="{BB962C8B-B14F-4D97-AF65-F5344CB8AC3E}">
+        <p14:creationId xmlns:p14="http://schemas.microsoft.com/office/powerpoint/2010/main" val="726048151"/>
+      </p:ext>
+    </p:extLst>
+  </p:cSld>
+  <p:clrMapOvr>
+    <a:masterClrMapping/>
+  </p:clrMapOvr>
+</p:sld>
+</file>
+
+<file path=ppt/slides/slide28.xml><?xml version="1.0" encoding="utf-8"?>
+<p:sld xmlns:a="http://schemas.openxmlformats.org/drawingml/2006/main" xmlns:r="http://schemas.openxmlformats.org/officeDocument/2006/relationships" xmlns:p="http://schemas.openxmlformats.org/presentationml/2006/main">
+  <p:cSld>
+    <p:spTree>
+      <p:nvGrpSpPr>
+        <p:cNvPr id="1" name="">
+          <a:extLst>
+            <a:ext uri="{FF2B5EF4-FFF2-40B4-BE49-F238E27FC236}">
+              <a16:creationId xmlns:a16="http://schemas.microsoft.com/office/drawing/2014/main" id="{CD6791E6-EFE7-E1D0-A05B-6A033903D8B9}"/>
+            </a:ext>
+          </a:extLst>
+        </p:cNvPr>
+        <p:cNvGrpSpPr/>
+        <p:nvPr/>
+      </p:nvGrpSpPr>
+      <p:grpSpPr>
+        <a:xfrm>
+          <a:off x="0" y="0"/>
+          <a:ext cx="0" cy="0"/>
+          <a:chOff x="0" y="0"/>
+          <a:chExt cx="0" cy="0"/>
+        </a:xfrm>
+      </p:grpSpPr>
+      <p:sp>
+        <p:nvSpPr>
+          <p:cNvPr id="2" name="Title 1">
+            <a:extLst>
+              <a:ext uri="{FF2B5EF4-FFF2-40B4-BE49-F238E27FC236}">
+                <a16:creationId xmlns:a16="http://schemas.microsoft.com/office/drawing/2014/main" id="{F647D7A8-0C38-A228-6137-93F608F4D4C0}"/>
+              </a:ext>
+            </a:extLst>
+          </p:cNvPr>
+          <p:cNvSpPr>
+            <a:spLocks noGrp="1"/>
+          </p:cNvSpPr>
+          <p:nvPr>
+            <p:ph type="title"/>
+          </p:nvPr>
+        </p:nvSpPr>
+        <p:spPr/>
+        <p:txBody>
+          <a:bodyPr/>
+          <a:lstStyle/>
+          <a:p>
+            <a:r>
+              <a:rPr lang="pt-BR" dirty="0"/>
+              <a:t>Classificação com limiar de decisão rígido</a:t>
+            </a:r>
+          </a:p>
+        </p:txBody>
+      </p:sp>
+      <mc:AlternateContent xmlns:mc="http://schemas.openxmlformats.org/markup-compatibility/2006">
+        <mc:Choice xmlns:a14="http://schemas.microsoft.com/office/drawing/2010/main" Requires="a14">
+          <p:sp>
+            <p:nvSpPr>
+              <p:cNvPr id="3" name="Content Placeholder 2">
+                <a:extLst>
+                  <a:ext uri="{FF2B5EF4-FFF2-40B4-BE49-F238E27FC236}">
+                    <a16:creationId xmlns:a16="http://schemas.microsoft.com/office/drawing/2014/main" id="{A01A9599-51A6-118D-65E9-1C6C3DD1B35B}"/>
+                  </a:ext>
+                </a:extLst>
+              </p:cNvPr>
+              <p:cNvSpPr>
+                <a:spLocks noGrp="1"/>
+              </p:cNvSpPr>
+              <p:nvPr>
+                <p:ph idx="1"/>
+              </p:nvPr>
+            </p:nvSpPr>
+            <p:spPr>
+              <a:xfrm>
+                <a:off x="5245847" y="1825624"/>
+                <a:ext cx="6795732" cy="5032376"/>
+              </a:xfrm>
+            </p:spPr>
+            <p:txBody>
+              <a:bodyPr>
+                <a:normAutofit/>
+              </a:bodyPr>
+              <a:lstStyle/>
+              <a:p>
+                <a:r>
+                  <a:rPr lang="pt-BR" dirty="0"/>
+                  <a:t>Exemplos </a:t>
+                </a:r>
+                <a:r>
+                  <a:rPr lang="pt-BR" b="1" dirty="0">
+                    <a:solidFill>
+                      <a:srgbClr val="00B050"/>
+                    </a:solidFill>
+                  </a:rPr>
+                  <a:t>mais distantes da fronteira </a:t>
+                </a:r>
+                <a:r>
+                  <a:rPr lang="pt-BR" dirty="0"/>
+                  <a:t>têm uma </a:t>
+                </a:r>
+                <a:r>
+                  <a:rPr lang="pt-BR" b="1" dirty="0">
+                    <a:solidFill>
+                      <a:srgbClr val="00B050"/>
+                    </a:solidFill>
+                  </a:rPr>
+                  <a:t>probabilidade</a:t>
+                </a:r>
+                <a:r>
+                  <a:rPr lang="pt-BR" dirty="0"/>
+                  <a:t> </a:t>
+                </a:r>
+                <a:r>
+                  <a:rPr lang="pt-BR" b="1" dirty="0">
+                    <a:solidFill>
+                      <a:srgbClr val="00B050"/>
+                    </a:solidFill>
+                  </a:rPr>
+                  <a:t>maior</a:t>
+                </a:r>
+                <a:r>
+                  <a:rPr lang="pt-BR" dirty="0"/>
+                  <a:t> de </a:t>
+                </a:r>
+                <a:r>
+                  <a:rPr lang="pt-BR" b="1" dirty="0">
+                    <a:solidFill>
+                      <a:srgbClr val="7030A0"/>
+                    </a:solidFill>
+                  </a:rPr>
+                  <a:t>realmente</a:t>
+                </a:r>
+                <a:r>
+                  <a:rPr lang="pt-BR" dirty="0"/>
+                  <a:t> </a:t>
+                </a:r>
+                <a:r>
+                  <a:rPr lang="pt-BR" b="1" dirty="0">
+                    <a:solidFill>
+                      <a:srgbClr val="00B050"/>
+                    </a:solidFill>
+                  </a:rPr>
+                  <a:t>pertencerem à classe da região onde se encontram e não serem </a:t>
+                </a:r>
+                <a:r>
+                  <a:rPr lang="pt-BR" b="1" i="1" dirty="0">
+                    <a:solidFill>
+                      <a:srgbClr val="7030A0"/>
+                    </a:solidFill>
+                  </a:rPr>
+                  <a:t>outliers</a:t>
+                </a:r>
+                <a:r>
+                  <a:rPr lang="pt-BR" dirty="0"/>
+                  <a:t>.</a:t>
+                </a:r>
+              </a:p>
+              <a:p>
+                <a:pPr lvl="1">
+                  <a:buFont typeface="Wingdings" panose="05000000000000000000" pitchFamily="2" charset="2"/>
+                  <a:buChar char="§"/>
+                </a:pPr>
+                <a:r>
+                  <a:rPr lang="pt-BR" dirty="0"/>
+                  <a:t>Quanto maior o valor absoluto de </a:t>
+                </a:r>
+                <a14:m>
+                  <m:oMath xmlns:m="http://schemas.openxmlformats.org/officeDocument/2006/math">
+                    <m:r>
+                      <a:rPr lang="pt-BR" i="1" smtClean="0">
+                        <a:latin typeface="Cambria Math" panose="02040503050406030204" pitchFamily="18" charset="0"/>
+                      </a:rPr>
+                      <m:t>𝑔</m:t>
+                    </m:r>
+                    <m:d>
+                      <m:dPr>
+                        <m:ctrlPr>
+                          <a:rPr lang="pt-BR" i="1">
+                            <a:latin typeface="Cambria Math" panose="02040503050406030204" pitchFamily="18" charset="0"/>
+                          </a:rPr>
+                        </m:ctrlPr>
+                      </m:dPr>
+                      <m:e>
+                        <m:r>
+                          <a:rPr lang="pt-BR" b="1" i="1">
+                            <a:latin typeface="Cambria Math" panose="02040503050406030204" pitchFamily="18" charset="0"/>
+                          </a:rPr>
+                          <m:t>𝒙</m:t>
+                        </m:r>
+                      </m:e>
+                    </m:d>
+                  </m:oMath>
+                </a14:m>
+                <a:r>
+                  <a:rPr lang="pt-BR" dirty="0"/>
+                  <a:t>, mais distante da fronteira está a amostra.</a:t>
+                </a:r>
+              </a:p>
+              <a:p>
+                <a:r>
+                  <a:rPr lang="pt-BR" dirty="0"/>
+                  <a:t>Por outro lado, exemplos próximos da fronteira têm probabilidade menor de pertencerem à classe onde estão.</a:t>
+                </a:r>
+              </a:p>
+              <a:p>
+                <a:pPr lvl="1">
+                  <a:buFont typeface="Wingdings" panose="05000000000000000000" pitchFamily="2" charset="2"/>
+                  <a:buChar char="§"/>
+                </a:pPr>
+                <a:r>
+                  <a:rPr lang="pt-BR" dirty="0"/>
+                  <a:t>Quanto menor o valor absoluto de </a:t>
+                </a:r>
+                <a14:m>
+                  <m:oMath xmlns:m="http://schemas.openxmlformats.org/officeDocument/2006/math">
+                    <m:r>
+                      <a:rPr lang="pt-BR" i="1">
+                        <a:latin typeface="Cambria Math" panose="02040503050406030204" pitchFamily="18" charset="0"/>
+                      </a:rPr>
+                      <m:t>𝑔</m:t>
+                    </m:r>
+                    <m:d>
+                      <m:dPr>
+                        <m:ctrlPr>
+                          <a:rPr lang="pt-BR" i="1">
+                            <a:latin typeface="Cambria Math" panose="02040503050406030204" pitchFamily="18" charset="0"/>
+                          </a:rPr>
+                        </m:ctrlPr>
+                      </m:dPr>
+                      <m:e>
+                        <m:r>
+                          <a:rPr lang="pt-BR" b="1" i="1">
+                            <a:latin typeface="Cambria Math" panose="02040503050406030204" pitchFamily="18" charset="0"/>
+                          </a:rPr>
+                          <m:t>𝒙</m:t>
+                        </m:r>
+                      </m:e>
+                    </m:d>
+                  </m:oMath>
+                </a14:m>
+                <a:r>
+                  <a:rPr lang="pt-BR" dirty="0"/>
+                  <a:t>, mais próximo da fronteira está a amostra.</a:t>
+                </a:r>
+              </a:p>
+            </p:txBody>
+          </p:sp>
+        </mc:Choice>
+        <mc:Fallback>
+          <p:sp>
+            <p:nvSpPr>
+              <p:cNvPr id="3" name="Content Placeholder 2">
+                <a:extLst>
+                  <a:ext uri="{FF2B5EF4-FFF2-40B4-BE49-F238E27FC236}">
+                    <a16:creationId xmlns:a16="http://schemas.microsoft.com/office/drawing/2014/main" id="{A01A9599-51A6-118D-65E9-1C6C3DD1B35B}"/>
+                  </a:ext>
+                </a:extLst>
+              </p:cNvPr>
+              <p:cNvSpPr>
+                <a:spLocks noGrp="1" noRot="1" noChangeAspect="1" noMove="1" noResize="1" noEditPoints="1" noAdjustHandles="1" noChangeArrowheads="1" noChangeShapeType="1" noTextEdit="1"/>
+              </p:cNvSpPr>
+              <p:nvPr>
+                <p:ph idx="1"/>
+              </p:nvPr>
+            </p:nvSpPr>
+            <p:spPr>
+              <a:xfrm>
+                <a:off x="5245847" y="1825624"/>
+                <a:ext cx="6795732" cy="5032376"/>
+              </a:xfrm>
+              <a:blipFill>
+                <a:blip r:embed="rId3"/>
+                <a:stretch>
+                  <a:fillRect l="-1616" t="-1937"/>
+                </a:stretch>
+              </a:blipFill>
+            </p:spPr>
+            <p:txBody>
+              <a:bodyPr/>
+              <a:lstStyle/>
+              <a:p>
+                <a:r>
+                  <a:rPr lang="en-US">
+                    <a:noFill/>
+                  </a:rPr>
+                  <a:t> </a:t>
+                </a:r>
+              </a:p>
+            </p:txBody>
+          </p:sp>
+        </mc:Fallback>
+      </mc:AlternateContent>
+      <p:grpSp>
+        <p:nvGrpSpPr>
+          <p:cNvPr id="17" name="Agrupar 16">
+            <a:extLst>
+              <a:ext uri="{FF2B5EF4-FFF2-40B4-BE49-F238E27FC236}">
+                <a16:creationId xmlns:a16="http://schemas.microsoft.com/office/drawing/2014/main" id="{610F2454-5C0C-EBCE-6D40-BB0B5F6AE729}"/>
+              </a:ext>
+            </a:extLst>
+          </p:cNvPr>
+          <p:cNvGrpSpPr/>
+          <p:nvPr/>
+        </p:nvGrpSpPr>
+        <p:grpSpPr>
+          <a:xfrm>
+            <a:off x="858078" y="1642941"/>
+            <a:ext cx="3354287" cy="5215059"/>
+            <a:chOff x="453276" y="1631131"/>
+            <a:chExt cx="3354287" cy="5215059"/>
+          </a:xfrm>
+        </p:grpSpPr>
+        <p:pic>
+          <p:nvPicPr>
+            <p:cNvPr id="13" name="Imagem 12">
+              <a:extLst>
+                <a:ext uri="{FF2B5EF4-FFF2-40B4-BE49-F238E27FC236}">
+                  <a16:creationId xmlns:a16="http://schemas.microsoft.com/office/drawing/2014/main" id="{33700BB8-7472-8A01-B6CF-778135215578}"/>
+                </a:ext>
+              </a:extLst>
+            </p:cNvPr>
+            <p:cNvPicPr>
+              <a:picLocks noChangeAspect="1"/>
+            </p:cNvPicPr>
+            <p:nvPr/>
+          </p:nvPicPr>
+          <p:blipFill rotWithShape="1">
+            <a:blip r:embed="rId4" cstate="print">
+              <a:extLst>
+                <a:ext uri="{28A0092B-C50C-407E-A947-70E740481C1C}">
+                  <a14:useLocalDpi xmlns:a14="http://schemas.microsoft.com/office/drawing/2010/main" val="0"/>
+                </a:ext>
+              </a:extLst>
+            </a:blip>
+            <a:srcRect l="7607" t="5177" r="7347"/>
+            <a:stretch/>
+          </p:blipFill>
+          <p:spPr>
+            <a:xfrm>
+              <a:off x="844653" y="1631131"/>
+              <a:ext cx="2962910" cy="2297801"/>
+            </a:xfrm>
+            <a:prstGeom prst="rect">
+              <a:avLst/>
+            </a:prstGeom>
+          </p:spPr>
+        </p:pic>
+        <p:pic>
+          <p:nvPicPr>
+            <p:cNvPr id="6" name="Picture 16">
+              <a:extLst>
+                <a:ext uri="{FF2B5EF4-FFF2-40B4-BE49-F238E27FC236}">
+                  <a16:creationId xmlns:a16="http://schemas.microsoft.com/office/drawing/2014/main" id="{ADF86BCB-2A4B-0998-76DA-72007576463A}"/>
+                </a:ext>
+              </a:extLst>
+            </p:cNvPr>
+            <p:cNvPicPr>
+              <a:picLocks noChangeAspect="1"/>
+            </p:cNvPicPr>
+            <p:nvPr/>
+          </p:nvPicPr>
+          <p:blipFill rotWithShape="1">
+            <a:blip r:embed="rId5"/>
+            <a:srcRect l="3046" t="5896" r="8832"/>
+            <a:stretch/>
+          </p:blipFill>
+          <p:spPr>
+            <a:xfrm>
+              <a:off x="638472" y="4049377"/>
+              <a:ext cx="2831997" cy="2628367"/>
+            </a:xfrm>
+            <a:prstGeom prst="rect">
+              <a:avLst/>
+            </a:prstGeom>
+          </p:spPr>
+        </p:pic>
+        <mc:AlternateContent xmlns:mc="http://schemas.openxmlformats.org/markup-compatibility/2006" xmlns:a14="http://schemas.microsoft.com/office/drawing/2010/main">
+          <mc:Choice Requires="a14">
+            <p:sp>
+              <p:nvSpPr>
+                <p:cNvPr id="8" name="CaixaDeTexto 7">
+                  <a:extLst>
+                    <a:ext uri="{FF2B5EF4-FFF2-40B4-BE49-F238E27FC236}">
+                      <a16:creationId xmlns:a16="http://schemas.microsoft.com/office/drawing/2014/main" id="{D6B287CA-CBF9-5090-D89E-5B46CA2AFD64}"/>
+                    </a:ext>
+                  </a:extLst>
+                </p:cNvPr>
+                <p:cNvSpPr txBox="1"/>
+                <p:nvPr/>
+              </p:nvSpPr>
+              <p:spPr>
+                <a:xfrm>
+                  <a:off x="1564912" y="6538413"/>
+                  <a:ext cx="1266826" cy="307777"/>
+                </a:xfrm>
+                <a:prstGeom prst="rect">
+                  <a:avLst/>
+                </a:prstGeom>
+                <a:solidFill>
+                  <a:schemeClr val="bg1"/>
+                </a:solidFill>
+              </p:spPr>
+              <p:txBody>
+                <a:bodyPr wrap="square">
+                  <a:spAutoFit/>
+                </a:bodyPr>
+                <a:lstStyle/>
+                <a:p>
+                  <a:pPr/>
+                  <a14:m>
+                    <m:oMathPara xmlns:m="http://schemas.openxmlformats.org/officeDocument/2006/math">
+                      <m:oMathParaPr>
+                        <m:jc m:val="centerGroup"/>
+                      </m:oMathParaPr>
+                      <m:oMath xmlns:m="http://schemas.openxmlformats.org/officeDocument/2006/math">
+                        <m:r>
+                          <a:rPr lang="pt-BR" sz="1400" b="0" i="1" smtClean="0">
+                            <a:latin typeface="Cambria Math" panose="02040503050406030204" pitchFamily="18" charset="0"/>
+                          </a:rPr>
+                          <m:t>𝑔</m:t>
+                        </m:r>
+                        <m:r>
+                          <a:rPr lang="pt-BR" sz="1400" b="0" i="1" smtClean="0">
+                            <a:latin typeface="Cambria Math" panose="02040503050406030204" pitchFamily="18" charset="0"/>
+                          </a:rPr>
+                          <m:t>(</m:t>
+                        </m:r>
+                        <m:r>
+                          <a:rPr lang="pt-BR" sz="1400" b="1" i="1" smtClean="0">
+                            <a:latin typeface="Cambria Math" panose="02040503050406030204" pitchFamily="18" charset="0"/>
+                          </a:rPr>
+                          <m:t>𝒙</m:t>
+                        </m:r>
+                        <m:r>
+                          <a:rPr lang="pt-BR" sz="1400" b="0" i="1" smtClean="0">
+                            <a:latin typeface="Cambria Math" panose="02040503050406030204" pitchFamily="18" charset="0"/>
+                          </a:rPr>
+                          <m:t>)</m:t>
+                        </m:r>
+                      </m:oMath>
+                    </m:oMathPara>
+                  </a14:m>
+                  <a:endParaRPr lang="pt-BR" sz="1400" dirty="0"/>
+                </a:p>
+              </p:txBody>
+            </p:sp>
+          </mc:Choice>
+          <mc:Fallback xmlns="">
+            <p:sp>
+              <p:nvSpPr>
+                <p:cNvPr id="8" name="CaixaDeTexto 7">
+                  <a:extLst>
+                    <a:ext uri="{FF2B5EF4-FFF2-40B4-BE49-F238E27FC236}">
+                      <a16:creationId xmlns:a16="http://schemas.microsoft.com/office/drawing/2014/main" id="{FE29F1DF-B6FA-783E-169F-125859E9A35D}"/>
+                    </a:ext>
+                  </a:extLst>
+                </p:cNvPr>
+                <p:cNvSpPr txBox="1">
+                  <a:spLocks noRot="1" noChangeAspect="1" noMove="1" noResize="1" noEditPoints="1" noAdjustHandles="1" noChangeArrowheads="1" noChangeShapeType="1" noTextEdit="1"/>
+                </p:cNvSpPr>
+                <p:nvPr/>
+              </p:nvSpPr>
+              <p:spPr>
+                <a:xfrm>
+                  <a:off x="1564912" y="6538413"/>
+                  <a:ext cx="1266826" cy="307777"/>
+                </a:xfrm>
+                <a:prstGeom prst="rect">
+                  <a:avLst/>
+                </a:prstGeom>
+                <a:blipFill>
+                  <a:blip r:embed="rId6"/>
+                  <a:stretch>
+                    <a:fillRect b="-8000"/>
+                  </a:stretch>
+                </a:blipFill>
+              </p:spPr>
+              <p:txBody>
+                <a:bodyPr/>
+                <a:lstStyle/>
+                <a:p>
+                  <a:r>
+                    <a:rPr lang="pt-BR">
+                      <a:noFill/>
+                    </a:rPr>
+                    <a:t> </a:t>
+                  </a:r>
+                </a:p>
+              </p:txBody>
+            </p:sp>
+          </mc:Fallback>
+        </mc:AlternateContent>
+        <mc:AlternateContent xmlns:mc="http://schemas.openxmlformats.org/markup-compatibility/2006" xmlns:a14="http://schemas.microsoft.com/office/drawing/2010/main">
+          <mc:Choice Requires="a14">
+            <p:sp>
+              <p:nvSpPr>
+                <p:cNvPr id="9" name="CaixaDeTexto 8">
+                  <a:extLst>
+                    <a:ext uri="{FF2B5EF4-FFF2-40B4-BE49-F238E27FC236}">
+                      <a16:creationId xmlns:a16="http://schemas.microsoft.com/office/drawing/2014/main" id="{31EAD500-6617-C59D-3E5F-E7C10E98A2F0}"/>
+                    </a:ext>
+                  </a:extLst>
+                </p:cNvPr>
+                <p:cNvSpPr txBox="1"/>
+                <p:nvPr/>
+              </p:nvSpPr>
+              <p:spPr>
+                <a:xfrm rot="16200000">
+                  <a:off x="216483" y="5087088"/>
+                  <a:ext cx="781363" cy="307777"/>
+                </a:xfrm>
+                <a:prstGeom prst="rect">
+                  <a:avLst/>
+                </a:prstGeom>
+                <a:solidFill>
+                  <a:schemeClr val="bg1"/>
+                </a:solidFill>
+              </p:spPr>
+              <p:txBody>
+                <a:bodyPr wrap="square">
+                  <a:spAutoFit/>
+                </a:bodyPr>
+                <a:lstStyle/>
+                <a:p>
+                  <a:pPr/>
+                  <a14:m>
+                    <m:oMathPara xmlns:m="http://schemas.openxmlformats.org/officeDocument/2006/math">
+                      <m:oMathParaPr>
+                        <m:jc m:val="centerGroup"/>
+                      </m:oMathParaPr>
+                      <m:oMath xmlns:m="http://schemas.openxmlformats.org/officeDocument/2006/math">
+                        <m:r>
+                          <a:rPr lang="pt-BR" sz="1400" b="0" i="1" smtClean="0">
+                            <a:latin typeface="Cambria Math" panose="02040503050406030204" pitchFamily="18" charset="0"/>
+                          </a:rPr>
+                          <m:t>𝑓</m:t>
+                        </m:r>
+                        <m:d>
+                          <m:dPr>
+                            <m:ctrlPr>
+                              <a:rPr lang="pt-BR" sz="1400" i="1">
+                                <a:latin typeface="Cambria Math" panose="02040503050406030204" pitchFamily="18" charset="0"/>
+                              </a:rPr>
+                            </m:ctrlPr>
+                          </m:dPr>
+                          <m:e>
+                            <m:r>
+                              <a:rPr lang="pt-BR" sz="1400" b="0" i="1" smtClean="0">
+                                <a:latin typeface="Cambria Math" panose="02040503050406030204" pitchFamily="18" charset="0"/>
+                              </a:rPr>
+                              <m:t>𝑔</m:t>
+                            </m:r>
+                            <m:r>
+                              <a:rPr lang="pt-BR" sz="1400" b="0" i="1" smtClean="0">
+                                <a:latin typeface="Cambria Math" panose="02040503050406030204" pitchFamily="18" charset="0"/>
+                              </a:rPr>
+                              <m:t>(</m:t>
+                            </m:r>
+                            <m:r>
+                              <a:rPr lang="pt-BR" sz="1400" b="1" i="1" smtClean="0">
+                                <a:latin typeface="Cambria Math" panose="02040503050406030204" pitchFamily="18" charset="0"/>
+                              </a:rPr>
+                              <m:t>𝒙</m:t>
+                            </m:r>
+                            <m:r>
+                              <a:rPr lang="pt-BR" sz="1400" b="0" i="1" smtClean="0">
+                                <a:latin typeface="Cambria Math" panose="02040503050406030204" pitchFamily="18" charset="0"/>
+                              </a:rPr>
+                              <m:t>)</m:t>
+                            </m:r>
+                          </m:e>
+                        </m:d>
+                      </m:oMath>
+                    </m:oMathPara>
+                  </a14:m>
+                  <a:endParaRPr lang="pt-BR" sz="1400" dirty="0"/>
+                </a:p>
+              </p:txBody>
+            </p:sp>
+          </mc:Choice>
+          <mc:Fallback xmlns="">
+            <p:sp>
+              <p:nvSpPr>
+                <p:cNvPr id="9" name="CaixaDeTexto 8">
+                  <a:extLst>
+                    <a:ext uri="{FF2B5EF4-FFF2-40B4-BE49-F238E27FC236}">
+                      <a16:creationId xmlns:a16="http://schemas.microsoft.com/office/drawing/2014/main" id="{4C0855C4-B563-8234-DFE3-4B6C2B7E81F9}"/>
+                    </a:ext>
+                  </a:extLst>
+                </p:cNvPr>
+                <p:cNvSpPr txBox="1">
+                  <a:spLocks noRot="1" noChangeAspect="1" noMove="1" noResize="1" noEditPoints="1" noAdjustHandles="1" noChangeArrowheads="1" noChangeShapeType="1" noTextEdit="1"/>
+                </p:cNvSpPr>
+                <p:nvPr/>
+              </p:nvSpPr>
+              <p:spPr>
+                <a:xfrm rot="16200000">
+                  <a:off x="216483" y="5087088"/>
+                  <a:ext cx="781363" cy="307777"/>
+                </a:xfrm>
+                <a:prstGeom prst="rect">
+                  <a:avLst/>
+                </a:prstGeom>
+                <a:blipFill>
+                  <a:blip r:embed="rId7"/>
+                  <a:stretch>
+                    <a:fillRect r="-8000"/>
+                  </a:stretch>
+                </a:blipFill>
+              </p:spPr>
+              <p:txBody>
+                <a:bodyPr/>
+                <a:lstStyle/>
+                <a:p>
+                  <a:r>
+                    <a:rPr lang="pt-BR">
+                      <a:noFill/>
+                    </a:rPr>
+                    <a:t> </a:t>
+                  </a:r>
+                </a:p>
+              </p:txBody>
+            </p:sp>
+          </mc:Fallback>
+        </mc:AlternateContent>
+        <p:sp>
+          <p:nvSpPr>
+            <p:cNvPr id="11" name="Retângulo 10">
+              <a:extLst>
+                <a:ext uri="{FF2B5EF4-FFF2-40B4-BE49-F238E27FC236}">
+                  <a16:creationId xmlns:a16="http://schemas.microsoft.com/office/drawing/2014/main" id="{BB6201C2-52AB-88DF-1039-4C291CBFE4B3}"/>
+                </a:ext>
+              </a:extLst>
+            </p:cNvPr>
+            <p:cNvSpPr/>
+            <p:nvPr/>
+          </p:nvSpPr>
+          <p:spPr>
+            <a:xfrm rot="1995663">
+              <a:off x="712352" y="2785892"/>
+              <a:ext cx="2971946" cy="155530"/>
+            </a:xfrm>
+            <a:prstGeom prst="rect">
+              <a:avLst/>
+            </a:prstGeom>
+            <a:noFill/>
+            <a:ln w="38100">
+              <a:solidFill>
+                <a:srgbClr val="FF0000"/>
+              </a:solidFill>
+            </a:ln>
+          </p:spPr>
+          <p:style>
+            <a:lnRef idx="2">
+              <a:schemeClr val="accent1">
+                <a:shade val="15000"/>
+              </a:schemeClr>
+            </a:lnRef>
+            <a:fillRef idx="1">
+              <a:schemeClr val="accent1"/>
+            </a:fillRef>
+            <a:effectRef idx="0">
+              <a:schemeClr val="accent1"/>
+            </a:effectRef>
+            <a:fontRef idx="minor">
+              <a:schemeClr val="lt1"/>
+            </a:fontRef>
+          </p:style>
+          <p:txBody>
+            <a:bodyPr rtlCol="0" anchor="ctr"/>
+            <a:lstStyle/>
+            <a:p>
+              <a:pPr algn="ctr"/>
+              <a:endParaRPr lang="pt-BR"/>
+            </a:p>
+          </p:txBody>
+        </p:sp>
+        <p:cxnSp>
+          <p:nvCxnSpPr>
+            <p:cNvPr id="15" name="Conector de Seta Reta 14">
+              <a:extLst>
+                <a:ext uri="{FF2B5EF4-FFF2-40B4-BE49-F238E27FC236}">
+                  <a16:creationId xmlns:a16="http://schemas.microsoft.com/office/drawing/2014/main" id="{50C4842E-E5F8-047C-A23B-F98AD0098206}"/>
+                </a:ext>
+              </a:extLst>
+            </p:cNvPr>
+            <p:cNvCxnSpPr>
+              <a:cxnSpLocks/>
+            </p:cNvCxnSpPr>
+            <p:nvPr/>
+          </p:nvCxnSpPr>
+          <p:spPr>
+            <a:xfrm>
+              <a:off x="2202180" y="2977599"/>
+              <a:ext cx="0" cy="1057220"/>
+            </a:xfrm>
+            <a:prstGeom prst="straightConnector1">
+              <a:avLst/>
+            </a:prstGeom>
+            <a:ln w="38100">
+              <a:solidFill>
+                <a:srgbClr val="FF0000"/>
+              </a:solidFill>
+              <a:tailEnd type="triangle"/>
+            </a:ln>
+          </p:spPr>
+          <p:style>
+            <a:lnRef idx="1">
+              <a:schemeClr val="accent1"/>
+            </a:lnRef>
+            <a:fillRef idx="0">
+              <a:schemeClr val="accent1"/>
+            </a:fillRef>
+            <a:effectRef idx="0">
+              <a:schemeClr val="accent1"/>
+            </a:effectRef>
+            <a:fontRef idx="minor">
+              <a:schemeClr val="tx1"/>
+            </a:fontRef>
+          </p:style>
+        </p:cxnSp>
+      </p:grpSp>
+    </p:spTree>
+    <p:extLst>
+      <p:ext uri="{BB962C8B-B14F-4D97-AF65-F5344CB8AC3E}">
+        <p14:creationId xmlns:p14="http://schemas.microsoft.com/office/powerpoint/2010/main" val="3563642625"/>
+      </p:ext>
+    </p:extLst>
+  </p:cSld>
+  <p:clrMapOvr>
+    <a:masterClrMapping/>
+  </p:clrMapOvr>
+</p:sld>
+</file>
+
+<file path=ppt/slides/slide29.xml><?xml version="1.0" encoding="utf-8"?>
+<p:sld xmlns:a="http://schemas.openxmlformats.org/drawingml/2006/main" xmlns:r="http://schemas.openxmlformats.org/officeDocument/2006/relationships" xmlns:p="http://schemas.openxmlformats.org/presentationml/2006/main">
+  <p:cSld>
+    <p:spTree>
+      <p:nvGrpSpPr>
+        <p:cNvPr id="1" name=""/>
+        <p:cNvGrpSpPr/>
+        <p:nvPr/>
+      </p:nvGrpSpPr>
+      <p:grpSpPr>
+        <a:xfrm>
+          <a:off x="0" y="0"/>
+          <a:ext cx="0" cy="0"/>
+          <a:chOff x="0" y="0"/>
+          <a:chExt cx="0" cy="0"/>
+        </a:xfrm>
+      </p:grpSpPr>
+      <p:sp>
+        <p:nvSpPr>
+          <p:cNvPr id="2" name="Título 1">
+            <a:extLst>
+              <a:ext uri="{FF2B5EF4-FFF2-40B4-BE49-F238E27FC236}">
+                <a16:creationId xmlns:a16="http://schemas.microsoft.com/office/drawing/2014/main" id="{D21F8F56-5724-DFC6-0D15-D186C211F203}"/>
+              </a:ext>
+            </a:extLst>
+          </p:cNvPr>
+          <p:cNvSpPr>
+            <a:spLocks noGrp="1"/>
+          </p:cNvSpPr>
+          <p:nvPr>
+            <p:ph type="title"/>
+          </p:nvPr>
+        </p:nvSpPr>
+        <p:spPr/>
+        <p:txBody>
+          <a:bodyPr/>
+          <a:lstStyle/>
+          <a:p>
+            <a:r>
+              <a:rPr lang="pt-BR" dirty="0"/>
+              <a:t>Classificação com limiar de decisão rígido</a:t>
+            </a:r>
+          </a:p>
+        </p:txBody>
+      </p:sp>
+      <p:sp>
+        <p:nvSpPr>
+          <p:cNvPr id="3" name="Espaço Reservado para Conteúdo 2">
+            <a:extLst>
+              <a:ext uri="{FF2B5EF4-FFF2-40B4-BE49-F238E27FC236}">
+                <a16:creationId xmlns:a16="http://schemas.microsoft.com/office/drawing/2014/main" id="{8C2770DA-BD52-05F3-F2B3-56BA4FC4C1F3}"/>
+              </a:ext>
+            </a:extLst>
+          </p:cNvPr>
+          <p:cNvSpPr>
+            <a:spLocks noGrp="1"/>
+          </p:cNvSpPr>
+          <p:nvPr>
+            <p:ph idx="1"/>
+          </p:nvPr>
+        </p:nvSpPr>
+        <p:spPr>
+          <a:xfrm>
+            <a:off x="4773880" y="1849376"/>
+            <a:ext cx="7243949" cy="5008624"/>
+          </a:xfrm>
+        </p:spPr>
+        <p:txBody>
+          <a:bodyPr>
+            <a:normAutofit/>
+          </a:bodyPr>
+          <a:lstStyle/>
+          <a:p>
+            <a:pPr marL="285750" indent="-285750"/>
+            <a:r>
+              <a:rPr lang="pt-BR" dirty="0"/>
+              <a:t>Em resumo, </a:t>
+            </a:r>
+            <a:r>
+              <a:rPr lang="pt-BR" b="1" dirty="0">
+                <a:solidFill>
+                  <a:schemeClr val="accent2"/>
+                </a:solidFill>
+              </a:rPr>
+              <a:t>pontos </a:t>
+            </a:r>
+            <a:r>
+              <a:rPr lang="pt-BR" sz="2800" b="1" dirty="0">
+                <a:solidFill>
+                  <a:schemeClr val="accent2"/>
+                </a:solidFill>
+              </a:rPr>
+              <a:t>distantes da fronteira </a:t>
+            </a:r>
+            <a:r>
+              <a:rPr lang="pt-BR" sz="2800" dirty="0"/>
+              <a:t>de decisão </a:t>
+            </a:r>
+            <a:r>
+              <a:rPr lang="pt-BR" sz="2800" b="1" dirty="0">
+                <a:solidFill>
+                  <a:srgbClr val="7030A0"/>
+                </a:solidFill>
+              </a:rPr>
+              <a:t>deveriam</a:t>
+            </a:r>
+            <a:r>
+              <a:rPr lang="pt-BR" sz="2800" b="1" dirty="0">
+                <a:solidFill>
+                  <a:srgbClr val="00B050"/>
+                </a:solidFill>
+              </a:rPr>
+              <a:t> ter uma </a:t>
+            </a:r>
+            <a:r>
+              <a:rPr lang="pt-BR" b="1" dirty="0">
+                <a:solidFill>
+                  <a:srgbClr val="00B050"/>
+                </a:solidFill>
+              </a:rPr>
+              <a:t>confiança</a:t>
+            </a:r>
+            <a:r>
+              <a:rPr lang="pt-BR" dirty="0"/>
+              <a:t> (ou probabilidade) de </a:t>
+            </a:r>
+            <a:r>
+              <a:rPr lang="pt-BR" b="1" dirty="0">
+                <a:solidFill>
+                  <a:srgbClr val="00B050"/>
+                </a:solidFill>
+              </a:rPr>
+              <a:t>pertencerem a uma determinada classe bem maior do que pontos próximos</a:t>
+            </a:r>
+            <a:r>
+              <a:rPr lang="pt-BR" dirty="0"/>
+              <a:t>.</a:t>
+            </a:r>
+            <a:endParaRPr lang="pt-BR" sz="2800" dirty="0"/>
+          </a:p>
+          <a:p>
+            <a:pPr marL="285750" indent="-285750">
+              <a:buFont typeface="Arial" panose="020B0604020202020204" pitchFamily="34" charset="0"/>
+              <a:buChar char="•"/>
+            </a:pPr>
+            <a:r>
+              <a:rPr lang="pt-BR" sz="2800" dirty="0"/>
+              <a:t>Mas isso não é refletido na saída do classificador com função degrau.</a:t>
+            </a:r>
+          </a:p>
+          <a:p>
+            <a:pPr marL="285750" indent="-285750"/>
+            <a:r>
+              <a:rPr lang="pt-BR" dirty="0"/>
+              <a:t>Além de poder treinar os modelos, em muitas situações, nós precisamos de predições mais graduadas, que indiquem a confiança quanto à predição.</a:t>
+            </a:r>
+            <a:endParaRPr lang="pt-BR" sz="2800" dirty="0"/>
+          </a:p>
+        </p:txBody>
+      </p:sp>
+      <p:pic>
+        <p:nvPicPr>
+          <p:cNvPr id="5" name="Imagem 4">
+            <a:extLst>
+              <a:ext uri="{FF2B5EF4-FFF2-40B4-BE49-F238E27FC236}">
+                <a16:creationId xmlns:a16="http://schemas.microsoft.com/office/drawing/2014/main" id="{37586BBD-40B1-F01B-4474-DE26CFC5EB64}"/>
+              </a:ext>
+            </a:extLst>
+          </p:cNvPr>
+          <p:cNvPicPr>
+            <a:picLocks noChangeAspect="1"/>
+          </p:cNvPicPr>
+          <p:nvPr/>
+        </p:nvPicPr>
+        <p:blipFill rotWithShape="1">
+          <a:blip r:embed="rId3" cstate="print">
+            <a:extLst>
+              <a:ext uri="{28A0092B-C50C-407E-A947-70E740481C1C}">
+                <a14:useLocalDpi xmlns:a14="http://schemas.microsoft.com/office/drawing/2010/main" val="0"/>
+              </a:ext>
+            </a:extLst>
+          </a:blip>
+          <a:srcRect l="6649" r="7298"/>
+          <a:stretch/>
+        </p:blipFill>
+        <p:spPr>
+          <a:xfrm>
+            <a:off x="315379" y="2328616"/>
+            <a:ext cx="4214207" cy="3685588"/>
+          </a:xfrm>
+          <a:prstGeom prst="rect">
+            <a:avLst/>
+          </a:prstGeom>
+        </p:spPr>
+      </p:pic>
+    </p:spTree>
+    <p:extLst>
+      <p:ext uri="{BB962C8B-B14F-4D97-AF65-F5344CB8AC3E}">
+        <p14:creationId xmlns:p14="http://schemas.microsoft.com/office/powerpoint/2010/main" val="3127161698"/>
       </p:ext>
     </p:extLst>
   </p:cSld>
@@ -14386,7 +20253,7 @@
           <p:cNvPr id="4" name="Picture 5" descr="Image result for supervised learning">
             <a:extLst>
               <a:ext uri="{FF2B5EF4-FFF2-40B4-BE49-F238E27FC236}">
-                <a16:creationId xmlns:a16="http://schemas.microsoft.com/office/drawing/2014/main" xmlns="" id="{2520F4EA-1E3E-4F3B-97C0-DF47861DCD42}"/>
+                <a16:creationId xmlns:a16="http://schemas.microsoft.com/office/drawing/2014/main" id="{2520F4EA-1E3E-4F3B-97C0-DF47861DCD42}"/>
               </a:ext>
             </a:extLst>
           </p:cNvPr>
@@ -14523,6 +20390,693 @@
 </p:sld>
 </file>
 
+<file path=ppt/slides/slide30.xml><?xml version="1.0" encoding="utf-8"?>
+<p:sld xmlns:a="http://schemas.openxmlformats.org/drawingml/2006/main" xmlns:r="http://schemas.openxmlformats.org/officeDocument/2006/relationships" xmlns:p="http://schemas.openxmlformats.org/presentationml/2006/main">
+  <p:cSld>
+    <p:spTree>
+      <p:nvGrpSpPr>
+        <p:cNvPr id="1" name="">
+          <a:extLst>
+            <a:ext uri="{FF2B5EF4-FFF2-40B4-BE49-F238E27FC236}">
+              <a16:creationId xmlns:a16="http://schemas.microsoft.com/office/drawing/2014/main" id="{8CDA690E-6F0D-F227-D663-2E4C3624E1B4}"/>
+            </a:ext>
+          </a:extLst>
+        </p:cNvPr>
+        <p:cNvGrpSpPr/>
+        <p:nvPr/>
+      </p:nvGrpSpPr>
+      <p:grpSpPr>
+        <a:xfrm>
+          <a:off x="0" y="0"/>
+          <a:ext cx="0" cy="0"/>
+          <a:chOff x="0" y="0"/>
+          <a:chExt cx="0" cy="0"/>
+        </a:xfrm>
+      </p:grpSpPr>
+      <p:sp>
+        <p:nvSpPr>
+          <p:cNvPr id="3" name="Content Placeholder 2">
+            <a:extLst>
+              <a:ext uri="{FF2B5EF4-FFF2-40B4-BE49-F238E27FC236}">
+                <a16:creationId xmlns:a16="http://schemas.microsoft.com/office/drawing/2014/main" id="{82622813-C213-B0D9-4229-8306BBEC37DA}"/>
+              </a:ext>
+            </a:extLst>
+          </p:cNvPr>
+          <p:cNvSpPr>
+            <a:spLocks noGrp="1"/>
+          </p:cNvSpPr>
+          <p:nvPr>
+            <p:ph idx="1"/>
+          </p:nvPr>
+        </p:nvSpPr>
+        <p:spPr>
+          <a:xfrm>
+            <a:off x="560614" y="2827366"/>
+            <a:ext cx="11070771" cy="1203268"/>
+          </a:xfrm>
+        </p:spPr>
+        <p:txBody>
+          <a:bodyPr>
+            <a:normAutofit/>
+          </a:bodyPr>
+          <a:lstStyle/>
+          <a:p>
+            <a:pPr marL="0" indent="0" algn="ctr">
+              <a:buNone/>
+            </a:pPr>
+            <a:r>
+              <a:rPr lang="pt-BR" sz="6000" i="1" dirty="0"/>
+              <a:t>O que podemos fazer?</a:t>
+            </a:r>
+            <a:endParaRPr lang="en-US" sz="6000" i="1" dirty="0"/>
+          </a:p>
+        </p:txBody>
+      </p:sp>
+    </p:spTree>
+    <p:extLst>
+      <p:ext uri="{BB962C8B-B14F-4D97-AF65-F5344CB8AC3E}">
+        <p14:creationId xmlns:p14="http://schemas.microsoft.com/office/powerpoint/2010/main" val="175905837"/>
+      </p:ext>
+    </p:extLst>
+  </p:cSld>
+  <p:clrMapOvr>
+    <a:masterClrMapping/>
+  </p:clrMapOvr>
+</p:sld>
+</file>
+
+<file path=ppt/slides/slide31.xml><?xml version="1.0" encoding="utf-8"?>
+<p:sld xmlns:a="http://schemas.openxmlformats.org/drawingml/2006/main" xmlns:r="http://schemas.openxmlformats.org/officeDocument/2006/relationships" xmlns:p="http://schemas.openxmlformats.org/presentationml/2006/main">
+  <p:cSld>
+    <p:spTree>
+      <p:nvGrpSpPr>
+        <p:cNvPr id="1" name=""/>
+        <p:cNvGrpSpPr/>
+        <p:nvPr/>
+      </p:nvGrpSpPr>
+      <p:grpSpPr>
+        <a:xfrm>
+          <a:off x="0" y="0"/>
+          <a:ext cx="0" cy="0"/>
+          <a:chOff x="0" y="0"/>
+          <a:chExt cx="0" cy="0"/>
+        </a:xfrm>
+      </p:grpSpPr>
+      <p:sp>
+        <p:nvSpPr>
+          <p:cNvPr id="2" name="Title 1">
+            <a:extLst>
+              <a:ext uri="{FF2B5EF4-FFF2-40B4-BE49-F238E27FC236}">
+                <a16:creationId xmlns:a16="http://schemas.microsoft.com/office/drawing/2014/main" id="{5B5C9F62-7684-5A29-B15B-4CEB812641BF}"/>
+              </a:ext>
+            </a:extLst>
+          </p:cNvPr>
+          <p:cNvSpPr>
+            <a:spLocks noGrp="1"/>
+          </p:cNvSpPr>
+          <p:nvPr>
+            <p:ph type="title"/>
+          </p:nvPr>
+        </p:nvSpPr>
+        <p:spPr/>
+        <p:txBody>
+          <a:bodyPr/>
+          <a:lstStyle/>
+          <a:p>
+            <a:endParaRPr lang="en-US"/>
+          </a:p>
+        </p:txBody>
+      </p:sp>
+      <p:sp>
+        <p:nvSpPr>
+          <p:cNvPr id="3" name="Content Placeholder 2">
+            <a:extLst>
+              <a:ext uri="{FF2B5EF4-FFF2-40B4-BE49-F238E27FC236}">
+                <a16:creationId xmlns:a16="http://schemas.microsoft.com/office/drawing/2014/main" id="{B8C9293E-FE0D-E03B-8391-5AFFEBCBCCE2}"/>
+              </a:ext>
+            </a:extLst>
+          </p:cNvPr>
+          <p:cNvSpPr>
+            <a:spLocks noGrp="1"/>
+          </p:cNvSpPr>
+          <p:nvPr>
+            <p:ph idx="1"/>
+          </p:nvPr>
+        </p:nvSpPr>
+        <p:spPr/>
+        <p:txBody>
+          <a:bodyPr>
+            <a:normAutofit/>
+          </a:bodyPr>
+          <a:lstStyle/>
+          <a:p>
+            <a:r>
+              <a:rPr lang="pt-BR" sz="8000" b="1" dirty="0">
+                <a:solidFill>
+                  <a:srgbClr val="FF0000"/>
+                </a:solidFill>
+              </a:rPr>
+              <a:t>PAREI AQUI!!!!!!</a:t>
+            </a:r>
+            <a:endParaRPr lang="en-US" sz="8000" b="1" dirty="0">
+              <a:solidFill>
+                <a:srgbClr val="FF0000"/>
+              </a:solidFill>
+            </a:endParaRPr>
+          </a:p>
+        </p:txBody>
+      </p:sp>
+    </p:spTree>
+    <p:extLst>
+      <p:ext uri="{BB962C8B-B14F-4D97-AF65-F5344CB8AC3E}">
+        <p14:creationId xmlns:p14="http://schemas.microsoft.com/office/powerpoint/2010/main" val="1276354271"/>
+      </p:ext>
+    </p:extLst>
+  </p:cSld>
+  <p:clrMapOvr>
+    <a:masterClrMapping/>
+  </p:clrMapOvr>
+</p:sld>
+</file>
+
+<file path=ppt/slides/slide32.xml><?xml version="1.0" encoding="utf-8"?>
+<p:sld xmlns:a="http://schemas.openxmlformats.org/drawingml/2006/main" xmlns:r="http://schemas.openxmlformats.org/officeDocument/2006/relationships" xmlns:p="http://schemas.openxmlformats.org/presentationml/2006/main">
+  <p:cSld>
+    <p:spTree>
+      <p:nvGrpSpPr>
+        <p:cNvPr id="1" name=""/>
+        <p:cNvGrpSpPr/>
+        <p:nvPr/>
+      </p:nvGrpSpPr>
+      <p:grpSpPr>
+        <a:xfrm>
+          <a:off x="0" y="0"/>
+          <a:ext cx="0" cy="0"/>
+          <a:chOff x="0" y="0"/>
+          <a:chExt cx="0" cy="0"/>
+        </a:xfrm>
+      </p:grpSpPr>
+      <p:sp>
+        <p:nvSpPr>
+          <p:cNvPr id="2" name="Title 1">
+            <a:extLst>
+              <a:ext uri="{FF2B5EF4-FFF2-40B4-BE49-F238E27FC236}">
+                <a16:creationId xmlns:a16="http://schemas.microsoft.com/office/drawing/2014/main" id="{F82D9F4A-3F1E-72CA-5279-D7096455E589}"/>
+              </a:ext>
+            </a:extLst>
+          </p:cNvPr>
+          <p:cNvSpPr>
+            <a:spLocks noGrp="1"/>
+          </p:cNvSpPr>
+          <p:nvPr>
+            <p:ph type="title"/>
+          </p:nvPr>
+        </p:nvSpPr>
+        <p:spPr/>
+        <p:txBody>
+          <a:bodyPr/>
+          <a:lstStyle/>
+          <a:p>
+            <a:endParaRPr lang="en-US"/>
+          </a:p>
+        </p:txBody>
+      </p:sp>
+      <p:sp>
+        <p:nvSpPr>
+          <p:cNvPr id="3" name="Content Placeholder 2">
+            <a:extLst>
+              <a:ext uri="{FF2B5EF4-FFF2-40B4-BE49-F238E27FC236}">
+                <a16:creationId xmlns:a16="http://schemas.microsoft.com/office/drawing/2014/main" id="{06C3F39F-A361-AD70-0282-D98F9A8F92E5}"/>
+              </a:ext>
+            </a:extLst>
+          </p:cNvPr>
+          <p:cNvSpPr>
+            <a:spLocks noGrp="1"/>
+          </p:cNvSpPr>
+          <p:nvPr>
+            <p:ph idx="1"/>
+          </p:nvPr>
+        </p:nvSpPr>
+        <p:spPr/>
+        <p:txBody>
+          <a:bodyPr/>
+          <a:lstStyle/>
+          <a:p>
+            <a:endParaRPr lang="en-US"/>
+          </a:p>
+        </p:txBody>
+      </p:sp>
+    </p:spTree>
+    <p:extLst>
+      <p:ext uri="{BB962C8B-B14F-4D97-AF65-F5344CB8AC3E}">
+        <p14:creationId xmlns:p14="http://schemas.microsoft.com/office/powerpoint/2010/main" val="3735267654"/>
+      </p:ext>
+    </p:extLst>
+  </p:cSld>
+  <p:clrMapOvr>
+    <a:masterClrMapping/>
+  </p:clrMapOvr>
+</p:sld>
+</file>
+
+<file path=ppt/slides/slide33.xml><?xml version="1.0" encoding="utf-8"?>
+<p:sld xmlns:a="http://schemas.openxmlformats.org/drawingml/2006/main" xmlns:r="http://schemas.openxmlformats.org/officeDocument/2006/relationships" xmlns:p="http://schemas.openxmlformats.org/presentationml/2006/main">
+  <p:cSld>
+    <p:spTree>
+      <p:nvGrpSpPr>
+        <p:cNvPr id="1" name=""/>
+        <p:cNvGrpSpPr/>
+        <p:nvPr/>
+      </p:nvGrpSpPr>
+      <p:grpSpPr>
+        <a:xfrm>
+          <a:off x="0" y="0"/>
+          <a:ext cx="0" cy="0"/>
+          <a:chOff x="0" y="0"/>
+          <a:chExt cx="0" cy="0"/>
+        </a:xfrm>
+      </p:grpSpPr>
+      <p:sp>
+        <p:nvSpPr>
+          <p:cNvPr id="2" name="Title 1">
+            <a:extLst>
+              <a:ext uri="{FF2B5EF4-FFF2-40B4-BE49-F238E27FC236}">
+                <a16:creationId xmlns:a16="http://schemas.microsoft.com/office/drawing/2014/main" id="{88B15EEB-555A-1663-8A26-726644DCB32D}"/>
+              </a:ext>
+            </a:extLst>
+          </p:cNvPr>
+          <p:cNvSpPr>
+            <a:spLocks noGrp="1"/>
+          </p:cNvSpPr>
+          <p:nvPr>
+            <p:ph type="title"/>
+          </p:nvPr>
+        </p:nvSpPr>
+        <p:spPr/>
+        <p:txBody>
+          <a:bodyPr/>
+          <a:lstStyle/>
+          <a:p>
+            <a:endParaRPr lang="en-US"/>
+          </a:p>
+        </p:txBody>
+      </p:sp>
+      <p:sp>
+        <p:nvSpPr>
+          <p:cNvPr id="3" name="Content Placeholder 2">
+            <a:extLst>
+              <a:ext uri="{FF2B5EF4-FFF2-40B4-BE49-F238E27FC236}">
+                <a16:creationId xmlns:a16="http://schemas.microsoft.com/office/drawing/2014/main" id="{59F76B53-821B-1D2E-B52E-C808298E9DAD}"/>
+              </a:ext>
+            </a:extLst>
+          </p:cNvPr>
+          <p:cNvSpPr>
+            <a:spLocks noGrp="1"/>
+          </p:cNvSpPr>
+          <p:nvPr>
+            <p:ph idx="1"/>
+          </p:nvPr>
+        </p:nvSpPr>
+        <p:spPr/>
+        <p:txBody>
+          <a:bodyPr/>
+          <a:lstStyle/>
+          <a:p>
+            <a:endParaRPr lang="en-US"/>
+          </a:p>
+        </p:txBody>
+      </p:sp>
+    </p:spTree>
+    <p:extLst>
+      <p:ext uri="{BB962C8B-B14F-4D97-AF65-F5344CB8AC3E}">
+        <p14:creationId xmlns:p14="http://schemas.microsoft.com/office/powerpoint/2010/main" val="4124429806"/>
+      </p:ext>
+    </p:extLst>
+  </p:cSld>
+  <p:clrMapOvr>
+    <a:masterClrMapping/>
+  </p:clrMapOvr>
+</p:sld>
+</file>
+
+<file path=ppt/slides/slide34.xml><?xml version="1.0" encoding="utf-8"?>
+<p:sld xmlns:a="http://schemas.openxmlformats.org/drawingml/2006/main" xmlns:r="http://schemas.openxmlformats.org/officeDocument/2006/relationships" xmlns:p="http://schemas.openxmlformats.org/presentationml/2006/main">
+  <p:cSld>
+    <p:spTree>
+      <p:nvGrpSpPr>
+        <p:cNvPr id="1" name=""/>
+        <p:cNvGrpSpPr/>
+        <p:nvPr/>
+      </p:nvGrpSpPr>
+      <p:grpSpPr>
+        <a:xfrm>
+          <a:off x="0" y="0"/>
+          <a:ext cx="0" cy="0"/>
+          <a:chOff x="0" y="0"/>
+          <a:chExt cx="0" cy="0"/>
+        </a:xfrm>
+      </p:grpSpPr>
+      <p:sp>
+        <p:nvSpPr>
+          <p:cNvPr id="2" name="Title 1">
+            <a:extLst>
+              <a:ext uri="{FF2B5EF4-FFF2-40B4-BE49-F238E27FC236}">
+                <a16:creationId xmlns:a16="http://schemas.microsoft.com/office/drawing/2014/main" id="{ABB5C0CF-6932-AB23-09BC-D188772CD2FE}"/>
+              </a:ext>
+            </a:extLst>
+          </p:cNvPr>
+          <p:cNvSpPr>
+            <a:spLocks noGrp="1"/>
+          </p:cNvSpPr>
+          <p:nvPr>
+            <p:ph type="title"/>
+          </p:nvPr>
+        </p:nvSpPr>
+        <p:spPr/>
+        <p:txBody>
+          <a:bodyPr/>
+          <a:lstStyle/>
+          <a:p>
+            <a:endParaRPr lang="en-US"/>
+          </a:p>
+        </p:txBody>
+      </p:sp>
+      <p:sp>
+        <p:nvSpPr>
+          <p:cNvPr id="3" name="Content Placeholder 2">
+            <a:extLst>
+              <a:ext uri="{FF2B5EF4-FFF2-40B4-BE49-F238E27FC236}">
+                <a16:creationId xmlns:a16="http://schemas.microsoft.com/office/drawing/2014/main" id="{8B00C46C-B4D6-FF5E-D8DB-8F29C27BED29}"/>
+              </a:ext>
+            </a:extLst>
+          </p:cNvPr>
+          <p:cNvSpPr>
+            <a:spLocks noGrp="1"/>
+          </p:cNvSpPr>
+          <p:nvPr>
+            <p:ph idx="1"/>
+          </p:nvPr>
+        </p:nvSpPr>
+        <p:spPr/>
+        <p:txBody>
+          <a:bodyPr/>
+          <a:lstStyle/>
+          <a:p>
+            <a:endParaRPr lang="en-US"/>
+          </a:p>
+        </p:txBody>
+      </p:sp>
+    </p:spTree>
+    <p:extLst>
+      <p:ext uri="{BB962C8B-B14F-4D97-AF65-F5344CB8AC3E}">
+        <p14:creationId xmlns:p14="http://schemas.microsoft.com/office/powerpoint/2010/main" val="1542605560"/>
+      </p:ext>
+    </p:extLst>
+  </p:cSld>
+  <p:clrMapOvr>
+    <a:masterClrMapping/>
+  </p:clrMapOvr>
+</p:sld>
+</file>
+
+<file path=ppt/slides/slide35.xml><?xml version="1.0" encoding="utf-8"?>
+<p:sld xmlns:a="http://schemas.openxmlformats.org/drawingml/2006/main" xmlns:r="http://schemas.openxmlformats.org/officeDocument/2006/relationships" xmlns:p="http://schemas.openxmlformats.org/presentationml/2006/main">
+  <p:cSld>
+    <p:spTree>
+      <p:nvGrpSpPr>
+        <p:cNvPr id="1" name=""/>
+        <p:cNvGrpSpPr/>
+        <p:nvPr/>
+      </p:nvGrpSpPr>
+      <p:grpSpPr>
+        <a:xfrm>
+          <a:off x="0" y="0"/>
+          <a:ext cx="0" cy="0"/>
+          <a:chOff x="0" y="0"/>
+          <a:chExt cx="0" cy="0"/>
+        </a:xfrm>
+      </p:grpSpPr>
+      <p:sp>
+        <p:nvSpPr>
+          <p:cNvPr id="2" name="Title 1">
+            <a:extLst>
+              <a:ext uri="{FF2B5EF4-FFF2-40B4-BE49-F238E27FC236}">
+                <a16:creationId xmlns:a16="http://schemas.microsoft.com/office/drawing/2014/main" id="{F1CB30D0-D052-EC03-3C25-35C106AA1077}"/>
+              </a:ext>
+            </a:extLst>
+          </p:cNvPr>
+          <p:cNvSpPr>
+            <a:spLocks noGrp="1"/>
+          </p:cNvSpPr>
+          <p:nvPr>
+            <p:ph type="title"/>
+          </p:nvPr>
+        </p:nvSpPr>
+        <p:spPr/>
+        <p:txBody>
+          <a:bodyPr/>
+          <a:lstStyle/>
+          <a:p>
+            <a:r>
+              <a:rPr lang="pt-BR" dirty="0"/>
+              <a:t>Matriz de confusão</a:t>
+            </a:r>
+            <a:endParaRPr lang="en-US" dirty="0"/>
+          </a:p>
+        </p:txBody>
+      </p:sp>
+      <p:pic>
+        <p:nvPicPr>
+          <p:cNvPr id="2050" name="Picture 2" descr="Validate me Constructive criticism permitted – @gallusrostromegalus on  Tumblr">
+            <a:extLst>
+              <a:ext uri="{FF2B5EF4-FFF2-40B4-BE49-F238E27FC236}">
+                <a16:creationId xmlns:a16="http://schemas.microsoft.com/office/drawing/2014/main" id="{A9C68C0F-3A42-8D60-0B8A-979695E4072E}"/>
+              </a:ext>
+            </a:extLst>
+          </p:cNvPr>
+          <p:cNvPicPr>
+            <a:picLocks noChangeAspect="1" noChangeArrowheads="1"/>
+          </p:cNvPicPr>
+          <p:nvPr/>
+        </p:nvPicPr>
+        <p:blipFill>
+          <a:blip r:embed="rId2">
+            <a:extLst>
+              <a:ext uri="{28A0092B-C50C-407E-A947-70E740481C1C}">
+                <a14:useLocalDpi xmlns:a14="http://schemas.microsoft.com/office/drawing/2010/main" val="0"/>
+              </a:ext>
+            </a:extLst>
+          </a:blip>
+          <a:srcRect/>
+          <a:stretch>
+            <a:fillRect/>
+          </a:stretch>
+        </p:blipFill>
+        <p:spPr bwMode="auto">
+          <a:xfrm>
+            <a:off x="4199561" y="1690688"/>
+            <a:ext cx="5635002" cy="5167312"/>
+          </a:xfrm>
+          <a:prstGeom prst="rect">
+            <a:avLst/>
+          </a:prstGeom>
+          <a:noFill/>
+          <a:extLst>
+            <a:ext uri="{909E8E84-426E-40DD-AFC4-6F175D3DCCD1}">
+              <a14:hiddenFill xmlns:a14="http://schemas.microsoft.com/office/drawing/2010/main">
+                <a:solidFill>
+                  <a:srgbClr val="FFFFFF"/>
+                </a:solidFill>
+              </a14:hiddenFill>
+            </a:ext>
+          </a:extLst>
+        </p:spPr>
+      </p:pic>
+    </p:spTree>
+    <p:extLst>
+      <p:ext uri="{BB962C8B-B14F-4D97-AF65-F5344CB8AC3E}">
+        <p14:creationId xmlns:p14="http://schemas.microsoft.com/office/powerpoint/2010/main" val="2456464638"/>
+      </p:ext>
+    </p:extLst>
+  </p:cSld>
+  <p:clrMapOvr>
+    <a:masterClrMapping/>
+  </p:clrMapOvr>
+</p:sld>
+</file>
+
+<file path=ppt/slides/slide36.xml><?xml version="1.0" encoding="utf-8"?>
+<p:sld xmlns:a="http://schemas.openxmlformats.org/drawingml/2006/main" xmlns:r="http://schemas.openxmlformats.org/officeDocument/2006/relationships" xmlns:p="http://schemas.openxmlformats.org/presentationml/2006/main">
+  <p:cSld>
+    <p:spTree>
+      <p:nvGrpSpPr>
+        <p:cNvPr id="1" name=""/>
+        <p:cNvGrpSpPr/>
+        <p:nvPr/>
+      </p:nvGrpSpPr>
+      <p:grpSpPr>
+        <a:xfrm>
+          <a:off x="0" y="0"/>
+          <a:ext cx="0" cy="0"/>
+          <a:chOff x="0" y="0"/>
+          <a:chExt cx="0" cy="0"/>
+        </a:xfrm>
+      </p:grpSpPr>
+      <p:sp>
+        <p:nvSpPr>
+          <p:cNvPr id="4" name="Título 1">
+            <a:extLst>
+              <a:ext uri="{FF2B5EF4-FFF2-40B4-BE49-F238E27FC236}">
+                <a16:creationId xmlns:a16="http://schemas.microsoft.com/office/drawing/2014/main" id="{32666AC8-2E17-4DB4-B0F5-60C640CCFD2E}"/>
+              </a:ext>
+            </a:extLst>
+          </p:cNvPr>
+          <p:cNvSpPr txBox="1">
+            <a:spLocks/>
+          </p:cNvSpPr>
+          <p:nvPr/>
+        </p:nvSpPr>
+        <p:spPr>
+          <a:xfrm>
+            <a:off x="1431533" y="2720526"/>
+            <a:ext cx="9144000" cy="1029541"/>
+          </a:xfrm>
+          <a:prstGeom prst="rect">
+            <a:avLst/>
+          </a:prstGeom>
+        </p:spPr>
+        <p:txBody>
+          <a:bodyPr vert="horz" lIns="91440" tIns="45720" rIns="91440" bIns="45720" rtlCol="0" anchor="ctr">
+            <a:normAutofit/>
+          </a:bodyPr>
+          <a:lstStyle>
+            <a:lvl1pPr algn="l" defTabSz="914400" rtl="0" eaLnBrk="1" latinLnBrk="0" hangingPunct="1">
+              <a:lnSpc>
+                <a:spcPct val="90000"/>
+              </a:lnSpc>
+              <a:spcBef>
+                <a:spcPct val="0"/>
+              </a:spcBef>
+              <a:buNone/>
+              <a:defRPr sz="4400" kern="1200">
+                <a:solidFill>
+                  <a:schemeClr val="tx1"/>
+                </a:solidFill>
+                <a:latin typeface="+mj-lt"/>
+                <a:ea typeface="+mj-ea"/>
+                <a:cs typeface="+mj-cs"/>
+              </a:defRPr>
+            </a:lvl1pPr>
+          </a:lstStyle>
+          <a:p>
+            <a:pPr algn="ctr"/>
+            <a:r>
+              <a:rPr lang="pt-BR" sz="6600" dirty="0"/>
+              <a:t>Perguntas?</a:t>
+            </a:r>
+            <a:endParaRPr lang="pt-BR" sz="6600" b="1" i="1" dirty="0"/>
+          </a:p>
+        </p:txBody>
+      </p:sp>
+    </p:spTree>
+    <p:extLst>
+      <p:ext uri="{BB962C8B-B14F-4D97-AF65-F5344CB8AC3E}">
+        <p14:creationId xmlns:p14="http://schemas.microsoft.com/office/powerpoint/2010/main" val="3773005660"/>
+      </p:ext>
+    </p:extLst>
+  </p:cSld>
+  <p:clrMapOvr>
+    <a:masterClrMapping/>
+  </p:clrMapOvr>
+</p:sld>
+</file>
+
+<file path=ppt/slides/slide37.xml><?xml version="1.0" encoding="utf-8"?>
+<p:sld xmlns:a="http://schemas.openxmlformats.org/drawingml/2006/main" xmlns:r="http://schemas.openxmlformats.org/officeDocument/2006/relationships" xmlns:p="http://schemas.openxmlformats.org/presentationml/2006/main">
+  <p:cSld>
+    <p:spTree>
+      <p:nvGrpSpPr>
+        <p:cNvPr id="1" name=""/>
+        <p:cNvGrpSpPr/>
+        <p:nvPr/>
+      </p:nvGrpSpPr>
+      <p:grpSpPr>
+        <a:xfrm>
+          <a:off x="0" y="0"/>
+          <a:ext cx="0" cy="0"/>
+          <a:chOff x="0" y="0"/>
+          <a:chExt cx="0" cy="0"/>
+        </a:xfrm>
+      </p:grpSpPr>
+      <p:sp>
+        <p:nvSpPr>
+          <p:cNvPr id="4" name="Título 1">
+            <a:extLst>
+              <a:ext uri="{FF2B5EF4-FFF2-40B4-BE49-F238E27FC236}">
+                <a16:creationId xmlns:a16="http://schemas.microsoft.com/office/drawing/2014/main" id="{32666AC8-2E17-4DB4-B0F5-60C640CCFD2E}"/>
+              </a:ext>
+            </a:extLst>
+          </p:cNvPr>
+          <p:cNvSpPr txBox="1">
+            <a:spLocks/>
+          </p:cNvSpPr>
+          <p:nvPr/>
+        </p:nvSpPr>
+        <p:spPr>
+          <a:xfrm>
+            <a:off x="1431533" y="2720526"/>
+            <a:ext cx="9144000" cy="1029541"/>
+          </a:xfrm>
+          <a:prstGeom prst="rect">
+            <a:avLst/>
+          </a:prstGeom>
+        </p:spPr>
+        <p:txBody>
+          <a:bodyPr vert="horz" lIns="91440" tIns="45720" rIns="91440" bIns="45720" rtlCol="0" anchor="ctr">
+            <a:normAutofit/>
+          </a:bodyPr>
+          <a:lstStyle>
+            <a:lvl1pPr algn="l" defTabSz="914400" rtl="0" eaLnBrk="1" latinLnBrk="0" hangingPunct="1">
+              <a:lnSpc>
+                <a:spcPct val="90000"/>
+              </a:lnSpc>
+              <a:spcBef>
+                <a:spcPct val="0"/>
+              </a:spcBef>
+              <a:buNone/>
+              <a:defRPr sz="4400" kern="1200">
+                <a:solidFill>
+                  <a:schemeClr val="tx1"/>
+                </a:solidFill>
+                <a:latin typeface="+mj-lt"/>
+                <a:ea typeface="+mj-ea"/>
+                <a:cs typeface="+mj-cs"/>
+              </a:defRPr>
+            </a:lvl1pPr>
+          </a:lstStyle>
+          <a:p>
+            <a:pPr algn="ctr"/>
+            <a:r>
+              <a:rPr lang="pt-BR" sz="6600" dirty="0"/>
+              <a:t>Obrigado!</a:t>
+            </a:r>
+            <a:endParaRPr lang="pt-BR" sz="6600" b="1" i="1" dirty="0"/>
+          </a:p>
+        </p:txBody>
+      </p:sp>
+    </p:spTree>
+    <p:extLst>
+      <p:ext uri="{BB962C8B-B14F-4D97-AF65-F5344CB8AC3E}">
+        <p14:creationId xmlns:p14="http://schemas.microsoft.com/office/powerpoint/2010/main" val="2655704619"/>
+      </p:ext>
+    </p:extLst>
+  </p:cSld>
+  <p:clrMapOvr>
+    <a:masterClrMapping/>
+  </p:clrMapOvr>
+</p:sld>
+</file>
+
 <file path=ppt/slides/slide4.xml><?xml version="1.0" encoding="utf-8"?>
 <p:sld xmlns:a="http://schemas.openxmlformats.org/drawingml/2006/main" xmlns:r="http://schemas.openxmlformats.org/officeDocument/2006/relationships" xmlns:p="http://schemas.openxmlformats.org/presentationml/2006/main">
   <p:cSld>
@@ -14714,7 +21268,7 @@
           <p:cNvPr id="2" name="Picture 2">
             <a:extLst>
               <a:ext uri="{FF2B5EF4-FFF2-40B4-BE49-F238E27FC236}">
-                <a16:creationId xmlns:a16="http://schemas.microsoft.com/office/drawing/2014/main" xmlns="" id="{A9D184C6-ECA9-05BF-F6B4-C0965441E4E9}"/>
+                <a16:creationId xmlns:a16="http://schemas.microsoft.com/office/drawing/2014/main" id="{A9D184C6-ECA9-05BF-F6B4-C0965441E4E9}"/>
               </a:ext>
             </a:extLst>
           </p:cNvPr>
@@ -14789,7 +21343,7 @@
           <p:cNvPr id="1026" name="Picture 2" descr="but it happened 😂 #DeepLearning #AI #MachineLearning">
             <a:extLst>
               <a:ext uri="{FF2B5EF4-FFF2-40B4-BE49-F238E27FC236}">
-                <a16:creationId xmlns:a16="http://schemas.microsoft.com/office/drawing/2014/main" xmlns="" id="{F25FF98E-22C0-F45E-2254-540617F2FD27}"/>
+                <a16:creationId xmlns:a16="http://schemas.microsoft.com/office/drawing/2014/main" id="{F25FF98E-22C0-F45E-2254-540617F2FD27}"/>
               </a:ext>
             </a:extLst>
           </p:cNvPr>
@@ -14866,7 +21420,7 @@
           <p:cNvPr id="2" name="Title 1">
             <a:extLst>
               <a:ext uri="{FF2B5EF4-FFF2-40B4-BE49-F238E27FC236}">
-                <a16:creationId xmlns:a16="http://schemas.microsoft.com/office/drawing/2014/main" xmlns="" id="{C2C95A22-E872-4069-E235-358A1FCDD284}"/>
+                <a16:creationId xmlns:a16="http://schemas.microsoft.com/office/drawing/2014/main" id="{C2C95A22-E872-4069-E235-358A1FCDD284}"/>
               </a:ext>
             </a:extLst>
           </p:cNvPr>
@@ -14897,7 +21451,7 @@
               <p:cNvPr id="3" name="Content Placeholder 2">
                 <a:extLst>
                   <a:ext uri="{FF2B5EF4-FFF2-40B4-BE49-F238E27FC236}">
-                    <a16:creationId xmlns:a16="http://schemas.microsoft.com/office/drawing/2014/main" xmlns="" id="{76965F31-6E51-4FAB-4852-DECB11BED972}"/>
+                    <a16:creationId xmlns:a16="http://schemas.microsoft.com/office/drawing/2014/main" id="{76965F31-6E51-4FAB-4852-DECB11BED972}"/>
                   </a:ext>
                 </a:extLst>
               </p:cNvPr>
@@ -15151,7 +21705,7 @@
         <p:cNvPr id="1" name="">
           <a:extLst>
             <a:ext uri="{FF2B5EF4-FFF2-40B4-BE49-F238E27FC236}">
-              <a16:creationId xmlns:a16="http://schemas.microsoft.com/office/drawing/2014/main" xmlns="" id="{183AE076-4457-7BD3-2388-70AAD71222AC}"/>
+              <a16:creationId xmlns:a16="http://schemas.microsoft.com/office/drawing/2014/main" id="{183AE076-4457-7BD3-2388-70AAD71222AC}"/>
             </a:ext>
           </a:extLst>
         </p:cNvPr>
@@ -15171,7 +21725,7 @@
           <p:cNvPr id="2" name="Title 1">
             <a:extLst>
               <a:ext uri="{FF2B5EF4-FFF2-40B4-BE49-F238E27FC236}">
-                <a16:creationId xmlns:a16="http://schemas.microsoft.com/office/drawing/2014/main" xmlns="" id="{C39F8340-2935-1CC3-CE87-3E1A76A73E3F}"/>
+                <a16:creationId xmlns:a16="http://schemas.microsoft.com/office/drawing/2014/main" id="{C39F8340-2935-1CC3-CE87-3E1A76A73E3F}"/>
               </a:ext>
             </a:extLst>
           </p:cNvPr>
@@ -15200,7 +21754,7 @@
           <p:cNvPr id="3" name="Content Placeholder 2">
             <a:extLst>
               <a:ext uri="{FF2B5EF4-FFF2-40B4-BE49-F238E27FC236}">
-                <a16:creationId xmlns:a16="http://schemas.microsoft.com/office/drawing/2014/main" xmlns="" id="{310FC0EC-BE21-C1F6-BD0D-5113525C20D7}"/>
+                <a16:creationId xmlns:a16="http://schemas.microsoft.com/office/drawing/2014/main" id="{310FC0EC-BE21-C1F6-BD0D-5113525C20D7}"/>
               </a:ext>
             </a:extLst>
           </p:cNvPr>
@@ -15394,7 +21948,7 @@
           <p:cNvPr id="2" name="Title 1">
             <a:extLst>
               <a:ext uri="{FF2B5EF4-FFF2-40B4-BE49-F238E27FC236}">
-                <a16:creationId xmlns:a16="http://schemas.microsoft.com/office/drawing/2014/main" xmlns="" id="{341127B6-6972-D992-E732-0F4C9D9283E8}"/>
+                <a16:creationId xmlns:a16="http://schemas.microsoft.com/office/drawing/2014/main" id="{341127B6-6972-D992-E732-0F4C9D9283E8}"/>
               </a:ext>
             </a:extLst>
           </p:cNvPr>
@@ -15423,7 +21977,7 @@
           <p:cNvPr id="3" name="Content Placeholder 2">
             <a:extLst>
               <a:ext uri="{FF2B5EF4-FFF2-40B4-BE49-F238E27FC236}">
-                <a16:creationId xmlns:a16="http://schemas.microsoft.com/office/drawing/2014/main" xmlns="" id="{0F650875-3EEC-71D0-1DC4-489808F8210D}"/>
+                <a16:creationId xmlns:a16="http://schemas.microsoft.com/office/drawing/2014/main" id="{0F650875-3EEC-71D0-1DC4-489808F8210D}"/>
               </a:ext>
             </a:extLst>
           </p:cNvPr>
@@ -15632,7 +22186,7 @@
           <p:cNvPr id="3" name="Content Placeholder 2">
             <a:extLst>
               <a:ext uri="{FF2B5EF4-FFF2-40B4-BE49-F238E27FC236}">
-                <a16:creationId xmlns:a16="http://schemas.microsoft.com/office/drawing/2014/main" xmlns="" id="{D30302BD-A868-44A9-D6B7-B33026A62A80}"/>
+                <a16:creationId xmlns:a16="http://schemas.microsoft.com/office/drawing/2014/main" id="{D30302BD-A868-44A9-D6B7-B33026A62A80}"/>
               </a:ext>
             </a:extLst>
           </p:cNvPr>
